--- a/all/ExploringCSConceptsViaACSLCompetitions_all.pptx
+++ b/all/ExploringCSConceptsViaACSLCompetitions_all.pptx
@@ -5,7 +5,7 @@
     <p:sldMasterId id="2147483648" r:id="rId1"/>
   </p:sldMasterIdLst>
   <p:notesMasterIdLst>
-    <p:notesMasterId r:id="rId77"/>
+    <p:notesMasterId r:id="rId81"/>
   </p:notesMasterIdLst>
   <p:sldIdLst>
     <p:sldId id="256" r:id="rId2"/>
@@ -83,6 +83,10 @@
     <p:sldId id="340" r:id="rId74"/>
     <p:sldId id="341" r:id="rId75"/>
     <p:sldId id="342" r:id="rId76"/>
+    <p:sldId id="343" r:id="rId77"/>
+    <p:sldId id="344" r:id="rId78"/>
+    <p:sldId id="345" r:id="rId79"/>
+    <p:sldId id="347" r:id="rId80"/>
   </p:sldIdLst>
   <p:sldSz cx="12192000" cy="6858000"/>
   <p:notesSz cx="6858000" cy="9144000"/>
@@ -460,7 +464,7 @@
           <a:p>
             <a:fld id="{15653688-98A8-4F3B-A740-8E6568AE1BCB}" type="datetimeFigureOut">
               <a:rPr lang="en-US" smtClean="0"/>
-              <a:t>2/19/2026</a:t>
+              <a:t>2/25/2026</a:t>
             </a:fld>
             <a:endParaRPr lang="en-US"/>
           </a:p>
@@ -1042,8 +1046,8 @@
         </p:nvSpPr>
         <p:spPr/>
       </p:sp>
-      <mc:AlternateContent xmlns:mc="http://schemas.openxmlformats.org/markup-compatibility/2006">
-        <mc:Choice xmlns:a14="http://schemas.microsoft.com/office/drawing/2010/main" Requires="a14">
+      <mc:AlternateContent xmlns:mc="http://schemas.openxmlformats.org/markup-compatibility/2006" xmlns:a14="http://schemas.microsoft.com/office/drawing/2010/main">
+        <mc:Choice Requires="a14">
           <p:sp>
             <p:nvSpPr>
               <p:cNvPr id="3" name="Notes Placeholder 2"/>
@@ -1378,7 +1382,7 @@
             </p:txBody>
           </p:sp>
         </mc:Choice>
-        <mc:Fallback>
+        <mc:Fallback xmlns="">
           <p:sp>
             <p:nvSpPr>
               <p:cNvPr id="3" name="Notes Placeholder 2"/>
@@ -1483,6 +1487,506 @@
 </p:notes>
 </file>
 
+<file path=ppt/notesSlides/notesSlide5.xml><?xml version="1.0" encoding="utf-8"?>
+<p:notes xmlns:a="http://schemas.openxmlformats.org/drawingml/2006/main" xmlns:r="http://schemas.openxmlformats.org/officeDocument/2006/relationships" xmlns:p="http://schemas.openxmlformats.org/presentationml/2006/main">
+  <p:cSld>
+    <p:spTree>
+      <p:nvGrpSpPr>
+        <p:cNvPr id="1" name="">
+          <a:extLst>
+            <a:ext uri="{FF2B5EF4-FFF2-40B4-BE49-F238E27FC236}">
+              <a16:creationId xmlns:a16="http://schemas.microsoft.com/office/drawing/2014/main" id="{211A952E-9927-1087-C198-76B6E2095B16}"/>
+            </a:ext>
+          </a:extLst>
+        </p:cNvPr>
+        <p:cNvGrpSpPr/>
+        <p:nvPr/>
+      </p:nvGrpSpPr>
+      <p:grpSpPr>
+        <a:xfrm>
+          <a:off x="0" y="0"/>
+          <a:ext cx="0" cy="0"/>
+          <a:chOff x="0" y="0"/>
+          <a:chExt cx="0" cy="0"/>
+        </a:xfrm>
+      </p:grpSpPr>
+      <p:sp>
+        <p:nvSpPr>
+          <p:cNvPr id="2" name="Slide Image Placeholder 1">
+            <a:extLst>
+              <a:ext uri="{FF2B5EF4-FFF2-40B4-BE49-F238E27FC236}">
+                <a16:creationId xmlns:a16="http://schemas.microsoft.com/office/drawing/2014/main" id="{6C1C7705-C938-649D-740E-28D1AAD8C2CF}"/>
+              </a:ext>
+            </a:extLst>
+          </p:cNvPr>
+          <p:cNvSpPr>
+            <a:spLocks noGrp="1" noRot="1" noChangeAspect="1"/>
+          </p:cNvSpPr>
+          <p:nvPr>
+            <p:ph type="sldImg"/>
+          </p:nvPr>
+        </p:nvSpPr>
+        <p:spPr/>
+      </p:sp>
+      <mc:AlternateContent xmlns:mc="http://schemas.openxmlformats.org/markup-compatibility/2006">
+        <mc:Choice xmlns:a14="http://schemas.microsoft.com/office/drawing/2010/main" Requires="a14">
+          <p:sp>
+            <p:nvSpPr>
+              <p:cNvPr id="3" name="Notes Placeholder 2">
+                <a:extLst>
+                  <a:ext uri="{FF2B5EF4-FFF2-40B4-BE49-F238E27FC236}">
+                    <a16:creationId xmlns:a16="http://schemas.microsoft.com/office/drawing/2014/main" id="{DF9E5F5B-B72E-DD3D-016C-BFF5597DEF1C}"/>
+                  </a:ext>
+                </a:extLst>
+              </p:cNvPr>
+              <p:cNvSpPr>
+                <a:spLocks noGrp="1"/>
+              </p:cNvSpPr>
+              <p:nvPr>
+                <p:ph type="body" idx="1"/>
+              </p:nvPr>
+            </p:nvSpPr>
+            <p:spPr/>
+            <p:txBody>
+              <a:bodyPr/>
+              <a:lstStyle/>
+              <a:p>
+                <a:pPr marL="457200" marR="0" lvl="1" indent="0" algn="l" defTabSz="914400" rtl="0" eaLnBrk="1" fontAlgn="auto" latinLnBrk="0" hangingPunct="1">
+                  <a:lnSpc>
+                    <a:spcPct val="100000"/>
+                  </a:lnSpc>
+                  <a:spcBef>
+                    <a:spcPts val="0"/>
+                  </a:spcBef>
+                  <a:spcAft>
+                    <a:spcPts val="0"/>
+                  </a:spcAft>
+                  <a:buClrTx/>
+                  <a:buSzTx/>
+                  <a:buFontTx/>
+                  <a:buNone/>
+                  <a:tabLst/>
+                  <a:defRPr/>
+                </a:pPr>
+                <a14:m>
+                  <m:oMathPara xmlns:m="http://schemas.openxmlformats.org/officeDocument/2006/math">
+                    <m:oMathParaPr>
+                      <m:jc m:val="centerGroup"/>
+                    </m:oMathParaPr>
+                    <m:oMath xmlns:m="http://schemas.openxmlformats.org/officeDocument/2006/math">
+                      <m:d>
+                        <m:dPr>
+                          <m:ctrlPr>
+                            <a:rPr lang="en-US" b="0" i="1" smtClean="0">
+                              <a:latin typeface="Cambria Math" panose="02040503050406030204" pitchFamily="18" charset="0"/>
+                            </a:rPr>
+                          </m:ctrlPr>
+                        </m:dPr>
+                        <m:e>
+                          <m:r>
+                            <a:rPr lang="en-US" b="0" i="1" smtClean="0">
+                              <a:latin typeface="Cambria Math" panose="02040503050406030204" pitchFamily="18" charset="0"/>
+                            </a:rPr>
+                            <m:t>𝐴</m:t>
+                          </m:r>
+                          <m:r>
+                            <a:rPr lang="en-US" b="0" i="1" smtClean="0">
+                              <a:latin typeface="Cambria Math" panose="02040503050406030204" pitchFamily="18" charset="0"/>
+                            </a:rPr>
+                            <m:t>+</m:t>
+                          </m:r>
+                          <m:r>
+                            <a:rPr lang="en-US" b="0" i="1" smtClean="0">
+                              <a:latin typeface="Cambria Math" panose="02040503050406030204" pitchFamily="18" charset="0"/>
+                            </a:rPr>
+                            <m:t>𝐵</m:t>
+                          </m:r>
+                        </m:e>
+                      </m:d>
+                      <m:r>
+                        <a:rPr lang="en-US" b="0" i="1" smtClean="0">
+                          <a:latin typeface="Cambria Math" panose="02040503050406030204" pitchFamily="18" charset="0"/>
+                        </a:rPr>
+                        <m:t>.</m:t>
+                      </m:r>
+                      <m:d>
+                        <m:dPr>
+                          <m:ctrlPr>
+                            <a:rPr lang="en-US" b="0" i="1" smtClean="0">
+                              <a:latin typeface="Cambria Math" panose="02040503050406030204" pitchFamily="18" charset="0"/>
+                            </a:rPr>
+                          </m:ctrlPr>
+                        </m:dPr>
+                        <m:e>
+                          <m:acc>
+                            <m:accPr>
+                              <m:chr m:val="̅"/>
+                              <m:ctrlPr>
+                                <a:rPr lang="en-US" b="0" i="1" smtClean="0">
+                                  <a:latin typeface="Cambria Math" panose="02040503050406030204" pitchFamily="18" charset="0"/>
+                                </a:rPr>
+                              </m:ctrlPr>
+                            </m:accPr>
+                            <m:e>
+                              <m:r>
+                                <a:rPr lang="en-US" b="0" i="1" smtClean="0">
+                                  <a:latin typeface="Cambria Math" panose="02040503050406030204" pitchFamily="18" charset="0"/>
+                                </a:rPr>
+                                <m:t>𝐴</m:t>
+                              </m:r>
+                            </m:e>
+                          </m:acc>
+                          <m:r>
+                            <a:rPr lang="en-US" b="0" i="1" smtClean="0">
+                              <a:latin typeface="Cambria Math" panose="02040503050406030204" pitchFamily="18" charset="0"/>
+                            </a:rPr>
+                            <m:t>+</m:t>
+                          </m:r>
+                          <m:r>
+                            <a:rPr lang="en-US" b="0" i="1" smtClean="0">
+                              <a:latin typeface="Cambria Math" panose="02040503050406030204" pitchFamily="18" charset="0"/>
+                            </a:rPr>
+                            <m:t>𝐶</m:t>
+                          </m:r>
+                        </m:e>
+                      </m:d>
+                      <m:r>
+                        <a:rPr lang="en-US" b="0" i="1" smtClean="0">
+                          <a:latin typeface="Cambria Math" panose="02040503050406030204" pitchFamily="18" charset="0"/>
+                        </a:rPr>
+                        <m:t>=</m:t>
+                      </m:r>
+                      <m:r>
+                        <a:rPr lang="en-US" b="0" i="1" smtClean="0">
+                          <a:latin typeface="Cambria Math" panose="02040503050406030204" pitchFamily="18" charset="0"/>
+                        </a:rPr>
+                        <m:t>𝐴𝐶</m:t>
+                      </m:r>
+                      <m:r>
+                        <a:rPr lang="en-US" b="0" i="1" smtClean="0">
+                          <a:latin typeface="Cambria Math" panose="02040503050406030204" pitchFamily="18" charset="0"/>
+                        </a:rPr>
+                        <m:t>+</m:t>
+                      </m:r>
+                      <m:acc>
+                        <m:accPr>
+                          <m:chr m:val="̅"/>
+                          <m:ctrlPr>
+                            <a:rPr lang="en-US" b="0" i="1" smtClean="0">
+                              <a:latin typeface="Cambria Math" panose="02040503050406030204" pitchFamily="18" charset="0"/>
+                            </a:rPr>
+                          </m:ctrlPr>
+                        </m:accPr>
+                        <m:e>
+                          <m:r>
+                            <a:rPr lang="en-US" b="0" i="1" smtClean="0">
+                              <a:latin typeface="Cambria Math" panose="02040503050406030204" pitchFamily="18" charset="0"/>
+                            </a:rPr>
+                            <m:t>𝐴</m:t>
+                          </m:r>
+                        </m:e>
+                      </m:acc>
+                      <m:r>
+                        <m:rPr>
+                          <m:sty m:val="p"/>
+                        </m:rPr>
+                        <a:rPr lang="en-US" b="0" i="0" smtClean="0">
+                          <a:latin typeface="Cambria Math" panose="02040503050406030204" pitchFamily="18" charset="0"/>
+                        </a:rPr>
+                        <m:t>B</m:t>
+                      </m:r>
+                      <m:r>
+                        <a:rPr lang="en-US" b="0" i="0" smtClean="0">
+                          <a:latin typeface="Cambria Math" panose="02040503050406030204" pitchFamily="18" charset="0"/>
+                        </a:rPr>
+                        <m:t> </m:t>
+                      </m:r>
+                    </m:oMath>
+                    <m:oMath xmlns:m="http://schemas.openxmlformats.org/officeDocument/2006/math">
+                      <m:r>
+                        <a:rPr lang="en-US" b="0" i="1" smtClean="0">
+                          <a:latin typeface="Cambria Math" panose="02040503050406030204" pitchFamily="18" charset="0"/>
+                        </a:rPr>
+                        <m:t>        </m:t>
+                      </m:r>
+                      <m:r>
+                        <a:rPr lang="en-US" b="0" i="1" smtClean="0">
+                          <a:latin typeface="Cambria Math" panose="02040503050406030204" pitchFamily="18" charset="0"/>
+                        </a:rPr>
+                        <m:t>𝐴</m:t>
+                      </m:r>
+                      <m:d>
+                        <m:dPr>
+                          <m:ctrlPr>
+                            <a:rPr lang="en-US" b="0" i="1" smtClean="0">
+                              <a:latin typeface="Cambria Math" panose="02040503050406030204" pitchFamily="18" charset="0"/>
+                            </a:rPr>
+                          </m:ctrlPr>
+                        </m:dPr>
+                        <m:e>
+                          <m:acc>
+                            <m:accPr>
+                              <m:chr m:val="̅"/>
+                              <m:ctrlPr>
+                                <a:rPr lang="en-US" b="0" i="1" smtClean="0">
+                                  <a:latin typeface="Cambria Math" panose="02040503050406030204" pitchFamily="18" charset="0"/>
+                                </a:rPr>
+                              </m:ctrlPr>
+                            </m:accPr>
+                            <m:e>
+                              <m:r>
+                                <a:rPr lang="en-US" b="0" i="1" smtClean="0">
+                                  <a:latin typeface="Cambria Math" panose="02040503050406030204" pitchFamily="18" charset="0"/>
+                                </a:rPr>
+                                <m:t>𝐴</m:t>
+                              </m:r>
+                            </m:e>
+                          </m:acc>
+                          <m:r>
+                            <a:rPr lang="en-US" b="0" i="1" smtClean="0">
+                              <a:latin typeface="Cambria Math" panose="02040503050406030204" pitchFamily="18" charset="0"/>
+                            </a:rPr>
+                            <m:t>+</m:t>
+                          </m:r>
+                          <m:r>
+                            <a:rPr lang="en-US" b="0" i="1" smtClean="0">
+                              <a:latin typeface="Cambria Math" panose="02040503050406030204" pitchFamily="18" charset="0"/>
+                            </a:rPr>
+                            <m:t>𝐵</m:t>
+                          </m:r>
+                          <m:r>
+                            <a:rPr lang="en-US" b="0" i="1" smtClean="0">
+                              <a:latin typeface="Cambria Math" panose="02040503050406030204" pitchFamily="18" charset="0"/>
+                            </a:rPr>
+                            <m:t> </m:t>
+                          </m:r>
+                        </m:e>
+                      </m:d>
+                      <m:r>
+                        <a:rPr lang="en-US" b="0" i="1" smtClean="0">
+                          <a:latin typeface="Cambria Math" panose="02040503050406030204" pitchFamily="18" charset="0"/>
+                        </a:rPr>
+                        <m:t>=</m:t>
+                      </m:r>
+                      <m:r>
+                        <a:rPr lang="en-US" b="0" i="1" smtClean="0">
+                          <a:latin typeface="Cambria Math" panose="02040503050406030204" pitchFamily="18" charset="0"/>
+                        </a:rPr>
+                        <m:t>𝐴</m:t>
+                      </m:r>
+                      <m:r>
+                        <a:rPr lang="en-US" b="0" i="1" smtClean="0">
+                          <a:latin typeface="Cambria Math" panose="02040503050406030204" pitchFamily="18" charset="0"/>
+                        </a:rPr>
+                        <m:t>.</m:t>
+                      </m:r>
+                      <m:r>
+                        <a:rPr lang="en-US" b="0" i="1" smtClean="0">
+                          <a:latin typeface="Cambria Math" panose="02040503050406030204" pitchFamily="18" charset="0"/>
+                        </a:rPr>
+                        <m:t>𝐵</m:t>
+                      </m:r>
+                    </m:oMath>
+                  </m:oMathPara>
+                </a14:m>
+                <a:endParaRPr lang="en-US" b="0" dirty="0"/>
+              </a:p>
+              <a:p>
+                <a:pPr lvl="1"/>
+                <a14:m>
+                  <m:oMathPara xmlns:m="http://schemas.openxmlformats.org/officeDocument/2006/math">
+                    <m:oMathParaPr>
+                      <m:jc m:val="centerGroup"/>
+                    </m:oMathParaPr>
+                    <m:oMath xmlns:m="http://schemas.openxmlformats.org/officeDocument/2006/math">
+                      <m:r>
+                        <a:rPr lang="en-US" b="0" i="1" smtClean="0">
+                          <a:latin typeface="Cambria Math" panose="02040503050406030204" pitchFamily="18" charset="0"/>
+                        </a:rPr>
+                        <m:t>𝐴</m:t>
+                      </m:r>
+                      <m:r>
+                        <a:rPr lang="en-US" b="0" i="1" smtClean="0">
+                          <a:latin typeface="Cambria Math" panose="02040503050406030204" pitchFamily="18" charset="0"/>
+                        </a:rPr>
+                        <m:t>+</m:t>
+                      </m:r>
+                      <m:acc>
+                        <m:accPr>
+                          <m:chr m:val="̅"/>
+                          <m:ctrlPr>
+                            <a:rPr lang="en-US" b="0" i="1" smtClean="0">
+                              <a:latin typeface="Cambria Math" panose="02040503050406030204" pitchFamily="18" charset="0"/>
+                            </a:rPr>
+                          </m:ctrlPr>
+                        </m:accPr>
+                        <m:e>
+                          <m:r>
+                            <a:rPr lang="en-US" b="0" i="1" smtClean="0">
+                              <a:latin typeface="Cambria Math" panose="02040503050406030204" pitchFamily="18" charset="0"/>
+                            </a:rPr>
+                            <m:t>𝐴</m:t>
+                          </m:r>
+                        </m:e>
+                      </m:acc>
+                      <m:r>
+                        <a:rPr lang="en-US" b="0" i="1" smtClean="0">
+                          <a:latin typeface="Cambria Math" panose="02040503050406030204" pitchFamily="18" charset="0"/>
+                        </a:rPr>
+                        <m:t>𝐵</m:t>
+                      </m:r>
+                      <m:r>
+                        <a:rPr lang="en-US" b="0" i="1" smtClean="0">
+                          <a:latin typeface="Cambria Math" panose="02040503050406030204" pitchFamily="18" charset="0"/>
+                        </a:rPr>
+                        <m:t>=</m:t>
+                      </m:r>
+                      <m:r>
+                        <a:rPr lang="en-US" b="0" i="1" smtClean="0">
+                          <a:latin typeface="Cambria Math" panose="02040503050406030204" pitchFamily="18" charset="0"/>
+                        </a:rPr>
+                        <m:t>𝐴</m:t>
+                      </m:r>
+                      <m:r>
+                        <a:rPr lang="en-US" b="0" i="1" smtClean="0">
+                          <a:latin typeface="Cambria Math" panose="02040503050406030204" pitchFamily="18" charset="0"/>
+                        </a:rPr>
+                        <m:t>+</m:t>
+                      </m:r>
+                      <m:r>
+                        <a:rPr lang="en-US" b="0" i="1" smtClean="0">
+                          <a:latin typeface="Cambria Math" panose="02040503050406030204" pitchFamily="18" charset="0"/>
+                        </a:rPr>
+                        <m:t>𝐵</m:t>
+                      </m:r>
+                    </m:oMath>
+                  </m:oMathPara>
+                </a14:m>
+                <a:endParaRPr lang="en-US" b="0" dirty="0"/>
+              </a:p>
+              <a:p>
+                <a:endParaRPr lang="en-US" dirty="0"/>
+              </a:p>
+            </p:txBody>
+          </p:sp>
+        </mc:Choice>
+        <mc:Fallback>
+          <p:sp>
+            <p:nvSpPr>
+              <p:cNvPr id="3" name="Notes Placeholder 2">
+                <a:extLst>
+                  <a:ext uri="{FF2B5EF4-FFF2-40B4-BE49-F238E27FC236}">
+                    <a16:creationId xmlns:a16="http://schemas.microsoft.com/office/drawing/2014/main" id="{DF9E5F5B-B72E-DD3D-016C-BFF5597DEF1C}"/>
+                  </a:ext>
+                </a:extLst>
+              </p:cNvPr>
+              <p:cNvSpPr>
+                <a:spLocks noGrp="1"/>
+              </p:cNvSpPr>
+              <p:nvPr>
+                <p:ph type="body" idx="1"/>
+              </p:nvPr>
+            </p:nvSpPr>
+            <p:spPr/>
+            <p:txBody>
+              <a:bodyPr/>
+              <a:lstStyle/>
+              <a:p>
+                <a:pPr marL="457200" marR="0" lvl="1" indent="0" algn="l" defTabSz="914400" rtl="0" eaLnBrk="1" fontAlgn="auto" latinLnBrk="0" hangingPunct="1">
+                  <a:lnSpc>
+                    <a:spcPct val="100000"/>
+                  </a:lnSpc>
+                  <a:spcBef>
+                    <a:spcPts val="0"/>
+                  </a:spcBef>
+                  <a:spcAft>
+                    <a:spcPts val="0"/>
+                  </a:spcAft>
+                  <a:buClrTx/>
+                  <a:buSzTx/>
+                  <a:buFontTx/>
+                  <a:buNone/>
+                  <a:tabLst/>
+                  <a:defRPr/>
+                </a:pPr>
+                <a:r>
+                  <a:rPr lang="en-US" b="0" i="0">
+                    <a:latin typeface="Cambria Math" panose="02040503050406030204" pitchFamily="18" charset="0"/>
+                  </a:rPr>
+                  <a:t>(𝐴+𝐵).(𝐴 ̅+𝐶)=𝐴𝐶+𝐴 ̅B </a:t>
+                </a:r>
+                <a:br>
+                  <a:rPr lang="en-US" b="0" i="0" dirty="0">
+                    <a:latin typeface="Cambria Math" panose="02040503050406030204" pitchFamily="18" charset="0"/>
+                  </a:rPr>
+                </a:br>
+                <a:r>
+                  <a:rPr lang="en-US" b="0" i="0">
+                    <a:latin typeface="Cambria Math" panose="02040503050406030204" pitchFamily="18" charset="0"/>
+                  </a:rPr>
+                  <a:t>        𝐴(𝐴 ̅+𝐵 )=𝐴.𝐵</a:t>
+                </a:r>
+                <a:endParaRPr lang="en-US" b="0" dirty="0"/>
+              </a:p>
+              <a:p>
+                <a:pPr lvl="1"/>
+                <a:r>
+                  <a:rPr lang="en-US" b="0" i="0">
+                    <a:latin typeface="Cambria Math" panose="02040503050406030204" pitchFamily="18" charset="0"/>
+                  </a:rPr>
+                  <a:t>𝐴+𝐴 ̅𝐵=𝐴+𝐵</a:t>
+                </a:r>
+                <a:endParaRPr lang="en-US" b="0" dirty="0"/>
+              </a:p>
+              <a:p>
+                <a:endParaRPr lang="en-US" dirty="0"/>
+              </a:p>
+            </p:txBody>
+          </p:sp>
+        </mc:Fallback>
+      </mc:AlternateContent>
+      <p:sp>
+        <p:nvSpPr>
+          <p:cNvPr id="4" name="Slide Number Placeholder 3">
+            <a:extLst>
+              <a:ext uri="{FF2B5EF4-FFF2-40B4-BE49-F238E27FC236}">
+                <a16:creationId xmlns:a16="http://schemas.microsoft.com/office/drawing/2014/main" id="{AC54519E-BC79-07F8-39D4-1C6BABAB4CC6}"/>
+              </a:ext>
+            </a:extLst>
+          </p:cNvPr>
+          <p:cNvSpPr>
+            <a:spLocks noGrp="1"/>
+          </p:cNvSpPr>
+          <p:nvPr>
+            <p:ph type="sldNum" sz="quarter" idx="5"/>
+          </p:nvPr>
+        </p:nvSpPr>
+        <p:spPr/>
+        <p:txBody>
+          <a:bodyPr/>
+          <a:lstStyle/>
+          <a:p>
+            <a:fld id="{24216765-C83A-46F1-AE07-8E4F9D1EDA94}" type="slidenum">
+              <a:rPr lang="en-US" smtClean="0"/>
+              <a:t>76</a:t>
+            </a:fld>
+            <a:endParaRPr lang="en-US"/>
+          </a:p>
+        </p:txBody>
+      </p:sp>
+    </p:spTree>
+    <p:extLst>
+      <p:ext uri="{BB962C8B-B14F-4D97-AF65-F5344CB8AC3E}">
+        <p14:creationId xmlns:p14="http://schemas.microsoft.com/office/powerpoint/2010/main" val="3300288030"/>
+      </p:ext>
+    </p:extLst>
+  </p:cSld>
+  <p:clrMapOvr>
+    <a:masterClrMapping/>
+  </p:clrMapOvr>
+</p:notes>
+</file>
+
 <file path=ppt/slideLayouts/slideLayout1.xml><?xml version="1.0" encoding="utf-8"?>
 <p:sldLayout xmlns:a="http://schemas.openxmlformats.org/drawingml/2006/main" xmlns:r="http://schemas.openxmlformats.org/officeDocument/2006/relationships" xmlns:p="http://schemas.openxmlformats.org/presentationml/2006/main" type="title" preserve="1">
   <p:cSld name="Title Slide">
@@ -1630,7 +2134,7 @@
           <a:p>
             <a:fld id="{20CB266D-A331-4A79-AB46-FEF40B16CF9B}" type="datetimeFigureOut">
               <a:rPr lang="en-US" smtClean="0"/>
-              <a:t>2/19/2026</a:t>
+              <a:t>2/25/2026</a:t>
             </a:fld>
             <a:endParaRPr lang="en-US"/>
           </a:p>
@@ -1828,7 +2332,7 @@
           <a:p>
             <a:fld id="{20CB266D-A331-4A79-AB46-FEF40B16CF9B}" type="datetimeFigureOut">
               <a:rPr lang="en-US" smtClean="0"/>
-              <a:t>2/19/2026</a:t>
+              <a:t>2/25/2026</a:t>
             </a:fld>
             <a:endParaRPr lang="en-US"/>
           </a:p>
@@ -2036,7 +2540,7 @@
           <a:p>
             <a:fld id="{20CB266D-A331-4A79-AB46-FEF40B16CF9B}" type="datetimeFigureOut">
               <a:rPr lang="en-US" smtClean="0"/>
-              <a:t>2/19/2026</a:t>
+              <a:t>2/25/2026</a:t>
             </a:fld>
             <a:endParaRPr lang="en-US"/>
           </a:p>
@@ -2234,7 +2738,7 @@
           <a:p>
             <a:fld id="{20CB266D-A331-4A79-AB46-FEF40B16CF9B}" type="datetimeFigureOut">
               <a:rPr lang="en-US" smtClean="0"/>
-              <a:t>2/19/2026</a:t>
+              <a:t>2/25/2026</a:t>
             </a:fld>
             <a:endParaRPr lang="en-US"/>
           </a:p>
@@ -2509,7 +3013,7 @@
           <a:p>
             <a:fld id="{20CB266D-A331-4A79-AB46-FEF40B16CF9B}" type="datetimeFigureOut">
               <a:rPr lang="en-US" smtClean="0"/>
-              <a:t>2/19/2026</a:t>
+              <a:t>2/25/2026</a:t>
             </a:fld>
             <a:endParaRPr lang="en-US"/>
           </a:p>
@@ -2774,7 +3278,7 @@
           <a:p>
             <a:fld id="{20CB266D-A331-4A79-AB46-FEF40B16CF9B}" type="datetimeFigureOut">
               <a:rPr lang="en-US" smtClean="0"/>
-              <a:t>2/19/2026</a:t>
+              <a:t>2/25/2026</a:t>
             </a:fld>
             <a:endParaRPr lang="en-US"/>
           </a:p>
@@ -3186,7 +3690,7 @@
           <a:p>
             <a:fld id="{20CB266D-A331-4A79-AB46-FEF40B16CF9B}" type="datetimeFigureOut">
               <a:rPr lang="en-US" smtClean="0"/>
-              <a:t>2/19/2026</a:t>
+              <a:t>2/25/2026</a:t>
             </a:fld>
             <a:endParaRPr lang="en-US"/>
           </a:p>
@@ -3327,7 +3831,7 @@
           <a:p>
             <a:fld id="{20CB266D-A331-4A79-AB46-FEF40B16CF9B}" type="datetimeFigureOut">
               <a:rPr lang="en-US" smtClean="0"/>
-              <a:t>2/19/2026</a:t>
+              <a:t>2/25/2026</a:t>
             </a:fld>
             <a:endParaRPr lang="en-US"/>
           </a:p>
@@ -3440,7 +3944,7 @@
           <a:p>
             <a:fld id="{20CB266D-A331-4A79-AB46-FEF40B16CF9B}" type="datetimeFigureOut">
               <a:rPr lang="en-US" smtClean="0"/>
-              <a:t>2/19/2026</a:t>
+              <a:t>2/25/2026</a:t>
             </a:fld>
             <a:endParaRPr lang="en-US"/>
           </a:p>
@@ -3751,7 +4255,7 @@
           <a:p>
             <a:fld id="{20CB266D-A331-4A79-AB46-FEF40B16CF9B}" type="datetimeFigureOut">
               <a:rPr lang="en-US" smtClean="0"/>
-              <a:t>2/19/2026</a:t>
+              <a:t>2/25/2026</a:t>
             </a:fld>
             <a:endParaRPr lang="en-US"/>
           </a:p>
@@ -4039,7 +4543,7 @@
           <a:p>
             <a:fld id="{20CB266D-A331-4A79-AB46-FEF40B16CF9B}" type="datetimeFigureOut">
               <a:rPr lang="en-US" smtClean="0"/>
-              <a:t>2/19/2026</a:t>
+              <a:t>2/25/2026</a:t>
             </a:fld>
             <a:endParaRPr lang="en-US"/>
           </a:p>
@@ -4280,7 +4784,7 @@
           <a:p>
             <a:fld id="{20CB266D-A331-4A79-AB46-FEF40B16CF9B}" type="datetimeFigureOut">
               <a:rPr lang="en-US" smtClean="0"/>
-              <a:t>2/19/2026</a:t>
+              <a:t>2/25/2026</a:t>
             </a:fld>
             <a:endParaRPr lang="en-US"/>
           </a:p>
@@ -26558,8 +27062,8 @@
           </a:p>
         </p:txBody>
       </p:sp>
-      <mc:AlternateContent xmlns:mc="http://schemas.openxmlformats.org/markup-compatibility/2006">
-        <mc:Choice xmlns:a14="http://schemas.microsoft.com/office/drawing/2010/main" Requires="a14">
+      <mc:AlternateContent xmlns:mc="http://schemas.openxmlformats.org/markup-compatibility/2006" xmlns:a14="http://schemas.microsoft.com/office/drawing/2010/main">
+        <mc:Choice Requires="a14">
           <p:sp>
             <p:nvSpPr>
               <p:cNvPr id="3" name="Content Placeholder 2">
@@ -26823,7 +27327,7 @@
             </p:txBody>
           </p:sp>
         </mc:Choice>
-        <mc:Fallback>
+        <mc:Fallback xmlns="">
           <p:sp>
             <p:nvSpPr>
               <p:cNvPr id="3" name="Content Placeholder 2">
@@ -26941,8 +27445,8 @@
           </a:p>
         </p:txBody>
       </p:sp>
-      <mc:AlternateContent xmlns:mc="http://schemas.openxmlformats.org/markup-compatibility/2006">
-        <mc:Choice xmlns:a14="http://schemas.microsoft.com/office/drawing/2010/main" Requires="a14">
+      <mc:AlternateContent xmlns:mc="http://schemas.openxmlformats.org/markup-compatibility/2006" xmlns:a14="http://schemas.microsoft.com/office/drawing/2010/main">
+        <mc:Choice Requires="a14">
           <p:graphicFrame>
             <p:nvGraphicFramePr>
               <p:cNvPr id="4" name="Content Placeholder 3">
@@ -27043,6 +27547,7 @@
                         <a:bodyPr/>
                         <a:lstStyle/>
                         <a:p>
+                          <a:pPr/>
                           <a14:m>
                             <m:oMathPara xmlns:m="http://schemas.openxmlformats.org/officeDocument/2006/math">
                               <m:oMathParaPr>
@@ -27080,6 +27585,7 @@
                         <a:bodyPr/>
                         <a:lstStyle/>
                         <a:p>
+                          <a:pPr/>
                           <a14:m>
                             <m:oMathPara xmlns:m="http://schemas.openxmlformats.org/officeDocument/2006/math">
                               <m:oMathParaPr>
@@ -27474,7 +27980,7 @@
             </a:graphic>
           </p:graphicFrame>
         </mc:Choice>
-        <mc:Fallback>
+        <mc:Fallback xmlns="">
           <p:graphicFrame>
             <p:nvGraphicFramePr>
               <p:cNvPr id="4" name="Content Placeholder 3">
@@ -27921,8 +28427,8 @@
           </p:graphicFrame>
         </mc:Fallback>
       </mc:AlternateContent>
-      <mc:AlternateContent xmlns:mc="http://schemas.openxmlformats.org/markup-compatibility/2006">
-        <mc:Choice xmlns:a14="http://schemas.microsoft.com/office/drawing/2010/main" Requires="a14">
+      <mc:AlternateContent xmlns:mc="http://schemas.openxmlformats.org/markup-compatibility/2006" xmlns:a14="http://schemas.microsoft.com/office/drawing/2010/main">
+        <mc:Choice Requires="a14">
           <p:graphicFrame>
             <p:nvGraphicFramePr>
               <p:cNvPr id="5" name="Table 4">
@@ -27988,6 +28494,7 @@
                         <a:bodyPr/>
                         <a:lstStyle/>
                         <a:p>
+                          <a:pPr/>
                           <a14:m>
                             <m:oMathPara xmlns:m="http://schemas.openxmlformats.org/officeDocument/2006/math">
                               <m:oMathParaPr>
@@ -28097,7 +28604,7 @@
             </a:graphic>
           </p:graphicFrame>
         </mc:Choice>
-        <mc:Fallback>
+        <mc:Fallback xmlns="">
           <p:graphicFrame>
             <p:nvGraphicFramePr>
               <p:cNvPr id="5" name="Table 4">
@@ -28339,8 +28846,8 @@
           </a:p>
         </p:txBody>
       </p:sp>
-      <mc:AlternateContent xmlns:mc="http://schemas.openxmlformats.org/markup-compatibility/2006">
-        <mc:Choice xmlns:a14="http://schemas.microsoft.com/office/drawing/2010/main" Requires="a14">
+      <mc:AlternateContent xmlns:mc="http://schemas.openxmlformats.org/markup-compatibility/2006" xmlns:a14="http://schemas.microsoft.com/office/drawing/2010/main">
+        <mc:Choice Requires="a14">
           <p:sp>
             <p:nvSpPr>
               <p:cNvPr id="3" name="Content Placeholder 2">
@@ -28674,7 +29181,7 @@
             </p:txBody>
           </p:sp>
         </mc:Choice>
-        <mc:Fallback>
+        <mc:Fallback xmlns="">
           <p:sp>
             <p:nvSpPr>
               <p:cNvPr id="3" name="Content Placeholder 2">
@@ -28862,7 +29369,7 @@
                 </a14:m>
                 <a:r>
                   <a:rPr lang="en-US" dirty="0"/>
-                  <a:t> = ?</a:t>
+                  <a:t> = A</a:t>
                 </a:r>
               </a:p>
               <a:p>
@@ -28879,7 +29386,19 @@
                       <a:rPr lang="en-US" b="0" i="1" smtClean="0">
                         <a:latin typeface="Cambria Math" panose="02040503050406030204" pitchFamily="18" charset="0"/>
                       </a:rPr>
+                      <m:t> </m:t>
+                    </m:r>
+                    <m:r>
+                      <a:rPr lang="en-US" b="0" i="1" smtClean="0">
+                        <a:latin typeface="Cambria Math" panose="02040503050406030204" pitchFamily="18" charset="0"/>
+                      </a:rPr>
                       <m:t>.</m:t>
+                    </m:r>
+                    <m:r>
+                      <a:rPr lang="en-US" b="0" i="1" smtClean="0">
+                        <a:latin typeface="Cambria Math" panose="02040503050406030204" pitchFamily="18" charset="0"/>
+                      </a:rPr>
+                      <m:t>  </m:t>
                     </m:r>
                     <m:r>
                       <a:rPr lang="en-US" i="1" smtClean="0">
@@ -28891,7 +29410,7 @@
                 </a14:m>
                 <a:r>
                   <a:rPr lang="en-US" dirty="0"/>
-                  <a:t> = ?</a:t>
+                  <a:t> = A</a:t>
                 </a:r>
               </a:p>
               <a:p>
@@ -28938,7 +29457,7 @@
                 </a14:m>
                 <a:r>
                   <a:rPr lang="en-US" dirty="0"/>
-                  <a:t> = ?</a:t>
+                  <a:t> = 1</a:t>
                 </a:r>
               </a:p>
               <a:p>
@@ -28950,6 +29469,12 @@
                         <a:latin typeface="Cambria Math" panose="02040503050406030204" pitchFamily="18" charset="0"/>
                       </a:rPr>
                       <m:t>𝐴</m:t>
+                    </m:r>
+                    <m:r>
+                      <a:rPr lang="en-US" b="0" i="1" smtClean="0">
+                        <a:latin typeface="Cambria Math" panose="02040503050406030204" pitchFamily="18" charset="0"/>
+                      </a:rPr>
+                      <m:t> </m:t>
                     </m:r>
                     <m:r>
                       <a:rPr lang="en-US" b="0" i="1" smtClean="0">
@@ -28968,6 +29493,12 @@
                       </m:accPr>
                       <m:e>
                         <m:r>
+                          <a:rPr lang="en-US" b="0" i="1" smtClean="0">
+                            <a:latin typeface="Cambria Math" panose="02040503050406030204" pitchFamily="18" charset="0"/>
+                          </a:rPr>
+                          <m:t> </m:t>
+                        </m:r>
+                        <m:r>
                           <a:rPr lang="en-US" i="1">
                             <a:latin typeface="Cambria Math" panose="02040503050406030204" pitchFamily="18" charset="0"/>
                           </a:rPr>
@@ -28980,7 +29511,14 @@
                         <m:nor/>
                       </m:rPr>
                       <a:rPr lang="en-US" dirty="0"/>
-                      <m:t> = ?</m:t>
+                      <m:t> = </m:t>
+                    </m:r>
+                    <m:r>
+                      <m:rPr>
+                        <m:nor/>
+                      </m:rPr>
+                      <a:rPr lang="en-US" b="0" i="0" dirty="0" smtClean="0"/>
+                      <m:t>0</m:t>
                     </m:r>
                   </m:oMath>
                 </a14:m>
@@ -29292,6 +29830,238 @@
                 <a:endParaRPr lang="en-US" b="0" dirty="0"/>
               </a:p>
               <a:p>
+                <a:r>
+                  <a:rPr lang="en-US" b="1" dirty="0"/>
+                  <a:t>Distribution law </a:t>
+                </a:r>
+                <a:br>
+                  <a:rPr lang="en-US" b="1" dirty="0"/>
+                </a:br>
+                <a:r>
+                  <a:rPr lang="en-US" dirty="0"/>
+                  <a:t>(symmetrical to both . and +)</a:t>
+                </a:r>
+              </a:p>
+              <a:p>
+                <a:pPr lvl="1"/>
+                <a14:m>
+                  <m:oMath xmlns:m="http://schemas.openxmlformats.org/officeDocument/2006/math">
+                    <m:r>
+                      <a:rPr lang="en-US" b="0" i="1" smtClean="0">
+                        <a:latin typeface="Cambria Math" panose="02040503050406030204" pitchFamily="18" charset="0"/>
+                      </a:rPr>
+                      <m:t>𝐴</m:t>
+                    </m:r>
+                    <m:r>
+                      <a:rPr lang="en-US" b="0" i="1" smtClean="0">
+                        <a:latin typeface="Cambria Math" panose="02040503050406030204" pitchFamily="18" charset="0"/>
+                      </a:rPr>
+                      <m:t>.</m:t>
+                    </m:r>
+                    <m:d>
+                      <m:dPr>
+                        <m:ctrlPr>
+                          <a:rPr lang="en-US" b="0" i="1" smtClean="0">
+                            <a:latin typeface="Cambria Math" panose="02040503050406030204" pitchFamily="18" charset="0"/>
+                          </a:rPr>
+                        </m:ctrlPr>
+                      </m:dPr>
+                      <m:e>
+                        <m:r>
+                          <a:rPr lang="en-US" b="0" i="1" smtClean="0">
+                            <a:latin typeface="Cambria Math" panose="02040503050406030204" pitchFamily="18" charset="0"/>
+                          </a:rPr>
+                          <m:t>𝐵</m:t>
+                        </m:r>
+                        <m:r>
+                          <a:rPr lang="en-US" b="0" i="1" smtClean="0">
+                            <a:latin typeface="Cambria Math" panose="02040503050406030204" pitchFamily="18" charset="0"/>
+                          </a:rPr>
+                          <m:t>+</m:t>
+                        </m:r>
+                        <m:r>
+                          <a:rPr lang="en-US" b="0" i="1" smtClean="0">
+                            <a:latin typeface="Cambria Math" panose="02040503050406030204" pitchFamily="18" charset="0"/>
+                          </a:rPr>
+                          <m:t>𝐶</m:t>
+                        </m:r>
+                      </m:e>
+                    </m:d>
+                    <m:r>
+                      <a:rPr lang="en-US" b="0" i="1" smtClean="0">
+                        <a:latin typeface="Cambria Math" panose="02040503050406030204" pitchFamily="18" charset="0"/>
+                      </a:rPr>
+                      <m:t>=(</m:t>
+                    </m:r>
+                    <m:r>
+                      <a:rPr lang="en-US" b="0" i="1" smtClean="0">
+                        <a:latin typeface="Cambria Math" panose="02040503050406030204" pitchFamily="18" charset="0"/>
+                      </a:rPr>
+                      <m:t>𝐴</m:t>
+                    </m:r>
+                    <m:r>
+                      <a:rPr lang="en-US" b="0" i="1" smtClean="0">
+                        <a:latin typeface="Cambria Math" panose="02040503050406030204" pitchFamily="18" charset="0"/>
+                      </a:rPr>
+                      <m:t>.</m:t>
+                    </m:r>
+                    <m:r>
+                      <a:rPr lang="en-US" b="0" i="1" smtClean="0">
+                        <a:latin typeface="Cambria Math" panose="02040503050406030204" pitchFamily="18" charset="0"/>
+                      </a:rPr>
+                      <m:t>𝐵</m:t>
+                    </m:r>
+                    <m:r>
+                      <a:rPr lang="en-US" b="0" i="1" smtClean="0">
+                        <a:latin typeface="Cambria Math" panose="02040503050406030204" pitchFamily="18" charset="0"/>
+                      </a:rPr>
+                      <m:t>)+(</m:t>
+                    </m:r>
+                    <m:r>
+                      <a:rPr lang="en-US" b="0" i="1" smtClean="0">
+                        <a:latin typeface="Cambria Math" panose="02040503050406030204" pitchFamily="18" charset="0"/>
+                      </a:rPr>
+                      <m:t>𝐵</m:t>
+                    </m:r>
+                    <m:r>
+                      <a:rPr lang="en-US" b="0" i="1" smtClean="0">
+                        <a:latin typeface="Cambria Math" panose="02040503050406030204" pitchFamily="18" charset="0"/>
+                      </a:rPr>
+                      <m:t>.</m:t>
+                    </m:r>
+                    <m:r>
+                      <a:rPr lang="en-US" b="0" i="1" smtClean="0">
+                        <a:latin typeface="Cambria Math" panose="02040503050406030204" pitchFamily="18" charset="0"/>
+                      </a:rPr>
+                      <m:t>𝐶</m:t>
+                    </m:r>
+                    <m:r>
+                      <a:rPr lang="en-US" b="0" i="1" smtClean="0">
+                        <a:latin typeface="Cambria Math" panose="02040503050406030204" pitchFamily="18" charset="0"/>
+                      </a:rPr>
+                      <m:t>)</m:t>
+                    </m:r>
+                  </m:oMath>
+                </a14:m>
+                <a:endParaRPr lang="en-US" b="0" i="1" dirty="0">
+                  <a:latin typeface="Cambria Math" panose="02040503050406030204" pitchFamily="18" charset="0"/>
+                </a:endParaRPr>
+              </a:p>
+              <a:p>
+                <a:pPr lvl="1"/>
+                <a14:m>
+                  <m:oMath xmlns:m="http://schemas.openxmlformats.org/officeDocument/2006/math">
+                    <m:r>
+                      <a:rPr lang="en-US" b="0" i="1" smtClean="0">
+                        <a:latin typeface="Cambria Math" panose="02040503050406030204" pitchFamily="18" charset="0"/>
+                      </a:rPr>
+                      <m:t>𝐴</m:t>
+                    </m:r>
+                    <m:r>
+                      <a:rPr lang="en-US" b="0" i="1" smtClean="0">
+                        <a:latin typeface="Cambria Math" panose="02040503050406030204" pitchFamily="18" charset="0"/>
+                      </a:rPr>
+                      <m:t>+</m:t>
+                    </m:r>
+                    <m:d>
+                      <m:dPr>
+                        <m:ctrlPr>
+                          <a:rPr lang="en-US" b="0" i="1" smtClean="0">
+                            <a:latin typeface="Cambria Math" panose="02040503050406030204" pitchFamily="18" charset="0"/>
+                          </a:rPr>
+                        </m:ctrlPr>
+                      </m:dPr>
+                      <m:e>
+                        <m:r>
+                          <a:rPr lang="en-US" b="0" i="1" smtClean="0">
+                            <a:latin typeface="Cambria Math" panose="02040503050406030204" pitchFamily="18" charset="0"/>
+                          </a:rPr>
+                          <m:t>𝐵</m:t>
+                        </m:r>
+                        <m:r>
+                          <a:rPr lang="en-US" b="0" i="1" smtClean="0">
+                            <a:latin typeface="Cambria Math" panose="02040503050406030204" pitchFamily="18" charset="0"/>
+                          </a:rPr>
+                          <m:t>.</m:t>
+                        </m:r>
+                        <m:r>
+                          <a:rPr lang="en-US" b="0" i="1" smtClean="0">
+                            <a:latin typeface="Cambria Math" panose="02040503050406030204" pitchFamily="18" charset="0"/>
+                          </a:rPr>
+                          <m:t>𝐶</m:t>
+                        </m:r>
+                      </m:e>
+                    </m:d>
+                    <m:r>
+                      <a:rPr lang="en-US" b="0" i="1" smtClean="0">
+                        <a:latin typeface="Cambria Math" panose="02040503050406030204" pitchFamily="18" charset="0"/>
+                      </a:rPr>
+                      <m:t>=</m:t>
+                    </m:r>
+                    <m:d>
+                      <m:dPr>
+                        <m:ctrlPr>
+                          <a:rPr lang="en-US" b="0" i="1" smtClean="0">
+                            <a:latin typeface="Cambria Math" panose="02040503050406030204" pitchFamily="18" charset="0"/>
+                          </a:rPr>
+                        </m:ctrlPr>
+                      </m:dPr>
+                      <m:e>
+                        <m:r>
+                          <a:rPr lang="en-US" b="0" i="1" smtClean="0">
+                            <a:latin typeface="Cambria Math" panose="02040503050406030204" pitchFamily="18" charset="0"/>
+                          </a:rPr>
+                          <m:t>𝐴</m:t>
+                        </m:r>
+                        <m:r>
+                          <a:rPr lang="en-US" b="0" i="1" smtClean="0">
+                            <a:latin typeface="Cambria Math" panose="02040503050406030204" pitchFamily="18" charset="0"/>
+                          </a:rPr>
+                          <m:t>+</m:t>
+                        </m:r>
+                        <m:r>
+                          <a:rPr lang="en-US" b="0" i="1" smtClean="0">
+                            <a:latin typeface="Cambria Math" panose="02040503050406030204" pitchFamily="18" charset="0"/>
+                          </a:rPr>
+                          <m:t>𝐵</m:t>
+                        </m:r>
+                      </m:e>
+                    </m:d>
+                    <m:r>
+                      <a:rPr lang="en-US" b="0" i="1" smtClean="0">
+                        <a:latin typeface="Cambria Math" panose="02040503050406030204" pitchFamily="18" charset="0"/>
+                      </a:rPr>
+                      <m:t>.(</m:t>
+                    </m:r>
+                    <m:r>
+                      <a:rPr lang="en-US" b="0" i="1" smtClean="0">
+                        <a:latin typeface="Cambria Math" panose="02040503050406030204" pitchFamily="18" charset="0"/>
+                      </a:rPr>
+                      <m:t>𝐴</m:t>
+                    </m:r>
+                    <m:r>
+                      <a:rPr lang="en-US" b="0" i="1" smtClean="0">
+                        <a:latin typeface="Cambria Math" panose="02040503050406030204" pitchFamily="18" charset="0"/>
+                      </a:rPr>
+                      <m:t>+</m:t>
+                    </m:r>
+                    <m:r>
+                      <a:rPr lang="en-US" b="0" i="1" smtClean="0">
+                        <a:latin typeface="Cambria Math" panose="02040503050406030204" pitchFamily="18" charset="0"/>
+                      </a:rPr>
+                      <m:t>𝐶</m:t>
+                    </m:r>
+                    <m:r>
+                      <a:rPr lang="en-US" b="0" i="1" smtClean="0">
+                        <a:latin typeface="Cambria Math" panose="02040503050406030204" pitchFamily="18" charset="0"/>
+                      </a:rPr>
+                      <m:t>)</m:t>
+                    </m:r>
+                  </m:oMath>
+                </a14:m>
+                <a:endParaRPr lang="en-US" b="0" dirty="0"/>
+              </a:p>
+              <a:p>
                 <a:pPr marL="457200" lvl="1" indent="0">
                   <a:buNone/>
                 </a:pPr>
@@ -29405,8 +30175,8 @@
           </a:p>
         </p:txBody>
       </p:sp>
-      <mc:AlternateContent xmlns:mc="http://schemas.openxmlformats.org/markup-compatibility/2006">
-        <mc:Choice xmlns:a14="http://schemas.microsoft.com/office/drawing/2010/main" Requires="a14">
+      <mc:AlternateContent xmlns:mc="http://schemas.openxmlformats.org/markup-compatibility/2006" xmlns:a14="http://schemas.microsoft.com/office/drawing/2010/main">
+        <mc:Choice Requires="a14">
           <p:sp>
             <p:nvSpPr>
               <p:cNvPr id="3" name="Content Placeholder 2">
@@ -29430,13 +30200,8 @@
               <a:p>
                 <a:r>
                   <a:rPr lang="en-US" dirty="0"/>
-                  <a:t>Hint : These may </a:t>
+                  <a:t>Hint : These may be actual theorems</a:t>
                 </a:r>
-                <a:r>
-                  <a:rPr lang="en-US"/>
-                  <a:t>be actual theorems</a:t>
-                </a:r>
-                <a:endParaRPr lang="en-US" dirty="0"/>
               </a:p>
               <a:p>
                 <a:pPr lvl="1"/>
@@ -29476,13 +30241,7 @@
                       <a:rPr lang="en-US" b="0" i="1" smtClean="0">
                         <a:latin typeface="Cambria Math" panose="02040503050406030204" pitchFamily="18" charset="0"/>
                       </a:rPr>
-                      <m:t>=</m:t>
-                    </m:r>
-                    <m:r>
-                      <a:rPr lang="en-US" b="0" i="1" smtClean="0">
-                        <a:latin typeface="Cambria Math" panose="02040503050406030204" pitchFamily="18" charset="0"/>
-                      </a:rPr>
-                      <m:t>?</m:t>
+                      <m:t>=?</m:t>
                     </m:r>
                   </m:oMath>
                 </a14:m>
@@ -29526,13 +30285,7 @@
                       <a:rPr lang="en-US" b="0" i="1" smtClean="0">
                         <a:latin typeface="Cambria Math" panose="02040503050406030204" pitchFamily="18" charset="0"/>
                       </a:rPr>
-                      <m:t>=</m:t>
-                    </m:r>
-                    <m:r>
-                      <a:rPr lang="en-US" b="0" i="1" smtClean="0">
-                        <a:latin typeface="Cambria Math" panose="02040503050406030204" pitchFamily="18" charset="0"/>
-                      </a:rPr>
-                      <m:t>?</m:t>
+                      <m:t>=?</m:t>
                     </m:r>
                   </m:oMath>
                 </a14:m>
@@ -29691,13 +30444,7 @@
                       <a:rPr lang="en-US" b="0" i="1" smtClean="0">
                         <a:latin typeface="Cambria Math" panose="02040503050406030204" pitchFamily="18" charset="0"/>
                       </a:rPr>
-                      <m:t>=</m:t>
-                    </m:r>
-                    <m:r>
-                      <a:rPr lang="en-US" b="0" i="1" smtClean="0">
-                        <a:latin typeface="Cambria Math" panose="02040503050406030204" pitchFamily="18" charset="0"/>
-                      </a:rPr>
-                      <m:t> ?</m:t>
+                      <m:t>= ?</m:t>
                     </m:r>
                   </m:oMath>
                 </a14:m>
@@ -29764,7 +30511,7 @@
             </p:txBody>
           </p:sp>
         </mc:Choice>
-        <mc:Fallback>
+        <mc:Fallback xmlns="">
           <p:sp>
             <p:nvSpPr>
               <p:cNvPr id="3" name="Content Placeholder 2">
@@ -29808,6 +30555,2797 @@
     <p:extLst>
       <p:ext uri="{BB962C8B-B14F-4D97-AF65-F5344CB8AC3E}">
         <p14:creationId xmlns:p14="http://schemas.microsoft.com/office/powerpoint/2010/main" val="2731649206"/>
+      </p:ext>
+    </p:extLst>
+  </p:cSld>
+  <p:clrMapOvr>
+    <a:masterClrMapping/>
+  </p:clrMapOvr>
+</p:sld>
+</file>
+
+<file path=ppt/slides/slide76.xml><?xml version="1.0" encoding="utf-8"?>
+<p:sld xmlns:a="http://schemas.openxmlformats.org/drawingml/2006/main" xmlns:r="http://schemas.openxmlformats.org/officeDocument/2006/relationships" xmlns:p="http://schemas.openxmlformats.org/presentationml/2006/main">
+  <p:cSld>
+    <p:spTree>
+      <p:nvGrpSpPr>
+        <p:cNvPr id="1" name="">
+          <a:extLst>
+            <a:ext uri="{FF2B5EF4-FFF2-40B4-BE49-F238E27FC236}">
+              <a16:creationId xmlns:a16="http://schemas.microsoft.com/office/drawing/2014/main" id="{965A1F26-A2A5-5B10-3A4B-5A4D0A63B890}"/>
+            </a:ext>
+          </a:extLst>
+        </p:cNvPr>
+        <p:cNvGrpSpPr/>
+        <p:nvPr/>
+      </p:nvGrpSpPr>
+      <p:grpSpPr>
+        <a:xfrm>
+          <a:off x="0" y="0"/>
+          <a:ext cx="0" cy="0"/>
+          <a:chOff x="0" y="0"/>
+          <a:chExt cx="0" cy="0"/>
+        </a:xfrm>
+      </p:grpSpPr>
+      <p:sp>
+        <p:nvSpPr>
+          <p:cNvPr id="2" name="Title 1">
+            <a:extLst>
+              <a:ext uri="{FF2B5EF4-FFF2-40B4-BE49-F238E27FC236}">
+                <a16:creationId xmlns:a16="http://schemas.microsoft.com/office/drawing/2014/main" id="{24D8C453-735D-9943-1D52-9282A0E3AA19}"/>
+              </a:ext>
+            </a:extLst>
+          </p:cNvPr>
+          <p:cNvSpPr>
+            <a:spLocks noGrp="1"/>
+          </p:cNvSpPr>
+          <p:nvPr>
+            <p:ph type="title"/>
+          </p:nvPr>
+        </p:nvSpPr>
+        <p:spPr/>
+        <p:txBody>
+          <a:bodyPr/>
+          <a:lstStyle/>
+          <a:p>
+            <a:r>
+              <a:rPr lang="en-US" dirty="0"/>
+              <a:t>Solved </a:t>
+            </a:r>
+            <a:r>
+              <a:rPr lang="en-US" sz="2000" dirty="0"/>
+              <a:t>(and named)</a:t>
+            </a:r>
+          </a:p>
+        </p:txBody>
+      </p:sp>
+      <mc:AlternateContent xmlns:mc="http://schemas.openxmlformats.org/markup-compatibility/2006">
+        <mc:Choice xmlns:a14="http://schemas.microsoft.com/office/drawing/2010/main" Requires="a14">
+          <p:sp>
+            <p:nvSpPr>
+              <p:cNvPr id="3" name="Content Placeholder 2">
+                <a:extLst>
+                  <a:ext uri="{FF2B5EF4-FFF2-40B4-BE49-F238E27FC236}">
+                    <a16:creationId xmlns:a16="http://schemas.microsoft.com/office/drawing/2014/main" id="{426A9DC8-04AF-13CC-E010-C4639C34E1C8}"/>
+                  </a:ext>
+                </a:extLst>
+              </p:cNvPr>
+              <p:cNvSpPr>
+                <a:spLocks noGrp="1"/>
+              </p:cNvSpPr>
+              <p:nvPr>
+                <p:ph idx="1"/>
+              </p:nvPr>
+            </p:nvSpPr>
+            <p:spPr/>
+            <p:txBody>
+              <a:bodyPr>
+                <a:normAutofit fontScale="92500" lnSpcReduction="10000"/>
+              </a:bodyPr>
+              <a:lstStyle/>
+              <a:p>
+                <a:r>
+                  <a:rPr lang="en-US" dirty="0"/>
+                  <a:t>Hint : These may be actual theorems</a:t>
+                </a:r>
+              </a:p>
+              <a:p>
+                <a:pPr lvl="1"/>
+                <a14:m>
+                  <m:oMath xmlns:m="http://schemas.openxmlformats.org/officeDocument/2006/math">
+                    <m:acc>
+                      <m:accPr>
+                        <m:chr m:val="̅"/>
+                        <m:ctrlPr>
+                          <a:rPr lang="en-US" i="1" smtClean="0">
+                            <a:latin typeface="Cambria Math" panose="02040503050406030204" pitchFamily="18" charset="0"/>
+                          </a:rPr>
+                        </m:ctrlPr>
+                      </m:accPr>
+                      <m:e>
+                        <m:r>
+                          <a:rPr lang="en-US" b="0" i="1" smtClean="0">
+                            <a:latin typeface="Cambria Math" panose="02040503050406030204" pitchFamily="18" charset="0"/>
+                          </a:rPr>
+                          <m:t>𝐴</m:t>
+                        </m:r>
+                        <m:r>
+                          <a:rPr lang="en-US" b="0" i="1" smtClean="0">
+                            <a:latin typeface="Cambria Math" panose="02040503050406030204" pitchFamily="18" charset="0"/>
+                          </a:rPr>
+                          <m:t>.</m:t>
+                        </m:r>
+                        <m:r>
+                          <a:rPr lang="en-US" b="0" i="1" smtClean="0">
+                            <a:latin typeface="Cambria Math" panose="02040503050406030204" pitchFamily="18" charset="0"/>
+                          </a:rPr>
+                          <m:t>𝐵</m:t>
+                        </m:r>
+                      </m:e>
+                    </m:acc>
+                    <m:r>
+                      <a:rPr lang="en-US" b="0" i="1" smtClean="0">
+                        <a:latin typeface="Cambria Math" panose="02040503050406030204" pitchFamily="18" charset="0"/>
+                      </a:rPr>
+                      <m:t>=</m:t>
+                    </m:r>
+                    <m:acc>
+                      <m:accPr>
+                        <m:chr m:val="̅"/>
+                        <m:ctrlPr>
+                          <a:rPr lang="en-US" i="1">
+                            <a:latin typeface="Cambria Math" panose="02040503050406030204" pitchFamily="18" charset="0"/>
+                          </a:rPr>
+                        </m:ctrlPr>
+                      </m:accPr>
+                      <m:e>
+                        <m:r>
+                          <a:rPr lang="en-US" i="1">
+                            <a:latin typeface="Cambria Math" panose="02040503050406030204" pitchFamily="18" charset="0"/>
+                          </a:rPr>
+                          <m:t>𝐴</m:t>
+                        </m:r>
+                      </m:e>
+                    </m:acc>
+                    <m:r>
+                      <a:rPr lang="en-US" i="1">
+                        <a:latin typeface="Cambria Math" panose="02040503050406030204" pitchFamily="18" charset="0"/>
+                      </a:rPr>
+                      <m:t>+</m:t>
+                    </m:r>
+                    <m:r>
+                      <a:rPr lang="en-US" b="0" i="1" smtClean="0">
+                        <a:latin typeface="Cambria Math" panose="02040503050406030204" pitchFamily="18" charset="0"/>
+                      </a:rPr>
+                      <m:t> </m:t>
+                    </m:r>
+                    <m:acc>
+                      <m:accPr>
+                        <m:chr m:val="̅"/>
+                        <m:ctrlPr>
+                          <a:rPr lang="en-US" b="0" i="1" smtClean="0">
+                            <a:latin typeface="Cambria Math" panose="02040503050406030204" pitchFamily="18" charset="0"/>
+                          </a:rPr>
+                        </m:ctrlPr>
+                      </m:accPr>
+                      <m:e>
+                        <m:r>
+                          <a:rPr lang="en-US" b="0" i="1" smtClean="0">
+                            <a:latin typeface="Cambria Math" panose="02040503050406030204" pitchFamily="18" charset="0"/>
+                          </a:rPr>
+                          <m:t>𝐵</m:t>
+                        </m:r>
+                      </m:e>
+                    </m:acc>
+                  </m:oMath>
+                </a14:m>
+                <a:endParaRPr lang="en-US" dirty="0"/>
+              </a:p>
+              <a:p>
+                <a:pPr lvl="2"/>
+                <a:r>
+                  <a:rPr lang="en-US" dirty="0" err="1"/>
+                  <a:t>DeMorgan’s</a:t>
+                </a:r>
+                <a:r>
+                  <a:rPr lang="en-US" dirty="0"/>
+                  <a:t> law </a:t>
+                </a:r>
+              </a:p>
+              <a:p>
+                <a:pPr lvl="1"/>
+                <a14:m>
+                  <m:oMath xmlns:m="http://schemas.openxmlformats.org/officeDocument/2006/math">
+                    <m:acc>
+                      <m:accPr>
+                        <m:chr m:val="̅"/>
+                        <m:ctrlPr>
+                          <a:rPr lang="en-US" i="1" smtClean="0">
+                            <a:latin typeface="Cambria Math" panose="02040503050406030204" pitchFamily="18" charset="0"/>
+                          </a:rPr>
+                        </m:ctrlPr>
+                      </m:accPr>
+                      <m:e>
+                        <m:r>
+                          <a:rPr lang="en-US" b="0" i="1" smtClean="0">
+                            <a:latin typeface="Cambria Math" panose="02040503050406030204" pitchFamily="18" charset="0"/>
+                          </a:rPr>
+                          <m:t>𝐴</m:t>
+                        </m:r>
+                        <m:r>
+                          <a:rPr lang="en-US" b="0" i="1" smtClean="0">
+                            <a:latin typeface="Cambria Math" panose="02040503050406030204" pitchFamily="18" charset="0"/>
+                          </a:rPr>
+                          <m:t>+</m:t>
+                        </m:r>
+                        <m:r>
+                          <a:rPr lang="en-US" b="0" i="1" smtClean="0">
+                            <a:latin typeface="Cambria Math" panose="02040503050406030204" pitchFamily="18" charset="0"/>
+                          </a:rPr>
+                          <m:t>𝐵</m:t>
+                        </m:r>
+                      </m:e>
+                    </m:acc>
+                    <m:r>
+                      <a:rPr lang="en-US" i="1">
+                        <a:latin typeface="Cambria Math" panose="02040503050406030204" pitchFamily="18" charset="0"/>
+                      </a:rPr>
+                      <m:t>=</m:t>
+                    </m:r>
+                    <m:acc>
+                      <m:accPr>
+                        <m:chr m:val="̅"/>
+                        <m:ctrlPr>
+                          <a:rPr lang="en-US" i="1">
+                            <a:latin typeface="Cambria Math" panose="02040503050406030204" pitchFamily="18" charset="0"/>
+                          </a:rPr>
+                        </m:ctrlPr>
+                      </m:accPr>
+                      <m:e>
+                        <m:r>
+                          <a:rPr lang="en-US" i="1">
+                            <a:latin typeface="Cambria Math" panose="02040503050406030204" pitchFamily="18" charset="0"/>
+                          </a:rPr>
+                          <m:t>𝐴</m:t>
+                        </m:r>
+                      </m:e>
+                    </m:acc>
+                    <m:r>
+                      <a:rPr lang="en-US" b="0" i="1" smtClean="0">
+                        <a:latin typeface="Cambria Math" panose="02040503050406030204" pitchFamily="18" charset="0"/>
+                      </a:rPr>
+                      <m:t>. </m:t>
+                    </m:r>
+                    <m:acc>
+                      <m:accPr>
+                        <m:chr m:val="̅"/>
+                        <m:ctrlPr>
+                          <a:rPr lang="en-US" i="1">
+                            <a:latin typeface="Cambria Math" panose="02040503050406030204" pitchFamily="18" charset="0"/>
+                          </a:rPr>
+                        </m:ctrlPr>
+                      </m:accPr>
+                      <m:e>
+                        <m:r>
+                          <a:rPr lang="en-US" i="1">
+                            <a:latin typeface="Cambria Math" panose="02040503050406030204" pitchFamily="18" charset="0"/>
+                          </a:rPr>
+                          <m:t>𝐵</m:t>
+                        </m:r>
+                      </m:e>
+                    </m:acc>
+                  </m:oMath>
+                </a14:m>
+                <a:endParaRPr lang="en-US" i="1" dirty="0">
+                  <a:latin typeface="Cambria Math" panose="02040503050406030204" pitchFamily="18" charset="0"/>
+                </a:endParaRPr>
+              </a:p>
+              <a:p>
+                <a:pPr lvl="2"/>
+                <a:r>
+                  <a:rPr lang="en-US" dirty="0" err="1"/>
+                  <a:t>DeMorgan’s</a:t>
+                </a:r>
+                <a:r>
+                  <a:rPr lang="en-US" dirty="0"/>
+                  <a:t> law (again)</a:t>
+                </a:r>
+              </a:p>
+              <a:p>
+                <a:pPr lvl="1"/>
+                <a14:m>
+                  <m:oMath xmlns:m="http://schemas.openxmlformats.org/officeDocument/2006/math">
+                    <m:d>
+                      <m:dPr>
+                        <m:ctrlPr>
+                          <a:rPr lang="en-US" b="0" i="1" smtClean="0">
+                            <a:latin typeface="Cambria Math" panose="02040503050406030204" pitchFamily="18" charset="0"/>
+                          </a:rPr>
+                        </m:ctrlPr>
+                      </m:dPr>
+                      <m:e>
+                        <m:r>
+                          <a:rPr lang="en-US" b="0" i="1" smtClean="0">
+                            <a:latin typeface="Cambria Math" panose="02040503050406030204" pitchFamily="18" charset="0"/>
+                          </a:rPr>
+                          <m:t>𝐴</m:t>
+                        </m:r>
+                        <m:r>
+                          <a:rPr lang="en-US" b="0" i="1" smtClean="0">
+                            <a:latin typeface="Cambria Math" panose="02040503050406030204" pitchFamily="18" charset="0"/>
+                          </a:rPr>
+                          <m:t>+</m:t>
+                        </m:r>
+                        <m:r>
+                          <a:rPr lang="en-US" b="0" i="1" smtClean="0">
+                            <a:latin typeface="Cambria Math" panose="02040503050406030204" pitchFamily="18" charset="0"/>
+                          </a:rPr>
+                          <m:t>𝐵</m:t>
+                        </m:r>
+                      </m:e>
+                    </m:d>
+                    <m:r>
+                      <a:rPr lang="en-US" b="0" i="1" smtClean="0">
+                        <a:latin typeface="Cambria Math" panose="02040503050406030204" pitchFamily="18" charset="0"/>
+                      </a:rPr>
+                      <m:t>.</m:t>
+                    </m:r>
+                    <m:d>
+                      <m:dPr>
+                        <m:ctrlPr>
+                          <a:rPr lang="en-US" b="0" i="1" smtClean="0">
+                            <a:latin typeface="Cambria Math" panose="02040503050406030204" pitchFamily="18" charset="0"/>
+                          </a:rPr>
+                        </m:ctrlPr>
+                      </m:dPr>
+                      <m:e>
+                        <m:acc>
+                          <m:accPr>
+                            <m:chr m:val="̅"/>
+                            <m:ctrlPr>
+                              <a:rPr lang="en-US" b="0" i="1" smtClean="0">
+                                <a:latin typeface="Cambria Math" panose="02040503050406030204" pitchFamily="18" charset="0"/>
+                              </a:rPr>
+                            </m:ctrlPr>
+                          </m:accPr>
+                          <m:e>
+                            <m:r>
+                              <a:rPr lang="en-US" b="0" i="1" smtClean="0">
+                                <a:latin typeface="Cambria Math" panose="02040503050406030204" pitchFamily="18" charset="0"/>
+                              </a:rPr>
+                              <m:t>𝐴</m:t>
+                            </m:r>
+                          </m:e>
+                        </m:acc>
+                        <m:r>
+                          <a:rPr lang="en-US" b="0" i="1" smtClean="0">
+                            <a:latin typeface="Cambria Math" panose="02040503050406030204" pitchFamily="18" charset="0"/>
+                          </a:rPr>
+                          <m:t>+</m:t>
+                        </m:r>
+                        <m:r>
+                          <a:rPr lang="en-US" b="0" i="1" smtClean="0">
+                            <a:latin typeface="Cambria Math" panose="02040503050406030204" pitchFamily="18" charset="0"/>
+                          </a:rPr>
+                          <m:t>𝐶</m:t>
+                        </m:r>
+                      </m:e>
+                    </m:d>
+                    <m:r>
+                      <a:rPr lang="en-US" b="0" i="1" smtClean="0">
+                        <a:latin typeface="Cambria Math" panose="02040503050406030204" pitchFamily="18" charset="0"/>
+                      </a:rPr>
+                      <m:t>= </m:t>
+                    </m:r>
+                    <m:r>
+                      <a:rPr lang="en-US" i="1">
+                        <a:latin typeface="Cambria Math" panose="02040503050406030204" pitchFamily="18" charset="0"/>
+                      </a:rPr>
+                      <m:t>𝐴𝐶</m:t>
+                    </m:r>
+                    <m:r>
+                      <a:rPr lang="en-US" i="1">
+                        <a:latin typeface="Cambria Math" panose="02040503050406030204" pitchFamily="18" charset="0"/>
+                      </a:rPr>
+                      <m:t>+</m:t>
+                    </m:r>
+                    <m:acc>
+                      <m:accPr>
+                        <m:chr m:val="̅"/>
+                        <m:ctrlPr>
+                          <a:rPr lang="en-US" i="1">
+                            <a:latin typeface="Cambria Math" panose="02040503050406030204" pitchFamily="18" charset="0"/>
+                          </a:rPr>
+                        </m:ctrlPr>
+                      </m:accPr>
+                      <m:e>
+                        <m:r>
+                          <a:rPr lang="en-US" i="1">
+                            <a:latin typeface="Cambria Math" panose="02040503050406030204" pitchFamily="18" charset="0"/>
+                          </a:rPr>
+                          <m:t>𝐴</m:t>
+                        </m:r>
+                      </m:e>
+                    </m:acc>
+                    <m:r>
+                      <m:rPr>
+                        <m:sty m:val="p"/>
+                      </m:rPr>
+                      <a:rPr lang="en-US">
+                        <a:latin typeface="Cambria Math" panose="02040503050406030204" pitchFamily="18" charset="0"/>
+                      </a:rPr>
+                      <m:t>B</m:t>
+                    </m:r>
+                    <m:r>
+                      <a:rPr lang="en-US">
+                        <a:latin typeface="Cambria Math" panose="02040503050406030204" pitchFamily="18" charset="0"/>
+                      </a:rPr>
+                      <m:t> </m:t>
+                    </m:r>
+                  </m:oMath>
+                </a14:m>
+                <a:endParaRPr lang="en-US" b="0" dirty="0"/>
+              </a:p>
+              <a:p>
+                <a:pPr lvl="2"/>
+                <a:r>
+                  <a:rPr lang="en-US" dirty="0"/>
+                  <a:t>Consensus theorem </a:t>
+                </a:r>
+                <a:endParaRPr lang="en-US" b="0" dirty="0"/>
+              </a:p>
+              <a:p>
+                <a:pPr lvl="1"/>
+                <a14:m>
+                  <m:oMath xmlns:m="http://schemas.openxmlformats.org/officeDocument/2006/math">
+                    <m:r>
+                      <a:rPr lang="en-US" b="0" i="1" smtClean="0">
+                        <a:latin typeface="Cambria Math" panose="02040503050406030204" pitchFamily="18" charset="0"/>
+                      </a:rPr>
+                      <m:t>𝐴</m:t>
+                    </m:r>
+                    <m:d>
+                      <m:dPr>
+                        <m:ctrlPr>
+                          <a:rPr lang="en-US" b="0" i="1" smtClean="0">
+                            <a:latin typeface="Cambria Math" panose="02040503050406030204" pitchFamily="18" charset="0"/>
+                          </a:rPr>
+                        </m:ctrlPr>
+                      </m:dPr>
+                      <m:e>
+                        <m:acc>
+                          <m:accPr>
+                            <m:chr m:val="̅"/>
+                            <m:ctrlPr>
+                              <a:rPr lang="en-US" b="0" i="1" smtClean="0">
+                                <a:latin typeface="Cambria Math" panose="02040503050406030204" pitchFamily="18" charset="0"/>
+                              </a:rPr>
+                            </m:ctrlPr>
+                          </m:accPr>
+                          <m:e>
+                            <m:r>
+                              <a:rPr lang="en-US" b="0" i="1" smtClean="0">
+                                <a:latin typeface="Cambria Math" panose="02040503050406030204" pitchFamily="18" charset="0"/>
+                              </a:rPr>
+                              <m:t>𝐴</m:t>
+                            </m:r>
+                          </m:e>
+                        </m:acc>
+                        <m:r>
+                          <a:rPr lang="en-US" b="0" i="1" smtClean="0">
+                            <a:latin typeface="Cambria Math" panose="02040503050406030204" pitchFamily="18" charset="0"/>
+                          </a:rPr>
+                          <m:t>+</m:t>
+                        </m:r>
+                        <m:r>
+                          <a:rPr lang="en-US" b="0" i="1" smtClean="0">
+                            <a:latin typeface="Cambria Math" panose="02040503050406030204" pitchFamily="18" charset="0"/>
+                          </a:rPr>
+                          <m:t>𝐵</m:t>
+                        </m:r>
+                        <m:r>
+                          <a:rPr lang="en-US" b="0" i="1" smtClean="0">
+                            <a:latin typeface="Cambria Math" panose="02040503050406030204" pitchFamily="18" charset="0"/>
+                          </a:rPr>
+                          <m:t> </m:t>
+                        </m:r>
+                      </m:e>
+                    </m:d>
+                    <m:r>
+                      <a:rPr lang="en-US" b="0" i="1" smtClean="0">
+                        <a:latin typeface="Cambria Math" panose="02040503050406030204" pitchFamily="18" charset="0"/>
+                      </a:rPr>
+                      <m:t>=</m:t>
+                    </m:r>
+                    <m:r>
+                      <a:rPr lang="en-US" i="1">
+                        <a:latin typeface="Cambria Math" panose="02040503050406030204" pitchFamily="18" charset="0"/>
+                      </a:rPr>
+                      <m:t>𝐴</m:t>
+                    </m:r>
+                    <m:r>
+                      <a:rPr lang="en-US" i="1">
+                        <a:latin typeface="Cambria Math" panose="02040503050406030204" pitchFamily="18" charset="0"/>
+                      </a:rPr>
+                      <m:t>.</m:t>
+                    </m:r>
+                    <m:r>
+                      <a:rPr lang="en-US" i="1">
+                        <a:latin typeface="Cambria Math" panose="02040503050406030204" pitchFamily="18" charset="0"/>
+                      </a:rPr>
+                      <m:t>𝐵</m:t>
+                    </m:r>
+                  </m:oMath>
+                </a14:m>
+                <a:endParaRPr lang="en-US" dirty="0"/>
+              </a:p>
+              <a:p>
+                <a:pPr lvl="2"/>
+                <a:r>
+                  <a:rPr lang="en-US" dirty="0"/>
+                  <a:t>Redundancy law</a:t>
+                </a:r>
+              </a:p>
+              <a:p>
+                <a:pPr lvl="2"/>
+                <a:r>
+                  <a:rPr lang="en-US" dirty="0"/>
+                  <a:t>Also called, Second Absorption law</a:t>
+                </a:r>
+                <a:endParaRPr lang="en-US" b="0" dirty="0"/>
+              </a:p>
+              <a:p>
+                <a:pPr lvl="1"/>
+                <a14:m>
+                  <m:oMath xmlns:m="http://schemas.openxmlformats.org/officeDocument/2006/math">
+                    <m:r>
+                      <a:rPr lang="en-US" b="0" i="1" smtClean="0">
+                        <a:latin typeface="Cambria Math" panose="02040503050406030204" pitchFamily="18" charset="0"/>
+                      </a:rPr>
+                      <m:t>𝐴</m:t>
+                    </m:r>
+                    <m:r>
+                      <a:rPr lang="en-US" b="0" i="1" smtClean="0">
+                        <a:latin typeface="Cambria Math" panose="02040503050406030204" pitchFamily="18" charset="0"/>
+                      </a:rPr>
+                      <m:t>+</m:t>
+                    </m:r>
+                    <m:acc>
+                      <m:accPr>
+                        <m:chr m:val="̅"/>
+                        <m:ctrlPr>
+                          <a:rPr lang="en-US" b="0" i="1" smtClean="0">
+                            <a:latin typeface="Cambria Math" panose="02040503050406030204" pitchFamily="18" charset="0"/>
+                          </a:rPr>
+                        </m:ctrlPr>
+                      </m:accPr>
+                      <m:e>
+                        <m:r>
+                          <a:rPr lang="en-US" b="0" i="1" smtClean="0">
+                            <a:latin typeface="Cambria Math" panose="02040503050406030204" pitchFamily="18" charset="0"/>
+                          </a:rPr>
+                          <m:t>𝐴</m:t>
+                        </m:r>
+                      </m:e>
+                    </m:acc>
+                    <m:r>
+                      <a:rPr lang="en-US" b="0" i="1" smtClean="0">
+                        <a:latin typeface="Cambria Math" panose="02040503050406030204" pitchFamily="18" charset="0"/>
+                      </a:rPr>
+                      <m:t>𝐵</m:t>
+                    </m:r>
+                    <m:r>
+                      <a:rPr lang="en-US" b="0" i="1" smtClean="0">
+                        <a:latin typeface="Cambria Math" panose="02040503050406030204" pitchFamily="18" charset="0"/>
+                      </a:rPr>
+                      <m:t>=</m:t>
+                    </m:r>
+                    <m:r>
+                      <a:rPr lang="en-US" i="1">
+                        <a:latin typeface="Cambria Math" panose="02040503050406030204" pitchFamily="18" charset="0"/>
+                      </a:rPr>
+                      <m:t>𝐴</m:t>
+                    </m:r>
+                    <m:r>
+                      <a:rPr lang="en-US" i="1">
+                        <a:latin typeface="Cambria Math" panose="02040503050406030204" pitchFamily="18" charset="0"/>
+                      </a:rPr>
+                      <m:t>+</m:t>
+                    </m:r>
+                    <m:r>
+                      <a:rPr lang="en-US" i="1">
+                        <a:latin typeface="Cambria Math" panose="02040503050406030204" pitchFamily="18" charset="0"/>
+                      </a:rPr>
+                      <m:t>𝐵</m:t>
+                    </m:r>
+                  </m:oMath>
+                </a14:m>
+                <a:endParaRPr lang="en-US" b="0" dirty="0"/>
+              </a:p>
+              <a:p>
+                <a:pPr lvl="2"/>
+                <a:r>
+                  <a:rPr lang="en-US" dirty="0"/>
+                  <a:t>Redundancy law (again)</a:t>
+                </a:r>
+              </a:p>
+              <a:p>
+                <a:pPr lvl="2"/>
+                <a:r>
+                  <a:rPr lang="en-US" b="0" dirty="0"/>
+                  <a:t>Also called , Third distributive law</a:t>
+                </a:r>
+              </a:p>
+              <a:p>
+                <a:pPr lvl="2"/>
+                <a:endParaRPr lang="en-US" b="0" dirty="0"/>
+              </a:p>
+              <a:p>
+                <a:pPr lvl="2"/>
+                <a:endParaRPr lang="en-US" b="0" dirty="0"/>
+              </a:p>
+              <a:p>
+                <a:pPr lvl="1"/>
+                <a:endParaRPr lang="en-US" b="0" dirty="0"/>
+              </a:p>
+              <a:p>
+                <a:pPr lvl="1"/>
+                <a:endParaRPr lang="en-US" dirty="0"/>
+              </a:p>
+            </p:txBody>
+          </p:sp>
+        </mc:Choice>
+        <mc:Fallback>
+          <p:sp>
+            <p:nvSpPr>
+              <p:cNvPr id="3" name="Content Placeholder 2">
+                <a:extLst>
+                  <a:ext uri="{FF2B5EF4-FFF2-40B4-BE49-F238E27FC236}">
+                    <a16:creationId xmlns:a16="http://schemas.microsoft.com/office/drawing/2014/main" id="{426A9DC8-04AF-13CC-E010-C4639C34E1C8}"/>
+                  </a:ext>
+                </a:extLst>
+              </p:cNvPr>
+              <p:cNvSpPr>
+                <a:spLocks noGrp="1" noRot="1" noChangeAspect="1" noMove="1" noResize="1" noEditPoints="1" noAdjustHandles="1" noChangeArrowheads="1" noChangeShapeType="1" noTextEdit="1"/>
+              </p:cNvSpPr>
+              <p:nvPr>
+                <p:ph idx="1"/>
+              </p:nvPr>
+            </p:nvSpPr>
+            <p:spPr>
+              <a:blipFill>
+                <a:blip r:embed="rId3"/>
+                <a:stretch>
+                  <a:fillRect l="-928" t="-2801" b="-1541"/>
+                </a:stretch>
+              </a:blipFill>
+            </p:spPr>
+            <p:txBody>
+              <a:bodyPr/>
+              <a:lstStyle/>
+              <a:p>
+                <a:r>
+                  <a:rPr lang="en-US">
+                    <a:noFill/>
+                  </a:rPr>
+                  <a:t> </a:t>
+                </a:r>
+              </a:p>
+            </p:txBody>
+          </p:sp>
+        </mc:Fallback>
+      </mc:AlternateContent>
+    </p:spTree>
+    <p:extLst>
+      <p:ext uri="{BB962C8B-B14F-4D97-AF65-F5344CB8AC3E}">
+        <p14:creationId xmlns:p14="http://schemas.microsoft.com/office/powerpoint/2010/main" val="16409655"/>
+      </p:ext>
+    </p:extLst>
+  </p:cSld>
+  <p:clrMapOvr>
+    <a:masterClrMapping/>
+  </p:clrMapOvr>
+</p:sld>
+</file>
+
+<file path=ppt/slides/slide77.xml><?xml version="1.0" encoding="utf-8"?>
+<p:sld xmlns:a="http://schemas.openxmlformats.org/drawingml/2006/main" xmlns:r="http://schemas.openxmlformats.org/officeDocument/2006/relationships" xmlns:p="http://schemas.openxmlformats.org/presentationml/2006/main">
+  <p:cSld>
+    <p:spTree>
+      <p:nvGrpSpPr>
+        <p:cNvPr id="1" name=""/>
+        <p:cNvGrpSpPr/>
+        <p:nvPr/>
+      </p:nvGrpSpPr>
+      <p:grpSpPr>
+        <a:xfrm>
+          <a:off x="0" y="0"/>
+          <a:ext cx="0" cy="0"/>
+          <a:chOff x="0" y="0"/>
+          <a:chExt cx="0" cy="0"/>
+        </a:xfrm>
+      </p:grpSpPr>
+      <p:sp>
+        <p:nvSpPr>
+          <p:cNvPr id="2" name="Title 1">
+            <a:extLst>
+              <a:ext uri="{FF2B5EF4-FFF2-40B4-BE49-F238E27FC236}">
+                <a16:creationId xmlns:a16="http://schemas.microsoft.com/office/drawing/2014/main" id="{AA82A8DE-70D1-F0C4-50B6-932DB537A122}"/>
+              </a:ext>
+            </a:extLst>
+          </p:cNvPr>
+          <p:cNvSpPr>
+            <a:spLocks noGrp="1"/>
+          </p:cNvSpPr>
+          <p:nvPr>
+            <p:ph type="title"/>
+          </p:nvPr>
+        </p:nvSpPr>
+        <p:spPr/>
+        <p:txBody>
+          <a:bodyPr/>
+          <a:lstStyle/>
+          <a:p>
+            <a:r>
+              <a:rPr lang="en-US" dirty="0"/>
+              <a:t>Lets Simplify 1..4</a:t>
+            </a:r>
+          </a:p>
+        </p:txBody>
+      </p:sp>
+      <mc:AlternateContent xmlns:mc="http://schemas.openxmlformats.org/markup-compatibility/2006">
+        <mc:Choice xmlns:a14="http://schemas.microsoft.com/office/drawing/2010/main" Requires="a14">
+          <p:sp>
+            <p:nvSpPr>
+              <p:cNvPr id="3" name="Content Placeholder 2">
+                <a:extLst>
+                  <a:ext uri="{FF2B5EF4-FFF2-40B4-BE49-F238E27FC236}">
+                    <a16:creationId xmlns:a16="http://schemas.microsoft.com/office/drawing/2014/main" id="{A9F0D293-2E99-8E01-9D02-C3EB766841D4}"/>
+                  </a:ext>
+                </a:extLst>
+              </p:cNvPr>
+              <p:cNvSpPr>
+                <a:spLocks noGrp="1"/>
+              </p:cNvSpPr>
+              <p:nvPr>
+                <p:ph idx="1"/>
+              </p:nvPr>
+            </p:nvSpPr>
+            <p:spPr/>
+            <p:txBody>
+              <a:bodyPr/>
+              <a:lstStyle/>
+              <a:p>
+                <a14:m>
+                  <m:oMath xmlns:m="http://schemas.openxmlformats.org/officeDocument/2006/math">
+                    <m:r>
+                      <a:rPr lang="en-US" b="0" i="1" smtClean="0">
+                        <a:latin typeface="Cambria Math" panose="02040503050406030204" pitchFamily="18" charset="0"/>
+                      </a:rPr>
+                      <m:t>𝐴</m:t>
+                    </m:r>
+                    <m:r>
+                      <a:rPr lang="en-US" b="0" i="1" smtClean="0">
+                        <a:latin typeface="Cambria Math" panose="02040503050406030204" pitchFamily="18" charset="0"/>
+                      </a:rPr>
+                      <m:t>.</m:t>
+                    </m:r>
+                    <m:d>
+                      <m:dPr>
+                        <m:ctrlPr>
+                          <a:rPr lang="en-US" b="0" i="1" smtClean="0">
+                            <a:latin typeface="Cambria Math" panose="02040503050406030204" pitchFamily="18" charset="0"/>
+                          </a:rPr>
+                        </m:ctrlPr>
+                      </m:dPr>
+                      <m:e>
+                        <m:r>
+                          <a:rPr lang="en-US" b="0" i="1" smtClean="0">
+                            <a:latin typeface="Cambria Math" panose="02040503050406030204" pitchFamily="18" charset="0"/>
+                          </a:rPr>
+                          <m:t>𝐴</m:t>
+                        </m:r>
+                        <m:r>
+                          <a:rPr lang="en-US" b="0" i="1" smtClean="0">
+                            <a:latin typeface="Cambria Math" panose="02040503050406030204" pitchFamily="18" charset="0"/>
+                          </a:rPr>
+                          <m:t>+</m:t>
+                        </m:r>
+                        <m:r>
+                          <a:rPr lang="en-US" b="0" i="1" smtClean="0">
+                            <a:latin typeface="Cambria Math" panose="02040503050406030204" pitchFamily="18" charset="0"/>
+                          </a:rPr>
+                          <m:t>𝐵</m:t>
+                        </m:r>
+                      </m:e>
+                    </m:d>
+                  </m:oMath>
+                </a14:m>
+                <a:endParaRPr lang="en-US" dirty="0"/>
+              </a:p>
+              <a:p>
+                <a14:m>
+                  <m:oMath xmlns:m="http://schemas.openxmlformats.org/officeDocument/2006/math">
+                    <m:r>
+                      <a:rPr lang="en-US" b="0" i="1" smtClean="0">
+                        <a:latin typeface="Cambria Math" panose="02040503050406030204" pitchFamily="18" charset="0"/>
+                      </a:rPr>
+                      <m:t>𝐴</m:t>
+                    </m:r>
+                    <m:r>
+                      <a:rPr lang="en-US" b="0" i="1" smtClean="0">
+                        <a:latin typeface="Cambria Math" panose="02040503050406030204" pitchFamily="18" charset="0"/>
+                      </a:rPr>
+                      <m:t>+</m:t>
+                    </m:r>
+                    <m:d>
+                      <m:dPr>
+                        <m:ctrlPr>
+                          <a:rPr lang="en-US" b="0" i="1" smtClean="0">
+                            <a:latin typeface="Cambria Math" panose="02040503050406030204" pitchFamily="18" charset="0"/>
+                          </a:rPr>
+                        </m:ctrlPr>
+                      </m:dPr>
+                      <m:e>
+                        <m:r>
+                          <a:rPr lang="en-US" b="0" i="1" smtClean="0">
+                            <a:latin typeface="Cambria Math" panose="02040503050406030204" pitchFamily="18" charset="0"/>
+                          </a:rPr>
+                          <m:t>𝐴</m:t>
+                        </m:r>
+                        <m:r>
+                          <a:rPr lang="en-US" b="0" i="1" smtClean="0">
+                            <a:latin typeface="Cambria Math" panose="02040503050406030204" pitchFamily="18" charset="0"/>
+                          </a:rPr>
+                          <m:t>.</m:t>
+                        </m:r>
+                        <m:r>
+                          <a:rPr lang="en-US" b="0" i="1" smtClean="0">
+                            <a:latin typeface="Cambria Math" panose="02040503050406030204" pitchFamily="18" charset="0"/>
+                          </a:rPr>
+                          <m:t>𝐵</m:t>
+                        </m:r>
+                      </m:e>
+                    </m:d>
+                  </m:oMath>
+                </a14:m>
+                <a:endParaRPr lang="en-US" dirty="0"/>
+              </a:p>
+              <a:p>
+                <a14:m>
+                  <m:oMath xmlns:m="http://schemas.openxmlformats.org/officeDocument/2006/math">
+                    <m:acc>
+                      <m:accPr>
+                        <m:chr m:val="̅"/>
+                        <m:ctrlPr>
+                          <a:rPr lang="en-US" b="0" i="1" smtClean="0">
+                            <a:latin typeface="Cambria Math" panose="02040503050406030204" pitchFamily="18" charset="0"/>
+                          </a:rPr>
+                        </m:ctrlPr>
+                      </m:accPr>
+                      <m:e>
+                        <m:r>
+                          <a:rPr lang="en-US" b="0" i="1" smtClean="0">
+                            <a:latin typeface="Cambria Math" panose="02040503050406030204" pitchFamily="18" charset="0"/>
+                          </a:rPr>
+                          <m:t>𝐴</m:t>
+                        </m:r>
+                      </m:e>
+                    </m:acc>
+                    <m:r>
+                      <a:rPr lang="en-US" b="0" i="1" smtClean="0">
+                        <a:latin typeface="Cambria Math" panose="02040503050406030204" pitchFamily="18" charset="0"/>
+                      </a:rPr>
+                      <m:t>+</m:t>
+                    </m:r>
+                    <m:d>
+                      <m:dPr>
+                        <m:ctrlPr>
+                          <a:rPr lang="en-US" b="0" i="1" smtClean="0">
+                            <a:latin typeface="Cambria Math" panose="02040503050406030204" pitchFamily="18" charset="0"/>
+                          </a:rPr>
+                        </m:ctrlPr>
+                      </m:dPr>
+                      <m:e>
+                        <m:r>
+                          <a:rPr lang="en-US" b="0" i="1" smtClean="0">
+                            <a:latin typeface="Cambria Math" panose="02040503050406030204" pitchFamily="18" charset="0"/>
+                          </a:rPr>
+                          <m:t>𝐴</m:t>
+                        </m:r>
+                        <m:r>
+                          <a:rPr lang="en-US" b="0" i="1" smtClean="0">
+                            <a:latin typeface="Cambria Math" panose="02040503050406030204" pitchFamily="18" charset="0"/>
+                          </a:rPr>
+                          <m:t>.</m:t>
+                        </m:r>
+                        <m:r>
+                          <a:rPr lang="en-US" b="0" i="1" smtClean="0">
+                            <a:latin typeface="Cambria Math" panose="02040503050406030204" pitchFamily="18" charset="0"/>
+                          </a:rPr>
+                          <m:t>𝐵</m:t>
+                        </m:r>
+                      </m:e>
+                    </m:d>
+                  </m:oMath>
+                </a14:m>
+                <a:endParaRPr lang="en-US" b="0" dirty="0"/>
+              </a:p>
+              <a:p>
+                <a:r>
+                  <a:rPr lang="en-US" b="0" dirty="0"/>
+                  <a:t>(</a:t>
+                </a:r>
+                <a14:m>
+                  <m:oMath xmlns:m="http://schemas.openxmlformats.org/officeDocument/2006/math">
+                    <m:r>
+                      <a:rPr lang="en-US" b="0" i="1" smtClean="0">
+                        <a:latin typeface="Cambria Math" panose="02040503050406030204" pitchFamily="18" charset="0"/>
+                      </a:rPr>
+                      <m:t>𝐴</m:t>
+                    </m:r>
+                    <m:r>
+                      <a:rPr lang="en-US" b="0" i="1" smtClean="0">
+                        <a:latin typeface="Cambria Math" panose="02040503050406030204" pitchFamily="18" charset="0"/>
+                      </a:rPr>
+                      <m:t>+</m:t>
+                    </m:r>
+                    <m:r>
+                      <a:rPr lang="en-US" b="0" i="1" smtClean="0">
+                        <a:latin typeface="Cambria Math" panose="02040503050406030204" pitchFamily="18" charset="0"/>
+                      </a:rPr>
+                      <m:t>𝐵</m:t>
+                    </m:r>
+                    <m:r>
+                      <a:rPr lang="en-US" b="0" i="1" smtClean="0">
+                        <a:latin typeface="Cambria Math" panose="02040503050406030204" pitchFamily="18" charset="0"/>
+                      </a:rPr>
+                      <m:t>).(</m:t>
+                    </m:r>
+                    <m:r>
+                      <a:rPr lang="en-US" b="0" i="1" smtClean="0">
+                        <a:latin typeface="Cambria Math" panose="02040503050406030204" pitchFamily="18" charset="0"/>
+                      </a:rPr>
+                      <m:t>𝐴</m:t>
+                    </m:r>
+                    <m:r>
+                      <a:rPr lang="en-US" b="0" i="1" smtClean="0">
+                        <a:latin typeface="Cambria Math" panose="02040503050406030204" pitchFamily="18" charset="0"/>
+                      </a:rPr>
+                      <m:t>+</m:t>
+                    </m:r>
+                    <m:acc>
+                      <m:accPr>
+                        <m:chr m:val="̅"/>
+                        <m:ctrlPr>
+                          <a:rPr lang="en-US" b="0" i="1" smtClean="0">
+                            <a:latin typeface="Cambria Math" panose="02040503050406030204" pitchFamily="18" charset="0"/>
+                          </a:rPr>
+                        </m:ctrlPr>
+                      </m:accPr>
+                      <m:e>
+                        <m:r>
+                          <a:rPr lang="en-US" b="0" i="1" smtClean="0">
+                            <a:latin typeface="Cambria Math" panose="02040503050406030204" pitchFamily="18" charset="0"/>
+                          </a:rPr>
+                          <m:t>𝐵</m:t>
+                        </m:r>
+                      </m:e>
+                    </m:acc>
+                    <m:r>
+                      <a:rPr lang="en-US" b="0" i="1" smtClean="0">
+                        <a:latin typeface="Cambria Math" panose="02040503050406030204" pitchFamily="18" charset="0"/>
+                      </a:rPr>
+                      <m:t>)</m:t>
+                    </m:r>
+                  </m:oMath>
+                </a14:m>
+                <a:endParaRPr lang="en-US" dirty="0"/>
+              </a:p>
+              <a:p>
+                <a:pPr marL="0" indent="0">
+                  <a:buNone/>
+                </a:pPr>
+                <a:endParaRPr lang="en-US" dirty="0"/>
+              </a:p>
+              <a:p>
+                <a:endParaRPr lang="en-US" dirty="0"/>
+              </a:p>
+              <a:p>
+                <a:endParaRPr lang="en-US" dirty="0"/>
+              </a:p>
+            </p:txBody>
+          </p:sp>
+        </mc:Choice>
+        <mc:Fallback>
+          <p:sp>
+            <p:nvSpPr>
+              <p:cNvPr id="3" name="Content Placeholder 2">
+                <a:extLst>
+                  <a:ext uri="{FF2B5EF4-FFF2-40B4-BE49-F238E27FC236}">
+                    <a16:creationId xmlns:a16="http://schemas.microsoft.com/office/drawing/2014/main" id="{A9F0D293-2E99-8E01-9D02-C3EB766841D4}"/>
+                  </a:ext>
+                </a:extLst>
+              </p:cNvPr>
+              <p:cNvSpPr>
+                <a:spLocks noGrp="1" noRot="1" noChangeAspect="1" noMove="1" noResize="1" noEditPoints="1" noAdjustHandles="1" noChangeArrowheads="1" noChangeShapeType="1" noTextEdit="1"/>
+              </p:cNvSpPr>
+              <p:nvPr>
+                <p:ph idx="1"/>
+              </p:nvPr>
+            </p:nvSpPr>
+            <p:spPr>
+              <a:blipFill>
+                <a:blip r:embed="rId2"/>
+                <a:stretch>
+                  <a:fillRect l="-1043"/>
+                </a:stretch>
+              </a:blipFill>
+            </p:spPr>
+            <p:txBody>
+              <a:bodyPr/>
+              <a:lstStyle/>
+              <a:p>
+                <a:r>
+                  <a:rPr lang="en-US">
+                    <a:noFill/>
+                  </a:rPr>
+                  <a:t> </a:t>
+                </a:r>
+              </a:p>
+            </p:txBody>
+          </p:sp>
+        </mc:Fallback>
+      </mc:AlternateContent>
+    </p:spTree>
+    <p:extLst>
+      <p:ext uri="{BB962C8B-B14F-4D97-AF65-F5344CB8AC3E}">
+        <p14:creationId xmlns:p14="http://schemas.microsoft.com/office/powerpoint/2010/main" val="939528823"/>
+      </p:ext>
+    </p:extLst>
+  </p:cSld>
+  <p:clrMapOvr>
+    <a:masterClrMapping/>
+  </p:clrMapOvr>
+</p:sld>
+</file>
+
+<file path=ppt/slides/slide78.xml><?xml version="1.0" encoding="utf-8"?>
+<p:sld xmlns:a="http://schemas.openxmlformats.org/drawingml/2006/main" xmlns:r="http://schemas.openxmlformats.org/officeDocument/2006/relationships" xmlns:p="http://schemas.openxmlformats.org/presentationml/2006/main">
+  <p:cSld>
+    <p:spTree>
+      <p:nvGrpSpPr>
+        <p:cNvPr id="1" name="">
+          <a:extLst>
+            <a:ext uri="{FF2B5EF4-FFF2-40B4-BE49-F238E27FC236}">
+              <a16:creationId xmlns:a16="http://schemas.microsoft.com/office/drawing/2014/main" id="{857B0124-F2C3-D388-3D32-C9F41B159362}"/>
+            </a:ext>
+          </a:extLst>
+        </p:cNvPr>
+        <p:cNvGrpSpPr/>
+        <p:nvPr/>
+      </p:nvGrpSpPr>
+      <p:grpSpPr>
+        <a:xfrm>
+          <a:off x="0" y="0"/>
+          <a:ext cx="0" cy="0"/>
+          <a:chOff x="0" y="0"/>
+          <a:chExt cx="0" cy="0"/>
+        </a:xfrm>
+      </p:grpSpPr>
+      <p:sp>
+        <p:nvSpPr>
+          <p:cNvPr id="2" name="Title 1">
+            <a:extLst>
+              <a:ext uri="{FF2B5EF4-FFF2-40B4-BE49-F238E27FC236}">
+                <a16:creationId xmlns:a16="http://schemas.microsoft.com/office/drawing/2014/main" id="{7E90C5AF-27A6-2DE7-E719-D9C62BD3DC5C}"/>
+              </a:ext>
+            </a:extLst>
+          </p:cNvPr>
+          <p:cNvSpPr>
+            <a:spLocks noGrp="1"/>
+          </p:cNvSpPr>
+          <p:nvPr>
+            <p:ph type="title"/>
+          </p:nvPr>
+        </p:nvSpPr>
+        <p:spPr/>
+        <p:txBody>
+          <a:bodyPr/>
+          <a:lstStyle/>
+          <a:p>
+            <a:r>
+              <a:rPr lang="en-US" dirty="0"/>
+              <a:t>Lets Simplify 1..4 : answers</a:t>
+            </a:r>
+          </a:p>
+        </p:txBody>
+      </p:sp>
+      <mc:AlternateContent xmlns:mc="http://schemas.openxmlformats.org/markup-compatibility/2006">
+        <mc:Choice xmlns:a14="http://schemas.microsoft.com/office/drawing/2010/main" Requires="a14">
+          <p:sp>
+            <p:nvSpPr>
+              <p:cNvPr id="3" name="Content Placeholder 2">
+                <a:extLst>
+                  <a:ext uri="{FF2B5EF4-FFF2-40B4-BE49-F238E27FC236}">
+                    <a16:creationId xmlns:a16="http://schemas.microsoft.com/office/drawing/2014/main" id="{4A0895C6-0364-139E-297D-2D74CFF1C09A}"/>
+                  </a:ext>
+                </a:extLst>
+              </p:cNvPr>
+              <p:cNvSpPr>
+                <a:spLocks noGrp="1"/>
+              </p:cNvSpPr>
+              <p:nvPr>
+                <p:ph idx="1"/>
+              </p:nvPr>
+            </p:nvSpPr>
+            <p:spPr/>
+            <p:txBody>
+              <a:bodyPr>
+                <a:normAutofit fontScale="70000" lnSpcReduction="20000"/>
+              </a:bodyPr>
+              <a:lstStyle/>
+              <a:p>
+                <a14:m>
+                  <m:oMath xmlns:m="http://schemas.openxmlformats.org/officeDocument/2006/math">
+                    <m:r>
+                      <a:rPr lang="en-US" b="0" i="1" smtClean="0">
+                        <a:latin typeface="Cambria Math" panose="02040503050406030204" pitchFamily="18" charset="0"/>
+                      </a:rPr>
+                      <m:t>𝐴</m:t>
+                    </m:r>
+                    <m:r>
+                      <a:rPr lang="en-US" b="0" i="1" smtClean="0">
+                        <a:latin typeface="Cambria Math" panose="02040503050406030204" pitchFamily="18" charset="0"/>
+                      </a:rPr>
+                      <m:t>.</m:t>
+                    </m:r>
+                    <m:d>
+                      <m:dPr>
+                        <m:ctrlPr>
+                          <a:rPr lang="en-US" b="0" i="1" smtClean="0">
+                            <a:latin typeface="Cambria Math" panose="02040503050406030204" pitchFamily="18" charset="0"/>
+                          </a:rPr>
+                        </m:ctrlPr>
+                      </m:dPr>
+                      <m:e>
+                        <m:r>
+                          <a:rPr lang="en-US" b="0" i="1" smtClean="0">
+                            <a:latin typeface="Cambria Math" panose="02040503050406030204" pitchFamily="18" charset="0"/>
+                          </a:rPr>
+                          <m:t>𝐴</m:t>
+                        </m:r>
+                        <m:r>
+                          <a:rPr lang="en-US" b="0" i="1" smtClean="0">
+                            <a:latin typeface="Cambria Math" panose="02040503050406030204" pitchFamily="18" charset="0"/>
+                          </a:rPr>
+                          <m:t>+</m:t>
+                        </m:r>
+                        <m:r>
+                          <a:rPr lang="en-US" b="0" i="1" smtClean="0">
+                            <a:latin typeface="Cambria Math" panose="02040503050406030204" pitchFamily="18" charset="0"/>
+                          </a:rPr>
+                          <m:t>𝐵</m:t>
+                        </m:r>
+                      </m:e>
+                    </m:d>
+                  </m:oMath>
+                </a14:m>
+                <a:endParaRPr lang="en-US" dirty="0"/>
+              </a:p>
+              <a:p>
+                <a:pPr lvl="1"/>
+                <a:r>
+                  <a:rPr lang="en-US" dirty="0"/>
+                  <a:t>By Absorption law = A, OR</a:t>
+                </a:r>
+              </a:p>
+              <a:p>
+                <a:pPr lvl="2"/>
+                <a:r>
+                  <a:rPr lang="en-US" dirty="0"/>
+                  <a:t>A.A + A.B</a:t>
+                </a:r>
+              </a:p>
+              <a:p>
+                <a:pPr lvl="2"/>
+                <a:r>
+                  <a:rPr lang="en-US" dirty="0"/>
+                  <a:t>A + AB  </a:t>
+                </a:r>
+                <a:r>
+                  <a:rPr lang="en-US" dirty="0">
+                    <a:solidFill>
+                      <a:srgbClr val="00B050"/>
+                    </a:solidFill>
+                  </a:rPr>
+                  <a:t>//(A.A = A), Idempotent Law</a:t>
+                </a:r>
+              </a:p>
+              <a:p>
+                <a:pPr lvl="2"/>
+                <a:r>
+                  <a:rPr lang="en-US" dirty="0"/>
+                  <a:t>A (1+ B) </a:t>
+                </a:r>
+                <a:r>
+                  <a:rPr lang="en-US" dirty="0">
+                    <a:solidFill>
+                      <a:srgbClr val="00B050"/>
+                    </a:solidFill>
+                  </a:rPr>
+                  <a:t>// factor A out</a:t>
+                </a:r>
+              </a:p>
+              <a:p>
+                <a:pPr lvl="2"/>
+                <a:r>
+                  <a:rPr lang="en-US" dirty="0"/>
+                  <a:t>A </a:t>
+                </a:r>
+                <a:r>
+                  <a:rPr lang="en-US" dirty="0">
+                    <a:solidFill>
+                      <a:srgbClr val="00B050"/>
+                    </a:solidFill>
+                  </a:rPr>
+                  <a:t>// By null law 1+B = 1 and A.1 = A</a:t>
+                </a:r>
+                <a:endParaRPr lang="en-US" dirty="0"/>
+              </a:p>
+              <a:p>
+                <a14:m>
+                  <m:oMath xmlns:m="http://schemas.openxmlformats.org/officeDocument/2006/math">
+                    <m:r>
+                      <a:rPr lang="en-US" b="0" i="1" smtClean="0">
+                        <a:latin typeface="Cambria Math" panose="02040503050406030204" pitchFamily="18" charset="0"/>
+                      </a:rPr>
+                      <m:t>𝐴</m:t>
+                    </m:r>
+                    <m:r>
+                      <a:rPr lang="en-US" b="0" i="1" smtClean="0">
+                        <a:latin typeface="Cambria Math" panose="02040503050406030204" pitchFamily="18" charset="0"/>
+                      </a:rPr>
+                      <m:t>+</m:t>
+                    </m:r>
+                    <m:d>
+                      <m:dPr>
+                        <m:ctrlPr>
+                          <a:rPr lang="en-US" b="0" i="1" smtClean="0">
+                            <a:latin typeface="Cambria Math" panose="02040503050406030204" pitchFamily="18" charset="0"/>
+                          </a:rPr>
+                        </m:ctrlPr>
+                      </m:dPr>
+                      <m:e>
+                        <m:r>
+                          <a:rPr lang="en-US" b="0" i="1" smtClean="0">
+                            <a:latin typeface="Cambria Math" panose="02040503050406030204" pitchFamily="18" charset="0"/>
+                          </a:rPr>
+                          <m:t>𝐴</m:t>
+                        </m:r>
+                        <m:r>
+                          <a:rPr lang="en-US" b="0" i="1" smtClean="0">
+                            <a:latin typeface="Cambria Math" panose="02040503050406030204" pitchFamily="18" charset="0"/>
+                          </a:rPr>
+                          <m:t>.</m:t>
+                        </m:r>
+                        <m:r>
+                          <a:rPr lang="en-US" b="0" i="1" smtClean="0">
+                            <a:latin typeface="Cambria Math" panose="02040503050406030204" pitchFamily="18" charset="0"/>
+                          </a:rPr>
+                          <m:t>𝐵</m:t>
+                        </m:r>
+                      </m:e>
+                    </m:d>
+                  </m:oMath>
+                </a14:m>
+                <a:endParaRPr lang="en-US" dirty="0"/>
+              </a:p>
+              <a:p>
+                <a:pPr lvl="1"/>
+                <a:r>
+                  <a:rPr lang="en-US" dirty="0"/>
+                  <a:t>A</a:t>
+                </a:r>
+              </a:p>
+              <a:p>
+                <a14:m>
+                  <m:oMath xmlns:m="http://schemas.openxmlformats.org/officeDocument/2006/math">
+                    <m:acc>
+                      <m:accPr>
+                        <m:chr m:val="̅"/>
+                        <m:ctrlPr>
+                          <a:rPr lang="en-US" b="0" i="1" smtClean="0">
+                            <a:latin typeface="Cambria Math" panose="02040503050406030204" pitchFamily="18" charset="0"/>
+                          </a:rPr>
+                        </m:ctrlPr>
+                      </m:accPr>
+                      <m:e>
+                        <m:r>
+                          <a:rPr lang="en-US" b="0" i="1" smtClean="0">
+                            <a:latin typeface="Cambria Math" panose="02040503050406030204" pitchFamily="18" charset="0"/>
+                          </a:rPr>
+                          <m:t>𝐴</m:t>
+                        </m:r>
+                      </m:e>
+                    </m:acc>
+                    <m:r>
+                      <a:rPr lang="en-US" b="0" i="1" smtClean="0">
+                        <a:latin typeface="Cambria Math" panose="02040503050406030204" pitchFamily="18" charset="0"/>
+                      </a:rPr>
+                      <m:t>+</m:t>
+                    </m:r>
+                    <m:d>
+                      <m:dPr>
+                        <m:ctrlPr>
+                          <a:rPr lang="en-US" b="0" i="1" smtClean="0">
+                            <a:latin typeface="Cambria Math" panose="02040503050406030204" pitchFamily="18" charset="0"/>
+                          </a:rPr>
+                        </m:ctrlPr>
+                      </m:dPr>
+                      <m:e>
+                        <m:r>
+                          <a:rPr lang="en-US" b="0" i="1" smtClean="0">
+                            <a:latin typeface="Cambria Math" panose="02040503050406030204" pitchFamily="18" charset="0"/>
+                          </a:rPr>
+                          <m:t>𝐴</m:t>
+                        </m:r>
+                        <m:r>
+                          <a:rPr lang="en-US" b="0" i="1" smtClean="0">
+                            <a:latin typeface="Cambria Math" panose="02040503050406030204" pitchFamily="18" charset="0"/>
+                          </a:rPr>
+                          <m:t>.</m:t>
+                        </m:r>
+                        <m:r>
+                          <a:rPr lang="en-US" b="0" i="1" smtClean="0">
+                            <a:latin typeface="Cambria Math" panose="02040503050406030204" pitchFamily="18" charset="0"/>
+                          </a:rPr>
+                          <m:t>𝐵</m:t>
+                        </m:r>
+                      </m:e>
+                    </m:d>
+                  </m:oMath>
+                </a14:m>
+                <a:endParaRPr lang="en-US" b="0" dirty="0"/>
+              </a:p>
+              <a:p>
+                <a:pPr lvl="1"/>
+                <a14:m>
+                  <m:oMath xmlns:m="http://schemas.openxmlformats.org/officeDocument/2006/math">
+                    <m:d>
+                      <m:dPr>
+                        <m:ctrlPr>
+                          <a:rPr lang="en-US" b="0" i="1" smtClean="0">
+                            <a:latin typeface="Cambria Math" panose="02040503050406030204" pitchFamily="18" charset="0"/>
+                          </a:rPr>
+                        </m:ctrlPr>
+                      </m:dPr>
+                      <m:e>
+                        <m:acc>
+                          <m:accPr>
+                            <m:chr m:val="̅"/>
+                            <m:ctrlPr>
+                              <a:rPr lang="en-US" b="0" i="1" smtClean="0">
+                                <a:latin typeface="Cambria Math" panose="02040503050406030204" pitchFamily="18" charset="0"/>
+                              </a:rPr>
+                            </m:ctrlPr>
+                          </m:accPr>
+                          <m:e>
+                            <m:r>
+                              <a:rPr lang="en-US" b="0" i="1" smtClean="0">
+                                <a:latin typeface="Cambria Math" panose="02040503050406030204" pitchFamily="18" charset="0"/>
+                              </a:rPr>
+                              <m:t>𝐴</m:t>
+                            </m:r>
+                          </m:e>
+                        </m:acc>
+                        <m:r>
+                          <a:rPr lang="en-US" b="0" i="1" smtClean="0">
+                            <a:latin typeface="Cambria Math" panose="02040503050406030204" pitchFamily="18" charset="0"/>
+                          </a:rPr>
+                          <m:t>+</m:t>
+                        </m:r>
+                        <m:r>
+                          <a:rPr lang="en-US" b="0" i="1" smtClean="0">
+                            <a:latin typeface="Cambria Math" panose="02040503050406030204" pitchFamily="18" charset="0"/>
+                          </a:rPr>
+                          <m:t>𝐴</m:t>
+                        </m:r>
+                      </m:e>
+                    </m:d>
+                    <m:r>
+                      <a:rPr lang="en-US" b="0" i="1" smtClean="0">
+                        <a:latin typeface="Cambria Math" panose="02040503050406030204" pitchFamily="18" charset="0"/>
+                      </a:rPr>
+                      <m:t>.(</m:t>
+                    </m:r>
+                    <m:acc>
+                      <m:accPr>
+                        <m:chr m:val="̅"/>
+                        <m:ctrlPr>
+                          <a:rPr lang="en-US" i="1">
+                            <a:latin typeface="Cambria Math" panose="02040503050406030204" pitchFamily="18" charset="0"/>
+                          </a:rPr>
+                        </m:ctrlPr>
+                      </m:accPr>
+                      <m:e>
+                        <m:r>
+                          <a:rPr lang="en-US" i="1">
+                            <a:latin typeface="Cambria Math" panose="02040503050406030204" pitchFamily="18" charset="0"/>
+                          </a:rPr>
+                          <m:t>𝐴</m:t>
+                        </m:r>
+                      </m:e>
+                    </m:acc>
+                    <m:r>
+                      <a:rPr lang="en-US" i="1">
+                        <a:latin typeface="Cambria Math" panose="02040503050406030204" pitchFamily="18" charset="0"/>
+                      </a:rPr>
+                      <m:t>+</m:t>
+                    </m:r>
+                  </m:oMath>
+                </a14:m>
+                <a:r>
+                  <a:rPr lang="en-US" b="0" i="1" dirty="0">
+                    <a:latin typeface="Cambria Math" panose="02040503050406030204" pitchFamily="18" charset="0"/>
+                  </a:rPr>
+                  <a:t> B) </a:t>
+                </a:r>
+                <a:r>
+                  <a:rPr lang="en-US" dirty="0">
+                    <a:solidFill>
+                      <a:srgbClr val="00B050"/>
+                    </a:solidFill>
+                  </a:rPr>
+                  <a:t>//Distribution law</a:t>
+                </a:r>
+                <a:endParaRPr lang="en-US" b="0" i="1" dirty="0">
+                  <a:latin typeface="Cambria Math" panose="02040503050406030204" pitchFamily="18" charset="0"/>
+                </a:endParaRPr>
+              </a:p>
+              <a:p>
+                <a:pPr lvl="1"/>
+                <a:r>
+                  <a:rPr lang="en-US" i="1" dirty="0">
+                    <a:latin typeface="Cambria Math" panose="02040503050406030204" pitchFamily="18" charset="0"/>
+                  </a:rPr>
+                  <a:t>1.</a:t>
+                </a:r>
+                <a:r>
+                  <a:rPr lang="en-US" b="0" dirty="0"/>
+                  <a:t> </a:t>
+                </a:r>
+                <a14:m>
+                  <m:oMath xmlns:m="http://schemas.openxmlformats.org/officeDocument/2006/math">
+                    <m:r>
+                      <a:rPr lang="en-US" b="0" i="0" smtClean="0">
+                        <a:latin typeface="Cambria Math" panose="02040503050406030204" pitchFamily="18" charset="0"/>
+                      </a:rPr>
+                      <m:t>(</m:t>
+                    </m:r>
+                    <m:acc>
+                      <m:accPr>
+                        <m:chr m:val="̅"/>
+                        <m:ctrlPr>
+                          <a:rPr lang="en-US" i="1" smtClean="0">
+                            <a:latin typeface="Cambria Math" panose="02040503050406030204" pitchFamily="18" charset="0"/>
+                          </a:rPr>
+                        </m:ctrlPr>
+                      </m:accPr>
+                      <m:e>
+                        <m:r>
+                          <a:rPr lang="en-US" i="1">
+                            <a:latin typeface="Cambria Math" panose="02040503050406030204" pitchFamily="18" charset="0"/>
+                          </a:rPr>
+                          <m:t>𝐴</m:t>
+                        </m:r>
+                      </m:e>
+                    </m:acc>
+                    <m:r>
+                      <a:rPr lang="en-US" i="1">
+                        <a:latin typeface="Cambria Math" panose="02040503050406030204" pitchFamily="18" charset="0"/>
+                      </a:rPr>
+                      <m:t>+</m:t>
+                    </m:r>
+                  </m:oMath>
+                </a14:m>
+                <a:r>
+                  <a:rPr lang="en-US" b="0" i="1" dirty="0">
+                    <a:latin typeface="Cambria Math" panose="02040503050406030204" pitchFamily="18" charset="0"/>
+                  </a:rPr>
+                  <a:t> B) </a:t>
+                </a:r>
+                <a:r>
+                  <a:rPr lang="en-US" dirty="0">
+                    <a:solidFill>
+                      <a:srgbClr val="00B050"/>
+                    </a:solidFill>
+                  </a:rPr>
+                  <a:t>// By Complement law </a:t>
+                </a:r>
+                <a14:m>
+                  <m:oMath xmlns:m="http://schemas.openxmlformats.org/officeDocument/2006/math">
+                    <m:d>
+                      <m:dPr>
+                        <m:ctrlPr>
+                          <a:rPr lang="en-US">
+                            <a:solidFill>
+                              <a:srgbClr val="00B050"/>
+                            </a:solidFill>
+                          </a:rPr>
+                        </m:ctrlPr>
+                      </m:dPr>
+                      <m:e>
+                        <m:acc>
+                          <m:accPr>
+                            <m:chr m:val="̅"/>
+                            <m:ctrlPr>
+                              <a:rPr lang="en-US">
+                                <a:solidFill>
+                                  <a:srgbClr val="00B050"/>
+                                </a:solidFill>
+                              </a:rPr>
+                            </m:ctrlPr>
+                          </m:accPr>
+                          <m:e>
+                            <m:r>
+                              <a:rPr lang="en-US">
+                                <a:solidFill>
+                                  <a:srgbClr val="00B050"/>
+                                </a:solidFill>
+                              </a:rPr>
+                              <m:t>𝐴</m:t>
+                            </m:r>
+                          </m:e>
+                        </m:acc>
+                        <m:r>
+                          <a:rPr lang="en-US">
+                            <a:solidFill>
+                              <a:srgbClr val="00B050"/>
+                            </a:solidFill>
+                          </a:rPr>
+                          <m:t>+</m:t>
+                        </m:r>
+                        <m:r>
+                          <a:rPr lang="en-US">
+                            <a:solidFill>
+                              <a:srgbClr val="00B050"/>
+                            </a:solidFill>
+                          </a:rPr>
+                          <m:t>𝐴</m:t>
+                        </m:r>
+                      </m:e>
+                    </m:d>
+                    <m:r>
+                      <a:rPr lang="en-US">
+                        <a:solidFill>
+                          <a:srgbClr val="00B050"/>
+                        </a:solidFill>
+                      </a:rPr>
+                      <m:t>=1</m:t>
+                    </m:r>
+                  </m:oMath>
+                </a14:m>
+                <a:endParaRPr lang="en-US" dirty="0">
+                  <a:solidFill>
+                    <a:srgbClr val="00B050"/>
+                  </a:solidFill>
+                </a:endParaRPr>
+              </a:p>
+              <a:p>
+                <a:pPr lvl="1"/>
+                <a14:m>
+                  <m:oMath xmlns:m="http://schemas.openxmlformats.org/officeDocument/2006/math">
+                    <m:acc>
+                      <m:accPr>
+                        <m:chr m:val="̅"/>
+                        <m:ctrlPr>
+                          <a:rPr lang="en-US" b="0" i="1" smtClean="0">
+                            <a:latin typeface="Cambria Math" panose="02040503050406030204" pitchFamily="18" charset="0"/>
+                          </a:rPr>
+                        </m:ctrlPr>
+                      </m:accPr>
+                      <m:e>
+                        <m:r>
+                          <a:rPr lang="en-US" b="0" i="1" smtClean="0">
+                            <a:latin typeface="Cambria Math" panose="02040503050406030204" pitchFamily="18" charset="0"/>
+                          </a:rPr>
+                          <m:t>𝐴</m:t>
+                        </m:r>
+                      </m:e>
+                    </m:acc>
+                    <m:r>
+                      <a:rPr lang="en-US" b="0" i="1" smtClean="0">
+                        <a:latin typeface="Cambria Math" panose="02040503050406030204" pitchFamily="18" charset="0"/>
+                      </a:rPr>
+                      <m:t>+</m:t>
+                    </m:r>
+                  </m:oMath>
+                </a14:m>
+                <a:r>
+                  <a:rPr lang="en-US" b="0" dirty="0"/>
+                  <a:t> B </a:t>
+                </a:r>
+              </a:p>
+              <a:p>
+                <a:r>
+                  <a:rPr lang="en-US" b="0" dirty="0"/>
+                  <a:t>(</a:t>
+                </a:r>
+                <a14:m>
+                  <m:oMath xmlns:m="http://schemas.openxmlformats.org/officeDocument/2006/math">
+                    <m:r>
+                      <a:rPr lang="en-US" b="0" i="1" smtClean="0">
+                        <a:latin typeface="Cambria Math" panose="02040503050406030204" pitchFamily="18" charset="0"/>
+                      </a:rPr>
+                      <m:t>𝐴</m:t>
+                    </m:r>
+                    <m:r>
+                      <a:rPr lang="en-US" b="0" i="1" smtClean="0">
+                        <a:latin typeface="Cambria Math" panose="02040503050406030204" pitchFamily="18" charset="0"/>
+                      </a:rPr>
+                      <m:t>+</m:t>
+                    </m:r>
+                    <m:r>
+                      <a:rPr lang="en-US" b="0" i="1" smtClean="0">
+                        <a:latin typeface="Cambria Math" panose="02040503050406030204" pitchFamily="18" charset="0"/>
+                      </a:rPr>
+                      <m:t>𝐵</m:t>
+                    </m:r>
+                    <m:r>
+                      <a:rPr lang="en-US" b="0" i="1" smtClean="0">
+                        <a:latin typeface="Cambria Math" panose="02040503050406030204" pitchFamily="18" charset="0"/>
+                      </a:rPr>
+                      <m:t>).</m:t>
+                    </m:r>
+                    <m:d>
+                      <m:dPr>
+                        <m:ctrlPr>
+                          <a:rPr lang="en-US" b="0" i="1" smtClean="0">
+                            <a:latin typeface="Cambria Math" panose="02040503050406030204" pitchFamily="18" charset="0"/>
+                          </a:rPr>
+                        </m:ctrlPr>
+                      </m:dPr>
+                      <m:e>
+                        <m:r>
+                          <a:rPr lang="en-US" b="0" i="1" smtClean="0">
+                            <a:latin typeface="Cambria Math" panose="02040503050406030204" pitchFamily="18" charset="0"/>
+                          </a:rPr>
+                          <m:t>𝐴</m:t>
+                        </m:r>
+                        <m:r>
+                          <a:rPr lang="en-US" b="0" i="1" smtClean="0">
+                            <a:latin typeface="Cambria Math" panose="02040503050406030204" pitchFamily="18" charset="0"/>
+                          </a:rPr>
+                          <m:t>+</m:t>
+                        </m:r>
+                        <m:acc>
+                          <m:accPr>
+                            <m:chr m:val="̅"/>
+                            <m:ctrlPr>
+                              <a:rPr lang="en-US" b="0" i="1" smtClean="0">
+                                <a:latin typeface="Cambria Math" panose="02040503050406030204" pitchFamily="18" charset="0"/>
+                              </a:rPr>
+                            </m:ctrlPr>
+                          </m:accPr>
+                          <m:e>
+                            <m:r>
+                              <a:rPr lang="en-US" b="0" i="1" smtClean="0">
+                                <a:latin typeface="Cambria Math" panose="02040503050406030204" pitchFamily="18" charset="0"/>
+                              </a:rPr>
+                              <m:t>𝐵</m:t>
+                            </m:r>
+                          </m:e>
+                        </m:acc>
+                      </m:e>
+                    </m:d>
+                  </m:oMath>
+                </a14:m>
+                <a:endParaRPr lang="en-US" b="0" dirty="0"/>
+              </a:p>
+              <a:p>
+                <a:pPr lvl="1"/>
+                <a:r>
+                  <a:rPr lang="en-US" b="0" dirty="0"/>
+                  <a:t>(</a:t>
+                </a:r>
+                <a14:m>
+                  <m:oMath xmlns:m="http://schemas.openxmlformats.org/officeDocument/2006/math">
+                    <m:r>
+                      <a:rPr lang="en-US" b="0" i="1" smtClean="0">
+                        <a:latin typeface="Cambria Math" panose="02040503050406030204" pitchFamily="18" charset="0"/>
+                      </a:rPr>
+                      <m:t>𝐴</m:t>
+                    </m:r>
+                    <m:r>
+                      <a:rPr lang="en-US" b="0" i="1" smtClean="0">
+                        <a:latin typeface="Cambria Math" panose="02040503050406030204" pitchFamily="18" charset="0"/>
+                      </a:rPr>
+                      <m:t>.</m:t>
+                    </m:r>
+                    <m:r>
+                      <a:rPr lang="en-US" b="0" i="1" smtClean="0">
+                        <a:latin typeface="Cambria Math" panose="02040503050406030204" pitchFamily="18" charset="0"/>
+                      </a:rPr>
+                      <m:t>𝐴</m:t>
+                    </m:r>
+                    <m:r>
+                      <a:rPr lang="en-US" b="0" i="1" smtClean="0">
+                        <a:latin typeface="Cambria Math" panose="02040503050406030204" pitchFamily="18" charset="0"/>
+                      </a:rPr>
+                      <m:t>)</m:t>
+                    </m:r>
+                    <m:r>
+                      <a:rPr lang="en-US" b="0" i="1" smtClean="0">
+                        <a:latin typeface="Cambria Math" panose="02040503050406030204" pitchFamily="18" charset="0"/>
+                      </a:rPr>
+                      <m:t>+</m:t>
+                    </m:r>
+                    <m:r>
+                      <a:rPr lang="en-US" b="0" i="1" smtClean="0">
+                        <a:latin typeface="Cambria Math" panose="02040503050406030204" pitchFamily="18" charset="0"/>
+                      </a:rPr>
+                      <m:t>(</m:t>
+                    </m:r>
+                    <m:r>
+                      <a:rPr lang="en-US" b="0" i="1" smtClean="0">
+                        <a:latin typeface="Cambria Math" panose="02040503050406030204" pitchFamily="18" charset="0"/>
+                      </a:rPr>
+                      <m:t>𝐵</m:t>
+                    </m:r>
+                    <m:r>
+                      <a:rPr lang="en-US" b="0" i="1" smtClean="0">
+                        <a:latin typeface="Cambria Math" panose="02040503050406030204" pitchFamily="18" charset="0"/>
+                      </a:rPr>
+                      <m:t>.</m:t>
+                    </m:r>
+                    <m:acc>
+                      <m:accPr>
+                        <m:chr m:val="̅"/>
+                        <m:ctrlPr>
+                          <a:rPr lang="en-US" b="0" i="1" smtClean="0">
+                            <a:latin typeface="Cambria Math" panose="02040503050406030204" pitchFamily="18" charset="0"/>
+                          </a:rPr>
+                        </m:ctrlPr>
+                      </m:accPr>
+                      <m:e>
+                        <m:r>
+                          <a:rPr lang="en-US" b="0" i="1" smtClean="0">
+                            <a:latin typeface="Cambria Math" panose="02040503050406030204" pitchFamily="18" charset="0"/>
+                          </a:rPr>
+                          <m:t>𝐵</m:t>
+                        </m:r>
+                      </m:e>
+                    </m:acc>
+                    <m:r>
+                      <a:rPr lang="en-US" b="0" i="1" smtClean="0">
+                        <a:latin typeface="Cambria Math" panose="02040503050406030204" pitchFamily="18" charset="0"/>
+                      </a:rPr>
+                      <m:t>)</m:t>
+                    </m:r>
+                  </m:oMath>
+                </a14:m>
+                <a:r>
+                  <a:rPr lang="en-US" dirty="0"/>
+                  <a:t> </a:t>
+                </a:r>
+                <a:r>
+                  <a:rPr lang="en-US" dirty="0">
+                    <a:solidFill>
+                      <a:srgbClr val="00B050"/>
+                    </a:solidFill>
+                  </a:rPr>
+                  <a:t>//Distribution law</a:t>
+                </a:r>
+              </a:p>
+              <a:p>
+                <a:pPr lvl="1"/>
+                <a:r>
+                  <a:rPr lang="en-US" b="0" dirty="0"/>
+                  <a:t>A</a:t>
+                </a:r>
+                <a14:m>
+                  <m:oMath xmlns:m="http://schemas.openxmlformats.org/officeDocument/2006/math">
+                    <m:r>
+                      <a:rPr lang="en-US" b="0" i="1" smtClean="0">
+                        <a:latin typeface="Cambria Math" panose="02040503050406030204" pitchFamily="18" charset="0"/>
+                      </a:rPr>
+                      <m:t>+</m:t>
+                    </m:r>
+                    <m:r>
+                      <a:rPr lang="en-US" b="0" i="1" smtClean="0">
+                        <a:latin typeface="Cambria Math" panose="02040503050406030204" pitchFamily="18" charset="0"/>
+                      </a:rPr>
+                      <m:t>0</m:t>
+                    </m:r>
+                  </m:oMath>
+                </a14:m>
+                <a:r>
+                  <a:rPr lang="en-US" dirty="0"/>
+                  <a:t> </a:t>
+                </a:r>
+                <a:r>
+                  <a:rPr lang="en-US" dirty="0">
+                    <a:solidFill>
+                      <a:srgbClr val="00B050"/>
+                    </a:solidFill>
+                  </a:rPr>
+                  <a:t>//Idempotent law + Complement law</a:t>
+                </a:r>
+              </a:p>
+              <a:p>
+                <a:pPr lvl="1"/>
+                <a:r>
+                  <a:rPr lang="en-US" b="0" dirty="0"/>
+                  <a:t>A</a:t>
+                </a:r>
+                <a:endParaRPr lang="en-US" dirty="0">
+                  <a:solidFill>
+                    <a:srgbClr val="00B050"/>
+                  </a:solidFill>
+                </a:endParaRPr>
+              </a:p>
+              <a:p>
+                <a:pPr lvl="1"/>
+                <a:endParaRPr lang="en-US" dirty="0"/>
+              </a:p>
+              <a:p>
+                <a:pPr lvl="1"/>
+                <a:endParaRPr lang="en-US" dirty="0"/>
+              </a:p>
+              <a:p>
+                <a:pPr lvl="1"/>
+                <a:endParaRPr lang="en-US" dirty="0"/>
+              </a:p>
+              <a:p>
+                <a:endParaRPr lang="en-US" dirty="0"/>
+              </a:p>
+              <a:p>
+                <a:endParaRPr lang="en-US" dirty="0"/>
+              </a:p>
+              <a:p>
+                <a:endParaRPr lang="en-US" dirty="0"/>
+              </a:p>
+            </p:txBody>
+          </p:sp>
+        </mc:Choice>
+        <mc:Fallback>
+          <p:sp>
+            <p:nvSpPr>
+              <p:cNvPr id="3" name="Content Placeholder 2">
+                <a:extLst>
+                  <a:ext uri="{FF2B5EF4-FFF2-40B4-BE49-F238E27FC236}">
+                    <a16:creationId xmlns:a16="http://schemas.microsoft.com/office/drawing/2014/main" id="{4A0895C6-0364-139E-297D-2D74CFF1C09A}"/>
+                  </a:ext>
+                </a:extLst>
+              </p:cNvPr>
+              <p:cNvSpPr>
+                <a:spLocks noGrp="1" noRot="1" noChangeAspect="1" noMove="1" noResize="1" noEditPoints="1" noAdjustHandles="1" noChangeArrowheads="1" noChangeShapeType="1" noTextEdit="1"/>
+              </p:cNvSpPr>
+              <p:nvPr>
+                <p:ph idx="1"/>
+              </p:nvPr>
+            </p:nvSpPr>
+            <p:spPr>
+              <a:blipFill>
+                <a:blip r:embed="rId2"/>
+                <a:stretch>
+                  <a:fillRect l="-522" t="-1120" b="-1541"/>
+                </a:stretch>
+              </a:blipFill>
+            </p:spPr>
+            <p:txBody>
+              <a:bodyPr/>
+              <a:lstStyle/>
+              <a:p>
+                <a:r>
+                  <a:rPr lang="en-US">
+                    <a:noFill/>
+                  </a:rPr>
+                  <a:t> </a:t>
+                </a:r>
+              </a:p>
+            </p:txBody>
+          </p:sp>
+        </mc:Fallback>
+      </mc:AlternateContent>
+    </p:spTree>
+    <p:extLst>
+      <p:ext uri="{BB962C8B-B14F-4D97-AF65-F5344CB8AC3E}">
+        <p14:creationId xmlns:p14="http://schemas.microsoft.com/office/powerpoint/2010/main" val="1068270304"/>
+      </p:ext>
+    </p:extLst>
+  </p:cSld>
+  <p:clrMapOvr>
+    <a:masterClrMapping/>
+  </p:clrMapOvr>
+</p:sld>
+</file>
+
+<file path=ppt/slides/slide79.xml><?xml version="1.0" encoding="utf-8"?>
+<p:sld xmlns:a="http://schemas.openxmlformats.org/drawingml/2006/main" xmlns:r="http://schemas.openxmlformats.org/officeDocument/2006/relationships" xmlns:p="http://schemas.openxmlformats.org/presentationml/2006/main">
+  <p:cSld>
+    <p:spTree>
+      <p:nvGrpSpPr>
+        <p:cNvPr id="1" name=""/>
+        <p:cNvGrpSpPr/>
+        <p:nvPr/>
+      </p:nvGrpSpPr>
+      <p:grpSpPr>
+        <a:xfrm>
+          <a:off x="0" y="0"/>
+          <a:ext cx="0" cy="0"/>
+          <a:chOff x="0" y="0"/>
+          <a:chExt cx="0" cy="0"/>
+        </a:xfrm>
+      </p:grpSpPr>
+      <p:sp>
+        <p:nvSpPr>
+          <p:cNvPr id="2" name="Title 1">
+            <a:extLst>
+              <a:ext uri="{FF2B5EF4-FFF2-40B4-BE49-F238E27FC236}">
+                <a16:creationId xmlns:a16="http://schemas.microsoft.com/office/drawing/2014/main" id="{2DA01777-7C6F-76BE-45C2-4D03B4DC52B6}"/>
+              </a:ext>
+            </a:extLst>
+          </p:cNvPr>
+          <p:cNvSpPr>
+            <a:spLocks noGrp="1"/>
+          </p:cNvSpPr>
+          <p:nvPr>
+            <p:ph type="title"/>
+          </p:nvPr>
+        </p:nvSpPr>
+        <p:spPr/>
+        <p:txBody>
+          <a:bodyPr/>
+          <a:lstStyle/>
+          <a:p>
+            <a:r>
+              <a:rPr lang="en-US" dirty="0"/>
+              <a:t>Lets Simplify 5..11</a:t>
+            </a:r>
+          </a:p>
+        </p:txBody>
+      </p:sp>
+      <mc:AlternateContent xmlns:mc="http://schemas.openxmlformats.org/markup-compatibility/2006">
+        <mc:Choice xmlns:a14="http://schemas.microsoft.com/office/drawing/2010/main" Requires="a14">
+          <p:sp>
+            <p:nvSpPr>
+              <p:cNvPr id="3" name="Content Placeholder 2">
+                <a:extLst>
+                  <a:ext uri="{FF2B5EF4-FFF2-40B4-BE49-F238E27FC236}">
+                    <a16:creationId xmlns:a16="http://schemas.microsoft.com/office/drawing/2014/main" id="{B12C71F2-ACC9-E416-C317-D9E32AD458D3}"/>
+                  </a:ext>
+                </a:extLst>
+              </p:cNvPr>
+              <p:cNvSpPr>
+                <a:spLocks noGrp="1"/>
+              </p:cNvSpPr>
+              <p:nvPr>
+                <p:ph idx="1"/>
+              </p:nvPr>
+            </p:nvSpPr>
+            <p:spPr/>
+            <p:txBody>
+              <a:bodyPr/>
+              <a:lstStyle/>
+              <a:p>
+                <a:r>
+                  <a:rPr lang="en-US" dirty="0"/>
+                  <a:t>These are hard , think of them as puzzles</a:t>
+                </a:r>
+                <a:endParaRPr lang="en-US" i="1" dirty="0">
+                  <a:latin typeface="Cambria Math" panose="02040503050406030204" pitchFamily="18" charset="0"/>
+                </a:endParaRPr>
+              </a:p>
+              <a:p>
+                <a:pPr lvl="1"/>
+                <a14:m>
+                  <m:oMath xmlns:m="http://schemas.openxmlformats.org/officeDocument/2006/math">
+                    <m:d>
+                      <m:dPr>
+                        <m:ctrlPr>
+                          <a:rPr lang="en-US" i="1" smtClean="0">
+                            <a:latin typeface="Cambria Math" panose="02040503050406030204" pitchFamily="18" charset="0"/>
+                          </a:rPr>
+                        </m:ctrlPr>
+                      </m:dPr>
+                      <m:e>
+                        <m:r>
+                          <a:rPr lang="en-US" i="1">
+                            <a:latin typeface="Cambria Math" panose="02040503050406030204" pitchFamily="18" charset="0"/>
+                          </a:rPr>
+                          <m:t>𝐴</m:t>
+                        </m:r>
+                        <m:r>
+                          <a:rPr lang="en-US" i="1">
+                            <a:latin typeface="Cambria Math" panose="02040503050406030204" pitchFamily="18" charset="0"/>
+                          </a:rPr>
+                          <m:t>.</m:t>
+                        </m:r>
+                        <m:r>
+                          <a:rPr lang="en-US" i="1">
+                            <a:latin typeface="Cambria Math" panose="02040503050406030204" pitchFamily="18" charset="0"/>
+                          </a:rPr>
+                          <m:t>𝐵</m:t>
+                        </m:r>
+                      </m:e>
+                    </m:d>
+                    <m:r>
+                      <a:rPr lang="en-US" i="1">
+                        <a:latin typeface="Cambria Math" panose="02040503050406030204" pitchFamily="18" charset="0"/>
+                      </a:rPr>
+                      <m:t>+</m:t>
+                    </m:r>
+                    <m:d>
+                      <m:dPr>
+                        <m:ctrlPr>
+                          <a:rPr lang="en-US" b="0" i="1" smtClean="0">
+                            <a:latin typeface="Cambria Math" panose="02040503050406030204" pitchFamily="18" charset="0"/>
+                          </a:rPr>
+                        </m:ctrlPr>
+                      </m:dPr>
+                      <m:e>
+                        <m:r>
+                          <a:rPr lang="en-US" i="1">
+                            <a:latin typeface="Cambria Math" panose="02040503050406030204" pitchFamily="18" charset="0"/>
+                          </a:rPr>
+                          <m:t>𝐴</m:t>
+                        </m:r>
+                        <m:r>
+                          <a:rPr lang="en-US" i="1">
+                            <a:latin typeface="Cambria Math" panose="02040503050406030204" pitchFamily="18" charset="0"/>
+                          </a:rPr>
+                          <m:t>.</m:t>
+                        </m:r>
+                        <m:acc>
+                          <m:accPr>
+                            <m:chr m:val="̅"/>
+                            <m:ctrlPr>
+                              <a:rPr lang="en-US" i="1">
+                                <a:latin typeface="Cambria Math" panose="02040503050406030204" pitchFamily="18" charset="0"/>
+                              </a:rPr>
+                            </m:ctrlPr>
+                          </m:accPr>
+                          <m:e>
+                            <m:r>
+                              <a:rPr lang="en-US" i="1">
+                                <a:latin typeface="Cambria Math" panose="02040503050406030204" pitchFamily="18" charset="0"/>
+                              </a:rPr>
+                              <m:t>𝐵</m:t>
+                            </m:r>
+                          </m:e>
+                        </m:acc>
+                      </m:e>
+                    </m:d>
+                    <m:r>
+                      <a:rPr lang="en-US" i="1">
+                        <a:latin typeface="Cambria Math" panose="02040503050406030204" pitchFamily="18" charset="0"/>
+                      </a:rPr>
+                      <m:t>+</m:t>
+                    </m:r>
+                    <m:d>
+                      <m:dPr>
+                        <m:ctrlPr>
+                          <a:rPr lang="en-US" i="1">
+                            <a:latin typeface="Cambria Math" panose="02040503050406030204" pitchFamily="18" charset="0"/>
+                          </a:rPr>
+                        </m:ctrlPr>
+                      </m:dPr>
+                      <m:e>
+                        <m:acc>
+                          <m:accPr>
+                            <m:chr m:val="̅"/>
+                            <m:ctrlPr>
+                              <a:rPr lang="en-US" i="1">
+                                <a:latin typeface="Cambria Math" panose="02040503050406030204" pitchFamily="18" charset="0"/>
+                              </a:rPr>
+                            </m:ctrlPr>
+                          </m:accPr>
+                          <m:e>
+                            <m:r>
+                              <a:rPr lang="en-US" i="1">
+                                <a:latin typeface="Cambria Math" panose="02040503050406030204" pitchFamily="18" charset="0"/>
+                              </a:rPr>
+                              <m:t>𝐴</m:t>
+                            </m:r>
+                          </m:e>
+                        </m:acc>
+                        <m:r>
+                          <a:rPr lang="en-US" i="1">
+                            <a:latin typeface="Cambria Math" panose="02040503050406030204" pitchFamily="18" charset="0"/>
+                          </a:rPr>
+                          <m:t>.</m:t>
+                        </m:r>
+                        <m:r>
+                          <a:rPr lang="en-US" i="1">
+                            <a:latin typeface="Cambria Math" panose="02040503050406030204" pitchFamily="18" charset="0"/>
+                          </a:rPr>
+                          <m:t>𝐶</m:t>
+                        </m:r>
+                      </m:e>
+                    </m:d>
+                  </m:oMath>
+                </a14:m>
+                <a:endParaRPr lang="en-US" i="1" dirty="0">
+                  <a:latin typeface="Cambria Math" panose="02040503050406030204" pitchFamily="18" charset="0"/>
+                </a:endParaRPr>
+              </a:p>
+              <a:p>
+                <a:pPr lvl="1"/>
+                <a14:m>
+                  <m:oMath xmlns:m="http://schemas.openxmlformats.org/officeDocument/2006/math">
+                    <m:d>
+                      <m:dPr>
+                        <m:ctrlPr>
+                          <a:rPr lang="en-US" i="1" smtClean="0">
+                            <a:latin typeface="Cambria Math" panose="02040503050406030204" pitchFamily="18" charset="0"/>
+                          </a:rPr>
+                        </m:ctrlPr>
+                      </m:dPr>
+                      <m:e>
+                        <m:r>
+                          <a:rPr lang="en-US" i="1">
+                            <a:latin typeface="Cambria Math" panose="02040503050406030204" pitchFamily="18" charset="0"/>
+                          </a:rPr>
+                          <m:t>𝐴</m:t>
+                        </m:r>
+                        <m:r>
+                          <a:rPr lang="en-US" b="0" i="1" smtClean="0">
+                            <a:latin typeface="Cambria Math" panose="02040503050406030204" pitchFamily="18" charset="0"/>
+                          </a:rPr>
+                          <m:t>+</m:t>
+                        </m:r>
+                        <m:r>
+                          <a:rPr lang="en-US" i="1">
+                            <a:latin typeface="Cambria Math" panose="02040503050406030204" pitchFamily="18" charset="0"/>
+                          </a:rPr>
+                          <m:t>𝐵</m:t>
+                        </m:r>
+                      </m:e>
+                    </m:d>
+                    <m:r>
+                      <a:rPr lang="en-US" b="0" i="1" smtClean="0">
+                        <a:latin typeface="Cambria Math" panose="02040503050406030204" pitchFamily="18" charset="0"/>
+                      </a:rPr>
+                      <m:t>.</m:t>
+                    </m:r>
+                    <m:d>
+                      <m:dPr>
+                        <m:ctrlPr>
+                          <a:rPr lang="en-US" b="0" i="1" smtClean="0">
+                            <a:latin typeface="Cambria Math" panose="02040503050406030204" pitchFamily="18" charset="0"/>
+                          </a:rPr>
+                        </m:ctrlPr>
+                      </m:dPr>
+                      <m:e>
+                        <m:r>
+                          <a:rPr lang="en-US" i="1">
+                            <a:latin typeface="Cambria Math" panose="02040503050406030204" pitchFamily="18" charset="0"/>
+                          </a:rPr>
+                          <m:t>𝐴</m:t>
+                        </m:r>
+                        <m:r>
+                          <a:rPr lang="en-US" b="0" i="1" smtClean="0">
+                            <a:latin typeface="Cambria Math" panose="02040503050406030204" pitchFamily="18" charset="0"/>
+                          </a:rPr>
+                          <m:t>+</m:t>
+                        </m:r>
+                        <m:acc>
+                          <m:accPr>
+                            <m:chr m:val="̅"/>
+                            <m:ctrlPr>
+                              <a:rPr lang="en-US" i="1">
+                                <a:latin typeface="Cambria Math" panose="02040503050406030204" pitchFamily="18" charset="0"/>
+                              </a:rPr>
+                            </m:ctrlPr>
+                          </m:accPr>
+                          <m:e>
+                            <m:r>
+                              <a:rPr lang="en-US" i="1">
+                                <a:latin typeface="Cambria Math" panose="02040503050406030204" pitchFamily="18" charset="0"/>
+                              </a:rPr>
+                              <m:t>𝐵</m:t>
+                            </m:r>
+                          </m:e>
+                        </m:acc>
+                      </m:e>
+                    </m:d>
+                    <m:r>
+                      <a:rPr lang="en-US" b="0" i="1" smtClean="0">
+                        <a:latin typeface="Cambria Math" panose="02040503050406030204" pitchFamily="18" charset="0"/>
+                      </a:rPr>
+                      <m:t>.</m:t>
+                    </m:r>
+                    <m:d>
+                      <m:dPr>
+                        <m:ctrlPr>
+                          <a:rPr lang="en-US" i="1">
+                            <a:latin typeface="Cambria Math" panose="02040503050406030204" pitchFamily="18" charset="0"/>
+                          </a:rPr>
+                        </m:ctrlPr>
+                      </m:dPr>
+                      <m:e>
+                        <m:acc>
+                          <m:accPr>
+                            <m:chr m:val="̅"/>
+                            <m:ctrlPr>
+                              <a:rPr lang="en-US" i="1">
+                                <a:latin typeface="Cambria Math" panose="02040503050406030204" pitchFamily="18" charset="0"/>
+                              </a:rPr>
+                            </m:ctrlPr>
+                          </m:accPr>
+                          <m:e>
+                            <m:r>
+                              <a:rPr lang="en-US" i="1">
+                                <a:latin typeface="Cambria Math" panose="02040503050406030204" pitchFamily="18" charset="0"/>
+                              </a:rPr>
+                              <m:t>𝐴</m:t>
+                            </m:r>
+                          </m:e>
+                        </m:acc>
+                        <m:r>
+                          <a:rPr lang="en-US" b="0" i="1" smtClean="0">
+                            <a:latin typeface="Cambria Math" panose="02040503050406030204" pitchFamily="18" charset="0"/>
+                          </a:rPr>
+                          <m:t>+</m:t>
+                        </m:r>
+                        <m:r>
+                          <a:rPr lang="en-US" b="0" i="1" smtClean="0">
+                            <a:latin typeface="Cambria Math" panose="02040503050406030204" pitchFamily="18" charset="0"/>
+                          </a:rPr>
+                          <m:t>𝐵</m:t>
+                        </m:r>
+                      </m:e>
+                    </m:d>
+                  </m:oMath>
+                </a14:m>
+                <a:endParaRPr lang="en-US" i="1" dirty="0">
+                  <a:latin typeface="Cambria Math" panose="02040503050406030204" pitchFamily="18" charset="0"/>
+                </a:endParaRPr>
+              </a:p>
+              <a:p>
+                <a:pPr lvl="1"/>
+                <a14:m>
+                  <m:oMath xmlns:m="http://schemas.openxmlformats.org/officeDocument/2006/math">
+                    <m:acc>
+                      <m:accPr>
+                        <m:chr m:val="̅"/>
+                        <m:ctrlPr>
+                          <a:rPr lang="en-US" i="1" smtClean="0">
+                            <a:latin typeface="Cambria Math" panose="02040503050406030204" pitchFamily="18" charset="0"/>
+                          </a:rPr>
+                        </m:ctrlPr>
+                      </m:accPr>
+                      <m:e>
+                        <m:r>
+                          <a:rPr lang="en-US" b="0" i="1" smtClean="0">
+                            <a:latin typeface="Cambria Math" panose="02040503050406030204" pitchFamily="18" charset="0"/>
+                          </a:rPr>
+                          <m:t>𝐴</m:t>
+                        </m:r>
+                        <m:r>
+                          <a:rPr lang="en-US" b="0" i="1" smtClean="0">
+                            <a:latin typeface="Cambria Math" panose="02040503050406030204" pitchFamily="18" charset="0"/>
+                          </a:rPr>
+                          <m:t>+</m:t>
+                        </m:r>
+                        <m:r>
+                          <a:rPr lang="en-US" b="0" i="1" smtClean="0">
+                            <a:latin typeface="Cambria Math" panose="02040503050406030204" pitchFamily="18" charset="0"/>
+                          </a:rPr>
+                          <m:t>𝐵</m:t>
+                        </m:r>
+                      </m:e>
+                    </m:acc>
+                    <m:r>
+                      <a:rPr lang="en-US" b="0" i="1" smtClean="0">
+                        <a:latin typeface="Cambria Math" panose="02040503050406030204" pitchFamily="18" charset="0"/>
+                      </a:rPr>
+                      <m:t>+</m:t>
+                    </m:r>
+                    <m:r>
+                      <a:rPr lang="en-US" b="0" i="1" smtClean="0">
+                        <a:latin typeface="Cambria Math" panose="02040503050406030204" pitchFamily="18" charset="0"/>
+                      </a:rPr>
+                      <m:t>𝐴</m:t>
+                    </m:r>
+                    <m:r>
+                      <a:rPr lang="en-US" b="0" i="1" smtClean="0">
+                        <a:latin typeface="Cambria Math" panose="02040503050406030204" pitchFamily="18" charset="0"/>
+                      </a:rPr>
+                      <m:t>. </m:t>
+                    </m:r>
+                    <m:acc>
+                      <m:accPr>
+                        <m:chr m:val="̅"/>
+                        <m:ctrlPr>
+                          <a:rPr lang="en-US" i="1">
+                            <a:latin typeface="Cambria Math" panose="02040503050406030204" pitchFamily="18" charset="0"/>
+                          </a:rPr>
+                        </m:ctrlPr>
+                      </m:accPr>
+                      <m:e>
+                        <m:r>
+                          <a:rPr lang="en-US" i="1">
+                            <a:latin typeface="Cambria Math" panose="02040503050406030204" pitchFamily="18" charset="0"/>
+                          </a:rPr>
+                          <m:t>𝐵</m:t>
+                        </m:r>
+                      </m:e>
+                    </m:acc>
+                  </m:oMath>
+                </a14:m>
+                <a:endParaRPr lang="en-US" i="1" dirty="0">
+                  <a:latin typeface="Cambria Math" panose="02040503050406030204" pitchFamily="18" charset="0"/>
+                </a:endParaRPr>
+              </a:p>
+              <a:p>
+                <a:pPr lvl="1"/>
+                <a14:m>
+                  <m:oMath xmlns:m="http://schemas.openxmlformats.org/officeDocument/2006/math">
+                    <m:d>
+                      <m:dPr>
+                        <m:ctrlPr>
+                          <a:rPr lang="en-US" i="1" smtClean="0">
+                            <a:latin typeface="Cambria Math" panose="02040503050406030204" pitchFamily="18" charset="0"/>
+                          </a:rPr>
+                        </m:ctrlPr>
+                      </m:dPr>
+                      <m:e>
+                        <m:r>
+                          <a:rPr lang="en-US" i="1">
+                            <a:latin typeface="Cambria Math" panose="02040503050406030204" pitchFamily="18" charset="0"/>
+                          </a:rPr>
+                          <m:t>𝐴</m:t>
+                        </m:r>
+                        <m:r>
+                          <a:rPr lang="en-US" b="0" i="1" smtClean="0">
+                            <a:latin typeface="Cambria Math" panose="02040503050406030204" pitchFamily="18" charset="0"/>
+                          </a:rPr>
+                          <m:t>+</m:t>
+                        </m:r>
+                        <m:r>
+                          <a:rPr lang="en-US" i="1">
+                            <a:latin typeface="Cambria Math" panose="02040503050406030204" pitchFamily="18" charset="0"/>
+                          </a:rPr>
+                          <m:t>𝐵</m:t>
+                        </m:r>
+                        <m:r>
+                          <a:rPr lang="en-US" b="0" i="1" smtClean="0">
+                            <a:latin typeface="Cambria Math" panose="02040503050406030204" pitchFamily="18" charset="0"/>
+                          </a:rPr>
+                          <m:t>+</m:t>
+                        </m:r>
+                        <m:r>
+                          <a:rPr lang="en-US" b="0" i="1" smtClean="0">
+                            <a:latin typeface="Cambria Math" panose="02040503050406030204" pitchFamily="18" charset="0"/>
+                          </a:rPr>
+                          <m:t>𝐶</m:t>
+                        </m:r>
+                      </m:e>
+                    </m:d>
+                    <m:r>
+                      <a:rPr lang="en-US" b="0" i="1" smtClean="0">
+                        <a:latin typeface="Cambria Math" panose="02040503050406030204" pitchFamily="18" charset="0"/>
+                      </a:rPr>
+                      <m:t>.</m:t>
+                    </m:r>
+                    <m:d>
+                      <m:dPr>
+                        <m:ctrlPr>
+                          <a:rPr lang="en-US" i="1">
+                            <a:latin typeface="Cambria Math" panose="02040503050406030204" pitchFamily="18" charset="0"/>
+                          </a:rPr>
+                        </m:ctrlPr>
+                      </m:dPr>
+                      <m:e>
+                        <m:acc>
+                          <m:accPr>
+                            <m:chr m:val="̅"/>
+                            <m:ctrlPr>
+                              <a:rPr lang="en-US" i="1">
+                                <a:latin typeface="Cambria Math" panose="02040503050406030204" pitchFamily="18" charset="0"/>
+                              </a:rPr>
+                            </m:ctrlPr>
+                          </m:accPr>
+                          <m:e>
+                            <m:r>
+                              <a:rPr lang="en-US" i="1">
+                                <a:latin typeface="Cambria Math" panose="02040503050406030204" pitchFamily="18" charset="0"/>
+                              </a:rPr>
+                              <m:t>𝐴</m:t>
+                            </m:r>
+                          </m:e>
+                        </m:acc>
+                        <m:r>
+                          <a:rPr lang="en-US" b="0" i="1" smtClean="0">
+                            <a:latin typeface="Cambria Math" panose="02040503050406030204" pitchFamily="18" charset="0"/>
+                          </a:rPr>
+                          <m:t>+</m:t>
+                        </m:r>
+                        <m:r>
+                          <a:rPr lang="en-US" b="0" i="1" smtClean="0">
+                            <a:latin typeface="Cambria Math" panose="02040503050406030204" pitchFamily="18" charset="0"/>
+                          </a:rPr>
+                          <m:t>𝐵</m:t>
+                        </m:r>
+                      </m:e>
+                    </m:d>
+                    <m:r>
+                      <a:rPr lang="en-US" b="0" i="1" smtClean="0">
+                        <a:latin typeface="Cambria Math" panose="02040503050406030204" pitchFamily="18" charset="0"/>
+                      </a:rPr>
+                      <m:t>.(</m:t>
+                    </m:r>
+                    <m:r>
+                      <a:rPr lang="en-US" b="0" i="1" smtClean="0">
+                        <a:latin typeface="Cambria Math" panose="02040503050406030204" pitchFamily="18" charset="0"/>
+                      </a:rPr>
+                      <m:t>𝐴</m:t>
+                    </m:r>
+                    <m:r>
+                      <a:rPr lang="en-US" b="0" i="1" smtClean="0">
+                        <a:latin typeface="Cambria Math" panose="02040503050406030204" pitchFamily="18" charset="0"/>
+                      </a:rPr>
+                      <m:t>+</m:t>
+                    </m:r>
+                    <m:acc>
+                      <m:accPr>
+                        <m:chr m:val="̅"/>
+                        <m:ctrlPr>
+                          <a:rPr lang="en-US" b="0" i="1" smtClean="0">
+                            <a:latin typeface="Cambria Math" panose="02040503050406030204" pitchFamily="18" charset="0"/>
+                          </a:rPr>
+                        </m:ctrlPr>
+                      </m:accPr>
+                      <m:e>
+                        <m:r>
+                          <a:rPr lang="en-US" b="0" i="1" smtClean="0">
+                            <a:latin typeface="Cambria Math" panose="02040503050406030204" pitchFamily="18" charset="0"/>
+                          </a:rPr>
+                          <m:t>𝐶</m:t>
+                        </m:r>
+                      </m:e>
+                    </m:acc>
+                  </m:oMath>
+                </a14:m>
+                <a:r>
+                  <a:rPr lang="en-US" i="1" dirty="0">
+                    <a:latin typeface="Cambria Math" panose="02040503050406030204" pitchFamily="18" charset="0"/>
+                  </a:rPr>
+                  <a:t>)</a:t>
+                </a:r>
+              </a:p>
+              <a:p>
+                <a:pPr lvl="1"/>
+                <a14:m>
+                  <m:oMath xmlns:m="http://schemas.openxmlformats.org/officeDocument/2006/math">
+                    <m:d>
+                      <m:dPr>
+                        <m:ctrlPr>
+                          <a:rPr lang="en-US" b="0" i="1" smtClean="0">
+                            <a:latin typeface="Cambria Math" panose="02040503050406030204" pitchFamily="18" charset="0"/>
+                          </a:rPr>
+                        </m:ctrlPr>
+                      </m:dPr>
+                      <m:e>
+                        <m:r>
+                          <a:rPr lang="en-US" i="1">
+                            <a:latin typeface="Cambria Math" panose="02040503050406030204" pitchFamily="18" charset="0"/>
+                          </a:rPr>
+                          <m:t>𝐴</m:t>
+                        </m:r>
+                        <m:r>
+                          <a:rPr lang="en-US" b="0" i="1" smtClean="0">
+                            <a:latin typeface="Cambria Math" panose="02040503050406030204" pitchFamily="18" charset="0"/>
+                          </a:rPr>
+                          <m:t>.</m:t>
+                        </m:r>
+                        <m:acc>
+                          <m:accPr>
+                            <m:chr m:val="̅"/>
+                            <m:ctrlPr>
+                              <a:rPr lang="en-US" i="1">
+                                <a:latin typeface="Cambria Math" panose="02040503050406030204" pitchFamily="18" charset="0"/>
+                              </a:rPr>
+                            </m:ctrlPr>
+                          </m:accPr>
+                          <m:e>
+                            <m:r>
+                              <a:rPr lang="en-US" i="1">
+                                <a:latin typeface="Cambria Math" panose="02040503050406030204" pitchFamily="18" charset="0"/>
+                              </a:rPr>
+                              <m:t>𝐵</m:t>
+                            </m:r>
+                          </m:e>
+                        </m:acc>
+                        <m:r>
+                          <a:rPr lang="en-US" b="0" i="1" smtClean="0">
+                            <a:latin typeface="Cambria Math" panose="02040503050406030204" pitchFamily="18" charset="0"/>
+                          </a:rPr>
+                          <m:t>+</m:t>
+                        </m:r>
+                        <m:r>
+                          <a:rPr lang="en-US" b="0" i="1" smtClean="0">
+                            <a:latin typeface="Cambria Math" panose="02040503050406030204" pitchFamily="18" charset="0"/>
+                          </a:rPr>
+                          <m:t>𝐵</m:t>
+                        </m:r>
+                        <m:r>
+                          <a:rPr lang="en-US" b="0" i="1" smtClean="0">
+                            <a:latin typeface="Cambria Math" panose="02040503050406030204" pitchFamily="18" charset="0"/>
+                          </a:rPr>
+                          <m:t>.</m:t>
+                        </m:r>
+                        <m:r>
+                          <a:rPr lang="en-US" b="0" i="1" smtClean="0">
+                            <a:latin typeface="Cambria Math" panose="02040503050406030204" pitchFamily="18" charset="0"/>
+                          </a:rPr>
+                          <m:t>𝐶</m:t>
+                        </m:r>
+                      </m:e>
+                    </m:d>
+                    <m:r>
+                      <a:rPr lang="en-US" b="0" i="1" smtClean="0">
+                        <a:latin typeface="Cambria Math" panose="02040503050406030204" pitchFamily="18" charset="0"/>
+                      </a:rPr>
+                      <m:t>.</m:t>
+                    </m:r>
+                    <m:d>
+                      <m:dPr>
+                        <m:ctrlPr>
+                          <a:rPr lang="en-US" b="0" i="1" smtClean="0">
+                            <a:latin typeface="Cambria Math" panose="02040503050406030204" pitchFamily="18" charset="0"/>
+                          </a:rPr>
+                        </m:ctrlPr>
+                      </m:dPr>
+                      <m:e>
+                        <m:acc>
+                          <m:accPr>
+                            <m:chr m:val="̅"/>
+                            <m:ctrlPr>
+                              <a:rPr lang="en-US" i="1">
+                                <a:latin typeface="Cambria Math" panose="02040503050406030204" pitchFamily="18" charset="0"/>
+                              </a:rPr>
+                            </m:ctrlPr>
+                          </m:accPr>
+                          <m:e>
+                            <m:r>
+                              <a:rPr lang="en-US" i="1">
+                                <a:latin typeface="Cambria Math" panose="02040503050406030204" pitchFamily="18" charset="0"/>
+                              </a:rPr>
+                              <m:t>𝐴</m:t>
+                            </m:r>
+                          </m:e>
+                        </m:acc>
+                        <m:r>
+                          <a:rPr lang="en-US" b="0" i="1" smtClean="0">
+                            <a:latin typeface="Cambria Math" panose="02040503050406030204" pitchFamily="18" charset="0"/>
+                          </a:rPr>
+                          <m:t>+</m:t>
+                        </m:r>
+                        <m:acc>
+                          <m:accPr>
+                            <m:chr m:val="̅"/>
+                            <m:ctrlPr>
+                              <a:rPr lang="en-US" i="1">
+                                <a:latin typeface="Cambria Math" panose="02040503050406030204" pitchFamily="18" charset="0"/>
+                              </a:rPr>
+                            </m:ctrlPr>
+                          </m:accPr>
+                          <m:e>
+                            <m:r>
+                              <a:rPr lang="en-US" i="1">
+                                <a:latin typeface="Cambria Math" panose="02040503050406030204" pitchFamily="18" charset="0"/>
+                              </a:rPr>
+                              <m:t>𝐶</m:t>
+                            </m:r>
+                          </m:e>
+                        </m:acc>
+                      </m:e>
+                    </m:d>
+                  </m:oMath>
+                </a14:m>
+                <a:endParaRPr lang="en-US" b="0" i="1" dirty="0">
+                  <a:latin typeface="Cambria Math" panose="02040503050406030204" pitchFamily="18" charset="0"/>
+                </a:endParaRPr>
+              </a:p>
+              <a:p>
+                <a:pPr lvl="1"/>
+                <a14:m>
+                  <m:oMath xmlns:m="http://schemas.openxmlformats.org/officeDocument/2006/math">
+                    <m:acc>
+                      <m:accPr>
+                        <m:chr m:val="̅"/>
+                        <m:ctrlPr>
+                          <a:rPr lang="en-US" i="1" smtClean="0">
+                            <a:latin typeface="Cambria Math" panose="02040503050406030204" pitchFamily="18" charset="0"/>
+                          </a:rPr>
+                        </m:ctrlPr>
+                      </m:accPr>
+                      <m:e>
+                        <m:r>
+                          <a:rPr lang="en-US" b="0" i="1" smtClean="0">
+                            <a:latin typeface="Cambria Math" panose="02040503050406030204" pitchFamily="18" charset="0"/>
+                          </a:rPr>
+                          <m:t>(</m:t>
+                        </m:r>
+                        <m:r>
+                          <a:rPr lang="en-US" b="0" i="1" smtClean="0">
+                            <a:latin typeface="Cambria Math" panose="02040503050406030204" pitchFamily="18" charset="0"/>
+                          </a:rPr>
+                          <m:t>𝐴</m:t>
+                        </m:r>
+                        <m:r>
+                          <a:rPr lang="en-US" b="0" i="1" smtClean="0">
+                            <a:latin typeface="Cambria Math" panose="02040503050406030204" pitchFamily="18" charset="0"/>
+                          </a:rPr>
+                          <m:t>.</m:t>
+                        </m:r>
+                        <m:r>
+                          <a:rPr lang="en-US" b="0" i="1" smtClean="0">
+                            <a:latin typeface="Cambria Math" panose="02040503050406030204" pitchFamily="18" charset="0"/>
+                          </a:rPr>
+                          <m:t>𝐵</m:t>
+                        </m:r>
+                        <m:r>
+                          <a:rPr lang="en-US" b="0" i="1" smtClean="0">
+                            <a:latin typeface="Cambria Math" panose="02040503050406030204" pitchFamily="18" charset="0"/>
+                          </a:rPr>
+                          <m:t>)</m:t>
+                        </m:r>
+                      </m:e>
+                    </m:acc>
+                    <m:r>
+                      <a:rPr lang="en-US" b="0" i="1" smtClean="0">
+                        <a:latin typeface="Cambria Math" panose="02040503050406030204" pitchFamily="18" charset="0"/>
+                      </a:rPr>
+                      <m:t> </m:t>
+                    </m:r>
+                  </m:oMath>
+                </a14:m>
+                <a:r>
+                  <a:rPr lang="en-US" i="1" dirty="0">
+                    <a:latin typeface="Cambria Math" panose="02040503050406030204" pitchFamily="18" charset="0"/>
+                  </a:rPr>
+                  <a:t>.</a:t>
+                </a:r>
+                <a14:m>
+                  <m:oMath xmlns:m="http://schemas.openxmlformats.org/officeDocument/2006/math">
+                    <m:d>
+                      <m:dPr>
+                        <m:ctrlPr>
+                          <a:rPr lang="en-US" i="1">
+                            <a:latin typeface="Cambria Math" panose="02040503050406030204" pitchFamily="18" charset="0"/>
+                          </a:rPr>
+                        </m:ctrlPr>
+                      </m:dPr>
+                      <m:e>
+                        <m:acc>
+                          <m:accPr>
+                            <m:chr m:val="̅"/>
+                            <m:ctrlPr>
+                              <a:rPr lang="en-US" i="1">
+                                <a:latin typeface="Cambria Math" panose="02040503050406030204" pitchFamily="18" charset="0"/>
+                              </a:rPr>
+                            </m:ctrlPr>
+                          </m:accPr>
+                          <m:e>
+                            <m:r>
+                              <a:rPr lang="en-US" i="1">
+                                <a:latin typeface="Cambria Math" panose="02040503050406030204" pitchFamily="18" charset="0"/>
+                              </a:rPr>
+                              <m:t>𝐴</m:t>
+                            </m:r>
+                          </m:e>
+                        </m:acc>
+                        <m:r>
+                          <a:rPr lang="en-US" i="1">
+                            <a:latin typeface="Cambria Math" panose="02040503050406030204" pitchFamily="18" charset="0"/>
+                          </a:rPr>
+                          <m:t>+</m:t>
+                        </m:r>
+                        <m:r>
+                          <a:rPr lang="en-US" b="0" i="1" smtClean="0">
+                            <a:latin typeface="Cambria Math" panose="02040503050406030204" pitchFamily="18" charset="0"/>
+                          </a:rPr>
+                          <m:t>𝐶</m:t>
+                        </m:r>
+                      </m:e>
+                    </m:d>
+                    <m:r>
+                      <a:rPr lang="en-US" b="0" i="1" smtClean="0">
+                        <a:latin typeface="Cambria Math" panose="02040503050406030204" pitchFamily="18" charset="0"/>
+                      </a:rPr>
+                      <m:t>+(</m:t>
+                    </m:r>
+                    <m:r>
+                      <a:rPr lang="en-US" b="0" i="1" smtClean="0">
+                        <a:latin typeface="Cambria Math" panose="02040503050406030204" pitchFamily="18" charset="0"/>
+                      </a:rPr>
+                      <m:t>𝐴</m:t>
+                    </m:r>
+                    <m:r>
+                      <a:rPr lang="en-US" b="0" i="1" smtClean="0">
+                        <a:latin typeface="Cambria Math" panose="02040503050406030204" pitchFamily="18" charset="0"/>
+                      </a:rPr>
+                      <m:t>.</m:t>
+                    </m:r>
+                    <m:acc>
+                      <m:accPr>
+                        <m:chr m:val="̅"/>
+                        <m:ctrlPr>
+                          <a:rPr lang="en-US" i="1">
+                            <a:latin typeface="Cambria Math" panose="02040503050406030204" pitchFamily="18" charset="0"/>
+                          </a:rPr>
+                        </m:ctrlPr>
+                      </m:accPr>
+                      <m:e>
+                        <m:r>
+                          <a:rPr lang="en-US" i="1">
+                            <a:latin typeface="Cambria Math" panose="02040503050406030204" pitchFamily="18" charset="0"/>
+                          </a:rPr>
+                          <m:t>𝐶</m:t>
+                        </m:r>
+                      </m:e>
+                    </m:acc>
+                  </m:oMath>
+                </a14:m>
+                <a:r>
+                  <a:rPr lang="en-US" i="1" dirty="0">
+                    <a:latin typeface="Cambria Math" panose="02040503050406030204" pitchFamily="18" charset="0"/>
+                  </a:rPr>
+                  <a:t>)</a:t>
+                </a:r>
+              </a:p>
+            </p:txBody>
+          </p:sp>
+        </mc:Choice>
+        <mc:Fallback>
+          <p:sp>
+            <p:nvSpPr>
+              <p:cNvPr id="3" name="Content Placeholder 2">
+                <a:extLst>
+                  <a:ext uri="{FF2B5EF4-FFF2-40B4-BE49-F238E27FC236}">
+                    <a16:creationId xmlns:a16="http://schemas.microsoft.com/office/drawing/2014/main" id="{B12C71F2-ACC9-E416-C317-D9E32AD458D3}"/>
+                  </a:ext>
+                </a:extLst>
+              </p:cNvPr>
+              <p:cNvSpPr>
+                <a:spLocks noGrp="1" noRot="1" noChangeAspect="1" noMove="1" noResize="1" noEditPoints="1" noAdjustHandles="1" noChangeArrowheads="1" noChangeShapeType="1" noTextEdit="1"/>
+              </p:cNvSpPr>
+              <p:nvPr>
+                <p:ph idx="1"/>
+              </p:nvPr>
+            </p:nvSpPr>
+            <p:spPr>
+              <a:blipFill>
+                <a:blip r:embed="rId2"/>
+                <a:stretch>
+                  <a:fillRect l="-1043" t="-2381"/>
+                </a:stretch>
+              </a:blipFill>
+            </p:spPr>
+            <p:txBody>
+              <a:bodyPr/>
+              <a:lstStyle/>
+              <a:p>
+                <a:r>
+                  <a:rPr lang="en-US">
+                    <a:noFill/>
+                  </a:rPr>
+                  <a:t> </a:t>
+                </a:r>
+              </a:p>
+            </p:txBody>
+          </p:sp>
+        </mc:Fallback>
+      </mc:AlternateContent>
+    </p:spTree>
+    <p:extLst>
+      <p:ext uri="{BB962C8B-B14F-4D97-AF65-F5344CB8AC3E}">
+        <p14:creationId xmlns:p14="http://schemas.microsoft.com/office/powerpoint/2010/main" val="471231373"/>
       </p:ext>
     </p:extLst>
   </p:cSld>

--- a/all/ExploringCSConceptsViaACSLCompetitions_all.pptx
+++ b/all/ExploringCSConceptsViaACSLCompetitions_all.pptx
@@ -5,7 +5,7 @@
     <p:sldMasterId id="2147483648" r:id="rId1"/>
   </p:sldMasterIdLst>
   <p:notesMasterIdLst>
-    <p:notesMasterId r:id="rId81"/>
+    <p:notesMasterId r:id="rId83"/>
   </p:notesMasterIdLst>
   <p:sldIdLst>
     <p:sldId id="256" r:id="rId2"/>
@@ -87,6 +87,8 @@
     <p:sldId id="344" r:id="rId78"/>
     <p:sldId id="345" r:id="rId79"/>
     <p:sldId id="347" r:id="rId80"/>
+    <p:sldId id="349" r:id="rId81"/>
+    <p:sldId id="350" r:id="rId82"/>
   </p:sldIdLst>
   <p:sldSz cx="12192000" cy="6858000"/>
   <p:notesSz cx="6858000" cy="9144000"/>
@@ -464,7 +466,7 @@
           <a:p>
             <a:fld id="{15653688-98A8-4F3B-A740-8E6568AE1BCB}" type="datetimeFigureOut">
               <a:rPr lang="en-US" smtClean="0"/>
-              <a:t>2/25/2026</a:t>
+              <a:t>2/26/2026</a:t>
             </a:fld>
             <a:endParaRPr lang="en-US"/>
           </a:p>
@@ -1528,8 +1530,8 @@
         </p:nvSpPr>
         <p:spPr/>
       </p:sp>
-      <mc:AlternateContent xmlns:mc="http://schemas.openxmlformats.org/markup-compatibility/2006">
-        <mc:Choice xmlns:a14="http://schemas.microsoft.com/office/drawing/2010/main" Requires="a14">
+      <mc:AlternateContent xmlns:mc="http://schemas.openxmlformats.org/markup-compatibility/2006" xmlns:a14="http://schemas.microsoft.com/office/drawing/2010/main">
+        <mc:Choice Requires="a14">
           <p:sp>
             <p:nvSpPr>
               <p:cNvPr id="3" name="Notes Placeholder 2">
@@ -1870,7 +1872,7 @@
             </p:txBody>
           </p:sp>
         </mc:Choice>
-        <mc:Fallback>
+        <mc:Fallback xmlns="">
           <p:sp>
             <p:nvSpPr>
               <p:cNvPr id="3" name="Notes Placeholder 2">
@@ -1987,6 +1989,90 @@
 </p:notes>
 </file>
 
+<file path=ppt/notesSlides/notesSlide6.xml><?xml version="1.0" encoding="utf-8"?>
+<p:notes xmlns:a="http://schemas.openxmlformats.org/drawingml/2006/main" xmlns:r="http://schemas.openxmlformats.org/officeDocument/2006/relationships" xmlns:p="http://schemas.openxmlformats.org/presentationml/2006/main">
+  <p:cSld>
+    <p:spTree>
+      <p:nvGrpSpPr>
+        <p:cNvPr id="1" name=""/>
+        <p:cNvGrpSpPr/>
+        <p:nvPr/>
+      </p:nvGrpSpPr>
+      <p:grpSpPr>
+        <a:xfrm>
+          <a:off x="0" y="0"/>
+          <a:ext cx="0" cy="0"/>
+          <a:chOff x="0" y="0"/>
+          <a:chExt cx="0" cy="0"/>
+        </a:xfrm>
+      </p:grpSpPr>
+      <p:sp>
+        <p:nvSpPr>
+          <p:cNvPr id="2" name="Slide Image Placeholder 1"/>
+          <p:cNvSpPr>
+            <a:spLocks noGrp="1" noRot="1" noChangeAspect="1"/>
+          </p:cNvSpPr>
+          <p:nvPr>
+            <p:ph type="sldImg"/>
+          </p:nvPr>
+        </p:nvSpPr>
+        <p:spPr/>
+      </p:sp>
+      <p:sp>
+        <p:nvSpPr>
+          <p:cNvPr id="3" name="Notes Placeholder 2"/>
+          <p:cNvSpPr>
+            <a:spLocks noGrp="1"/>
+          </p:cNvSpPr>
+          <p:nvPr>
+            <p:ph type="body" idx="1"/>
+          </p:nvPr>
+        </p:nvSpPr>
+        <p:spPr/>
+        <p:txBody>
+          <a:bodyPr/>
+          <a:lstStyle/>
+          <a:p>
+            <a:endParaRPr lang="en-US" dirty="0"/>
+          </a:p>
+        </p:txBody>
+      </p:sp>
+      <p:sp>
+        <p:nvSpPr>
+          <p:cNvPr id="4" name="Slide Number Placeholder 3"/>
+          <p:cNvSpPr>
+            <a:spLocks noGrp="1"/>
+          </p:cNvSpPr>
+          <p:nvPr>
+            <p:ph type="sldNum" sz="quarter" idx="5"/>
+          </p:nvPr>
+        </p:nvSpPr>
+        <p:spPr/>
+        <p:txBody>
+          <a:bodyPr/>
+          <a:lstStyle/>
+          <a:p>
+            <a:fld id="{24216765-C83A-46F1-AE07-8E4F9D1EDA94}" type="slidenum">
+              <a:rPr lang="en-US" smtClean="0"/>
+              <a:t>77</a:t>
+            </a:fld>
+            <a:endParaRPr lang="en-US"/>
+          </a:p>
+        </p:txBody>
+      </p:sp>
+    </p:spTree>
+    <p:extLst>
+      <p:ext uri="{BB962C8B-B14F-4D97-AF65-F5344CB8AC3E}">
+        <p14:creationId xmlns:p14="http://schemas.microsoft.com/office/powerpoint/2010/main" val="1404015926"/>
+      </p:ext>
+    </p:extLst>
+  </p:cSld>
+  <p:clrMapOvr>
+    <a:masterClrMapping/>
+  </p:clrMapOvr>
+</p:notes>
+</file>
+
 <file path=ppt/slideLayouts/slideLayout1.xml><?xml version="1.0" encoding="utf-8"?>
 <p:sldLayout xmlns:a="http://schemas.openxmlformats.org/drawingml/2006/main" xmlns:r="http://schemas.openxmlformats.org/officeDocument/2006/relationships" xmlns:p="http://schemas.openxmlformats.org/presentationml/2006/main" type="title" preserve="1">
   <p:cSld name="Title Slide">
@@ -2134,7 +2220,7 @@
           <a:p>
             <a:fld id="{20CB266D-A331-4A79-AB46-FEF40B16CF9B}" type="datetimeFigureOut">
               <a:rPr lang="en-US" smtClean="0"/>
-              <a:t>2/25/2026</a:t>
+              <a:t>2/26/2026</a:t>
             </a:fld>
             <a:endParaRPr lang="en-US"/>
           </a:p>
@@ -2332,7 +2418,7 @@
           <a:p>
             <a:fld id="{20CB266D-A331-4A79-AB46-FEF40B16CF9B}" type="datetimeFigureOut">
               <a:rPr lang="en-US" smtClean="0"/>
-              <a:t>2/25/2026</a:t>
+              <a:t>2/26/2026</a:t>
             </a:fld>
             <a:endParaRPr lang="en-US"/>
           </a:p>
@@ -2540,7 +2626,7 @@
           <a:p>
             <a:fld id="{20CB266D-A331-4A79-AB46-FEF40B16CF9B}" type="datetimeFigureOut">
               <a:rPr lang="en-US" smtClean="0"/>
-              <a:t>2/25/2026</a:t>
+              <a:t>2/26/2026</a:t>
             </a:fld>
             <a:endParaRPr lang="en-US"/>
           </a:p>
@@ -2738,7 +2824,7 @@
           <a:p>
             <a:fld id="{20CB266D-A331-4A79-AB46-FEF40B16CF9B}" type="datetimeFigureOut">
               <a:rPr lang="en-US" smtClean="0"/>
-              <a:t>2/25/2026</a:t>
+              <a:t>2/26/2026</a:t>
             </a:fld>
             <a:endParaRPr lang="en-US"/>
           </a:p>
@@ -3013,7 +3099,7 @@
           <a:p>
             <a:fld id="{20CB266D-A331-4A79-AB46-FEF40B16CF9B}" type="datetimeFigureOut">
               <a:rPr lang="en-US" smtClean="0"/>
-              <a:t>2/25/2026</a:t>
+              <a:t>2/26/2026</a:t>
             </a:fld>
             <a:endParaRPr lang="en-US"/>
           </a:p>
@@ -3278,7 +3364,7 @@
           <a:p>
             <a:fld id="{20CB266D-A331-4A79-AB46-FEF40B16CF9B}" type="datetimeFigureOut">
               <a:rPr lang="en-US" smtClean="0"/>
-              <a:t>2/25/2026</a:t>
+              <a:t>2/26/2026</a:t>
             </a:fld>
             <a:endParaRPr lang="en-US"/>
           </a:p>
@@ -3690,7 +3776,7 @@
           <a:p>
             <a:fld id="{20CB266D-A331-4A79-AB46-FEF40B16CF9B}" type="datetimeFigureOut">
               <a:rPr lang="en-US" smtClean="0"/>
-              <a:t>2/25/2026</a:t>
+              <a:t>2/26/2026</a:t>
             </a:fld>
             <a:endParaRPr lang="en-US"/>
           </a:p>
@@ -3831,7 +3917,7 @@
           <a:p>
             <a:fld id="{20CB266D-A331-4A79-AB46-FEF40B16CF9B}" type="datetimeFigureOut">
               <a:rPr lang="en-US" smtClean="0"/>
-              <a:t>2/25/2026</a:t>
+              <a:t>2/26/2026</a:t>
             </a:fld>
             <a:endParaRPr lang="en-US"/>
           </a:p>
@@ -3944,7 +4030,7 @@
           <a:p>
             <a:fld id="{20CB266D-A331-4A79-AB46-FEF40B16CF9B}" type="datetimeFigureOut">
               <a:rPr lang="en-US" smtClean="0"/>
-              <a:t>2/25/2026</a:t>
+              <a:t>2/26/2026</a:t>
             </a:fld>
             <a:endParaRPr lang="en-US"/>
           </a:p>
@@ -4255,7 +4341,7 @@
           <a:p>
             <a:fld id="{20CB266D-A331-4A79-AB46-FEF40B16CF9B}" type="datetimeFigureOut">
               <a:rPr lang="en-US" smtClean="0"/>
-              <a:t>2/25/2026</a:t>
+              <a:t>2/26/2026</a:t>
             </a:fld>
             <a:endParaRPr lang="en-US"/>
           </a:p>
@@ -4543,7 +4629,7 @@
           <a:p>
             <a:fld id="{20CB266D-A331-4A79-AB46-FEF40B16CF9B}" type="datetimeFigureOut">
               <a:rPr lang="en-US" smtClean="0"/>
-              <a:t>2/25/2026</a:t>
+              <a:t>2/26/2026</a:t>
             </a:fld>
             <a:endParaRPr lang="en-US"/>
           </a:p>
@@ -4784,7 +4870,7 @@
           <a:p>
             <a:fld id="{20CB266D-A331-4A79-AB46-FEF40B16CF9B}" type="datetimeFigureOut">
               <a:rPr lang="en-US" smtClean="0"/>
-              <a:t>2/25/2026</a:t>
+              <a:t>2/26/2026</a:t>
             </a:fld>
             <a:endParaRPr lang="en-US"/>
           </a:p>
@@ -29279,8 +29365,8 @@
           </a:p>
         </p:txBody>
       </p:sp>
-      <mc:AlternateContent xmlns:mc="http://schemas.openxmlformats.org/markup-compatibility/2006">
-        <mc:Choice xmlns:a14="http://schemas.microsoft.com/office/drawing/2010/main" Requires="a14">
+      <mc:AlternateContent xmlns:mc="http://schemas.openxmlformats.org/markup-compatibility/2006" xmlns:a14="http://schemas.microsoft.com/office/drawing/2010/main">
+        <mc:Choice Requires="a14">
           <p:sp>
             <p:nvSpPr>
               <p:cNvPr id="3" name="Content Placeholder 2">
@@ -29386,19 +29472,7 @@
                       <a:rPr lang="en-US" b="0" i="1" smtClean="0">
                         <a:latin typeface="Cambria Math" panose="02040503050406030204" pitchFamily="18" charset="0"/>
                       </a:rPr>
-                      <m:t> </m:t>
-                    </m:r>
-                    <m:r>
-                      <a:rPr lang="en-US" b="0" i="1" smtClean="0">
-                        <a:latin typeface="Cambria Math" panose="02040503050406030204" pitchFamily="18" charset="0"/>
-                      </a:rPr>
-                      <m:t>.</m:t>
-                    </m:r>
-                    <m:r>
-                      <a:rPr lang="en-US" b="0" i="1" smtClean="0">
-                        <a:latin typeface="Cambria Math" panose="02040503050406030204" pitchFamily="18" charset="0"/>
-                      </a:rPr>
-                      <m:t>  </m:t>
+                      <m:t> .  </m:t>
                     </m:r>
                     <m:r>
                       <a:rPr lang="en-US" i="1" smtClean="0">
@@ -29474,13 +29548,7 @@
                       <a:rPr lang="en-US" b="0" i="1" smtClean="0">
                         <a:latin typeface="Cambria Math" panose="02040503050406030204" pitchFamily="18" charset="0"/>
                       </a:rPr>
-                      <m:t> </m:t>
-                    </m:r>
-                    <m:r>
-                      <a:rPr lang="en-US" b="0" i="1" smtClean="0">
-                        <a:latin typeface="Cambria Math" panose="02040503050406030204" pitchFamily="18" charset="0"/>
-                      </a:rPr>
-                      <m:t>. </m:t>
+                      <m:t> . </m:t>
                     </m:r>
                     <m:acc>
                       <m:accPr>
@@ -29543,7 +29611,7 @@
             </p:txBody>
           </p:sp>
         </mc:Choice>
-        <mc:Fallback>
+        <mc:Fallback xmlns="">
           <p:sp>
             <p:nvSpPr>
               <p:cNvPr id="3" name="Content Placeholder 2">
@@ -29641,8 +29709,8 @@
           </a:p>
         </p:txBody>
       </p:sp>
-      <mc:AlternateContent xmlns:mc="http://schemas.openxmlformats.org/markup-compatibility/2006">
-        <mc:Choice xmlns:a14="http://schemas.microsoft.com/office/drawing/2010/main" Requires="a14">
+      <mc:AlternateContent xmlns:mc="http://schemas.openxmlformats.org/markup-compatibility/2006" xmlns:a14="http://schemas.microsoft.com/office/drawing/2010/main">
+        <mc:Choice Requires="a14">
           <p:sp>
             <p:nvSpPr>
               <p:cNvPr id="3" name="Content Placeholder 2">
@@ -30077,7 +30145,7 @@
             </p:txBody>
           </p:sp>
         </mc:Choice>
-        <mc:Fallback>
+        <mc:Fallback xmlns="">
           <p:sp>
             <p:nvSpPr>
               <p:cNvPr id="3" name="Content Placeholder 2">
@@ -30619,8 +30687,8 @@
           </a:p>
         </p:txBody>
       </p:sp>
-      <mc:AlternateContent xmlns:mc="http://schemas.openxmlformats.org/markup-compatibility/2006">
-        <mc:Choice xmlns:a14="http://schemas.microsoft.com/office/drawing/2010/main" Requires="a14">
+      <mc:AlternateContent xmlns:mc="http://schemas.openxmlformats.org/markup-compatibility/2006" xmlns:a14="http://schemas.microsoft.com/office/drawing/2010/main">
+        <mc:Choice Requires="a14">
           <p:sp>
             <p:nvSpPr>
               <p:cNvPr id="3" name="Content Placeholder 2">
@@ -31195,7 +31263,7 @@
             </p:txBody>
           </p:sp>
         </mc:Choice>
-        <mc:Fallback>
+        <mc:Fallback xmlns="">
           <p:sp>
             <p:nvSpPr>
               <p:cNvPr id="3" name="Content Placeholder 2">
@@ -31293,8 +31361,8 @@
           </a:p>
         </p:txBody>
       </p:sp>
-      <mc:AlternateContent xmlns:mc="http://schemas.openxmlformats.org/markup-compatibility/2006">
-        <mc:Choice xmlns:a14="http://schemas.microsoft.com/office/drawing/2010/main" Requires="a14">
+      <mc:AlternateContent xmlns:mc="http://schemas.openxmlformats.org/markup-compatibility/2006" xmlns:a14="http://schemas.microsoft.com/office/drawing/2010/main">
+        <mc:Choice Requires="a14">
           <p:sp>
             <p:nvSpPr>
               <p:cNvPr id="3" name="Content Placeholder 2">
@@ -31557,7 +31625,7 @@
             </p:txBody>
           </p:sp>
         </mc:Choice>
-        <mc:Fallback>
+        <mc:Fallback xmlns="">
           <p:sp>
             <p:nvSpPr>
               <p:cNvPr id="3" name="Content Placeholder 2">
@@ -31576,7 +31644,7 @@
             </p:nvSpPr>
             <p:spPr>
               <a:blipFill>
-                <a:blip r:embed="rId2"/>
+                <a:blip r:embed="rId3"/>
                 <a:stretch>
                   <a:fillRect l="-1043"/>
                 </a:stretch>
@@ -31661,8 +31729,8 @@
           </a:p>
         </p:txBody>
       </p:sp>
-      <mc:AlternateContent xmlns:mc="http://schemas.openxmlformats.org/markup-compatibility/2006">
-        <mc:Choice xmlns:a14="http://schemas.microsoft.com/office/drawing/2010/main" Requires="a14">
+      <mc:AlternateContent xmlns:mc="http://schemas.openxmlformats.org/markup-compatibility/2006" xmlns:a14="http://schemas.microsoft.com/office/drawing/2010/main">
+        <mc:Choice Requires="a14">
           <p:sp>
             <p:nvSpPr>
               <p:cNvPr id="3" name="Content Placeholder 2">
@@ -32068,10 +32136,11 @@
                     <m:d>
                       <m:dPr>
                         <m:ctrlPr>
-                          <a:rPr lang="en-US">
+                          <a:rPr lang="en-US" i="1">
                             <a:solidFill>
                               <a:srgbClr val="00B050"/>
                             </a:solidFill>
+                            <a:latin typeface="Cambria Math" panose="02040503050406030204" pitchFamily="18" charset="0"/>
                           </a:rPr>
                         </m:ctrlPr>
                       </m:dPr>
@@ -32080,10 +32149,11 @@
                           <m:accPr>
                             <m:chr m:val="̅"/>
                             <m:ctrlPr>
-                              <a:rPr lang="en-US">
+                              <a:rPr lang="en-US" i="1">
                                 <a:solidFill>
                                   <a:srgbClr val="00B050"/>
                                 </a:solidFill>
+                                <a:latin typeface="Cambria Math" panose="02040503050406030204" pitchFamily="18" charset="0"/>
                               </a:rPr>
                             </m:ctrlPr>
                           </m:accPr>
@@ -32093,6 +32163,7 @@
                                 <a:solidFill>
                                   <a:srgbClr val="00B050"/>
                                 </a:solidFill>
+                                <a:latin typeface="Cambria Math" panose="02040503050406030204" pitchFamily="18" charset="0"/>
                               </a:rPr>
                               <m:t>𝐴</m:t>
                             </m:r>
@@ -32103,6 +32174,7 @@
                             <a:solidFill>
                               <a:srgbClr val="00B050"/>
                             </a:solidFill>
+                            <a:latin typeface="Cambria Math" panose="02040503050406030204" pitchFamily="18" charset="0"/>
                           </a:rPr>
                           <m:t>+</m:t>
                         </m:r>
@@ -32111,6 +32183,7 @@
                             <a:solidFill>
                               <a:srgbClr val="00B050"/>
                             </a:solidFill>
+                            <a:latin typeface="Cambria Math" panose="02040503050406030204" pitchFamily="18" charset="0"/>
                           </a:rPr>
                           <m:t>𝐴</m:t>
                         </m:r>
@@ -32121,6 +32194,7 @@
                         <a:solidFill>
                           <a:srgbClr val="00B050"/>
                         </a:solidFill>
+                        <a:latin typeface="Cambria Math" panose="02040503050406030204" pitchFamily="18" charset="0"/>
                       </a:rPr>
                       <m:t>=1</m:t>
                     </m:r>
@@ -32273,19 +32347,7 @@
                       <a:rPr lang="en-US" b="0" i="1" smtClean="0">
                         <a:latin typeface="Cambria Math" panose="02040503050406030204" pitchFamily="18" charset="0"/>
                       </a:rPr>
-                      <m:t>)</m:t>
-                    </m:r>
-                    <m:r>
-                      <a:rPr lang="en-US" b="0" i="1" smtClean="0">
-                        <a:latin typeface="Cambria Math" panose="02040503050406030204" pitchFamily="18" charset="0"/>
-                      </a:rPr>
-                      <m:t>+</m:t>
-                    </m:r>
-                    <m:r>
-                      <a:rPr lang="en-US" b="0" i="1" smtClean="0">
-                        <a:latin typeface="Cambria Math" panose="02040503050406030204" pitchFamily="18" charset="0"/>
-                      </a:rPr>
-                      <m:t>(</m:t>
+                      <m:t>)+(</m:t>
                     </m:r>
                     <m:r>
                       <a:rPr lang="en-US" b="0" i="1" smtClean="0">
@@ -32350,13 +32412,7 @@
                       <a:rPr lang="en-US" b="0" i="1" smtClean="0">
                         <a:latin typeface="Cambria Math" panose="02040503050406030204" pitchFamily="18" charset="0"/>
                       </a:rPr>
-                      <m:t>+</m:t>
-                    </m:r>
-                    <m:r>
-                      <a:rPr lang="en-US" b="0" i="1" smtClean="0">
-                        <a:latin typeface="Cambria Math" panose="02040503050406030204" pitchFamily="18" charset="0"/>
-                      </a:rPr>
-                      <m:t>0</m:t>
+                      <m:t>+0</m:t>
                     </m:r>
                   </m:oMath>
                 </a14:m>
@@ -32409,7 +32465,7 @@
             </p:txBody>
           </p:sp>
         </mc:Choice>
-        <mc:Fallback>
+        <mc:Fallback xmlns="">
           <p:sp>
             <p:nvSpPr>
               <p:cNvPr id="3" name="Content Placeholder 2">
@@ -32532,7 +32588,7 @@
               <a:p>
                 <a:r>
                   <a:rPr lang="en-US" dirty="0"/>
-                  <a:t>These are hard , think of them as puzzles</a:t>
+                  <a:t>These are hard , think of them as puzzles,</a:t>
                 </a:r>
                 <a:endParaRPr lang="en-US" i="1" dirty="0">
                   <a:latin typeface="Cambria Math" panose="02040503050406030204" pitchFamily="18" charset="0"/>
@@ -33583,6 +33639,1074 @@
 </p:sld>
 </file>
 
+<file path=ppt/slides/slide80.xml><?xml version="1.0" encoding="utf-8"?>
+<p:sld xmlns:a="http://schemas.openxmlformats.org/drawingml/2006/main" xmlns:r="http://schemas.openxmlformats.org/officeDocument/2006/relationships" xmlns:p="http://schemas.openxmlformats.org/presentationml/2006/main">
+  <p:cSld>
+    <p:spTree>
+      <p:nvGrpSpPr>
+        <p:cNvPr id="1" name=""/>
+        <p:cNvGrpSpPr/>
+        <p:nvPr/>
+      </p:nvGrpSpPr>
+      <p:grpSpPr>
+        <a:xfrm>
+          <a:off x="0" y="0"/>
+          <a:ext cx="0" cy="0"/>
+          <a:chOff x="0" y="0"/>
+          <a:chExt cx="0" cy="0"/>
+        </a:xfrm>
+      </p:grpSpPr>
+      <p:sp>
+        <p:nvSpPr>
+          <p:cNvPr id="2" name="Title 1">
+            <a:extLst>
+              <a:ext uri="{FF2B5EF4-FFF2-40B4-BE49-F238E27FC236}">
+                <a16:creationId xmlns:a16="http://schemas.microsoft.com/office/drawing/2014/main" id="{059C7ACA-4DBD-62AB-39CA-F2A3B56B9160}"/>
+              </a:ext>
+            </a:extLst>
+          </p:cNvPr>
+          <p:cNvSpPr>
+            <a:spLocks noGrp="1"/>
+          </p:cNvSpPr>
+          <p:nvPr>
+            <p:ph type="title"/>
+          </p:nvPr>
+        </p:nvSpPr>
+        <p:spPr/>
+        <p:txBody>
+          <a:bodyPr/>
+          <a:lstStyle/>
+          <a:p>
+            <a:r>
+              <a:rPr lang="en-US" dirty="0"/>
+              <a:t>Truth Tables</a:t>
+            </a:r>
+          </a:p>
+        </p:txBody>
+      </p:sp>
+      <mc:AlternateContent xmlns:mc="http://schemas.openxmlformats.org/markup-compatibility/2006">
+        <mc:Choice xmlns:a14="http://schemas.microsoft.com/office/drawing/2010/main" Requires="a14">
+          <p:sp>
+            <p:nvSpPr>
+              <p:cNvPr id="3" name="Content Placeholder 2">
+                <a:extLst>
+                  <a:ext uri="{FF2B5EF4-FFF2-40B4-BE49-F238E27FC236}">
+                    <a16:creationId xmlns:a16="http://schemas.microsoft.com/office/drawing/2014/main" id="{04ACED5D-CF97-64FD-7F0B-F9E29704E8AC}"/>
+                  </a:ext>
+                </a:extLst>
+              </p:cNvPr>
+              <p:cNvSpPr>
+                <a:spLocks noGrp="1"/>
+              </p:cNvSpPr>
+              <p:nvPr>
+                <p:ph idx="1"/>
+              </p:nvPr>
+            </p:nvSpPr>
+            <p:spPr/>
+            <p:txBody>
+              <a:bodyPr>
+                <a:normAutofit lnSpcReduction="10000"/>
+              </a:bodyPr>
+              <a:lstStyle/>
+              <a:p>
+                <a:r>
+                  <a:rPr lang="en-US" dirty="0"/>
+                  <a:t>Create truth table for each and </a:t>
+                </a:r>
+                <a:r>
+                  <a:rPr lang="en-US" dirty="0" err="1"/>
+                  <a:t>validat</a:t>
+                </a:r>
+                <a:r>
+                  <a:rPr lang="en-US" dirty="0"/>
+                  <a:t>/discover simplifications</a:t>
+                </a:r>
+              </a:p>
+              <a:p>
+                <a14:m>
+                  <m:oMath xmlns:m="http://schemas.openxmlformats.org/officeDocument/2006/math">
+                    <m:r>
+                      <a:rPr lang="en-US" b="0" i="1" smtClean="0">
+                        <a:latin typeface="Cambria Math" panose="02040503050406030204" pitchFamily="18" charset="0"/>
+                      </a:rPr>
+                      <m:t>𝐴</m:t>
+                    </m:r>
+                    <m:r>
+                      <a:rPr lang="en-US" b="0" i="1" smtClean="0">
+                        <a:latin typeface="Cambria Math" panose="02040503050406030204" pitchFamily="18" charset="0"/>
+                      </a:rPr>
+                      <m:t>.</m:t>
+                    </m:r>
+                    <m:d>
+                      <m:dPr>
+                        <m:ctrlPr>
+                          <a:rPr lang="en-US" b="0" i="1" smtClean="0">
+                            <a:latin typeface="Cambria Math" panose="02040503050406030204" pitchFamily="18" charset="0"/>
+                          </a:rPr>
+                        </m:ctrlPr>
+                      </m:dPr>
+                      <m:e>
+                        <m:r>
+                          <a:rPr lang="en-US" b="0" i="1" smtClean="0">
+                            <a:latin typeface="Cambria Math" panose="02040503050406030204" pitchFamily="18" charset="0"/>
+                          </a:rPr>
+                          <m:t>𝐴</m:t>
+                        </m:r>
+                        <m:r>
+                          <a:rPr lang="en-US" b="0" i="1" smtClean="0">
+                            <a:latin typeface="Cambria Math" panose="02040503050406030204" pitchFamily="18" charset="0"/>
+                          </a:rPr>
+                          <m:t>+</m:t>
+                        </m:r>
+                        <m:r>
+                          <a:rPr lang="en-US" b="0" i="1" smtClean="0">
+                            <a:latin typeface="Cambria Math" panose="02040503050406030204" pitchFamily="18" charset="0"/>
+                          </a:rPr>
+                          <m:t>𝐵</m:t>
+                        </m:r>
+                      </m:e>
+                    </m:d>
+                  </m:oMath>
+                </a14:m>
+                <a:r>
+                  <a:rPr lang="en-US" dirty="0"/>
+                  <a:t>  = A</a:t>
+                </a:r>
+              </a:p>
+              <a:p>
+                <a14:m>
+                  <m:oMath xmlns:m="http://schemas.openxmlformats.org/officeDocument/2006/math">
+                    <m:r>
+                      <a:rPr lang="en-US" b="0" i="1" smtClean="0">
+                        <a:latin typeface="Cambria Math" panose="02040503050406030204" pitchFamily="18" charset="0"/>
+                      </a:rPr>
+                      <m:t>𝐴</m:t>
+                    </m:r>
+                    <m:r>
+                      <a:rPr lang="en-US" b="0" i="1" smtClean="0">
+                        <a:latin typeface="Cambria Math" panose="02040503050406030204" pitchFamily="18" charset="0"/>
+                      </a:rPr>
+                      <m:t>+</m:t>
+                    </m:r>
+                    <m:d>
+                      <m:dPr>
+                        <m:ctrlPr>
+                          <a:rPr lang="en-US" b="0" i="1" smtClean="0">
+                            <a:latin typeface="Cambria Math" panose="02040503050406030204" pitchFamily="18" charset="0"/>
+                          </a:rPr>
+                        </m:ctrlPr>
+                      </m:dPr>
+                      <m:e>
+                        <m:r>
+                          <a:rPr lang="en-US" b="0" i="1" smtClean="0">
+                            <a:latin typeface="Cambria Math" panose="02040503050406030204" pitchFamily="18" charset="0"/>
+                          </a:rPr>
+                          <m:t>𝐴</m:t>
+                        </m:r>
+                        <m:r>
+                          <a:rPr lang="en-US" b="0" i="1" smtClean="0">
+                            <a:latin typeface="Cambria Math" panose="02040503050406030204" pitchFamily="18" charset="0"/>
+                          </a:rPr>
+                          <m:t>.</m:t>
+                        </m:r>
+                        <m:r>
+                          <a:rPr lang="en-US" b="0" i="1" smtClean="0">
+                            <a:latin typeface="Cambria Math" panose="02040503050406030204" pitchFamily="18" charset="0"/>
+                          </a:rPr>
+                          <m:t>𝐵</m:t>
+                        </m:r>
+                      </m:e>
+                    </m:d>
+                  </m:oMath>
+                </a14:m>
+                <a:r>
+                  <a:rPr lang="en-US" dirty="0"/>
+                  <a:t> = A</a:t>
+                </a:r>
+              </a:p>
+              <a:p>
+                <a14:m>
+                  <m:oMath xmlns:m="http://schemas.openxmlformats.org/officeDocument/2006/math">
+                    <m:acc>
+                      <m:accPr>
+                        <m:chr m:val="̅"/>
+                        <m:ctrlPr>
+                          <a:rPr lang="en-US" b="0" i="1" smtClean="0">
+                            <a:latin typeface="Cambria Math" panose="02040503050406030204" pitchFamily="18" charset="0"/>
+                          </a:rPr>
+                        </m:ctrlPr>
+                      </m:accPr>
+                      <m:e>
+                        <m:r>
+                          <a:rPr lang="en-US" b="0" i="1" smtClean="0">
+                            <a:latin typeface="Cambria Math" panose="02040503050406030204" pitchFamily="18" charset="0"/>
+                          </a:rPr>
+                          <m:t>𝐴</m:t>
+                        </m:r>
+                      </m:e>
+                    </m:acc>
+                    <m:r>
+                      <a:rPr lang="en-US" b="0" i="1" smtClean="0">
+                        <a:latin typeface="Cambria Math" panose="02040503050406030204" pitchFamily="18" charset="0"/>
+                      </a:rPr>
+                      <m:t>+</m:t>
+                    </m:r>
+                    <m:d>
+                      <m:dPr>
+                        <m:ctrlPr>
+                          <a:rPr lang="en-US" b="0" i="1" smtClean="0">
+                            <a:latin typeface="Cambria Math" panose="02040503050406030204" pitchFamily="18" charset="0"/>
+                          </a:rPr>
+                        </m:ctrlPr>
+                      </m:dPr>
+                      <m:e>
+                        <m:r>
+                          <a:rPr lang="en-US" b="0" i="1" smtClean="0">
+                            <a:latin typeface="Cambria Math" panose="02040503050406030204" pitchFamily="18" charset="0"/>
+                          </a:rPr>
+                          <m:t>𝐴</m:t>
+                        </m:r>
+                        <m:r>
+                          <a:rPr lang="en-US" b="0" i="1" smtClean="0">
+                            <a:latin typeface="Cambria Math" panose="02040503050406030204" pitchFamily="18" charset="0"/>
+                          </a:rPr>
+                          <m:t>.</m:t>
+                        </m:r>
+                        <m:r>
+                          <a:rPr lang="en-US" b="0" i="1" smtClean="0">
+                            <a:latin typeface="Cambria Math" panose="02040503050406030204" pitchFamily="18" charset="0"/>
+                          </a:rPr>
+                          <m:t>𝐵</m:t>
+                        </m:r>
+                      </m:e>
+                    </m:d>
+                  </m:oMath>
+                </a14:m>
+                <a:r>
+                  <a:rPr lang="en-US" b="0" dirty="0"/>
+                  <a:t> = </a:t>
+                </a:r>
+                <a14:m>
+                  <m:oMath xmlns:m="http://schemas.openxmlformats.org/officeDocument/2006/math">
+                    <m:acc>
+                      <m:accPr>
+                        <m:chr m:val="̅"/>
+                        <m:ctrlPr>
+                          <a:rPr lang="en-US" i="1">
+                            <a:latin typeface="Cambria Math" panose="02040503050406030204" pitchFamily="18" charset="0"/>
+                          </a:rPr>
+                        </m:ctrlPr>
+                      </m:accPr>
+                      <m:e>
+                        <m:r>
+                          <a:rPr lang="en-US" i="1">
+                            <a:latin typeface="Cambria Math" panose="02040503050406030204" pitchFamily="18" charset="0"/>
+                          </a:rPr>
+                          <m:t>𝐴</m:t>
+                        </m:r>
+                      </m:e>
+                    </m:acc>
+                    <m:r>
+                      <a:rPr lang="en-US" i="1">
+                        <a:latin typeface="Cambria Math" panose="02040503050406030204" pitchFamily="18" charset="0"/>
+                      </a:rPr>
+                      <m:t>+</m:t>
+                    </m:r>
+                  </m:oMath>
+                </a14:m>
+                <a:r>
+                  <a:rPr lang="en-US" dirty="0"/>
+                  <a:t> B </a:t>
+                </a:r>
+                <a:endParaRPr lang="en-US" b="0" dirty="0"/>
+              </a:p>
+              <a:p>
+                <a:r>
+                  <a:rPr lang="en-US" b="0" dirty="0"/>
+                  <a:t>(</a:t>
+                </a:r>
+                <a14:m>
+                  <m:oMath xmlns:m="http://schemas.openxmlformats.org/officeDocument/2006/math">
+                    <m:r>
+                      <a:rPr lang="en-US" b="0" i="1" smtClean="0">
+                        <a:latin typeface="Cambria Math" panose="02040503050406030204" pitchFamily="18" charset="0"/>
+                      </a:rPr>
+                      <m:t>𝐴</m:t>
+                    </m:r>
+                    <m:r>
+                      <a:rPr lang="en-US" b="0" i="1" smtClean="0">
+                        <a:latin typeface="Cambria Math" panose="02040503050406030204" pitchFamily="18" charset="0"/>
+                      </a:rPr>
+                      <m:t>+</m:t>
+                    </m:r>
+                    <m:r>
+                      <a:rPr lang="en-US" b="0" i="1" smtClean="0">
+                        <a:latin typeface="Cambria Math" panose="02040503050406030204" pitchFamily="18" charset="0"/>
+                      </a:rPr>
+                      <m:t>𝐵</m:t>
+                    </m:r>
+                    <m:r>
+                      <a:rPr lang="en-US" b="0" i="1" smtClean="0">
+                        <a:latin typeface="Cambria Math" panose="02040503050406030204" pitchFamily="18" charset="0"/>
+                      </a:rPr>
+                      <m:t>).</m:t>
+                    </m:r>
+                    <m:d>
+                      <m:dPr>
+                        <m:ctrlPr>
+                          <a:rPr lang="en-US" b="0" i="1" smtClean="0">
+                            <a:latin typeface="Cambria Math" panose="02040503050406030204" pitchFamily="18" charset="0"/>
+                          </a:rPr>
+                        </m:ctrlPr>
+                      </m:dPr>
+                      <m:e>
+                        <m:r>
+                          <a:rPr lang="en-US" b="0" i="1" smtClean="0">
+                            <a:latin typeface="Cambria Math" panose="02040503050406030204" pitchFamily="18" charset="0"/>
+                          </a:rPr>
+                          <m:t>𝐴</m:t>
+                        </m:r>
+                        <m:r>
+                          <a:rPr lang="en-US" b="0" i="1" smtClean="0">
+                            <a:latin typeface="Cambria Math" panose="02040503050406030204" pitchFamily="18" charset="0"/>
+                          </a:rPr>
+                          <m:t>+</m:t>
+                        </m:r>
+                        <m:acc>
+                          <m:accPr>
+                            <m:chr m:val="̅"/>
+                            <m:ctrlPr>
+                              <a:rPr lang="en-US" b="0" i="1" smtClean="0">
+                                <a:latin typeface="Cambria Math" panose="02040503050406030204" pitchFamily="18" charset="0"/>
+                              </a:rPr>
+                            </m:ctrlPr>
+                          </m:accPr>
+                          <m:e>
+                            <m:r>
+                              <a:rPr lang="en-US" b="0" i="1" smtClean="0">
+                                <a:latin typeface="Cambria Math" panose="02040503050406030204" pitchFamily="18" charset="0"/>
+                              </a:rPr>
+                              <m:t>𝐵</m:t>
+                            </m:r>
+                          </m:e>
+                        </m:acc>
+                      </m:e>
+                    </m:d>
+                  </m:oMath>
+                </a14:m>
+                <a:r>
+                  <a:rPr lang="en-US" b="0" dirty="0"/>
+                  <a:t> </a:t>
+                </a:r>
+                <a:r>
+                  <a:rPr lang="en-US" dirty="0"/>
+                  <a:t>= A</a:t>
+                </a:r>
+                <a:endParaRPr lang="en-US" b="0" dirty="0"/>
+              </a:p>
+              <a:p>
+                <a14:m>
+                  <m:oMath xmlns:m="http://schemas.openxmlformats.org/officeDocument/2006/math">
+                    <m:d>
+                      <m:dPr>
+                        <m:ctrlPr>
+                          <a:rPr lang="en-US" i="1" smtClean="0">
+                            <a:latin typeface="Cambria Math" panose="02040503050406030204" pitchFamily="18" charset="0"/>
+                          </a:rPr>
+                        </m:ctrlPr>
+                      </m:dPr>
+                      <m:e>
+                        <m:r>
+                          <a:rPr lang="en-US" i="1">
+                            <a:latin typeface="Cambria Math" panose="02040503050406030204" pitchFamily="18" charset="0"/>
+                          </a:rPr>
+                          <m:t>𝐴</m:t>
+                        </m:r>
+                        <m:r>
+                          <a:rPr lang="en-US" b="0" i="1" smtClean="0">
+                            <a:latin typeface="Cambria Math" panose="02040503050406030204" pitchFamily="18" charset="0"/>
+                          </a:rPr>
+                          <m:t>+</m:t>
+                        </m:r>
+                        <m:r>
+                          <a:rPr lang="en-US" i="1">
+                            <a:latin typeface="Cambria Math" panose="02040503050406030204" pitchFamily="18" charset="0"/>
+                          </a:rPr>
+                          <m:t>𝐵</m:t>
+                        </m:r>
+                      </m:e>
+                    </m:d>
+                    <m:r>
+                      <a:rPr lang="en-US" b="0" i="1" smtClean="0">
+                        <a:latin typeface="Cambria Math" panose="02040503050406030204" pitchFamily="18" charset="0"/>
+                      </a:rPr>
+                      <m:t>.</m:t>
+                    </m:r>
+                    <m:d>
+                      <m:dPr>
+                        <m:ctrlPr>
+                          <a:rPr lang="en-US" b="0" i="1" smtClean="0">
+                            <a:latin typeface="Cambria Math" panose="02040503050406030204" pitchFamily="18" charset="0"/>
+                          </a:rPr>
+                        </m:ctrlPr>
+                      </m:dPr>
+                      <m:e>
+                        <m:r>
+                          <a:rPr lang="en-US" i="1">
+                            <a:latin typeface="Cambria Math" panose="02040503050406030204" pitchFamily="18" charset="0"/>
+                          </a:rPr>
+                          <m:t>𝐴</m:t>
+                        </m:r>
+                        <m:r>
+                          <a:rPr lang="en-US" b="0" i="1" smtClean="0">
+                            <a:latin typeface="Cambria Math" panose="02040503050406030204" pitchFamily="18" charset="0"/>
+                          </a:rPr>
+                          <m:t>+</m:t>
+                        </m:r>
+                        <m:acc>
+                          <m:accPr>
+                            <m:chr m:val="̅"/>
+                            <m:ctrlPr>
+                              <a:rPr lang="en-US" i="1">
+                                <a:latin typeface="Cambria Math" panose="02040503050406030204" pitchFamily="18" charset="0"/>
+                              </a:rPr>
+                            </m:ctrlPr>
+                          </m:accPr>
+                          <m:e>
+                            <m:r>
+                              <a:rPr lang="en-US" i="1">
+                                <a:latin typeface="Cambria Math" panose="02040503050406030204" pitchFamily="18" charset="0"/>
+                              </a:rPr>
+                              <m:t>𝐵</m:t>
+                            </m:r>
+                          </m:e>
+                        </m:acc>
+                      </m:e>
+                    </m:d>
+                    <m:r>
+                      <a:rPr lang="en-US" b="0" i="1" smtClean="0">
+                        <a:latin typeface="Cambria Math" panose="02040503050406030204" pitchFamily="18" charset="0"/>
+                      </a:rPr>
+                      <m:t>.</m:t>
+                    </m:r>
+                    <m:d>
+                      <m:dPr>
+                        <m:ctrlPr>
+                          <a:rPr lang="en-US" i="1">
+                            <a:latin typeface="Cambria Math" panose="02040503050406030204" pitchFamily="18" charset="0"/>
+                          </a:rPr>
+                        </m:ctrlPr>
+                      </m:dPr>
+                      <m:e>
+                        <m:acc>
+                          <m:accPr>
+                            <m:chr m:val="̅"/>
+                            <m:ctrlPr>
+                              <a:rPr lang="en-US" i="1">
+                                <a:latin typeface="Cambria Math" panose="02040503050406030204" pitchFamily="18" charset="0"/>
+                              </a:rPr>
+                            </m:ctrlPr>
+                          </m:accPr>
+                          <m:e>
+                            <m:r>
+                              <a:rPr lang="en-US" i="1">
+                                <a:latin typeface="Cambria Math" panose="02040503050406030204" pitchFamily="18" charset="0"/>
+                              </a:rPr>
+                              <m:t>𝐴</m:t>
+                            </m:r>
+                          </m:e>
+                        </m:acc>
+                        <m:r>
+                          <a:rPr lang="en-US" b="0" i="1" smtClean="0">
+                            <a:latin typeface="Cambria Math" panose="02040503050406030204" pitchFamily="18" charset="0"/>
+                          </a:rPr>
+                          <m:t>+</m:t>
+                        </m:r>
+                        <m:r>
+                          <a:rPr lang="en-US" b="0" i="1" smtClean="0">
+                            <a:latin typeface="Cambria Math" panose="02040503050406030204" pitchFamily="18" charset="0"/>
+                          </a:rPr>
+                          <m:t>𝐵</m:t>
+                        </m:r>
+                      </m:e>
+                    </m:d>
+                    <m:r>
+                      <a:rPr lang="en-US" b="0" i="1" smtClean="0">
+                        <a:latin typeface="Cambria Math" panose="02040503050406030204" pitchFamily="18" charset="0"/>
+                      </a:rPr>
+                      <m:t>= ?</m:t>
+                    </m:r>
+                  </m:oMath>
+                </a14:m>
+                <a:endParaRPr lang="en-US" i="1" dirty="0">
+                  <a:latin typeface="Cambria Math" panose="02040503050406030204" pitchFamily="18" charset="0"/>
+                </a:endParaRPr>
+              </a:p>
+              <a:p>
+                <a14:m>
+                  <m:oMath xmlns:m="http://schemas.openxmlformats.org/officeDocument/2006/math">
+                    <m:acc>
+                      <m:accPr>
+                        <m:chr m:val="̅"/>
+                        <m:ctrlPr>
+                          <a:rPr lang="en-US" i="1" smtClean="0">
+                            <a:latin typeface="Cambria Math" panose="02040503050406030204" pitchFamily="18" charset="0"/>
+                          </a:rPr>
+                        </m:ctrlPr>
+                      </m:accPr>
+                      <m:e>
+                        <m:r>
+                          <a:rPr lang="en-US" b="0" i="1" smtClean="0">
+                            <a:latin typeface="Cambria Math" panose="02040503050406030204" pitchFamily="18" charset="0"/>
+                          </a:rPr>
+                          <m:t>𝐴</m:t>
+                        </m:r>
+                        <m:r>
+                          <a:rPr lang="en-US" b="0" i="1" smtClean="0">
+                            <a:latin typeface="Cambria Math" panose="02040503050406030204" pitchFamily="18" charset="0"/>
+                          </a:rPr>
+                          <m:t>+</m:t>
+                        </m:r>
+                        <m:r>
+                          <a:rPr lang="en-US" b="0" i="1" smtClean="0">
+                            <a:latin typeface="Cambria Math" panose="02040503050406030204" pitchFamily="18" charset="0"/>
+                          </a:rPr>
+                          <m:t>𝐵</m:t>
+                        </m:r>
+                      </m:e>
+                    </m:acc>
+                    <m:r>
+                      <a:rPr lang="en-US" b="0" i="1" smtClean="0">
+                        <a:latin typeface="Cambria Math" panose="02040503050406030204" pitchFamily="18" charset="0"/>
+                      </a:rPr>
+                      <m:t>+</m:t>
+                    </m:r>
+                    <m:r>
+                      <a:rPr lang="en-US" b="0" i="1" smtClean="0">
+                        <a:latin typeface="Cambria Math" panose="02040503050406030204" pitchFamily="18" charset="0"/>
+                      </a:rPr>
+                      <m:t>𝐴</m:t>
+                    </m:r>
+                    <m:r>
+                      <a:rPr lang="en-US" b="0" i="1" smtClean="0">
+                        <a:latin typeface="Cambria Math" panose="02040503050406030204" pitchFamily="18" charset="0"/>
+                      </a:rPr>
+                      <m:t>. </m:t>
+                    </m:r>
+                    <m:acc>
+                      <m:accPr>
+                        <m:chr m:val="̅"/>
+                        <m:ctrlPr>
+                          <a:rPr lang="en-US" i="1">
+                            <a:latin typeface="Cambria Math" panose="02040503050406030204" pitchFamily="18" charset="0"/>
+                          </a:rPr>
+                        </m:ctrlPr>
+                      </m:accPr>
+                      <m:e>
+                        <m:r>
+                          <a:rPr lang="en-US" i="1">
+                            <a:latin typeface="Cambria Math" panose="02040503050406030204" pitchFamily="18" charset="0"/>
+                          </a:rPr>
+                          <m:t>𝐵</m:t>
+                        </m:r>
+                      </m:e>
+                    </m:acc>
+                    <m:r>
+                      <a:rPr lang="en-US" b="0" i="1" smtClean="0">
+                        <a:latin typeface="Cambria Math" panose="02040503050406030204" pitchFamily="18" charset="0"/>
+                      </a:rPr>
+                      <m:t>= ?</m:t>
+                    </m:r>
+                  </m:oMath>
+                </a14:m>
+                <a:endParaRPr lang="en-US" i="1" dirty="0">
+                  <a:latin typeface="Cambria Math" panose="02040503050406030204" pitchFamily="18" charset="0"/>
+                </a:endParaRPr>
+              </a:p>
+              <a:p>
+                <a14:m>
+                  <m:oMath xmlns:m="http://schemas.openxmlformats.org/officeDocument/2006/math">
+                    <m:d>
+                      <m:dPr>
+                        <m:ctrlPr>
+                          <a:rPr lang="en-US" i="1" smtClean="0">
+                            <a:latin typeface="Cambria Math" panose="02040503050406030204" pitchFamily="18" charset="0"/>
+                          </a:rPr>
+                        </m:ctrlPr>
+                      </m:dPr>
+                      <m:e>
+                        <m:r>
+                          <a:rPr lang="en-US" i="1">
+                            <a:latin typeface="Cambria Math" panose="02040503050406030204" pitchFamily="18" charset="0"/>
+                          </a:rPr>
+                          <m:t>𝐴</m:t>
+                        </m:r>
+                        <m:r>
+                          <a:rPr lang="en-US" b="0" i="1" smtClean="0">
+                            <a:latin typeface="Cambria Math" panose="02040503050406030204" pitchFamily="18" charset="0"/>
+                          </a:rPr>
+                          <m:t>+</m:t>
+                        </m:r>
+                        <m:r>
+                          <a:rPr lang="en-US" i="1">
+                            <a:latin typeface="Cambria Math" panose="02040503050406030204" pitchFamily="18" charset="0"/>
+                          </a:rPr>
+                          <m:t>𝐵</m:t>
+                        </m:r>
+                        <m:r>
+                          <a:rPr lang="en-US" b="0" i="1" smtClean="0">
+                            <a:latin typeface="Cambria Math" panose="02040503050406030204" pitchFamily="18" charset="0"/>
+                          </a:rPr>
+                          <m:t>+</m:t>
+                        </m:r>
+                        <m:r>
+                          <a:rPr lang="en-US" b="0" i="1" smtClean="0">
+                            <a:latin typeface="Cambria Math" panose="02040503050406030204" pitchFamily="18" charset="0"/>
+                          </a:rPr>
+                          <m:t>𝐶</m:t>
+                        </m:r>
+                      </m:e>
+                    </m:d>
+                    <m:r>
+                      <a:rPr lang="en-US" b="0" i="1" smtClean="0">
+                        <a:latin typeface="Cambria Math" panose="02040503050406030204" pitchFamily="18" charset="0"/>
+                      </a:rPr>
+                      <m:t>.</m:t>
+                    </m:r>
+                    <m:d>
+                      <m:dPr>
+                        <m:ctrlPr>
+                          <a:rPr lang="en-US" i="1">
+                            <a:latin typeface="Cambria Math" panose="02040503050406030204" pitchFamily="18" charset="0"/>
+                          </a:rPr>
+                        </m:ctrlPr>
+                      </m:dPr>
+                      <m:e>
+                        <m:acc>
+                          <m:accPr>
+                            <m:chr m:val="̅"/>
+                            <m:ctrlPr>
+                              <a:rPr lang="en-US" i="1">
+                                <a:latin typeface="Cambria Math" panose="02040503050406030204" pitchFamily="18" charset="0"/>
+                              </a:rPr>
+                            </m:ctrlPr>
+                          </m:accPr>
+                          <m:e>
+                            <m:r>
+                              <a:rPr lang="en-US" i="1">
+                                <a:latin typeface="Cambria Math" panose="02040503050406030204" pitchFamily="18" charset="0"/>
+                              </a:rPr>
+                              <m:t>𝐴</m:t>
+                            </m:r>
+                          </m:e>
+                        </m:acc>
+                        <m:r>
+                          <a:rPr lang="en-US" b="0" i="1" smtClean="0">
+                            <a:latin typeface="Cambria Math" panose="02040503050406030204" pitchFamily="18" charset="0"/>
+                          </a:rPr>
+                          <m:t>+</m:t>
+                        </m:r>
+                        <m:r>
+                          <a:rPr lang="en-US" b="0" i="1" smtClean="0">
+                            <a:latin typeface="Cambria Math" panose="02040503050406030204" pitchFamily="18" charset="0"/>
+                          </a:rPr>
+                          <m:t>𝐵</m:t>
+                        </m:r>
+                      </m:e>
+                    </m:d>
+                    <m:r>
+                      <a:rPr lang="en-US" b="0" i="1" smtClean="0">
+                        <a:latin typeface="Cambria Math" panose="02040503050406030204" pitchFamily="18" charset="0"/>
+                      </a:rPr>
+                      <m:t>.(</m:t>
+                    </m:r>
+                    <m:r>
+                      <a:rPr lang="en-US" b="0" i="1" smtClean="0">
+                        <a:latin typeface="Cambria Math" panose="02040503050406030204" pitchFamily="18" charset="0"/>
+                      </a:rPr>
+                      <m:t>𝐴</m:t>
+                    </m:r>
+                    <m:r>
+                      <a:rPr lang="en-US" b="0" i="1" smtClean="0">
+                        <a:latin typeface="Cambria Math" panose="02040503050406030204" pitchFamily="18" charset="0"/>
+                      </a:rPr>
+                      <m:t>+</m:t>
+                    </m:r>
+                    <m:acc>
+                      <m:accPr>
+                        <m:chr m:val="̅"/>
+                        <m:ctrlPr>
+                          <a:rPr lang="en-US" b="0" i="1" smtClean="0">
+                            <a:latin typeface="Cambria Math" panose="02040503050406030204" pitchFamily="18" charset="0"/>
+                          </a:rPr>
+                        </m:ctrlPr>
+                      </m:accPr>
+                      <m:e>
+                        <m:r>
+                          <a:rPr lang="en-US" b="0" i="1" smtClean="0">
+                            <a:latin typeface="Cambria Math" panose="02040503050406030204" pitchFamily="18" charset="0"/>
+                          </a:rPr>
+                          <m:t>𝐶</m:t>
+                        </m:r>
+                      </m:e>
+                    </m:acc>
+                  </m:oMath>
+                </a14:m>
+                <a:r>
+                  <a:rPr lang="en-US" i="1" dirty="0">
+                    <a:latin typeface="Cambria Math" panose="02040503050406030204" pitchFamily="18" charset="0"/>
+                  </a:rPr>
+                  <a:t>) =?</a:t>
+                </a:r>
+              </a:p>
+              <a:p>
+                <a14:m>
+                  <m:oMath xmlns:m="http://schemas.openxmlformats.org/officeDocument/2006/math">
+                    <m:d>
+                      <m:dPr>
+                        <m:ctrlPr>
+                          <a:rPr lang="en-US" b="0" i="1" smtClean="0">
+                            <a:latin typeface="Cambria Math" panose="02040503050406030204" pitchFamily="18" charset="0"/>
+                          </a:rPr>
+                        </m:ctrlPr>
+                      </m:dPr>
+                      <m:e>
+                        <m:r>
+                          <a:rPr lang="en-US" i="1">
+                            <a:latin typeface="Cambria Math" panose="02040503050406030204" pitchFamily="18" charset="0"/>
+                          </a:rPr>
+                          <m:t>𝐴</m:t>
+                        </m:r>
+                        <m:r>
+                          <a:rPr lang="en-US" b="0" i="1" smtClean="0">
+                            <a:latin typeface="Cambria Math" panose="02040503050406030204" pitchFamily="18" charset="0"/>
+                          </a:rPr>
+                          <m:t>.</m:t>
+                        </m:r>
+                        <m:acc>
+                          <m:accPr>
+                            <m:chr m:val="̅"/>
+                            <m:ctrlPr>
+                              <a:rPr lang="en-US" i="1">
+                                <a:latin typeface="Cambria Math" panose="02040503050406030204" pitchFamily="18" charset="0"/>
+                              </a:rPr>
+                            </m:ctrlPr>
+                          </m:accPr>
+                          <m:e>
+                            <m:r>
+                              <a:rPr lang="en-US" i="1">
+                                <a:latin typeface="Cambria Math" panose="02040503050406030204" pitchFamily="18" charset="0"/>
+                              </a:rPr>
+                              <m:t>𝐵</m:t>
+                            </m:r>
+                          </m:e>
+                        </m:acc>
+                        <m:r>
+                          <a:rPr lang="en-US" b="0" i="1" smtClean="0">
+                            <a:latin typeface="Cambria Math" panose="02040503050406030204" pitchFamily="18" charset="0"/>
+                          </a:rPr>
+                          <m:t>+</m:t>
+                        </m:r>
+                        <m:r>
+                          <a:rPr lang="en-US" b="0" i="1" smtClean="0">
+                            <a:latin typeface="Cambria Math" panose="02040503050406030204" pitchFamily="18" charset="0"/>
+                          </a:rPr>
+                          <m:t>𝐵</m:t>
+                        </m:r>
+                        <m:r>
+                          <a:rPr lang="en-US" b="0" i="1" smtClean="0">
+                            <a:latin typeface="Cambria Math" panose="02040503050406030204" pitchFamily="18" charset="0"/>
+                          </a:rPr>
+                          <m:t>.</m:t>
+                        </m:r>
+                        <m:r>
+                          <a:rPr lang="en-US" b="0" i="1" smtClean="0">
+                            <a:latin typeface="Cambria Math" panose="02040503050406030204" pitchFamily="18" charset="0"/>
+                          </a:rPr>
+                          <m:t>𝐶</m:t>
+                        </m:r>
+                      </m:e>
+                    </m:d>
+                    <m:r>
+                      <a:rPr lang="en-US" b="0" i="1" smtClean="0">
+                        <a:latin typeface="Cambria Math" panose="02040503050406030204" pitchFamily="18" charset="0"/>
+                      </a:rPr>
+                      <m:t>.</m:t>
+                    </m:r>
+                    <m:d>
+                      <m:dPr>
+                        <m:ctrlPr>
+                          <a:rPr lang="en-US" b="0" i="1" smtClean="0">
+                            <a:latin typeface="Cambria Math" panose="02040503050406030204" pitchFamily="18" charset="0"/>
+                          </a:rPr>
+                        </m:ctrlPr>
+                      </m:dPr>
+                      <m:e>
+                        <m:acc>
+                          <m:accPr>
+                            <m:chr m:val="̅"/>
+                            <m:ctrlPr>
+                              <a:rPr lang="en-US" i="1">
+                                <a:latin typeface="Cambria Math" panose="02040503050406030204" pitchFamily="18" charset="0"/>
+                              </a:rPr>
+                            </m:ctrlPr>
+                          </m:accPr>
+                          <m:e>
+                            <m:r>
+                              <a:rPr lang="en-US" i="1">
+                                <a:latin typeface="Cambria Math" panose="02040503050406030204" pitchFamily="18" charset="0"/>
+                              </a:rPr>
+                              <m:t>𝐴</m:t>
+                            </m:r>
+                          </m:e>
+                        </m:acc>
+                        <m:r>
+                          <a:rPr lang="en-US" b="0" i="1" smtClean="0">
+                            <a:latin typeface="Cambria Math" panose="02040503050406030204" pitchFamily="18" charset="0"/>
+                          </a:rPr>
+                          <m:t>+</m:t>
+                        </m:r>
+                        <m:acc>
+                          <m:accPr>
+                            <m:chr m:val="̅"/>
+                            <m:ctrlPr>
+                              <a:rPr lang="en-US" i="1">
+                                <a:latin typeface="Cambria Math" panose="02040503050406030204" pitchFamily="18" charset="0"/>
+                              </a:rPr>
+                            </m:ctrlPr>
+                          </m:accPr>
+                          <m:e>
+                            <m:r>
+                              <a:rPr lang="en-US" i="1">
+                                <a:latin typeface="Cambria Math" panose="02040503050406030204" pitchFamily="18" charset="0"/>
+                              </a:rPr>
+                              <m:t>𝐶</m:t>
+                            </m:r>
+                          </m:e>
+                        </m:acc>
+                      </m:e>
+                    </m:d>
+                    <m:r>
+                      <a:rPr lang="en-US" b="0" i="1" smtClean="0">
+                        <a:latin typeface="Cambria Math" panose="02040503050406030204" pitchFamily="18" charset="0"/>
+                      </a:rPr>
+                      <m:t>= ?</m:t>
+                    </m:r>
+                  </m:oMath>
+                </a14:m>
+                <a:endParaRPr lang="en-US" b="0" i="1" dirty="0">
+                  <a:latin typeface="Cambria Math" panose="02040503050406030204" pitchFamily="18" charset="0"/>
+                </a:endParaRPr>
+              </a:p>
+              <a:p>
+                <a:endParaRPr lang="en-US" dirty="0"/>
+              </a:p>
+              <a:p>
+                <a:endParaRPr lang="en-US" dirty="0"/>
+              </a:p>
+            </p:txBody>
+          </p:sp>
+        </mc:Choice>
+        <mc:Fallback>
+          <p:sp>
+            <p:nvSpPr>
+              <p:cNvPr id="3" name="Content Placeholder 2">
+                <a:extLst>
+                  <a:ext uri="{FF2B5EF4-FFF2-40B4-BE49-F238E27FC236}">
+                    <a16:creationId xmlns:a16="http://schemas.microsoft.com/office/drawing/2014/main" id="{04ACED5D-CF97-64FD-7F0B-F9E29704E8AC}"/>
+                  </a:ext>
+                </a:extLst>
+              </p:cNvPr>
+              <p:cNvSpPr>
+                <a:spLocks noGrp="1" noRot="1" noChangeAspect="1" noMove="1" noResize="1" noEditPoints="1" noAdjustHandles="1" noChangeArrowheads="1" noChangeShapeType="1" noTextEdit="1"/>
+              </p:cNvSpPr>
+              <p:nvPr>
+                <p:ph idx="1"/>
+              </p:nvPr>
+            </p:nvSpPr>
+            <p:spPr>
+              <a:blipFill>
+                <a:blip r:embed="rId2"/>
+                <a:stretch>
+                  <a:fillRect l="-1043" t="-3081"/>
+                </a:stretch>
+              </a:blipFill>
+            </p:spPr>
+            <p:txBody>
+              <a:bodyPr/>
+              <a:lstStyle/>
+              <a:p>
+                <a:r>
+                  <a:rPr lang="en-US">
+                    <a:noFill/>
+                  </a:rPr>
+                  <a:t> </a:t>
+                </a:r>
+              </a:p>
+            </p:txBody>
+          </p:sp>
+        </mc:Fallback>
+      </mc:AlternateContent>
+    </p:spTree>
+    <p:extLst>
+      <p:ext uri="{BB962C8B-B14F-4D97-AF65-F5344CB8AC3E}">
+        <p14:creationId xmlns:p14="http://schemas.microsoft.com/office/powerpoint/2010/main" val="2630060661"/>
+      </p:ext>
+    </p:extLst>
+  </p:cSld>
+  <p:clrMapOvr>
+    <a:masterClrMapping/>
+  </p:clrMapOvr>
+</p:sld>
+</file>
+
+<file path=ppt/slides/slide81.xml><?xml version="1.0" encoding="utf-8"?>
+<p:sld xmlns:a="http://schemas.openxmlformats.org/drawingml/2006/main" xmlns:r="http://schemas.openxmlformats.org/officeDocument/2006/relationships" xmlns:p="http://schemas.openxmlformats.org/presentationml/2006/main">
+  <p:cSld>
+    <p:spTree>
+      <p:nvGrpSpPr>
+        <p:cNvPr id="1" name=""/>
+        <p:cNvGrpSpPr/>
+        <p:nvPr/>
+      </p:nvGrpSpPr>
+      <p:grpSpPr>
+        <a:xfrm>
+          <a:off x="0" y="0"/>
+          <a:ext cx="0" cy="0"/>
+          <a:chOff x="0" y="0"/>
+          <a:chExt cx="0" cy="0"/>
+        </a:xfrm>
+      </p:grpSpPr>
+      <p:sp>
+        <p:nvSpPr>
+          <p:cNvPr id="2" name="Title 1">
+            <a:extLst>
+              <a:ext uri="{FF2B5EF4-FFF2-40B4-BE49-F238E27FC236}">
+                <a16:creationId xmlns:a16="http://schemas.microsoft.com/office/drawing/2014/main" id="{302434AD-E6F7-D00B-CB66-20747A08BF08}"/>
+              </a:ext>
+            </a:extLst>
+          </p:cNvPr>
+          <p:cNvSpPr>
+            <a:spLocks noGrp="1"/>
+          </p:cNvSpPr>
+          <p:nvPr>
+            <p:ph type="title"/>
+          </p:nvPr>
+        </p:nvSpPr>
+        <p:spPr/>
+        <p:txBody>
+          <a:bodyPr/>
+          <a:lstStyle/>
+          <a:p>
+            <a:r>
+              <a:rPr lang="en-US" dirty="0"/>
+              <a:t>Programming Practice</a:t>
+            </a:r>
+          </a:p>
+        </p:txBody>
+      </p:sp>
+      <p:sp>
+        <p:nvSpPr>
+          <p:cNvPr id="3" name="Content Placeholder 2">
+            <a:extLst>
+              <a:ext uri="{FF2B5EF4-FFF2-40B4-BE49-F238E27FC236}">
+                <a16:creationId xmlns:a16="http://schemas.microsoft.com/office/drawing/2014/main" id="{D315EE43-FFCC-BF84-FE5A-6984F2C46978}"/>
+              </a:ext>
+            </a:extLst>
+          </p:cNvPr>
+          <p:cNvSpPr>
+            <a:spLocks noGrp="1"/>
+          </p:cNvSpPr>
+          <p:nvPr>
+            <p:ph idx="1"/>
+          </p:nvPr>
+        </p:nvSpPr>
+        <p:spPr/>
+        <p:txBody>
+          <a:bodyPr/>
+          <a:lstStyle/>
+          <a:p>
+            <a:r>
+              <a:rPr lang="en-US" dirty="0"/>
+              <a:t>Specific to Test2 ,</a:t>
+            </a:r>
+            <a:r>
+              <a:rPr lang="en-US" i="1" dirty="0"/>
+              <a:t>(skip if you are already done with test 2)</a:t>
+            </a:r>
+          </a:p>
+          <a:p>
+            <a:pPr lvl="1"/>
+            <a:r>
+              <a:rPr lang="en-US" dirty="0">
+                <a:hlinkClick r:id="rId2"/>
+              </a:rPr>
+              <a:t>https://www.hackerrank.com/acsltest2practise</a:t>
+            </a:r>
+            <a:r>
+              <a:rPr lang="en-US" dirty="0"/>
+              <a:t> </a:t>
+            </a:r>
+          </a:p>
+          <a:p>
+            <a:r>
+              <a:rPr lang="en-US" dirty="0"/>
+              <a:t>Specific to Test 3</a:t>
+            </a:r>
+          </a:p>
+          <a:p>
+            <a:pPr lvl="1"/>
+            <a:r>
+              <a:rPr lang="en-US" dirty="0">
+                <a:hlinkClick r:id="rId3"/>
+              </a:rPr>
+              <a:t>https://www.hackerrank.com/acsltest3practise</a:t>
+            </a:r>
+            <a:r>
+              <a:rPr lang="en-US" dirty="0"/>
+              <a:t> </a:t>
+            </a:r>
+          </a:p>
+          <a:p>
+            <a:pPr lvl="1"/>
+            <a:r>
+              <a:rPr lang="en-US" dirty="0"/>
+              <a:t>Knowledge needed</a:t>
+            </a:r>
+          </a:p>
+          <a:p>
+            <a:pPr lvl="2"/>
+            <a:r>
+              <a:rPr lang="en-US" dirty="0"/>
+              <a:t>New: Stacks and Queues</a:t>
+            </a:r>
+          </a:p>
+          <a:p>
+            <a:pPr lvl="2"/>
+            <a:r>
+              <a:rPr lang="en-US"/>
+              <a:t>Existing</a:t>
+            </a:r>
+            <a:r>
+              <a:rPr lang="en-US" dirty="0"/>
+              <a:t>: if else, loops, arrays, functions, …</a:t>
+            </a:r>
+          </a:p>
+        </p:txBody>
+      </p:sp>
+    </p:spTree>
+    <p:extLst>
+      <p:ext uri="{BB962C8B-B14F-4D97-AF65-F5344CB8AC3E}">
+        <p14:creationId xmlns:p14="http://schemas.microsoft.com/office/powerpoint/2010/main" val="2053329622"/>
+      </p:ext>
+    </p:extLst>
+  </p:cSld>
+  <p:clrMapOvr>
+    <a:masterClrMapping/>
+  </p:clrMapOvr>
+</p:sld>
+</file>
+
 <file path=ppt/slides/slide9.xml><?xml version="1.0" encoding="utf-8"?>
 <p:sld xmlns:a="http://schemas.openxmlformats.org/drawingml/2006/main" xmlns:r="http://schemas.openxmlformats.org/officeDocument/2006/relationships" xmlns:p="http://schemas.openxmlformats.org/presentationml/2006/main">
   <p:cSld>

--- a/all/ExploringCSConceptsViaACSLCompetitions_all.pptx
+++ b/all/ExploringCSConceptsViaACSLCompetitions_all.pptx
@@ -5,7 +5,7 @@
     <p:sldMasterId id="2147483648" r:id="rId1"/>
   </p:sldMasterIdLst>
   <p:notesMasterIdLst>
-    <p:notesMasterId r:id="rId83"/>
+    <p:notesMasterId r:id="rId89"/>
   </p:notesMasterIdLst>
   <p:sldIdLst>
     <p:sldId id="256" r:id="rId2"/>
@@ -88,7 +88,13 @@
     <p:sldId id="345" r:id="rId79"/>
     <p:sldId id="347" r:id="rId80"/>
     <p:sldId id="349" r:id="rId81"/>
-    <p:sldId id="350" r:id="rId82"/>
+    <p:sldId id="351" r:id="rId82"/>
+    <p:sldId id="353" r:id="rId83"/>
+    <p:sldId id="352" r:id="rId84"/>
+    <p:sldId id="354" r:id="rId85"/>
+    <p:sldId id="350" r:id="rId86"/>
+    <p:sldId id="355" r:id="rId87"/>
+    <p:sldId id="356" r:id="rId88"/>
   </p:sldIdLst>
   <p:sldSz cx="12192000" cy="6858000"/>
   <p:notesSz cx="6858000" cy="9144000"/>
@@ -466,7 +472,7 @@
           <a:p>
             <a:fld id="{15653688-98A8-4F3B-A740-8E6568AE1BCB}" type="datetimeFigureOut">
               <a:rPr lang="en-US" smtClean="0"/>
-              <a:t>2/26/2026</a:t>
+              <a:t>3/5/2026</a:t>
             </a:fld>
             <a:endParaRPr lang="en-US"/>
           </a:p>
@@ -2220,7 +2226,7 @@
           <a:p>
             <a:fld id="{20CB266D-A331-4A79-AB46-FEF40B16CF9B}" type="datetimeFigureOut">
               <a:rPr lang="en-US" smtClean="0"/>
-              <a:t>2/26/2026</a:t>
+              <a:t>3/5/2026</a:t>
             </a:fld>
             <a:endParaRPr lang="en-US"/>
           </a:p>
@@ -2418,7 +2424,7 @@
           <a:p>
             <a:fld id="{20CB266D-A331-4A79-AB46-FEF40B16CF9B}" type="datetimeFigureOut">
               <a:rPr lang="en-US" smtClean="0"/>
-              <a:t>2/26/2026</a:t>
+              <a:t>3/5/2026</a:t>
             </a:fld>
             <a:endParaRPr lang="en-US"/>
           </a:p>
@@ -2626,7 +2632,7 @@
           <a:p>
             <a:fld id="{20CB266D-A331-4A79-AB46-FEF40B16CF9B}" type="datetimeFigureOut">
               <a:rPr lang="en-US" smtClean="0"/>
-              <a:t>2/26/2026</a:t>
+              <a:t>3/5/2026</a:t>
             </a:fld>
             <a:endParaRPr lang="en-US"/>
           </a:p>
@@ -2824,7 +2830,7 @@
           <a:p>
             <a:fld id="{20CB266D-A331-4A79-AB46-FEF40B16CF9B}" type="datetimeFigureOut">
               <a:rPr lang="en-US" smtClean="0"/>
-              <a:t>2/26/2026</a:t>
+              <a:t>3/5/2026</a:t>
             </a:fld>
             <a:endParaRPr lang="en-US"/>
           </a:p>
@@ -3099,7 +3105,7 @@
           <a:p>
             <a:fld id="{20CB266D-A331-4A79-AB46-FEF40B16CF9B}" type="datetimeFigureOut">
               <a:rPr lang="en-US" smtClean="0"/>
-              <a:t>2/26/2026</a:t>
+              <a:t>3/5/2026</a:t>
             </a:fld>
             <a:endParaRPr lang="en-US"/>
           </a:p>
@@ -3364,7 +3370,7 @@
           <a:p>
             <a:fld id="{20CB266D-A331-4A79-AB46-FEF40B16CF9B}" type="datetimeFigureOut">
               <a:rPr lang="en-US" smtClean="0"/>
-              <a:t>2/26/2026</a:t>
+              <a:t>3/5/2026</a:t>
             </a:fld>
             <a:endParaRPr lang="en-US"/>
           </a:p>
@@ -3776,7 +3782,7 @@
           <a:p>
             <a:fld id="{20CB266D-A331-4A79-AB46-FEF40B16CF9B}" type="datetimeFigureOut">
               <a:rPr lang="en-US" smtClean="0"/>
-              <a:t>2/26/2026</a:t>
+              <a:t>3/5/2026</a:t>
             </a:fld>
             <a:endParaRPr lang="en-US"/>
           </a:p>
@@ -3917,7 +3923,7 @@
           <a:p>
             <a:fld id="{20CB266D-A331-4A79-AB46-FEF40B16CF9B}" type="datetimeFigureOut">
               <a:rPr lang="en-US" smtClean="0"/>
-              <a:t>2/26/2026</a:t>
+              <a:t>3/5/2026</a:t>
             </a:fld>
             <a:endParaRPr lang="en-US"/>
           </a:p>
@@ -4030,7 +4036,7 @@
           <a:p>
             <a:fld id="{20CB266D-A331-4A79-AB46-FEF40B16CF9B}" type="datetimeFigureOut">
               <a:rPr lang="en-US" smtClean="0"/>
-              <a:t>2/26/2026</a:t>
+              <a:t>3/5/2026</a:t>
             </a:fld>
             <a:endParaRPr lang="en-US"/>
           </a:p>
@@ -4341,7 +4347,7 @@
           <a:p>
             <a:fld id="{20CB266D-A331-4A79-AB46-FEF40B16CF9B}" type="datetimeFigureOut">
               <a:rPr lang="en-US" smtClean="0"/>
-              <a:t>2/26/2026</a:t>
+              <a:t>3/5/2026</a:t>
             </a:fld>
             <a:endParaRPr lang="en-US"/>
           </a:p>
@@ -4629,7 +4635,7 @@
           <a:p>
             <a:fld id="{20CB266D-A331-4A79-AB46-FEF40B16CF9B}" type="datetimeFigureOut">
               <a:rPr lang="en-US" smtClean="0"/>
-              <a:t>2/26/2026</a:t>
+              <a:t>3/5/2026</a:t>
             </a:fld>
             <a:endParaRPr lang="en-US"/>
           </a:p>
@@ -4870,7 +4876,7 @@
           <a:p>
             <a:fld id="{20CB266D-A331-4A79-AB46-FEF40B16CF9B}" type="datetimeFigureOut">
               <a:rPr lang="en-US" smtClean="0"/>
-              <a:t>2/26/2026</a:t>
+              <a:t>3/5/2026</a:t>
             </a:fld>
             <a:endParaRPr lang="en-US"/>
           </a:p>
@@ -32563,8 +32569,8 @@
           </a:p>
         </p:txBody>
       </p:sp>
-      <mc:AlternateContent xmlns:mc="http://schemas.openxmlformats.org/markup-compatibility/2006">
-        <mc:Choice xmlns:a14="http://schemas.microsoft.com/office/drawing/2010/main" Requires="a14">
+      <mc:AlternateContent xmlns:mc="http://schemas.openxmlformats.org/markup-compatibility/2006" xmlns:a14="http://schemas.microsoft.com/office/drawing/2010/main">
+        <mc:Choice Requires="a14">
           <p:sp>
             <p:nvSpPr>
               <p:cNvPr id="3" name="Content Placeholder 2">
@@ -33358,7 +33364,7 @@
             </p:txBody>
           </p:sp>
         </mc:Choice>
-        <mc:Fallback>
+        <mc:Fallback xmlns="">
           <p:sp>
             <p:nvSpPr>
               <p:cNvPr id="3" name="Content Placeholder 2">
@@ -33679,7 +33685,7 @@
           <a:p>
             <a:r>
               <a:rPr lang="en-US" dirty="0"/>
-              <a:t>Truth Tables</a:t>
+              <a:t>Truth Tables/Expressions</a:t>
             </a:r>
           </a:p>
         </p:txBody>
@@ -33705,24 +33711,20 @@
             <p:spPr/>
             <p:txBody>
               <a:bodyPr>
-                <a:normAutofit lnSpcReduction="10000"/>
+                <a:normAutofit/>
               </a:bodyPr>
               <a:lstStyle/>
               <a:p>
                 <a:r>
                   <a:rPr lang="en-US" dirty="0"/>
-                  <a:t>Create truth table for each and </a:t>
-                </a:r>
-                <a:r>
-                  <a:rPr lang="en-US" dirty="0" err="1"/>
-                  <a:t>validat</a:t>
-                </a:r>
-                <a:r>
-                  <a:rPr lang="en-US" dirty="0"/>
-                  <a:t>/discover simplifications</a:t>
+                  <a:t>Create truth table for each and validate/discover simplifications</a:t>
                 </a:r>
               </a:p>
               <a:p>
+                <a:pPr marL="914400" lvl="1" indent="-457200">
+                  <a:buFont typeface="+mj-lt"/>
+                  <a:buAutoNum type="arabicPeriod"/>
+                </a:pPr>
                 <a14:m>
                   <m:oMath xmlns:m="http://schemas.openxmlformats.org/officeDocument/2006/math">
                     <m:r>
@@ -33774,6 +33776,10 @@
                 </a:r>
               </a:p>
               <a:p>
+                <a:pPr marL="914400" lvl="1" indent="-457200">
+                  <a:buFont typeface="+mj-lt"/>
+                  <a:buAutoNum type="arabicPeriod"/>
+                </a:pPr>
                 <a14:m>
                   <m:oMath xmlns:m="http://schemas.openxmlformats.org/officeDocument/2006/math">
                     <m:r>
@@ -33825,6 +33831,10 @@
                 </a:r>
               </a:p>
               <a:p>
+                <a:pPr marL="914400" lvl="1" indent="-457200">
+                  <a:buFont typeface="+mj-lt"/>
+                  <a:buAutoNum type="arabicPeriod"/>
+                </a:pPr>
                 <a14:m>
                   <m:oMath xmlns:m="http://schemas.openxmlformats.org/officeDocument/2006/math">
                     <m:acc>
@@ -33921,6 +33931,10 @@
                 <a:endParaRPr lang="en-US" b="0" dirty="0"/>
               </a:p>
               <a:p>
+                <a:pPr marL="914400" lvl="1" indent="-457200">
+                  <a:buFont typeface="+mj-lt"/>
+                  <a:buAutoNum type="arabicPeriod"/>
+                </a:pPr>
                 <a:r>
                   <a:rPr lang="en-US" b="0" dirty="0"/>
                   <a:t>(</a:t>
@@ -34005,6 +34019,10 @@
                 <a:endParaRPr lang="en-US" b="0" dirty="0"/>
               </a:p>
               <a:p>
+                <a:pPr marL="914400" lvl="1" indent="-457200">
+                  <a:buFont typeface="+mj-lt"/>
+                  <a:buAutoNum type="arabicPeriod"/>
+                </a:pPr>
                 <a14:m>
                   <m:oMath xmlns:m="http://schemas.openxmlformats.org/officeDocument/2006/math">
                     <m:d>
@@ -34143,6 +34161,10 @@
                 </a:endParaRPr>
               </a:p>
               <a:p>
+                <a:pPr marL="914400" lvl="1" indent="-457200">
+                  <a:buFont typeface="+mj-lt"/>
+                  <a:buAutoNum type="arabicPeriod"/>
+                </a:pPr>
                 <a14:m>
                   <m:oMath xmlns:m="http://schemas.openxmlformats.org/officeDocument/2006/math">
                     <m:acc>
@@ -34224,6 +34246,10 @@
                 </a:endParaRPr>
               </a:p>
               <a:p>
+                <a:pPr marL="914400" lvl="1" indent="-457200">
+                  <a:buFont typeface="+mj-lt"/>
+                  <a:buAutoNum type="arabicPeriod"/>
+                </a:pPr>
                 <a14:m>
                   <m:oMath xmlns:m="http://schemas.openxmlformats.org/officeDocument/2006/math">
                     <m:d>
@@ -34360,6 +34386,10 @@
                 </a:r>
               </a:p>
               <a:p>
+                <a:pPr marL="914400" lvl="1" indent="-457200">
+                  <a:buFont typeface="+mj-lt"/>
+                  <a:buAutoNum type="arabicPeriod"/>
+                </a:pPr>
                 <a14:m>
                   <m:oMath xmlns:m="http://schemas.openxmlformats.org/officeDocument/2006/math">
                     <m:d>
@@ -34528,7 +34558,7 @@
               <a:blipFill>
                 <a:blip r:embed="rId2"/>
                 <a:stretch>
-                  <a:fillRect l="-1043" t="-3081"/>
+                  <a:fillRect l="-1043" t="-2381"/>
                 </a:stretch>
               </a:blipFill>
             </p:spPr>
@@ -34565,6 +34595,5430 @@
   <p:cSld>
     <p:spTree>
       <p:nvGrpSpPr>
+        <p:cNvPr id="1" name="">
+          <a:extLst>
+            <a:ext uri="{FF2B5EF4-FFF2-40B4-BE49-F238E27FC236}">
+              <a16:creationId xmlns:a16="http://schemas.microsoft.com/office/drawing/2014/main" id="{4E135768-6F15-06E9-C840-DA5612F8D113}"/>
+            </a:ext>
+          </a:extLst>
+        </p:cNvPr>
+        <p:cNvGrpSpPr/>
+        <p:nvPr/>
+      </p:nvGrpSpPr>
+      <p:grpSpPr>
+        <a:xfrm>
+          <a:off x="0" y="0"/>
+          <a:ext cx="0" cy="0"/>
+          <a:chOff x="0" y="0"/>
+          <a:chExt cx="0" cy="0"/>
+        </a:xfrm>
+      </p:grpSpPr>
+      <p:sp>
+        <p:nvSpPr>
+          <p:cNvPr id="2" name="Title 1">
+            <a:extLst>
+              <a:ext uri="{FF2B5EF4-FFF2-40B4-BE49-F238E27FC236}">
+                <a16:creationId xmlns:a16="http://schemas.microsoft.com/office/drawing/2014/main" id="{430ADE1B-D96A-3D30-68AE-1B60E274DBAD}"/>
+              </a:ext>
+            </a:extLst>
+          </p:cNvPr>
+          <p:cNvSpPr>
+            <a:spLocks noGrp="1"/>
+          </p:cNvSpPr>
+          <p:nvPr>
+            <p:ph type="title"/>
+          </p:nvPr>
+        </p:nvSpPr>
+        <p:spPr/>
+        <p:txBody>
+          <a:bodyPr/>
+          <a:lstStyle/>
+          <a:p>
+            <a:r>
+              <a:rPr lang="en-US" dirty="0"/>
+              <a:t>Expressions: </a:t>
+            </a:r>
+            <a:r>
+              <a:rPr lang="en-US" dirty="0" err="1"/>
+              <a:t>Soln</a:t>
+            </a:r>
+            <a:endParaRPr lang="en-US" dirty="0"/>
+          </a:p>
+        </p:txBody>
+      </p:sp>
+      <mc:AlternateContent xmlns:mc="http://schemas.openxmlformats.org/markup-compatibility/2006">
+        <mc:Choice xmlns:a14="http://schemas.microsoft.com/office/drawing/2010/main" Requires="a14">
+          <p:sp>
+            <p:nvSpPr>
+              <p:cNvPr id="3" name="Content Placeholder 2">
+                <a:extLst>
+                  <a:ext uri="{FF2B5EF4-FFF2-40B4-BE49-F238E27FC236}">
+                    <a16:creationId xmlns:a16="http://schemas.microsoft.com/office/drawing/2014/main" id="{CFE73E7D-16C4-E737-FB0A-9F0380701A19}"/>
+                  </a:ext>
+                </a:extLst>
+              </p:cNvPr>
+              <p:cNvSpPr>
+                <a:spLocks noGrp="1"/>
+              </p:cNvSpPr>
+              <p:nvPr>
+                <p:ph idx="1"/>
+              </p:nvPr>
+            </p:nvSpPr>
+            <p:spPr/>
+            <p:txBody>
+              <a:bodyPr>
+                <a:normAutofit lnSpcReduction="10000"/>
+              </a:bodyPr>
+              <a:lstStyle/>
+              <a:p>
+                <a:r>
+                  <a:rPr lang="en-US" dirty="0"/>
+                  <a:t>Solutions to Boolean </a:t>
+                </a:r>
+                <a:r>
+                  <a:rPr lang="en-US" dirty="0" err="1"/>
+                  <a:t>Simplifcations</a:t>
+                </a:r>
+                <a:r>
+                  <a:rPr lang="en-US" dirty="0"/>
+                  <a:t> ….</a:t>
+                </a:r>
+              </a:p>
+              <a:p>
+                <a:pPr marL="914400" lvl="1" indent="-457200">
+                  <a:buFont typeface="+mj-lt"/>
+                  <a:buAutoNum type="arabicPeriod"/>
+                </a:pPr>
+                <a14:m>
+                  <m:oMath xmlns:m="http://schemas.openxmlformats.org/officeDocument/2006/math">
+                    <m:r>
+                      <a:rPr lang="en-US" i="1" smtClean="0">
+                        <a:latin typeface="Cambria Math" panose="02040503050406030204" pitchFamily="18" charset="0"/>
+                      </a:rPr>
+                      <m:t>𝐴</m:t>
+                    </m:r>
+                    <m:r>
+                      <a:rPr lang="en-US" i="1" smtClean="0">
+                        <a:latin typeface="Cambria Math" panose="02040503050406030204" pitchFamily="18" charset="0"/>
+                      </a:rPr>
+                      <m:t>.</m:t>
+                    </m:r>
+                    <m:d>
+                      <m:dPr>
+                        <m:ctrlPr>
+                          <a:rPr lang="en-US" i="1" smtClean="0">
+                            <a:latin typeface="Cambria Math" panose="02040503050406030204" pitchFamily="18" charset="0"/>
+                          </a:rPr>
+                        </m:ctrlPr>
+                      </m:dPr>
+                      <m:e>
+                        <m:r>
+                          <a:rPr lang="en-US" i="1" smtClean="0">
+                            <a:latin typeface="Cambria Math" panose="02040503050406030204" pitchFamily="18" charset="0"/>
+                          </a:rPr>
+                          <m:t>𝐴</m:t>
+                        </m:r>
+                        <m:r>
+                          <a:rPr lang="en-US" i="1" smtClean="0">
+                            <a:latin typeface="Cambria Math" panose="02040503050406030204" pitchFamily="18" charset="0"/>
+                          </a:rPr>
+                          <m:t>+</m:t>
+                        </m:r>
+                        <m:r>
+                          <a:rPr lang="en-US" i="1" smtClean="0">
+                            <a:latin typeface="Cambria Math" panose="02040503050406030204" pitchFamily="18" charset="0"/>
+                          </a:rPr>
+                          <m:t>𝐵</m:t>
+                        </m:r>
+                      </m:e>
+                    </m:d>
+                  </m:oMath>
+                </a14:m>
+                <a:r>
+                  <a:rPr lang="en-US" dirty="0"/>
+                  <a:t>  = </a:t>
+                </a:r>
+                <a:r>
+                  <a:rPr lang="en-US" b="1" dirty="0"/>
+                  <a:t>A   </a:t>
+                </a:r>
+                <a:r>
+                  <a:rPr lang="en-US" dirty="0">
+                    <a:solidFill>
+                      <a:schemeClr val="accent6">
+                        <a:lumMod val="75000"/>
+                      </a:schemeClr>
+                    </a:solidFill>
+                  </a:rPr>
+                  <a:t>// Use Absorption law</a:t>
+                </a:r>
+              </a:p>
+              <a:p>
+                <a:pPr marL="914400" lvl="1" indent="-457200">
+                  <a:buFont typeface="+mj-lt"/>
+                  <a:buAutoNum type="arabicPeriod"/>
+                </a:pPr>
+                <a14:m>
+                  <m:oMath xmlns:m="http://schemas.openxmlformats.org/officeDocument/2006/math">
+                    <m:r>
+                      <a:rPr lang="en-US" i="1" smtClean="0">
+                        <a:latin typeface="Cambria Math" panose="02040503050406030204" pitchFamily="18" charset="0"/>
+                      </a:rPr>
+                      <m:t>𝐴</m:t>
+                    </m:r>
+                    <m:r>
+                      <a:rPr lang="en-US" i="1" smtClean="0">
+                        <a:latin typeface="Cambria Math" panose="02040503050406030204" pitchFamily="18" charset="0"/>
+                      </a:rPr>
+                      <m:t>+</m:t>
+                    </m:r>
+                    <m:d>
+                      <m:dPr>
+                        <m:ctrlPr>
+                          <a:rPr lang="en-US" i="1" smtClean="0">
+                            <a:latin typeface="Cambria Math" panose="02040503050406030204" pitchFamily="18" charset="0"/>
+                          </a:rPr>
+                        </m:ctrlPr>
+                      </m:dPr>
+                      <m:e>
+                        <m:r>
+                          <a:rPr lang="en-US" i="1" smtClean="0">
+                            <a:latin typeface="Cambria Math" panose="02040503050406030204" pitchFamily="18" charset="0"/>
+                          </a:rPr>
+                          <m:t>𝐴</m:t>
+                        </m:r>
+                        <m:r>
+                          <a:rPr lang="en-US" i="1" smtClean="0">
+                            <a:latin typeface="Cambria Math" panose="02040503050406030204" pitchFamily="18" charset="0"/>
+                          </a:rPr>
+                          <m:t>.</m:t>
+                        </m:r>
+                        <m:r>
+                          <a:rPr lang="en-US" i="1" smtClean="0">
+                            <a:latin typeface="Cambria Math" panose="02040503050406030204" pitchFamily="18" charset="0"/>
+                          </a:rPr>
+                          <m:t>𝐵</m:t>
+                        </m:r>
+                      </m:e>
+                    </m:d>
+                  </m:oMath>
+                </a14:m>
+                <a:r>
+                  <a:rPr lang="en-US" dirty="0"/>
+                  <a:t> = </a:t>
+                </a:r>
+                <a:r>
+                  <a:rPr lang="en-US" b="1" dirty="0"/>
+                  <a:t>A  </a:t>
+                </a:r>
+                <a:r>
+                  <a:rPr lang="en-US" dirty="0">
+                    <a:solidFill>
+                      <a:schemeClr val="accent6">
+                        <a:lumMod val="75000"/>
+                      </a:schemeClr>
+                    </a:solidFill>
+                  </a:rPr>
+                  <a:t>// Use Absorption law, </a:t>
+                </a:r>
+                <a:r>
+                  <a:rPr lang="en-US" i="1" dirty="0">
+                    <a:solidFill>
+                      <a:schemeClr val="accent6">
+                        <a:lumMod val="75000"/>
+                      </a:schemeClr>
+                    </a:solidFill>
+                  </a:rPr>
+                  <a:t>other one</a:t>
+                </a:r>
+                <a:endParaRPr lang="en-US" b="1" i="1" dirty="0"/>
+              </a:p>
+              <a:p>
+                <a:pPr marL="914400" lvl="1" indent="-457200">
+                  <a:buFont typeface="+mj-lt"/>
+                  <a:buAutoNum type="arabicPeriod"/>
+                </a:pPr>
+                <a14:m>
+                  <m:oMath xmlns:m="http://schemas.openxmlformats.org/officeDocument/2006/math">
+                    <m:acc>
+                      <m:accPr>
+                        <m:chr m:val="̅"/>
+                        <m:ctrlPr>
+                          <a:rPr lang="en-US" i="1" smtClean="0">
+                            <a:latin typeface="Cambria Math" panose="02040503050406030204" pitchFamily="18" charset="0"/>
+                          </a:rPr>
+                        </m:ctrlPr>
+                      </m:accPr>
+                      <m:e>
+                        <m:r>
+                          <a:rPr lang="en-US" i="1" smtClean="0">
+                            <a:latin typeface="Cambria Math" panose="02040503050406030204" pitchFamily="18" charset="0"/>
+                          </a:rPr>
+                          <m:t>𝐴</m:t>
+                        </m:r>
+                      </m:e>
+                    </m:acc>
+                    <m:r>
+                      <a:rPr lang="en-US" i="1" smtClean="0">
+                        <a:latin typeface="Cambria Math" panose="02040503050406030204" pitchFamily="18" charset="0"/>
+                      </a:rPr>
+                      <m:t>+</m:t>
+                    </m:r>
+                    <m:d>
+                      <m:dPr>
+                        <m:ctrlPr>
+                          <a:rPr lang="en-US" i="1" smtClean="0">
+                            <a:latin typeface="Cambria Math" panose="02040503050406030204" pitchFamily="18" charset="0"/>
+                          </a:rPr>
+                        </m:ctrlPr>
+                      </m:dPr>
+                      <m:e>
+                        <m:r>
+                          <a:rPr lang="en-US" i="1" smtClean="0">
+                            <a:latin typeface="Cambria Math" panose="02040503050406030204" pitchFamily="18" charset="0"/>
+                          </a:rPr>
+                          <m:t>𝐴</m:t>
+                        </m:r>
+                        <m:r>
+                          <a:rPr lang="en-US" i="1" smtClean="0">
+                            <a:latin typeface="Cambria Math" panose="02040503050406030204" pitchFamily="18" charset="0"/>
+                          </a:rPr>
+                          <m:t>.</m:t>
+                        </m:r>
+                        <m:r>
+                          <a:rPr lang="en-US" i="1" smtClean="0">
+                            <a:latin typeface="Cambria Math" panose="02040503050406030204" pitchFamily="18" charset="0"/>
+                          </a:rPr>
+                          <m:t>𝐵</m:t>
+                        </m:r>
+                      </m:e>
+                    </m:d>
+                  </m:oMath>
+                </a14:m>
+                <a:r>
+                  <a:rPr lang="en-US" dirty="0"/>
+                  <a:t> = </a:t>
+                </a:r>
+                <a14:m>
+                  <m:oMath xmlns:m="http://schemas.openxmlformats.org/officeDocument/2006/math">
+                    <m:acc>
+                      <m:accPr>
+                        <m:chr m:val="̅"/>
+                        <m:ctrlPr>
+                          <a:rPr lang="en-US" i="1">
+                            <a:latin typeface="Cambria Math" panose="02040503050406030204" pitchFamily="18" charset="0"/>
+                          </a:rPr>
+                        </m:ctrlPr>
+                      </m:accPr>
+                      <m:e>
+                        <m:r>
+                          <a:rPr lang="en-US" i="1" smtClean="0">
+                            <a:latin typeface="Cambria Math" panose="02040503050406030204" pitchFamily="18" charset="0"/>
+                          </a:rPr>
+                          <m:t>𝐴</m:t>
+                        </m:r>
+                      </m:e>
+                    </m:acc>
+                    <m:r>
+                      <a:rPr lang="en-US" i="1" smtClean="0">
+                        <a:latin typeface="Cambria Math" panose="02040503050406030204" pitchFamily="18" charset="0"/>
+                      </a:rPr>
+                      <m:t>+</m:t>
+                    </m:r>
+                    <m:r>
+                      <a:rPr lang="en-US" b="0" i="1" smtClean="0">
+                        <a:latin typeface="Cambria Math" panose="02040503050406030204" pitchFamily="18" charset="0"/>
+                      </a:rPr>
+                      <m:t>𝐵</m:t>
+                    </m:r>
+                  </m:oMath>
+                </a14:m>
+                <a:r>
+                  <a:rPr lang="en-US" dirty="0"/>
+                  <a:t> </a:t>
+                </a:r>
+              </a:p>
+              <a:p>
+                <a:pPr lvl="2"/>
+                <a:r>
+                  <a:rPr lang="en-US" dirty="0">
+                    <a:sym typeface="Wingdings" panose="05000000000000000000" pitchFamily="2" charset="2"/>
+                  </a:rPr>
+                  <a:t> </a:t>
+                </a:r>
+                <a:r>
+                  <a:rPr lang="en-US" dirty="0"/>
+                  <a:t>(</a:t>
+                </a:r>
+                <a14:m>
+                  <m:oMath xmlns:m="http://schemas.openxmlformats.org/officeDocument/2006/math">
+                    <m:acc>
+                      <m:accPr>
+                        <m:chr m:val="̅"/>
+                        <m:ctrlPr>
+                          <a:rPr lang="en-US" i="1" smtClean="0">
+                            <a:latin typeface="Cambria Math" panose="02040503050406030204" pitchFamily="18" charset="0"/>
+                          </a:rPr>
+                        </m:ctrlPr>
+                      </m:accPr>
+                      <m:e>
+                        <m:r>
+                          <a:rPr lang="en-US" i="1" smtClean="0">
+                            <a:latin typeface="Cambria Math" panose="02040503050406030204" pitchFamily="18" charset="0"/>
+                          </a:rPr>
+                          <m:t>𝐴</m:t>
+                        </m:r>
+                      </m:e>
+                    </m:acc>
+                  </m:oMath>
+                </a14:m>
+                <a:r>
+                  <a:rPr lang="en-US" dirty="0"/>
+                  <a:t> + </a:t>
+                </a:r>
+                <a14:m>
+                  <m:oMath xmlns:m="http://schemas.openxmlformats.org/officeDocument/2006/math">
+                    <m:r>
+                      <a:rPr lang="en-US" i="1">
+                        <a:latin typeface="Cambria Math" panose="02040503050406030204" pitchFamily="18" charset="0"/>
+                      </a:rPr>
+                      <m:t>𝐴</m:t>
+                    </m:r>
+                  </m:oMath>
+                </a14:m>
+                <a:r>
+                  <a:rPr lang="en-US" dirty="0"/>
+                  <a:t>).(</a:t>
+                </a:r>
+                <a14:m>
+                  <m:oMath xmlns:m="http://schemas.openxmlformats.org/officeDocument/2006/math">
+                    <m:acc>
+                      <m:accPr>
+                        <m:chr m:val="̅"/>
+                        <m:ctrlPr>
+                          <a:rPr lang="en-US" i="1">
+                            <a:latin typeface="Cambria Math" panose="02040503050406030204" pitchFamily="18" charset="0"/>
+                          </a:rPr>
+                        </m:ctrlPr>
+                      </m:accPr>
+                      <m:e>
+                        <m:r>
+                          <a:rPr lang="en-US" i="1">
+                            <a:latin typeface="Cambria Math" panose="02040503050406030204" pitchFamily="18" charset="0"/>
+                          </a:rPr>
+                          <m:t>𝐴</m:t>
+                        </m:r>
+                      </m:e>
+                    </m:acc>
+                    <m:r>
+                      <a:rPr lang="en-US" i="1">
+                        <a:latin typeface="Cambria Math" panose="02040503050406030204" pitchFamily="18" charset="0"/>
+                      </a:rPr>
+                      <m:t>+</m:t>
+                    </m:r>
+                    <m:r>
+                      <a:rPr lang="en-US" i="1">
+                        <a:latin typeface="Cambria Math" panose="02040503050406030204" pitchFamily="18" charset="0"/>
+                      </a:rPr>
+                      <m:t>𝐵</m:t>
+                    </m:r>
+                  </m:oMath>
+                </a14:m>
+                <a:r>
+                  <a:rPr lang="en-US" dirty="0"/>
+                  <a:t>)      //Distribution Law</a:t>
+                </a:r>
+              </a:p>
+              <a:p>
+                <a:pPr lvl="2"/>
+                <a:r>
+                  <a:rPr lang="en-US" dirty="0">
+                    <a:sym typeface="Wingdings" panose="05000000000000000000" pitchFamily="2" charset="2"/>
+                  </a:rPr>
+                  <a:t> </a:t>
+                </a:r>
+                <a:r>
+                  <a:rPr lang="en-US" dirty="0"/>
+                  <a:t>(1). (</a:t>
+                </a:r>
+                <a14:m>
+                  <m:oMath xmlns:m="http://schemas.openxmlformats.org/officeDocument/2006/math">
+                    <m:acc>
+                      <m:accPr>
+                        <m:chr m:val="̅"/>
+                        <m:ctrlPr>
+                          <a:rPr lang="en-US" i="1">
+                            <a:latin typeface="Cambria Math" panose="02040503050406030204" pitchFamily="18" charset="0"/>
+                          </a:rPr>
+                        </m:ctrlPr>
+                      </m:accPr>
+                      <m:e>
+                        <m:r>
+                          <a:rPr lang="en-US" i="1">
+                            <a:latin typeface="Cambria Math" panose="02040503050406030204" pitchFamily="18" charset="0"/>
+                          </a:rPr>
+                          <m:t>𝐴</m:t>
+                        </m:r>
+                      </m:e>
+                    </m:acc>
+                    <m:r>
+                      <a:rPr lang="en-US" i="1">
+                        <a:latin typeface="Cambria Math" panose="02040503050406030204" pitchFamily="18" charset="0"/>
+                      </a:rPr>
+                      <m:t>+</m:t>
+                    </m:r>
+                    <m:r>
+                      <a:rPr lang="en-US" i="1">
+                        <a:latin typeface="Cambria Math" panose="02040503050406030204" pitchFamily="18" charset="0"/>
+                      </a:rPr>
+                      <m:t>𝐵</m:t>
+                    </m:r>
+                  </m:oMath>
+                </a14:m>
+                <a:r>
+                  <a:rPr lang="en-US" dirty="0"/>
+                  <a:t>)   // Idempotent Law</a:t>
+                </a:r>
+              </a:p>
+              <a:p>
+                <a:pPr lvl="2"/>
+                <a:r>
+                  <a:rPr lang="en-US" dirty="0">
+                    <a:sym typeface="Wingdings" panose="05000000000000000000" pitchFamily="2" charset="2"/>
+                  </a:rPr>
+                  <a:t></a:t>
+                </a:r>
+                <a:r>
+                  <a:rPr lang="en-US" dirty="0"/>
+                  <a:t>(</a:t>
+                </a:r>
+                <a14:m>
+                  <m:oMath xmlns:m="http://schemas.openxmlformats.org/officeDocument/2006/math">
+                    <m:acc>
+                      <m:accPr>
+                        <m:chr m:val="̅"/>
+                        <m:ctrlPr>
+                          <a:rPr lang="en-US" i="1">
+                            <a:latin typeface="Cambria Math" panose="02040503050406030204" pitchFamily="18" charset="0"/>
+                          </a:rPr>
+                        </m:ctrlPr>
+                      </m:accPr>
+                      <m:e>
+                        <m:r>
+                          <a:rPr lang="en-US" i="1">
+                            <a:latin typeface="Cambria Math" panose="02040503050406030204" pitchFamily="18" charset="0"/>
+                          </a:rPr>
+                          <m:t>𝐴</m:t>
+                        </m:r>
+                      </m:e>
+                    </m:acc>
+                    <m:r>
+                      <a:rPr lang="en-US" i="1">
+                        <a:latin typeface="Cambria Math" panose="02040503050406030204" pitchFamily="18" charset="0"/>
+                      </a:rPr>
+                      <m:t>+</m:t>
+                    </m:r>
+                    <m:r>
+                      <a:rPr lang="en-US" i="1">
+                        <a:latin typeface="Cambria Math" panose="02040503050406030204" pitchFamily="18" charset="0"/>
+                      </a:rPr>
+                      <m:t>𝐵</m:t>
+                    </m:r>
+                  </m:oMath>
+                </a14:m>
+                <a:r>
+                  <a:rPr lang="en-US" dirty="0"/>
+                  <a:t>)</a:t>
+                </a:r>
+              </a:p>
+              <a:p>
+                <a:pPr marL="914400" lvl="1" indent="-457200">
+                  <a:buFont typeface="+mj-lt"/>
+                  <a:buAutoNum type="arabicPeriod"/>
+                </a:pPr>
+                <a:r>
+                  <a:rPr lang="en-US" dirty="0"/>
+                  <a:t>(</a:t>
+                </a:r>
+                <a14:m>
+                  <m:oMath xmlns:m="http://schemas.openxmlformats.org/officeDocument/2006/math">
+                    <m:r>
+                      <a:rPr lang="en-US" i="1" smtClean="0">
+                        <a:latin typeface="Cambria Math" panose="02040503050406030204" pitchFamily="18" charset="0"/>
+                      </a:rPr>
+                      <m:t>𝐴</m:t>
+                    </m:r>
+                    <m:r>
+                      <a:rPr lang="en-US" i="1" smtClean="0">
+                        <a:latin typeface="Cambria Math" panose="02040503050406030204" pitchFamily="18" charset="0"/>
+                      </a:rPr>
+                      <m:t>+</m:t>
+                    </m:r>
+                    <m:r>
+                      <a:rPr lang="en-US" i="1" smtClean="0">
+                        <a:latin typeface="Cambria Math" panose="02040503050406030204" pitchFamily="18" charset="0"/>
+                      </a:rPr>
+                      <m:t>𝐵</m:t>
+                    </m:r>
+                    <m:r>
+                      <a:rPr lang="en-US" i="1" smtClean="0">
+                        <a:latin typeface="Cambria Math" panose="02040503050406030204" pitchFamily="18" charset="0"/>
+                      </a:rPr>
+                      <m:t>).</m:t>
+                    </m:r>
+                    <m:d>
+                      <m:dPr>
+                        <m:ctrlPr>
+                          <a:rPr lang="en-US" i="1" smtClean="0">
+                            <a:latin typeface="Cambria Math" panose="02040503050406030204" pitchFamily="18" charset="0"/>
+                          </a:rPr>
+                        </m:ctrlPr>
+                      </m:dPr>
+                      <m:e>
+                        <m:r>
+                          <a:rPr lang="en-US" i="1" smtClean="0">
+                            <a:latin typeface="Cambria Math" panose="02040503050406030204" pitchFamily="18" charset="0"/>
+                          </a:rPr>
+                          <m:t>𝐴</m:t>
+                        </m:r>
+                        <m:r>
+                          <a:rPr lang="en-US" i="1" smtClean="0">
+                            <a:latin typeface="Cambria Math" panose="02040503050406030204" pitchFamily="18" charset="0"/>
+                          </a:rPr>
+                          <m:t>+</m:t>
+                        </m:r>
+                        <m:acc>
+                          <m:accPr>
+                            <m:chr m:val="̅"/>
+                            <m:ctrlPr>
+                              <a:rPr lang="en-US" i="1" smtClean="0">
+                                <a:latin typeface="Cambria Math" panose="02040503050406030204" pitchFamily="18" charset="0"/>
+                              </a:rPr>
+                            </m:ctrlPr>
+                          </m:accPr>
+                          <m:e>
+                            <m:r>
+                              <a:rPr lang="en-US" i="1" smtClean="0">
+                                <a:latin typeface="Cambria Math" panose="02040503050406030204" pitchFamily="18" charset="0"/>
+                              </a:rPr>
+                              <m:t>𝐵</m:t>
+                            </m:r>
+                          </m:e>
+                        </m:acc>
+                      </m:e>
+                    </m:d>
+                  </m:oMath>
+                </a14:m>
+                <a:r>
+                  <a:rPr lang="en-US" dirty="0"/>
+                  <a:t> = A</a:t>
+                </a:r>
+              </a:p>
+              <a:p>
+                <a:pPr marL="914400" lvl="1" indent="-457200">
+                  <a:buFont typeface="+mj-lt"/>
+                  <a:buAutoNum type="arabicPeriod"/>
+                </a:pPr>
+                <a14:m>
+                  <m:oMath xmlns:m="http://schemas.openxmlformats.org/officeDocument/2006/math">
+                    <m:d>
+                      <m:dPr>
+                        <m:ctrlPr>
+                          <a:rPr lang="en-US" i="1" smtClean="0">
+                            <a:latin typeface="Cambria Math" panose="02040503050406030204" pitchFamily="18" charset="0"/>
+                          </a:rPr>
+                        </m:ctrlPr>
+                      </m:dPr>
+                      <m:e>
+                        <m:r>
+                          <a:rPr lang="en-US" i="1" smtClean="0">
+                            <a:latin typeface="Cambria Math" panose="02040503050406030204" pitchFamily="18" charset="0"/>
+                          </a:rPr>
+                          <m:t>𝐴</m:t>
+                        </m:r>
+                        <m:r>
+                          <a:rPr lang="en-US" i="1" smtClean="0">
+                            <a:latin typeface="Cambria Math" panose="02040503050406030204" pitchFamily="18" charset="0"/>
+                          </a:rPr>
+                          <m:t>+</m:t>
+                        </m:r>
+                        <m:r>
+                          <a:rPr lang="en-US" i="1" smtClean="0">
+                            <a:latin typeface="Cambria Math" panose="02040503050406030204" pitchFamily="18" charset="0"/>
+                          </a:rPr>
+                          <m:t>𝐵</m:t>
+                        </m:r>
+                      </m:e>
+                    </m:d>
+                    <m:r>
+                      <a:rPr lang="en-US" i="1" smtClean="0">
+                        <a:latin typeface="Cambria Math" panose="02040503050406030204" pitchFamily="18" charset="0"/>
+                      </a:rPr>
+                      <m:t>.</m:t>
+                    </m:r>
+                    <m:d>
+                      <m:dPr>
+                        <m:ctrlPr>
+                          <a:rPr lang="en-US" i="1" smtClean="0">
+                            <a:latin typeface="Cambria Math" panose="02040503050406030204" pitchFamily="18" charset="0"/>
+                          </a:rPr>
+                        </m:ctrlPr>
+                      </m:dPr>
+                      <m:e>
+                        <m:r>
+                          <a:rPr lang="en-US" i="1" smtClean="0">
+                            <a:latin typeface="Cambria Math" panose="02040503050406030204" pitchFamily="18" charset="0"/>
+                          </a:rPr>
+                          <m:t>𝐴</m:t>
+                        </m:r>
+                        <m:r>
+                          <a:rPr lang="en-US" i="1" smtClean="0">
+                            <a:latin typeface="Cambria Math" panose="02040503050406030204" pitchFamily="18" charset="0"/>
+                          </a:rPr>
+                          <m:t>+</m:t>
+                        </m:r>
+                        <m:acc>
+                          <m:accPr>
+                            <m:chr m:val="̅"/>
+                            <m:ctrlPr>
+                              <a:rPr lang="en-US" i="1">
+                                <a:latin typeface="Cambria Math" panose="02040503050406030204" pitchFamily="18" charset="0"/>
+                              </a:rPr>
+                            </m:ctrlPr>
+                          </m:accPr>
+                          <m:e>
+                            <m:r>
+                              <a:rPr lang="en-US" i="1" smtClean="0">
+                                <a:latin typeface="Cambria Math" panose="02040503050406030204" pitchFamily="18" charset="0"/>
+                              </a:rPr>
+                              <m:t>𝐵</m:t>
+                            </m:r>
+                          </m:e>
+                        </m:acc>
+                      </m:e>
+                    </m:d>
+                    <m:r>
+                      <a:rPr lang="en-US" i="1" smtClean="0">
+                        <a:latin typeface="Cambria Math" panose="02040503050406030204" pitchFamily="18" charset="0"/>
+                      </a:rPr>
+                      <m:t>.</m:t>
+                    </m:r>
+                    <m:d>
+                      <m:dPr>
+                        <m:ctrlPr>
+                          <a:rPr lang="en-US" i="1">
+                            <a:latin typeface="Cambria Math" panose="02040503050406030204" pitchFamily="18" charset="0"/>
+                          </a:rPr>
+                        </m:ctrlPr>
+                      </m:dPr>
+                      <m:e>
+                        <m:acc>
+                          <m:accPr>
+                            <m:chr m:val="̅"/>
+                            <m:ctrlPr>
+                              <a:rPr lang="en-US" i="1">
+                                <a:latin typeface="Cambria Math" panose="02040503050406030204" pitchFamily="18" charset="0"/>
+                              </a:rPr>
+                            </m:ctrlPr>
+                          </m:accPr>
+                          <m:e>
+                            <m:r>
+                              <a:rPr lang="en-US" i="1" smtClean="0">
+                                <a:latin typeface="Cambria Math" panose="02040503050406030204" pitchFamily="18" charset="0"/>
+                              </a:rPr>
+                              <m:t>𝐴</m:t>
+                            </m:r>
+                          </m:e>
+                        </m:acc>
+                        <m:r>
+                          <a:rPr lang="en-US" i="1" smtClean="0">
+                            <a:latin typeface="Cambria Math" panose="02040503050406030204" pitchFamily="18" charset="0"/>
+                          </a:rPr>
+                          <m:t>+</m:t>
+                        </m:r>
+                        <m:r>
+                          <a:rPr lang="en-US" i="1" smtClean="0">
+                            <a:latin typeface="Cambria Math" panose="02040503050406030204" pitchFamily="18" charset="0"/>
+                          </a:rPr>
+                          <m:t>𝐵</m:t>
+                        </m:r>
+                      </m:e>
+                    </m:d>
+                    <m:r>
+                      <a:rPr lang="en-US" i="1" smtClean="0">
+                        <a:latin typeface="Cambria Math" panose="02040503050406030204" pitchFamily="18" charset="0"/>
+                      </a:rPr>
+                      <m:t>= </m:t>
+                    </m:r>
+                  </m:oMath>
+                </a14:m>
+                <a:r>
+                  <a:rPr lang="en-US" i="1" dirty="0">
+                    <a:latin typeface="Cambria Math" panose="02040503050406030204" pitchFamily="18" charset="0"/>
+                  </a:rPr>
+                  <a:t>AB</a:t>
+                </a:r>
+              </a:p>
+              <a:p>
+                <a:pPr marL="914400" lvl="1" indent="-457200">
+                  <a:buFont typeface="+mj-lt"/>
+                  <a:buAutoNum type="arabicPeriod"/>
+                </a:pPr>
+                <a14:m>
+                  <m:oMath xmlns:m="http://schemas.openxmlformats.org/officeDocument/2006/math">
+                    <m:acc>
+                      <m:accPr>
+                        <m:chr m:val="̅"/>
+                        <m:ctrlPr>
+                          <a:rPr lang="en-US" i="1" smtClean="0">
+                            <a:latin typeface="Cambria Math" panose="02040503050406030204" pitchFamily="18" charset="0"/>
+                          </a:rPr>
+                        </m:ctrlPr>
+                      </m:accPr>
+                      <m:e>
+                        <m:r>
+                          <a:rPr lang="en-US" i="1" smtClean="0">
+                            <a:latin typeface="Cambria Math" panose="02040503050406030204" pitchFamily="18" charset="0"/>
+                          </a:rPr>
+                          <m:t>𝐴</m:t>
+                        </m:r>
+                        <m:r>
+                          <a:rPr lang="en-US" i="1" smtClean="0">
+                            <a:latin typeface="Cambria Math" panose="02040503050406030204" pitchFamily="18" charset="0"/>
+                          </a:rPr>
+                          <m:t>+</m:t>
+                        </m:r>
+                        <m:r>
+                          <a:rPr lang="en-US" i="1" smtClean="0">
+                            <a:latin typeface="Cambria Math" panose="02040503050406030204" pitchFamily="18" charset="0"/>
+                          </a:rPr>
+                          <m:t>𝐵</m:t>
+                        </m:r>
+                      </m:e>
+                    </m:acc>
+                    <m:r>
+                      <a:rPr lang="en-US" i="1" smtClean="0">
+                        <a:latin typeface="Cambria Math" panose="02040503050406030204" pitchFamily="18" charset="0"/>
+                      </a:rPr>
+                      <m:t>+</m:t>
+                    </m:r>
+                    <m:r>
+                      <a:rPr lang="en-US" i="1" smtClean="0">
+                        <a:latin typeface="Cambria Math" panose="02040503050406030204" pitchFamily="18" charset="0"/>
+                      </a:rPr>
+                      <m:t>𝐴</m:t>
+                    </m:r>
+                    <m:r>
+                      <a:rPr lang="en-US" i="1" smtClean="0">
+                        <a:latin typeface="Cambria Math" panose="02040503050406030204" pitchFamily="18" charset="0"/>
+                      </a:rPr>
+                      <m:t>. </m:t>
+                    </m:r>
+                    <m:acc>
+                      <m:accPr>
+                        <m:chr m:val="̅"/>
+                        <m:ctrlPr>
+                          <a:rPr lang="en-US" i="1">
+                            <a:latin typeface="Cambria Math" panose="02040503050406030204" pitchFamily="18" charset="0"/>
+                          </a:rPr>
+                        </m:ctrlPr>
+                      </m:accPr>
+                      <m:e>
+                        <m:r>
+                          <a:rPr lang="en-US" i="1" smtClean="0">
+                            <a:latin typeface="Cambria Math" panose="02040503050406030204" pitchFamily="18" charset="0"/>
+                          </a:rPr>
+                          <m:t>𝐵</m:t>
+                        </m:r>
+                      </m:e>
+                    </m:acc>
+                    <m:r>
+                      <a:rPr lang="en-US" i="1" smtClean="0">
+                        <a:latin typeface="Cambria Math" panose="02040503050406030204" pitchFamily="18" charset="0"/>
+                      </a:rPr>
+                      <m:t>=</m:t>
+                    </m:r>
+                    <m:acc>
+                      <m:accPr>
+                        <m:chr m:val="̅"/>
+                        <m:ctrlPr>
+                          <a:rPr lang="en-US" i="1">
+                            <a:latin typeface="Cambria Math" panose="02040503050406030204" pitchFamily="18" charset="0"/>
+                          </a:rPr>
+                        </m:ctrlPr>
+                      </m:accPr>
+                      <m:e>
+                        <m:r>
+                          <a:rPr lang="en-US" i="1">
+                            <a:latin typeface="Cambria Math" panose="02040503050406030204" pitchFamily="18" charset="0"/>
+                          </a:rPr>
+                          <m:t>𝐵</m:t>
+                        </m:r>
+                      </m:e>
+                    </m:acc>
+                  </m:oMath>
+                </a14:m>
+                <a:endParaRPr lang="en-US" i="1" dirty="0">
+                  <a:latin typeface="Cambria Math" panose="02040503050406030204" pitchFamily="18" charset="0"/>
+                </a:endParaRPr>
+              </a:p>
+              <a:p>
+                <a:pPr marL="914400" lvl="1" indent="-457200">
+                  <a:buFont typeface="+mj-lt"/>
+                  <a:buAutoNum type="arabicPeriod"/>
+                </a:pPr>
+                <a14:m>
+                  <m:oMath xmlns:m="http://schemas.openxmlformats.org/officeDocument/2006/math">
+                    <m:d>
+                      <m:dPr>
+                        <m:ctrlPr>
+                          <a:rPr lang="en-US" i="1" smtClean="0">
+                            <a:latin typeface="Cambria Math" panose="02040503050406030204" pitchFamily="18" charset="0"/>
+                          </a:rPr>
+                        </m:ctrlPr>
+                      </m:dPr>
+                      <m:e>
+                        <m:r>
+                          <a:rPr lang="en-US" i="1" smtClean="0">
+                            <a:latin typeface="Cambria Math" panose="02040503050406030204" pitchFamily="18" charset="0"/>
+                          </a:rPr>
+                          <m:t>𝐴</m:t>
+                        </m:r>
+                        <m:r>
+                          <a:rPr lang="en-US" i="1" smtClean="0">
+                            <a:latin typeface="Cambria Math" panose="02040503050406030204" pitchFamily="18" charset="0"/>
+                          </a:rPr>
+                          <m:t>+</m:t>
+                        </m:r>
+                        <m:r>
+                          <a:rPr lang="en-US" i="1" smtClean="0">
+                            <a:latin typeface="Cambria Math" panose="02040503050406030204" pitchFamily="18" charset="0"/>
+                          </a:rPr>
+                          <m:t>𝐵</m:t>
+                        </m:r>
+                        <m:r>
+                          <a:rPr lang="en-US" i="1" smtClean="0">
+                            <a:latin typeface="Cambria Math" panose="02040503050406030204" pitchFamily="18" charset="0"/>
+                          </a:rPr>
+                          <m:t>+</m:t>
+                        </m:r>
+                        <m:r>
+                          <a:rPr lang="en-US" i="1" smtClean="0">
+                            <a:latin typeface="Cambria Math" panose="02040503050406030204" pitchFamily="18" charset="0"/>
+                          </a:rPr>
+                          <m:t>𝐶</m:t>
+                        </m:r>
+                      </m:e>
+                    </m:d>
+                    <m:r>
+                      <a:rPr lang="en-US" i="1" smtClean="0">
+                        <a:latin typeface="Cambria Math" panose="02040503050406030204" pitchFamily="18" charset="0"/>
+                      </a:rPr>
+                      <m:t>.</m:t>
+                    </m:r>
+                    <m:d>
+                      <m:dPr>
+                        <m:ctrlPr>
+                          <a:rPr lang="en-US" i="1">
+                            <a:latin typeface="Cambria Math" panose="02040503050406030204" pitchFamily="18" charset="0"/>
+                          </a:rPr>
+                        </m:ctrlPr>
+                      </m:dPr>
+                      <m:e>
+                        <m:acc>
+                          <m:accPr>
+                            <m:chr m:val="̅"/>
+                            <m:ctrlPr>
+                              <a:rPr lang="en-US" i="1">
+                                <a:latin typeface="Cambria Math" panose="02040503050406030204" pitchFamily="18" charset="0"/>
+                              </a:rPr>
+                            </m:ctrlPr>
+                          </m:accPr>
+                          <m:e>
+                            <m:r>
+                              <a:rPr lang="en-US" i="1" smtClean="0">
+                                <a:latin typeface="Cambria Math" panose="02040503050406030204" pitchFamily="18" charset="0"/>
+                              </a:rPr>
+                              <m:t>𝐴</m:t>
+                            </m:r>
+                          </m:e>
+                        </m:acc>
+                        <m:r>
+                          <a:rPr lang="en-US" i="1" smtClean="0">
+                            <a:latin typeface="Cambria Math" panose="02040503050406030204" pitchFamily="18" charset="0"/>
+                          </a:rPr>
+                          <m:t>+</m:t>
+                        </m:r>
+                        <m:r>
+                          <a:rPr lang="en-US" i="1" smtClean="0">
+                            <a:latin typeface="Cambria Math" panose="02040503050406030204" pitchFamily="18" charset="0"/>
+                          </a:rPr>
+                          <m:t>𝐵</m:t>
+                        </m:r>
+                      </m:e>
+                    </m:d>
+                    <m:r>
+                      <a:rPr lang="en-US" i="1" smtClean="0">
+                        <a:latin typeface="Cambria Math" panose="02040503050406030204" pitchFamily="18" charset="0"/>
+                      </a:rPr>
+                      <m:t>.(</m:t>
+                    </m:r>
+                    <m:r>
+                      <a:rPr lang="en-US" i="1" smtClean="0">
+                        <a:latin typeface="Cambria Math" panose="02040503050406030204" pitchFamily="18" charset="0"/>
+                      </a:rPr>
+                      <m:t>𝐴</m:t>
+                    </m:r>
+                    <m:r>
+                      <a:rPr lang="en-US" i="1" smtClean="0">
+                        <a:latin typeface="Cambria Math" panose="02040503050406030204" pitchFamily="18" charset="0"/>
+                      </a:rPr>
+                      <m:t>+</m:t>
+                    </m:r>
+                    <m:acc>
+                      <m:accPr>
+                        <m:chr m:val="̅"/>
+                        <m:ctrlPr>
+                          <a:rPr lang="en-US" i="1" smtClean="0">
+                            <a:latin typeface="Cambria Math" panose="02040503050406030204" pitchFamily="18" charset="0"/>
+                          </a:rPr>
+                        </m:ctrlPr>
+                      </m:accPr>
+                      <m:e>
+                        <m:r>
+                          <a:rPr lang="en-US" i="1" smtClean="0">
+                            <a:latin typeface="Cambria Math" panose="02040503050406030204" pitchFamily="18" charset="0"/>
+                          </a:rPr>
+                          <m:t>𝐶</m:t>
+                        </m:r>
+                      </m:e>
+                    </m:acc>
+                  </m:oMath>
+                </a14:m>
+                <a:r>
+                  <a:rPr lang="en-US" i="1" dirty="0">
+                    <a:latin typeface="Cambria Math" panose="02040503050406030204" pitchFamily="18" charset="0"/>
+                  </a:rPr>
+                  <a:t>) = B.(A+</a:t>
+                </a:r>
+                <a:r>
+                  <a:rPr lang="en-US" dirty="0"/>
+                  <a:t> </a:t>
+                </a:r>
+                <a14:m>
+                  <m:oMath xmlns:m="http://schemas.openxmlformats.org/officeDocument/2006/math">
+                    <m:acc>
+                      <m:accPr>
+                        <m:chr m:val="̅"/>
+                        <m:ctrlPr>
+                          <a:rPr lang="en-US" i="1">
+                            <a:latin typeface="Cambria Math" panose="02040503050406030204" pitchFamily="18" charset="0"/>
+                          </a:rPr>
+                        </m:ctrlPr>
+                      </m:accPr>
+                      <m:e>
+                        <m:r>
+                          <a:rPr lang="en-US" i="1">
+                            <a:latin typeface="Cambria Math" panose="02040503050406030204" pitchFamily="18" charset="0"/>
+                          </a:rPr>
+                          <m:t>𝐶</m:t>
+                        </m:r>
+                      </m:e>
+                    </m:acc>
+                  </m:oMath>
+                </a14:m>
+                <a:r>
+                  <a:rPr lang="en-US" i="1" dirty="0">
+                    <a:latin typeface="Cambria Math" panose="02040503050406030204" pitchFamily="18" charset="0"/>
+                  </a:rPr>
+                  <a:t>)</a:t>
+                </a:r>
+              </a:p>
+              <a:p>
+                <a:pPr marL="914400" lvl="1" indent="-457200">
+                  <a:buFont typeface="+mj-lt"/>
+                  <a:buAutoNum type="arabicPeriod"/>
+                </a:pPr>
+                <a14:m>
+                  <m:oMath xmlns:m="http://schemas.openxmlformats.org/officeDocument/2006/math">
+                    <m:d>
+                      <m:dPr>
+                        <m:ctrlPr>
+                          <a:rPr lang="en-US" i="1" smtClean="0">
+                            <a:latin typeface="Cambria Math" panose="02040503050406030204" pitchFamily="18" charset="0"/>
+                          </a:rPr>
+                        </m:ctrlPr>
+                      </m:dPr>
+                      <m:e>
+                        <m:r>
+                          <a:rPr lang="en-US" i="1" smtClean="0">
+                            <a:latin typeface="Cambria Math" panose="02040503050406030204" pitchFamily="18" charset="0"/>
+                          </a:rPr>
+                          <m:t>𝐴</m:t>
+                        </m:r>
+                        <m:r>
+                          <a:rPr lang="en-US" i="1" smtClean="0">
+                            <a:latin typeface="Cambria Math" panose="02040503050406030204" pitchFamily="18" charset="0"/>
+                          </a:rPr>
+                          <m:t>.</m:t>
+                        </m:r>
+                        <m:acc>
+                          <m:accPr>
+                            <m:chr m:val="̅"/>
+                            <m:ctrlPr>
+                              <a:rPr lang="en-US" i="1">
+                                <a:latin typeface="Cambria Math" panose="02040503050406030204" pitchFamily="18" charset="0"/>
+                              </a:rPr>
+                            </m:ctrlPr>
+                          </m:accPr>
+                          <m:e>
+                            <m:r>
+                              <a:rPr lang="en-US" i="1" smtClean="0">
+                                <a:latin typeface="Cambria Math" panose="02040503050406030204" pitchFamily="18" charset="0"/>
+                              </a:rPr>
+                              <m:t>𝐵</m:t>
+                            </m:r>
+                          </m:e>
+                        </m:acc>
+                        <m:r>
+                          <a:rPr lang="en-US" i="1" smtClean="0">
+                            <a:latin typeface="Cambria Math" panose="02040503050406030204" pitchFamily="18" charset="0"/>
+                          </a:rPr>
+                          <m:t>+</m:t>
+                        </m:r>
+                        <m:r>
+                          <a:rPr lang="en-US" i="1" smtClean="0">
+                            <a:latin typeface="Cambria Math" panose="02040503050406030204" pitchFamily="18" charset="0"/>
+                          </a:rPr>
+                          <m:t>𝐵</m:t>
+                        </m:r>
+                        <m:r>
+                          <a:rPr lang="en-US" i="1" smtClean="0">
+                            <a:latin typeface="Cambria Math" panose="02040503050406030204" pitchFamily="18" charset="0"/>
+                          </a:rPr>
+                          <m:t>.</m:t>
+                        </m:r>
+                        <m:r>
+                          <a:rPr lang="en-US" i="1" smtClean="0">
+                            <a:latin typeface="Cambria Math" panose="02040503050406030204" pitchFamily="18" charset="0"/>
+                          </a:rPr>
+                          <m:t>𝐶</m:t>
+                        </m:r>
+                      </m:e>
+                    </m:d>
+                    <m:r>
+                      <a:rPr lang="en-US" i="1" smtClean="0">
+                        <a:latin typeface="Cambria Math" panose="02040503050406030204" pitchFamily="18" charset="0"/>
+                      </a:rPr>
+                      <m:t>.</m:t>
+                    </m:r>
+                    <m:d>
+                      <m:dPr>
+                        <m:ctrlPr>
+                          <a:rPr lang="en-US" i="1" smtClean="0">
+                            <a:latin typeface="Cambria Math" panose="02040503050406030204" pitchFamily="18" charset="0"/>
+                          </a:rPr>
+                        </m:ctrlPr>
+                      </m:dPr>
+                      <m:e>
+                        <m:acc>
+                          <m:accPr>
+                            <m:chr m:val="̅"/>
+                            <m:ctrlPr>
+                              <a:rPr lang="en-US" i="1">
+                                <a:latin typeface="Cambria Math" panose="02040503050406030204" pitchFamily="18" charset="0"/>
+                              </a:rPr>
+                            </m:ctrlPr>
+                          </m:accPr>
+                          <m:e>
+                            <m:r>
+                              <a:rPr lang="en-US" i="1" smtClean="0">
+                                <a:latin typeface="Cambria Math" panose="02040503050406030204" pitchFamily="18" charset="0"/>
+                              </a:rPr>
+                              <m:t>𝐴</m:t>
+                            </m:r>
+                          </m:e>
+                        </m:acc>
+                        <m:r>
+                          <a:rPr lang="en-US" i="1" smtClean="0">
+                            <a:latin typeface="Cambria Math" panose="02040503050406030204" pitchFamily="18" charset="0"/>
+                          </a:rPr>
+                          <m:t>+</m:t>
+                        </m:r>
+                        <m:acc>
+                          <m:accPr>
+                            <m:chr m:val="̅"/>
+                            <m:ctrlPr>
+                              <a:rPr lang="en-US" i="1">
+                                <a:latin typeface="Cambria Math" panose="02040503050406030204" pitchFamily="18" charset="0"/>
+                              </a:rPr>
+                            </m:ctrlPr>
+                          </m:accPr>
+                          <m:e>
+                            <m:r>
+                              <a:rPr lang="en-US" i="1" smtClean="0">
+                                <a:latin typeface="Cambria Math" panose="02040503050406030204" pitchFamily="18" charset="0"/>
+                              </a:rPr>
+                              <m:t>𝐶</m:t>
+                            </m:r>
+                          </m:e>
+                        </m:acc>
+                      </m:e>
+                    </m:d>
+                    <m:r>
+                      <a:rPr lang="en-US" i="1" smtClean="0">
+                        <a:latin typeface="Cambria Math" panose="02040503050406030204" pitchFamily="18" charset="0"/>
+                      </a:rPr>
+                      <m:t>=</m:t>
+                    </m:r>
+                    <m:r>
+                      <a:rPr lang="en-US" b="0" i="1" smtClean="0">
+                        <a:latin typeface="Cambria Math" panose="02040503050406030204" pitchFamily="18" charset="0"/>
+                      </a:rPr>
+                      <m:t>𝐴</m:t>
+                    </m:r>
+                    <m:acc>
+                      <m:accPr>
+                        <m:chr m:val="̅"/>
+                        <m:ctrlPr>
+                          <a:rPr lang="en-US" i="1">
+                            <a:latin typeface="Cambria Math" panose="02040503050406030204" pitchFamily="18" charset="0"/>
+                          </a:rPr>
+                        </m:ctrlPr>
+                      </m:accPr>
+                      <m:e>
+                        <m:r>
+                          <a:rPr lang="en-US" i="1">
+                            <a:latin typeface="Cambria Math" panose="02040503050406030204" pitchFamily="18" charset="0"/>
+                          </a:rPr>
+                          <m:t>𝐵</m:t>
+                        </m:r>
+                        <m:r>
+                          <a:rPr lang="en-US" b="0" i="1" smtClean="0">
+                            <a:latin typeface="Cambria Math" panose="02040503050406030204" pitchFamily="18" charset="0"/>
+                          </a:rPr>
+                          <m:t>𝐶</m:t>
+                        </m:r>
+                      </m:e>
+                    </m:acc>
+                    <m:r>
+                      <a:rPr lang="en-US" b="0" i="1" smtClean="0">
+                        <a:latin typeface="Cambria Math" panose="02040503050406030204" pitchFamily="18" charset="0"/>
+                      </a:rPr>
+                      <m:t>+</m:t>
+                    </m:r>
+                    <m:acc>
+                      <m:accPr>
+                        <m:chr m:val="̅"/>
+                        <m:ctrlPr>
+                          <a:rPr lang="en-US" i="1">
+                            <a:latin typeface="Cambria Math" panose="02040503050406030204" pitchFamily="18" charset="0"/>
+                          </a:rPr>
+                        </m:ctrlPr>
+                      </m:accPr>
+                      <m:e>
+                        <m:r>
+                          <a:rPr lang="en-US" i="1">
+                            <a:latin typeface="Cambria Math" panose="02040503050406030204" pitchFamily="18" charset="0"/>
+                          </a:rPr>
+                          <m:t>𝐴</m:t>
+                        </m:r>
+                      </m:e>
+                    </m:acc>
+                    <m:r>
+                      <a:rPr lang="en-US" b="0" i="1" smtClean="0">
+                        <a:latin typeface="Cambria Math" panose="02040503050406030204" pitchFamily="18" charset="0"/>
+                      </a:rPr>
+                      <m:t>𝐵𝐶</m:t>
+                    </m:r>
+                  </m:oMath>
+                </a14:m>
+                <a:endParaRPr lang="en-US" i="1" dirty="0">
+                  <a:latin typeface="Cambria Math" panose="02040503050406030204" pitchFamily="18" charset="0"/>
+                </a:endParaRPr>
+              </a:p>
+              <a:p>
+                <a:endParaRPr lang="en-US" dirty="0"/>
+              </a:p>
+              <a:p>
+                <a:endParaRPr lang="en-US" dirty="0"/>
+              </a:p>
+            </p:txBody>
+          </p:sp>
+        </mc:Choice>
+        <mc:Fallback>
+          <p:sp>
+            <p:nvSpPr>
+              <p:cNvPr id="3" name="Content Placeholder 2">
+                <a:extLst>
+                  <a:ext uri="{FF2B5EF4-FFF2-40B4-BE49-F238E27FC236}">
+                    <a16:creationId xmlns:a16="http://schemas.microsoft.com/office/drawing/2014/main" id="{CFE73E7D-16C4-E737-FB0A-9F0380701A19}"/>
+                  </a:ext>
+                </a:extLst>
+              </p:cNvPr>
+              <p:cNvSpPr>
+                <a:spLocks noGrp="1" noRot="1" noChangeAspect="1" noMove="1" noResize="1" noEditPoints="1" noAdjustHandles="1" noChangeArrowheads="1" noChangeShapeType="1" noTextEdit="1"/>
+              </p:cNvSpPr>
+              <p:nvPr>
+                <p:ph idx="1"/>
+              </p:nvPr>
+            </p:nvSpPr>
+            <p:spPr>
+              <a:blipFill>
+                <a:blip r:embed="rId2"/>
+                <a:stretch>
+                  <a:fillRect l="-1043" t="-3081"/>
+                </a:stretch>
+              </a:blipFill>
+            </p:spPr>
+            <p:txBody>
+              <a:bodyPr/>
+              <a:lstStyle/>
+              <a:p>
+                <a:r>
+                  <a:rPr lang="en-US">
+                    <a:noFill/>
+                  </a:rPr>
+                  <a:t> </a:t>
+                </a:r>
+              </a:p>
+            </p:txBody>
+          </p:sp>
+        </mc:Fallback>
+      </mc:AlternateContent>
+    </p:spTree>
+    <p:extLst>
+      <p:ext uri="{BB962C8B-B14F-4D97-AF65-F5344CB8AC3E}">
+        <p14:creationId xmlns:p14="http://schemas.microsoft.com/office/powerpoint/2010/main" val="2942498023"/>
+      </p:ext>
+    </p:extLst>
+  </p:cSld>
+  <p:clrMapOvr>
+    <a:masterClrMapping/>
+  </p:clrMapOvr>
+</p:sld>
+</file>
+
+<file path=ppt/slides/slide82.xml><?xml version="1.0" encoding="utf-8"?>
+<p:sld xmlns:a="http://schemas.openxmlformats.org/drawingml/2006/main" xmlns:r="http://schemas.openxmlformats.org/officeDocument/2006/relationships" xmlns:p="http://schemas.openxmlformats.org/presentationml/2006/main">
+  <p:cSld>
+    <p:spTree>
+      <p:nvGrpSpPr>
+        <p:cNvPr id="1" name="">
+          <a:extLst>
+            <a:ext uri="{FF2B5EF4-FFF2-40B4-BE49-F238E27FC236}">
+              <a16:creationId xmlns:a16="http://schemas.microsoft.com/office/drawing/2014/main" id="{6852ABC3-2FB2-EB18-7247-2C7A596D6576}"/>
+            </a:ext>
+          </a:extLst>
+        </p:cNvPr>
+        <p:cNvGrpSpPr/>
+        <p:nvPr/>
+      </p:nvGrpSpPr>
+      <p:grpSpPr>
+        <a:xfrm>
+          <a:off x="0" y="0"/>
+          <a:ext cx="0" cy="0"/>
+          <a:chOff x="0" y="0"/>
+          <a:chExt cx="0" cy="0"/>
+        </a:xfrm>
+      </p:grpSpPr>
+      <p:sp>
+        <p:nvSpPr>
+          <p:cNvPr id="2" name="Title 1">
+            <a:extLst>
+              <a:ext uri="{FF2B5EF4-FFF2-40B4-BE49-F238E27FC236}">
+                <a16:creationId xmlns:a16="http://schemas.microsoft.com/office/drawing/2014/main" id="{41A9C898-35FC-6EF2-7A80-305B2EB076F8}"/>
+              </a:ext>
+            </a:extLst>
+          </p:cNvPr>
+          <p:cNvSpPr>
+            <a:spLocks noGrp="1"/>
+          </p:cNvSpPr>
+          <p:nvPr>
+            <p:ph type="title"/>
+          </p:nvPr>
+        </p:nvSpPr>
+        <p:spPr/>
+        <p:txBody>
+          <a:bodyPr/>
+          <a:lstStyle/>
+          <a:p>
+            <a:r>
+              <a:rPr lang="en-US" dirty="0"/>
+              <a:t>Expressions: </a:t>
+            </a:r>
+            <a:r>
+              <a:rPr lang="en-US" dirty="0" err="1"/>
+              <a:t>Soln</a:t>
+            </a:r>
+            <a:r>
+              <a:rPr lang="en-US" dirty="0"/>
+              <a:t> 1..4</a:t>
+            </a:r>
+          </a:p>
+        </p:txBody>
+      </p:sp>
+      <mc:AlternateContent xmlns:mc="http://schemas.openxmlformats.org/markup-compatibility/2006">
+        <mc:Choice xmlns:a14="http://schemas.microsoft.com/office/drawing/2010/main" Requires="a14">
+          <p:sp>
+            <p:nvSpPr>
+              <p:cNvPr id="3" name="Content Placeholder 2">
+                <a:extLst>
+                  <a:ext uri="{FF2B5EF4-FFF2-40B4-BE49-F238E27FC236}">
+                    <a16:creationId xmlns:a16="http://schemas.microsoft.com/office/drawing/2014/main" id="{B475FFE3-D627-63D4-4E57-5DE63F6C2754}"/>
+                  </a:ext>
+                </a:extLst>
+              </p:cNvPr>
+              <p:cNvSpPr>
+                <a:spLocks noGrp="1"/>
+              </p:cNvSpPr>
+              <p:nvPr>
+                <p:ph idx="1"/>
+              </p:nvPr>
+            </p:nvSpPr>
+            <p:spPr/>
+            <p:txBody>
+              <a:bodyPr>
+                <a:normAutofit/>
+              </a:bodyPr>
+              <a:lstStyle/>
+              <a:p>
+                <a:r>
+                  <a:rPr lang="en-US" dirty="0"/>
+                  <a:t>Solutions to Boolean </a:t>
+                </a:r>
+                <a:r>
+                  <a:rPr lang="en-US" dirty="0" err="1"/>
+                  <a:t>Simplifcations</a:t>
+                </a:r>
+                <a:r>
+                  <a:rPr lang="en-US" dirty="0"/>
+                  <a:t> ….</a:t>
+                </a:r>
+              </a:p>
+              <a:p>
+                <a:pPr marL="914400" lvl="1" indent="-457200">
+                  <a:buFont typeface="+mj-lt"/>
+                  <a:buAutoNum type="arabicPeriod"/>
+                </a:pPr>
+                <a14:m>
+                  <m:oMath xmlns:m="http://schemas.openxmlformats.org/officeDocument/2006/math">
+                    <m:r>
+                      <a:rPr lang="en-US" i="1" smtClean="0">
+                        <a:latin typeface="Cambria Math" panose="02040503050406030204" pitchFamily="18" charset="0"/>
+                      </a:rPr>
+                      <m:t>𝐴</m:t>
+                    </m:r>
+                    <m:r>
+                      <a:rPr lang="en-US" i="1" smtClean="0">
+                        <a:latin typeface="Cambria Math" panose="02040503050406030204" pitchFamily="18" charset="0"/>
+                      </a:rPr>
+                      <m:t>.</m:t>
+                    </m:r>
+                    <m:d>
+                      <m:dPr>
+                        <m:ctrlPr>
+                          <a:rPr lang="en-US" i="1" smtClean="0">
+                            <a:latin typeface="Cambria Math" panose="02040503050406030204" pitchFamily="18" charset="0"/>
+                          </a:rPr>
+                        </m:ctrlPr>
+                      </m:dPr>
+                      <m:e>
+                        <m:r>
+                          <a:rPr lang="en-US" i="1" smtClean="0">
+                            <a:latin typeface="Cambria Math" panose="02040503050406030204" pitchFamily="18" charset="0"/>
+                          </a:rPr>
+                          <m:t>𝐴</m:t>
+                        </m:r>
+                        <m:r>
+                          <a:rPr lang="en-US" i="1" smtClean="0">
+                            <a:latin typeface="Cambria Math" panose="02040503050406030204" pitchFamily="18" charset="0"/>
+                          </a:rPr>
+                          <m:t>+</m:t>
+                        </m:r>
+                        <m:r>
+                          <a:rPr lang="en-US" i="1" smtClean="0">
+                            <a:latin typeface="Cambria Math" panose="02040503050406030204" pitchFamily="18" charset="0"/>
+                          </a:rPr>
+                          <m:t>𝐵</m:t>
+                        </m:r>
+                      </m:e>
+                    </m:d>
+                  </m:oMath>
+                </a14:m>
+                <a:r>
+                  <a:rPr lang="en-US" dirty="0"/>
+                  <a:t>  = </a:t>
+                </a:r>
+                <a:r>
+                  <a:rPr lang="en-US" b="1" dirty="0"/>
+                  <a:t>A   </a:t>
+                </a:r>
+                <a:r>
+                  <a:rPr lang="en-US" dirty="0">
+                    <a:solidFill>
+                      <a:schemeClr val="accent6">
+                        <a:lumMod val="75000"/>
+                      </a:schemeClr>
+                    </a:solidFill>
+                  </a:rPr>
+                  <a:t>// Use Absorption law</a:t>
+                </a:r>
+              </a:p>
+              <a:p>
+                <a:pPr marL="914400" lvl="1" indent="-457200">
+                  <a:buFont typeface="+mj-lt"/>
+                  <a:buAutoNum type="arabicPeriod"/>
+                </a:pPr>
+                <a14:m>
+                  <m:oMath xmlns:m="http://schemas.openxmlformats.org/officeDocument/2006/math">
+                    <m:r>
+                      <a:rPr lang="en-US" i="1" smtClean="0">
+                        <a:latin typeface="Cambria Math" panose="02040503050406030204" pitchFamily="18" charset="0"/>
+                      </a:rPr>
+                      <m:t>𝐴</m:t>
+                    </m:r>
+                    <m:r>
+                      <a:rPr lang="en-US" i="1" smtClean="0">
+                        <a:latin typeface="Cambria Math" panose="02040503050406030204" pitchFamily="18" charset="0"/>
+                      </a:rPr>
+                      <m:t>+</m:t>
+                    </m:r>
+                    <m:d>
+                      <m:dPr>
+                        <m:ctrlPr>
+                          <a:rPr lang="en-US" i="1" smtClean="0">
+                            <a:latin typeface="Cambria Math" panose="02040503050406030204" pitchFamily="18" charset="0"/>
+                          </a:rPr>
+                        </m:ctrlPr>
+                      </m:dPr>
+                      <m:e>
+                        <m:r>
+                          <a:rPr lang="en-US" i="1" smtClean="0">
+                            <a:latin typeface="Cambria Math" panose="02040503050406030204" pitchFamily="18" charset="0"/>
+                          </a:rPr>
+                          <m:t>𝐴</m:t>
+                        </m:r>
+                        <m:r>
+                          <a:rPr lang="en-US" i="1" smtClean="0">
+                            <a:latin typeface="Cambria Math" panose="02040503050406030204" pitchFamily="18" charset="0"/>
+                          </a:rPr>
+                          <m:t>.</m:t>
+                        </m:r>
+                        <m:r>
+                          <a:rPr lang="en-US" i="1" smtClean="0">
+                            <a:latin typeface="Cambria Math" panose="02040503050406030204" pitchFamily="18" charset="0"/>
+                          </a:rPr>
+                          <m:t>𝐵</m:t>
+                        </m:r>
+                      </m:e>
+                    </m:d>
+                  </m:oMath>
+                </a14:m>
+                <a:r>
+                  <a:rPr lang="en-US" dirty="0"/>
+                  <a:t> = </a:t>
+                </a:r>
+                <a:r>
+                  <a:rPr lang="en-US" b="1" dirty="0"/>
+                  <a:t>A  </a:t>
+                </a:r>
+                <a:r>
+                  <a:rPr lang="en-US" dirty="0">
+                    <a:solidFill>
+                      <a:schemeClr val="accent6">
+                        <a:lumMod val="75000"/>
+                      </a:schemeClr>
+                    </a:solidFill>
+                  </a:rPr>
+                  <a:t>// Use Absorption law, </a:t>
+                </a:r>
+                <a:r>
+                  <a:rPr lang="en-US" i="1" dirty="0">
+                    <a:solidFill>
+                      <a:schemeClr val="accent6">
+                        <a:lumMod val="75000"/>
+                      </a:schemeClr>
+                    </a:solidFill>
+                  </a:rPr>
+                  <a:t>other one</a:t>
+                </a:r>
+                <a:endParaRPr lang="en-US" b="1" i="1" dirty="0"/>
+              </a:p>
+              <a:p>
+                <a:pPr marL="914400" lvl="1" indent="-457200">
+                  <a:buFont typeface="+mj-lt"/>
+                  <a:buAutoNum type="arabicPeriod"/>
+                </a:pPr>
+                <a14:m>
+                  <m:oMath xmlns:m="http://schemas.openxmlformats.org/officeDocument/2006/math">
+                    <m:acc>
+                      <m:accPr>
+                        <m:chr m:val="̅"/>
+                        <m:ctrlPr>
+                          <a:rPr lang="en-US" i="1" smtClean="0">
+                            <a:latin typeface="Cambria Math" panose="02040503050406030204" pitchFamily="18" charset="0"/>
+                          </a:rPr>
+                        </m:ctrlPr>
+                      </m:accPr>
+                      <m:e>
+                        <m:r>
+                          <a:rPr lang="en-US" i="1" smtClean="0">
+                            <a:latin typeface="Cambria Math" panose="02040503050406030204" pitchFamily="18" charset="0"/>
+                          </a:rPr>
+                          <m:t>𝐴</m:t>
+                        </m:r>
+                      </m:e>
+                    </m:acc>
+                    <m:r>
+                      <a:rPr lang="en-US" i="1" smtClean="0">
+                        <a:latin typeface="Cambria Math" panose="02040503050406030204" pitchFamily="18" charset="0"/>
+                      </a:rPr>
+                      <m:t>+</m:t>
+                    </m:r>
+                    <m:d>
+                      <m:dPr>
+                        <m:ctrlPr>
+                          <a:rPr lang="en-US" i="1" smtClean="0">
+                            <a:latin typeface="Cambria Math" panose="02040503050406030204" pitchFamily="18" charset="0"/>
+                          </a:rPr>
+                        </m:ctrlPr>
+                      </m:dPr>
+                      <m:e>
+                        <m:r>
+                          <a:rPr lang="en-US" i="1" smtClean="0">
+                            <a:latin typeface="Cambria Math" panose="02040503050406030204" pitchFamily="18" charset="0"/>
+                          </a:rPr>
+                          <m:t>𝐴</m:t>
+                        </m:r>
+                        <m:r>
+                          <a:rPr lang="en-US" i="1" smtClean="0">
+                            <a:latin typeface="Cambria Math" panose="02040503050406030204" pitchFamily="18" charset="0"/>
+                          </a:rPr>
+                          <m:t>.</m:t>
+                        </m:r>
+                        <m:r>
+                          <a:rPr lang="en-US" i="1" smtClean="0">
+                            <a:latin typeface="Cambria Math" panose="02040503050406030204" pitchFamily="18" charset="0"/>
+                          </a:rPr>
+                          <m:t>𝐵</m:t>
+                        </m:r>
+                      </m:e>
+                    </m:d>
+                  </m:oMath>
+                </a14:m>
+                <a:r>
+                  <a:rPr lang="en-US" dirty="0"/>
+                  <a:t> = </a:t>
+                </a:r>
+                <a14:m>
+                  <m:oMath xmlns:m="http://schemas.openxmlformats.org/officeDocument/2006/math">
+                    <m:acc>
+                      <m:accPr>
+                        <m:chr m:val="̅"/>
+                        <m:ctrlPr>
+                          <a:rPr lang="en-US" i="1">
+                            <a:latin typeface="Cambria Math" panose="02040503050406030204" pitchFamily="18" charset="0"/>
+                          </a:rPr>
+                        </m:ctrlPr>
+                      </m:accPr>
+                      <m:e>
+                        <m:r>
+                          <a:rPr lang="en-US" i="1" smtClean="0">
+                            <a:latin typeface="Cambria Math" panose="02040503050406030204" pitchFamily="18" charset="0"/>
+                          </a:rPr>
+                          <m:t>𝐴</m:t>
+                        </m:r>
+                      </m:e>
+                    </m:acc>
+                    <m:r>
+                      <a:rPr lang="en-US" i="1" smtClean="0">
+                        <a:latin typeface="Cambria Math" panose="02040503050406030204" pitchFamily="18" charset="0"/>
+                      </a:rPr>
+                      <m:t>+</m:t>
+                    </m:r>
+                    <m:r>
+                      <a:rPr lang="en-US" b="0" i="1" smtClean="0">
+                        <a:latin typeface="Cambria Math" panose="02040503050406030204" pitchFamily="18" charset="0"/>
+                      </a:rPr>
+                      <m:t>𝐵</m:t>
+                    </m:r>
+                  </m:oMath>
+                </a14:m>
+                <a:r>
+                  <a:rPr lang="en-US" dirty="0"/>
+                  <a:t> </a:t>
+                </a:r>
+              </a:p>
+              <a:p>
+                <a:pPr lvl="2"/>
+                <a:r>
+                  <a:rPr lang="en-US" dirty="0">
+                    <a:sym typeface="Wingdings" panose="05000000000000000000" pitchFamily="2" charset="2"/>
+                  </a:rPr>
+                  <a:t> </a:t>
+                </a:r>
+                <a:r>
+                  <a:rPr lang="en-US" dirty="0"/>
+                  <a:t>(</a:t>
+                </a:r>
+                <a14:m>
+                  <m:oMath xmlns:m="http://schemas.openxmlformats.org/officeDocument/2006/math">
+                    <m:acc>
+                      <m:accPr>
+                        <m:chr m:val="̅"/>
+                        <m:ctrlPr>
+                          <a:rPr lang="en-US" i="1" smtClean="0">
+                            <a:latin typeface="Cambria Math" panose="02040503050406030204" pitchFamily="18" charset="0"/>
+                          </a:rPr>
+                        </m:ctrlPr>
+                      </m:accPr>
+                      <m:e>
+                        <m:r>
+                          <a:rPr lang="en-US" i="1" smtClean="0">
+                            <a:latin typeface="Cambria Math" panose="02040503050406030204" pitchFamily="18" charset="0"/>
+                          </a:rPr>
+                          <m:t>𝐴</m:t>
+                        </m:r>
+                      </m:e>
+                    </m:acc>
+                  </m:oMath>
+                </a14:m>
+                <a:r>
+                  <a:rPr lang="en-US" dirty="0"/>
+                  <a:t> + </a:t>
+                </a:r>
+                <a14:m>
+                  <m:oMath xmlns:m="http://schemas.openxmlformats.org/officeDocument/2006/math">
+                    <m:r>
+                      <a:rPr lang="en-US" i="1">
+                        <a:latin typeface="Cambria Math" panose="02040503050406030204" pitchFamily="18" charset="0"/>
+                      </a:rPr>
+                      <m:t>𝐴</m:t>
+                    </m:r>
+                  </m:oMath>
+                </a14:m>
+                <a:r>
+                  <a:rPr lang="en-US" dirty="0"/>
+                  <a:t>).(</a:t>
+                </a:r>
+                <a14:m>
+                  <m:oMath xmlns:m="http://schemas.openxmlformats.org/officeDocument/2006/math">
+                    <m:acc>
+                      <m:accPr>
+                        <m:chr m:val="̅"/>
+                        <m:ctrlPr>
+                          <a:rPr lang="en-US" i="1">
+                            <a:latin typeface="Cambria Math" panose="02040503050406030204" pitchFamily="18" charset="0"/>
+                          </a:rPr>
+                        </m:ctrlPr>
+                      </m:accPr>
+                      <m:e>
+                        <m:r>
+                          <a:rPr lang="en-US" i="1">
+                            <a:latin typeface="Cambria Math" panose="02040503050406030204" pitchFamily="18" charset="0"/>
+                          </a:rPr>
+                          <m:t>𝐴</m:t>
+                        </m:r>
+                      </m:e>
+                    </m:acc>
+                    <m:r>
+                      <a:rPr lang="en-US" i="1">
+                        <a:latin typeface="Cambria Math" panose="02040503050406030204" pitchFamily="18" charset="0"/>
+                      </a:rPr>
+                      <m:t>+</m:t>
+                    </m:r>
+                    <m:r>
+                      <a:rPr lang="en-US" i="1">
+                        <a:latin typeface="Cambria Math" panose="02040503050406030204" pitchFamily="18" charset="0"/>
+                      </a:rPr>
+                      <m:t>𝐵</m:t>
+                    </m:r>
+                  </m:oMath>
+                </a14:m>
+                <a:r>
+                  <a:rPr lang="en-US" dirty="0"/>
+                  <a:t>)      </a:t>
+                </a:r>
+                <a:r>
+                  <a:rPr lang="en-US" dirty="0">
+                    <a:solidFill>
+                      <a:schemeClr val="accent6">
+                        <a:lumMod val="75000"/>
+                      </a:schemeClr>
+                    </a:solidFill>
+                  </a:rPr>
+                  <a:t>//Distribution Law</a:t>
+                </a:r>
+              </a:p>
+              <a:p>
+                <a:pPr lvl="2"/>
+                <a:r>
+                  <a:rPr lang="en-US" dirty="0">
+                    <a:sym typeface="Wingdings" panose="05000000000000000000" pitchFamily="2" charset="2"/>
+                  </a:rPr>
+                  <a:t> </a:t>
+                </a:r>
+                <a:r>
+                  <a:rPr lang="en-US" dirty="0"/>
+                  <a:t>(1). (</a:t>
+                </a:r>
+                <a14:m>
+                  <m:oMath xmlns:m="http://schemas.openxmlformats.org/officeDocument/2006/math">
+                    <m:acc>
+                      <m:accPr>
+                        <m:chr m:val="̅"/>
+                        <m:ctrlPr>
+                          <a:rPr lang="en-US" i="1">
+                            <a:latin typeface="Cambria Math" panose="02040503050406030204" pitchFamily="18" charset="0"/>
+                          </a:rPr>
+                        </m:ctrlPr>
+                      </m:accPr>
+                      <m:e>
+                        <m:r>
+                          <a:rPr lang="en-US" i="1">
+                            <a:latin typeface="Cambria Math" panose="02040503050406030204" pitchFamily="18" charset="0"/>
+                          </a:rPr>
+                          <m:t>𝐴</m:t>
+                        </m:r>
+                      </m:e>
+                    </m:acc>
+                    <m:r>
+                      <a:rPr lang="en-US" i="1">
+                        <a:latin typeface="Cambria Math" panose="02040503050406030204" pitchFamily="18" charset="0"/>
+                      </a:rPr>
+                      <m:t>+</m:t>
+                    </m:r>
+                    <m:r>
+                      <a:rPr lang="en-US" i="1">
+                        <a:latin typeface="Cambria Math" panose="02040503050406030204" pitchFamily="18" charset="0"/>
+                      </a:rPr>
+                      <m:t>𝐵</m:t>
+                    </m:r>
+                  </m:oMath>
+                </a14:m>
+                <a:r>
+                  <a:rPr lang="en-US" dirty="0"/>
+                  <a:t>)   </a:t>
+                </a:r>
+                <a:r>
+                  <a:rPr lang="en-US" dirty="0">
+                    <a:solidFill>
+                      <a:schemeClr val="accent6">
+                        <a:lumMod val="75000"/>
+                      </a:schemeClr>
+                    </a:solidFill>
+                  </a:rPr>
+                  <a:t>// Idempotent Law</a:t>
+                </a:r>
+              </a:p>
+              <a:p>
+                <a:pPr lvl="2"/>
+                <a:r>
+                  <a:rPr lang="en-US" dirty="0">
+                    <a:sym typeface="Wingdings" panose="05000000000000000000" pitchFamily="2" charset="2"/>
+                  </a:rPr>
+                  <a:t></a:t>
+                </a:r>
+                <a:r>
+                  <a:rPr lang="en-US" dirty="0"/>
+                  <a:t>(</a:t>
+                </a:r>
+                <a14:m>
+                  <m:oMath xmlns:m="http://schemas.openxmlformats.org/officeDocument/2006/math">
+                    <m:acc>
+                      <m:accPr>
+                        <m:chr m:val="̅"/>
+                        <m:ctrlPr>
+                          <a:rPr lang="en-US" i="1">
+                            <a:latin typeface="Cambria Math" panose="02040503050406030204" pitchFamily="18" charset="0"/>
+                          </a:rPr>
+                        </m:ctrlPr>
+                      </m:accPr>
+                      <m:e>
+                        <m:r>
+                          <a:rPr lang="en-US" i="1">
+                            <a:latin typeface="Cambria Math" panose="02040503050406030204" pitchFamily="18" charset="0"/>
+                          </a:rPr>
+                          <m:t>𝐴</m:t>
+                        </m:r>
+                      </m:e>
+                    </m:acc>
+                    <m:r>
+                      <a:rPr lang="en-US" i="1">
+                        <a:latin typeface="Cambria Math" panose="02040503050406030204" pitchFamily="18" charset="0"/>
+                      </a:rPr>
+                      <m:t>+</m:t>
+                    </m:r>
+                    <m:r>
+                      <a:rPr lang="en-US" i="1">
+                        <a:latin typeface="Cambria Math" panose="02040503050406030204" pitchFamily="18" charset="0"/>
+                      </a:rPr>
+                      <m:t>𝐵</m:t>
+                    </m:r>
+                  </m:oMath>
+                </a14:m>
+                <a:r>
+                  <a:rPr lang="en-US" dirty="0"/>
+                  <a:t>)</a:t>
+                </a:r>
+              </a:p>
+              <a:p>
+                <a:pPr marL="914400" lvl="1" indent="-457200">
+                  <a:buFont typeface="+mj-lt"/>
+                  <a:buAutoNum type="arabicPeriod"/>
+                </a:pPr>
+                <a:r>
+                  <a:rPr lang="en-US" dirty="0"/>
+                  <a:t>(</a:t>
+                </a:r>
+                <a14:m>
+                  <m:oMath xmlns:m="http://schemas.openxmlformats.org/officeDocument/2006/math">
+                    <m:r>
+                      <a:rPr lang="en-US" i="1" smtClean="0">
+                        <a:latin typeface="Cambria Math" panose="02040503050406030204" pitchFamily="18" charset="0"/>
+                      </a:rPr>
+                      <m:t>𝐴</m:t>
+                    </m:r>
+                    <m:r>
+                      <a:rPr lang="en-US" i="1" smtClean="0">
+                        <a:latin typeface="Cambria Math" panose="02040503050406030204" pitchFamily="18" charset="0"/>
+                      </a:rPr>
+                      <m:t>+</m:t>
+                    </m:r>
+                    <m:r>
+                      <a:rPr lang="en-US" i="1" smtClean="0">
+                        <a:latin typeface="Cambria Math" panose="02040503050406030204" pitchFamily="18" charset="0"/>
+                      </a:rPr>
+                      <m:t>𝐵</m:t>
+                    </m:r>
+                    <m:r>
+                      <a:rPr lang="en-US" i="1" smtClean="0">
+                        <a:latin typeface="Cambria Math" panose="02040503050406030204" pitchFamily="18" charset="0"/>
+                      </a:rPr>
+                      <m:t>).</m:t>
+                    </m:r>
+                    <m:d>
+                      <m:dPr>
+                        <m:ctrlPr>
+                          <a:rPr lang="en-US" i="1" smtClean="0">
+                            <a:latin typeface="Cambria Math" panose="02040503050406030204" pitchFamily="18" charset="0"/>
+                          </a:rPr>
+                        </m:ctrlPr>
+                      </m:dPr>
+                      <m:e>
+                        <m:r>
+                          <a:rPr lang="en-US" i="1" smtClean="0">
+                            <a:latin typeface="Cambria Math" panose="02040503050406030204" pitchFamily="18" charset="0"/>
+                          </a:rPr>
+                          <m:t>𝐴</m:t>
+                        </m:r>
+                        <m:r>
+                          <a:rPr lang="en-US" i="1" smtClean="0">
+                            <a:latin typeface="Cambria Math" panose="02040503050406030204" pitchFamily="18" charset="0"/>
+                          </a:rPr>
+                          <m:t>+</m:t>
+                        </m:r>
+                        <m:acc>
+                          <m:accPr>
+                            <m:chr m:val="̅"/>
+                            <m:ctrlPr>
+                              <a:rPr lang="en-US" i="1" smtClean="0">
+                                <a:latin typeface="Cambria Math" panose="02040503050406030204" pitchFamily="18" charset="0"/>
+                              </a:rPr>
+                            </m:ctrlPr>
+                          </m:accPr>
+                          <m:e>
+                            <m:r>
+                              <a:rPr lang="en-US" i="1" smtClean="0">
+                                <a:latin typeface="Cambria Math" panose="02040503050406030204" pitchFamily="18" charset="0"/>
+                              </a:rPr>
+                              <m:t>𝐵</m:t>
+                            </m:r>
+                          </m:e>
+                        </m:acc>
+                      </m:e>
+                    </m:d>
+                  </m:oMath>
+                </a14:m>
+                <a:r>
+                  <a:rPr lang="en-US" dirty="0"/>
+                  <a:t> = A</a:t>
+                </a:r>
+              </a:p>
+              <a:p>
+                <a:pPr lvl="2"/>
+                <a:r>
+                  <a:rPr lang="en-US" dirty="0">
+                    <a:sym typeface="Wingdings" panose="05000000000000000000" pitchFamily="2" charset="2"/>
+                  </a:rPr>
+                  <a:t></a:t>
+                </a:r>
+                <a14:m>
+                  <m:oMath xmlns:m="http://schemas.openxmlformats.org/officeDocument/2006/math">
+                    <m:r>
+                      <a:rPr lang="en-US" i="1" smtClean="0">
+                        <a:latin typeface="Cambria Math" panose="02040503050406030204" pitchFamily="18" charset="0"/>
+                      </a:rPr>
+                      <m:t>𝐴</m:t>
+                    </m:r>
+                    <m:r>
+                      <a:rPr lang="en-US" i="1" smtClean="0">
+                        <a:latin typeface="Cambria Math" panose="02040503050406030204" pitchFamily="18" charset="0"/>
+                      </a:rPr>
+                      <m:t>+</m:t>
+                    </m:r>
+                    <m:d>
+                      <m:dPr>
+                        <m:ctrlPr>
+                          <a:rPr lang="en-US" b="0" i="1" smtClean="0">
+                            <a:latin typeface="Cambria Math" panose="02040503050406030204" pitchFamily="18" charset="0"/>
+                          </a:rPr>
+                        </m:ctrlPr>
+                      </m:dPr>
+                      <m:e>
+                        <m:r>
+                          <a:rPr lang="en-US" b="0" i="1" smtClean="0">
+                            <a:latin typeface="Cambria Math" panose="02040503050406030204" pitchFamily="18" charset="0"/>
+                          </a:rPr>
+                          <m:t>𝐵</m:t>
+                        </m:r>
+                        <m:r>
+                          <a:rPr lang="en-US" b="0" i="1" smtClean="0">
+                            <a:latin typeface="Cambria Math" panose="02040503050406030204" pitchFamily="18" charset="0"/>
+                          </a:rPr>
+                          <m:t>.</m:t>
+                        </m:r>
+                        <m:acc>
+                          <m:accPr>
+                            <m:chr m:val="̅"/>
+                            <m:ctrlPr>
+                              <a:rPr lang="en-US" i="1">
+                                <a:latin typeface="Cambria Math" panose="02040503050406030204" pitchFamily="18" charset="0"/>
+                              </a:rPr>
+                            </m:ctrlPr>
+                          </m:accPr>
+                          <m:e>
+                            <m:r>
+                              <a:rPr lang="en-US" i="1">
+                                <a:latin typeface="Cambria Math" panose="02040503050406030204" pitchFamily="18" charset="0"/>
+                              </a:rPr>
+                              <m:t>𝐵</m:t>
+                            </m:r>
+                          </m:e>
+                        </m:acc>
+                      </m:e>
+                    </m:d>
+                    <m:r>
+                      <a:rPr lang="en-US" b="0" i="1" smtClean="0">
+                        <a:latin typeface="Cambria Math" panose="02040503050406030204" pitchFamily="18" charset="0"/>
+                      </a:rPr>
+                      <m:t> </m:t>
+                    </m:r>
+                  </m:oMath>
+                </a14:m>
+                <a:r>
+                  <a:rPr lang="en-US" dirty="0"/>
+                  <a:t> </a:t>
+                </a:r>
+                <a:r>
+                  <a:rPr lang="en-US" dirty="0">
+                    <a:solidFill>
+                      <a:schemeClr val="accent6">
+                        <a:lumMod val="75000"/>
+                      </a:schemeClr>
+                    </a:solidFill>
+                  </a:rPr>
+                  <a:t>//Distribution Law </a:t>
+                </a:r>
+                <a:r>
+                  <a:rPr lang="en-US" i="1" dirty="0">
+                    <a:solidFill>
+                      <a:schemeClr val="accent6">
+                        <a:lumMod val="75000"/>
+                      </a:schemeClr>
+                    </a:solidFill>
+                  </a:rPr>
+                  <a:t>in reverse</a:t>
+                </a:r>
+              </a:p>
+              <a:p>
+                <a:pPr lvl="2"/>
+                <a:r>
+                  <a:rPr lang="en-US" dirty="0">
+                    <a:sym typeface="Wingdings" panose="05000000000000000000" pitchFamily="2" charset="2"/>
+                  </a:rPr>
+                  <a:t></a:t>
+                </a:r>
+                <a14:m>
+                  <m:oMath xmlns:m="http://schemas.openxmlformats.org/officeDocument/2006/math">
+                    <m:r>
+                      <a:rPr lang="en-US" i="1" smtClean="0">
+                        <a:latin typeface="Cambria Math" panose="02040503050406030204" pitchFamily="18" charset="0"/>
+                      </a:rPr>
+                      <m:t>𝐴</m:t>
+                    </m:r>
+                    <m:r>
+                      <a:rPr lang="en-US" i="1" smtClean="0">
+                        <a:latin typeface="Cambria Math" panose="02040503050406030204" pitchFamily="18" charset="0"/>
+                      </a:rPr>
+                      <m:t>+0</m:t>
+                    </m:r>
+                  </m:oMath>
+                </a14:m>
+                <a:r>
+                  <a:rPr lang="en-US" b="0" i="1" dirty="0"/>
+                  <a:t>  </a:t>
+                </a:r>
+                <a:r>
+                  <a:rPr lang="en-US" b="0" dirty="0">
+                    <a:solidFill>
+                      <a:schemeClr val="accent6">
+                        <a:lumMod val="75000"/>
+                      </a:schemeClr>
+                    </a:solidFill>
+                  </a:rPr>
+                  <a:t>//Complement Law</a:t>
+                </a:r>
+              </a:p>
+              <a:p>
+                <a:pPr lvl="2"/>
+                <a:r>
+                  <a:rPr lang="en-US" b="0" dirty="0">
+                    <a:sym typeface="Wingdings" panose="05000000000000000000" pitchFamily="2" charset="2"/>
+                  </a:rPr>
+                  <a:t></a:t>
+                </a:r>
+                <a14:m>
+                  <m:oMath xmlns:m="http://schemas.openxmlformats.org/officeDocument/2006/math">
+                    <m:r>
+                      <a:rPr lang="en-US" i="1" smtClean="0">
+                        <a:latin typeface="Cambria Math" panose="02040503050406030204" pitchFamily="18" charset="0"/>
+                      </a:rPr>
+                      <m:t>𝐴</m:t>
+                    </m:r>
+                  </m:oMath>
+                </a14:m>
+                <a:endParaRPr lang="en-US" i="1" dirty="0">
+                  <a:solidFill>
+                    <a:schemeClr val="accent6">
+                      <a:lumMod val="75000"/>
+                    </a:schemeClr>
+                  </a:solidFill>
+                </a:endParaRPr>
+              </a:p>
+              <a:p>
+                <a:endParaRPr lang="en-US" dirty="0"/>
+              </a:p>
+              <a:p>
+                <a:endParaRPr lang="en-US" dirty="0"/>
+              </a:p>
+            </p:txBody>
+          </p:sp>
+        </mc:Choice>
+        <mc:Fallback>
+          <p:sp>
+            <p:nvSpPr>
+              <p:cNvPr id="3" name="Content Placeholder 2">
+                <a:extLst>
+                  <a:ext uri="{FF2B5EF4-FFF2-40B4-BE49-F238E27FC236}">
+                    <a16:creationId xmlns:a16="http://schemas.microsoft.com/office/drawing/2014/main" id="{B475FFE3-D627-63D4-4E57-5DE63F6C2754}"/>
+                  </a:ext>
+                </a:extLst>
+              </p:cNvPr>
+              <p:cNvSpPr>
+                <a:spLocks noGrp="1" noRot="1" noChangeAspect="1" noMove="1" noResize="1" noEditPoints="1" noAdjustHandles="1" noChangeArrowheads="1" noChangeShapeType="1" noTextEdit="1"/>
+              </p:cNvSpPr>
+              <p:nvPr>
+                <p:ph idx="1"/>
+              </p:nvPr>
+            </p:nvSpPr>
+            <p:spPr>
+              <a:blipFill>
+                <a:blip r:embed="rId2"/>
+                <a:stretch>
+                  <a:fillRect l="-1043" t="-2381"/>
+                </a:stretch>
+              </a:blipFill>
+            </p:spPr>
+            <p:txBody>
+              <a:bodyPr/>
+              <a:lstStyle/>
+              <a:p>
+                <a:r>
+                  <a:rPr lang="en-US">
+                    <a:noFill/>
+                  </a:rPr>
+                  <a:t> </a:t>
+                </a:r>
+              </a:p>
+            </p:txBody>
+          </p:sp>
+        </mc:Fallback>
+      </mc:AlternateContent>
+    </p:spTree>
+    <p:extLst>
+      <p:ext uri="{BB962C8B-B14F-4D97-AF65-F5344CB8AC3E}">
+        <p14:creationId xmlns:p14="http://schemas.microsoft.com/office/powerpoint/2010/main" val="509732493"/>
+      </p:ext>
+    </p:extLst>
+  </p:cSld>
+  <p:clrMapOvr>
+    <a:masterClrMapping/>
+  </p:clrMapOvr>
+</p:sld>
+</file>
+
+<file path=ppt/slides/slide83.xml><?xml version="1.0" encoding="utf-8"?>
+<p:sld xmlns:a="http://schemas.openxmlformats.org/drawingml/2006/main" xmlns:r="http://schemas.openxmlformats.org/officeDocument/2006/relationships" xmlns:p="http://schemas.openxmlformats.org/presentationml/2006/main">
+  <p:cSld>
+    <p:spTree>
+      <p:nvGrpSpPr>
+        <p:cNvPr id="1" name=""/>
+        <p:cNvGrpSpPr/>
+        <p:nvPr/>
+      </p:nvGrpSpPr>
+      <p:grpSpPr>
+        <a:xfrm>
+          <a:off x="0" y="0"/>
+          <a:ext cx="0" cy="0"/>
+          <a:chOff x="0" y="0"/>
+          <a:chExt cx="0" cy="0"/>
+        </a:xfrm>
+      </p:grpSpPr>
+      <p:sp>
+        <p:nvSpPr>
+          <p:cNvPr id="2" name="Title 1">
+            <a:extLst>
+              <a:ext uri="{FF2B5EF4-FFF2-40B4-BE49-F238E27FC236}">
+                <a16:creationId xmlns:a16="http://schemas.microsoft.com/office/drawing/2014/main" id="{075E7EA4-5E46-1419-52D3-511DA43F8696}"/>
+              </a:ext>
+            </a:extLst>
+          </p:cNvPr>
+          <p:cNvSpPr>
+            <a:spLocks noGrp="1"/>
+          </p:cNvSpPr>
+          <p:nvPr>
+            <p:ph type="title"/>
+          </p:nvPr>
+        </p:nvSpPr>
+        <p:spPr/>
+        <p:txBody>
+          <a:bodyPr/>
+          <a:lstStyle/>
+          <a:p>
+            <a:r>
+              <a:rPr lang="en-US" dirty="0"/>
+              <a:t>Expressions: </a:t>
+            </a:r>
+            <a:r>
+              <a:rPr lang="en-US" dirty="0" err="1"/>
+              <a:t>Soln</a:t>
+            </a:r>
+            <a:r>
+              <a:rPr lang="en-US" dirty="0"/>
+              <a:t> 5,6</a:t>
+            </a:r>
+          </a:p>
+        </p:txBody>
+      </p:sp>
+      <mc:AlternateContent xmlns:mc="http://schemas.openxmlformats.org/markup-compatibility/2006">
+        <mc:Choice xmlns:a14="http://schemas.microsoft.com/office/drawing/2010/main" Requires="a14">
+          <p:sp>
+            <p:nvSpPr>
+              <p:cNvPr id="3" name="Content Placeholder 2">
+                <a:extLst>
+                  <a:ext uri="{FF2B5EF4-FFF2-40B4-BE49-F238E27FC236}">
+                    <a16:creationId xmlns:a16="http://schemas.microsoft.com/office/drawing/2014/main" id="{189D5AC8-32D5-9E48-B6EB-F9B294EA540A}"/>
+                  </a:ext>
+                </a:extLst>
+              </p:cNvPr>
+              <p:cNvSpPr>
+                <a:spLocks noGrp="1"/>
+              </p:cNvSpPr>
+              <p:nvPr>
+                <p:ph idx="1"/>
+              </p:nvPr>
+            </p:nvSpPr>
+            <p:spPr/>
+            <p:txBody>
+              <a:bodyPr/>
+              <a:lstStyle/>
+              <a:p>
+                <a:pPr marL="914400" lvl="1" indent="-457200">
+                  <a:buFont typeface="+mj-lt"/>
+                  <a:buAutoNum type="arabicPeriod" startAt="5"/>
+                </a:pPr>
+                <a14:m>
+                  <m:oMath xmlns:m="http://schemas.openxmlformats.org/officeDocument/2006/math">
+                    <m:d>
+                      <m:dPr>
+                        <m:ctrlPr>
+                          <a:rPr lang="en-US" i="1" smtClean="0">
+                            <a:latin typeface="Cambria Math" panose="02040503050406030204" pitchFamily="18" charset="0"/>
+                          </a:rPr>
+                        </m:ctrlPr>
+                      </m:dPr>
+                      <m:e>
+                        <m:r>
+                          <a:rPr lang="en-US" i="1" smtClean="0">
+                            <a:latin typeface="Cambria Math" panose="02040503050406030204" pitchFamily="18" charset="0"/>
+                          </a:rPr>
+                          <m:t>𝐴</m:t>
+                        </m:r>
+                        <m:r>
+                          <a:rPr lang="en-US" i="1" smtClean="0">
+                            <a:latin typeface="Cambria Math" panose="02040503050406030204" pitchFamily="18" charset="0"/>
+                          </a:rPr>
+                          <m:t>+</m:t>
+                        </m:r>
+                        <m:r>
+                          <a:rPr lang="en-US" i="1" smtClean="0">
+                            <a:latin typeface="Cambria Math" panose="02040503050406030204" pitchFamily="18" charset="0"/>
+                          </a:rPr>
+                          <m:t>𝐵</m:t>
+                        </m:r>
+                      </m:e>
+                    </m:d>
+                    <m:r>
+                      <a:rPr lang="en-US" i="1" smtClean="0">
+                        <a:latin typeface="Cambria Math" panose="02040503050406030204" pitchFamily="18" charset="0"/>
+                      </a:rPr>
+                      <m:t>.</m:t>
+                    </m:r>
+                    <m:d>
+                      <m:dPr>
+                        <m:ctrlPr>
+                          <a:rPr lang="en-US" i="1" smtClean="0">
+                            <a:latin typeface="Cambria Math" panose="02040503050406030204" pitchFamily="18" charset="0"/>
+                          </a:rPr>
+                        </m:ctrlPr>
+                      </m:dPr>
+                      <m:e>
+                        <m:r>
+                          <a:rPr lang="en-US" i="1" smtClean="0">
+                            <a:latin typeface="Cambria Math" panose="02040503050406030204" pitchFamily="18" charset="0"/>
+                          </a:rPr>
+                          <m:t>𝐴</m:t>
+                        </m:r>
+                        <m:r>
+                          <a:rPr lang="en-US" i="1" smtClean="0">
+                            <a:latin typeface="Cambria Math" panose="02040503050406030204" pitchFamily="18" charset="0"/>
+                          </a:rPr>
+                          <m:t>+</m:t>
+                        </m:r>
+                        <m:acc>
+                          <m:accPr>
+                            <m:chr m:val="̅"/>
+                            <m:ctrlPr>
+                              <a:rPr lang="en-US" i="1">
+                                <a:latin typeface="Cambria Math" panose="02040503050406030204" pitchFamily="18" charset="0"/>
+                              </a:rPr>
+                            </m:ctrlPr>
+                          </m:accPr>
+                          <m:e>
+                            <m:r>
+                              <a:rPr lang="en-US" i="1" smtClean="0">
+                                <a:latin typeface="Cambria Math" panose="02040503050406030204" pitchFamily="18" charset="0"/>
+                              </a:rPr>
+                              <m:t>𝐵</m:t>
+                            </m:r>
+                          </m:e>
+                        </m:acc>
+                      </m:e>
+                    </m:d>
+                    <m:r>
+                      <a:rPr lang="en-US" i="1" smtClean="0">
+                        <a:latin typeface="Cambria Math" panose="02040503050406030204" pitchFamily="18" charset="0"/>
+                      </a:rPr>
+                      <m:t>.</m:t>
+                    </m:r>
+                    <m:d>
+                      <m:dPr>
+                        <m:ctrlPr>
+                          <a:rPr lang="en-US" i="1">
+                            <a:latin typeface="Cambria Math" panose="02040503050406030204" pitchFamily="18" charset="0"/>
+                          </a:rPr>
+                        </m:ctrlPr>
+                      </m:dPr>
+                      <m:e>
+                        <m:acc>
+                          <m:accPr>
+                            <m:chr m:val="̅"/>
+                            <m:ctrlPr>
+                              <a:rPr lang="en-US" i="1">
+                                <a:latin typeface="Cambria Math" panose="02040503050406030204" pitchFamily="18" charset="0"/>
+                              </a:rPr>
+                            </m:ctrlPr>
+                          </m:accPr>
+                          <m:e>
+                            <m:r>
+                              <a:rPr lang="en-US" i="1" smtClean="0">
+                                <a:latin typeface="Cambria Math" panose="02040503050406030204" pitchFamily="18" charset="0"/>
+                              </a:rPr>
+                              <m:t>𝐴</m:t>
+                            </m:r>
+                          </m:e>
+                        </m:acc>
+                        <m:r>
+                          <a:rPr lang="en-US" i="1" smtClean="0">
+                            <a:latin typeface="Cambria Math" panose="02040503050406030204" pitchFamily="18" charset="0"/>
+                          </a:rPr>
+                          <m:t>+</m:t>
+                        </m:r>
+                        <m:r>
+                          <a:rPr lang="en-US" i="1" smtClean="0">
+                            <a:latin typeface="Cambria Math" panose="02040503050406030204" pitchFamily="18" charset="0"/>
+                          </a:rPr>
+                          <m:t>𝐵</m:t>
+                        </m:r>
+                      </m:e>
+                    </m:d>
+                    <m:r>
+                      <a:rPr lang="en-US" i="1" smtClean="0">
+                        <a:latin typeface="Cambria Math" panose="02040503050406030204" pitchFamily="18" charset="0"/>
+                      </a:rPr>
+                      <m:t>= </m:t>
+                    </m:r>
+                  </m:oMath>
+                </a14:m>
+                <a:r>
+                  <a:rPr lang="en-US" i="1" dirty="0">
+                    <a:latin typeface="Cambria Math" panose="02040503050406030204" pitchFamily="18" charset="0"/>
+                  </a:rPr>
+                  <a:t>AB</a:t>
+                </a:r>
+              </a:p>
+              <a:p>
+                <a:pPr lvl="2"/>
+                <a:r>
+                  <a:rPr lang="en-US" dirty="0">
+                    <a:sym typeface="Wingdings" panose="05000000000000000000" pitchFamily="2" charset="2"/>
+                  </a:rPr>
+                  <a:t> </a:t>
+                </a:r>
+                <a14:m>
+                  <m:oMath xmlns:m="http://schemas.openxmlformats.org/officeDocument/2006/math">
+                    <m:d>
+                      <m:dPr>
+                        <m:ctrlPr>
+                          <a:rPr lang="en-US" i="1" smtClean="0">
+                            <a:latin typeface="Cambria Math" panose="02040503050406030204" pitchFamily="18" charset="0"/>
+                          </a:rPr>
+                        </m:ctrlPr>
+                      </m:dPr>
+                      <m:e>
+                        <m:r>
+                          <a:rPr lang="en-US" i="1" smtClean="0">
+                            <a:latin typeface="Cambria Math" panose="02040503050406030204" pitchFamily="18" charset="0"/>
+                          </a:rPr>
+                          <m:t>𝐴</m:t>
+                        </m:r>
+                        <m:r>
+                          <a:rPr lang="en-US" i="1" smtClean="0">
+                            <a:latin typeface="Cambria Math" panose="02040503050406030204" pitchFamily="18" charset="0"/>
+                          </a:rPr>
+                          <m:t>+</m:t>
+                        </m:r>
+                        <m:r>
+                          <a:rPr lang="en-US" i="1" smtClean="0">
+                            <a:latin typeface="Cambria Math" panose="02040503050406030204" pitchFamily="18" charset="0"/>
+                          </a:rPr>
+                          <m:t>𝐵</m:t>
+                        </m:r>
+                        <m:r>
+                          <a:rPr lang="en-US" b="0" i="1" smtClean="0">
+                            <a:latin typeface="Cambria Math" panose="02040503050406030204" pitchFamily="18" charset="0"/>
+                          </a:rPr>
+                          <m:t>.</m:t>
+                        </m:r>
+                        <m:acc>
+                          <m:accPr>
+                            <m:chr m:val="̅"/>
+                            <m:ctrlPr>
+                              <a:rPr lang="en-US" i="1">
+                                <a:latin typeface="Cambria Math" panose="02040503050406030204" pitchFamily="18" charset="0"/>
+                              </a:rPr>
+                            </m:ctrlPr>
+                          </m:accPr>
+                          <m:e>
+                            <m:r>
+                              <a:rPr lang="en-US" i="1">
+                                <a:latin typeface="Cambria Math" panose="02040503050406030204" pitchFamily="18" charset="0"/>
+                              </a:rPr>
+                              <m:t>𝐵</m:t>
+                            </m:r>
+                          </m:e>
+                        </m:acc>
+                      </m:e>
+                    </m:d>
+                  </m:oMath>
+                </a14:m>
+                <a:r>
+                  <a:rPr lang="en-US" i="1" dirty="0">
+                    <a:latin typeface="Cambria Math" panose="02040503050406030204" pitchFamily="18" charset="0"/>
+                  </a:rPr>
+                  <a:t>. </a:t>
+                </a:r>
+                <a14:m>
+                  <m:oMath xmlns:m="http://schemas.openxmlformats.org/officeDocument/2006/math">
+                    <m:d>
+                      <m:dPr>
+                        <m:ctrlPr>
+                          <a:rPr lang="en-US" i="1">
+                            <a:latin typeface="Cambria Math" panose="02040503050406030204" pitchFamily="18" charset="0"/>
+                          </a:rPr>
+                        </m:ctrlPr>
+                      </m:dPr>
+                      <m:e>
+                        <m:acc>
+                          <m:accPr>
+                            <m:chr m:val="̅"/>
+                            <m:ctrlPr>
+                              <a:rPr lang="en-US" i="1">
+                                <a:latin typeface="Cambria Math" panose="02040503050406030204" pitchFamily="18" charset="0"/>
+                              </a:rPr>
+                            </m:ctrlPr>
+                          </m:accPr>
+                          <m:e>
+                            <m:r>
+                              <a:rPr lang="en-US" i="1">
+                                <a:latin typeface="Cambria Math" panose="02040503050406030204" pitchFamily="18" charset="0"/>
+                              </a:rPr>
+                              <m:t>𝐴</m:t>
+                            </m:r>
+                          </m:e>
+                        </m:acc>
+                        <m:r>
+                          <a:rPr lang="en-US" i="1">
+                            <a:latin typeface="Cambria Math" panose="02040503050406030204" pitchFamily="18" charset="0"/>
+                          </a:rPr>
+                          <m:t>+</m:t>
+                        </m:r>
+                        <m:r>
+                          <a:rPr lang="en-US" i="1">
+                            <a:latin typeface="Cambria Math" panose="02040503050406030204" pitchFamily="18" charset="0"/>
+                          </a:rPr>
+                          <m:t>𝐵</m:t>
+                        </m:r>
+                      </m:e>
+                    </m:d>
+                    <m:r>
+                      <a:rPr lang="en-US" b="0" i="1" smtClean="0">
+                        <a:latin typeface="Cambria Math" panose="02040503050406030204" pitchFamily="18" charset="0"/>
+                      </a:rPr>
+                      <m:t> </m:t>
+                    </m:r>
+                  </m:oMath>
+                </a14:m>
+                <a:r>
+                  <a:rPr lang="en-US" dirty="0">
+                    <a:latin typeface="Cambria Math" panose="02040503050406030204" pitchFamily="18" charset="0"/>
+                  </a:rPr>
+                  <a:t>//See 4</a:t>
+                </a:r>
+              </a:p>
+              <a:p>
+                <a:pPr lvl="2"/>
+                <a:r>
+                  <a:rPr lang="en-US" dirty="0">
+                    <a:latin typeface="Cambria Math" panose="02040503050406030204" pitchFamily="18" charset="0"/>
+                    <a:sym typeface="Wingdings" panose="05000000000000000000" pitchFamily="2" charset="2"/>
+                  </a:rPr>
+                  <a:t> </a:t>
+                </a:r>
+                <a14:m>
+                  <m:oMath xmlns:m="http://schemas.openxmlformats.org/officeDocument/2006/math">
+                    <m:d>
+                      <m:dPr>
+                        <m:ctrlPr>
+                          <a:rPr lang="en-US" i="1" smtClean="0">
+                            <a:latin typeface="Cambria Math" panose="02040503050406030204" pitchFamily="18" charset="0"/>
+                          </a:rPr>
+                        </m:ctrlPr>
+                      </m:dPr>
+                      <m:e>
+                        <m:r>
+                          <a:rPr lang="en-US" b="0" i="1" smtClean="0">
+                            <a:latin typeface="Cambria Math" panose="02040503050406030204" pitchFamily="18" charset="0"/>
+                          </a:rPr>
+                          <m:t>𝐴</m:t>
+                        </m:r>
+                        <m:r>
+                          <a:rPr lang="en-US" i="1" smtClean="0">
+                            <a:latin typeface="Cambria Math" panose="02040503050406030204" pitchFamily="18" charset="0"/>
+                          </a:rPr>
+                          <m:t> </m:t>
+                        </m:r>
+                      </m:e>
+                    </m:d>
+                  </m:oMath>
+                </a14:m>
+                <a:r>
+                  <a:rPr lang="en-US" i="1" dirty="0">
+                    <a:latin typeface="Cambria Math" panose="02040503050406030204" pitchFamily="18" charset="0"/>
+                  </a:rPr>
+                  <a:t>. </a:t>
+                </a:r>
+                <a14:m>
+                  <m:oMath xmlns:m="http://schemas.openxmlformats.org/officeDocument/2006/math">
+                    <m:d>
+                      <m:dPr>
+                        <m:ctrlPr>
+                          <a:rPr lang="en-US" i="1">
+                            <a:latin typeface="Cambria Math" panose="02040503050406030204" pitchFamily="18" charset="0"/>
+                          </a:rPr>
+                        </m:ctrlPr>
+                      </m:dPr>
+                      <m:e>
+                        <m:acc>
+                          <m:accPr>
+                            <m:chr m:val="̅"/>
+                            <m:ctrlPr>
+                              <a:rPr lang="en-US" i="1">
+                                <a:latin typeface="Cambria Math" panose="02040503050406030204" pitchFamily="18" charset="0"/>
+                              </a:rPr>
+                            </m:ctrlPr>
+                          </m:accPr>
+                          <m:e>
+                            <m:r>
+                              <a:rPr lang="en-US" i="1">
+                                <a:latin typeface="Cambria Math" panose="02040503050406030204" pitchFamily="18" charset="0"/>
+                              </a:rPr>
+                              <m:t>𝐴</m:t>
+                            </m:r>
+                          </m:e>
+                        </m:acc>
+                        <m:r>
+                          <a:rPr lang="en-US" i="1">
+                            <a:latin typeface="Cambria Math" panose="02040503050406030204" pitchFamily="18" charset="0"/>
+                          </a:rPr>
+                          <m:t>+</m:t>
+                        </m:r>
+                        <m:r>
+                          <a:rPr lang="en-US" i="1">
+                            <a:latin typeface="Cambria Math" panose="02040503050406030204" pitchFamily="18" charset="0"/>
+                          </a:rPr>
+                          <m:t>𝐵</m:t>
+                        </m:r>
+                      </m:e>
+                    </m:d>
+                  </m:oMath>
+                </a14:m>
+                <a:r>
+                  <a:rPr lang="en-US" dirty="0">
+                    <a:latin typeface="Cambria Math" panose="02040503050406030204" pitchFamily="18" charset="0"/>
+                  </a:rPr>
+                  <a:t> </a:t>
+                </a:r>
+                <a:r>
+                  <a:rPr lang="en-US" dirty="0">
+                    <a:solidFill>
+                      <a:schemeClr val="accent6">
+                        <a:lumMod val="75000"/>
+                      </a:schemeClr>
+                    </a:solidFill>
+                    <a:latin typeface="Cambria Math" panose="02040503050406030204" pitchFamily="18" charset="0"/>
+                  </a:rPr>
+                  <a:t>//Complement Law</a:t>
+                </a:r>
+              </a:p>
+              <a:p>
+                <a:pPr lvl="2"/>
+                <a:r>
+                  <a:rPr lang="en-US" b="0" dirty="0">
+                    <a:sym typeface="Wingdings" panose="05000000000000000000" pitchFamily="2" charset="2"/>
+                  </a:rPr>
+                  <a:t></a:t>
+                </a:r>
+                <a:r>
+                  <a:rPr lang="en-US" b="0" dirty="0"/>
+                  <a:t> </a:t>
+                </a:r>
+                <a14:m>
+                  <m:oMath xmlns:m="http://schemas.openxmlformats.org/officeDocument/2006/math">
+                    <m:r>
+                      <a:rPr lang="en-US" b="0" i="1" smtClean="0">
+                        <a:latin typeface="Cambria Math" panose="02040503050406030204" pitchFamily="18" charset="0"/>
+                      </a:rPr>
+                      <m:t>𝐴</m:t>
+                    </m:r>
+                    <m:r>
+                      <a:rPr lang="en-US" b="0" i="1" smtClean="0">
+                        <a:latin typeface="Cambria Math" panose="02040503050406030204" pitchFamily="18" charset="0"/>
+                      </a:rPr>
+                      <m:t>.</m:t>
+                    </m:r>
+                    <m:acc>
+                      <m:accPr>
+                        <m:chr m:val="̅"/>
+                        <m:ctrlPr>
+                          <a:rPr lang="en-US" i="1" smtClean="0">
+                            <a:latin typeface="Cambria Math" panose="02040503050406030204" pitchFamily="18" charset="0"/>
+                          </a:rPr>
+                        </m:ctrlPr>
+                      </m:accPr>
+                      <m:e>
+                        <m:r>
+                          <a:rPr lang="en-US" i="1" smtClean="0">
+                            <a:latin typeface="Cambria Math" panose="02040503050406030204" pitchFamily="18" charset="0"/>
+                          </a:rPr>
+                          <m:t>𝐴</m:t>
+                        </m:r>
+                      </m:e>
+                    </m:acc>
+                    <m:r>
+                      <a:rPr lang="en-US" b="0" i="1" smtClean="0">
+                        <a:latin typeface="Cambria Math" panose="02040503050406030204" pitchFamily="18" charset="0"/>
+                      </a:rPr>
+                      <m:t> +</m:t>
+                    </m:r>
+                    <m:r>
+                      <a:rPr lang="en-US" b="0" i="1" smtClean="0">
+                        <a:latin typeface="Cambria Math" panose="02040503050406030204" pitchFamily="18" charset="0"/>
+                      </a:rPr>
+                      <m:t>𝐴</m:t>
+                    </m:r>
+                    <m:r>
+                      <a:rPr lang="en-US" b="0" i="1" smtClean="0">
+                        <a:latin typeface="Cambria Math" panose="02040503050406030204" pitchFamily="18" charset="0"/>
+                      </a:rPr>
+                      <m:t>.</m:t>
+                    </m:r>
+                    <m:r>
+                      <a:rPr lang="en-US" b="0" i="1" smtClean="0">
+                        <a:latin typeface="Cambria Math" panose="02040503050406030204" pitchFamily="18" charset="0"/>
+                      </a:rPr>
+                      <m:t>𝐵</m:t>
+                    </m:r>
+                  </m:oMath>
+                </a14:m>
+                <a:r>
+                  <a:rPr lang="en-US" i="1" dirty="0">
+                    <a:latin typeface="Cambria Math" panose="02040503050406030204" pitchFamily="18" charset="0"/>
+                  </a:rPr>
+                  <a:t> </a:t>
+                </a:r>
+                <a:r>
+                  <a:rPr lang="en-US" dirty="0">
+                    <a:solidFill>
+                      <a:schemeClr val="accent6">
+                        <a:lumMod val="75000"/>
+                      </a:schemeClr>
+                    </a:solidFill>
+                    <a:latin typeface="Cambria Math" panose="02040503050406030204" pitchFamily="18" charset="0"/>
+                  </a:rPr>
+                  <a:t>//Distribution Law</a:t>
+                </a:r>
+              </a:p>
+              <a:p>
+                <a:pPr lvl="2"/>
+                <a:r>
+                  <a:rPr lang="en-US" b="0" dirty="0">
+                    <a:sym typeface="Wingdings" panose="05000000000000000000" pitchFamily="2" charset="2"/>
+                  </a:rPr>
+                  <a:t> </a:t>
+                </a:r>
+                <a14:m>
+                  <m:oMath xmlns:m="http://schemas.openxmlformats.org/officeDocument/2006/math">
+                    <m:r>
+                      <a:rPr lang="en-US" b="0" i="1" smtClean="0">
+                        <a:latin typeface="Cambria Math" panose="02040503050406030204" pitchFamily="18" charset="0"/>
+                      </a:rPr>
+                      <m:t>𝐴</m:t>
+                    </m:r>
+                    <m:r>
+                      <a:rPr lang="en-US" b="0" i="1" smtClean="0">
+                        <a:latin typeface="Cambria Math" panose="02040503050406030204" pitchFamily="18" charset="0"/>
+                      </a:rPr>
+                      <m:t>.</m:t>
+                    </m:r>
+                    <m:r>
+                      <a:rPr lang="en-US" b="0" i="1" smtClean="0">
+                        <a:latin typeface="Cambria Math" panose="02040503050406030204" pitchFamily="18" charset="0"/>
+                      </a:rPr>
+                      <m:t>𝐵</m:t>
+                    </m:r>
+                  </m:oMath>
+                </a14:m>
+                <a:r>
+                  <a:rPr lang="en-US" i="1" dirty="0">
+                    <a:latin typeface="Cambria Math" panose="02040503050406030204" pitchFamily="18" charset="0"/>
+                  </a:rPr>
+                  <a:t> </a:t>
+                </a:r>
+                <a:r>
+                  <a:rPr lang="en-US" dirty="0">
+                    <a:solidFill>
+                      <a:schemeClr val="accent6">
+                        <a:lumMod val="75000"/>
+                      </a:schemeClr>
+                    </a:solidFill>
+                    <a:latin typeface="Cambria Math" panose="02040503050406030204" pitchFamily="18" charset="0"/>
+                  </a:rPr>
+                  <a:t>//Complement Law</a:t>
+                </a:r>
+              </a:p>
+              <a:p>
+                <a:pPr marL="914400" lvl="1" indent="-457200">
+                  <a:buFont typeface="+mj-lt"/>
+                  <a:buAutoNum type="arabicPeriod" startAt="5"/>
+                </a:pPr>
+                <a14:m>
+                  <m:oMath xmlns:m="http://schemas.openxmlformats.org/officeDocument/2006/math">
+                    <m:acc>
+                      <m:accPr>
+                        <m:chr m:val="̅"/>
+                        <m:ctrlPr>
+                          <a:rPr lang="en-US" i="1" smtClean="0">
+                            <a:latin typeface="Cambria Math" panose="02040503050406030204" pitchFamily="18" charset="0"/>
+                          </a:rPr>
+                        </m:ctrlPr>
+                      </m:accPr>
+                      <m:e>
+                        <m:r>
+                          <a:rPr lang="en-US" i="1" smtClean="0">
+                            <a:latin typeface="Cambria Math" panose="02040503050406030204" pitchFamily="18" charset="0"/>
+                          </a:rPr>
+                          <m:t>𝐴</m:t>
+                        </m:r>
+                        <m:r>
+                          <a:rPr lang="en-US" i="1" smtClean="0">
+                            <a:latin typeface="Cambria Math" panose="02040503050406030204" pitchFamily="18" charset="0"/>
+                          </a:rPr>
+                          <m:t>+</m:t>
+                        </m:r>
+                        <m:r>
+                          <a:rPr lang="en-US" i="1" smtClean="0">
+                            <a:latin typeface="Cambria Math" panose="02040503050406030204" pitchFamily="18" charset="0"/>
+                          </a:rPr>
+                          <m:t>𝐵</m:t>
+                        </m:r>
+                      </m:e>
+                    </m:acc>
+                    <m:r>
+                      <a:rPr lang="en-US" i="1" smtClean="0">
+                        <a:latin typeface="Cambria Math" panose="02040503050406030204" pitchFamily="18" charset="0"/>
+                      </a:rPr>
+                      <m:t>+</m:t>
+                    </m:r>
+                    <m:r>
+                      <a:rPr lang="en-US" i="1" smtClean="0">
+                        <a:latin typeface="Cambria Math" panose="02040503050406030204" pitchFamily="18" charset="0"/>
+                      </a:rPr>
+                      <m:t>𝐴</m:t>
+                    </m:r>
+                    <m:r>
+                      <a:rPr lang="en-US" i="1" smtClean="0">
+                        <a:latin typeface="Cambria Math" panose="02040503050406030204" pitchFamily="18" charset="0"/>
+                      </a:rPr>
+                      <m:t>. </m:t>
+                    </m:r>
+                    <m:acc>
+                      <m:accPr>
+                        <m:chr m:val="̅"/>
+                        <m:ctrlPr>
+                          <a:rPr lang="en-US" i="1">
+                            <a:latin typeface="Cambria Math" panose="02040503050406030204" pitchFamily="18" charset="0"/>
+                          </a:rPr>
+                        </m:ctrlPr>
+                      </m:accPr>
+                      <m:e>
+                        <m:r>
+                          <a:rPr lang="en-US" i="1" smtClean="0">
+                            <a:latin typeface="Cambria Math" panose="02040503050406030204" pitchFamily="18" charset="0"/>
+                          </a:rPr>
+                          <m:t>𝐵</m:t>
+                        </m:r>
+                      </m:e>
+                    </m:acc>
+                    <m:r>
+                      <a:rPr lang="en-US" i="1" smtClean="0">
+                        <a:latin typeface="Cambria Math" panose="02040503050406030204" pitchFamily="18" charset="0"/>
+                      </a:rPr>
+                      <m:t>=</m:t>
+                    </m:r>
+                    <m:acc>
+                      <m:accPr>
+                        <m:chr m:val="̅"/>
+                        <m:ctrlPr>
+                          <a:rPr lang="en-US" i="1">
+                            <a:latin typeface="Cambria Math" panose="02040503050406030204" pitchFamily="18" charset="0"/>
+                          </a:rPr>
+                        </m:ctrlPr>
+                      </m:accPr>
+                      <m:e>
+                        <m:r>
+                          <a:rPr lang="en-US" i="1">
+                            <a:latin typeface="Cambria Math" panose="02040503050406030204" pitchFamily="18" charset="0"/>
+                          </a:rPr>
+                          <m:t>𝐵</m:t>
+                        </m:r>
+                      </m:e>
+                    </m:acc>
+                  </m:oMath>
+                </a14:m>
+                <a:r>
+                  <a:rPr lang="en-US" i="1" dirty="0">
+                    <a:latin typeface="Cambria Math" panose="02040503050406030204" pitchFamily="18" charset="0"/>
+                  </a:rPr>
+                  <a:t> </a:t>
+                </a:r>
+              </a:p>
+              <a:p>
+                <a:pPr marL="1371600" lvl="2" indent="-457200">
+                  <a:buFont typeface="+mj-lt"/>
+                  <a:buAutoNum type="arabicPeriod" startAt="5"/>
+                </a:pPr>
+                <a14:m>
+                  <m:oMath xmlns:m="http://schemas.openxmlformats.org/officeDocument/2006/math">
+                    <m:acc>
+                      <m:accPr>
+                        <m:chr m:val="̅"/>
+                        <m:ctrlPr>
+                          <a:rPr lang="en-US" i="1" smtClean="0">
+                            <a:latin typeface="Cambria Math" panose="02040503050406030204" pitchFamily="18" charset="0"/>
+                          </a:rPr>
+                        </m:ctrlPr>
+                      </m:accPr>
+                      <m:e>
+                        <m:r>
+                          <a:rPr lang="en-US" i="1" smtClean="0">
+                            <a:latin typeface="Cambria Math" panose="02040503050406030204" pitchFamily="18" charset="0"/>
+                          </a:rPr>
+                          <m:t>𝐴</m:t>
+                        </m:r>
+                      </m:e>
+                    </m:acc>
+                    <m:r>
+                      <a:rPr lang="en-US" b="0" i="1" smtClean="0">
+                        <a:latin typeface="Cambria Math" panose="02040503050406030204" pitchFamily="18" charset="0"/>
+                      </a:rPr>
+                      <m:t>.</m:t>
+                    </m:r>
+                    <m:acc>
+                      <m:accPr>
+                        <m:chr m:val="̅"/>
+                        <m:ctrlPr>
+                          <a:rPr lang="en-US" i="1">
+                            <a:latin typeface="Cambria Math" panose="02040503050406030204" pitchFamily="18" charset="0"/>
+                          </a:rPr>
+                        </m:ctrlPr>
+                      </m:accPr>
+                      <m:e>
+                        <m:r>
+                          <a:rPr lang="en-US" i="1">
+                            <a:latin typeface="Cambria Math" panose="02040503050406030204" pitchFamily="18" charset="0"/>
+                          </a:rPr>
+                          <m:t>𝐵</m:t>
+                        </m:r>
+                      </m:e>
+                    </m:acc>
+                  </m:oMath>
+                </a14:m>
+                <a:r>
+                  <a:rPr lang="en-US" i="1" dirty="0">
+                    <a:latin typeface="Cambria Math" panose="02040503050406030204" pitchFamily="18" charset="0"/>
+                  </a:rPr>
+                  <a:t> </a:t>
+                </a:r>
+                <a14:m>
+                  <m:oMath xmlns:m="http://schemas.openxmlformats.org/officeDocument/2006/math">
+                    <m:r>
+                      <a:rPr lang="en-US" i="1">
+                        <a:latin typeface="Cambria Math" panose="02040503050406030204" pitchFamily="18" charset="0"/>
+                      </a:rPr>
+                      <m:t>+</m:t>
+                    </m:r>
+                    <m:r>
+                      <a:rPr lang="en-US" i="1">
+                        <a:latin typeface="Cambria Math" panose="02040503050406030204" pitchFamily="18" charset="0"/>
+                      </a:rPr>
+                      <m:t>𝐴</m:t>
+                    </m:r>
+                    <m:r>
+                      <a:rPr lang="en-US" i="1">
+                        <a:latin typeface="Cambria Math" panose="02040503050406030204" pitchFamily="18" charset="0"/>
+                      </a:rPr>
+                      <m:t>. </m:t>
+                    </m:r>
+                    <m:acc>
+                      <m:accPr>
+                        <m:chr m:val="̅"/>
+                        <m:ctrlPr>
+                          <a:rPr lang="en-US" i="1">
+                            <a:latin typeface="Cambria Math" panose="02040503050406030204" pitchFamily="18" charset="0"/>
+                          </a:rPr>
+                        </m:ctrlPr>
+                      </m:accPr>
+                      <m:e>
+                        <m:r>
+                          <a:rPr lang="en-US" i="1">
+                            <a:latin typeface="Cambria Math" panose="02040503050406030204" pitchFamily="18" charset="0"/>
+                          </a:rPr>
+                          <m:t>𝐵</m:t>
+                        </m:r>
+                      </m:e>
+                    </m:acc>
+                  </m:oMath>
+                </a14:m>
+                <a:r>
+                  <a:rPr lang="en-US" i="1" dirty="0">
+                    <a:latin typeface="Cambria Math" panose="02040503050406030204" pitchFamily="18" charset="0"/>
+                  </a:rPr>
+                  <a:t>  </a:t>
+                </a:r>
+                <a:r>
+                  <a:rPr lang="en-US" dirty="0">
+                    <a:solidFill>
+                      <a:schemeClr val="accent6">
+                        <a:lumMod val="75000"/>
+                      </a:schemeClr>
+                    </a:solidFill>
+                    <a:latin typeface="Cambria Math" panose="02040503050406030204" pitchFamily="18" charset="0"/>
+                  </a:rPr>
+                  <a:t>//De-Morgan’s Law</a:t>
+                </a:r>
+              </a:p>
+              <a:p>
+                <a:pPr marL="1371600" lvl="2" indent="-457200">
+                  <a:buFont typeface="+mj-lt"/>
+                  <a:buAutoNum type="arabicPeriod" startAt="5"/>
+                </a:pPr>
+                <a14:m>
+                  <m:oMath xmlns:m="http://schemas.openxmlformats.org/officeDocument/2006/math">
+                    <m:d>
+                      <m:dPr>
+                        <m:ctrlPr>
+                          <a:rPr lang="en-US" i="1" smtClean="0">
+                            <a:latin typeface="Cambria Math" panose="02040503050406030204" pitchFamily="18" charset="0"/>
+                          </a:rPr>
+                        </m:ctrlPr>
+                      </m:dPr>
+                      <m:e>
+                        <m:acc>
+                          <m:accPr>
+                            <m:chr m:val="̅"/>
+                            <m:ctrlPr>
+                              <a:rPr lang="en-US" i="1">
+                                <a:latin typeface="Cambria Math" panose="02040503050406030204" pitchFamily="18" charset="0"/>
+                              </a:rPr>
+                            </m:ctrlPr>
+                          </m:accPr>
+                          <m:e>
+                            <m:r>
+                              <a:rPr lang="en-US" i="1" smtClean="0">
+                                <a:latin typeface="Cambria Math" panose="02040503050406030204" pitchFamily="18" charset="0"/>
+                              </a:rPr>
+                              <m:t>𝐴</m:t>
+                            </m:r>
+                          </m:e>
+                        </m:acc>
+                        <m:r>
+                          <a:rPr lang="en-US" i="1" smtClean="0">
+                            <a:latin typeface="Cambria Math" panose="02040503050406030204" pitchFamily="18" charset="0"/>
+                          </a:rPr>
+                          <m:t>+</m:t>
+                        </m:r>
+                        <m:r>
+                          <a:rPr lang="en-US" b="0" i="1" smtClean="0">
+                            <a:latin typeface="Cambria Math" panose="02040503050406030204" pitchFamily="18" charset="0"/>
+                          </a:rPr>
+                          <m:t>𝐴</m:t>
+                        </m:r>
+                      </m:e>
+                    </m:d>
+                    <m:r>
+                      <a:rPr lang="en-US" b="0" i="1" smtClean="0">
+                        <a:latin typeface="Cambria Math" panose="02040503050406030204" pitchFamily="18" charset="0"/>
+                      </a:rPr>
+                      <m:t>.</m:t>
+                    </m:r>
+                    <m:acc>
+                      <m:accPr>
+                        <m:chr m:val="̅"/>
+                        <m:ctrlPr>
+                          <a:rPr lang="en-US" i="1">
+                            <a:latin typeface="Cambria Math" panose="02040503050406030204" pitchFamily="18" charset="0"/>
+                          </a:rPr>
+                        </m:ctrlPr>
+                      </m:accPr>
+                      <m:e>
+                        <m:r>
+                          <a:rPr lang="en-US" i="1">
+                            <a:latin typeface="Cambria Math" panose="02040503050406030204" pitchFamily="18" charset="0"/>
+                          </a:rPr>
+                          <m:t>𝐵</m:t>
+                        </m:r>
+                      </m:e>
+                    </m:acc>
+                  </m:oMath>
+                </a14:m>
+                <a:r>
+                  <a:rPr lang="en-US" dirty="0">
+                    <a:latin typeface="Cambria Math" panose="02040503050406030204" pitchFamily="18" charset="0"/>
+                  </a:rPr>
+                  <a:t> </a:t>
+                </a:r>
+                <a:r>
+                  <a:rPr lang="en-US" dirty="0">
+                    <a:solidFill>
+                      <a:schemeClr val="accent6">
+                        <a:lumMod val="75000"/>
+                      </a:schemeClr>
+                    </a:solidFill>
+                    <a:latin typeface="Cambria Math" panose="02040503050406030204" pitchFamily="18" charset="0"/>
+                  </a:rPr>
+                  <a:t>//Factor the like terms</a:t>
+                </a:r>
+              </a:p>
+              <a:p>
+                <a:pPr marL="1371600" lvl="2" indent="-457200">
+                  <a:buFont typeface="+mj-lt"/>
+                  <a:buAutoNum type="arabicPeriod" startAt="5"/>
+                </a:pPr>
+                <a14:m>
+                  <m:oMath xmlns:m="http://schemas.openxmlformats.org/officeDocument/2006/math">
+                    <m:acc>
+                      <m:accPr>
+                        <m:chr m:val="̅"/>
+                        <m:ctrlPr>
+                          <a:rPr lang="en-US" i="1" smtClean="0">
+                            <a:latin typeface="Cambria Math" panose="02040503050406030204" pitchFamily="18" charset="0"/>
+                          </a:rPr>
+                        </m:ctrlPr>
+                      </m:accPr>
+                      <m:e>
+                        <m:r>
+                          <a:rPr lang="en-US" i="1">
+                            <a:latin typeface="Cambria Math" panose="02040503050406030204" pitchFamily="18" charset="0"/>
+                          </a:rPr>
+                          <m:t>𝐵</m:t>
+                        </m:r>
+                      </m:e>
+                    </m:acc>
+                  </m:oMath>
+                </a14:m>
+                <a:r>
+                  <a:rPr lang="en-US" dirty="0">
+                    <a:latin typeface="Cambria Math" panose="02040503050406030204" pitchFamily="18" charset="0"/>
+                  </a:rPr>
+                  <a:t> </a:t>
+                </a:r>
+                <a:r>
+                  <a:rPr lang="en-US" dirty="0">
+                    <a:solidFill>
+                      <a:schemeClr val="accent6">
+                        <a:lumMod val="75000"/>
+                      </a:schemeClr>
+                    </a:solidFill>
+                    <a:latin typeface="Cambria Math" panose="02040503050406030204" pitchFamily="18" charset="0"/>
+                  </a:rPr>
+                  <a:t>//Identity Law</a:t>
+                </a:r>
+              </a:p>
+              <a:p>
+                <a:pPr marL="914400" lvl="1" indent="-457200">
+                  <a:buFont typeface="+mj-lt"/>
+                  <a:buAutoNum type="arabicPeriod" startAt="5"/>
+                </a:pPr>
+                <a14:m>
+                  <m:oMath xmlns:m="http://schemas.openxmlformats.org/officeDocument/2006/math">
+                    <m:d>
+                      <m:dPr>
+                        <m:ctrlPr>
+                          <a:rPr lang="en-US" i="1" smtClean="0">
+                            <a:latin typeface="Cambria Math" panose="02040503050406030204" pitchFamily="18" charset="0"/>
+                          </a:rPr>
+                        </m:ctrlPr>
+                      </m:dPr>
+                      <m:e>
+                        <m:r>
+                          <a:rPr lang="en-US" i="1" smtClean="0">
+                            <a:latin typeface="Cambria Math" panose="02040503050406030204" pitchFamily="18" charset="0"/>
+                          </a:rPr>
+                          <m:t>𝐴</m:t>
+                        </m:r>
+                        <m:r>
+                          <a:rPr lang="en-US" i="1" smtClean="0">
+                            <a:latin typeface="Cambria Math" panose="02040503050406030204" pitchFamily="18" charset="0"/>
+                          </a:rPr>
+                          <m:t>+</m:t>
+                        </m:r>
+                        <m:r>
+                          <a:rPr lang="en-US" i="1" smtClean="0">
+                            <a:latin typeface="Cambria Math" panose="02040503050406030204" pitchFamily="18" charset="0"/>
+                          </a:rPr>
+                          <m:t>𝐵</m:t>
+                        </m:r>
+                        <m:r>
+                          <a:rPr lang="en-US" i="1" smtClean="0">
+                            <a:latin typeface="Cambria Math" panose="02040503050406030204" pitchFamily="18" charset="0"/>
+                          </a:rPr>
+                          <m:t>+</m:t>
+                        </m:r>
+                        <m:r>
+                          <a:rPr lang="en-US" i="1" smtClean="0">
+                            <a:latin typeface="Cambria Math" panose="02040503050406030204" pitchFamily="18" charset="0"/>
+                          </a:rPr>
+                          <m:t>𝐶</m:t>
+                        </m:r>
+                      </m:e>
+                    </m:d>
+                    <m:r>
+                      <a:rPr lang="en-US" i="1" smtClean="0">
+                        <a:latin typeface="Cambria Math" panose="02040503050406030204" pitchFamily="18" charset="0"/>
+                      </a:rPr>
+                      <m:t>.</m:t>
+                    </m:r>
+                    <m:d>
+                      <m:dPr>
+                        <m:ctrlPr>
+                          <a:rPr lang="en-US" i="1">
+                            <a:latin typeface="Cambria Math" panose="02040503050406030204" pitchFamily="18" charset="0"/>
+                          </a:rPr>
+                        </m:ctrlPr>
+                      </m:dPr>
+                      <m:e>
+                        <m:acc>
+                          <m:accPr>
+                            <m:chr m:val="̅"/>
+                            <m:ctrlPr>
+                              <a:rPr lang="en-US" i="1">
+                                <a:latin typeface="Cambria Math" panose="02040503050406030204" pitchFamily="18" charset="0"/>
+                              </a:rPr>
+                            </m:ctrlPr>
+                          </m:accPr>
+                          <m:e>
+                            <m:r>
+                              <a:rPr lang="en-US" i="1" smtClean="0">
+                                <a:latin typeface="Cambria Math" panose="02040503050406030204" pitchFamily="18" charset="0"/>
+                              </a:rPr>
+                              <m:t>𝐴</m:t>
+                            </m:r>
+                          </m:e>
+                        </m:acc>
+                        <m:r>
+                          <a:rPr lang="en-US" i="1" smtClean="0">
+                            <a:latin typeface="Cambria Math" panose="02040503050406030204" pitchFamily="18" charset="0"/>
+                          </a:rPr>
+                          <m:t>+</m:t>
+                        </m:r>
+                        <m:r>
+                          <a:rPr lang="en-US" i="1" smtClean="0">
+                            <a:latin typeface="Cambria Math" panose="02040503050406030204" pitchFamily="18" charset="0"/>
+                          </a:rPr>
+                          <m:t>𝐵</m:t>
+                        </m:r>
+                      </m:e>
+                    </m:d>
+                    <m:r>
+                      <a:rPr lang="en-US" i="1" smtClean="0">
+                        <a:latin typeface="Cambria Math" panose="02040503050406030204" pitchFamily="18" charset="0"/>
+                      </a:rPr>
+                      <m:t>.(</m:t>
+                    </m:r>
+                    <m:r>
+                      <a:rPr lang="en-US" i="1" smtClean="0">
+                        <a:latin typeface="Cambria Math" panose="02040503050406030204" pitchFamily="18" charset="0"/>
+                      </a:rPr>
+                      <m:t>𝐴</m:t>
+                    </m:r>
+                    <m:r>
+                      <a:rPr lang="en-US" i="1" smtClean="0">
+                        <a:latin typeface="Cambria Math" panose="02040503050406030204" pitchFamily="18" charset="0"/>
+                      </a:rPr>
+                      <m:t>+</m:t>
+                    </m:r>
+                    <m:acc>
+                      <m:accPr>
+                        <m:chr m:val="̅"/>
+                        <m:ctrlPr>
+                          <a:rPr lang="en-US" i="1" smtClean="0">
+                            <a:latin typeface="Cambria Math" panose="02040503050406030204" pitchFamily="18" charset="0"/>
+                          </a:rPr>
+                        </m:ctrlPr>
+                      </m:accPr>
+                      <m:e>
+                        <m:r>
+                          <a:rPr lang="en-US" i="1" smtClean="0">
+                            <a:latin typeface="Cambria Math" panose="02040503050406030204" pitchFamily="18" charset="0"/>
+                          </a:rPr>
+                          <m:t>𝐶</m:t>
+                        </m:r>
+                      </m:e>
+                    </m:acc>
+                  </m:oMath>
+                </a14:m>
+                <a:r>
+                  <a:rPr lang="en-US" i="1" dirty="0">
+                    <a:latin typeface="Cambria Math" panose="02040503050406030204" pitchFamily="18" charset="0"/>
+                  </a:rPr>
+                  <a:t>) = B.(A+</a:t>
+                </a:r>
+                <a:r>
+                  <a:rPr lang="en-US" dirty="0"/>
+                  <a:t> </a:t>
+                </a:r>
+                <a14:m>
+                  <m:oMath xmlns:m="http://schemas.openxmlformats.org/officeDocument/2006/math">
+                    <m:acc>
+                      <m:accPr>
+                        <m:chr m:val="̅"/>
+                        <m:ctrlPr>
+                          <a:rPr lang="en-US" i="1">
+                            <a:latin typeface="Cambria Math" panose="02040503050406030204" pitchFamily="18" charset="0"/>
+                          </a:rPr>
+                        </m:ctrlPr>
+                      </m:accPr>
+                      <m:e>
+                        <m:r>
+                          <a:rPr lang="en-US" i="1">
+                            <a:latin typeface="Cambria Math" panose="02040503050406030204" pitchFamily="18" charset="0"/>
+                          </a:rPr>
+                          <m:t>𝐶</m:t>
+                        </m:r>
+                      </m:e>
+                    </m:acc>
+                  </m:oMath>
+                </a14:m>
+                <a:r>
+                  <a:rPr lang="en-US" i="1" dirty="0">
+                    <a:latin typeface="Cambria Math" panose="02040503050406030204" pitchFamily="18" charset="0"/>
+                  </a:rPr>
+                  <a:t>)</a:t>
+                </a:r>
+              </a:p>
+              <a:p>
+                <a:pPr marL="914400" lvl="1" indent="-457200">
+                  <a:buFont typeface="+mj-lt"/>
+                  <a:buAutoNum type="arabicPeriod" startAt="5"/>
+                </a:pPr>
+                <a14:m>
+                  <m:oMath xmlns:m="http://schemas.openxmlformats.org/officeDocument/2006/math">
+                    <m:d>
+                      <m:dPr>
+                        <m:ctrlPr>
+                          <a:rPr lang="en-US" i="1" smtClean="0">
+                            <a:latin typeface="Cambria Math" panose="02040503050406030204" pitchFamily="18" charset="0"/>
+                          </a:rPr>
+                        </m:ctrlPr>
+                      </m:dPr>
+                      <m:e>
+                        <m:r>
+                          <a:rPr lang="en-US" i="1" smtClean="0">
+                            <a:latin typeface="Cambria Math" panose="02040503050406030204" pitchFamily="18" charset="0"/>
+                          </a:rPr>
+                          <m:t>𝐴</m:t>
+                        </m:r>
+                        <m:r>
+                          <a:rPr lang="en-US" i="1" smtClean="0">
+                            <a:latin typeface="Cambria Math" panose="02040503050406030204" pitchFamily="18" charset="0"/>
+                          </a:rPr>
+                          <m:t>.</m:t>
+                        </m:r>
+                        <m:acc>
+                          <m:accPr>
+                            <m:chr m:val="̅"/>
+                            <m:ctrlPr>
+                              <a:rPr lang="en-US" i="1">
+                                <a:latin typeface="Cambria Math" panose="02040503050406030204" pitchFamily="18" charset="0"/>
+                              </a:rPr>
+                            </m:ctrlPr>
+                          </m:accPr>
+                          <m:e>
+                            <m:r>
+                              <a:rPr lang="en-US" i="1" smtClean="0">
+                                <a:latin typeface="Cambria Math" panose="02040503050406030204" pitchFamily="18" charset="0"/>
+                              </a:rPr>
+                              <m:t>𝐵</m:t>
+                            </m:r>
+                          </m:e>
+                        </m:acc>
+                        <m:r>
+                          <a:rPr lang="en-US" i="1" smtClean="0">
+                            <a:latin typeface="Cambria Math" panose="02040503050406030204" pitchFamily="18" charset="0"/>
+                          </a:rPr>
+                          <m:t>+</m:t>
+                        </m:r>
+                        <m:r>
+                          <a:rPr lang="en-US" i="1" smtClean="0">
+                            <a:latin typeface="Cambria Math" panose="02040503050406030204" pitchFamily="18" charset="0"/>
+                          </a:rPr>
+                          <m:t>𝐵</m:t>
+                        </m:r>
+                        <m:r>
+                          <a:rPr lang="en-US" i="1" smtClean="0">
+                            <a:latin typeface="Cambria Math" panose="02040503050406030204" pitchFamily="18" charset="0"/>
+                          </a:rPr>
+                          <m:t>.</m:t>
+                        </m:r>
+                        <m:r>
+                          <a:rPr lang="en-US" i="1" smtClean="0">
+                            <a:latin typeface="Cambria Math" panose="02040503050406030204" pitchFamily="18" charset="0"/>
+                          </a:rPr>
+                          <m:t>𝐶</m:t>
+                        </m:r>
+                      </m:e>
+                    </m:d>
+                    <m:r>
+                      <a:rPr lang="en-US" i="1" smtClean="0">
+                        <a:latin typeface="Cambria Math" panose="02040503050406030204" pitchFamily="18" charset="0"/>
+                      </a:rPr>
+                      <m:t>.</m:t>
+                    </m:r>
+                    <m:d>
+                      <m:dPr>
+                        <m:ctrlPr>
+                          <a:rPr lang="en-US" i="1" smtClean="0">
+                            <a:latin typeface="Cambria Math" panose="02040503050406030204" pitchFamily="18" charset="0"/>
+                          </a:rPr>
+                        </m:ctrlPr>
+                      </m:dPr>
+                      <m:e>
+                        <m:acc>
+                          <m:accPr>
+                            <m:chr m:val="̅"/>
+                            <m:ctrlPr>
+                              <a:rPr lang="en-US" i="1">
+                                <a:latin typeface="Cambria Math" panose="02040503050406030204" pitchFamily="18" charset="0"/>
+                              </a:rPr>
+                            </m:ctrlPr>
+                          </m:accPr>
+                          <m:e>
+                            <m:r>
+                              <a:rPr lang="en-US" i="1" smtClean="0">
+                                <a:latin typeface="Cambria Math" panose="02040503050406030204" pitchFamily="18" charset="0"/>
+                              </a:rPr>
+                              <m:t>𝐴</m:t>
+                            </m:r>
+                          </m:e>
+                        </m:acc>
+                        <m:r>
+                          <a:rPr lang="en-US" i="1" smtClean="0">
+                            <a:latin typeface="Cambria Math" panose="02040503050406030204" pitchFamily="18" charset="0"/>
+                          </a:rPr>
+                          <m:t>+</m:t>
+                        </m:r>
+                        <m:acc>
+                          <m:accPr>
+                            <m:chr m:val="̅"/>
+                            <m:ctrlPr>
+                              <a:rPr lang="en-US" i="1">
+                                <a:latin typeface="Cambria Math" panose="02040503050406030204" pitchFamily="18" charset="0"/>
+                              </a:rPr>
+                            </m:ctrlPr>
+                          </m:accPr>
+                          <m:e>
+                            <m:r>
+                              <a:rPr lang="en-US" i="1" smtClean="0">
+                                <a:latin typeface="Cambria Math" panose="02040503050406030204" pitchFamily="18" charset="0"/>
+                              </a:rPr>
+                              <m:t>𝐶</m:t>
+                            </m:r>
+                          </m:e>
+                        </m:acc>
+                      </m:e>
+                    </m:d>
+                    <m:r>
+                      <a:rPr lang="en-US" i="1" smtClean="0">
+                        <a:latin typeface="Cambria Math" panose="02040503050406030204" pitchFamily="18" charset="0"/>
+                      </a:rPr>
+                      <m:t>=</m:t>
+                    </m:r>
+                    <m:r>
+                      <a:rPr lang="en-US" b="0" i="1" smtClean="0">
+                        <a:latin typeface="Cambria Math" panose="02040503050406030204" pitchFamily="18" charset="0"/>
+                      </a:rPr>
+                      <m:t>𝐴</m:t>
+                    </m:r>
+                    <m:acc>
+                      <m:accPr>
+                        <m:chr m:val="̅"/>
+                        <m:ctrlPr>
+                          <a:rPr lang="en-US" i="1">
+                            <a:latin typeface="Cambria Math" panose="02040503050406030204" pitchFamily="18" charset="0"/>
+                          </a:rPr>
+                        </m:ctrlPr>
+                      </m:accPr>
+                      <m:e>
+                        <m:r>
+                          <a:rPr lang="en-US" i="1">
+                            <a:latin typeface="Cambria Math" panose="02040503050406030204" pitchFamily="18" charset="0"/>
+                          </a:rPr>
+                          <m:t>𝐵</m:t>
+                        </m:r>
+                        <m:r>
+                          <a:rPr lang="en-US" b="0" i="1" smtClean="0">
+                            <a:latin typeface="Cambria Math" panose="02040503050406030204" pitchFamily="18" charset="0"/>
+                          </a:rPr>
+                          <m:t>𝐶</m:t>
+                        </m:r>
+                      </m:e>
+                    </m:acc>
+                    <m:r>
+                      <a:rPr lang="en-US" b="0" i="1" smtClean="0">
+                        <a:latin typeface="Cambria Math" panose="02040503050406030204" pitchFamily="18" charset="0"/>
+                      </a:rPr>
+                      <m:t>+</m:t>
+                    </m:r>
+                    <m:acc>
+                      <m:accPr>
+                        <m:chr m:val="̅"/>
+                        <m:ctrlPr>
+                          <a:rPr lang="en-US" i="1">
+                            <a:latin typeface="Cambria Math" panose="02040503050406030204" pitchFamily="18" charset="0"/>
+                          </a:rPr>
+                        </m:ctrlPr>
+                      </m:accPr>
+                      <m:e>
+                        <m:r>
+                          <a:rPr lang="en-US" i="1">
+                            <a:latin typeface="Cambria Math" panose="02040503050406030204" pitchFamily="18" charset="0"/>
+                          </a:rPr>
+                          <m:t>𝐴</m:t>
+                        </m:r>
+                      </m:e>
+                    </m:acc>
+                    <m:r>
+                      <a:rPr lang="en-US" b="0" i="1" smtClean="0">
+                        <a:latin typeface="Cambria Math" panose="02040503050406030204" pitchFamily="18" charset="0"/>
+                      </a:rPr>
+                      <m:t>𝐵𝐶</m:t>
+                    </m:r>
+                  </m:oMath>
+                </a14:m>
+                <a:endParaRPr lang="en-US" i="1" dirty="0">
+                  <a:latin typeface="Cambria Math" panose="02040503050406030204" pitchFamily="18" charset="0"/>
+                </a:endParaRPr>
+              </a:p>
+              <a:p>
+                <a:endParaRPr lang="en-US" dirty="0"/>
+              </a:p>
+            </p:txBody>
+          </p:sp>
+        </mc:Choice>
+        <mc:Fallback>
+          <p:sp>
+            <p:nvSpPr>
+              <p:cNvPr id="3" name="Content Placeholder 2">
+                <a:extLst>
+                  <a:ext uri="{FF2B5EF4-FFF2-40B4-BE49-F238E27FC236}">
+                    <a16:creationId xmlns:a16="http://schemas.microsoft.com/office/drawing/2014/main" id="{189D5AC8-32D5-9E48-B6EB-F9B294EA540A}"/>
+                  </a:ext>
+                </a:extLst>
+              </p:cNvPr>
+              <p:cNvSpPr>
+                <a:spLocks noGrp="1" noRot="1" noChangeAspect="1" noMove="1" noResize="1" noEditPoints="1" noAdjustHandles="1" noChangeArrowheads="1" noChangeShapeType="1" noTextEdit="1"/>
+              </p:cNvSpPr>
+              <p:nvPr>
+                <p:ph idx="1"/>
+              </p:nvPr>
+            </p:nvSpPr>
+            <p:spPr>
+              <a:blipFill>
+                <a:blip r:embed="rId2"/>
+                <a:stretch>
+                  <a:fillRect t="-1961"/>
+                </a:stretch>
+              </a:blipFill>
+            </p:spPr>
+            <p:txBody>
+              <a:bodyPr/>
+              <a:lstStyle/>
+              <a:p>
+                <a:r>
+                  <a:rPr lang="en-US">
+                    <a:noFill/>
+                  </a:rPr>
+                  <a:t> </a:t>
+                </a:r>
+              </a:p>
+            </p:txBody>
+          </p:sp>
+        </mc:Fallback>
+      </mc:AlternateContent>
+    </p:spTree>
+    <p:extLst>
+      <p:ext uri="{BB962C8B-B14F-4D97-AF65-F5344CB8AC3E}">
+        <p14:creationId xmlns:p14="http://schemas.microsoft.com/office/powerpoint/2010/main" val="1487830106"/>
+      </p:ext>
+    </p:extLst>
+  </p:cSld>
+  <p:clrMapOvr>
+    <a:masterClrMapping/>
+  </p:clrMapOvr>
+</p:sld>
+</file>
+
+<file path=ppt/slides/slide84.xml><?xml version="1.0" encoding="utf-8"?>
+<p:sld xmlns:a="http://schemas.openxmlformats.org/drawingml/2006/main" xmlns:r="http://schemas.openxmlformats.org/officeDocument/2006/relationships" xmlns:p="http://schemas.openxmlformats.org/presentationml/2006/main">
+  <p:cSld>
+    <p:spTree>
+      <p:nvGrpSpPr>
+        <p:cNvPr id="1" name="">
+          <a:extLst>
+            <a:ext uri="{FF2B5EF4-FFF2-40B4-BE49-F238E27FC236}">
+              <a16:creationId xmlns:a16="http://schemas.microsoft.com/office/drawing/2014/main" id="{4F3318A9-801A-714A-A234-6CD3FE66DF3D}"/>
+            </a:ext>
+          </a:extLst>
+        </p:cNvPr>
+        <p:cNvGrpSpPr/>
+        <p:nvPr/>
+      </p:nvGrpSpPr>
+      <p:grpSpPr>
+        <a:xfrm>
+          <a:off x="0" y="0"/>
+          <a:ext cx="0" cy="0"/>
+          <a:chOff x="0" y="0"/>
+          <a:chExt cx="0" cy="0"/>
+        </a:xfrm>
+      </p:grpSpPr>
+      <p:sp>
+        <p:nvSpPr>
+          <p:cNvPr id="2" name="Title 1">
+            <a:extLst>
+              <a:ext uri="{FF2B5EF4-FFF2-40B4-BE49-F238E27FC236}">
+                <a16:creationId xmlns:a16="http://schemas.microsoft.com/office/drawing/2014/main" id="{50480F5D-20D4-03D8-1456-187A1EC7AC95}"/>
+              </a:ext>
+            </a:extLst>
+          </p:cNvPr>
+          <p:cNvSpPr>
+            <a:spLocks noGrp="1"/>
+          </p:cNvSpPr>
+          <p:nvPr>
+            <p:ph type="title"/>
+          </p:nvPr>
+        </p:nvSpPr>
+        <p:spPr/>
+        <p:txBody>
+          <a:bodyPr/>
+          <a:lstStyle/>
+          <a:p>
+            <a:r>
+              <a:rPr lang="en-US" dirty="0"/>
+              <a:t>Expressions: </a:t>
+            </a:r>
+            <a:r>
+              <a:rPr lang="en-US" dirty="0" err="1"/>
+              <a:t>Soln</a:t>
+            </a:r>
+            <a:r>
+              <a:rPr lang="en-US" dirty="0"/>
+              <a:t> 5,6</a:t>
+            </a:r>
+          </a:p>
+        </p:txBody>
+      </p:sp>
+      <mc:AlternateContent xmlns:mc="http://schemas.openxmlformats.org/markup-compatibility/2006">
+        <mc:Choice xmlns:a14="http://schemas.microsoft.com/office/drawing/2010/main" Requires="a14">
+          <p:sp>
+            <p:nvSpPr>
+              <p:cNvPr id="3" name="Content Placeholder 2">
+                <a:extLst>
+                  <a:ext uri="{FF2B5EF4-FFF2-40B4-BE49-F238E27FC236}">
+                    <a16:creationId xmlns:a16="http://schemas.microsoft.com/office/drawing/2014/main" id="{E2DA508B-0F76-F6D7-26DF-64443D0443BC}"/>
+                  </a:ext>
+                </a:extLst>
+              </p:cNvPr>
+              <p:cNvSpPr>
+                <a:spLocks noGrp="1"/>
+              </p:cNvSpPr>
+              <p:nvPr>
+                <p:ph idx="1"/>
+              </p:nvPr>
+            </p:nvSpPr>
+            <p:spPr/>
+            <p:txBody>
+              <a:bodyPr/>
+              <a:lstStyle/>
+              <a:p>
+                <a:pPr marL="914400" lvl="1" indent="-457200">
+                  <a:buFont typeface="+mj-lt"/>
+                  <a:buAutoNum type="arabicPeriod" startAt="7"/>
+                </a:pPr>
+                <a14:m>
+                  <m:oMath xmlns:m="http://schemas.openxmlformats.org/officeDocument/2006/math">
+                    <m:d>
+                      <m:dPr>
+                        <m:ctrlPr>
+                          <a:rPr lang="en-US" i="1" smtClean="0">
+                            <a:latin typeface="Cambria Math" panose="02040503050406030204" pitchFamily="18" charset="0"/>
+                          </a:rPr>
+                        </m:ctrlPr>
+                      </m:dPr>
+                      <m:e>
+                        <m:r>
+                          <a:rPr lang="en-US" i="1" smtClean="0">
+                            <a:latin typeface="Cambria Math" panose="02040503050406030204" pitchFamily="18" charset="0"/>
+                          </a:rPr>
+                          <m:t>𝐴</m:t>
+                        </m:r>
+                        <m:r>
+                          <a:rPr lang="en-US" i="1" smtClean="0">
+                            <a:latin typeface="Cambria Math" panose="02040503050406030204" pitchFamily="18" charset="0"/>
+                          </a:rPr>
+                          <m:t>+</m:t>
+                        </m:r>
+                        <m:r>
+                          <a:rPr lang="en-US" i="1" smtClean="0">
+                            <a:latin typeface="Cambria Math" panose="02040503050406030204" pitchFamily="18" charset="0"/>
+                          </a:rPr>
+                          <m:t>𝐵</m:t>
+                        </m:r>
+                        <m:r>
+                          <a:rPr lang="en-US" i="1" smtClean="0">
+                            <a:latin typeface="Cambria Math" panose="02040503050406030204" pitchFamily="18" charset="0"/>
+                          </a:rPr>
+                          <m:t>+</m:t>
+                        </m:r>
+                        <m:r>
+                          <a:rPr lang="en-US" i="1" smtClean="0">
+                            <a:latin typeface="Cambria Math" panose="02040503050406030204" pitchFamily="18" charset="0"/>
+                          </a:rPr>
+                          <m:t>𝐶</m:t>
+                        </m:r>
+                      </m:e>
+                    </m:d>
+                    <m:r>
+                      <a:rPr lang="en-US" i="1" smtClean="0">
+                        <a:latin typeface="Cambria Math" panose="02040503050406030204" pitchFamily="18" charset="0"/>
+                      </a:rPr>
+                      <m:t>.</m:t>
+                    </m:r>
+                    <m:d>
+                      <m:dPr>
+                        <m:ctrlPr>
+                          <a:rPr lang="en-US" i="1">
+                            <a:latin typeface="Cambria Math" panose="02040503050406030204" pitchFamily="18" charset="0"/>
+                          </a:rPr>
+                        </m:ctrlPr>
+                      </m:dPr>
+                      <m:e>
+                        <m:acc>
+                          <m:accPr>
+                            <m:chr m:val="̅"/>
+                            <m:ctrlPr>
+                              <a:rPr lang="en-US" i="1">
+                                <a:latin typeface="Cambria Math" panose="02040503050406030204" pitchFamily="18" charset="0"/>
+                              </a:rPr>
+                            </m:ctrlPr>
+                          </m:accPr>
+                          <m:e>
+                            <m:r>
+                              <a:rPr lang="en-US" i="1" smtClean="0">
+                                <a:latin typeface="Cambria Math" panose="02040503050406030204" pitchFamily="18" charset="0"/>
+                              </a:rPr>
+                              <m:t>𝐴</m:t>
+                            </m:r>
+                          </m:e>
+                        </m:acc>
+                        <m:r>
+                          <a:rPr lang="en-US" i="1" smtClean="0">
+                            <a:latin typeface="Cambria Math" panose="02040503050406030204" pitchFamily="18" charset="0"/>
+                          </a:rPr>
+                          <m:t>+</m:t>
+                        </m:r>
+                        <m:r>
+                          <a:rPr lang="en-US" i="1" smtClean="0">
+                            <a:latin typeface="Cambria Math" panose="02040503050406030204" pitchFamily="18" charset="0"/>
+                          </a:rPr>
+                          <m:t>𝐵</m:t>
+                        </m:r>
+                      </m:e>
+                    </m:d>
+                    <m:r>
+                      <a:rPr lang="en-US" i="1" smtClean="0">
+                        <a:latin typeface="Cambria Math" panose="02040503050406030204" pitchFamily="18" charset="0"/>
+                      </a:rPr>
+                      <m:t>.(</m:t>
+                    </m:r>
+                    <m:r>
+                      <a:rPr lang="en-US" i="1" smtClean="0">
+                        <a:latin typeface="Cambria Math" panose="02040503050406030204" pitchFamily="18" charset="0"/>
+                      </a:rPr>
+                      <m:t>𝐴</m:t>
+                    </m:r>
+                    <m:r>
+                      <a:rPr lang="en-US" i="1" smtClean="0">
+                        <a:latin typeface="Cambria Math" panose="02040503050406030204" pitchFamily="18" charset="0"/>
+                      </a:rPr>
+                      <m:t>+</m:t>
+                    </m:r>
+                    <m:acc>
+                      <m:accPr>
+                        <m:chr m:val="̅"/>
+                        <m:ctrlPr>
+                          <a:rPr lang="en-US" i="1" smtClean="0">
+                            <a:latin typeface="Cambria Math" panose="02040503050406030204" pitchFamily="18" charset="0"/>
+                          </a:rPr>
+                        </m:ctrlPr>
+                      </m:accPr>
+                      <m:e>
+                        <m:r>
+                          <a:rPr lang="en-US" i="1" smtClean="0">
+                            <a:latin typeface="Cambria Math" panose="02040503050406030204" pitchFamily="18" charset="0"/>
+                          </a:rPr>
+                          <m:t>𝐶</m:t>
+                        </m:r>
+                      </m:e>
+                    </m:acc>
+                  </m:oMath>
+                </a14:m>
+                <a:r>
+                  <a:rPr lang="en-US" i="1" dirty="0">
+                    <a:latin typeface="Cambria Math" panose="02040503050406030204" pitchFamily="18" charset="0"/>
+                  </a:rPr>
+                  <a:t>) = B.(A+</a:t>
+                </a:r>
+                <a:r>
+                  <a:rPr lang="en-US" dirty="0"/>
+                  <a:t> </a:t>
+                </a:r>
+                <a14:m>
+                  <m:oMath xmlns:m="http://schemas.openxmlformats.org/officeDocument/2006/math">
+                    <m:acc>
+                      <m:accPr>
+                        <m:chr m:val="̅"/>
+                        <m:ctrlPr>
+                          <a:rPr lang="en-US" i="1">
+                            <a:latin typeface="Cambria Math" panose="02040503050406030204" pitchFamily="18" charset="0"/>
+                          </a:rPr>
+                        </m:ctrlPr>
+                      </m:accPr>
+                      <m:e>
+                        <m:r>
+                          <a:rPr lang="en-US" i="1">
+                            <a:latin typeface="Cambria Math" panose="02040503050406030204" pitchFamily="18" charset="0"/>
+                          </a:rPr>
+                          <m:t>𝐶</m:t>
+                        </m:r>
+                      </m:e>
+                    </m:acc>
+                  </m:oMath>
+                </a14:m>
+                <a:r>
+                  <a:rPr lang="en-US" i="1" dirty="0">
+                    <a:latin typeface="Cambria Math" panose="02040503050406030204" pitchFamily="18" charset="0"/>
+                  </a:rPr>
+                  <a:t>)</a:t>
+                </a:r>
+              </a:p>
+              <a:p>
+                <a:pPr lvl="2"/>
+                <a:r>
+                  <a:rPr lang="en-US" i="1" dirty="0">
+                    <a:latin typeface="Cambria Math" panose="02040503050406030204" pitchFamily="18" charset="0"/>
+                    <a:sym typeface="Wingdings" panose="05000000000000000000" pitchFamily="2" charset="2"/>
+                  </a:rPr>
+                  <a:t> (A.</a:t>
+                </a:r>
+                <a:r>
+                  <a:rPr lang="en-US" dirty="0"/>
+                  <a:t> </a:t>
+                </a:r>
+                <a14:m>
+                  <m:oMath xmlns:m="http://schemas.openxmlformats.org/officeDocument/2006/math">
+                    <m:d>
+                      <m:dPr>
+                        <m:ctrlPr>
+                          <a:rPr lang="en-US" i="1">
+                            <a:latin typeface="Cambria Math" panose="02040503050406030204" pitchFamily="18" charset="0"/>
+                          </a:rPr>
+                        </m:ctrlPr>
+                      </m:dPr>
+                      <m:e>
+                        <m:acc>
+                          <m:accPr>
+                            <m:chr m:val="̅"/>
+                            <m:ctrlPr>
+                              <a:rPr lang="en-US" i="1">
+                                <a:latin typeface="Cambria Math" panose="02040503050406030204" pitchFamily="18" charset="0"/>
+                              </a:rPr>
+                            </m:ctrlPr>
+                          </m:accPr>
+                          <m:e>
+                            <m:r>
+                              <a:rPr lang="en-US" i="1" smtClean="0">
+                                <a:latin typeface="Cambria Math" panose="02040503050406030204" pitchFamily="18" charset="0"/>
+                              </a:rPr>
+                              <m:t>𝐴</m:t>
+                            </m:r>
+                          </m:e>
+                        </m:acc>
+                        <m:r>
+                          <a:rPr lang="en-US" i="1" smtClean="0">
+                            <a:latin typeface="Cambria Math" panose="02040503050406030204" pitchFamily="18" charset="0"/>
+                          </a:rPr>
+                          <m:t>+</m:t>
+                        </m:r>
+                        <m:r>
+                          <a:rPr lang="en-US" i="1" smtClean="0">
+                            <a:latin typeface="Cambria Math" panose="02040503050406030204" pitchFamily="18" charset="0"/>
+                          </a:rPr>
+                          <m:t>𝐵</m:t>
+                        </m:r>
+                      </m:e>
+                    </m:d>
+                  </m:oMath>
+                </a14:m>
+                <a:r>
+                  <a:rPr lang="en-US" i="1" dirty="0">
+                    <a:latin typeface="Cambria Math" panose="02040503050406030204" pitchFamily="18" charset="0"/>
+                  </a:rPr>
+                  <a:t>+B.</a:t>
+                </a:r>
+                <a:r>
+                  <a:rPr lang="en-US" dirty="0"/>
+                  <a:t> </a:t>
+                </a:r>
+                <a14:m>
+                  <m:oMath xmlns:m="http://schemas.openxmlformats.org/officeDocument/2006/math">
+                    <m:d>
+                      <m:dPr>
+                        <m:ctrlPr>
+                          <a:rPr lang="en-US" i="1">
+                            <a:latin typeface="Cambria Math" panose="02040503050406030204" pitchFamily="18" charset="0"/>
+                          </a:rPr>
+                        </m:ctrlPr>
+                      </m:dPr>
+                      <m:e>
+                        <m:acc>
+                          <m:accPr>
+                            <m:chr m:val="̅"/>
+                            <m:ctrlPr>
+                              <a:rPr lang="en-US" i="1">
+                                <a:latin typeface="Cambria Math" panose="02040503050406030204" pitchFamily="18" charset="0"/>
+                              </a:rPr>
+                            </m:ctrlPr>
+                          </m:accPr>
+                          <m:e>
+                            <m:r>
+                              <a:rPr lang="en-US" i="1">
+                                <a:latin typeface="Cambria Math" panose="02040503050406030204" pitchFamily="18" charset="0"/>
+                              </a:rPr>
+                              <m:t>𝐴</m:t>
+                            </m:r>
+                          </m:e>
+                        </m:acc>
+                        <m:r>
+                          <a:rPr lang="en-US" i="1">
+                            <a:latin typeface="Cambria Math" panose="02040503050406030204" pitchFamily="18" charset="0"/>
+                          </a:rPr>
+                          <m:t>+</m:t>
+                        </m:r>
+                        <m:r>
+                          <a:rPr lang="en-US" i="1">
+                            <a:latin typeface="Cambria Math" panose="02040503050406030204" pitchFamily="18" charset="0"/>
+                          </a:rPr>
+                          <m:t>𝐵</m:t>
+                        </m:r>
+                      </m:e>
+                    </m:d>
+                  </m:oMath>
+                </a14:m>
+                <a:r>
+                  <a:rPr lang="en-US" i="1" dirty="0">
+                    <a:latin typeface="Cambria Math" panose="02040503050406030204" pitchFamily="18" charset="0"/>
+                  </a:rPr>
+                  <a:t>+C.</a:t>
+                </a:r>
+                <a:r>
+                  <a:rPr lang="en-US" dirty="0"/>
+                  <a:t> </a:t>
+                </a:r>
+                <a14:m>
+                  <m:oMath xmlns:m="http://schemas.openxmlformats.org/officeDocument/2006/math">
+                    <m:d>
+                      <m:dPr>
+                        <m:ctrlPr>
+                          <a:rPr lang="en-US" i="1">
+                            <a:latin typeface="Cambria Math" panose="02040503050406030204" pitchFamily="18" charset="0"/>
+                          </a:rPr>
+                        </m:ctrlPr>
+                      </m:dPr>
+                      <m:e>
+                        <m:acc>
+                          <m:accPr>
+                            <m:chr m:val="̅"/>
+                            <m:ctrlPr>
+                              <a:rPr lang="en-US" i="1">
+                                <a:latin typeface="Cambria Math" panose="02040503050406030204" pitchFamily="18" charset="0"/>
+                              </a:rPr>
+                            </m:ctrlPr>
+                          </m:accPr>
+                          <m:e>
+                            <m:r>
+                              <a:rPr lang="en-US" i="1">
+                                <a:latin typeface="Cambria Math" panose="02040503050406030204" pitchFamily="18" charset="0"/>
+                              </a:rPr>
+                              <m:t>𝐴</m:t>
+                            </m:r>
+                          </m:e>
+                        </m:acc>
+                        <m:r>
+                          <a:rPr lang="en-US" i="1">
+                            <a:latin typeface="Cambria Math" panose="02040503050406030204" pitchFamily="18" charset="0"/>
+                          </a:rPr>
+                          <m:t>+</m:t>
+                        </m:r>
+                        <m:r>
+                          <a:rPr lang="en-US" i="1">
+                            <a:latin typeface="Cambria Math" panose="02040503050406030204" pitchFamily="18" charset="0"/>
+                          </a:rPr>
+                          <m:t>𝐵</m:t>
+                        </m:r>
+                      </m:e>
+                    </m:d>
+                    <m:r>
+                      <a:rPr lang="en-US" b="0" i="1" smtClean="0">
+                        <a:latin typeface="Cambria Math" panose="02040503050406030204" pitchFamily="18" charset="0"/>
+                      </a:rPr>
+                      <m:t>)</m:t>
+                    </m:r>
+                  </m:oMath>
+                </a14:m>
+                <a:r>
+                  <a:rPr lang="en-US" i="1" dirty="0">
+                    <a:latin typeface="Cambria Math" panose="02040503050406030204" pitchFamily="18" charset="0"/>
+                  </a:rPr>
+                  <a:t> . (A+</a:t>
+                </a:r>
+                <a:r>
+                  <a:rPr lang="en-US" dirty="0"/>
+                  <a:t> </a:t>
+                </a:r>
+                <a14:m>
+                  <m:oMath xmlns:m="http://schemas.openxmlformats.org/officeDocument/2006/math">
+                    <m:acc>
+                      <m:accPr>
+                        <m:chr m:val="̅"/>
+                        <m:ctrlPr>
+                          <a:rPr lang="en-US" i="1">
+                            <a:latin typeface="Cambria Math" panose="02040503050406030204" pitchFamily="18" charset="0"/>
+                          </a:rPr>
+                        </m:ctrlPr>
+                      </m:accPr>
+                      <m:e>
+                        <m:r>
+                          <a:rPr lang="en-US" i="1">
+                            <a:latin typeface="Cambria Math" panose="02040503050406030204" pitchFamily="18" charset="0"/>
+                          </a:rPr>
+                          <m:t>𝐶</m:t>
+                        </m:r>
+                      </m:e>
+                    </m:acc>
+                  </m:oMath>
+                </a14:m>
+                <a:r>
+                  <a:rPr lang="en-US" i="1" dirty="0">
+                    <a:latin typeface="Cambria Math" panose="02040503050406030204" pitchFamily="18" charset="0"/>
+                  </a:rPr>
+                  <a:t>)</a:t>
+                </a:r>
+              </a:p>
+              <a:p>
+                <a:pPr lvl="2"/>
+                <a:r>
+                  <a:rPr lang="en-US" i="1" dirty="0">
+                    <a:latin typeface="Cambria Math" panose="02040503050406030204" pitchFamily="18" charset="0"/>
+                    <a:sym typeface="Wingdings" panose="05000000000000000000" pitchFamily="2" charset="2"/>
+                  </a:rPr>
+                  <a:t> (A.B +B </a:t>
+                </a:r>
+                <a:r>
+                  <a:rPr lang="en-US" dirty="0"/>
+                  <a:t> +</a:t>
+                </a:r>
+                <a14:m>
+                  <m:oMath xmlns:m="http://schemas.openxmlformats.org/officeDocument/2006/math">
+                    <m:r>
+                      <m:rPr>
+                        <m:sty m:val="p"/>
+                      </m:rPr>
+                      <a:rPr lang="en-US" b="0" i="0" smtClean="0">
+                        <a:latin typeface="Cambria Math" panose="02040503050406030204" pitchFamily="18" charset="0"/>
+                      </a:rPr>
+                      <m:t>C</m:t>
+                    </m:r>
+                    <m:r>
+                      <a:rPr lang="en-US" b="0" i="0" smtClean="0">
+                        <a:latin typeface="Cambria Math" panose="02040503050406030204" pitchFamily="18" charset="0"/>
+                      </a:rPr>
+                      <m:t>.</m:t>
+                    </m:r>
+                    <m:acc>
+                      <m:accPr>
+                        <m:chr m:val="̅"/>
+                        <m:ctrlPr>
+                          <a:rPr lang="en-US" i="1">
+                            <a:latin typeface="Cambria Math" panose="02040503050406030204" pitchFamily="18" charset="0"/>
+                          </a:rPr>
+                        </m:ctrlPr>
+                      </m:accPr>
+                      <m:e>
+                        <m:r>
+                          <a:rPr lang="en-US" i="1">
+                            <a:latin typeface="Cambria Math" panose="02040503050406030204" pitchFamily="18" charset="0"/>
+                          </a:rPr>
+                          <m:t>𝐴</m:t>
+                        </m:r>
+                      </m:e>
+                    </m:acc>
+                    <m:r>
+                      <a:rPr lang="en-US" b="0" i="1" smtClean="0">
+                        <a:latin typeface="Cambria Math" panose="02040503050406030204" pitchFamily="18" charset="0"/>
+                      </a:rPr>
+                      <m:t>+</m:t>
+                    </m:r>
+                    <m:r>
+                      <a:rPr lang="en-US" b="0" i="1" smtClean="0">
+                        <a:latin typeface="Cambria Math" panose="02040503050406030204" pitchFamily="18" charset="0"/>
+                      </a:rPr>
+                      <m:t>𝐶</m:t>
+                    </m:r>
+                    <m:r>
+                      <a:rPr lang="en-US" b="0" i="1" smtClean="0">
+                        <a:latin typeface="Cambria Math" panose="02040503050406030204" pitchFamily="18" charset="0"/>
+                      </a:rPr>
+                      <m:t>.</m:t>
+                    </m:r>
+                    <m:r>
+                      <a:rPr lang="en-US" b="0" i="1" smtClean="0">
+                        <a:latin typeface="Cambria Math" panose="02040503050406030204" pitchFamily="18" charset="0"/>
+                      </a:rPr>
+                      <m:t>𝐵</m:t>
+                    </m:r>
+                    <m:r>
+                      <a:rPr lang="en-US" b="0" i="1" smtClean="0">
+                        <a:latin typeface="Cambria Math" panose="02040503050406030204" pitchFamily="18" charset="0"/>
+                      </a:rPr>
+                      <m:t>)</m:t>
+                    </m:r>
+                  </m:oMath>
+                </a14:m>
+                <a:r>
+                  <a:rPr lang="en-US" i="1" dirty="0">
+                    <a:latin typeface="Cambria Math" panose="02040503050406030204" pitchFamily="18" charset="0"/>
+                  </a:rPr>
+                  <a:t> . (A+</a:t>
+                </a:r>
+                <a:r>
+                  <a:rPr lang="en-US" dirty="0"/>
+                  <a:t> </a:t>
+                </a:r>
+                <a14:m>
+                  <m:oMath xmlns:m="http://schemas.openxmlformats.org/officeDocument/2006/math">
+                    <m:acc>
+                      <m:accPr>
+                        <m:chr m:val="̅"/>
+                        <m:ctrlPr>
+                          <a:rPr lang="en-US" i="1">
+                            <a:latin typeface="Cambria Math" panose="02040503050406030204" pitchFamily="18" charset="0"/>
+                          </a:rPr>
+                        </m:ctrlPr>
+                      </m:accPr>
+                      <m:e>
+                        <m:r>
+                          <a:rPr lang="en-US" i="1">
+                            <a:latin typeface="Cambria Math" panose="02040503050406030204" pitchFamily="18" charset="0"/>
+                          </a:rPr>
+                          <m:t>𝐶</m:t>
+                        </m:r>
+                      </m:e>
+                    </m:acc>
+                  </m:oMath>
+                </a14:m>
+                <a:r>
+                  <a:rPr lang="en-US" i="1" dirty="0">
+                    <a:latin typeface="Cambria Math" panose="02040503050406030204" pitchFamily="18" charset="0"/>
+                  </a:rPr>
+                  <a:t>)   </a:t>
+                </a:r>
+                <a:r>
+                  <a:rPr lang="en-US" dirty="0">
+                    <a:solidFill>
+                      <a:schemeClr val="accent6">
+                        <a:lumMod val="75000"/>
+                      </a:schemeClr>
+                    </a:solidFill>
+                    <a:latin typeface="Cambria Math" panose="02040503050406030204" pitchFamily="18" charset="0"/>
+                  </a:rPr>
+                  <a:t>//Absorption and expansion</a:t>
+                </a:r>
+              </a:p>
+              <a:p>
+                <a:pPr lvl="2"/>
+                <a:r>
+                  <a:rPr lang="en-US" i="1" dirty="0">
+                    <a:latin typeface="Cambria Math" panose="02040503050406030204" pitchFamily="18" charset="0"/>
+                    <a:sym typeface="Wingdings" panose="05000000000000000000" pitchFamily="2" charset="2"/>
+                  </a:rPr>
+                  <a:t> (B </a:t>
+                </a:r>
+                <a:r>
+                  <a:rPr lang="en-US" dirty="0"/>
+                  <a:t> +</a:t>
+                </a:r>
+                <a14:m>
+                  <m:oMath xmlns:m="http://schemas.openxmlformats.org/officeDocument/2006/math">
+                    <m:r>
+                      <m:rPr>
+                        <m:sty m:val="p"/>
+                      </m:rPr>
+                      <a:rPr lang="en-US" b="0" i="0" smtClean="0">
+                        <a:latin typeface="Cambria Math" panose="02040503050406030204" pitchFamily="18" charset="0"/>
+                      </a:rPr>
+                      <m:t>C</m:t>
+                    </m:r>
+                    <m:r>
+                      <a:rPr lang="en-US" b="0" i="0" smtClean="0">
+                        <a:latin typeface="Cambria Math" panose="02040503050406030204" pitchFamily="18" charset="0"/>
+                      </a:rPr>
+                      <m:t>.</m:t>
+                    </m:r>
+                    <m:acc>
+                      <m:accPr>
+                        <m:chr m:val="̅"/>
+                        <m:ctrlPr>
+                          <a:rPr lang="en-US" i="1">
+                            <a:latin typeface="Cambria Math" panose="02040503050406030204" pitchFamily="18" charset="0"/>
+                          </a:rPr>
+                        </m:ctrlPr>
+                      </m:accPr>
+                      <m:e>
+                        <m:r>
+                          <a:rPr lang="en-US" i="1">
+                            <a:latin typeface="Cambria Math" panose="02040503050406030204" pitchFamily="18" charset="0"/>
+                          </a:rPr>
+                          <m:t>𝐴</m:t>
+                        </m:r>
+                      </m:e>
+                    </m:acc>
+                    <m:r>
+                      <a:rPr lang="en-US" b="0" i="1" smtClean="0">
+                        <a:latin typeface="Cambria Math" panose="02040503050406030204" pitchFamily="18" charset="0"/>
+                      </a:rPr>
+                      <m:t>)</m:t>
+                    </m:r>
+                  </m:oMath>
+                </a14:m>
+                <a:r>
+                  <a:rPr lang="en-US" i="1" dirty="0">
+                    <a:latin typeface="Cambria Math" panose="02040503050406030204" pitchFamily="18" charset="0"/>
+                  </a:rPr>
+                  <a:t> . (A+</a:t>
+                </a:r>
+                <a:r>
+                  <a:rPr lang="en-US" dirty="0"/>
+                  <a:t> </a:t>
+                </a:r>
+                <a14:m>
+                  <m:oMath xmlns:m="http://schemas.openxmlformats.org/officeDocument/2006/math">
+                    <m:acc>
+                      <m:accPr>
+                        <m:chr m:val="̅"/>
+                        <m:ctrlPr>
+                          <a:rPr lang="en-US" i="1">
+                            <a:latin typeface="Cambria Math" panose="02040503050406030204" pitchFamily="18" charset="0"/>
+                          </a:rPr>
+                        </m:ctrlPr>
+                      </m:accPr>
+                      <m:e>
+                        <m:r>
+                          <a:rPr lang="en-US" i="1">
+                            <a:latin typeface="Cambria Math" panose="02040503050406030204" pitchFamily="18" charset="0"/>
+                          </a:rPr>
+                          <m:t>𝐶</m:t>
+                        </m:r>
+                      </m:e>
+                    </m:acc>
+                  </m:oMath>
+                </a14:m>
+                <a:r>
+                  <a:rPr lang="en-US" i="1" dirty="0">
+                    <a:latin typeface="Cambria Math" panose="02040503050406030204" pitchFamily="18" charset="0"/>
+                  </a:rPr>
+                  <a:t>)   </a:t>
+                </a:r>
+                <a:r>
+                  <a:rPr lang="en-US" dirty="0">
+                    <a:solidFill>
+                      <a:schemeClr val="accent6">
+                        <a:lumMod val="75000"/>
+                      </a:schemeClr>
+                    </a:solidFill>
+                    <a:latin typeface="Cambria Math" panose="02040503050406030204" pitchFamily="18" charset="0"/>
+                  </a:rPr>
+                  <a:t>//Absorption</a:t>
+                </a:r>
+              </a:p>
+              <a:p>
+                <a:pPr lvl="2"/>
+                <a:r>
+                  <a:rPr lang="en-US" i="1" dirty="0">
+                    <a:latin typeface="Cambria Math" panose="02040503050406030204" pitchFamily="18" charset="0"/>
+                    <a:sym typeface="Wingdings" panose="05000000000000000000" pitchFamily="2" charset="2"/>
+                  </a:rPr>
+                  <a:t> A.B  + B.</a:t>
+                </a:r>
+                <a:r>
+                  <a:rPr lang="en-US" dirty="0"/>
+                  <a:t> </a:t>
+                </a:r>
+                <a14:m>
+                  <m:oMath xmlns:m="http://schemas.openxmlformats.org/officeDocument/2006/math">
+                    <m:acc>
+                      <m:accPr>
+                        <m:chr m:val="̅"/>
+                        <m:ctrlPr>
+                          <a:rPr lang="en-US" i="1">
+                            <a:latin typeface="Cambria Math" panose="02040503050406030204" pitchFamily="18" charset="0"/>
+                          </a:rPr>
+                        </m:ctrlPr>
+                      </m:accPr>
+                      <m:e>
+                        <m:r>
+                          <a:rPr lang="en-US" i="1">
+                            <a:latin typeface="Cambria Math" panose="02040503050406030204" pitchFamily="18" charset="0"/>
+                          </a:rPr>
+                          <m:t>𝐶</m:t>
+                        </m:r>
+                      </m:e>
+                    </m:acc>
+                    <m:r>
+                      <a:rPr lang="en-US" b="0" i="1" smtClean="0">
+                        <a:latin typeface="Cambria Math" panose="02040503050406030204" pitchFamily="18" charset="0"/>
+                      </a:rPr>
+                      <m:t>+</m:t>
+                    </m:r>
+                    <m:r>
+                      <m:rPr>
+                        <m:sty m:val="p"/>
+                      </m:rPr>
+                      <a:rPr lang="en-US">
+                        <a:latin typeface="Cambria Math" panose="02040503050406030204" pitchFamily="18" charset="0"/>
+                      </a:rPr>
+                      <m:t>C</m:t>
+                    </m:r>
+                    <m:r>
+                      <a:rPr lang="en-US">
+                        <a:latin typeface="Cambria Math" panose="02040503050406030204" pitchFamily="18" charset="0"/>
+                      </a:rPr>
+                      <m:t>.</m:t>
+                    </m:r>
+                    <m:acc>
+                      <m:accPr>
+                        <m:chr m:val="̅"/>
+                        <m:ctrlPr>
+                          <a:rPr lang="en-US" i="1">
+                            <a:latin typeface="Cambria Math" panose="02040503050406030204" pitchFamily="18" charset="0"/>
+                          </a:rPr>
+                        </m:ctrlPr>
+                      </m:accPr>
+                      <m:e>
+                        <m:r>
+                          <a:rPr lang="en-US" i="1">
+                            <a:latin typeface="Cambria Math" panose="02040503050406030204" pitchFamily="18" charset="0"/>
+                          </a:rPr>
+                          <m:t>𝐴</m:t>
+                        </m:r>
+                      </m:e>
+                    </m:acc>
+                    <m:r>
+                      <a:rPr lang="en-US" b="0" i="1" smtClean="0">
+                        <a:latin typeface="Cambria Math" panose="02040503050406030204" pitchFamily="18" charset="0"/>
+                      </a:rPr>
+                      <m:t>.</m:t>
+                    </m:r>
+                    <m:r>
+                      <a:rPr lang="en-US" b="0" i="1" smtClean="0">
+                        <a:latin typeface="Cambria Math" panose="02040503050406030204" pitchFamily="18" charset="0"/>
+                      </a:rPr>
+                      <m:t>𝐴</m:t>
+                    </m:r>
+                    <m:r>
+                      <a:rPr lang="en-US" b="0" i="1" smtClean="0">
+                        <a:latin typeface="Cambria Math" panose="02040503050406030204" pitchFamily="18" charset="0"/>
+                      </a:rPr>
+                      <m:t>+</m:t>
+                    </m:r>
+                    <m:r>
+                      <a:rPr lang="en-US" b="0" i="1" smtClean="0">
+                        <a:latin typeface="Cambria Math" panose="02040503050406030204" pitchFamily="18" charset="0"/>
+                      </a:rPr>
+                      <m:t>𝐶𝐴</m:t>
+                    </m:r>
+                  </m:oMath>
+                </a14:m>
+                <a:r>
+                  <a:rPr lang="en-US" dirty="0"/>
+                  <a:t> </a:t>
+                </a:r>
+                <a14:m>
+                  <m:oMath xmlns:m="http://schemas.openxmlformats.org/officeDocument/2006/math">
+                    <m:acc>
+                      <m:accPr>
+                        <m:chr m:val="̅"/>
+                        <m:ctrlPr>
+                          <a:rPr lang="en-US" i="1">
+                            <a:latin typeface="Cambria Math" panose="02040503050406030204" pitchFamily="18" charset="0"/>
+                          </a:rPr>
+                        </m:ctrlPr>
+                      </m:accPr>
+                      <m:e>
+                        <m:r>
+                          <a:rPr lang="en-US" i="1">
+                            <a:latin typeface="Cambria Math" panose="02040503050406030204" pitchFamily="18" charset="0"/>
+                          </a:rPr>
+                          <m:t>𝐶</m:t>
+                        </m:r>
+                      </m:e>
+                    </m:acc>
+                  </m:oMath>
+                </a14:m>
+                <a:r>
+                  <a:rPr lang="en-US" i="1" dirty="0">
+                    <a:latin typeface="Cambria Math" panose="02040503050406030204" pitchFamily="18" charset="0"/>
+                  </a:rPr>
+                  <a:t>  </a:t>
+                </a:r>
+                <a:r>
+                  <a:rPr lang="en-US" dirty="0">
+                    <a:solidFill>
+                      <a:schemeClr val="accent6">
+                        <a:lumMod val="75000"/>
+                      </a:schemeClr>
+                    </a:solidFill>
+                    <a:latin typeface="Cambria Math" panose="02040503050406030204" pitchFamily="18" charset="0"/>
+                  </a:rPr>
+                  <a:t>//Complement Law and combine like terms</a:t>
+                </a:r>
+              </a:p>
+              <a:p>
+                <a:pPr lvl="2"/>
+                <a:r>
+                  <a:rPr lang="en-US" i="1" dirty="0">
+                    <a:latin typeface="Cambria Math" panose="02040503050406030204" pitchFamily="18" charset="0"/>
+                    <a:sym typeface="Wingdings" panose="05000000000000000000" pitchFamily="2" charset="2"/>
+                  </a:rPr>
+                  <a:t></a:t>
+                </a:r>
+                <a:r>
+                  <a:rPr lang="en-US" i="1" dirty="0">
+                    <a:latin typeface="Cambria Math" panose="02040503050406030204" pitchFamily="18" charset="0"/>
+                  </a:rPr>
+                  <a:t>B.(A+</a:t>
+                </a:r>
+                <a:r>
+                  <a:rPr lang="en-US" dirty="0"/>
+                  <a:t> </a:t>
+                </a:r>
+                <a14:m>
+                  <m:oMath xmlns:m="http://schemas.openxmlformats.org/officeDocument/2006/math">
+                    <m:acc>
+                      <m:accPr>
+                        <m:chr m:val="̅"/>
+                        <m:ctrlPr>
+                          <a:rPr lang="en-US" i="1">
+                            <a:latin typeface="Cambria Math" panose="02040503050406030204" pitchFamily="18" charset="0"/>
+                          </a:rPr>
+                        </m:ctrlPr>
+                      </m:accPr>
+                      <m:e>
+                        <m:r>
+                          <a:rPr lang="en-US" i="1">
+                            <a:latin typeface="Cambria Math" panose="02040503050406030204" pitchFamily="18" charset="0"/>
+                          </a:rPr>
+                          <m:t>𝐶</m:t>
+                        </m:r>
+                      </m:e>
+                    </m:acc>
+                  </m:oMath>
+                </a14:m>
+                <a:r>
+                  <a:rPr lang="en-US" i="1" dirty="0">
+                    <a:latin typeface="Cambria Math" panose="02040503050406030204" pitchFamily="18" charset="0"/>
+                  </a:rPr>
+                  <a:t>)</a:t>
+                </a:r>
+              </a:p>
+              <a:p>
+                <a:pPr marL="914400" lvl="1" indent="-457200">
+                  <a:buFont typeface="+mj-lt"/>
+                  <a:buAutoNum type="arabicPeriod" startAt="7"/>
+                </a:pPr>
+                <a14:m>
+                  <m:oMath xmlns:m="http://schemas.openxmlformats.org/officeDocument/2006/math">
+                    <m:d>
+                      <m:dPr>
+                        <m:ctrlPr>
+                          <a:rPr lang="en-US" i="1" smtClean="0">
+                            <a:latin typeface="Cambria Math" panose="02040503050406030204" pitchFamily="18" charset="0"/>
+                          </a:rPr>
+                        </m:ctrlPr>
+                      </m:dPr>
+                      <m:e>
+                        <m:r>
+                          <a:rPr lang="en-US" i="1" smtClean="0">
+                            <a:latin typeface="Cambria Math" panose="02040503050406030204" pitchFamily="18" charset="0"/>
+                          </a:rPr>
+                          <m:t>𝐴</m:t>
+                        </m:r>
+                        <m:r>
+                          <a:rPr lang="en-US" i="1" smtClean="0">
+                            <a:latin typeface="Cambria Math" panose="02040503050406030204" pitchFamily="18" charset="0"/>
+                          </a:rPr>
+                          <m:t>.</m:t>
+                        </m:r>
+                        <m:acc>
+                          <m:accPr>
+                            <m:chr m:val="̅"/>
+                            <m:ctrlPr>
+                              <a:rPr lang="en-US" i="1">
+                                <a:latin typeface="Cambria Math" panose="02040503050406030204" pitchFamily="18" charset="0"/>
+                              </a:rPr>
+                            </m:ctrlPr>
+                          </m:accPr>
+                          <m:e>
+                            <m:r>
+                              <a:rPr lang="en-US" i="1" smtClean="0">
+                                <a:latin typeface="Cambria Math" panose="02040503050406030204" pitchFamily="18" charset="0"/>
+                              </a:rPr>
+                              <m:t>𝐵</m:t>
+                            </m:r>
+                          </m:e>
+                        </m:acc>
+                        <m:r>
+                          <a:rPr lang="en-US" i="1" smtClean="0">
+                            <a:latin typeface="Cambria Math" panose="02040503050406030204" pitchFamily="18" charset="0"/>
+                          </a:rPr>
+                          <m:t>+</m:t>
+                        </m:r>
+                        <m:r>
+                          <a:rPr lang="en-US" i="1" smtClean="0">
+                            <a:latin typeface="Cambria Math" panose="02040503050406030204" pitchFamily="18" charset="0"/>
+                          </a:rPr>
+                          <m:t>𝐵</m:t>
+                        </m:r>
+                        <m:r>
+                          <a:rPr lang="en-US" i="1" smtClean="0">
+                            <a:latin typeface="Cambria Math" panose="02040503050406030204" pitchFamily="18" charset="0"/>
+                          </a:rPr>
+                          <m:t>.</m:t>
+                        </m:r>
+                        <m:r>
+                          <a:rPr lang="en-US" i="1" smtClean="0">
+                            <a:latin typeface="Cambria Math" panose="02040503050406030204" pitchFamily="18" charset="0"/>
+                          </a:rPr>
+                          <m:t>𝐶</m:t>
+                        </m:r>
+                      </m:e>
+                    </m:d>
+                    <m:r>
+                      <a:rPr lang="en-US" i="1" smtClean="0">
+                        <a:latin typeface="Cambria Math" panose="02040503050406030204" pitchFamily="18" charset="0"/>
+                      </a:rPr>
+                      <m:t>.</m:t>
+                    </m:r>
+                    <m:d>
+                      <m:dPr>
+                        <m:ctrlPr>
+                          <a:rPr lang="en-US" i="1" smtClean="0">
+                            <a:latin typeface="Cambria Math" panose="02040503050406030204" pitchFamily="18" charset="0"/>
+                          </a:rPr>
+                        </m:ctrlPr>
+                      </m:dPr>
+                      <m:e>
+                        <m:acc>
+                          <m:accPr>
+                            <m:chr m:val="̅"/>
+                            <m:ctrlPr>
+                              <a:rPr lang="en-US" i="1">
+                                <a:latin typeface="Cambria Math" panose="02040503050406030204" pitchFamily="18" charset="0"/>
+                              </a:rPr>
+                            </m:ctrlPr>
+                          </m:accPr>
+                          <m:e>
+                            <m:r>
+                              <a:rPr lang="en-US" i="1" smtClean="0">
+                                <a:latin typeface="Cambria Math" panose="02040503050406030204" pitchFamily="18" charset="0"/>
+                              </a:rPr>
+                              <m:t>𝐴</m:t>
+                            </m:r>
+                          </m:e>
+                        </m:acc>
+                        <m:r>
+                          <a:rPr lang="en-US" i="1" smtClean="0">
+                            <a:latin typeface="Cambria Math" panose="02040503050406030204" pitchFamily="18" charset="0"/>
+                          </a:rPr>
+                          <m:t>+</m:t>
+                        </m:r>
+                        <m:acc>
+                          <m:accPr>
+                            <m:chr m:val="̅"/>
+                            <m:ctrlPr>
+                              <a:rPr lang="en-US" i="1">
+                                <a:latin typeface="Cambria Math" panose="02040503050406030204" pitchFamily="18" charset="0"/>
+                              </a:rPr>
+                            </m:ctrlPr>
+                          </m:accPr>
+                          <m:e>
+                            <m:r>
+                              <a:rPr lang="en-US" i="1" smtClean="0">
+                                <a:latin typeface="Cambria Math" panose="02040503050406030204" pitchFamily="18" charset="0"/>
+                              </a:rPr>
+                              <m:t>𝐶</m:t>
+                            </m:r>
+                          </m:e>
+                        </m:acc>
+                      </m:e>
+                    </m:d>
+                    <m:r>
+                      <a:rPr lang="en-US" i="1" smtClean="0">
+                        <a:latin typeface="Cambria Math" panose="02040503050406030204" pitchFamily="18" charset="0"/>
+                      </a:rPr>
+                      <m:t>=</m:t>
+                    </m:r>
+                    <m:r>
+                      <a:rPr lang="en-US" b="0" i="1" smtClean="0">
+                        <a:latin typeface="Cambria Math" panose="02040503050406030204" pitchFamily="18" charset="0"/>
+                      </a:rPr>
+                      <m:t>𝐴</m:t>
+                    </m:r>
+                    <m:acc>
+                      <m:accPr>
+                        <m:chr m:val="̅"/>
+                        <m:ctrlPr>
+                          <a:rPr lang="en-US" i="1">
+                            <a:latin typeface="Cambria Math" panose="02040503050406030204" pitchFamily="18" charset="0"/>
+                          </a:rPr>
+                        </m:ctrlPr>
+                      </m:accPr>
+                      <m:e>
+                        <m:r>
+                          <a:rPr lang="en-US" i="1">
+                            <a:latin typeface="Cambria Math" panose="02040503050406030204" pitchFamily="18" charset="0"/>
+                          </a:rPr>
+                          <m:t>𝐵</m:t>
+                        </m:r>
+                        <m:r>
+                          <a:rPr lang="en-US" b="0" i="1" smtClean="0">
+                            <a:latin typeface="Cambria Math" panose="02040503050406030204" pitchFamily="18" charset="0"/>
+                          </a:rPr>
+                          <m:t>𝐶</m:t>
+                        </m:r>
+                      </m:e>
+                    </m:acc>
+                    <m:r>
+                      <a:rPr lang="en-US" b="0" i="1" smtClean="0">
+                        <a:latin typeface="Cambria Math" panose="02040503050406030204" pitchFamily="18" charset="0"/>
+                      </a:rPr>
+                      <m:t>+</m:t>
+                    </m:r>
+                    <m:acc>
+                      <m:accPr>
+                        <m:chr m:val="̅"/>
+                        <m:ctrlPr>
+                          <a:rPr lang="en-US" i="1">
+                            <a:latin typeface="Cambria Math" panose="02040503050406030204" pitchFamily="18" charset="0"/>
+                          </a:rPr>
+                        </m:ctrlPr>
+                      </m:accPr>
+                      <m:e>
+                        <m:r>
+                          <a:rPr lang="en-US" i="1">
+                            <a:latin typeface="Cambria Math" panose="02040503050406030204" pitchFamily="18" charset="0"/>
+                          </a:rPr>
+                          <m:t>𝐴</m:t>
+                        </m:r>
+                      </m:e>
+                    </m:acc>
+                    <m:r>
+                      <a:rPr lang="en-US" b="0" i="1" smtClean="0">
+                        <a:latin typeface="Cambria Math" panose="02040503050406030204" pitchFamily="18" charset="0"/>
+                      </a:rPr>
+                      <m:t>𝐵𝐶</m:t>
+                    </m:r>
+                  </m:oMath>
+                </a14:m>
+                <a:endParaRPr lang="en-US" i="1" dirty="0">
+                  <a:latin typeface="Cambria Math" panose="02040503050406030204" pitchFamily="18" charset="0"/>
+                </a:endParaRPr>
+              </a:p>
+              <a:p>
+                <a:pPr lvl="2"/>
+                <a:r>
+                  <a:rPr lang="en-US" dirty="0">
+                    <a:sym typeface="Wingdings" panose="05000000000000000000" pitchFamily="2" charset="2"/>
+                  </a:rPr>
+                  <a:t></a:t>
+                </a:r>
+                <a14:m>
+                  <m:oMath xmlns:m="http://schemas.openxmlformats.org/officeDocument/2006/math">
+                    <m:r>
+                      <a:rPr lang="en-US" i="1" smtClean="0">
+                        <a:latin typeface="Cambria Math" panose="02040503050406030204" pitchFamily="18" charset="0"/>
+                      </a:rPr>
+                      <m:t>𝐴</m:t>
+                    </m:r>
+                    <m:r>
+                      <a:rPr lang="en-US" i="1" smtClean="0">
+                        <a:latin typeface="Cambria Math" panose="02040503050406030204" pitchFamily="18" charset="0"/>
+                      </a:rPr>
+                      <m:t>.</m:t>
+                    </m:r>
+                    <m:acc>
+                      <m:accPr>
+                        <m:chr m:val="̅"/>
+                        <m:ctrlPr>
+                          <a:rPr lang="en-US" i="1">
+                            <a:latin typeface="Cambria Math" panose="02040503050406030204" pitchFamily="18" charset="0"/>
+                          </a:rPr>
+                        </m:ctrlPr>
+                      </m:accPr>
+                      <m:e>
+                        <m:r>
+                          <a:rPr lang="en-US" i="1" smtClean="0">
+                            <a:latin typeface="Cambria Math" panose="02040503050406030204" pitchFamily="18" charset="0"/>
+                          </a:rPr>
+                          <m:t>𝐵</m:t>
+                        </m:r>
+                      </m:e>
+                    </m:acc>
+                    <m:r>
+                      <a:rPr lang="en-US" i="1">
+                        <a:latin typeface="Cambria Math" panose="02040503050406030204" pitchFamily="18" charset="0"/>
+                      </a:rPr>
+                      <m:t>.</m:t>
+                    </m:r>
+                    <m:d>
+                      <m:dPr>
+                        <m:ctrlPr>
+                          <a:rPr lang="en-US" i="1">
+                            <a:latin typeface="Cambria Math" panose="02040503050406030204" pitchFamily="18" charset="0"/>
+                          </a:rPr>
+                        </m:ctrlPr>
+                      </m:dPr>
+                      <m:e>
+                        <m:acc>
+                          <m:accPr>
+                            <m:chr m:val="̅"/>
+                            <m:ctrlPr>
+                              <a:rPr lang="en-US" i="1">
+                                <a:latin typeface="Cambria Math" panose="02040503050406030204" pitchFamily="18" charset="0"/>
+                              </a:rPr>
+                            </m:ctrlPr>
+                          </m:accPr>
+                          <m:e>
+                            <m:r>
+                              <a:rPr lang="en-US" i="1">
+                                <a:latin typeface="Cambria Math" panose="02040503050406030204" pitchFamily="18" charset="0"/>
+                              </a:rPr>
+                              <m:t>𝐴</m:t>
+                            </m:r>
+                          </m:e>
+                        </m:acc>
+                        <m:r>
+                          <a:rPr lang="en-US" i="1">
+                            <a:latin typeface="Cambria Math" panose="02040503050406030204" pitchFamily="18" charset="0"/>
+                          </a:rPr>
+                          <m:t>+</m:t>
+                        </m:r>
+                        <m:acc>
+                          <m:accPr>
+                            <m:chr m:val="̅"/>
+                            <m:ctrlPr>
+                              <a:rPr lang="en-US" i="1">
+                                <a:latin typeface="Cambria Math" panose="02040503050406030204" pitchFamily="18" charset="0"/>
+                              </a:rPr>
+                            </m:ctrlPr>
+                          </m:accPr>
+                          <m:e>
+                            <m:r>
+                              <a:rPr lang="en-US" i="1">
+                                <a:latin typeface="Cambria Math" panose="02040503050406030204" pitchFamily="18" charset="0"/>
+                              </a:rPr>
+                              <m:t>𝐶</m:t>
+                            </m:r>
+                          </m:e>
+                        </m:acc>
+                      </m:e>
+                    </m:d>
+                  </m:oMath>
+                </a14:m>
+                <a:r>
+                  <a:rPr lang="en-US" i="1" dirty="0">
+                    <a:latin typeface="Cambria Math" panose="02040503050406030204" pitchFamily="18" charset="0"/>
+                  </a:rPr>
+                  <a:t> + B.C.</a:t>
+                </a:r>
+                <a:r>
+                  <a:rPr lang="en-US" dirty="0"/>
+                  <a:t> </a:t>
+                </a:r>
+                <a14:m>
+                  <m:oMath xmlns:m="http://schemas.openxmlformats.org/officeDocument/2006/math">
+                    <m:d>
+                      <m:dPr>
+                        <m:ctrlPr>
+                          <a:rPr lang="en-US" i="1">
+                            <a:latin typeface="Cambria Math" panose="02040503050406030204" pitchFamily="18" charset="0"/>
+                          </a:rPr>
+                        </m:ctrlPr>
+                      </m:dPr>
+                      <m:e>
+                        <m:acc>
+                          <m:accPr>
+                            <m:chr m:val="̅"/>
+                            <m:ctrlPr>
+                              <a:rPr lang="en-US" i="1">
+                                <a:latin typeface="Cambria Math" panose="02040503050406030204" pitchFamily="18" charset="0"/>
+                              </a:rPr>
+                            </m:ctrlPr>
+                          </m:accPr>
+                          <m:e>
+                            <m:r>
+                              <a:rPr lang="en-US" i="1">
+                                <a:latin typeface="Cambria Math" panose="02040503050406030204" pitchFamily="18" charset="0"/>
+                              </a:rPr>
+                              <m:t>𝐴</m:t>
+                            </m:r>
+                          </m:e>
+                        </m:acc>
+                        <m:r>
+                          <a:rPr lang="en-US" i="1">
+                            <a:latin typeface="Cambria Math" panose="02040503050406030204" pitchFamily="18" charset="0"/>
+                          </a:rPr>
+                          <m:t>+</m:t>
+                        </m:r>
+                        <m:acc>
+                          <m:accPr>
+                            <m:chr m:val="̅"/>
+                            <m:ctrlPr>
+                              <a:rPr lang="en-US" i="1">
+                                <a:latin typeface="Cambria Math" panose="02040503050406030204" pitchFamily="18" charset="0"/>
+                              </a:rPr>
+                            </m:ctrlPr>
+                          </m:accPr>
+                          <m:e>
+                            <m:r>
+                              <a:rPr lang="en-US" i="1">
+                                <a:latin typeface="Cambria Math" panose="02040503050406030204" pitchFamily="18" charset="0"/>
+                              </a:rPr>
+                              <m:t>𝐶</m:t>
+                            </m:r>
+                          </m:e>
+                        </m:acc>
+                      </m:e>
+                    </m:d>
+                  </m:oMath>
+                </a14:m>
+                <a:r>
+                  <a:rPr lang="en-US" dirty="0"/>
+                  <a:t> </a:t>
+                </a:r>
+                <a:r>
+                  <a:rPr lang="en-US" dirty="0">
+                    <a:solidFill>
+                      <a:schemeClr val="accent6">
+                        <a:lumMod val="75000"/>
+                      </a:schemeClr>
+                    </a:solidFill>
+                  </a:rPr>
+                  <a:t>//Distribute</a:t>
+                </a:r>
+              </a:p>
+              <a:p>
+                <a:pPr lvl="2"/>
+                <a:r>
+                  <a:rPr lang="en-US" i="1" dirty="0">
+                    <a:latin typeface="Cambria Math" panose="02040503050406030204" pitchFamily="18" charset="0"/>
+                    <a:sym typeface="Wingdings" panose="05000000000000000000" pitchFamily="2" charset="2"/>
+                  </a:rPr>
+                  <a:t> A</a:t>
+                </a:r>
+                <a:r>
+                  <a:rPr lang="en-US" dirty="0"/>
+                  <a:t> </a:t>
+                </a:r>
+                <a14:m>
+                  <m:oMath xmlns:m="http://schemas.openxmlformats.org/officeDocument/2006/math">
+                    <m:acc>
+                      <m:accPr>
+                        <m:chr m:val="̅"/>
+                        <m:ctrlPr>
+                          <a:rPr lang="en-US" i="1">
+                            <a:latin typeface="Cambria Math" panose="02040503050406030204" pitchFamily="18" charset="0"/>
+                          </a:rPr>
+                        </m:ctrlPr>
+                      </m:accPr>
+                      <m:e>
+                        <m:r>
+                          <a:rPr lang="en-US" i="1" smtClean="0">
+                            <a:latin typeface="Cambria Math" panose="02040503050406030204" pitchFamily="18" charset="0"/>
+                          </a:rPr>
+                          <m:t>𝐵</m:t>
+                        </m:r>
+                        <m:r>
+                          <a:rPr lang="en-US" b="0" i="1" smtClean="0">
+                            <a:latin typeface="Cambria Math" panose="02040503050406030204" pitchFamily="18" charset="0"/>
+                          </a:rPr>
+                          <m:t>𝐴</m:t>
+                        </m:r>
+                      </m:e>
+                    </m:acc>
+                  </m:oMath>
+                </a14:m>
+                <a:r>
+                  <a:rPr lang="en-US" i="1" dirty="0">
+                    <a:latin typeface="Cambria Math" panose="02040503050406030204" pitchFamily="18" charset="0"/>
+                  </a:rPr>
+                  <a:t>  + </a:t>
+                </a:r>
+                <a14:m>
+                  <m:oMath xmlns:m="http://schemas.openxmlformats.org/officeDocument/2006/math">
+                    <m:r>
+                      <a:rPr lang="en-US" i="1">
+                        <a:latin typeface="Cambria Math" panose="02040503050406030204" pitchFamily="18" charset="0"/>
+                      </a:rPr>
+                      <m:t>𝐴</m:t>
+                    </m:r>
+                    <m:acc>
+                      <m:accPr>
+                        <m:chr m:val="̅"/>
+                        <m:ctrlPr>
+                          <a:rPr lang="en-US" i="1">
+                            <a:latin typeface="Cambria Math" panose="02040503050406030204" pitchFamily="18" charset="0"/>
+                          </a:rPr>
+                        </m:ctrlPr>
+                      </m:accPr>
+                      <m:e>
+                        <m:r>
+                          <a:rPr lang="en-US" i="1">
+                            <a:latin typeface="Cambria Math" panose="02040503050406030204" pitchFamily="18" charset="0"/>
+                          </a:rPr>
+                          <m:t>𝐵</m:t>
+                        </m:r>
+                        <m:r>
+                          <a:rPr lang="en-US" i="1">
+                            <a:latin typeface="Cambria Math" panose="02040503050406030204" pitchFamily="18" charset="0"/>
+                          </a:rPr>
+                          <m:t>𝐶</m:t>
+                        </m:r>
+                      </m:e>
+                    </m:acc>
+                  </m:oMath>
+                </a14:m>
+                <a:r>
+                  <a:rPr lang="en-US" i="1" dirty="0">
+                    <a:latin typeface="Cambria Math" panose="02040503050406030204" pitchFamily="18" charset="0"/>
+                  </a:rPr>
+                  <a:t> + B.C.</a:t>
+                </a:r>
+                <a:r>
+                  <a:rPr lang="en-US" dirty="0"/>
+                  <a:t> </a:t>
+                </a:r>
+                <a14:m>
+                  <m:oMath xmlns:m="http://schemas.openxmlformats.org/officeDocument/2006/math">
+                    <m:d>
+                      <m:dPr>
+                        <m:ctrlPr>
+                          <a:rPr lang="en-US" i="1">
+                            <a:latin typeface="Cambria Math" panose="02040503050406030204" pitchFamily="18" charset="0"/>
+                          </a:rPr>
+                        </m:ctrlPr>
+                      </m:dPr>
+                      <m:e>
+                        <m:acc>
+                          <m:accPr>
+                            <m:chr m:val="̅"/>
+                            <m:ctrlPr>
+                              <a:rPr lang="en-US" i="1">
+                                <a:latin typeface="Cambria Math" panose="02040503050406030204" pitchFamily="18" charset="0"/>
+                              </a:rPr>
+                            </m:ctrlPr>
+                          </m:accPr>
+                          <m:e>
+                            <m:r>
+                              <a:rPr lang="en-US" i="1">
+                                <a:latin typeface="Cambria Math" panose="02040503050406030204" pitchFamily="18" charset="0"/>
+                              </a:rPr>
+                              <m:t>𝐴</m:t>
+                            </m:r>
+                          </m:e>
+                        </m:acc>
+                        <m:r>
+                          <a:rPr lang="en-US" i="1">
+                            <a:latin typeface="Cambria Math" panose="02040503050406030204" pitchFamily="18" charset="0"/>
+                          </a:rPr>
+                          <m:t>+</m:t>
+                        </m:r>
+                        <m:acc>
+                          <m:accPr>
+                            <m:chr m:val="̅"/>
+                            <m:ctrlPr>
+                              <a:rPr lang="en-US" i="1">
+                                <a:latin typeface="Cambria Math" panose="02040503050406030204" pitchFamily="18" charset="0"/>
+                              </a:rPr>
+                            </m:ctrlPr>
+                          </m:accPr>
+                          <m:e>
+                            <m:r>
+                              <a:rPr lang="en-US" i="1">
+                                <a:latin typeface="Cambria Math" panose="02040503050406030204" pitchFamily="18" charset="0"/>
+                              </a:rPr>
+                              <m:t>𝐶</m:t>
+                            </m:r>
+                          </m:e>
+                        </m:acc>
+                      </m:e>
+                    </m:d>
+                  </m:oMath>
+                </a14:m>
+                <a:r>
+                  <a:rPr lang="en-US" i="1" dirty="0">
+                    <a:latin typeface="Cambria Math" panose="02040503050406030204" pitchFamily="18" charset="0"/>
+                  </a:rPr>
+                  <a:t> </a:t>
+                </a:r>
+              </a:p>
+              <a:p>
+                <a:pPr lvl="2"/>
+                <a:r>
+                  <a:rPr lang="en-US" i="1" dirty="0">
+                    <a:latin typeface="Cambria Math" panose="02040503050406030204" pitchFamily="18" charset="0"/>
+                    <a:sym typeface="Wingdings" panose="05000000000000000000" pitchFamily="2" charset="2"/>
+                  </a:rPr>
+                  <a:t>  </a:t>
+                </a:r>
+                <a14:m>
+                  <m:oMath xmlns:m="http://schemas.openxmlformats.org/officeDocument/2006/math">
+                    <m:r>
+                      <a:rPr lang="en-US" i="1" smtClean="0">
+                        <a:latin typeface="Cambria Math" panose="02040503050406030204" pitchFamily="18" charset="0"/>
+                      </a:rPr>
+                      <m:t>𝐴</m:t>
+                    </m:r>
+                    <m:acc>
+                      <m:accPr>
+                        <m:chr m:val="̅"/>
+                        <m:ctrlPr>
+                          <a:rPr lang="en-US" i="1">
+                            <a:latin typeface="Cambria Math" panose="02040503050406030204" pitchFamily="18" charset="0"/>
+                          </a:rPr>
+                        </m:ctrlPr>
+                      </m:accPr>
+                      <m:e>
+                        <m:r>
+                          <a:rPr lang="en-US" i="1">
+                            <a:latin typeface="Cambria Math" panose="02040503050406030204" pitchFamily="18" charset="0"/>
+                          </a:rPr>
+                          <m:t>𝐵𝐶</m:t>
+                        </m:r>
+                      </m:e>
+                    </m:acc>
+                  </m:oMath>
+                </a14:m>
+                <a:r>
+                  <a:rPr lang="en-US" i="1" dirty="0">
+                    <a:latin typeface="Cambria Math" panose="02040503050406030204" pitchFamily="18" charset="0"/>
+                  </a:rPr>
+                  <a:t> + B.C.</a:t>
+                </a:r>
+                <a:r>
+                  <a:rPr lang="en-US" dirty="0"/>
+                  <a:t> </a:t>
+                </a:r>
+                <a14:m>
+                  <m:oMath xmlns:m="http://schemas.openxmlformats.org/officeDocument/2006/math">
+                    <m:d>
+                      <m:dPr>
+                        <m:ctrlPr>
+                          <a:rPr lang="en-US" i="1">
+                            <a:latin typeface="Cambria Math" panose="02040503050406030204" pitchFamily="18" charset="0"/>
+                          </a:rPr>
+                        </m:ctrlPr>
+                      </m:dPr>
+                      <m:e>
+                        <m:acc>
+                          <m:accPr>
+                            <m:chr m:val="̅"/>
+                            <m:ctrlPr>
+                              <a:rPr lang="en-US" i="1">
+                                <a:latin typeface="Cambria Math" panose="02040503050406030204" pitchFamily="18" charset="0"/>
+                              </a:rPr>
+                            </m:ctrlPr>
+                          </m:accPr>
+                          <m:e>
+                            <m:r>
+                              <a:rPr lang="en-US" i="1">
+                                <a:latin typeface="Cambria Math" panose="02040503050406030204" pitchFamily="18" charset="0"/>
+                              </a:rPr>
+                              <m:t>𝐴</m:t>
+                            </m:r>
+                          </m:e>
+                        </m:acc>
+                        <m:r>
+                          <a:rPr lang="en-US" i="1">
+                            <a:latin typeface="Cambria Math" panose="02040503050406030204" pitchFamily="18" charset="0"/>
+                          </a:rPr>
+                          <m:t>+</m:t>
+                        </m:r>
+                        <m:acc>
+                          <m:accPr>
+                            <m:chr m:val="̅"/>
+                            <m:ctrlPr>
+                              <a:rPr lang="en-US" i="1">
+                                <a:latin typeface="Cambria Math" panose="02040503050406030204" pitchFamily="18" charset="0"/>
+                              </a:rPr>
+                            </m:ctrlPr>
+                          </m:accPr>
+                          <m:e>
+                            <m:r>
+                              <a:rPr lang="en-US" i="1">
+                                <a:latin typeface="Cambria Math" panose="02040503050406030204" pitchFamily="18" charset="0"/>
+                              </a:rPr>
+                              <m:t>𝐶</m:t>
+                            </m:r>
+                          </m:e>
+                        </m:acc>
+                      </m:e>
+                    </m:d>
+                  </m:oMath>
+                </a14:m>
+                <a:r>
+                  <a:rPr lang="en-US" i="1" dirty="0">
+                    <a:latin typeface="Cambria Math" panose="02040503050406030204" pitchFamily="18" charset="0"/>
+                  </a:rPr>
+                  <a:t> </a:t>
+                </a:r>
+                <a:r>
+                  <a:rPr lang="en-US" dirty="0">
+                    <a:solidFill>
+                      <a:schemeClr val="accent6">
+                        <a:lumMod val="75000"/>
+                      </a:schemeClr>
+                    </a:solidFill>
+                    <a:latin typeface="Cambria Math" panose="02040503050406030204" pitchFamily="18" charset="0"/>
+                  </a:rPr>
+                  <a:t>//Complement Law</a:t>
+                </a:r>
+              </a:p>
+              <a:p>
+                <a:pPr lvl="2"/>
+                <a:r>
+                  <a:rPr lang="en-US" dirty="0">
+                    <a:sym typeface="Wingdings" panose="05000000000000000000" pitchFamily="2" charset="2"/>
+                  </a:rPr>
+                  <a:t> </a:t>
+                </a:r>
+                <a14:m>
+                  <m:oMath xmlns:m="http://schemas.openxmlformats.org/officeDocument/2006/math">
+                    <m:r>
+                      <a:rPr lang="en-US" i="1" smtClean="0">
+                        <a:latin typeface="Cambria Math" panose="02040503050406030204" pitchFamily="18" charset="0"/>
+                      </a:rPr>
+                      <m:t>𝐴</m:t>
+                    </m:r>
+                    <m:acc>
+                      <m:accPr>
+                        <m:chr m:val="̅"/>
+                        <m:ctrlPr>
+                          <a:rPr lang="en-US" i="1">
+                            <a:latin typeface="Cambria Math" panose="02040503050406030204" pitchFamily="18" charset="0"/>
+                          </a:rPr>
+                        </m:ctrlPr>
+                      </m:accPr>
+                      <m:e>
+                        <m:r>
+                          <a:rPr lang="en-US" i="1">
+                            <a:latin typeface="Cambria Math" panose="02040503050406030204" pitchFamily="18" charset="0"/>
+                          </a:rPr>
+                          <m:t>𝐵𝐶</m:t>
+                        </m:r>
+                      </m:e>
+                    </m:acc>
+                    <m:r>
+                      <a:rPr lang="en-US" b="0" i="1" smtClean="0">
+                        <a:latin typeface="Cambria Math" panose="02040503050406030204" pitchFamily="18" charset="0"/>
+                      </a:rPr>
+                      <m:t> </m:t>
+                    </m:r>
+                  </m:oMath>
+                </a14:m>
+                <a:r>
+                  <a:rPr lang="en-US" i="1" dirty="0">
+                    <a:latin typeface="Cambria Math" panose="02040503050406030204" pitchFamily="18" charset="0"/>
+                  </a:rPr>
+                  <a:t>+ B.C.</a:t>
+                </a:r>
+                <a:r>
+                  <a:rPr lang="en-US" dirty="0"/>
+                  <a:t> </a:t>
+                </a:r>
+                <a14:m>
+                  <m:oMath xmlns:m="http://schemas.openxmlformats.org/officeDocument/2006/math">
+                    <m:acc>
+                      <m:accPr>
+                        <m:chr m:val="̅"/>
+                        <m:ctrlPr>
+                          <a:rPr lang="en-US" i="1">
+                            <a:latin typeface="Cambria Math" panose="02040503050406030204" pitchFamily="18" charset="0"/>
+                          </a:rPr>
+                        </m:ctrlPr>
+                      </m:accPr>
+                      <m:e>
+                        <m:r>
+                          <a:rPr lang="en-US" i="1">
+                            <a:latin typeface="Cambria Math" panose="02040503050406030204" pitchFamily="18" charset="0"/>
+                          </a:rPr>
+                          <m:t>𝐴</m:t>
+                        </m:r>
+                      </m:e>
+                    </m:acc>
+                  </m:oMath>
+                </a14:m>
+                <a:r>
+                  <a:rPr lang="en-US" i="1" dirty="0">
+                    <a:latin typeface="Cambria Math" panose="02040503050406030204" pitchFamily="18" charset="0"/>
+                  </a:rPr>
+                  <a:t> + B.C.</a:t>
+                </a:r>
+                <a14:m>
+                  <m:oMath xmlns:m="http://schemas.openxmlformats.org/officeDocument/2006/math">
+                    <m:acc>
+                      <m:accPr>
+                        <m:chr m:val="̅"/>
+                        <m:ctrlPr>
+                          <a:rPr lang="en-US" i="1">
+                            <a:latin typeface="Cambria Math" panose="02040503050406030204" pitchFamily="18" charset="0"/>
+                          </a:rPr>
+                        </m:ctrlPr>
+                      </m:accPr>
+                      <m:e>
+                        <m:r>
+                          <a:rPr lang="en-US" i="1">
+                            <a:latin typeface="Cambria Math" panose="02040503050406030204" pitchFamily="18" charset="0"/>
+                          </a:rPr>
+                          <m:t>𝐶</m:t>
+                        </m:r>
+                      </m:e>
+                    </m:acc>
+                  </m:oMath>
+                </a14:m>
+                <a:r>
+                  <a:rPr lang="en-US" i="1" dirty="0">
+                    <a:latin typeface="Cambria Math" panose="02040503050406030204" pitchFamily="18" charset="0"/>
+                  </a:rPr>
+                  <a:t> </a:t>
+                </a:r>
+                <a:r>
+                  <a:rPr lang="en-US" dirty="0">
+                    <a:solidFill>
+                      <a:schemeClr val="accent6">
+                        <a:lumMod val="75000"/>
+                      </a:schemeClr>
+                    </a:solidFill>
+                    <a:latin typeface="Cambria Math" panose="02040503050406030204" pitchFamily="18" charset="0"/>
+                  </a:rPr>
+                  <a:t>//Distribute</a:t>
+                </a:r>
+              </a:p>
+              <a:p>
+                <a:pPr lvl="2"/>
+                <a:r>
+                  <a:rPr lang="en-US" i="1" dirty="0">
+                    <a:latin typeface="Cambria Math" panose="02040503050406030204" pitchFamily="18" charset="0"/>
+                    <a:sym typeface="Wingdings" panose="05000000000000000000" pitchFamily="2" charset="2"/>
+                  </a:rPr>
+                  <a:t> </a:t>
+                </a:r>
+                <a14:m>
+                  <m:oMath xmlns:m="http://schemas.openxmlformats.org/officeDocument/2006/math">
+                    <m:r>
+                      <a:rPr lang="en-US" i="1" smtClean="0">
+                        <a:latin typeface="Cambria Math" panose="02040503050406030204" pitchFamily="18" charset="0"/>
+                      </a:rPr>
+                      <m:t>𝐴</m:t>
+                    </m:r>
+                    <m:acc>
+                      <m:accPr>
+                        <m:chr m:val="̅"/>
+                        <m:ctrlPr>
+                          <a:rPr lang="en-US" i="1">
+                            <a:latin typeface="Cambria Math" panose="02040503050406030204" pitchFamily="18" charset="0"/>
+                          </a:rPr>
+                        </m:ctrlPr>
+                      </m:accPr>
+                      <m:e>
+                        <m:r>
+                          <a:rPr lang="en-US" i="1">
+                            <a:latin typeface="Cambria Math" panose="02040503050406030204" pitchFamily="18" charset="0"/>
+                          </a:rPr>
+                          <m:t>𝐵𝐶</m:t>
+                        </m:r>
+                      </m:e>
+                    </m:acc>
+                    <m:r>
+                      <a:rPr lang="en-US" b="0" i="1" smtClean="0">
+                        <a:latin typeface="Cambria Math" panose="02040503050406030204" pitchFamily="18" charset="0"/>
+                      </a:rPr>
+                      <m:t> </m:t>
+                    </m:r>
+                  </m:oMath>
+                </a14:m>
+                <a:r>
+                  <a:rPr lang="en-US" i="1" dirty="0">
+                    <a:latin typeface="Cambria Math" panose="02040503050406030204" pitchFamily="18" charset="0"/>
+                  </a:rPr>
+                  <a:t>+ B.C.</a:t>
+                </a:r>
+                <a:r>
+                  <a:rPr lang="en-US" dirty="0"/>
+                  <a:t> </a:t>
+                </a:r>
+                <a14:m>
+                  <m:oMath xmlns:m="http://schemas.openxmlformats.org/officeDocument/2006/math">
+                    <m:acc>
+                      <m:accPr>
+                        <m:chr m:val="̅"/>
+                        <m:ctrlPr>
+                          <a:rPr lang="en-US" i="1">
+                            <a:latin typeface="Cambria Math" panose="02040503050406030204" pitchFamily="18" charset="0"/>
+                          </a:rPr>
+                        </m:ctrlPr>
+                      </m:accPr>
+                      <m:e>
+                        <m:r>
+                          <a:rPr lang="en-US" i="1">
+                            <a:latin typeface="Cambria Math" panose="02040503050406030204" pitchFamily="18" charset="0"/>
+                          </a:rPr>
+                          <m:t>𝐴</m:t>
+                        </m:r>
+                      </m:e>
+                    </m:acc>
+                  </m:oMath>
+                </a14:m>
+                <a:r>
+                  <a:rPr lang="en-US" i="1" dirty="0">
+                    <a:latin typeface="Cambria Math" panose="02040503050406030204" pitchFamily="18" charset="0"/>
+                  </a:rPr>
+                  <a:t>   </a:t>
+                </a:r>
+                <a:r>
+                  <a:rPr lang="en-US" dirty="0">
+                    <a:solidFill>
+                      <a:schemeClr val="accent6">
+                        <a:lumMod val="75000"/>
+                      </a:schemeClr>
+                    </a:solidFill>
+                    <a:latin typeface="Cambria Math" panose="02040503050406030204" pitchFamily="18" charset="0"/>
+                  </a:rPr>
+                  <a:t>//Complement  Law and rearrange</a:t>
+                </a:r>
+              </a:p>
+              <a:p>
+                <a:pPr marL="1371600" lvl="2" indent="-457200">
+                  <a:buFont typeface="+mj-lt"/>
+                  <a:buAutoNum type="arabicPeriod" startAt="5"/>
+                </a:pPr>
+                <a:endParaRPr lang="en-US" i="1" dirty="0">
+                  <a:latin typeface="Cambria Math" panose="02040503050406030204" pitchFamily="18" charset="0"/>
+                </a:endParaRPr>
+              </a:p>
+              <a:p>
+                <a:pPr marL="1371600" lvl="2" indent="-457200">
+                  <a:buFont typeface="+mj-lt"/>
+                  <a:buAutoNum type="arabicPeriod" startAt="5"/>
+                </a:pPr>
+                <a:endParaRPr lang="en-US" i="1" dirty="0">
+                  <a:latin typeface="Cambria Math" panose="02040503050406030204" pitchFamily="18" charset="0"/>
+                </a:endParaRPr>
+              </a:p>
+              <a:p>
+                <a:pPr marL="1371600" lvl="2" indent="-457200">
+                  <a:buFont typeface="+mj-lt"/>
+                  <a:buAutoNum type="arabicPeriod" startAt="5"/>
+                </a:pPr>
+                <a:endParaRPr lang="en-US" i="1" dirty="0">
+                  <a:latin typeface="Cambria Math" panose="02040503050406030204" pitchFamily="18" charset="0"/>
+                </a:endParaRPr>
+              </a:p>
+              <a:p>
+                <a:pPr marL="1371600" lvl="2" indent="-457200">
+                  <a:buFont typeface="+mj-lt"/>
+                  <a:buAutoNum type="arabicPeriod" startAt="5"/>
+                </a:pPr>
+                <a:endParaRPr lang="en-US" i="1" dirty="0">
+                  <a:latin typeface="Cambria Math" panose="02040503050406030204" pitchFamily="18" charset="0"/>
+                </a:endParaRPr>
+              </a:p>
+              <a:p>
+                <a:endParaRPr lang="en-US" dirty="0"/>
+              </a:p>
+            </p:txBody>
+          </p:sp>
+        </mc:Choice>
+        <mc:Fallback>
+          <p:sp>
+            <p:nvSpPr>
+              <p:cNvPr id="3" name="Content Placeholder 2">
+                <a:extLst>
+                  <a:ext uri="{FF2B5EF4-FFF2-40B4-BE49-F238E27FC236}">
+                    <a16:creationId xmlns:a16="http://schemas.microsoft.com/office/drawing/2014/main" id="{E2DA508B-0F76-F6D7-26DF-64443D0443BC}"/>
+                  </a:ext>
+                </a:extLst>
+              </p:cNvPr>
+              <p:cNvSpPr>
+                <a:spLocks noGrp="1" noRot="1" noChangeAspect="1" noMove="1" noResize="1" noEditPoints="1" noAdjustHandles="1" noChangeArrowheads="1" noChangeShapeType="1" noTextEdit="1"/>
+              </p:cNvSpPr>
+              <p:nvPr>
+                <p:ph idx="1"/>
+              </p:nvPr>
+            </p:nvSpPr>
+            <p:spPr>
+              <a:blipFill>
+                <a:blip r:embed="rId2"/>
+                <a:stretch>
+                  <a:fillRect t="-2241"/>
+                </a:stretch>
+              </a:blipFill>
+            </p:spPr>
+            <p:txBody>
+              <a:bodyPr/>
+              <a:lstStyle/>
+              <a:p>
+                <a:r>
+                  <a:rPr lang="en-US">
+                    <a:noFill/>
+                  </a:rPr>
+                  <a:t> </a:t>
+                </a:r>
+              </a:p>
+            </p:txBody>
+          </p:sp>
+        </mc:Fallback>
+      </mc:AlternateContent>
+    </p:spTree>
+    <p:extLst>
+      <p:ext uri="{BB962C8B-B14F-4D97-AF65-F5344CB8AC3E}">
+        <p14:creationId xmlns:p14="http://schemas.microsoft.com/office/powerpoint/2010/main" val="1507453919"/>
+      </p:ext>
+    </p:extLst>
+  </p:cSld>
+  <p:clrMapOvr>
+    <a:masterClrMapping/>
+  </p:clrMapOvr>
+</p:sld>
+</file>
+
+<file path=ppt/slides/slide85.xml><?xml version="1.0" encoding="utf-8"?>
+<p:sld xmlns:a="http://schemas.openxmlformats.org/drawingml/2006/main" xmlns:r="http://schemas.openxmlformats.org/officeDocument/2006/relationships" xmlns:p="http://schemas.openxmlformats.org/presentationml/2006/main">
+  <p:cSld>
+    <p:spTree>
+      <p:nvGrpSpPr>
         <p:cNvPr id="1" name=""/>
         <p:cNvGrpSpPr/>
         <p:nvPr/>
@@ -34698,6 +40152,398 @@
     <p:extLst>
       <p:ext uri="{BB962C8B-B14F-4D97-AF65-F5344CB8AC3E}">
         <p14:creationId xmlns:p14="http://schemas.microsoft.com/office/powerpoint/2010/main" val="2053329622"/>
+      </p:ext>
+    </p:extLst>
+  </p:cSld>
+  <p:clrMapOvr>
+    <a:masterClrMapping/>
+  </p:clrMapOvr>
+</p:sld>
+</file>
+
+<file path=ppt/slides/slide86.xml><?xml version="1.0" encoding="utf-8"?>
+<p:sld xmlns:a="http://schemas.openxmlformats.org/drawingml/2006/main" xmlns:r="http://schemas.openxmlformats.org/officeDocument/2006/relationships" xmlns:p="http://schemas.openxmlformats.org/presentationml/2006/main">
+  <p:cSld>
+    <p:spTree>
+      <p:nvGrpSpPr>
+        <p:cNvPr id="1" name=""/>
+        <p:cNvGrpSpPr/>
+        <p:nvPr/>
+      </p:nvGrpSpPr>
+      <p:grpSpPr>
+        <a:xfrm>
+          <a:off x="0" y="0"/>
+          <a:ext cx="0" cy="0"/>
+          <a:chOff x="0" y="0"/>
+          <a:chExt cx="0" cy="0"/>
+        </a:xfrm>
+      </p:grpSpPr>
+      <p:sp>
+        <p:nvSpPr>
+          <p:cNvPr id="2" name="Title 1">
+            <a:extLst>
+              <a:ext uri="{FF2B5EF4-FFF2-40B4-BE49-F238E27FC236}">
+                <a16:creationId xmlns:a16="http://schemas.microsoft.com/office/drawing/2014/main" id="{9080BA96-FDEB-0275-31FE-0F91C76B38FA}"/>
+              </a:ext>
+            </a:extLst>
+          </p:cNvPr>
+          <p:cNvSpPr>
+            <a:spLocks noGrp="1"/>
+          </p:cNvSpPr>
+          <p:nvPr>
+            <p:ph type="title"/>
+          </p:nvPr>
+        </p:nvSpPr>
+        <p:spPr/>
+        <p:txBody>
+          <a:bodyPr/>
+          <a:lstStyle/>
+          <a:p>
+            <a:r>
+              <a:rPr lang="en-US" dirty="0"/>
+              <a:t>Data Structures : Queue</a:t>
+            </a:r>
+          </a:p>
+        </p:txBody>
+      </p:sp>
+      <p:sp>
+        <p:nvSpPr>
+          <p:cNvPr id="3" name="Content Placeholder 2">
+            <a:extLst>
+              <a:ext uri="{FF2B5EF4-FFF2-40B4-BE49-F238E27FC236}">
+                <a16:creationId xmlns:a16="http://schemas.microsoft.com/office/drawing/2014/main" id="{F4FEB8CE-CBD7-DE7D-2F24-555C4474D047}"/>
+              </a:ext>
+            </a:extLst>
+          </p:cNvPr>
+          <p:cNvSpPr>
+            <a:spLocks noGrp="1"/>
+          </p:cNvSpPr>
+          <p:nvPr>
+            <p:ph idx="1"/>
+          </p:nvPr>
+        </p:nvSpPr>
+        <p:spPr/>
+        <p:txBody>
+          <a:bodyPr>
+            <a:normAutofit lnSpcReduction="10000"/>
+          </a:bodyPr>
+          <a:lstStyle/>
+          <a:p>
+            <a:r>
+              <a:rPr lang="en-US" dirty="0"/>
+              <a:t>FIFO : First In First Out </a:t>
+            </a:r>
+          </a:p>
+          <a:p>
+            <a:pPr lvl="1"/>
+            <a:r>
+              <a:rPr lang="en-US" dirty="0"/>
+              <a:t>Push</a:t>
+            </a:r>
+          </a:p>
+          <a:p>
+            <a:pPr lvl="2"/>
+            <a:r>
+              <a:rPr lang="en-US" dirty="0"/>
+              <a:t>Action: Push an item into queue</a:t>
+            </a:r>
+          </a:p>
+          <a:p>
+            <a:pPr lvl="2"/>
+            <a:r>
+              <a:rPr lang="en-US" dirty="0"/>
+              <a:t>Can also be called (enqueue , </a:t>
+            </a:r>
+            <a:r>
+              <a:rPr lang="en-US" dirty="0" err="1"/>
+              <a:t>push_back</a:t>
+            </a:r>
+            <a:r>
+              <a:rPr lang="en-US" dirty="0"/>
+              <a:t>, …)</a:t>
+            </a:r>
+          </a:p>
+          <a:p>
+            <a:pPr lvl="1"/>
+            <a:r>
+              <a:rPr lang="en-US" dirty="0"/>
+              <a:t>Pop</a:t>
+            </a:r>
+          </a:p>
+          <a:p>
+            <a:pPr lvl="2"/>
+            <a:r>
+              <a:rPr lang="en-US" dirty="0"/>
+              <a:t>Action :Remove the first item in queue</a:t>
+            </a:r>
+          </a:p>
+          <a:p>
+            <a:pPr lvl="2"/>
+            <a:r>
+              <a:rPr lang="en-US" dirty="0"/>
+              <a:t>Can also be called (dequeue , </a:t>
+            </a:r>
+            <a:r>
+              <a:rPr lang="en-US" dirty="0" err="1"/>
+              <a:t>pop_front</a:t>
+            </a:r>
+            <a:r>
+              <a:rPr lang="en-US" dirty="0"/>
+              <a:t>,…)</a:t>
+            </a:r>
+          </a:p>
+          <a:p>
+            <a:pPr lvl="1"/>
+            <a:r>
+              <a:rPr lang="en-US" dirty="0"/>
+              <a:t>Top </a:t>
+            </a:r>
+          </a:p>
+          <a:p>
+            <a:pPr lvl="2"/>
+            <a:r>
+              <a:rPr lang="en-US" dirty="0"/>
+              <a:t>Action : Peek (do not remove) the first item in queue</a:t>
+            </a:r>
+          </a:p>
+          <a:p>
+            <a:pPr lvl="2"/>
+            <a:r>
+              <a:rPr lang="en-US" dirty="0"/>
+              <a:t>Can also be called ( front, …)</a:t>
+            </a:r>
+          </a:p>
+          <a:p>
+            <a:pPr lvl="1"/>
+            <a:r>
+              <a:rPr lang="en-US" dirty="0"/>
+              <a:t>Simulation </a:t>
+            </a:r>
+          </a:p>
+          <a:p>
+            <a:pPr lvl="2"/>
+            <a:r>
+              <a:rPr lang="en-US" dirty="0"/>
+              <a:t>ems_winter_2025_acsl101\source\</a:t>
+            </a:r>
+            <a:r>
+              <a:rPr lang="en-US" dirty="0" err="1"/>
+              <a:t>queue</a:t>
+            </a:r>
+            <a:r>
+              <a:rPr lang="en-US" err="1"/>
+              <a:t>_</a:t>
+            </a:r>
+            <a:r>
+              <a:rPr lang="en-US"/>
+              <a:t>stack</a:t>
+            </a:r>
+            <a:endParaRPr lang="en-US" dirty="0"/>
+          </a:p>
+        </p:txBody>
+      </p:sp>
+    </p:spTree>
+    <p:extLst>
+      <p:ext uri="{BB962C8B-B14F-4D97-AF65-F5344CB8AC3E}">
+        <p14:creationId xmlns:p14="http://schemas.microsoft.com/office/powerpoint/2010/main" val="1296858548"/>
+      </p:ext>
+    </p:extLst>
+  </p:cSld>
+  <p:clrMapOvr>
+    <a:masterClrMapping/>
+  </p:clrMapOvr>
+</p:sld>
+</file>
+
+<file path=ppt/slides/slide87.xml><?xml version="1.0" encoding="utf-8"?>
+<p:sld xmlns:a="http://schemas.openxmlformats.org/drawingml/2006/main" xmlns:r="http://schemas.openxmlformats.org/officeDocument/2006/relationships" xmlns:p="http://schemas.openxmlformats.org/presentationml/2006/main">
+  <p:cSld>
+    <p:spTree>
+      <p:nvGrpSpPr>
+        <p:cNvPr id="1" name="">
+          <a:extLst>
+            <a:ext uri="{FF2B5EF4-FFF2-40B4-BE49-F238E27FC236}">
+              <a16:creationId xmlns:a16="http://schemas.microsoft.com/office/drawing/2014/main" id="{61E837F5-6EB6-D652-74CB-258C06155FA8}"/>
+            </a:ext>
+          </a:extLst>
+        </p:cNvPr>
+        <p:cNvGrpSpPr/>
+        <p:nvPr/>
+      </p:nvGrpSpPr>
+      <p:grpSpPr>
+        <a:xfrm>
+          <a:off x="0" y="0"/>
+          <a:ext cx="0" cy="0"/>
+          <a:chOff x="0" y="0"/>
+          <a:chExt cx="0" cy="0"/>
+        </a:xfrm>
+      </p:grpSpPr>
+      <p:sp>
+        <p:nvSpPr>
+          <p:cNvPr id="2" name="Title 1">
+            <a:extLst>
+              <a:ext uri="{FF2B5EF4-FFF2-40B4-BE49-F238E27FC236}">
+                <a16:creationId xmlns:a16="http://schemas.microsoft.com/office/drawing/2014/main" id="{D1348800-5A6E-82AE-A5CB-5CDEE0CFD99F}"/>
+              </a:ext>
+            </a:extLst>
+          </p:cNvPr>
+          <p:cNvSpPr>
+            <a:spLocks noGrp="1"/>
+          </p:cNvSpPr>
+          <p:nvPr>
+            <p:ph type="title"/>
+          </p:nvPr>
+        </p:nvSpPr>
+        <p:spPr/>
+        <p:txBody>
+          <a:bodyPr/>
+          <a:lstStyle/>
+          <a:p>
+            <a:r>
+              <a:rPr lang="en-US" dirty="0"/>
+              <a:t>Data Structures : Stack</a:t>
+            </a:r>
+          </a:p>
+        </p:txBody>
+      </p:sp>
+      <p:sp>
+        <p:nvSpPr>
+          <p:cNvPr id="3" name="Content Placeholder 2">
+            <a:extLst>
+              <a:ext uri="{FF2B5EF4-FFF2-40B4-BE49-F238E27FC236}">
+                <a16:creationId xmlns:a16="http://schemas.microsoft.com/office/drawing/2014/main" id="{746A019D-DD89-5C1B-B36F-A3C88E7A9614}"/>
+              </a:ext>
+            </a:extLst>
+          </p:cNvPr>
+          <p:cNvSpPr>
+            <a:spLocks noGrp="1"/>
+          </p:cNvSpPr>
+          <p:nvPr>
+            <p:ph idx="1"/>
+          </p:nvPr>
+        </p:nvSpPr>
+        <p:spPr/>
+        <p:txBody>
+          <a:bodyPr>
+            <a:normAutofit lnSpcReduction="10000"/>
+          </a:bodyPr>
+          <a:lstStyle/>
+          <a:p>
+            <a:r>
+              <a:rPr lang="en-US" dirty="0"/>
+              <a:t>LIFO : Last In First Out </a:t>
+            </a:r>
+          </a:p>
+          <a:p>
+            <a:pPr lvl="1"/>
+            <a:r>
+              <a:rPr lang="en-US" dirty="0"/>
+              <a:t>Push</a:t>
+            </a:r>
+          </a:p>
+          <a:p>
+            <a:pPr lvl="2"/>
+            <a:r>
+              <a:rPr lang="en-US" dirty="0"/>
+              <a:t>Action: Push an item into stack</a:t>
+            </a:r>
+          </a:p>
+          <a:p>
+            <a:pPr lvl="2"/>
+            <a:r>
+              <a:rPr lang="en-US" dirty="0"/>
+              <a:t>Can also be called (</a:t>
+            </a:r>
+            <a:r>
+              <a:rPr lang="en-US" dirty="0" err="1"/>
+              <a:t>insert,push_back</a:t>
+            </a:r>
+            <a:r>
+              <a:rPr lang="en-US" dirty="0"/>
+              <a:t>, …)</a:t>
+            </a:r>
+          </a:p>
+          <a:p>
+            <a:pPr lvl="1"/>
+            <a:r>
+              <a:rPr lang="en-US" dirty="0"/>
+              <a:t>Pop</a:t>
+            </a:r>
+          </a:p>
+          <a:p>
+            <a:pPr lvl="2"/>
+            <a:r>
+              <a:rPr lang="en-US" dirty="0"/>
+              <a:t>Action :Remove the first item in queue</a:t>
+            </a:r>
+          </a:p>
+          <a:p>
+            <a:pPr lvl="2"/>
+            <a:r>
+              <a:rPr lang="en-US" dirty="0"/>
+              <a:t>Can also be called ( </a:t>
+            </a:r>
+            <a:r>
+              <a:rPr lang="en-US" dirty="0" err="1"/>
+              <a:t>pop_front</a:t>
+            </a:r>
+            <a:r>
+              <a:rPr lang="en-US" dirty="0"/>
+              <a:t>,…)</a:t>
+            </a:r>
+          </a:p>
+          <a:p>
+            <a:pPr lvl="1"/>
+            <a:r>
+              <a:rPr lang="en-US" dirty="0"/>
+              <a:t>Top </a:t>
+            </a:r>
+          </a:p>
+          <a:p>
+            <a:pPr lvl="2"/>
+            <a:r>
+              <a:rPr lang="en-US" dirty="0"/>
+              <a:t>Action : Peek (do not remove) the first item in queue</a:t>
+            </a:r>
+          </a:p>
+          <a:p>
+            <a:pPr lvl="2"/>
+            <a:r>
+              <a:rPr lang="en-US" dirty="0"/>
+              <a:t>Can also be called (back, …)</a:t>
+            </a:r>
+          </a:p>
+          <a:p>
+            <a:pPr lvl="1"/>
+            <a:r>
+              <a:rPr lang="en-US" dirty="0"/>
+              <a:t>Simulation </a:t>
+            </a:r>
+          </a:p>
+          <a:p>
+            <a:pPr lvl="2"/>
+            <a:r>
+              <a:rPr lang="en-US" dirty="0"/>
+              <a:t>ems_winter_2025_acsl101\source\</a:t>
+            </a:r>
+            <a:r>
+              <a:rPr lang="en-US" dirty="0" err="1"/>
+              <a:t>queue_stack</a:t>
+            </a:r>
+            <a:endParaRPr lang="en-US" dirty="0"/>
+          </a:p>
+          <a:p>
+            <a:pPr marL="914400" lvl="2" indent="0">
+              <a:buNone/>
+            </a:pPr>
+            <a:endParaRPr lang="en-US" dirty="0"/>
+          </a:p>
+        </p:txBody>
+      </p:sp>
+    </p:spTree>
+    <p:extLst>
+      <p:ext uri="{BB962C8B-B14F-4D97-AF65-F5344CB8AC3E}">
+        <p14:creationId xmlns:p14="http://schemas.microsoft.com/office/powerpoint/2010/main" val="638710185"/>
       </p:ext>
     </p:extLst>
   </p:cSld>

--- a/all/ExploringCSConceptsViaACSLCompetitions_all.pptx
+++ b/all/ExploringCSConceptsViaACSLCompetitions_all.pptx
@@ -5,7 +5,7 @@
     <p:sldMasterId id="2147483648" r:id="rId1"/>
   </p:sldMasterIdLst>
   <p:notesMasterIdLst>
-    <p:notesMasterId r:id="rId89"/>
+    <p:notesMasterId r:id="rId102"/>
   </p:notesMasterIdLst>
   <p:sldIdLst>
     <p:sldId id="256" r:id="rId2"/>
@@ -87,14 +87,27 @@
     <p:sldId id="344" r:id="rId78"/>
     <p:sldId id="345" r:id="rId79"/>
     <p:sldId id="347" r:id="rId80"/>
-    <p:sldId id="349" r:id="rId81"/>
-    <p:sldId id="351" r:id="rId82"/>
-    <p:sldId id="353" r:id="rId83"/>
-    <p:sldId id="352" r:id="rId84"/>
-    <p:sldId id="354" r:id="rId85"/>
-    <p:sldId id="350" r:id="rId86"/>
-    <p:sldId id="355" r:id="rId87"/>
-    <p:sldId id="356" r:id="rId88"/>
+    <p:sldId id="357" r:id="rId81"/>
+    <p:sldId id="349" r:id="rId82"/>
+    <p:sldId id="351" r:id="rId83"/>
+    <p:sldId id="353" r:id="rId84"/>
+    <p:sldId id="352" r:id="rId85"/>
+    <p:sldId id="354" r:id="rId86"/>
+    <p:sldId id="350" r:id="rId87"/>
+    <p:sldId id="355" r:id="rId88"/>
+    <p:sldId id="356" r:id="rId89"/>
+    <p:sldId id="358" r:id="rId90"/>
+    <p:sldId id="367" r:id="rId91"/>
+    <p:sldId id="359" r:id="rId92"/>
+    <p:sldId id="368" r:id="rId93"/>
+    <p:sldId id="360" r:id="rId94"/>
+    <p:sldId id="369" r:id="rId95"/>
+    <p:sldId id="361" r:id="rId96"/>
+    <p:sldId id="370" r:id="rId97"/>
+    <p:sldId id="363" r:id="rId98"/>
+    <p:sldId id="371" r:id="rId99"/>
+    <p:sldId id="366" r:id="rId100"/>
+    <p:sldId id="372" r:id="rId101"/>
   </p:sldIdLst>
   <p:sldSz cx="12192000" cy="6858000"/>
   <p:notesSz cx="6858000" cy="9144000"/>
@@ -472,7 +485,7 @@
           <a:p>
             <a:fld id="{15653688-98A8-4F3B-A740-8E6568AE1BCB}" type="datetimeFigureOut">
               <a:rPr lang="en-US" smtClean="0"/>
-              <a:t>3/5/2026</a:t>
+              <a:t>3/19/2026</a:t>
             </a:fld>
             <a:endParaRPr lang="en-US"/>
           </a:p>
@@ -2226,7 +2239,7 @@
           <a:p>
             <a:fld id="{20CB266D-A331-4A79-AB46-FEF40B16CF9B}" type="datetimeFigureOut">
               <a:rPr lang="en-US" smtClean="0"/>
-              <a:t>3/5/2026</a:t>
+              <a:t>3/19/2026</a:t>
             </a:fld>
             <a:endParaRPr lang="en-US"/>
           </a:p>
@@ -2424,7 +2437,7 @@
           <a:p>
             <a:fld id="{20CB266D-A331-4A79-AB46-FEF40B16CF9B}" type="datetimeFigureOut">
               <a:rPr lang="en-US" smtClean="0"/>
-              <a:t>3/5/2026</a:t>
+              <a:t>3/19/2026</a:t>
             </a:fld>
             <a:endParaRPr lang="en-US"/>
           </a:p>
@@ -2632,7 +2645,7 @@
           <a:p>
             <a:fld id="{20CB266D-A331-4A79-AB46-FEF40B16CF9B}" type="datetimeFigureOut">
               <a:rPr lang="en-US" smtClean="0"/>
-              <a:t>3/5/2026</a:t>
+              <a:t>3/19/2026</a:t>
             </a:fld>
             <a:endParaRPr lang="en-US"/>
           </a:p>
@@ -2830,7 +2843,7 @@
           <a:p>
             <a:fld id="{20CB266D-A331-4A79-AB46-FEF40B16CF9B}" type="datetimeFigureOut">
               <a:rPr lang="en-US" smtClean="0"/>
-              <a:t>3/5/2026</a:t>
+              <a:t>3/19/2026</a:t>
             </a:fld>
             <a:endParaRPr lang="en-US"/>
           </a:p>
@@ -3105,7 +3118,7 @@
           <a:p>
             <a:fld id="{20CB266D-A331-4A79-AB46-FEF40B16CF9B}" type="datetimeFigureOut">
               <a:rPr lang="en-US" smtClean="0"/>
-              <a:t>3/5/2026</a:t>
+              <a:t>3/19/2026</a:t>
             </a:fld>
             <a:endParaRPr lang="en-US"/>
           </a:p>
@@ -3370,7 +3383,7 @@
           <a:p>
             <a:fld id="{20CB266D-A331-4A79-AB46-FEF40B16CF9B}" type="datetimeFigureOut">
               <a:rPr lang="en-US" smtClean="0"/>
-              <a:t>3/5/2026</a:t>
+              <a:t>3/19/2026</a:t>
             </a:fld>
             <a:endParaRPr lang="en-US"/>
           </a:p>
@@ -3782,7 +3795,7 @@
           <a:p>
             <a:fld id="{20CB266D-A331-4A79-AB46-FEF40B16CF9B}" type="datetimeFigureOut">
               <a:rPr lang="en-US" smtClean="0"/>
-              <a:t>3/5/2026</a:t>
+              <a:t>3/19/2026</a:t>
             </a:fld>
             <a:endParaRPr lang="en-US"/>
           </a:p>
@@ -3923,7 +3936,7 @@
           <a:p>
             <a:fld id="{20CB266D-A331-4A79-AB46-FEF40B16CF9B}" type="datetimeFigureOut">
               <a:rPr lang="en-US" smtClean="0"/>
-              <a:t>3/5/2026</a:t>
+              <a:t>3/19/2026</a:t>
             </a:fld>
             <a:endParaRPr lang="en-US"/>
           </a:p>
@@ -4036,7 +4049,7 @@
           <a:p>
             <a:fld id="{20CB266D-A331-4A79-AB46-FEF40B16CF9B}" type="datetimeFigureOut">
               <a:rPr lang="en-US" smtClean="0"/>
-              <a:t>3/5/2026</a:t>
+              <a:t>3/19/2026</a:t>
             </a:fld>
             <a:endParaRPr lang="en-US"/>
           </a:p>
@@ -4347,7 +4360,7 @@
           <a:p>
             <a:fld id="{20CB266D-A331-4A79-AB46-FEF40B16CF9B}" type="datetimeFigureOut">
               <a:rPr lang="en-US" smtClean="0"/>
-              <a:t>3/5/2026</a:t>
+              <a:t>3/19/2026</a:t>
             </a:fld>
             <a:endParaRPr lang="en-US"/>
           </a:p>
@@ -4635,7 +4648,7 @@
           <a:p>
             <a:fld id="{20CB266D-A331-4A79-AB46-FEF40B16CF9B}" type="datetimeFigureOut">
               <a:rPr lang="en-US" smtClean="0"/>
-              <a:t>3/5/2026</a:t>
+              <a:t>3/19/2026</a:t>
             </a:fld>
             <a:endParaRPr lang="en-US"/>
           </a:p>
@@ -4876,7 +4889,7 @@
           <a:p>
             <a:fld id="{20CB266D-A331-4A79-AB46-FEF40B16CF9B}" type="datetimeFigureOut">
               <a:rPr lang="en-US" smtClean="0"/>
-              <a:t>3/5/2026</a:t>
+              <a:t>3/19/2026</a:t>
             </a:fld>
             <a:endParaRPr lang="en-US"/>
           </a:p>
@@ -5558,6 +5571,181 @@
     <p:extLst>
       <p:ext uri="{BB962C8B-B14F-4D97-AF65-F5344CB8AC3E}">
         <p14:creationId xmlns:p14="http://schemas.microsoft.com/office/powerpoint/2010/main" val="3428240167"/>
+      </p:ext>
+    </p:extLst>
+  </p:cSld>
+  <p:clrMapOvr>
+    <a:masterClrMapping/>
+  </p:clrMapOvr>
+</p:sld>
+</file>
+
+<file path=ppt/slides/slide100.xml><?xml version="1.0" encoding="utf-8"?>
+<p:sld xmlns:a="http://schemas.openxmlformats.org/drawingml/2006/main" xmlns:r="http://schemas.openxmlformats.org/officeDocument/2006/relationships" xmlns:p="http://schemas.openxmlformats.org/presentationml/2006/main">
+  <p:cSld>
+    <p:spTree>
+      <p:nvGrpSpPr>
+        <p:cNvPr id="1" name="">
+          <a:extLst>
+            <a:ext uri="{FF2B5EF4-FFF2-40B4-BE49-F238E27FC236}">
+              <a16:creationId xmlns:a16="http://schemas.microsoft.com/office/drawing/2014/main" id="{271978AA-FE52-CD93-522C-CD1CAD6EA1FF}"/>
+            </a:ext>
+          </a:extLst>
+        </p:cNvPr>
+        <p:cNvGrpSpPr/>
+        <p:nvPr/>
+      </p:nvGrpSpPr>
+      <p:grpSpPr>
+        <a:xfrm>
+          <a:off x="0" y="0"/>
+          <a:ext cx="0" cy="0"/>
+          <a:chOff x="0" y="0"/>
+          <a:chExt cx="0" cy="0"/>
+        </a:xfrm>
+      </p:grpSpPr>
+      <p:sp>
+        <p:nvSpPr>
+          <p:cNvPr id="2" name="Title 1">
+            <a:extLst>
+              <a:ext uri="{FF2B5EF4-FFF2-40B4-BE49-F238E27FC236}">
+                <a16:creationId xmlns:a16="http://schemas.microsoft.com/office/drawing/2014/main" id="{182D0B23-C7DE-7BD3-3432-914ED568A952}"/>
+              </a:ext>
+            </a:extLst>
+          </p:cNvPr>
+          <p:cNvSpPr>
+            <a:spLocks noGrp="1"/>
+          </p:cNvSpPr>
+          <p:nvPr>
+            <p:ph type="title"/>
+          </p:nvPr>
+        </p:nvSpPr>
+        <p:spPr/>
+        <p:txBody>
+          <a:bodyPr/>
+          <a:lstStyle/>
+          <a:p>
+            <a:r>
+              <a:rPr lang="en-US" dirty="0"/>
+              <a:t>What does this program do ? </a:t>
+            </a:r>
+            <a:r>
+              <a:rPr lang="en-US"/>
+              <a:t>A6</a:t>
+            </a:r>
+            <a:endParaRPr lang="en-US" dirty="0"/>
+          </a:p>
+        </p:txBody>
+      </p:sp>
+      <p:sp>
+        <p:nvSpPr>
+          <p:cNvPr id="4" name="Content Placeholder 3">
+            <a:extLst>
+              <a:ext uri="{FF2B5EF4-FFF2-40B4-BE49-F238E27FC236}">
+                <a16:creationId xmlns:a16="http://schemas.microsoft.com/office/drawing/2014/main" id="{F311FF15-17C3-E624-760A-CCA518D19322}"/>
+              </a:ext>
+            </a:extLst>
+          </p:cNvPr>
+          <p:cNvSpPr>
+            <a:spLocks noGrp="1"/>
+          </p:cNvSpPr>
+          <p:nvPr>
+            <p:ph idx="1"/>
+          </p:nvPr>
+        </p:nvSpPr>
+        <p:spPr/>
+        <p:txBody>
+          <a:bodyPr/>
+          <a:lstStyle/>
+          <a:p>
+            <a:r>
+              <a:rPr lang="en-US" dirty="0"/>
+              <a:t>1 2 3 4</a:t>
+            </a:r>
+          </a:p>
+          <a:p>
+            <a:pPr lvl="1"/>
+            <a:r>
+              <a:rPr lang="en-US" dirty="0"/>
+              <a:t>Bubble sort</a:t>
+            </a:r>
+          </a:p>
+          <a:p>
+            <a:pPr lvl="2"/>
+            <a:r>
+              <a:rPr lang="en-US" dirty="0"/>
+              <a:t>Pass 1 </a:t>
+            </a:r>
+            <a:r>
+              <a:rPr lang="en-US" dirty="0">
+                <a:sym typeface="Wingdings" panose="05000000000000000000" pitchFamily="2" charset="2"/>
+              </a:rPr>
+              <a:t> 1,3,2,4</a:t>
+            </a:r>
+          </a:p>
+          <a:p>
+            <a:pPr lvl="2"/>
+            <a:r>
+              <a:rPr lang="en-US" dirty="0">
+                <a:sym typeface="Wingdings" panose="05000000000000000000" pitchFamily="2" charset="2"/>
+              </a:rPr>
+              <a:t>Pass 2  1,2,3,4</a:t>
+            </a:r>
+          </a:p>
+          <a:p>
+            <a:pPr lvl="2"/>
+            <a:r>
+              <a:rPr lang="en-US" dirty="0">
+                <a:sym typeface="Wingdings" panose="05000000000000000000" pitchFamily="2" charset="2"/>
+              </a:rPr>
+              <a:t>Pass 3  (No Change)</a:t>
+            </a:r>
+          </a:p>
+          <a:p>
+            <a:pPr lvl="2"/>
+            <a:r>
+              <a:rPr lang="en-US" dirty="0">
+                <a:sym typeface="Wingdings" panose="05000000000000000000" pitchFamily="2" charset="2"/>
+              </a:rPr>
+              <a:t>Pass 4  (No Change)</a:t>
+            </a:r>
+            <a:endParaRPr lang="en-US" dirty="0"/>
+          </a:p>
+        </p:txBody>
+      </p:sp>
+      <p:pic>
+        <p:nvPicPr>
+          <p:cNvPr id="6" name="Content Placeholder 4">
+            <a:extLst>
+              <a:ext uri="{FF2B5EF4-FFF2-40B4-BE49-F238E27FC236}">
+                <a16:creationId xmlns:a16="http://schemas.microsoft.com/office/drawing/2014/main" id="{481A62B2-389D-56BD-B428-9D0DBD6C135E}"/>
+              </a:ext>
+            </a:extLst>
+          </p:cNvPr>
+          <p:cNvPicPr>
+            <a:picLocks noChangeAspect="1"/>
+          </p:cNvPicPr>
+          <p:nvPr/>
+        </p:nvPicPr>
+        <p:blipFill>
+          <a:blip r:embed="rId2"/>
+          <a:stretch>
+            <a:fillRect/>
+          </a:stretch>
+        </p:blipFill>
+        <p:spPr>
+          <a:xfrm>
+            <a:off x="5683469" y="1943866"/>
+            <a:ext cx="4660660" cy="3876704"/>
+          </a:xfrm>
+          <a:prstGeom prst="rect">
+            <a:avLst/>
+          </a:prstGeom>
+        </p:spPr>
+      </p:pic>
+    </p:spTree>
+    <p:extLst>
+      <p:ext uri="{BB962C8B-B14F-4D97-AF65-F5344CB8AC3E}">
+        <p14:creationId xmlns:p14="http://schemas.microsoft.com/office/powerpoint/2010/main" val="2440834063"/>
       </p:ext>
     </p:extLst>
   </p:cSld>
@@ -32589,17 +32777,10 @@
             </p:nvSpPr>
             <p:spPr/>
             <p:txBody>
-              <a:bodyPr/>
+              <a:bodyPr>
+                <a:normAutofit lnSpcReduction="10000"/>
+              </a:bodyPr>
               <a:lstStyle/>
-              <a:p>
-                <a:r>
-                  <a:rPr lang="en-US" dirty="0"/>
-                  <a:t>These are hard , think of them as puzzles,</a:t>
-                </a:r>
-                <a:endParaRPr lang="en-US" i="1" dirty="0">
-                  <a:latin typeface="Cambria Math" panose="02040503050406030204" pitchFamily="18" charset="0"/>
-                </a:endParaRPr>
-              </a:p>
               <a:p>
                 <a:pPr lvl="1"/>
                 <a14:m>
@@ -32734,6 +32915,40 @@
                 </a:endParaRPr>
               </a:p>
               <a:p>
+                <a:pPr lvl="2"/>
+                <a14:m>
+                  <m:oMath xmlns:m="http://schemas.openxmlformats.org/officeDocument/2006/math">
+                    <m:r>
+                      <a:rPr lang="en-US" b="1" i="1" smtClean="0">
+                        <a:latin typeface="Cambria Math" panose="02040503050406030204" pitchFamily="18" charset="0"/>
+                      </a:rPr>
+                      <m:t> </m:t>
+                    </m:r>
+                    <m:r>
+                      <a:rPr lang="en-US" b="1" i="1" smtClean="0">
+                        <a:latin typeface="Cambria Math" panose="02040503050406030204" pitchFamily="18" charset="0"/>
+                      </a:rPr>
+                      <m:t>𝑨</m:t>
+                    </m:r>
+                    <m:r>
+                      <a:rPr lang="en-US" b="1" i="1" smtClean="0">
+                        <a:latin typeface="Cambria Math" panose="02040503050406030204" pitchFamily="18" charset="0"/>
+                      </a:rPr>
+                      <m:t>+</m:t>
+                    </m:r>
+                    <m:r>
+                      <a:rPr lang="en-US" b="1" i="1" smtClean="0">
+                        <a:latin typeface="Cambria Math" panose="02040503050406030204" pitchFamily="18" charset="0"/>
+                      </a:rPr>
+                      <m:t>𝑪</m:t>
+                    </m:r>
+                  </m:oMath>
+                </a14:m>
+                <a:endParaRPr lang="en-US" b="1" i="1" dirty="0">
+                  <a:latin typeface="Cambria Math" panose="02040503050406030204" pitchFamily="18" charset="0"/>
+                </a:endParaRPr>
+              </a:p>
+              <a:p>
                 <a:pPr lvl="1"/>
                 <a14:m>
                   <m:oMath xmlns:m="http://schemas.openxmlformats.org/officeDocument/2006/math">
@@ -32860,9 +33075,43 @@
                         </m:r>
                       </m:e>
                     </m:d>
+                    <m:r>
+                      <a:rPr lang="en-US" b="0" i="1" smtClean="0">
+                        <a:latin typeface="Cambria Math" panose="02040503050406030204" pitchFamily="18" charset="0"/>
+                      </a:rPr>
+                      <m:t> </m:t>
+                    </m:r>
                   </m:oMath>
                 </a14:m>
                 <a:endParaRPr lang="en-US" i="1" dirty="0">
+                  <a:latin typeface="Cambria Math" panose="02040503050406030204" pitchFamily="18" charset="0"/>
+                </a:endParaRPr>
+              </a:p>
+              <a:p>
+                <a:pPr lvl="2"/>
+                <a14:m>
+                  <m:oMath xmlns:m="http://schemas.openxmlformats.org/officeDocument/2006/math">
+                    <m:r>
+                      <a:rPr lang="en-US" b="1" i="1" smtClean="0">
+                        <a:latin typeface="Cambria Math" panose="02040503050406030204" pitchFamily="18" charset="0"/>
+                      </a:rPr>
+                      <m:t>𝑨</m:t>
+                    </m:r>
+                    <m:r>
+                      <a:rPr lang="en-US" b="1" i="1" smtClean="0">
+                        <a:latin typeface="Cambria Math" panose="02040503050406030204" pitchFamily="18" charset="0"/>
+                      </a:rPr>
+                      <m:t>.</m:t>
+                    </m:r>
+                    <m:r>
+                      <a:rPr lang="en-US" b="1" i="1" smtClean="0">
+                        <a:latin typeface="Cambria Math" panose="02040503050406030204" pitchFamily="18" charset="0"/>
+                      </a:rPr>
+                      <m:t>𝑩</m:t>
+                    </m:r>
+                  </m:oMath>
+                </a14:m>
+                <a:endParaRPr lang="en-US" b="1" i="1" dirty="0">
                   <a:latin typeface="Cambria Math" panose="02040503050406030204" pitchFamily="18" charset="0"/>
                 </a:endParaRPr>
               </a:p>
@@ -32943,6 +33192,34 @@
                 </a:endParaRPr>
               </a:p>
               <a:p>
+                <a:pPr lvl="2"/>
+                <a14:m>
+                  <m:oMath xmlns:m="http://schemas.openxmlformats.org/officeDocument/2006/math">
+                    <m:acc>
+                      <m:accPr>
+                        <m:chr m:val="̅"/>
+                        <m:ctrlPr>
+                          <a:rPr lang="en-US" b="1" i="1">
+                            <a:latin typeface="Cambria Math" panose="02040503050406030204" pitchFamily="18" charset="0"/>
+                          </a:rPr>
+                        </m:ctrlPr>
+                      </m:accPr>
+                      <m:e>
+                        <m:r>
+                          <a:rPr lang="en-US" b="1" i="1">
+                            <a:latin typeface="Cambria Math" panose="02040503050406030204" pitchFamily="18" charset="0"/>
+                          </a:rPr>
+                          <m:t>𝑩</m:t>
+                        </m:r>
+                      </m:e>
+                    </m:acc>
+                  </m:oMath>
+                </a14:m>
+                <a:endParaRPr lang="en-US" b="1" i="1" dirty="0">
+                  <a:latin typeface="Cambria Math" panose="02040503050406030204" pitchFamily="18" charset="0"/>
+                </a:endParaRPr>
+              </a:p>
+              <a:p>
                 <a:pPr lvl="1"/>
                 <a14:m>
                   <m:oMath xmlns:m="http://schemas.openxmlformats.org/officeDocument/2006/math">
@@ -33074,6 +33351,61 @@
                 </a14:m>
                 <a:r>
                   <a:rPr lang="en-US" i="1" dirty="0">
+                    <a:latin typeface="Cambria Math" panose="02040503050406030204" pitchFamily="18" charset="0"/>
+                  </a:rPr>
+                  <a:t>)</a:t>
+                </a:r>
+              </a:p>
+              <a:p>
+                <a:pPr lvl="2"/>
+                <a14:m>
+                  <m:oMath xmlns:m="http://schemas.openxmlformats.org/officeDocument/2006/math">
+                    <m:r>
+                      <a:rPr lang="en-US" b="1" i="1" smtClean="0">
+                        <a:latin typeface="Cambria Math" panose="02040503050406030204" pitchFamily="18" charset="0"/>
+                      </a:rPr>
+                      <m:t>𝑩</m:t>
+                    </m:r>
+                    <m:r>
+                      <a:rPr lang="en-US" b="1" i="1" smtClean="0">
+                        <a:latin typeface="Cambria Math" panose="02040503050406030204" pitchFamily="18" charset="0"/>
+                      </a:rPr>
+                      <m:t>.(</m:t>
+                    </m:r>
+                    <m:r>
+                      <a:rPr lang="en-US" b="1" i="1" smtClean="0">
+                        <a:latin typeface="Cambria Math" panose="02040503050406030204" pitchFamily="18" charset="0"/>
+                      </a:rPr>
+                      <m:t>𝑨</m:t>
+                    </m:r>
+                    <m:r>
+                      <a:rPr lang="en-US" b="1" i="1" smtClean="0">
+                        <a:latin typeface="Cambria Math" panose="02040503050406030204" pitchFamily="18" charset="0"/>
+                      </a:rPr>
+                      <m:t>+</m:t>
+                    </m:r>
+                    <m:acc>
+                      <m:accPr>
+                        <m:chr m:val="̅"/>
+                        <m:ctrlPr>
+                          <a:rPr lang="en-US" b="1" i="1" smtClean="0">
+                            <a:latin typeface="Cambria Math" panose="02040503050406030204" pitchFamily="18" charset="0"/>
+                          </a:rPr>
+                        </m:ctrlPr>
+                      </m:accPr>
+                      <m:e>
+                        <m:r>
+                          <a:rPr lang="en-US" b="1" i="1" smtClean="0">
+                            <a:latin typeface="Cambria Math" panose="02040503050406030204" pitchFamily="18" charset="0"/>
+                          </a:rPr>
+                          <m:t>𝑪</m:t>
+                        </m:r>
+                      </m:e>
+                    </m:acc>
+                  </m:oMath>
+                </a14:m>
+                <a:r>
+                  <a:rPr lang="en-US" b="1" i="1" dirty="0">
                     <a:latin typeface="Cambria Math" panose="02040503050406030204" pitchFamily="18" charset="0"/>
                   </a:rPr>
                   <a:t>)</a:t>
@@ -33214,6 +33546,100 @@
                 </a:endParaRPr>
               </a:p>
               <a:p>
+                <a:pPr lvl="2"/>
+                <a14:m>
+                  <m:oMath xmlns:m="http://schemas.openxmlformats.org/officeDocument/2006/math">
+                    <m:r>
+                      <a:rPr lang="en-US" b="1" i="1" smtClean="0">
+                        <a:latin typeface="Cambria Math" panose="02040503050406030204" pitchFamily="18" charset="0"/>
+                      </a:rPr>
+                      <m:t>𝑨</m:t>
+                    </m:r>
+                    <m:r>
+                      <a:rPr lang="en-US" b="1" i="1" smtClean="0">
+                        <a:latin typeface="Cambria Math" panose="02040503050406030204" pitchFamily="18" charset="0"/>
+                      </a:rPr>
+                      <m:t>.</m:t>
+                    </m:r>
+                    <m:acc>
+                      <m:accPr>
+                        <m:chr m:val="̅"/>
+                        <m:ctrlPr>
+                          <a:rPr lang="en-US" b="1" i="1">
+                            <a:latin typeface="Cambria Math" panose="02040503050406030204" pitchFamily="18" charset="0"/>
+                          </a:rPr>
+                        </m:ctrlPr>
+                      </m:accPr>
+                      <m:e>
+                        <m:r>
+                          <a:rPr lang="en-US" b="1" i="1">
+                            <a:latin typeface="Cambria Math" panose="02040503050406030204" pitchFamily="18" charset="0"/>
+                          </a:rPr>
+                          <m:t>𝑩</m:t>
+                        </m:r>
+                        <m:r>
+                          <a:rPr lang="en-US" b="1" i="1" smtClean="0">
+                            <a:latin typeface="Cambria Math" panose="02040503050406030204" pitchFamily="18" charset="0"/>
+                          </a:rPr>
+                          <m:t>𝑪</m:t>
+                        </m:r>
+                      </m:e>
+                    </m:acc>
+                    <m:r>
+                      <a:rPr lang="en-US" b="1" i="1" smtClean="0">
+                        <a:latin typeface="Cambria Math" panose="02040503050406030204" pitchFamily="18" charset="0"/>
+                      </a:rPr>
+                      <m:t>+ </m:t>
+                    </m:r>
+                    <m:acc>
+                      <m:accPr>
+                        <m:chr m:val="̅"/>
+                        <m:ctrlPr>
+                          <a:rPr lang="en-US" b="1" i="1">
+                            <a:latin typeface="Cambria Math" panose="02040503050406030204" pitchFamily="18" charset="0"/>
+                          </a:rPr>
+                        </m:ctrlPr>
+                      </m:accPr>
+                      <m:e>
+                        <m:r>
+                          <a:rPr lang="en-US" b="1" i="1">
+                            <a:latin typeface="Cambria Math" panose="02040503050406030204" pitchFamily="18" charset="0"/>
+                          </a:rPr>
+                          <m:t>𝑨</m:t>
+                        </m:r>
+                      </m:e>
+                    </m:acc>
+                    <m:r>
+                      <a:rPr lang="en-US" b="1" i="1">
+                        <a:latin typeface="Cambria Math" panose="02040503050406030204" pitchFamily="18" charset="0"/>
+                      </a:rPr>
+                      <m:t>.</m:t>
+                    </m:r>
+                    <m:r>
+                      <a:rPr lang="en-US" b="1" i="1" smtClean="0">
+                        <a:latin typeface="Cambria Math" panose="02040503050406030204" pitchFamily="18" charset="0"/>
+                      </a:rPr>
+                      <m:t>𝑩</m:t>
+                    </m:r>
+                    <m:r>
+                      <a:rPr lang="en-US" b="1" i="1" smtClean="0">
+                        <a:latin typeface="Cambria Math" panose="02040503050406030204" pitchFamily="18" charset="0"/>
+                      </a:rPr>
+                      <m:t>.</m:t>
+                    </m:r>
+                    <m:r>
+                      <a:rPr lang="en-US" b="1" i="1">
+                        <a:latin typeface="Cambria Math" panose="02040503050406030204" pitchFamily="18" charset="0"/>
+                      </a:rPr>
+                      <m:t>𝑪</m:t>
+                    </m:r>
+                  </m:oMath>
+                </a14:m>
+                <a:endParaRPr lang="en-US" b="1" i="1" dirty="0">
+                  <a:latin typeface="Cambria Math" panose="02040503050406030204" pitchFamily="18" charset="0"/>
+                </a:endParaRPr>
+              </a:p>
+              <a:p>
                 <a:pPr lvl="1"/>
                 <a14:m>
                   <m:oMath xmlns:m="http://schemas.openxmlformats.org/officeDocument/2006/math">
@@ -33361,6 +33787,92 @@
                   <a:t>)</a:t>
                 </a:r>
               </a:p>
+              <a:p>
+                <a:pPr lvl="2"/>
+                <a14:m>
+                  <m:oMath xmlns:m="http://schemas.openxmlformats.org/officeDocument/2006/math">
+                    <m:acc>
+                      <m:accPr>
+                        <m:chr m:val="̅"/>
+                        <m:ctrlPr>
+                          <a:rPr lang="en-US" b="1" i="1" smtClean="0">
+                            <a:latin typeface="Cambria Math" panose="02040503050406030204" pitchFamily="18" charset="0"/>
+                          </a:rPr>
+                        </m:ctrlPr>
+                      </m:accPr>
+                      <m:e>
+                        <m:r>
+                          <a:rPr lang="en-US" b="1" i="1">
+                            <a:latin typeface="Cambria Math" panose="02040503050406030204" pitchFamily="18" charset="0"/>
+                          </a:rPr>
+                          <m:t>𝑨</m:t>
+                        </m:r>
+                      </m:e>
+                    </m:acc>
+                  </m:oMath>
+                </a14:m>
+                <a:r>
+                  <a:rPr lang="en-US" b="1" i="1" dirty="0">
+                    <a:latin typeface="Cambria Math" panose="02040503050406030204" pitchFamily="18" charset="0"/>
+                  </a:rPr>
+                  <a:t> + </a:t>
+                </a:r>
+                <a14:m>
+                  <m:oMath xmlns:m="http://schemas.openxmlformats.org/officeDocument/2006/math">
+                    <m:acc>
+                      <m:accPr>
+                        <m:chr m:val="̅"/>
+                        <m:ctrlPr>
+                          <a:rPr lang="en-US" b="1" i="1">
+                            <a:latin typeface="Cambria Math" panose="02040503050406030204" pitchFamily="18" charset="0"/>
+                          </a:rPr>
+                        </m:ctrlPr>
+                      </m:accPr>
+                      <m:e>
+                        <m:r>
+                          <a:rPr lang="en-US" b="1" i="1" smtClean="0">
+                            <a:latin typeface="Cambria Math" panose="02040503050406030204" pitchFamily="18" charset="0"/>
+                          </a:rPr>
+                          <m:t>𝑩</m:t>
+                        </m:r>
+                      </m:e>
+                    </m:acc>
+                    <m:r>
+                      <a:rPr lang="en-US" b="1" i="1" smtClean="0">
+                        <a:latin typeface="Cambria Math" panose="02040503050406030204" pitchFamily="18" charset="0"/>
+                      </a:rPr>
+                      <m:t>+</m:t>
+                    </m:r>
+                    <m:acc>
+                      <m:accPr>
+                        <m:chr m:val="̅"/>
+                        <m:ctrlPr>
+                          <a:rPr lang="en-US" b="1" i="1">
+                            <a:latin typeface="Cambria Math" panose="02040503050406030204" pitchFamily="18" charset="0"/>
+                          </a:rPr>
+                        </m:ctrlPr>
+                      </m:accPr>
+                      <m:e>
+                        <m:r>
+                          <a:rPr lang="en-US" b="1" i="1" smtClean="0">
+                            <a:latin typeface="Cambria Math" panose="02040503050406030204" pitchFamily="18" charset="0"/>
+                          </a:rPr>
+                          <m:t>𝑪</m:t>
+                        </m:r>
+                      </m:e>
+                    </m:acc>
+                  </m:oMath>
+                </a14:m>
+                <a:endParaRPr lang="en-US" b="1" i="1" dirty="0">
+                  <a:latin typeface="Cambria Math" panose="02040503050406030204" pitchFamily="18" charset="0"/>
+                </a:endParaRPr>
+              </a:p>
+              <a:p>
+                <a:pPr lvl="2"/>
+                <a:endParaRPr lang="en-US" i="1" dirty="0">
+                  <a:latin typeface="Cambria Math" panose="02040503050406030204" pitchFamily="18" charset="0"/>
+                </a:endParaRPr>
+              </a:p>
             </p:txBody>
           </p:sp>
         </mc:Choice>
@@ -33385,7 +33897,7 @@
               <a:blipFill>
                 <a:blip r:embed="rId2"/>
                 <a:stretch>
-                  <a:fillRect l="-1043" t="-2381"/>
+                  <a:fillRect t="-1261" b="-980"/>
                 </a:stretch>
               </a:blipFill>
             </p:spPr>
@@ -33650,6 +34162,911 @@
   <p:cSld>
     <p:spTree>
       <p:nvGrpSpPr>
+        <p:cNvPr id="1" name="">
+          <a:extLst>
+            <a:ext uri="{FF2B5EF4-FFF2-40B4-BE49-F238E27FC236}">
+              <a16:creationId xmlns:a16="http://schemas.microsoft.com/office/drawing/2014/main" id="{63E9C9B2-45AB-787B-5C91-05A5B558BC8B}"/>
+            </a:ext>
+          </a:extLst>
+        </p:cNvPr>
+        <p:cNvGrpSpPr/>
+        <p:nvPr/>
+      </p:nvGrpSpPr>
+      <p:grpSpPr>
+        <a:xfrm>
+          <a:off x="0" y="0"/>
+          <a:ext cx="0" cy="0"/>
+          <a:chOff x="0" y="0"/>
+          <a:chExt cx="0" cy="0"/>
+        </a:xfrm>
+      </p:grpSpPr>
+      <p:sp>
+        <p:nvSpPr>
+          <p:cNvPr id="2" name="Title 1">
+            <a:extLst>
+              <a:ext uri="{FF2B5EF4-FFF2-40B4-BE49-F238E27FC236}">
+                <a16:creationId xmlns:a16="http://schemas.microsoft.com/office/drawing/2014/main" id="{D13ADC5A-141E-6F8B-7CFB-CAA9C873BD1F}"/>
+              </a:ext>
+            </a:extLst>
+          </p:cNvPr>
+          <p:cNvSpPr>
+            <a:spLocks noGrp="1"/>
+          </p:cNvSpPr>
+          <p:nvPr>
+            <p:ph type="title"/>
+          </p:nvPr>
+        </p:nvSpPr>
+        <p:spPr/>
+        <p:txBody>
+          <a:bodyPr/>
+          <a:lstStyle/>
+          <a:p>
+            <a:r>
+              <a:rPr lang="en-US" dirty="0"/>
+              <a:t>Lets Simplify 5..11 : answers</a:t>
+            </a:r>
+          </a:p>
+        </p:txBody>
+      </p:sp>
+      <mc:AlternateContent xmlns:mc="http://schemas.openxmlformats.org/markup-compatibility/2006" xmlns:a14="http://schemas.microsoft.com/office/drawing/2010/main">
+        <mc:Choice Requires="a14">
+          <p:sp>
+            <p:nvSpPr>
+              <p:cNvPr id="3" name="Content Placeholder 2">
+                <a:extLst>
+                  <a:ext uri="{FF2B5EF4-FFF2-40B4-BE49-F238E27FC236}">
+                    <a16:creationId xmlns:a16="http://schemas.microsoft.com/office/drawing/2014/main" id="{010A3309-A527-5D31-6F50-29E46FDBB2A5}"/>
+                  </a:ext>
+                </a:extLst>
+              </p:cNvPr>
+              <p:cNvSpPr>
+                <a:spLocks noGrp="1"/>
+              </p:cNvSpPr>
+              <p:nvPr>
+                <p:ph idx="1"/>
+              </p:nvPr>
+            </p:nvSpPr>
+            <p:spPr/>
+            <p:txBody>
+              <a:bodyPr/>
+              <a:lstStyle/>
+              <a:p>
+                <a:r>
+                  <a:rPr lang="en-US" dirty="0"/>
+                  <a:t>These are hard , think of them as puzzles,</a:t>
+                </a:r>
+                <a:endParaRPr lang="en-US" i="1" dirty="0">
+                  <a:latin typeface="Cambria Math" panose="02040503050406030204" pitchFamily="18" charset="0"/>
+                </a:endParaRPr>
+              </a:p>
+              <a:p>
+                <a:pPr lvl="1"/>
+                <a14:m>
+                  <m:oMath xmlns:m="http://schemas.openxmlformats.org/officeDocument/2006/math">
+                    <m:d>
+                      <m:dPr>
+                        <m:ctrlPr>
+                          <a:rPr lang="en-US" i="1" smtClean="0">
+                            <a:latin typeface="Cambria Math" panose="02040503050406030204" pitchFamily="18" charset="0"/>
+                          </a:rPr>
+                        </m:ctrlPr>
+                      </m:dPr>
+                      <m:e>
+                        <m:r>
+                          <a:rPr lang="en-US" i="1">
+                            <a:latin typeface="Cambria Math" panose="02040503050406030204" pitchFamily="18" charset="0"/>
+                          </a:rPr>
+                          <m:t>𝐴</m:t>
+                        </m:r>
+                        <m:r>
+                          <a:rPr lang="en-US" i="1">
+                            <a:latin typeface="Cambria Math" panose="02040503050406030204" pitchFamily="18" charset="0"/>
+                          </a:rPr>
+                          <m:t>.</m:t>
+                        </m:r>
+                        <m:r>
+                          <a:rPr lang="en-US" i="1">
+                            <a:latin typeface="Cambria Math" panose="02040503050406030204" pitchFamily="18" charset="0"/>
+                          </a:rPr>
+                          <m:t>𝐵</m:t>
+                        </m:r>
+                      </m:e>
+                    </m:d>
+                    <m:r>
+                      <a:rPr lang="en-US" i="1">
+                        <a:latin typeface="Cambria Math" panose="02040503050406030204" pitchFamily="18" charset="0"/>
+                      </a:rPr>
+                      <m:t>+</m:t>
+                    </m:r>
+                    <m:d>
+                      <m:dPr>
+                        <m:ctrlPr>
+                          <a:rPr lang="en-US" b="0" i="1" smtClean="0">
+                            <a:latin typeface="Cambria Math" panose="02040503050406030204" pitchFamily="18" charset="0"/>
+                          </a:rPr>
+                        </m:ctrlPr>
+                      </m:dPr>
+                      <m:e>
+                        <m:r>
+                          <a:rPr lang="en-US" i="1">
+                            <a:latin typeface="Cambria Math" panose="02040503050406030204" pitchFamily="18" charset="0"/>
+                          </a:rPr>
+                          <m:t>𝐴</m:t>
+                        </m:r>
+                        <m:r>
+                          <a:rPr lang="en-US" i="1">
+                            <a:latin typeface="Cambria Math" panose="02040503050406030204" pitchFamily="18" charset="0"/>
+                          </a:rPr>
+                          <m:t>.</m:t>
+                        </m:r>
+                        <m:acc>
+                          <m:accPr>
+                            <m:chr m:val="̅"/>
+                            <m:ctrlPr>
+                              <a:rPr lang="en-US" i="1">
+                                <a:latin typeface="Cambria Math" panose="02040503050406030204" pitchFamily="18" charset="0"/>
+                              </a:rPr>
+                            </m:ctrlPr>
+                          </m:accPr>
+                          <m:e>
+                            <m:r>
+                              <a:rPr lang="en-US" i="1">
+                                <a:latin typeface="Cambria Math" panose="02040503050406030204" pitchFamily="18" charset="0"/>
+                              </a:rPr>
+                              <m:t>𝐵</m:t>
+                            </m:r>
+                          </m:e>
+                        </m:acc>
+                      </m:e>
+                    </m:d>
+                    <m:r>
+                      <a:rPr lang="en-US" i="1">
+                        <a:latin typeface="Cambria Math" panose="02040503050406030204" pitchFamily="18" charset="0"/>
+                      </a:rPr>
+                      <m:t>+</m:t>
+                    </m:r>
+                    <m:d>
+                      <m:dPr>
+                        <m:ctrlPr>
+                          <a:rPr lang="en-US" i="1">
+                            <a:latin typeface="Cambria Math" panose="02040503050406030204" pitchFamily="18" charset="0"/>
+                          </a:rPr>
+                        </m:ctrlPr>
+                      </m:dPr>
+                      <m:e>
+                        <m:acc>
+                          <m:accPr>
+                            <m:chr m:val="̅"/>
+                            <m:ctrlPr>
+                              <a:rPr lang="en-US" i="1">
+                                <a:latin typeface="Cambria Math" panose="02040503050406030204" pitchFamily="18" charset="0"/>
+                              </a:rPr>
+                            </m:ctrlPr>
+                          </m:accPr>
+                          <m:e>
+                            <m:r>
+                              <a:rPr lang="en-US" i="1">
+                                <a:latin typeface="Cambria Math" panose="02040503050406030204" pitchFamily="18" charset="0"/>
+                              </a:rPr>
+                              <m:t>𝐴</m:t>
+                            </m:r>
+                          </m:e>
+                        </m:acc>
+                        <m:r>
+                          <a:rPr lang="en-US" i="1">
+                            <a:latin typeface="Cambria Math" panose="02040503050406030204" pitchFamily="18" charset="0"/>
+                          </a:rPr>
+                          <m:t>.</m:t>
+                        </m:r>
+                        <m:r>
+                          <a:rPr lang="en-US" i="1">
+                            <a:latin typeface="Cambria Math" panose="02040503050406030204" pitchFamily="18" charset="0"/>
+                          </a:rPr>
+                          <m:t>𝐶</m:t>
+                        </m:r>
+                      </m:e>
+                    </m:d>
+                  </m:oMath>
+                </a14:m>
+                <a:endParaRPr lang="en-US" i="1" dirty="0">
+                  <a:latin typeface="Cambria Math" panose="02040503050406030204" pitchFamily="18" charset="0"/>
+                </a:endParaRPr>
+              </a:p>
+              <a:p>
+                <a:pPr lvl="2"/>
+                <a:endParaRPr lang="en-US" i="1" dirty="0">
+                  <a:latin typeface="Cambria Math" panose="02040503050406030204" pitchFamily="18" charset="0"/>
+                </a:endParaRPr>
+              </a:p>
+              <a:p>
+                <a:pPr lvl="1"/>
+                <a14:m>
+                  <m:oMath xmlns:m="http://schemas.openxmlformats.org/officeDocument/2006/math">
+                    <m:d>
+                      <m:dPr>
+                        <m:ctrlPr>
+                          <a:rPr lang="en-US" i="1" smtClean="0">
+                            <a:latin typeface="Cambria Math" panose="02040503050406030204" pitchFamily="18" charset="0"/>
+                          </a:rPr>
+                        </m:ctrlPr>
+                      </m:dPr>
+                      <m:e>
+                        <m:r>
+                          <a:rPr lang="en-US" i="1">
+                            <a:latin typeface="Cambria Math" panose="02040503050406030204" pitchFamily="18" charset="0"/>
+                          </a:rPr>
+                          <m:t>𝐴</m:t>
+                        </m:r>
+                        <m:r>
+                          <a:rPr lang="en-US" b="0" i="1" smtClean="0">
+                            <a:latin typeface="Cambria Math" panose="02040503050406030204" pitchFamily="18" charset="0"/>
+                          </a:rPr>
+                          <m:t>+</m:t>
+                        </m:r>
+                        <m:r>
+                          <a:rPr lang="en-US" i="1">
+                            <a:latin typeface="Cambria Math" panose="02040503050406030204" pitchFamily="18" charset="0"/>
+                          </a:rPr>
+                          <m:t>𝐵</m:t>
+                        </m:r>
+                      </m:e>
+                    </m:d>
+                    <m:r>
+                      <a:rPr lang="en-US" b="0" i="1" smtClean="0">
+                        <a:latin typeface="Cambria Math" panose="02040503050406030204" pitchFamily="18" charset="0"/>
+                      </a:rPr>
+                      <m:t>.</m:t>
+                    </m:r>
+                    <m:d>
+                      <m:dPr>
+                        <m:ctrlPr>
+                          <a:rPr lang="en-US" b="0" i="1" smtClean="0">
+                            <a:latin typeface="Cambria Math" panose="02040503050406030204" pitchFamily="18" charset="0"/>
+                          </a:rPr>
+                        </m:ctrlPr>
+                      </m:dPr>
+                      <m:e>
+                        <m:r>
+                          <a:rPr lang="en-US" i="1">
+                            <a:latin typeface="Cambria Math" panose="02040503050406030204" pitchFamily="18" charset="0"/>
+                          </a:rPr>
+                          <m:t>𝐴</m:t>
+                        </m:r>
+                        <m:r>
+                          <a:rPr lang="en-US" b="0" i="1" smtClean="0">
+                            <a:latin typeface="Cambria Math" panose="02040503050406030204" pitchFamily="18" charset="0"/>
+                          </a:rPr>
+                          <m:t>+</m:t>
+                        </m:r>
+                        <m:acc>
+                          <m:accPr>
+                            <m:chr m:val="̅"/>
+                            <m:ctrlPr>
+                              <a:rPr lang="en-US" i="1">
+                                <a:latin typeface="Cambria Math" panose="02040503050406030204" pitchFamily="18" charset="0"/>
+                              </a:rPr>
+                            </m:ctrlPr>
+                          </m:accPr>
+                          <m:e>
+                            <m:r>
+                              <a:rPr lang="en-US" i="1">
+                                <a:latin typeface="Cambria Math" panose="02040503050406030204" pitchFamily="18" charset="0"/>
+                              </a:rPr>
+                              <m:t>𝐵</m:t>
+                            </m:r>
+                          </m:e>
+                        </m:acc>
+                      </m:e>
+                    </m:d>
+                    <m:r>
+                      <a:rPr lang="en-US" b="0" i="1" smtClean="0">
+                        <a:latin typeface="Cambria Math" panose="02040503050406030204" pitchFamily="18" charset="0"/>
+                      </a:rPr>
+                      <m:t>.</m:t>
+                    </m:r>
+                    <m:d>
+                      <m:dPr>
+                        <m:ctrlPr>
+                          <a:rPr lang="en-US" i="1">
+                            <a:latin typeface="Cambria Math" panose="02040503050406030204" pitchFamily="18" charset="0"/>
+                          </a:rPr>
+                        </m:ctrlPr>
+                      </m:dPr>
+                      <m:e>
+                        <m:acc>
+                          <m:accPr>
+                            <m:chr m:val="̅"/>
+                            <m:ctrlPr>
+                              <a:rPr lang="en-US" i="1">
+                                <a:latin typeface="Cambria Math" panose="02040503050406030204" pitchFamily="18" charset="0"/>
+                              </a:rPr>
+                            </m:ctrlPr>
+                          </m:accPr>
+                          <m:e>
+                            <m:r>
+                              <a:rPr lang="en-US" i="1">
+                                <a:latin typeface="Cambria Math" panose="02040503050406030204" pitchFamily="18" charset="0"/>
+                              </a:rPr>
+                              <m:t>𝐴</m:t>
+                            </m:r>
+                          </m:e>
+                        </m:acc>
+                        <m:r>
+                          <a:rPr lang="en-US" b="0" i="1" smtClean="0">
+                            <a:latin typeface="Cambria Math" panose="02040503050406030204" pitchFamily="18" charset="0"/>
+                          </a:rPr>
+                          <m:t>+</m:t>
+                        </m:r>
+                        <m:r>
+                          <a:rPr lang="en-US" b="0" i="1" smtClean="0">
+                            <a:latin typeface="Cambria Math" panose="02040503050406030204" pitchFamily="18" charset="0"/>
+                          </a:rPr>
+                          <m:t>𝐵</m:t>
+                        </m:r>
+                      </m:e>
+                    </m:d>
+                  </m:oMath>
+                </a14:m>
+                <a:endParaRPr lang="en-US" i="1" dirty="0">
+                  <a:latin typeface="Cambria Math" panose="02040503050406030204" pitchFamily="18" charset="0"/>
+                </a:endParaRPr>
+              </a:p>
+              <a:p>
+                <a:pPr lvl="1"/>
+                <a14:m>
+                  <m:oMath xmlns:m="http://schemas.openxmlformats.org/officeDocument/2006/math">
+                    <m:acc>
+                      <m:accPr>
+                        <m:chr m:val="̅"/>
+                        <m:ctrlPr>
+                          <a:rPr lang="en-US" i="1" smtClean="0">
+                            <a:latin typeface="Cambria Math" panose="02040503050406030204" pitchFamily="18" charset="0"/>
+                          </a:rPr>
+                        </m:ctrlPr>
+                      </m:accPr>
+                      <m:e>
+                        <m:r>
+                          <a:rPr lang="en-US" b="0" i="1" smtClean="0">
+                            <a:latin typeface="Cambria Math" panose="02040503050406030204" pitchFamily="18" charset="0"/>
+                          </a:rPr>
+                          <m:t>𝐴</m:t>
+                        </m:r>
+                        <m:r>
+                          <a:rPr lang="en-US" b="0" i="1" smtClean="0">
+                            <a:latin typeface="Cambria Math" panose="02040503050406030204" pitchFamily="18" charset="0"/>
+                          </a:rPr>
+                          <m:t>+</m:t>
+                        </m:r>
+                        <m:r>
+                          <a:rPr lang="en-US" b="0" i="1" smtClean="0">
+                            <a:latin typeface="Cambria Math" panose="02040503050406030204" pitchFamily="18" charset="0"/>
+                          </a:rPr>
+                          <m:t>𝐵</m:t>
+                        </m:r>
+                      </m:e>
+                    </m:acc>
+                    <m:r>
+                      <a:rPr lang="en-US" b="0" i="1" smtClean="0">
+                        <a:latin typeface="Cambria Math" panose="02040503050406030204" pitchFamily="18" charset="0"/>
+                      </a:rPr>
+                      <m:t>+</m:t>
+                    </m:r>
+                    <m:r>
+                      <a:rPr lang="en-US" b="0" i="1" smtClean="0">
+                        <a:latin typeface="Cambria Math" panose="02040503050406030204" pitchFamily="18" charset="0"/>
+                      </a:rPr>
+                      <m:t>𝐴</m:t>
+                    </m:r>
+                    <m:r>
+                      <a:rPr lang="en-US" b="0" i="1" smtClean="0">
+                        <a:latin typeface="Cambria Math" panose="02040503050406030204" pitchFamily="18" charset="0"/>
+                      </a:rPr>
+                      <m:t>. </m:t>
+                    </m:r>
+                    <m:acc>
+                      <m:accPr>
+                        <m:chr m:val="̅"/>
+                        <m:ctrlPr>
+                          <a:rPr lang="en-US" i="1">
+                            <a:latin typeface="Cambria Math" panose="02040503050406030204" pitchFamily="18" charset="0"/>
+                          </a:rPr>
+                        </m:ctrlPr>
+                      </m:accPr>
+                      <m:e>
+                        <m:r>
+                          <a:rPr lang="en-US" i="1">
+                            <a:latin typeface="Cambria Math" panose="02040503050406030204" pitchFamily="18" charset="0"/>
+                          </a:rPr>
+                          <m:t>𝐵</m:t>
+                        </m:r>
+                      </m:e>
+                    </m:acc>
+                  </m:oMath>
+                </a14:m>
+                <a:endParaRPr lang="en-US" i="1" dirty="0">
+                  <a:latin typeface="Cambria Math" panose="02040503050406030204" pitchFamily="18" charset="0"/>
+                </a:endParaRPr>
+              </a:p>
+              <a:p>
+                <a:pPr lvl="1"/>
+                <a14:m>
+                  <m:oMath xmlns:m="http://schemas.openxmlformats.org/officeDocument/2006/math">
+                    <m:d>
+                      <m:dPr>
+                        <m:ctrlPr>
+                          <a:rPr lang="en-US" i="1" smtClean="0">
+                            <a:latin typeface="Cambria Math" panose="02040503050406030204" pitchFamily="18" charset="0"/>
+                          </a:rPr>
+                        </m:ctrlPr>
+                      </m:dPr>
+                      <m:e>
+                        <m:r>
+                          <a:rPr lang="en-US" i="1">
+                            <a:latin typeface="Cambria Math" panose="02040503050406030204" pitchFamily="18" charset="0"/>
+                          </a:rPr>
+                          <m:t>𝐴</m:t>
+                        </m:r>
+                        <m:r>
+                          <a:rPr lang="en-US" b="0" i="1" smtClean="0">
+                            <a:latin typeface="Cambria Math" panose="02040503050406030204" pitchFamily="18" charset="0"/>
+                          </a:rPr>
+                          <m:t>+</m:t>
+                        </m:r>
+                        <m:r>
+                          <a:rPr lang="en-US" i="1">
+                            <a:latin typeface="Cambria Math" panose="02040503050406030204" pitchFamily="18" charset="0"/>
+                          </a:rPr>
+                          <m:t>𝐵</m:t>
+                        </m:r>
+                        <m:r>
+                          <a:rPr lang="en-US" b="0" i="1" smtClean="0">
+                            <a:latin typeface="Cambria Math" panose="02040503050406030204" pitchFamily="18" charset="0"/>
+                          </a:rPr>
+                          <m:t>+</m:t>
+                        </m:r>
+                        <m:r>
+                          <a:rPr lang="en-US" b="0" i="1" smtClean="0">
+                            <a:latin typeface="Cambria Math" panose="02040503050406030204" pitchFamily="18" charset="0"/>
+                          </a:rPr>
+                          <m:t>𝐶</m:t>
+                        </m:r>
+                      </m:e>
+                    </m:d>
+                    <m:r>
+                      <a:rPr lang="en-US" b="0" i="1" smtClean="0">
+                        <a:latin typeface="Cambria Math" panose="02040503050406030204" pitchFamily="18" charset="0"/>
+                      </a:rPr>
+                      <m:t>.</m:t>
+                    </m:r>
+                    <m:d>
+                      <m:dPr>
+                        <m:ctrlPr>
+                          <a:rPr lang="en-US" i="1">
+                            <a:latin typeface="Cambria Math" panose="02040503050406030204" pitchFamily="18" charset="0"/>
+                          </a:rPr>
+                        </m:ctrlPr>
+                      </m:dPr>
+                      <m:e>
+                        <m:acc>
+                          <m:accPr>
+                            <m:chr m:val="̅"/>
+                            <m:ctrlPr>
+                              <a:rPr lang="en-US" i="1">
+                                <a:latin typeface="Cambria Math" panose="02040503050406030204" pitchFamily="18" charset="0"/>
+                              </a:rPr>
+                            </m:ctrlPr>
+                          </m:accPr>
+                          <m:e>
+                            <m:r>
+                              <a:rPr lang="en-US" i="1">
+                                <a:latin typeface="Cambria Math" panose="02040503050406030204" pitchFamily="18" charset="0"/>
+                              </a:rPr>
+                              <m:t>𝐴</m:t>
+                            </m:r>
+                          </m:e>
+                        </m:acc>
+                        <m:r>
+                          <a:rPr lang="en-US" b="0" i="1" smtClean="0">
+                            <a:latin typeface="Cambria Math" panose="02040503050406030204" pitchFamily="18" charset="0"/>
+                          </a:rPr>
+                          <m:t>+</m:t>
+                        </m:r>
+                        <m:r>
+                          <a:rPr lang="en-US" b="0" i="1" smtClean="0">
+                            <a:latin typeface="Cambria Math" panose="02040503050406030204" pitchFamily="18" charset="0"/>
+                          </a:rPr>
+                          <m:t>𝐵</m:t>
+                        </m:r>
+                      </m:e>
+                    </m:d>
+                    <m:r>
+                      <a:rPr lang="en-US" b="0" i="1" smtClean="0">
+                        <a:latin typeface="Cambria Math" panose="02040503050406030204" pitchFamily="18" charset="0"/>
+                      </a:rPr>
+                      <m:t>.(</m:t>
+                    </m:r>
+                    <m:r>
+                      <a:rPr lang="en-US" b="0" i="1" smtClean="0">
+                        <a:latin typeface="Cambria Math" panose="02040503050406030204" pitchFamily="18" charset="0"/>
+                      </a:rPr>
+                      <m:t>𝐴</m:t>
+                    </m:r>
+                    <m:r>
+                      <a:rPr lang="en-US" b="0" i="1" smtClean="0">
+                        <a:latin typeface="Cambria Math" panose="02040503050406030204" pitchFamily="18" charset="0"/>
+                      </a:rPr>
+                      <m:t>+</m:t>
+                    </m:r>
+                    <m:acc>
+                      <m:accPr>
+                        <m:chr m:val="̅"/>
+                        <m:ctrlPr>
+                          <a:rPr lang="en-US" b="0" i="1" smtClean="0">
+                            <a:latin typeface="Cambria Math" panose="02040503050406030204" pitchFamily="18" charset="0"/>
+                          </a:rPr>
+                        </m:ctrlPr>
+                      </m:accPr>
+                      <m:e>
+                        <m:r>
+                          <a:rPr lang="en-US" b="0" i="1" smtClean="0">
+                            <a:latin typeface="Cambria Math" panose="02040503050406030204" pitchFamily="18" charset="0"/>
+                          </a:rPr>
+                          <m:t>𝐶</m:t>
+                        </m:r>
+                      </m:e>
+                    </m:acc>
+                  </m:oMath>
+                </a14:m>
+                <a:r>
+                  <a:rPr lang="en-US" i="1" dirty="0">
+                    <a:latin typeface="Cambria Math" panose="02040503050406030204" pitchFamily="18" charset="0"/>
+                  </a:rPr>
+                  <a:t>)</a:t>
+                </a:r>
+              </a:p>
+              <a:p>
+                <a:pPr lvl="1"/>
+                <a14:m>
+                  <m:oMath xmlns:m="http://schemas.openxmlformats.org/officeDocument/2006/math">
+                    <m:d>
+                      <m:dPr>
+                        <m:ctrlPr>
+                          <a:rPr lang="en-US" b="0" i="1" smtClean="0">
+                            <a:latin typeface="Cambria Math" panose="02040503050406030204" pitchFamily="18" charset="0"/>
+                          </a:rPr>
+                        </m:ctrlPr>
+                      </m:dPr>
+                      <m:e>
+                        <m:r>
+                          <a:rPr lang="en-US" i="1">
+                            <a:latin typeface="Cambria Math" panose="02040503050406030204" pitchFamily="18" charset="0"/>
+                          </a:rPr>
+                          <m:t>𝐴</m:t>
+                        </m:r>
+                        <m:r>
+                          <a:rPr lang="en-US" b="0" i="1" smtClean="0">
+                            <a:latin typeface="Cambria Math" panose="02040503050406030204" pitchFamily="18" charset="0"/>
+                          </a:rPr>
+                          <m:t>.</m:t>
+                        </m:r>
+                        <m:acc>
+                          <m:accPr>
+                            <m:chr m:val="̅"/>
+                            <m:ctrlPr>
+                              <a:rPr lang="en-US" i="1">
+                                <a:latin typeface="Cambria Math" panose="02040503050406030204" pitchFamily="18" charset="0"/>
+                              </a:rPr>
+                            </m:ctrlPr>
+                          </m:accPr>
+                          <m:e>
+                            <m:r>
+                              <a:rPr lang="en-US" i="1">
+                                <a:latin typeface="Cambria Math" panose="02040503050406030204" pitchFamily="18" charset="0"/>
+                              </a:rPr>
+                              <m:t>𝐵</m:t>
+                            </m:r>
+                          </m:e>
+                        </m:acc>
+                        <m:r>
+                          <a:rPr lang="en-US" b="0" i="1" smtClean="0">
+                            <a:latin typeface="Cambria Math" panose="02040503050406030204" pitchFamily="18" charset="0"/>
+                          </a:rPr>
+                          <m:t>+</m:t>
+                        </m:r>
+                        <m:r>
+                          <a:rPr lang="en-US" b="0" i="1" smtClean="0">
+                            <a:latin typeface="Cambria Math" panose="02040503050406030204" pitchFamily="18" charset="0"/>
+                          </a:rPr>
+                          <m:t>𝐵</m:t>
+                        </m:r>
+                        <m:r>
+                          <a:rPr lang="en-US" b="0" i="1" smtClean="0">
+                            <a:latin typeface="Cambria Math" panose="02040503050406030204" pitchFamily="18" charset="0"/>
+                          </a:rPr>
+                          <m:t>.</m:t>
+                        </m:r>
+                        <m:r>
+                          <a:rPr lang="en-US" b="0" i="1" smtClean="0">
+                            <a:latin typeface="Cambria Math" panose="02040503050406030204" pitchFamily="18" charset="0"/>
+                          </a:rPr>
+                          <m:t>𝐶</m:t>
+                        </m:r>
+                      </m:e>
+                    </m:d>
+                    <m:r>
+                      <a:rPr lang="en-US" b="0" i="1" smtClean="0">
+                        <a:latin typeface="Cambria Math" panose="02040503050406030204" pitchFamily="18" charset="0"/>
+                      </a:rPr>
+                      <m:t>.</m:t>
+                    </m:r>
+                    <m:d>
+                      <m:dPr>
+                        <m:ctrlPr>
+                          <a:rPr lang="en-US" b="0" i="1" smtClean="0">
+                            <a:latin typeface="Cambria Math" panose="02040503050406030204" pitchFamily="18" charset="0"/>
+                          </a:rPr>
+                        </m:ctrlPr>
+                      </m:dPr>
+                      <m:e>
+                        <m:acc>
+                          <m:accPr>
+                            <m:chr m:val="̅"/>
+                            <m:ctrlPr>
+                              <a:rPr lang="en-US" i="1">
+                                <a:latin typeface="Cambria Math" panose="02040503050406030204" pitchFamily="18" charset="0"/>
+                              </a:rPr>
+                            </m:ctrlPr>
+                          </m:accPr>
+                          <m:e>
+                            <m:r>
+                              <a:rPr lang="en-US" i="1">
+                                <a:latin typeface="Cambria Math" panose="02040503050406030204" pitchFamily="18" charset="0"/>
+                              </a:rPr>
+                              <m:t>𝐴</m:t>
+                            </m:r>
+                          </m:e>
+                        </m:acc>
+                        <m:r>
+                          <a:rPr lang="en-US" b="0" i="1" smtClean="0">
+                            <a:latin typeface="Cambria Math" panose="02040503050406030204" pitchFamily="18" charset="0"/>
+                          </a:rPr>
+                          <m:t>+</m:t>
+                        </m:r>
+                        <m:acc>
+                          <m:accPr>
+                            <m:chr m:val="̅"/>
+                            <m:ctrlPr>
+                              <a:rPr lang="en-US" i="1">
+                                <a:latin typeface="Cambria Math" panose="02040503050406030204" pitchFamily="18" charset="0"/>
+                              </a:rPr>
+                            </m:ctrlPr>
+                          </m:accPr>
+                          <m:e>
+                            <m:r>
+                              <a:rPr lang="en-US" i="1">
+                                <a:latin typeface="Cambria Math" panose="02040503050406030204" pitchFamily="18" charset="0"/>
+                              </a:rPr>
+                              <m:t>𝐶</m:t>
+                            </m:r>
+                          </m:e>
+                        </m:acc>
+                      </m:e>
+                    </m:d>
+                  </m:oMath>
+                </a14:m>
+                <a:endParaRPr lang="en-US" b="0" i="1" dirty="0">
+                  <a:latin typeface="Cambria Math" panose="02040503050406030204" pitchFamily="18" charset="0"/>
+                </a:endParaRPr>
+              </a:p>
+              <a:p>
+                <a:pPr lvl="1"/>
+                <a14:m>
+                  <m:oMath xmlns:m="http://schemas.openxmlformats.org/officeDocument/2006/math">
+                    <m:acc>
+                      <m:accPr>
+                        <m:chr m:val="̅"/>
+                        <m:ctrlPr>
+                          <a:rPr lang="en-US" i="1" smtClean="0">
+                            <a:latin typeface="Cambria Math" panose="02040503050406030204" pitchFamily="18" charset="0"/>
+                          </a:rPr>
+                        </m:ctrlPr>
+                      </m:accPr>
+                      <m:e>
+                        <m:r>
+                          <a:rPr lang="en-US" b="0" i="1" smtClean="0">
+                            <a:latin typeface="Cambria Math" panose="02040503050406030204" pitchFamily="18" charset="0"/>
+                          </a:rPr>
+                          <m:t>(</m:t>
+                        </m:r>
+                        <m:r>
+                          <a:rPr lang="en-US" b="0" i="1" smtClean="0">
+                            <a:latin typeface="Cambria Math" panose="02040503050406030204" pitchFamily="18" charset="0"/>
+                          </a:rPr>
+                          <m:t>𝐴</m:t>
+                        </m:r>
+                        <m:r>
+                          <a:rPr lang="en-US" b="0" i="1" smtClean="0">
+                            <a:latin typeface="Cambria Math" panose="02040503050406030204" pitchFamily="18" charset="0"/>
+                          </a:rPr>
+                          <m:t>.</m:t>
+                        </m:r>
+                        <m:r>
+                          <a:rPr lang="en-US" b="0" i="1" smtClean="0">
+                            <a:latin typeface="Cambria Math" panose="02040503050406030204" pitchFamily="18" charset="0"/>
+                          </a:rPr>
+                          <m:t>𝐵</m:t>
+                        </m:r>
+                        <m:r>
+                          <a:rPr lang="en-US" b="0" i="1" smtClean="0">
+                            <a:latin typeface="Cambria Math" panose="02040503050406030204" pitchFamily="18" charset="0"/>
+                          </a:rPr>
+                          <m:t>)</m:t>
+                        </m:r>
+                      </m:e>
+                    </m:acc>
+                    <m:r>
+                      <a:rPr lang="en-US" b="0" i="1" smtClean="0">
+                        <a:latin typeface="Cambria Math" panose="02040503050406030204" pitchFamily="18" charset="0"/>
+                      </a:rPr>
+                      <m:t> </m:t>
+                    </m:r>
+                  </m:oMath>
+                </a14:m>
+                <a:r>
+                  <a:rPr lang="en-US" i="1" dirty="0">
+                    <a:latin typeface="Cambria Math" panose="02040503050406030204" pitchFamily="18" charset="0"/>
+                  </a:rPr>
+                  <a:t>.</a:t>
+                </a:r>
+                <a14:m>
+                  <m:oMath xmlns:m="http://schemas.openxmlformats.org/officeDocument/2006/math">
+                    <m:d>
+                      <m:dPr>
+                        <m:ctrlPr>
+                          <a:rPr lang="en-US" i="1">
+                            <a:latin typeface="Cambria Math" panose="02040503050406030204" pitchFamily="18" charset="0"/>
+                          </a:rPr>
+                        </m:ctrlPr>
+                      </m:dPr>
+                      <m:e>
+                        <m:acc>
+                          <m:accPr>
+                            <m:chr m:val="̅"/>
+                            <m:ctrlPr>
+                              <a:rPr lang="en-US" i="1">
+                                <a:latin typeface="Cambria Math" panose="02040503050406030204" pitchFamily="18" charset="0"/>
+                              </a:rPr>
+                            </m:ctrlPr>
+                          </m:accPr>
+                          <m:e>
+                            <m:r>
+                              <a:rPr lang="en-US" i="1">
+                                <a:latin typeface="Cambria Math" panose="02040503050406030204" pitchFamily="18" charset="0"/>
+                              </a:rPr>
+                              <m:t>𝐴</m:t>
+                            </m:r>
+                          </m:e>
+                        </m:acc>
+                        <m:r>
+                          <a:rPr lang="en-US" i="1">
+                            <a:latin typeface="Cambria Math" panose="02040503050406030204" pitchFamily="18" charset="0"/>
+                          </a:rPr>
+                          <m:t>+</m:t>
+                        </m:r>
+                        <m:r>
+                          <a:rPr lang="en-US" b="0" i="1" smtClean="0">
+                            <a:latin typeface="Cambria Math" panose="02040503050406030204" pitchFamily="18" charset="0"/>
+                          </a:rPr>
+                          <m:t>𝐶</m:t>
+                        </m:r>
+                      </m:e>
+                    </m:d>
+                    <m:r>
+                      <a:rPr lang="en-US" b="0" i="1" smtClean="0">
+                        <a:latin typeface="Cambria Math" panose="02040503050406030204" pitchFamily="18" charset="0"/>
+                      </a:rPr>
+                      <m:t>+(</m:t>
+                    </m:r>
+                    <m:r>
+                      <a:rPr lang="en-US" b="0" i="1" smtClean="0">
+                        <a:latin typeface="Cambria Math" panose="02040503050406030204" pitchFamily="18" charset="0"/>
+                      </a:rPr>
+                      <m:t>𝐴</m:t>
+                    </m:r>
+                    <m:r>
+                      <a:rPr lang="en-US" b="0" i="1" smtClean="0">
+                        <a:latin typeface="Cambria Math" panose="02040503050406030204" pitchFamily="18" charset="0"/>
+                      </a:rPr>
+                      <m:t>.</m:t>
+                    </m:r>
+                    <m:acc>
+                      <m:accPr>
+                        <m:chr m:val="̅"/>
+                        <m:ctrlPr>
+                          <a:rPr lang="en-US" i="1">
+                            <a:latin typeface="Cambria Math" panose="02040503050406030204" pitchFamily="18" charset="0"/>
+                          </a:rPr>
+                        </m:ctrlPr>
+                      </m:accPr>
+                      <m:e>
+                        <m:r>
+                          <a:rPr lang="en-US" i="1">
+                            <a:latin typeface="Cambria Math" panose="02040503050406030204" pitchFamily="18" charset="0"/>
+                          </a:rPr>
+                          <m:t>𝐶</m:t>
+                        </m:r>
+                      </m:e>
+                    </m:acc>
+                  </m:oMath>
+                </a14:m>
+                <a:r>
+                  <a:rPr lang="en-US" i="1" dirty="0">
+                    <a:latin typeface="Cambria Math" panose="02040503050406030204" pitchFamily="18" charset="0"/>
+                  </a:rPr>
+                  <a:t>)</a:t>
+                </a:r>
+              </a:p>
+            </p:txBody>
+          </p:sp>
+        </mc:Choice>
+        <mc:Fallback xmlns="">
+          <p:sp>
+            <p:nvSpPr>
+              <p:cNvPr id="3" name="Content Placeholder 2">
+                <a:extLst>
+                  <a:ext uri="{FF2B5EF4-FFF2-40B4-BE49-F238E27FC236}">
+                    <a16:creationId xmlns:a16="http://schemas.microsoft.com/office/drawing/2014/main" id="{010A3309-A527-5D31-6F50-29E46FDBB2A5}"/>
+                  </a:ext>
+                </a:extLst>
+              </p:cNvPr>
+              <p:cNvSpPr>
+                <a:spLocks noGrp="1" noRot="1" noChangeAspect="1" noMove="1" noResize="1" noEditPoints="1" noAdjustHandles="1" noChangeArrowheads="1" noChangeShapeType="1" noTextEdit="1"/>
+              </p:cNvSpPr>
+              <p:nvPr>
+                <p:ph idx="1"/>
+              </p:nvPr>
+            </p:nvSpPr>
+            <p:spPr>
+              <a:blipFill>
+                <a:blip r:embed="rId2"/>
+                <a:stretch>
+                  <a:fillRect l="-1043" t="-2381"/>
+                </a:stretch>
+              </a:blipFill>
+            </p:spPr>
+            <p:txBody>
+              <a:bodyPr/>
+              <a:lstStyle/>
+              <a:p>
+                <a:r>
+                  <a:rPr lang="en-US">
+                    <a:noFill/>
+                  </a:rPr>
+                  <a:t> </a:t>
+                </a:r>
+              </a:p>
+            </p:txBody>
+          </p:sp>
+        </mc:Fallback>
+      </mc:AlternateContent>
+    </p:spTree>
+    <p:extLst>
+      <p:ext uri="{BB962C8B-B14F-4D97-AF65-F5344CB8AC3E}">
+        <p14:creationId xmlns:p14="http://schemas.microsoft.com/office/powerpoint/2010/main" val="998742316"/>
+      </p:ext>
+    </p:extLst>
+  </p:cSld>
+  <p:clrMapOvr>
+    <a:masterClrMapping/>
+  </p:clrMapOvr>
+</p:sld>
+</file>
+
+<file path=ppt/slides/slide81.xml><?xml version="1.0" encoding="utf-8"?>
+<p:sld xmlns:a="http://schemas.openxmlformats.org/drawingml/2006/main" xmlns:r="http://schemas.openxmlformats.org/officeDocument/2006/relationships" xmlns:p="http://schemas.openxmlformats.org/presentationml/2006/main">
+  <p:cSld>
+    <p:spTree>
+      <p:nvGrpSpPr>
         <p:cNvPr id="1" name=""/>
         <p:cNvGrpSpPr/>
         <p:nvPr/>
@@ -33690,8 +35107,8 @@
           </a:p>
         </p:txBody>
       </p:sp>
-      <mc:AlternateContent xmlns:mc="http://schemas.openxmlformats.org/markup-compatibility/2006">
-        <mc:Choice xmlns:a14="http://schemas.microsoft.com/office/drawing/2010/main" Requires="a14">
+      <mc:AlternateContent xmlns:mc="http://schemas.openxmlformats.org/markup-compatibility/2006" xmlns:a14="http://schemas.microsoft.com/office/drawing/2010/main">
+        <mc:Choice Requires="a14">
           <p:sp>
             <p:nvSpPr>
               <p:cNvPr id="3" name="Content Placeholder 2">
@@ -34537,7 +35954,7 @@
             </p:txBody>
           </p:sp>
         </mc:Choice>
-        <mc:Fallback>
+        <mc:Fallback xmlns="">
           <p:sp>
             <p:nvSpPr>
               <p:cNvPr id="3" name="Content Placeholder 2">
@@ -34590,7 +36007,7 @@
 </p:sld>
 </file>
 
-<file path=ppt/slides/slide81.xml><?xml version="1.0" encoding="utf-8"?>
+<file path=ppt/slides/slide82.xml><?xml version="1.0" encoding="utf-8"?>
 <p:sld xmlns:a="http://schemas.openxmlformats.org/drawingml/2006/main" xmlns:r="http://schemas.openxmlformats.org/officeDocument/2006/relationships" xmlns:p="http://schemas.openxmlformats.org/presentationml/2006/main">
   <p:cSld>
     <p:spTree>
@@ -34646,8 +36063,8 @@
           </a:p>
         </p:txBody>
       </p:sp>
-      <mc:AlternateContent xmlns:mc="http://schemas.openxmlformats.org/markup-compatibility/2006">
-        <mc:Choice xmlns:a14="http://schemas.microsoft.com/office/drawing/2010/main" Requires="a14">
+      <mc:AlternateContent xmlns:mc="http://schemas.openxmlformats.org/markup-compatibility/2006" xmlns:a14="http://schemas.microsoft.com/office/drawing/2010/main">
+        <mc:Choice Requires="a14">
           <p:sp>
             <p:nvSpPr>
               <p:cNvPr id="3" name="Content Placeholder 2">
@@ -35846,7 +37263,7 @@
             </p:txBody>
           </p:sp>
         </mc:Choice>
-        <mc:Fallback>
+        <mc:Fallback xmlns="">
           <p:sp>
             <p:nvSpPr>
               <p:cNvPr id="3" name="Content Placeholder 2">
@@ -35899,7 +37316,7 @@
 </p:sld>
 </file>
 
-<file path=ppt/slides/slide82.xml><?xml version="1.0" encoding="utf-8"?>
+<file path=ppt/slides/slide83.xml><?xml version="1.0" encoding="utf-8"?>
 <p:sld xmlns:a="http://schemas.openxmlformats.org/drawingml/2006/main" xmlns:r="http://schemas.openxmlformats.org/officeDocument/2006/relationships" xmlns:p="http://schemas.openxmlformats.org/presentationml/2006/main">
   <p:cSld>
     <p:spTree>
@@ -35958,8 +37375,8 @@
           </a:p>
         </p:txBody>
       </p:sp>
-      <mc:AlternateContent xmlns:mc="http://schemas.openxmlformats.org/markup-compatibility/2006">
-        <mc:Choice xmlns:a14="http://schemas.microsoft.com/office/drawing/2010/main" Requires="a14">
+      <mc:AlternateContent xmlns:mc="http://schemas.openxmlformats.org/markup-compatibility/2006" xmlns:a14="http://schemas.microsoft.com/office/drawing/2010/main">
+        <mc:Choice Requires="a14">
           <p:sp>
             <p:nvSpPr>
               <p:cNvPr id="3" name="Content Placeholder 2">
@@ -36716,7 +38133,7 @@
             </p:txBody>
           </p:sp>
         </mc:Choice>
-        <mc:Fallback>
+        <mc:Fallback xmlns="">
           <p:sp>
             <p:nvSpPr>
               <p:cNvPr id="3" name="Content Placeholder 2">
@@ -36769,7 +38186,7 @@
 </p:sld>
 </file>
 
-<file path=ppt/slides/slide83.xml><?xml version="1.0" encoding="utf-8"?>
+<file path=ppt/slides/slide84.xml><?xml version="1.0" encoding="utf-8"?>
 <p:sld xmlns:a="http://schemas.openxmlformats.org/drawingml/2006/main" xmlns:r="http://schemas.openxmlformats.org/officeDocument/2006/relationships" xmlns:p="http://schemas.openxmlformats.org/presentationml/2006/main">
   <p:cSld>
     <p:spTree>
@@ -36822,8 +38239,8 @@
           </a:p>
         </p:txBody>
       </p:sp>
-      <mc:AlternateContent xmlns:mc="http://schemas.openxmlformats.org/markup-compatibility/2006">
-        <mc:Choice xmlns:a14="http://schemas.microsoft.com/office/drawing/2010/main" Requires="a14">
+      <mc:AlternateContent xmlns:mc="http://schemas.openxmlformats.org/markup-compatibility/2006" xmlns:a14="http://schemas.microsoft.com/office/drawing/2010/main">
+        <mc:Choice Requires="a14">
           <p:sp>
             <p:nvSpPr>
               <p:cNvPr id="3" name="Content Placeholder 2">
@@ -38098,7 +39515,7 @@
             </p:txBody>
           </p:sp>
         </mc:Choice>
-        <mc:Fallback>
+        <mc:Fallback xmlns="">
           <p:sp>
             <p:nvSpPr>
               <p:cNvPr id="3" name="Content Placeholder 2">
@@ -38151,7 +39568,7 @@
 </p:sld>
 </file>
 
-<file path=ppt/slides/slide84.xml><?xml version="1.0" encoding="utf-8"?>
+<file path=ppt/slides/slide85.xml><?xml version="1.0" encoding="utf-8"?>
 <p:sld xmlns:a="http://schemas.openxmlformats.org/drawingml/2006/main" xmlns:r="http://schemas.openxmlformats.org/officeDocument/2006/relationships" xmlns:p="http://schemas.openxmlformats.org/presentationml/2006/main">
   <p:cSld>
     <p:spTree>
@@ -38210,8 +39627,8 @@
           </a:p>
         </p:txBody>
       </p:sp>
-      <mc:AlternateContent xmlns:mc="http://schemas.openxmlformats.org/markup-compatibility/2006">
-        <mc:Choice xmlns:a14="http://schemas.microsoft.com/office/drawing/2010/main" Requires="a14">
+      <mc:AlternateContent xmlns:mc="http://schemas.openxmlformats.org/markup-compatibility/2006" xmlns:a14="http://schemas.microsoft.com/office/drawing/2010/main">
+        <mc:Choice Requires="a14">
           <p:sp>
             <p:nvSpPr>
               <p:cNvPr id="3" name="Content Placeholder 2">
@@ -39498,13 +40915,7 @@
                           <a:rPr lang="en-US" i="1">
                             <a:latin typeface="Cambria Math" panose="02040503050406030204" pitchFamily="18" charset="0"/>
                           </a:rPr>
-                          <m:t>𝐵</m:t>
-                        </m:r>
-                        <m:r>
-                          <a:rPr lang="en-US" i="1">
-                            <a:latin typeface="Cambria Math" panose="02040503050406030204" pitchFamily="18" charset="0"/>
-                          </a:rPr>
-                          <m:t>𝐶</m:t>
+                          <m:t>𝐵𝐶</m:t>
                         </m:r>
                       </m:e>
                     </m:acc>
@@ -39961,7 +41372,7 @@
             </p:txBody>
           </p:sp>
         </mc:Choice>
-        <mc:Fallback>
+        <mc:Fallback xmlns="">
           <p:sp>
             <p:nvSpPr>
               <p:cNvPr id="3" name="Content Placeholder 2">
@@ -40014,7 +41425,7 @@
 </p:sld>
 </file>
 
-<file path=ppt/slides/slide85.xml><?xml version="1.0" encoding="utf-8"?>
+<file path=ppt/slides/slide86.xml><?xml version="1.0" encoding="utf-8"?>
 <p:sld xmlns:a="http://schemas.openxmlformats.org/drawingml/2006/main" xmlns:r="http://schemas.openxmlformats.org/officeDocument/2006/relationships" xmlns:p="http://schemas.openxmlformats.org/presentationml/2006/main">
   <p:cSld>
     <p:spTree>
@@ -40161,7 +41572,7 @@
 </p:sld>
 </file>
 
-<file path=ppt/slides/slide86.xml><?xml version="1.0" encoding="utf-8"?>
+<file path=ppt/slides/slide87.xml><?xml version="1.0" encoding="utf-8"?>
 <p:sld xmlns:a="http://schemas.openxmlformats.org/drawingml/2006/main" xmlns:r="http://schemas.openxmlformats.org/officeDocument/2006/relationships" xmlns:p="http://schemas.openxmlformats.org/presentationml/2006/main">
   <p:cSld>
     <p:spTree>
@@ -40328,15 +41739,7 @@
             </a:r>
             <a:r>
               <a:rPr lang="en-US" dirty="0" err="1"/>
-              <a:t>queue</a:t>
-            </a:r>
-            <a:r>
-              <a:rPr lang="en-US" err="1"/>
-              <a:t>_</a:t>
-            </a:r>
-            <a:r>
-              <a:rPr lang="en-US"/>
-              <a:t>stack</a:t>
+              <a:t>queue_stack</a:t>
             </a:r>
             <a:endParaRPr lang="en-US" dirty="0"/>
           </a:p>
@@ -40355,7 +41758,7 @@
 </p:sld>
 </file>
 
-<file path=ppt/slides/slide87.xml><?xml version="1.0" encoding="utf-8"?>
+<file path=ppt/slides/slide88.xml><?xml version="1.0" encoding="utf-8"?>
 <p:sld xmlns:a="http://schemas.openxmlformats.org/drawingml/2006/main" xmlns:r="http://schemas.openxmlformats.org/officeDocument/2006/relationships" xmlns:p="http://schemas.openxmlformats.org/presentationml/2006/main">
   <p:cSld>
     <p:spTree>
@@ -40544,6 +41947,93 @@
     <p:extLst>
       <p:ext uri="{BB962C8B-B14F-4D97-AF65-F5344CB8AC3E}">
         <p14:creationId xmlns:p14="http://schemas.microsoft.com/office/powerpoint/2010/main" val="638710185"/>
+      </p:ext>
+    </p:extLst>
+  </p:cSld>
+  <p:clrMapOvr>
+    <a:masterClrMapping/>
+  </p:clrMapOvr>
+</p:sld>
+</file>
+
+<file path=ppt/slides/slide89.xml><?xml version="1.0" encoding="utf-8"?>
+<p:sld xmlns:a="http://schemas.openxmlformats.org/drawingml/2006/main" xmlns:r="http://schemas.openxmlformats.org/officeDocument/2006/relationships" xmlns:p="http://schemas.openxmlformats.org/presentationml/2006/main">
+  <p:cSld>
+    <p:spTree>
+      <p:nvGrpSpPr>
+        <p:cNvPr id="1" name=""/>
+        <p:cNvGrpSpPr/>
+        <p:nvPr/>
+      </p:nvGrpSpPr>
+      <p:grpSpPr>
+        <a:xfrm>
+          <a:off x="0" y="0"/>
+          <a:ext cx="0" cy="0"/>
+          <a:chOff x="0" y="0"/>
+          <a:chExt cx="0" cy="0"/>
+        </a:xfrm>
+      </p:grpSpPr>
+      <p:sp>
+        <p:nvSpPr>
+          <p:cNvPr id="2" name="Title 1">
+            <a:extLst>
+              <a:ext uri="{FF2B5EF4-FFF2-40B4-BE49-F238E27FC236}">
+                <a16:creationId xmlns:a16="http://schemas.microsoft.com/office/drawing/2014/main" id="{7349D11A-E375-E71D-07F3-EE29E1111792}"/>
+              </a:ext>
+            </a:extLst>
+          </p:cNvPr>
+          <p:cNvSpPr>
+            <a:spLocks noGrp="1"/>
+          </p:cNvSpPr>
+          <p:nvPr>
+            <p:ph type="title"/>
+          </p:nvPr>
+        </p:nvSpPr>
+        <p:spPr/>
+        <p:txBody>
+          <a:bodyPr/>
+          <a:lstStyle/>
+          <a:p>
+            <a:r>
+              <a:rPr lang="en-US" dirty="0"/>
+              <a:t>What does this program do ? Q1</a:t>
+            </a:r>
+          </a:p>
+        </p:txBody>
+      </p:sp>
+      <p:pic>
+        <p:nvPicPr>
+          <p:cNvPr id="5" name="Content Placeholder 4">
+            <a:extLst>
+              <a:ext uri="{FF2B5EF4-FFF2-40B4-BE49-F238E27FC236}">
+                <a16:creationId xmlns:a16="http://schemas.microsoft.com/office/drawing/2014/main" id="{F41AE1CA-0CED-FC52-B3A9-B263513E5F35}"/>
+              </a:ext>
+            </a:extLst>
+          </p:cNvPr>
+          <p:cNvPicPr>
+            <a:picLocks noGrp="1" noChangeAspect="1"/>
+          </p:cNvPicPr>
+          <p:nvPr>
+            <p:ph idx="1"/>
+          </p:nvPr>
+        </p:nvPicPr>
+        <p:blipFill>
+          <a:blip r:embed="rId2"/>
+          <a:stretch>
+            <a:fillRect/>
+          </a:stretch>
+        </p:blipFill>
+        <p:spPr>
+          <a:xfrm>
+            <a:off x="1426062" y="1690688"/>
+            <a:ext cx="4036690" cy="4213159"/>
+          </a:xfrm>
+        </p:spPr>
+      </p:pic>
+    </p:spTree>
+    <p:extLst>
+      <p:ext uri="{BB962C8B-B14F-4D97-AF65-F5344CB8AC3E}">
+        <p14:creationId xmlns:p14="http://schemas.microsoft.com/office/powerpoint/2010/main" val="3510970545"/>
       </p:ext>
     </p:extLst>
   </p:cSld>
@@ -40751,6 +42241,1738 @@
     <p:extLst>
       <p:ext uri="{BB962C8B-B14F-4D97-AF65-F5344CB8AC3E}">
         <p14:creationId xmlns:p14="http://schemas.microsoft.com/office/powerpoint/2010/main" val="2745915873"/>
+      </p:ext>
+    </p:extLst>
+  </p:cSld>
+  <p:clrMapOvr>
+    <a:masterClrMapping/>
+  </p:clrMapOvr>
+</p:sld>
+</file>
+
+<file path=ppt/slides/slide90.xml><?xml version="1.0" encoding="utf-8"?>
+<p:sld xmlns:a="http://schemas.openxmlformats.org/drawingml/2006/main" xmlns:r="http://schemas.openxmlformats.org/officeDocument/2006/relationships" xmlns:p="http://schemas.openxmlformats.org/presentationml/2006/main">
+  <p:cSld>
+    <p:spTree>
+      <p:nvGrpSpPr>
+        <p:cNvPr id="1" name="">
+          <a:extLst>
+            <a:ext uri="{FF2B5EF4-FFF2-40B4-BE49-F238E27FC236}">
+              <a16:creationId xmlns:a16="http://schemas.microsoft.com/office/drawing/2014/main" id="{B062178D-935B-AAEE-36BA-F87AA98BAA92}"/>
+            </a:ext>
+          </a:extLst>
+        </p:cNvPr>
+        <p:cNvGrpSpPr/>
+        <p:nvPr/>
+      </p:nvGrpSpPr>
+      <p:grpSpPr>
+        <a:xfrm>
+          <a:off x="0" y="0"/>
+          <a:ext cx="0" cy="0"/>
+          <a:chOff x="0" y="0"/>
+          <a:chExt cx="0" cy="0"/>
+        </a:xfrm>
+      </p:grpSpPr>
+      <p:sp>
+        <p:nvSpPr>
+          <p:cNvPr id="2" name="Title 1">
+            <a:extLst>
+              <a:ext uri="{FF2B5EF4-FFF2-40B4-BE49-F238E27FC236}">
+                <a16:creationId xmlns:a16="http://schemas.microsoft.com/office/drawing/2014/main" id="{CE6F76CD-D406-A389-02FF-0BA92261C88F}"/>
+              </a:ext>
+            </a:extLst>
+          </p:cNvPr>
+          <p:cNvSpPr>
+            <a:spLocks noGrp="1"/>
+          </p:cNvSpPr>
+          <p:nvPr>
+            <p:ph type="title"/>
+          </p:nvPr>
+        </p:nvSpPr>
+        <p:spPr/>
+        <p:txBody>
+          <a:bodyPr/>
+          <a:lstStyle/>
+          <a:p>
+            <a:r>
+              <a:rPr lang="en-US" dirty="0"/>
+              <a:t>What does this program do ? A1</a:t>
+            </a:r>
+          </a:p>
+        </p:txBody>
+      </p:sp>
+      <p:graphicFrame>
+        <p:nvGraphicFramePr>
+          <p:cNvPr id="6" name="Content Placeholder 5">
+            <a:extLst>
+              <a:ext uri="{FF2B5EF4-FFF2-40B4-BE49-F238E27FC236}">
+                <a16:creationId xmlns:a16="http://schemas.microsoft.com/office/drawing/2014/main" id="{48ECFA53-052C-D6F6-6B28-122C1A2DBAD8}"/>
+              </a:ext>
+            </a:extLst>
+          </p:cNvPr>
+          <p:cNvGraphicFramePr>
+            <a:graphicFrameLocks noGrp="1"/>
+          </p:cNvGraphicFramePr>
+          <p:nvPr>
+            <p:ph idx="1"/>
+            <p:extLst>
+              <p:ext uri="{D42A27DB-BD31-4B8C-83A1-F6EECF244321}">
+                <p14:modId xmlns:p14="http://schemas.microsoft.com/office/powerpoint/2010/main" val="1003421758"/>
+              </p:ext>
+            </p:extLst>
+          </p:nvPr>
+        </p:nvGraphicFramePr>
+        <p:xfrm>
+          <a:off x="1224455" y="2948151"/>
+          <a:ext cx="4001814" cy="2774736"/>
+        </p:xfrm>
+        <a:graphic>
+          <a:graphicData uri="http://schemas.openxmlformats.org/drawingml/2006/table">
+            <a:tbl>
+              <a:tblPr firstRow="1" bandRow="1">
+                <a:tableStyleId>{5C22544A-7EE6-4342-B048-85BDC9FD1C3A}</a:tableStyleId>
+              </a:tblPr>
+              <a:tblGrid>
+                <a:gridCol w="1333938">
+                  <a:extLst>
+                    <a:ext uri="{9D8B030D-6E8A-4147-A177-3AD203B41FA5}">
+                      <a16:colId xmlns:a16="http://schemas.microsoft.com/office/drawing/2014/main" val="563773428"/>
+                    </a:ext>
+                  </a:extLst>
+                </a:gridCol>
+                <a:gridCol w="1453930">
+                  <a:extLst>
+                    <a:ext uri="{9D8B030D-6E8A-4147-A177-3AD203B41FA5}">
+                      <a16:colId xmlns:a16="http://schemas.microsoft.com/office/drawing/2014/main" val="2982123843"/>
+                    </a:ext>
+                  </a:extLst>
+                </a:gridCol>
+                <a:gridCol w="1213946">
+                  <a:extLst>
+                    <a:ext uri="{9D8B030D-6E8A-4147-A177-3AD203B41FA5}">
+                      <a16:colId xmlns:a16="http://schemas.microsoft.com/office/drawing/2014/main" val="905214871"/>
+                    </a:ext>
+                  </a:extLst>
+                </a:gridCol>
+              </a:tblGrid>
+              <a:tr h="462456">
+                <a:tc>
+                  <a:txBody>
+                    <a:bodyPr/>
+                    <a:lstStyle/>
+                    <a:p>
+                      <a:pPr algn="ctr"/>
+                      <a:r>
+                        <a:rPr lang="en-US" dirty="0" err="1"/>
+                        <a:t>i</a:t>
+                      </a:r>
+                      <a:endParaRPr lang="en-US" dirty="0"/>
+                    </a:p>
+                  </a:txBody>
+                  <a:tcPr/>
+                </a:tc>
+                <a:tc>
+                  <a:txBody>
+                    <a:bodyPr/>
+                    <a:lstStyle/>
+                    <a:p>
+                      <a:pPr algn="ctr"/>
+                      <a:r>
+                        <a:rPr lang="en-US" dirty="0"/>
+                        <a:t>A[</a:t>
+                      </a:r>
+                      <a:r>
+                        <a:rPr lang="en-US" dirty="0" err="1"/>
+                        <a:t>i</a:t>
+                      </a:r>
+                      <a:r>
+                        <a:rPr lang="en-US" dirty="0"/>
+                        <a:t>] : Before</a:t>
+                      </a:r>
+                    </a:p>
+                  </a:txBody>
+                  <a:tcPr/>
+                </a:tc>
+                <a:tc>
+                  <a:txBody>
+                    <a:bodyPr/>
+                    <a:lstStyle/>
+                    <a:p>
+                      <a:pPr algn="ctr"/>
+                      <a:r>
+                        <a:rPr lang="en-US" dirty="0"/>
+                        <a:t>A[</a:t>
+                      </a:r>
+                      <a:r>
+                        <a:rPr lang="en-US" dirty="0" err="1"/>
+                        <a:t>i</a:t>
+                      </a:r>
+                      <a:r>
+                        <a:rPr lang="en-US" dirty="0"/>
+                        <a:t>] : After</a:t>
+                      </a:r>
+                    </a:p>
+                  </a:txBody>
+                  <a:tcPr/>
+                </a:tc>
+                <a:extLst>
+                  <a:ext uri="{0D108BD9-81ED-4DB2-BD59-A6C34878D82A}">
+                    <a16:rowId xmlns:a16="http://schemas.microsoft.com/office/drawing/2014/main" val="156903781"/>
+                  </a:ext>
+                </a:extLst>
+              </a:tr>
+              <a:tr h="462456">
+                <a:tc>
+                  <a:txBody>
+                    <a:bodyPr/>
+                    <a:lstStyle/>
+                    <a:p>
+                      <a:r>
+                        <a:rPr lang="en-US" dirty="0"/>
+                        <a:t>0</a:t>
+                      </a:r>
+                    </a:p>
+                  </a:txBody>
+                  <a:tcPr/>
+                </a:tc>
+                <a:tc>
+                  <a:txBody>
+                    <a:bodyPr/>
+                    <a:lstStyle/>
+                    <a:p>
+                      <a:r>
+                        <a:rPr lang="en-US" dirty="0"/>
+                        <a:t>1</a:t>
+                      </a:r>
+                    </a:p>
+                  </a:txBody>
+                  <a:tcPr/>
+                </a:tc>
+                <a:tc>
+                  <a:txBody>
+                    <a:bodyPr/>
+                    <a:lstStyle/>
+                    <a:p>
+                      <a:r>
+                        <a:rPr lang="en-US" dirty="0"/>
+                        <a:t>1</a:t>
+                      </a:r>
+                    </a:p>
+                  </a:txBody>
+                  <a:tcPr/>
+                </a:tc>
+                <a:extLst>
+                  <a:ext uri="{0D108BD9-81ED-4DB2-BD59-A6C34878D82A}">
+                    <a16:rowId xmlns:a16="http://schemas.microsoft.com/office/drawing/2014/main" val="1004111627"/>
+                  </a:ext>
+                </a:extLst>
+              </a:tr>
+              <a:tr h="462456">
+                <a:tc>
+                  <a:txBody>
+                    <a:bodyPr/>
+                    <a:lstStyle/>
+                    <a:p>
+                      <a:r>
+                        <a:rPr lang="en-US" dirty="0"/>
+                        <a:t>1</a:t>
+                      </a:r>
+                    </a:p>
+                  </a:txBody>
+                  <a:tcPr/>
+                </a:tc>
+                <a:tc>
+                  <a:txBody>
+                    <a:bodyPr/>
+                    <a:lstStyle/>
+                    <a:p>
+                      <a:r>
+                        <a:rPr lang="en-US" dirty="0"/>
+                        <a:t>2</a:t>
+                      </a:r>
+                    </a:p>
+                  </a:txBody>
+                  <a:tcPr/>
+                </a:tc>
+                <a:tc>
+                  <a:txBody>
+                    <a:bodyPr/>
+                    <a:lstStyle/>
+                    <a:p>
+                      <a:r>
+                        <a:rPr lang="en-US" dirty="0"/>
+                        <a:t>3</a:t>
+                      </a:r>
+                    </a:p>
+                  </a:txBody>
+                  <a:tcPr/>
+                </a:tc>
+                <a:extLst>
+                  <a:ext uri="{0D108BD9-81ED-4DB2-BD59-A6C34878D82A}">
+                    <a16:rowId xmlns:a16="http://schemas.microsoft.com/office/drawing/2014/main" val="4019452181"/>
+                  </a:ext>
+                </a:extLst>
+              </a:tr>
+              <a:tr h="462456">
+                <a:tc>
+                  <a:txBody>
+                    <a:bodyPr/>
+                    <a:lstStyle/>
+                    <a:p>
+                      <a:r>
+                        <a:rPr lang="en-US" dirty="0"/>
+                        <a:t>2</a:t>
+                      </a:r>
+                    </a:p>
+                  </a:txBody>
+                  <a:tcPr/>
+                </a:tc>
+                <a:tc>
+                  <a:txBody>
+                    <a:bodyPr/>
+                    <a:lstStyle/>
+                    <a:p>
+                      <a:r>
+                        <a:rPr lang="en-US" dirty="0"/>
+                        <a:t>3</a:t>
+                      </a:r>
+                    </a:p>
+                  </a:txBody>
+                  <a:tcPr/>
+                </a:tc>
+                <a:tc>
+                  <a:txBody>
+                    <a:bodyPr/>
+                    <a:lstStyle/>
+                    <a:p>
+                      <a:r>
+                        <a:rPr lang="en-US" dirty="0"/>
+                        <a:t>5</a:t>
+                      </a:r>
+                    </a:p>
+                  </a:txBody>
+                  <a:tcPr/>
+                </a:tc>
+                <a:extLst>
+                  <a:ext uri="{0D108BD9-81ED-4DB2-BD59-A6C34878D82A}">
+                    <a16:rowId xmlns:a16="http://schemas.microsoft.com/office/drawing/2014/main" val="4092189348"/>
+                  </a:ext>
+                </a:extLst>
+              </a:tr>
+              <a:tr h="462456">
+                <a:tc>
+                  <a:txBody>
+                    <a:bodyPr/>
+                    <a:lstStyle/>
+                    <a:p>
+                      <a:r>
+                        <a:rPr lang="en-US" dirty="0"/>
+                        <a:t>3</a:t>
+                      </a:r>
+                    </a:p>
+                  </a:txBody>
+                  <a:tcPr/>
+                </a:tc>
+                <a:tc>
+                  <a:txBody>
+                    <a:bodyPr/>
+                    <a:lstStyle/>
+                    <a:p>
+                      <a:r>
+                        <a:rPr lang="en-US" dirty="0"/>
+                        <a:t>4</a:t>
+                      </a:r>
+                    </a:p>
+                  </a:txBody>
+                  <a:tcPr/>
+                </a:tc>
+                <a:tc>
+                  <a:txBody>
+                    <a:bodyPr/>
+                    <a:lstStyle/>
+                    <a:p>
+                      <a:r>
+                        <a:rPr lang="en-US" dirty="0"/>
+                        <a:t>7</a:t>
+                      </a:r>
+                    </a:p>
+                  </a:txBody>
+                  <a:tcPr/>
+                </a:tc>
+                <a:extLst>
+                  <a:ext uri="{0D108BD9-81ED-4DB2-BD59-A6C34878D82A}">
+                    <a16:rowId xmlns:a16="http://schemas.microsoft.com/office/drawing/2014/main" val="2830260239"/>
+                  </a:ext>
+                </a:extLst>
+              </a:tr>
+              <a:tr h="462456">
+                <a:tc>
+                  <a:txBody>
+                    <a:bodyPr/>
+                    <a:lstStyle/>
+                    <a:p>
+                      <a:r>
+                        <a:rPr lang="en-US" dirty="0"/>
+                        <a:t>4</a:t>
+                      </a:r>
+                    </a:p>
+                  </a:txBody>
+                  <a:tcPr/>
+                </a:tc>
+                <a:tc>
+                  <a:txBody>
+                    <a:bodyPr/>
+                    <a:lstStyle/>
+                    <a:p>
+                      <a:r>
+                        <a:rPr lang="en-US" dirty="0"/>
+                        <a:t>5</a:t>
+                      </a:r>
+                    </a:p>
+                  </a:txBody>
+                  <a:tcPr/>
+                </a:tc>
+                <a:tc>
+                  <a:txBody>
+                    <a:bodyPr/>
+                    <a:lstStyle/>
+                    <a:p>
+                      <a:r>
+                        <a:rPr lang="en-US" dirty="0"/>
+                        <a:t>9</a:t>
+                      </a:r>
+                    </a:p>
+                  </a:txBody>
+                  <a:tcPr/>
+                </a:tc>
+                <a:extLst>
+                  <a:ext uri="{0D108BD9-81ED-4DB2-BD59-A6C34878D82A}">
+                    <a16:rowId xmlns:a16="http://schemas.microsoft.com/office/drawing/2014/main" val="3696806729"/>
+                  </a:ext>
+                </a:extLst>
+              </a:tr>
+            </a:tbl>
+          </a:graphicData>
+        </a:graphic>
+      </p:graphicFrame>
+      <p:pic>
+        <p:nvPicPr>
+          <p:cNvPr id="7" name="Content Placeholder 4">
+            <a:extLst>
+              <a:ext uri="{FF2B5EF4-FFF2-40B4-BE49-F238E27FC236}">
+                <a16:creationId xmlns:a16="http://schemas.microsoft.com/office/drawing/2014/main" id="{F0E50695-BDC5-0370-1DB9-2A32436F217E}"/>
+              </a:ext>
+            </a:extLst>
+          </p:cNvPr>
+          <p:cNvPicPr>
+            <a:picLocks noChangeAspect="1"/>
+          </p:cNvPicPr>
+          <p:nvPr/>
+        </p:nvPicPr>
+        <p:blipFill>
+          <a:blip r:embed="rId2"/>
+          <a:stretch>
+            <a:fillRect/>
+          </a:stretch>
+        </p:blipFill>
+        <p:spPr>
+          <a:xfrm>
+            <a:off x="6415848" y="1675557"/>
+            <a:ext cx="4036690" cy="4213159"/>
+          </a:xfrm>
+          <a:prstGeom prst="rect">
+            <a:avLst/>
+          </a:prstGeom>
+        </p:spPr>
+      </p:pic>
+      <p:sp>
+        <p:nvSpPr>
+          <p:cNvPr id="12" name="TextBox 11">
+            <a:extLst>
+              <a:ext uri="{FF2B5EF4-FFF2-40B4-BE49-F238E27FC236}">
+                <a16:creationId xmlns:a16="http://schemas.microsoft.com/office/drawing/2014/main" id="{945E9F79-29BB-4CDA-46A4-57558B564644}"/>
+              </a:ext>
+            </a:extLst>
+          </p:cNvPr>
+          <p:cNvSpPr txBox="1"/>
+          <p:nvPr/>
+        </p:nvSpPr>
+        <p:spPr>
+          <a:xfrm>
+            <a:off x="1224455" y="2088587"/>
+            <a:ext cx="4124653" cy="461665"/>
+          </a:xfrm>
+          <a:prstGeom prst="rect">
+            <a:avLst/>
+          </a:prstGeom>
+          <a:noFill/>
+        </p:spPr>
+        <p:txBody>
+          <a:bodyPr wrap="square">
+            <a:spAutoFit/>
+          </a:bodyPr>
+          <a:lstStyle/>
+          <a:p>
+            <a:r>
+              <a:rPr lang="en-US" sz="2400" b="1" dirty="0"/>
+              <a:t>9 7 5 3 1</a:t>
+            </a:r>
+            <a:endParaRPr lang="en-US" sz="2400" dirty="0"/>
+          </a:p>
+        </p:txBody>
+      </p:sp>
+    </p:spTree>
+    <p:extLst>
+      <p:ext uri="{BB962C8B-B14F-4D97-AF65-F5344CB8AC3E}">
+        <p14:creationId xmlns:p14="http://schemas.microsoft.com/office/powerpoint/2010/main" val="3077207006"/>
+      </p:ext>
+    </p:extLst>
+  </p:cSld>
+  <p:clrMapOvr>
+    <a:masterClrMapping/>
+  </p:clrMapOvr>
+</p:sld>
+</file>
+
+<file path=ppt/slides/slide91.xml><?xml version="1.0" encoding="utf-8"?>
+<p:sld xmlns:a="http://schemas.openxmlformats.org/drawingml/2006/main" xmlns:r="http://schemas.openxmlformats.org/officeDocument/2006/relationships" xmlns:p="http://schemas.openxmlformats.org/presentationml/2006/main">
+  <p:cSld>
+    <p:spTree>
+      <p:nvGrpSpPr>
+        <p:cNvPr id="1" name=""/>
+        <p:cNvGrpSpPr/>
+        <p:nvPr/>
+      </p:nvGrpSpPr>
+      <p:grpSpPr>
+        <a:xfrm>
+          <a:off x="0" y="0"/>
+          <a:ext cx="0" cy="0"/>
+          <a:chOff x="0" y="0"/>
+          <a:chExt cx="0" cy="0"/>
+        </a:xfrm>
+      </p:grpSpPr>
+      <p:sp>
+        <p:nvSpPr>
+          <p:cNvPr id="2" name="Title 1">
+            <a:extLst>
+              <a:ext uri="{FF2B5EF4-FFF2-40B4-BE49-F238E27FC236}">
+                <a16:creationId xmlns:a16="http://schemas.microsoft.com/office/drawing/2014/main" id="{693160C2-3FE9-DE1C-F670-2471C6908176}"/>
+              </a:ext>
+            </a:extLst>
+          </p:cNvPr>
+          <p:cNvSpPr>
+            <a:spLocks noGrp="1"/>
+          </p:cNvSpPr>
+          <p:nvPr>
+            <p:ph type="title"/>
+          </p:nvPr>
+        </p:nvSpPr>
+        <p:spPr/>
+        <p:txBody>
+          <a:bodyPr/>
+          <a:lstStyle/>
+          <a:p>
+            <a:r>
+              <a:rPr lang="en-US" dirty="0"/>
+              <a:t>What does this program do ? Q2</a:t>
+            </a:r>
+          </a:p>
+        </p:txBody>
+      </p:sp>
+      <p:pic>
+        <p:nvPicPr>
+          <p:cNvPr id="5" name="Content Placeholder 4">
+            <a:extLst>
+              <a:ext uri="{FF2B5EF4-FFF2-40B4-BE49-F238E27FC236}">
+                <a16:creationId xmlns:a16="http://schemas.microsoft.com/office/drawing/2014/main" id="{13A649AB-679F-53E7-0286-70971B8EF844}"/>
+              </a:ext>
+            </a:extLst>
+          </p:cNvPr>
+          <p:cNvPicPr>
+            <a:picLocks noGrp="1" noChangeAspect="1"/>
+          </p:cNvPicPr>
+          <p:nvPr>
+            <p:ph idx="1"/>
+          </p:nvPr>
+        </p:nvPicPr>
+        <p:blipFill>
+          <a:blip r:embed="rId2"/>
+          <a:stretch>
+            <a:fillRect/>
+          </a:stretch>
+        </p:blipFill>
+        <p:spPr>
+          <a:xfrm>
+            <a:off x="984934" y="1690688"/>
+            <a:ext cx="4516662" cy="4142553"/>
+          </a:xfrm>
+        </p:spPr>
+      </p:pic>
+    </p:spTree>
+    <p:extLst>
+      <p:ext uri="{BB962C8B-B14F-4D97-AF65-F5344CB8AC3E}">
+        <p14:creationId xmlns:p14="http://schemas.microsoft.com/office/powerpoint/2010/main" val="1674324199"/>
+      </p:ext>
+    </p:extLst>
+  </p:cSld>
+  <p:clrMapOvr>
+    <a:masterClrMapping/>
+  </p:clrMapOvr>
+</p:sld>
+</file>
+
+<file path=ppt/slides/slide92.xml><?xml version="1.0" encoding="utf-8"?>
+<p:sld xmlns:a="http://schemas.openxmlformats.org/drawingml/2006/main" xmlns:r="http://schemas.openxmlformats.org/officeDocument/2006/relationships" xmlns:p="http://schemas.openxmlformats.org/presentationml/2006/main">
+  <p:cSld>
+    <p:spTree>
+      <p:nvGrpSpPr>
+        <p:cNvPr id="1" name="">
+          <a:extLst>
+            <a:ext uri="{FF2B5EF4-FFF2-40B4-BE49-F238E27FC236}">
+              <a16:creationId xmlns:a16="http://schemas.microsoft.com/office/drawing/2014/main" id="{9F47532A-6F5A-F03B-491E-8D8610979A0B}"/>
+            </a:ext>
+          </a:extLst>
+        </p:cNvPr>
+        <p:cNvGrpSpPr/>
+        <p:nvPr/>
+      </p:nvGrpSpPr>
+      <p:grpSpPr>
+        <a:xfrm>
+          <a:off x="0" y="0"/>
+          <a:ext cx="0" cy="0"/>
+          <a:chOff x="0" y="0"/>
+          <a:chExt cx="0" cy="0"/>
+        </a:xfrm>
+      </p:grpSpPr>
+      <p:sp>
+        <p:nvSpPr>
+          <p:cNvPr id="2" name="Title 1">
+            <a:extLst>
+              <a:ext uri="{FF2B5EF4-FFF2-40B4-BE49-F238E27FC236}">
+                <a16:creationId xmlns:a16="http://schemas.microsoft.com/office/drawing/2014/main" id="{3F784C87-8A76-0A64-FF44-67BE47DDE589}"/>
+              </a:ext>
+            </a:extLst>
+          </p:cNvPr>
+          <p:cNvSpPr>
+            <a:spLocks noGrp="1"/>
+          </p:cNvSpPr>
+          <p:nvPr>
+            <p:ph type="title"/>
+          </p:nvPr>
+        </p:nvSpPr>
+        <p:spPr/>
+        <p:txBody>
+          <a:bodyPr/>
+          <a:lstStyle/>
+          <a:p>
+            <a:r>
+              <a:rPr lang="en-US" dirty="0"/>
+              <a:t>What does this program do ? A2</a:t>
+            </a:r>
+          </a:p>
+        </p:txBody>
+      </p:sp>
+      <p:sp>
+        <p:nvSpPr>
+          <p:cNvPr id="4" name="Content Placeholder 3">
+            <a:extLst>
+              <a:ext uri="{FF2B5EF4-FFF2-40B4-BE49-F238E27FC236}">
+                <a16:creationId xmlns:a16="http://schemas.microsoft.com/office/drawing/2014/main" id="{C918AF0C-177A-2287-B125-733572E30D38}"/>
+              </a:ext>
+            </a:extLst>
+          </p:cNvPr>
+          <p:cNvSpPr>
+            <a:spLocks noGrp="1"/>
+          </p:cNvSpPr>
+          <p:nvPr>
+            <p:ph idx="1"/>
+          </p:nvPr>
+        </p:nvSpPr>
+        <p:spPr/>
+        <p:txBody>
+          <a:bodyPr/>
+          <a:lstStyle/>
+          <a:p>
+            <a:pPr marL="0" indent="0">
+              <a:buNone/>
+            </a:pPr>
+            <a:r>
+              <a:rPr lang="en-US" dirty="0"/>
+              <a:t>2 4 6 8</a:t>
+            </a:r>
+          </a:p>
+          <a:p>
+            <a:pPr marL="0" indent="0">
+              <a:buNone/>
+            </a:pPr>
+            <a:endParaRPr lang="en-US" dirty="0"/>
+          </a:p>
+          <a:p>
+            <a:pPr>
+              <a:buFontTx/>
+              <a:buChar char="-"/>
+            </a:pPr>
+            <a:r>
+              <a:rPr lang="en-US" dirty="0"/>
+              <a:t>This program tried to sort</a:t>
+            </a:r>
+          </a:p>
+          <a:p>
+            <a:pPr>
+              <a:buFontTx/>
+              <a:buChar char="-"/>
+            </a:pPr>
+            <a:r>
+              <a:rPr lang="en-US" dirty="0"/>
+              <a:t>Already sorted </a:t>
+            </a:r>
+            <a:r>
+              <a:rPr lang="en-US" dirty="0">
+                <a:sym typeface="Wingdings" panose="05000000000000000000" pitchFamily="2" charset="2"/>
+              </a:rPr>
+              <a:t></a:t>
+            </a:r>
+            <a:r>
+              <a:rPr lang="en-US" dirty="0"/>
+              <a:t>Nothing happens </a:t>
+            </a:r>
+          </a:p>
+        </p:txBody>
+      </p:sp>
+      <p:pic>
+        <p:nvPicPr>
+          <p:cNvPr id="6" name="Content Placeholder 4">
+            <a:extLst>
+              <a:ext uri="{FF2B5EF4-FFF2-40B4-BE49-F238E27FC236}">
+                <a16:creationId xmlns:a16="http://schemas.microsoft.com/office/drawing/2014/main" id="{3A58DBF8-59D4-4A3D-CD6D-54C16CC7A73A}"/>
+              </a:ext>
+            </a:extLst>
+          </p:cNvPr>
+          <p:cNvPicPr>
+            <a:picLocks noChangeAspect="1"/>
+          </p:cNvPicPr>
+          <p:nvPr/>
+        </p:nvPicPr>
+        <p:blipFill>
+          <a:blip r:embed="rId2"/>
+          <a:stretch>
+            <a:fillRect/>
+          </a:stretch>
+        </p:blipFill>
+        <p:spPr>
+          <a:xfrm>
+            <a:off x="7086599" y="1825625"/>
+            <a:ext cx="4212021" cy="3863145"/>
+          </a:xfrm>
+          <a:prstGeom prst="rect">
+            <a:avLst/>
+          </a:prstGeom>
+        </p:spPr>
+      </p:pic>
+    </p:spTree>
+    <p:extLst>
+      <p:ext uri="{BB962C8B-B14F-4D97-AF65-F5344CB8AC3E}">
+        <p14:creationId xmlns:p14="http://schemas.microsoft.com/office/powerpoint/2010/main" val="14287973"/>
+      </p:ext>
+    </p:extLst>
+  </p:cSld>
+  <p:clrMapOvr>
+    <a:masterClrMapping/>
+  </p:clrMapOvr>
+</p:sld>
+</file>
+
+<file path=ppt/slides/slide93.xml><?xml version="1.0" encoding="utf-8"?>
+<p:sld xmlns:a="http://schemas.openxmlformats.org/drawingml/2006/main" xmlns:r="http://schemas.openxmlformats.org/officeDocument/2006/relationships" xmlns:p="http://schemas.openxmlformats.org/presentationml/2006/main">
+  <p:cSld>
+    <p:spTree>
+      <p:nvGrpSpPr>
+        <p:cNvPr id="1" name="">
+          <a:extLst>
+            <a:ext uri="{FF2B5EF4-FFF2-40B4-BE49-F238E27FC236}">
+              <a16:creationId xmlns:a16="http://schemas.microsoft.com/office/drawing/2014/main" id="{861DC7EA-2D17-DA29-7BE7-A16B9FCCECE4}"/>
+            </a:ext>
+          </a:extLst>
+        </p:cNvPr>
+        <p:cNvGrpSpPr/>
+        <p:nvPr/>
+      </p:nvGrpSpPr>
+      <p:grpSpPr>
+        <a:xfrm>
+          <a:off x="0" y="0"/>
+          <a:ext cx="0" cy="0"/>
+          <a:chOff x="0" y="0"/>
+          <a:chExt cx="0" cy="0"/>
+        </a:xfrm>
+      </p:grpSpPr>
+      <p:sp>
+        <p:nvSpPr>
+          <p:cNvPr id="2" name="Title 1">
+            <a:extLst>
+              <a:ext uri="{FF2B5EF4-FFF2-40B4-BE49-F238E27FC236}">
+                <a16:creationId xmlns:a16="http://schemas.microsoft.com/office/drawing/2014/main" id="{EF47385F-E344-2CA5-16FD-C3C3301D0AFA}"/>
+              </a:ext>
+            </a:extLst>
+          </p:cNvPr>
+          <p:cNvSpPr>
+            <a:spLocks noGrp="1"/>
+          </p:cNvSpPr>
+          <p:nvPr>
+            <p:ph type="title"/>
+          </p:nvPr>
+        </p:nvSpPr>
+        <p:spPr/>
+        <p:txBody>
+          <a:bodyPr/>
+          <a:lstStyle/>
+          <a:p>
+            <a:r>
+              <a:rPr lang="en-US" dirty="0"/>
+              <a:t>What does this program do ? Q3</a:t>
+            </a:r>
+          </a:p>
+        </p:txBody>
+      </p:sp>
+      <p:pic>
+        <p:nvPicPr>
+          <p:cNvPr id="7" name="Content Placeholder 6">
+            <a:extLst>
+              <a:ext uri="{FF2B5EF4-FFF2-40B4-BE49-F238E27FC236}">
+                <a16:creationId xmlns:a16="http://schemas.microsoft.com/office/drawing/2014/main" id="{8175DD1A-FC8B-A807-42A0-48613AC903EF}"/>
+              </a:ext>
+            </a:extLst>
+          </p:cNvPr>
+          <p:cNvPicPr>
+            <a:picLocks noGrp="1" noChangeAspect="1"/>
+          </p:cNvPicPr>
+          <p:nvPr>
+            <p:ph idx="1"/>
+          </p:nvPr>
+        </p:nvPicPr>
+        <p:blipFill>
+          <a:blip r:embed="rId2"/>
+          <a:stretch>
+            <a:fillRect/>
+          </a:stretch>
+        </p:blipFill>
+        <p:spPr>
+          <a:xfrm>
+            <a:off x="1138313" y="1690688"/>
+            <a:ext cx="5064006" cy="4071609"/>
+          </a:xfrm>
+        </p:spPr>
+      </p:pic>
+    </p:spTree>
+    <p:extLst>
+      <p:ext uri="{BB962C8B-B14F-4D97-AF65-F5344CB8AC3E}">
+        <p14:creationId xmlns:p14="http://schemas.microsoft.com/office/powerpoint/2010/main" val="1967275122"/>
+      </p:ext>
+    </p:extLst>
+  </p:cSld>
+  <p:clrMapOvr>
+    <a:masterClrMapping/>
+  </p:clrMapOvr>
+</p:sld>
+</file>
+
+<file path=ppt/slides/slide94.xml><?xml version="1.0" encoding="utf-8"?>
+<p:sld xmlns:a="http://schemas.openxmlformats.org/drawingml/2006/main" xmlns:r="http://schemas.openxmlformats.org/officeDocument/2006/relationships" xmlns:p="http://schemas.openxmlformats.org/presentationml/2006/main">
+  <p:cSld>
+    <p:spTree>
+      <p:nvGrpSpPr>
+        <p:cNvPr id="1" name="">
+          <a:extLst>
+            <a:ext uri="{FF2B5EF4-FFF2-40B4-BE49-F238E27FC236}">
+              <a16:creationId xmlns:a16="http://schemas.microsoft.com/office/drawing/2014/main" id="{893586C3-3556-C4E4-2F98-34D72C0EF83B}"/>
+            </a:ext>
+          </a:extLst>
+        </p:cNvPr>
+        <p:cNvGrpSpPr/>
+        <p:nvPr/>
+      </p:nvGrpSpPr>
+      <p:grpSpPr>
+        <a:xfrm>
+          <a:off x="0" y="0"/>
+          <a:ext cx="0" cy="0"/>
+          <a:chOff x="0" y="0"/>
+          <a:chExt cx="0" cy="0"/>
+        </a:xfrm>
+      </p:grpSpPr>
+      <p:sp>
+        <p:nvSpPr>
+          <p:cNvPr id="2" name="Title 1">
+            <a:extLst>
+              <a:ext uri="{FF2B5EF4-FFF2-40B4-BE49-F238E27FC236}">
+                <a16:creationId xmlns:a16="http://schemas.microsoft.com/office/drawing/2014/main" id="{E68613A8-03DC-CAC0-8256-B67ADE32A091}"/>
+              </a:ext>
+            </a:extLst>
+          </p:cNvPr>
+          <p:cNvSpPr>
+            <a:spLocks noGrp="1"/>
+          </p:cNvSpPr>
+          <p:nvPr>
+            <p:ph type="title"/>
+          </p:nvPr>
+        </p:nvSpPr>
+        <p:spPr/>
+        <p:txBody>
+          <a:bodyPr/>
+          <a:lstStyle/>
+          <a:p>
+            <a:r>
+              <a:rPr lang="en-US" dirty="0"/>
+              <a:t>What does this program do ? A3</a:t>
+            </a:r>
+          </a:p>
+        </p:txBody>
+      </p:sp>
+      <p:sp>
+        <p:nvSpPr>
+          <p:cNvPr id="4" name="Content Placeholder 3">
+            <a:extLst>
+              <a:ext uri="{FF2B5EF4-FFF2-40B4-BE49-F238E27FC236}">
+                <a16:creationId xmlns:a16="http://schemas.microsoft.com/office/drawing/2014/main" id="{A63127C6-BB4E-AE59-83D7-ECD64EB851DF}"/>
+              </a:ext>
+            </a:extLst>
+          </p:cNvPr>
+          <p:cNvSpPr>
+            <a:spLocks noGrp="1"/>
+          </p:cNvSpPr>
+          <p:nvPr>
+            <p:ph idx="1"/>
+          </p:nvPr>
+        </p:nvSpPr>
+        <p:spPr/>
+        <p:txBody>
+          <a:bodyPr>
+            <a:normAutofit fontScale="85000" lnSpcReduction="20000"/>
+          </a:bodyPr>
+          <a:lstStyle/>
+          <a:p>
+            <a:r>
+              <a:rPr lang="en-US" b="1" dirty="0"/>
+              <a:t>13</a:t>
+            </a:r>
+          </a:p>
+          <a:p>
+            <a:r>
+              <a:rPr lang="en-US" dirty="0"/>
+              <a:t>Add j only when (</a:t>
+            </a:r>
+            <a:r>
+              <a:rPr lang="en-US" dirty="0" err="1"/>
+              <a:t>i+j</a:t>
+            </a:r>
+            <a:r>
+              <a:rPr lang="en-US" dirty="0"/>
+              <a:t>) is even</a:t>
+            </a:r>
+          </a:p>
+          <a:p>
+            <a:pPr lvl="1"/>
+            <a:r>
+              <a:rPr lang="en-US" dirty="0" err="1"/>
+              <a:t>i</a:t>
+            </a:r>
+            <a:r>
+              <a:rPr lang="en-US" dirty="0"/>
+              <a:t> =1</a:t>
+            </a:r>
+          </a:p>
+          <a:p>
+            <a:pPr lvl="2"/>
+            <a:r>
+              <a:rPr lang="en-US" dirty="0"/>
+              <a:t>j=1 → 2 (even) → +1 → sum=1</a:t>
+            </a:r>
+          </a:p>
+          <a:p>
+            <a:pPr lvl="1"/>
+            <a:r>
+              <a:rPr lang="en-US" dirty="0" err="1"/>
+              <a:t>i</a:t>
+            </a:r>
+            <a:r>
+              <a:rPr lang="en-US" dirty="0"/>
+              <a:t>=2</a:t>
+            </a:r>
+          </a:p>
+          <a:p>
+            <a:pPr lvl="2"/>
+            <a:r>
+              <a:rPr lang="en-US" dirty="0"/>
+              <a:t>j=1 → 3</a:t>
+            </a:r>
+          </a:p>
+          <a:p>
+            <a:pPr lvl="2"/>
+            <a:r>
+              <a:rPr lang="en-US" dirty="0"/>
+              <a:t>j=2 → 4(even) → +2 → sum=3</a:t>
+            </a:r>
+          </a:p>
+          <a:p>
+            <a:pPr lvl="1"/>
+            <a:r>
+              <a:rPr lang="en-US" dirty="0" err="1"/>
+              <a:t>i</a:t>
+            </a:r>
+            <a:r>
+              <a:rPr lang="en-US" dirty="0"/>
+              <a:t>=3</a:t>
+            </a:r>
+          </a:p>
+          <a:p>
+            <a:pPr lvl="2"/>
+            <a:r>
+              <a:rPr lang="en-US" dirty="0"/>
+              <a:t>j=1 → 4 (even) → +1 → sum=4</a:t>
+            </a:r>
+          </a:p>
+          <a:p>
+            <a:pPr lvl="2"/>
+            <a:r>
+              <a:rPr lang="en-US" dirty="0"/>
+              <a:t>j=2 → 5 (odd)</a:t>
+            </a:r>
+          </a:p>
+          <a:p>
+            <a:pPr lvl="2"/>
+            <a:r>
+              <a:rPr lang="en-US" dirty="0"/>
+              <a:t>j=3 → 6 (even) → +3 → sum=7</a:t>
+            </a:r>
+          </a:p>
+          <a:p>
+            <a:pPr lvl="1"/>
+            <a:r>
+              <a:rPr lang="en-US" dirty="0" err="1"/>
+              <a:t>i</a:t>
+            </a:r>
+            <a:r>
+              <a:rPr lang="en-US" dirty="0"/>
+              <a:t>=4</a:t>
+            </a:r>
+          </a:p>
+          <a:p>
+            <a:pPr lvl="2"/>
+            <a:r>
+              <a:rPr lang="en-US" dirty="0"/>
+              <a:t>j=1 → 5 (odd)</a:t>
+            </a:r>
+          </a:p>
+          <a:p>
+            <a:pPr lvl="2"/>
+            <a:r>
+              <a:rPr lang="en-US" dirty="0"/>
+              <a:t>j=2 → 6 (even) → +2 → sum=9</a:t>
+            </a:r>
+          </a:p>
+          <a:p>
+            <a:pPr lvl="2"/>
+            <a:r>
+              <a:rPr lang="en-US" dirty="0"/>
+              <a:t>j=3 → 7 (odd)</a:t>
+            </a:r>
+          </a:p>
+          <a:p>
+            <a:pPr lvl="2"/>
+            <a:r>
+              <a:rPr lang="en-US" dirty="0"/>
+              <a:t>j=4 → 8 (even) → +4 → sum=13</a:t>
+            </a:r>
+          </a:p>
+          <a:p>
+            <a:pPr lvl="2"/>
+            <a:endParaRPr lang="en-US" dirty="0"/>
+          </a:p>
+        </p:txBody>
+      </p:sp>
+      <p:pic>
+        <p:nvPicPr>
+          <p:cNvPr id="8" name="Content Placeholder 6">
+            <a:extLst>
+              <a:ext uri="{FF2B5EF4-FFF2-40B4-BE49-F238E27FC236}">
+                <a16:creationId xmlns:a16="http://schemas.microsoft.com/office/drawing/2014/main" id="{3AD373F5-91BE-5532-CE2F-4C5A2A454264}"/>
+              </a:ext>
+            </a:extLst>
+          </p:cNvPr>
+          <p:cNvPicPr>
+            <a:picLocks noChangeAspect="1"/>
+          </p:cNvPicPr>
+          <p:nvPr/>
+        </p:nvPicPr>
+        <p:blipFill>
+          <a:blip r:embed="rId2"/>
+          <a:stretch>
+            <a:fillRect/>
+          </a:stretch>
+        </p:blipFill>
+        <p:spPr>
+          <a:xfrm>
+            <a:off x="6356661" y="1990233"/>
+            <a:ext cx="4855249" cy="3903762"/>
+          </a:xfrm>
+          <a:prstGeom prst="rect">
+            <a:avLst/>
+          </a:prstGeom>
+        </p:spPr>
+      </p:pic>
+    </p:spTree>
+    <p:extLst>
+      <p:ext uri="{BB962C8B-B14F-4D97-AF65-F5344CB8AC3E}">
+        <p14:creationId xmlns:p14="http://schemas.microsoft.com/office/powerpoint/2010/main" val="4183839088"/>
+      </p:ext>
+    </p:extLst>
+  </p:cSld>
+  <p:clrMapOvr>
+    <a:masterClrMapping/>
+  </p:clrMapOvr>
+</p:sld>
+</file>
+
+<file path=ppt/slides/slide95.xml><?xml version="1.0" encoding="utf-8"?>
+<p:sld xmlns:a="http://schemas.openxmlformats.org/drawingml/2006/main" xmlns:r="http://schemas.openxmlformats.org/officeDocument/2006/relationships" xmlns:p="http://schemas.openxmlformats.org/presentationml/2006/main">
+  <p:cSld>
+    <p:spTree>
+      <p:nvGrpSpPr>
+        <p:cNvPr id="1" name=""/>
+        <p:cNvGrpSpPr/>
+        <p:nvPr/>
+      </p:nvGrpSpPr>
+      <p:grpSpPr>
+        <a:xfrm>
+          <a:off x="0" y="0"/>
+          <a:ext cx="0" cy="0"/>
+          <a:chOff x="0" y="0"/>
+          <a:chExt cx="0" cy="0"/>
+        </a:xfrm>
+      </p:grpSpPr>
+      <p:sp>
+        <p:nvSpPr>
+          <p:cNvPr id="2" name="Title 1">
+            <a:extLst>
+              <a:ext uri="{FF2B5EF4-FFF2-40B4-BE49-F238E27FC236}">
+                <a16:creationId xmlns:a16="http://schemas.microsoft.com/office/drawing/2014/main" id="{BF064A83-F873-72A7-C405-8ABD45D0BDE1}"/>
+              </a:ext>
+            </a:extLst>
+          </p:cNvPr>
+          <p:cNvSpPr>
+            <a:spLocks noGrp="1"/>
+          </p:cNvSpPr>
+          <p:nvPr>
+            <p:ph type="title"/>
+          </p:nvPr>
+        </p:nvSpPr>
+        <p:spPr/>
+        <p:txBody>
+          <a:bodyPr/>
+          <a:lstStyle/>
+          <a:p>
+            <a:r>
+              <a:rPr lang="en-US" dirty="0"/>
+              <a:t>What does this program do ? Q4</a:t>
+            </a:r>
+          </a:p>
+        </p:txBody>
+      </p:sp>
+      <p:pic>
+        <p:nvPicPr>
+          <p:cNvPr id="5" name="Content Placeholder 4">
+            <a:extLst>
+              <a:ext uri="{FF2B5EF4-FFF2-40B4-BE49-F238E27FC236}">
+                <a16:creationId xmlns:a16="http://schemas.microsoft.com/office/drawing/2014/main" id="{2B868C33-D8B7-9D19-DBFD-BAAA6B1E4A46}"/>
+              </a:ext>
+            </a:extLst>
+          </p:cNvPr>
+          <p:cNvPicPr>
+            <a:picLocks noGrp="1" noChangeAspect="1"/>
+          </p:cNvPicPr>
+          <p:nvPr>
+            <p:ph idx="1"/>
+          </p:nvPr>
+        </p:nvPicPr>
+        <p:blipFill>
+          <a:blip r:embed="rId2"/>
+          <a:stretch>
+            <a:fillRect/>
+          </a:stretch>
+        </p:blipFill>
+        <p:spPr>
+          <a:xfrm>
+            <a:off x="912788" y="1799728"/>
+            <a:ext cx="4100645" cy="4563898"/>
+          </a:xfrm>
+        </p:spPr>
+      </p:pic>
+    </p:spTree>
+    <p:extLst>
+      <p:ext uri="{BB962C8B-B14F-4D97-AF65-F5344CB8AC3E}">
+        <p14:creationId xmlns:p14="http://schemas.microsoft.com/office/powerpoint/2010/main" val="3622320170"/>
+      </p:ext>
+    </p:extLst>
+  </p:cSld>
+  <p:clrMapOvr>
+    <a:masterClrMapping/>
+  </p:clrMapOvr>
+</p:sld>
+</file>
+
+<file path=ppt/slides/slide96.xml><?xml version="1.0" encoding="utf-8"?>
+<p:sld xmlns:a="http://schemas.openxmlformats.org/drawingml/2006/main" xmlns:r="http://schemas.openxmlformats.org/officeDocument/2006/relationships" xmlns:p="http://schemas.openxmlformats.org/presentationml/2006/main">
+  <p:cSld>
+    <p:spTree>
+      <p:nvGrpSpPr>
+        <p:cNvPr id="1" name="">
+          <a:extLst>
+            <a:ext uri="{FF2B5EF4-FFF2-40B4-BE49-F238E27FC236}">
+              <a16:creationId xmlns:a16="http://schemas.microsoft.com/office/drawing/2014/main" id="{E2E81A11-13A6-13EA-2BBF-E3F325435E64}"/>
+            </a:ext>
+          </a:extLst>
+        </p:cNvPr>
+        <p:cNvGrpSpPr/>
+        <p:nvPr/>
+      </p:nvGrpSpPr>
+      <p:grpSpPr>
+        <a:xfrm>
+          <a:off x="0" y="0"/>
+          <a:ext cx="0" cy="0"/>
+          <a:chOff x="0" y="0"/>
+          <a:chExt cx="0" cy="0"/>
+        </a:xfrm>
+      </p:grpSpPr>
+      <p:sp>
+        <p:nvSpPr>
+          <p:cNvPr id="2" name="Title 1">
+            <a:extLst>
+              <a:ext uri="{FF2B5EF4-FFF2-40B4-BE49-F238E27FC236}">
+                <a16:creationId xmlns:a16="http://schemas.microsoft.com/office/drawing/2014/main" id="{43C073A9-D3A1-EA46-9965-88D807526F59}"/>
+              </a:ext>
+            </a:extLst>
+          </p:cNvPr>
+          <p:cNvSpPr>
+            <a:spLocks noGrp="1"/>
+          </p:cNvSpPr>
+          <p:nvPr>
+            <p:ph type="title"/>
+          </p:nvPr>
+        </p:nvSpPr>
+        <p:spPr/>
+        <p:txBody>
+          <a:bodyPr/>
+          <a:lstStyle/>
+          <a:p>
+            <a:r>
+              <a:rPr lang="en-US" dirty="0"/>
+              <a:t>What does this program do ? A4</a:t>
+            </a:r>
+          </a:p>
+        </p:txBody>
+      </p:sp>
+      <p:sp>
+        <p:nvSpPr>
+          <p:cNvPr id="4" name="Content Placeholder 3">
+            <a:extLst>
+              <a:ext uri="{FF2B5EF4-FFF2-40B4-BE49-F238E27FC236}">
+                <a16:creationId xmlns:a16="http://schemas.microsoft.com/office/drawing/2014/main" id="{FAF4CA66-2E1D-A65D-96B1-7D63B9B6342F}"/>
+              </a:ext>
+            </a:extLst>
+          </p:cNvPr>
+          <p:cNvSpPr>
+            <a:spLocks noGrp="1"/>
+          </p:cNvSpPr>
+          <p:nvPr>
+            <p:ph idx="1"/>
+          </p:nvPr>
+        </p:nvSpPr>
+        <p:spPr/>
+        <p:txBody>
+          <a:bodyPr/>
+          <a:lstStyle/>
+          <a:p>
+            <a:r>
+              <a:rPr lang="en-US" dirty="0"/>
+              <a:t>6</a:t>
+            </a:r>
+          </a:p>
+          <a:p>
+            <a:r>
+              <a:rPr lang="en-US" dirty="0"/>
+              <a:t>Count how many times A[</a:t>
+            </a:r>
+            <a:r>
+              <a:rPr lang="en-US" dirty="0" err="1"/>
+              <a:t>i</a:t>
+            </a:r>
+            <a:r>
+              <a:rPr lang="en-US" dirty="0"/>
+              <a:t>] &lt; A[j]</a:t>
+            </a:r>
+          </a:p>
+          <a:p>
+            <a:pPr lvl="1"/>
+            <a:r>
+              <a:rPr lang="it-IT" dirty="0"/>
+              <a:t>1 &lt; 3,5,7 → 3</a:t>
+            </a:r>
+          </a:p>
+          <a:p>
+            <a:pPr lvl="1"/>
+            <a:r>
+              <a:rPr lang="it-IT" dirty="0"/>
+              <a:t>3 &lt; 5,7 → 2</a:t>
+            </a:r>
+          </a:p>
+          <a:p>
+            <a:pPr lvl="1"/>
+            <a:r>
+              <a:rPr lang="it-IT" dirty="0"/>
+              <a:t>5 &lt; 7 → 1</a:t>
+            </a:r>
+          </a:p>
+          <a:p>
+            <a:pPr lvl="1"/>
+            <a:r>
+              <a:rPr lang="it-IT" dirty="0"/>
+              <a:t>7 &lt; none → 0</a:t>
+            </a:r>
+            <a:endParaRPr lang="en-US" dirty="0"/>
+          </a:p>
+          <a:p>
+            <a:r>
+              <a:rPr lang="en-US" dirty="0"/>
+              <a:t>Total = 3 + 2 + 1 = 6</a:t>
+            </a:r>
+            <a:endParaRPr lang="it-IT" dirty="0"/>
+          </a:p>
+        </p:txBody>
+      </p:sp>
+      <p:pic>
+        <p:nvPicPr>
+          <p:cNvPr id="6" name="Content Placeholder 4">
+            <a:extLst>
+              <a:ext uri="{FF2B5EF4-FFF2-40B4-BE49-F238E27FC236}">
+                <a16:creationId xmlns:a16="http://schemas.microsoft.com/office/drawing/2014/main" id="{665AAB9F-0F4E-0B93-A910-68451237E38F}"/>
+              </a:ext>
+            </a:extLst>
+          </p:cNvPr>
+          <p:cNvPicPr>
+            <a:picLocks noChangeAspect="1"/>
+          </p:cNvPicPr>
+          <p:nvPr/>
+        </p:nvPicPr>
+        <p:blipFill>
+          <a:blip r:embed="rId2"/>
+          <a:stretch>
+            <a:fillRect/>
+          </a:stretch>
+        </p:blipFill>
+        <p:spPr>
+          <a:xfrm>
+            <a:off x="6794937" y="1690687"/>
+            <a:ext cx="3909659" cy="4351337"/>
+          </a:xfrm>
+          <a:prstGeom prst="rect">
+            <a:avLst/>
+          </a:prstGeom>
+        </p:spPr>
+      </p:pic>
+    </p:spTree>
+    <p:extLst>
+      <p:ext uri="{BB962C8B-B14F-4D97-AF65-F5344CB8AC3E}">
+        <p14:creationId xmlns:p14="http://schemas.microsoft.com/office/powerpoint/2010/main" val="3862395078"/>
+      </p:ext>
+    </p:extLst>
+  </p:cSld>
+  <p:clrMapOvr>
+    <a:masterClrMapping/>
+  </p:clrMapOvr>
+</p:sld>
+</file>
+
+<file path=ppt/slides/slide97.xml><?xml version="1.0" encoding="utf-8"?>
+<p:sld xmlns:a="http://schemas.openxmlformats.org/drawingml/2006/main" xmlns:r="http://schemas.openxmlformats.org/officeDocument/2006/relationships" xmlns:p="http://schemas.openxmlformats.org/presentationml/2006/main">
+  <p:cSld>
+    <p:spTree>
+      <p:nvGrpSpPr>
+        <p:cNvPr id="1" name="">
+          <a:extLst>
+            <a:ext uri="{FF2B5EF4-FFF2-40B4-BE49-F238E27FC236}">
+              <a16:creationId xmlns:a16="http://schemas.microsoft.com/office/drawing/2014/main" id="{1ED58E75-5553-324F-5B48-028B76BBD095}"/>
+            </a:ext>
+          </a:extLst>
+        </p:cNvPr>
+        <p:cNvGrpSpPr/>
+        <p:nvPr/>
+      </p:nvGrpSpPr>
+      <p:grpSpPr>
+        <a:xfrm>
+          <a:off x="0" y="0"/>
+          <a:ext cx="0" cy="0"/>
+          <a:chOff x="0" y="0"/>
+          <a:chExt cx="0" cy="0"/>
+        </a:xfrm>
+      </p:grpSpPr>
+      <p:sp>
+        <p:nvSpPr>
+          <p:cNvPr id="2" name="Title 1">
+            <a:extLst>
+              <a:ext uri="{FF2B5EF4-FFF2-40B4-BE49-F238E27FC236}">
+                <a16:creationId xmlns:a16="http://schemas.microsoft.com/office/drawing/2014/main" id="{52D274CD-93BF-0487-A229-2394EC9B262E}"/>
+              </a:ext>
+            </a:extLst>
+          </p:cNvPr>
+          <p:cNvSpPr>
+            <a:spLocks noGrp="1"/>
+          </p:cNvSpPr>
+          <p:nvPr>
+            <p:ph type="title"/>
+          </p:nvPr>
+        </p:nvSpPr>
+        <p:spPr/>
+        <p:txBody>
+          <a:bodyPr/>
+          <a:lstStyle/>
+          <a:p>
+            <a:r>
+              <a:rPr lang="en-US" dirty="0"/>
+              <a:t>What does this program do ? Q5</a:t>
+            </a:r>
+          </a:p>
+        </p:txBody>
+      </p:sp>
+      <p:pic>
+        <p:nvPicPr>
+          <p:cNvPr id="10" name="Content Placeholder 4">
+            <a:extLst>
+              <a:ext uri="{FF2B5EF4-FFF2-40B4-BE49-F238E27FC236}">
+                <a16:creationId xmlns:a16="http://schemas.microsoft.com/office/drawing/2014/main" id="{43C46BAF-D801-5E6F-3276-708F9CF1C94E}"/>
+              </a:ext>
+            </a:extLst>
+          </p:cNvPr>
+          <p:cNvPicPr>
+            <a:picLocks noGrp="1" noChangeAspect="1"/>
+          </p:cNvPicPr>
+          <p:nvPr>
+            <p:ph idx="1"/>
+          </p:nvPr>
+        </p:nvPicPr>
+        <p:blipFill>
+          <a:blip r:embed="rId2"/>
+          <a:stretch>
+            <a:fillRect/>
+          </a:stretch>
+        </p:blipFill>
+        <p:spPr>
+          <a:xfrm>
+            <a:off x="1531615" y="1616107"/>
+            <a:ext cx="2220578" cy="4746673"/>
+          </a:xfrm>
+          <a:prstGeom prst="rect">
+            <a:avLst/>
+          </a:prstGeom>
+        </p:spPr>
+      </p:pic>
+    </p:spTree>
+    <p:extLst>
+      <p:ext uri="{BB962C8B-B14F-4D97-AF65-F5344CB8AC3E}">
+        <p14:creationId xmlns:p14="http://schemas.microsoft.com/office/powerpoint/2010/main" val="2481855417"/>
+      </p:ext>
+    </p:extLst>
+  </p:cSld>
+  <p:clrMapOvr>
+    <a:masterClrMapping/>
+  </p:clrMapOvr>
+</p:sld>
+</file>
+
+<file path=ppt/slides/slide98.xml><?xml version="1.0" encoding="utf-8"?>
+<p:sld xmlns:a="http://schemas.openxmlformats.org/drawingml/2006/main" xmlns:r="http://schemas.openxmlformats.org/officeDocument/2006/relationships" xmlns:p="http://schemas.openxmlformats.org/presentationml/2006/main">
+  <p:cSld>
+    <p:spTree>
+      <p:nvGrpSpPr>
+        <p:cNvPr id="1" name="">
+          <a:extLst>
+            <a:ext uri="{FF2B5EF4-FFF2-40B4-BE49-F238E27FC236}">
+              <a16:creationId xmlns:a16="http://schemas.microsoft.com/office/drawing/2014/main" id="{46A29693-7FD9-47E4-BA86-B97EB9408F3A}"/>
+            </a:ext>
+          </a:extLst>
+        </p:cNvPr>
+        <p:cNvGrpSpPr/>
+        <p:nvPr/>
+      </p:nvGrpSpPr>
+      <p:grpSpPr>
+        <a:xfrm>
+          <a:off x="0" y="0"/>
+          <a:ext cx="0" cy="0"/>
+          <a:chOff x="0" y="0"/>
+          <a:chExt cx="0" cy="0"/>
+        </a:xfrm>
+      </p:grpSpPr>
+      <p:sp>
+        <p:nvSpPr>
+          <p:cNvPr id="2" name="Title 1">
+            <a:extLst>
+              <a:ext uri="{FF2B5EF4-FFF2-40B4-BE49-F238E27FC236}">
+                <a16:creationId xmlns:a16="http://schemas.microsoft.com/office/drawing/2014/main" id="{1B8C0844-6D66-B048-A14A-CE67FE9B5BAB}"/>
+              </a:ext>
+            </a:extLst>
+          </p:cNvPr>
+          <p:cNvSpPr>
+            <a:spLocks noGrp="1"/>
+          </p:cNvSpPr>
+          <p:nvPr>
+            <p:ph type="title"/>
+          </p:nvPr>
+        </p:nvSpPr>
+        <p:spPr/>
+        <p:txBody>
+          <a:bodyPr/>
+          <a:lstStyle/>
+          <a:p>
+            <a:r>
+              <a:rPr lang="en-US" dirty="0"/>
+              <a:t>What does this program do ? Q5</a:t>
+            </a:r>
+          </a:p>
+        </p:txBody>
+      </p:sp>
+      <p:sp>
+        <p:nvSpPr>
+          <p:cNvPr id="4" name="Content Placeholder 3">
+            <a:extLst>
+              <a:ext uri="{FF2B5EF4-FFF2-40B4-BE49-F238E27FC236}">
+                <a16:creationId xmlns:a16="http://schemas.microsoft.com/office/drawing/2014/main" id="{B0DFC1A9-4F46-A34B-EC6F-15BA81F9E6DE}"/>
+              </a:ext>
+            </a:extLst>
+          </p:cNvPr>
+          <p:cNvSpPr>
+            <a:spLocks noGrp="1"/>
+          </p:cNvSpPr>
+          <p:nvPr>
+            <p:ph idx="1"/>
+          </p:nvPr>
+        </p:nvSpPr>
+        <p:spPr/>
+        <p:txBody>
+          <a:bodyPr/>
+          <a:lstStyle/>
+          <a:p>
+            <a:r>
+              <a:rPr lang="en-US" dirty="0"/>
+              <a:t>5 2 1</a:t>
+            </a:r>
+          </a:p>
+          <a:p>
+            <a:pPr lvl="1"/>
+            <a:r>
+              <a:rPr lang="en-US" dirty="0"/>
+              <a:t>Push 1,2,3,4</a:t>
+            </a:r>
+          </a:p>
+          <a:p>
+            <a:pPr lvl="1"/>
+            <a:r>
+              <a:rPr lang="en-US" dirty="0"/>
+              <a:t>Pop twice </a:t>
+            </a:r>
+          </a:p>
+          <a:p>
+            <a:pPr lvl="2"/>
+            <a:r>
+              <a:rPr lang="en-US" dirty="0"/>
+              <a:t>4 </a:t>
+            </a:r>
+            <a:r>
+              <a:rPr lang="en-US" dirty="0">
+                <a:sym typeface="Wingdings" panose="05000000000000000000" pitchFamily="2" charset="2"/>
+              </a:rPr>
+              <a:t></a:t>
+            </a:r>
+            <a:r>
+              <a:rPr lang="en-US" dirty="0"/>
+              <a:t> 1,2,3</a:t>
+            </a:r>
+          </a:p>
+          <a:p>
+            <a:pPr lvl="2"/>
+            <a:r>
+              <a:rPr lang="en-US" dirty="0"/>
+              <a:t>3 </a:t>
+            </a:r>
+            <a:r>
+              <a:rPr lang="en-US" dirty="0">
+                <a:sym typeface="Wingdings" panose="05000000000000000000" pitchFamily="2" charset="2"/>
+              </a:rPr>
+              <a:t> 1,2</a:t>
+            </a:r>
+          </a:p>
+          <a:p>
+            <a:pPr lvl="1"/>
+            <a:r>
+              <a:rPr lang="en-US" dirty="0">
+                <a:sym typeface="Wingdings" panose="05000000000000000000" pitchFamily="2" charset="2"/>
+              </a:rPr>
+              <a:t>Push 5</a:t>
+            </a:r>
+          </a:p>
+          <a:p>
+            <a:pPr lvl="2"/>
+            <a:r>
+              <a:rPr lang="en-US" dirty="0">
+                <a:sym typeface="Wingdings" panose="05000000000000000000" pitchFamily="2" charset="2"/>
+              </a:rPr>
+              <a:t>1,2,5</a:t>
+            </a:r>
+          </a:p>
+          <a:p>
+            <a:pPr lvl="1"/>
+            <a:r>
+              <a:rPr lang="en-US" dirty="0">
+                <a:sym typeface="Wingdings" panose="05000000000000000000" pitchFamily="2" charset="2"/>
+              </a:rPr>
+              <a:t>Pop all </a:t>
+            </a:r>
+          </a:p>
+          <a:p>
+            <a:pPr lvl="2"/>
+            <a:r>
+              <a:rPr lang="en-US" dirty="0">
+                <a:sym typeface="Wingdings" panose="05000000000000000000" pitchFamily="2" charset="2"/>
+              </a:rPr>
+              <a:t>5,2,1</a:t>
+            </a:r>
+            <a:endParaRPr lang="en-US" dirty="0"/>
+          </a:p>
+        </p:txBody>
+      </p:sp>
+      <p:pic>
+        <p:nvPicPr>
+          <p:cNvPr id="6" name="Content Placeholder 4">
+            <a:extLst>
+              <a:ext uri="{FF2B5EF4-FFF2-40B4-BE49-F238E27FC236}">
+                <a16:creationId xmlns:a16="http://schemas.microsoft.com/office/drawing/2014/main" id="{04979409-7BA8-5D3F-228C-B55060B2B27A}"/>
+              </a:ext>
+            </a:extLst>
+          </p:cNvPr>
+          <p:cNvPicPr>
+            <a:picLocks noChangeAspect="1"/>
+          </p:cNvPicPr>
+          <p:nvPr/>
+        </p:nvPicPr>
+        <p:blipFill>
+          <a:blip r:embed="rId2"/>
+          <a:stretch>
+            <a:fillRect/>
+          </a:stretch>
+        </p:blipFill>
+        <p:spPr>
+          <a:xfrm>
+            <a:off x="5622767" y="1690688"/>
+            <a:ext cx="2039275" cy="4359122"/>
+          </a:xfrm>
+          <a:prstGeom prst="rect">
+            <a:avLst/>
+          </a:prstGeom>
+        </p:spPr>
+      </p:pic>
+    </p:spTree>
+    <p:extLst>
+      <p:ext uri="{BB962C8B-B14F-4D97-AF65-F5344CB8AC3E}">
+        <p14:creationId xmlns:p14="http://schemas.microsoft.com/office/powerpoint/2010/main" val="3411203417"/>
+      </p:ext>
+    </p:extLst>
+  </p:cSld>
+  <p:clrMapOvr>
+    <a:masterClrMapping/>
+  </p:clrMapOvr>
+</p:sld>
+</file>
+
+<file path=ppt/slides/slide99.xml><?xml version="1.0" encoding="utf-8"?>
+<p:sld xmlns:a="http://schemas.openxmlformats.org/drawingml/2006/main" xmlns:r="http://schemas.openxmlformats.org/officeDocument/2006/relationships" xmlns:p="http://schemas.openxmlformats.org/presentationml/2006/main">
+  <p:cSld>
+    <p:spTree>
+      <p:nvGrpSpPr>
+        <p:cNvPr id="1" name="">
+          <a:extLst>
+            <a:ext uri="{FF2B5EF4-FFF2-40B4-BE49-F238E27FC236}">
+              <a16:creationId xmlns:a16="http://schemas.microsoft.com/office/drawing/2014/main" id="{1795AF1E-B94B-B679-DF50-9B417918A5DA}"/>
+            </a:ext>
+          </a:extLst>
+        </p:cNvPr>
+        <p:cNvGrpSpPr/>
+        <p:nvPr/>
+      </p:nvGrpSpPr>
+      <p:grpSpPr>
+        <a:xfrm>
+          <a:off x="0" y="0"/>
+          <a:ext cx="0" cy="0"/>
+          <a:chOff x="0" y="0"/>
+          <a:chExt cx="0" cy="0"/>
+        </a:xfrm>
+      </p:grpSpPr>
+      <p:sp>
+        <p:nvSpPr>
+          <p:cNvPr id="2" name="Title 1">
+            <a:extLst>
+              <a:ext uri="{FF2B5EF4-FFF2-40B4-BE49-F238E27FC236}">
+                <a16:creationId xmlns:a16="http://schemas.microsoft.com/office/drawing/2014/main" id="{F6280D29-E26E-CC89-ED61-E18E39F86FC7}"/>
+              </a:ext>
+            </a:extLst>
+          </p:cNvPr>
+          <p:cNvSpPr>
+            <a:spLocks noGrp="1"/>
+          </p:cNvSpPr>
+          <p:nvPr>
+            <p:ph type="title"/>
+          </p:nvPr>
+        </p:nvSpPr>
+        <p:spPr/>
+        <p:txBody>
+          <a:bodyPr/>
+          <a:lstStyle/>
+          <a:p>
+            <a:r>
+              <a:rPr lang="en-US" dirty="0"/>
+              <a:t>What does this program do ? Q6</a:t>
+            </a:r>
+          </a:p>
+        </p:txBody>
+      </p:sp>
+      <p:pic>
+        <p:nvPicPr>
+          <p:cNvPr id="5" name="Content Placeholder 4">
+            <a:extLst>
+              <a:ext uri="{FF2B5EF4-FFF2-40B4-BE49-F238E27FC236}">
+                <a16:creationId xmlns:a16="http://schemas.microsoft.com/office/drawing/2014/main" id="{E720711A-4624-D6E5-76BF-5063A92FAF86}"/>
+              </a:ext>
+            </a:extLst>
+          </p:cNvPr>
+          <p:cNvPicPr>
+            <a:picLocks noGrp="1" noChangeAspect="1"/>
+          </p:cNvPicPr>
+          <p:nvPr>
+            <p:ph idx="1"/>
+          </p:nvPr>
+        </p:nvPicPr>
+        <p:blipFill>
+          <a:blip r:embed="rId2"/>
+          <a:stretch>
+            <a:fillRect/>
+          </a:stretch>
+        </p:blipFill>
+        <p:spPr>
+          <a:xfrm>
+            <a:off x="925588" y="1690688"/>
+            <a:ext cx="5122423" cy="4260795"/>
+          </a:xfrm>
+        </p:spPr>
+      </p:pic>
+    </p:spTree>
+    <p:extLst>
+      <p:ext uri="{BB962C8B-B14F-4D97-AF65-F5344CB8AC3E}">
+        <p14:creationId xmlns:p14="http://schemas.microsoft.com/office/powerpoint/2010/main" val="386232854"/>
       </p:ext>
     </p:extLst>
   </p:cSld>

--- a/all/ExploringCSConceptsViaACSLCompetitions_all.pptx
+++ b/all/ExploringCSConceptsViaACSLCompetitions_all.pptx
@@ -5,7 +5,7 @@
     <p:sldMasterId id="2147483648" r:id="rId1"/>
   </p:sldMasterIdLst>
   <p:notesMasterIdLst>
-    <p:notesMasterId r:id="rId102"/>
+    <p:notesMasterId r:id="rId110"/>
   </p:notesMasterIdLst>
   <p:sldIdLst>
     <p:sldId id="256" r:id="rId2"/>
@@ -108,6 +108,14 @@
     <p:sldId id="371" r:id="rId99"/>
     <p:sldId id="366" r:id="rId100"/>
     <p:sldId id="372" r:id="rId101"/>
+    <p:sldId id="373" r:id="rId102"/>
+    <p:sldId id="374" r:id="rId103"/>
+    <p:sldId id="375" r:id="rId104"/>
+    <p:sldId id="376" r:id="rId105"/>
+    <p:sldId id="377" r:id="rId106"/>
+    <p:sldId id="378" r:id="rId107"/>
+    <p:sldId id="379" r:id="rId108"/>
+    <p:sldId id="380" r:id="rId109"/>
   </p:sldIdLst>
   <p:sldSz cx="12192000" cy="6858000"/>
   <p:notesSz cx="6858000" cy="9144000"/>
@@ -485,7 +493,7 @@
           <a:p>
             <a:fld id="{15653688-98A8-4F3B-A740-8E6568AE1BCB}" type="datetimeFigureOut">
               <a:rPr lang="en-US" smtClean="0"/>
-              <a:t>3/19/2026</a:t>
+              <a:t>3/26/2026</a:t>
             </a:fld>
             <a:endParaRPr lang="en-US"/>
           </a:p>
@@ -2239,7 +2247,7 @@
           <a:p>
             <a:fld id="{20CB266D-A331-4A79-AB46-FEF40B16CF9B}" type="datetimeFigureOut">
               <a:rPr lang="en-US" smtClean="0"/>
-              <a:t>3/19/2026</a:t>
+              <a:t>3/26/2026</a:t>
             </a:fld>
             <a:endParaRPr lang="en-US"/>
           </a:p>
@@ -2437,7 +2445,7 @@
           <a:p>
             <a:fld id="{20CB266D-A331-4A79-AB46-FEF40B16CF9B}" type="datetimeFigureOut">
               <a:rPr lang="en-US" smtClean="0"/>
-              <a:t>3/19/2026</a:t>
+              <a:t>3/26/2026</a:t>
             </a:fld>
             <a:endParaRPr lang="en-US"/>
           </a:p>
@@ -2645,7 +2653,7 @@
           <a:p>
             <a:fld id="{20CB266D-A331-4A79-AB46-FEF40B16CF9B}" type="datetimeFigureOut">
               <a:rPr lang="en-US" smtClean="0"/>
-              <a:t>3/19/2026</a:t>
+              <a:t>3/26/2026</a:t>
             </a:fld>
             <a:endParaRPr lang="en-US"/>
           </a:p>
@@ -2843,7 +2851,7 @@
           <a:p>
             <a:fld id="{20CB266D-A331-4A79-AB46-FEF40B16CF9B}" type="datetimeFigureOut">
               <a:rPr lang="en-US" smtClean="0"/>
-              <a:t>3/19/2026</a:t>
+              <a:t>3/26/2026</a:t>
             </a:fld>
             <a:endParaRPr lang="en-US"/>
           </a:p>
@@ -3118,7 +3126,7 @@
           <a:p>
             <a:fld id="{20CB266D-A331-4A79-AB46-FEF40B16CF9B}" type="datetimeFigureOut">
               <a:rPr lang="en-US" smtClean="0"/>
-              <a:t>3/19/2026</a:t>
+              <a:t>3/26/2026</a:t>
             </a:fld>
             <a:endParaRPr lang="en-US"/>
           </a:p>
@@ -3383,7 +3391,7 @@
           <a:p>
             <a:fld id="{20CB266D-A331-4A79-AB46-FEF40B16CF9B}" type="datetimeFigureOut">
               <a:rPr lang="en-US" smtClean="0"/>
-              <a:t>3/19/2026</a:t>
+              <a:t>3/26/2026</a:t>
             </a:fld>
             <a:endParaRPr lang="en-US"/>
           </a:p>
@@ -3795,7 +3803,7 @@
           <a:p>
             <a:fld id="{20CB266D-A331-4A79-AB46-FEF40B16CF9B}" type="datetimeFigureOut">
               <a:rPr lang="en-US" smtClean="0"/>
-              <a:t>3/19/2026</a:t>
+              <a:t>3/26/2026</a:t>
             </a:fld>
             <a:endParaRPr lang="en-US"/>
           </a:p>
@@ -3936,7 +3944,7 @@
           <a:p>
             <a:fld id="{20CB266D-A331-4A79-AB46-FEF40B16CF9B}" type="datetimeFigureOut">
               <a:rPr lang="en-US" smtClean="0"/>
-              <a:t>3/19/2026</a:t>
+              <a:t>3/26/2026</a:t>
             </a:fld>
             <a:endParaRPr lang="en-US"/>
           </a:p>
@@ -4049,7 +4057,7 @@
           <a:p>
             <a:fld id="{20CB266D-A331-4A79-AB46-FEF40B16CF9B}" type="datetimeFigureOut">
               <a:rPr lang="en-US" smtClean="0"/>
-              <a:t>3/19/2026</a:t>
+              <a:t>3/26/2026</a:t>
             </a:fld>
             <a:endParaRPr lang="en-US"/>
           </a:p>
@@ -4360,7 +4368,7 @@
           <a:p>
             <a:fld id="{20CB266D-A331-4A79-AB46-FEF40B16CF9B}" type="datetimeFigureOut">
               <a:rPr lang="en-US" smtClean="0"/>
-              <a:t>3/19/2026</a:t>
+              <a:t>3/26/2026</a:t>
             </a:fld>
             <a:endParaRPr lang="en-US"/>
           </a:p>
@@ -4648,7 +4656,7 @@
           <a:p>
             <a:fld id="{20CB266D-A331-4A79-AB46-FEF40B16CF9B}" type="datetimeFigureOut">
               <a:rPr lang="en-US" smtClean="0"/>
-              <a:t>3/19/2026</a:t>
+              <a:t>3/26/2026</a:t>
             </a:fld>
             <a:endParaRPr lang="en-US"/>
           </a:p>
@@ -4889,7 +4897,7 @@
           <a:p>
             <a:fld id="{20CB266D-A331-4A79-AB46-FEF40B16CF9B}" type="datetimeFigureOut">
               <a:rPr lang="en-US" smtClean="0"/>
-              <a:t>3/19/2026</a:t>
+              <a:t>3/26/2026</a:t>
             </a:fld>
             <a:endParaRPr lang="en-US"/>
           </a:p>
@@ -5746,6 +5754,1145 @@
     <p:extLst>
       <p:ext uri="{BB962C8B-B14F-4D97-AF65-F5344CB8AC3E}">
         <p14:creationId xmlns:p14="http://schemas.microsoft.com/office/powerpoint/2010/main" val="2440834063"/>
+      </p:ext>
+    </p:extLst>
+  </p:cSld>
+  <p:clrMapOvr>
+    <a:masterClrMapping/>
+  </p:clrMapOvr>
+</p:sld>
+</file>
+
+<file path=ppt/slides/slide101.xml><?xml version="1.0" encoding="utf-8"?>
+<p:sld xmlns:a="http://schemas.openxmlformats.org/drawingml/2006/main" xmlns:r="http://schemas.openxmlformats.org/officeDocument/2006/relationships" xmlns:p="http://schemas.openxmlformats.org/presentationml/2006/main">
+  <p:cSld>
+    <p:spTree>
+      <p:nvGrpSpPr>
+        <p:cNvPr id="1" name=""/>
+        <p:cNvGrpSpPr/>
+        <p:nvPr/>
+      </p:nvGrpSpPr>
+      <p:grpSpPr>
+        <a:xfrm>
+          <a:off x="0" y="0"/>
+          <a:ext cx="0" cy="0"/>
+          <a:chOff x="0" y="0"/>
+          <a:chExt cx="0" cy="0"/>
+        </a:xfrm>
+      </p:grpSpPr>
+      <p:sp>
+        <p:nvSpPr>
+          <p:cNvPr id="2" name="Title 1">
+            <a:extLst>
+              <a:ext uri="{FF2B5EF4-FFF2-40B4-BE49-F238E27FC236}">
+                <a16:creationId xmlns:a16="http://schemas.microsoft.com/office/drawing/2014/main" id="{C72E7288-A3E9-2E4B-1CFA-A9FE653B6DFB}"/>
+              </a:ext>
+            </a:extLst>
+          </p:cNvPr>
+          <p:cNvSpPr>
+            <a:spLocks noGrp="1"/>
+          </p:cNvSpPr>
+          <p:nvPr>
+            <p:ph type="title"/>
+          </p:nvPr>
+        </p:nvSpPr>
+        <p:spPr/>
+        <p:txBody>
+          <a:bodyPr/>
+          <a:lstStyle/>
+          <a:p>
+            <a:r>
+              <a:rPr lang="en-US" dirty="0"/>
+              <a:t>Data structure : Trees</a:t>
+            </a:r>
+          </a:p>
+        </p:txBody>
+      </p:sp>
+      <p:sp>
+        <p:nvSpPr>
+          <p:cNvPr id="3" name="Content Placeholder 2">
+            <a:extLst>
+              <a:ext uri="{FF2B5EF4-FFF2-40B4-BE49-F238E27FC236}">
+                <a16:creationId xmlns:a16="http://schemas.microsoft.com/office/drawing/2014/main" id="{FC686A02-254A-2D1D-68EE-6C2694ACFE5F}"/>
+              </a:ext>
+            </a:extLst>
+          </p:cNvPr>
+          <p:cNvSpPr>
+            <a:spLocks noGrp="1"/>
+          </p:cNvSpPr>
+          <p:nvPr>
+            <p:ph idx="1"/>
+          </p:nvPr>
+        </p:nvSpPr>
+        <p:spPr/>
+        <p:txBody>
+          <a:bodyPr/>
+          <a:lstStyle/>
+          <a:p>
+            <a:r>
+              <a:rPr lang="en-US" dirty="0"/>
+              <a:t>Not the green/woody kind </a:t>
+            </a:r>
+          </a:p>
+          <a:p>
+            <a:pPr lvl="1"/>
+            <a:r>
+              <a:rPr lang="en-US" dirty="0"/>
+              <a:t>But they actually look like upside down trees </a:t>
+            </a:r>
+          </a:p>
+          <a:p>
+            <a:r>
+              <a:rPr lang="en-US" dirty="0"/>
+              <a:t>Trees are data structures that represents data in parent/child relationships</a:t>
+            </a:r>
+          </a:p>
+          <a:p>
+            <a:pPr lvl="1"/>
+            <a:r>
+              <a:rPr lang="en-US" dirty="0"/>
+              <a:t>Start with a </a:t>
+            </a:r>
+            <a:r>
+              <a:rPr lang="en-US" b="1" dirty="0"/>
+              <a:t>root</a:t>
+            </a:r>
+            <a:r>
+              <a:rPr lang="en-US" dirty="0"/>
+              <a:t> node </a:t>
+            </a:r>
+          </a:p>
+          <a:p>
+            <a:pPr lvl="1"/>
+            <a:r>
+              <a:rPr lang="en-US" dirty="0"/>
+              <a:t>(May) point to other nodes </a:t>
+            </a:r>
+          </a:p>
+          <a:p>
+            <a:pPr lvl="2"/>
+            <a:r>
+              <a:rPr lang="en-US" dirty="0"/>
+              <a:t>This is </a:t>
+            </a:r>
+            <a:r>
+              <a:rPr lang="en-US" b="1" dirty="0"/>
+              <a:t>parent</a:t>
+            </a:r>
+            <a:r>
+              <a:rPr lang="en-US" dirty="0"/>
+              <a:t> pointing to </a:t>
+            </a:r>
+            <a:r>
+              <a:rPr lang="en-US" b="1" dirty="0"/>
+              <a:t>child</a:t>
+            </a:r>
+            <a:r>
+              <a:rPr lang="en-US" dirty="0"/>
+              <a:t> ( generally) or vice versa</a:t>
+            </a:r>
+          </a:p>
+          <a:p>
+            <a:pPr lvl="1"/>
+            <a:r>
+              <a:rPr lang="en-US" dirty="0"/>
+              <a:t>The nodes with no children are </a:t>
+            </a:r>
+            <a:r>
+              <a:rPr lang="en-US" b="1" dirty="0"/>
+              <a:t>leaf</a:t>
+            </a:r>
+            <a:r>
+              <a:rPr lang="en-US" dirty="0"/>
+              <a:t> nodes</a:t>
+            </a:r>
+          </a:p>
+        </p:txBody>
+      </p:sp>
+    </p:spTree>
+    <p:extLst>
+      <p:ext uri="{BB962C8B-B14F-4D97-AF65-F5344CB8AC3E}">
+        <p14:creationId xmlns:p14="http://schemas.microsoft.com/office/powerpoint/2010/main" val="3286981973"/>
+      </p:ext>
+    </p:extLst>
+  </p:cSld>
+  <p:clrMapOvr>
+    <a:masterClrMapping/>
+  </p:clrMapOvr>
+</p:sld>
+</file>
+
+<file path=ppt/slides/slide102.xml><?xml version="1.0" encoding="utf-8"?>
+<p:sld xmlns:a="http://schemas.openxmlformats.org/drawingml/2006/main" xmlns:r="http://schemas.openxmlformats.org/officeDocument/2006/relationships" xmlns:p="http://schemas.openxmlformats.org/presentationml/2006/main">
+  <p:cSld>
+    <p:spTree>
+      <p:nvGrpSpPr>
+        <p:cNvPr id="1" name=""/>
+        <p:cNvGrpSpPr/>
+        <p:nvPr/>
+      </p:nvGrpSpPr>
+      <p:grpSpPr>
+        <a:xfrm>
+          <a:off x="0" y="0"/>
+          <a:ext cx="0" cy="0"/>
+          <a:chOff x="0" y="0"/>
+          <a:chExt cx="0" cy="0"/>
+        </a:xfrm>
+      </p:grpSpPr>
+      <p:sp>
+        <p:nvSpPr>
+          <p:cNvPr id="2" name="Title 1">
+            <a:extLst>
+              <a:ext uri="{FF2B5EF4-FFF2-40B4-BE49-F238E27FC236}">
+                <a16:creationId xmlns:a16="http://schemas.microsoft.com/office/drawing/2014/main" id="{246D1CE6-1DED-8A20-394D-424C73A11C3C}"/>
+              </a:ext>
+            </a:extLst>
+          </p:cNvPr>
+          <p:cNvSpPr>
+            <a:spLocks noGrp="1"/>
+          </p:cNvSpPr>
+          <p:nvPr>
+            <p:ph type="title"/>
+          </p:nvPr>
+        </p:nvSpPr>
+        <p:spPr/>
+        <p:txBody>
+          <a:bodyPr/>
+          <a:lstStyle/>
+          <a:p>
+            <a:r>
+              <a:rPr lang="en-US" dirty="0"/>
+              <a:t>Tree: Visuals </a:t>
+            </a:r>
+          </a:p>
+        </p:txBody>
+      </p:sp>
+      <p:sp>
+        <p:nvSpPr>
+          <p:cNvPr id="7" name="Content Placeholder 6">
+            <a:extLst>
+              <a:ext uri="{FF2B5EF4-FFF2-40B4-BE49-F238E27FC236}">
+                <a16:creationId xmlns:a16="http://schemas.microsoft.com/office/drawing/2014/main" id="{B0807D5B-BD36-72DB-EF4C-02875547ABD2}"/>
+              </a:ext>
+            </a:extLst>
+          </p:cNvPr>
+          <p:cNvSpPr>
+            <a:spLocks noGrp="1"/>
+          </p:cNvSpPr>
+          <p:nvPr>
+            <p:ph idx="1"/>
+          </p:nvPr>
+        </p:nvSpPr>
+        <p:spPr/>
+        <p:txBody>
+          <a:bodyPr/>
+          <a:lstStyle/>
+          <a:p>
+            <a:pPr marL="0" indent="0">
+              <a:buNone/>
+            </a:pPr>
+            <a:endParaRPr lang="en-US" dirty="0"/>
+          </a:p>
+        </p:txBody>
+      </p:sp>
+      <p:pic>
+        <p:nvPicPr>
+          <p:cNvPr id="9" name="Picture 8">
+            <a:extLst>
+              <a:ext uri="{FF2B5EF4-FFF2-40B4-BE49-F238E27FC236}">
+                <a16:creationId xmlns:a16="http://schemas.microsoft.com/office/drawing/2014/main" id="{5429D248-619E-F8D5-1EB5-7C1366A17BA5}"/>
+              </a:ext>
+            </a:extLst>
+          </p:cNvPr>
+          <p:cNvPicPr>
+            <a:picLocks noChangeAspect="1"/>
+          </p:cNvPicPr>
+          <p:nvPr/>
+        </p:nvPicPr>
+        <p:blipFill>
+          <a:blip r:embed="rId2"/>
+          <a:stretch>
+            <a:fillRect/>
+          </a:stretch>
+        </p:blipFill>
+        <p:spPr>
+          <a:xfrm>
+            <a:off x="1085887" y="2540719"/>
+            <a:ext cx="8820603" cy="2921150"/>
+          </a:xfrm>
+          <a:prstGeom prst="rect">
+            <a:avLst/>
+          </a:prstGeom>
+        </p:spPr>
+      </p:pic>
+    </p:spTree>
+    <p:extLst>
+      <p:ext uri="{BB962C8B-B14F-4D97-AF65-F5344CB8AC3E}">
+        <p14:creationId xmlns:p14="http://schemas.microsoft.com/office/powerpoint/2010/main" val="3843103471"/>
+      </p:ext>
+    </p:extLst>
+  </p:cSld>
+  <p:clrMapOvr>
+    <a:masterClrMapping/>
+  </p:clrMapOvr>
+</p:sld>
+</file>
+
+<file path=ppt/slides/slide103.xml><?xml version="1.0" encoding="utf-8"?>
+<p:sld xmlns:a="http://schemas.openxmlformats.org/drawingml/2006/main" xmlns:r="http://schemas.openxmlformats.org/officeDocument/2006/relationships" xmlns:p="http://schemas.openxmlformats.org/presentationml/2006/main">
+  <p:cSld>
+    <p:spTree>
+      <p:nvGrpSpPr>
+        <p:cNvPr id="1" name=""/>
+        <p:cNvGrpSpPr/>
+        <p:nvPr/>
+      </p:nvGrpSpPr>
+      <p:grpSpPr>
+        <a:xfrm>
+          <a:off x="0" y="0"/>
+          <a:ext cx="0" cy="0"/>
+          <a:chOff x="0" y="0"/>
+          <a:chExt cx="0" cy="0"/>
+        </a:xfrm>
+      </p:grpSpPr>
+      <p:sp>
+        <p:nvSpPr>
+          <p:cNvPr id="2" name="Title 1">
+            <a:extLst>
+              <a:ext uri="{FF2B5EF4-FFF2-40B4-BE49-F238E27FC236}">
+                <a16:creationId xmlns:a16="http://schemas.microsoft.com/office/drawing/2014/main" id="{AB48C887-3C8C-169D-F409-469D624AD7E4}"/>
+              </a:ext>
+            </a:extLst>
+          </p:cNvPr>
+          <p:cNvSpPr>
+            <a:spLocks noGrp="1"/>
+          </p:cNvSpPr>
+          <p:nvPr>
+            <p:ph type="title"/>
+          </p:nvPr>
+        </p:nvSpPr>
+        <p:spPr/>
+        <p:txBody>
+          <a:bodyPr/>
+          <a:lstStyle/>
+          <a:p>
+            <a:r>
+              <a:rPr lang="en-US" dirty="0"/>
+              <a:t>Trees : types</a:t>
+            </a:r>
+          </a:p>
+        </p:txBody>
+      </p:sp>
+      <p:sp>
+        <p:nvSpPr>
+          <p:cNvPr id="3" name="Content Placeholder 2">
+            <a:extLst>
+              <a:ext uri="{FF2B5EF4-FFF2-40B4-BE49-F238E27FC236}">
+                <a16:creationId xmlns:a16="http://schemas.microsoft.com/office/drawing/2014/main" id="{A0EB5F16-DAD5-744D-2F75-11549F6BE9B6}"/>
+              </a:ext>
+            </a:extLst>
+          </p:cNvPr>
+          <p:cNvSpPr>
+            <a:spLocks noGrp="1"/>
+          </p:cNvSpPr>
+          <p:nvPr>
+            <p:ph idx="1"/>
+          </p:nvPr>
+        </p:nvSpPr>
+        <p:spPr/>
+        <p:txBody>
+          <a:bodyPr/>
+          <a:lstStyle/>
+          <a:p>
+            <a:r>
+              <a:rPr lang="en-US" dirty="0"/>
+              <a:t>Based on child count</a:t>
+            </a:r>
+          </a:p>
+          <a:p>
+            <a:pPr lvl="1"/>
+            <a:r>
+              <a:rPr lang="en-US" dirty="0"/>
+              <a:t>Binary trees (most popular)</a:t>
+            </a:r>
+          </a:p>
+          <a:p>
+            <a:pPr lvl="2"/>
+            <a:r>
+              <a:rPr lang="en-US" dirty="0"/>
+              <a:t>Each node max 2 children (</a:t>
+            </a:r>
+            <a:r>
+              <a:rPr lang="en-US" dirty="0" err="1"/>
+              <a:t>i.e</a:t>
+            </a:r>
+            <a:r>
+              <a:rPr lang="en-US" dirty="0"/>
+              <a:t> 0,1 or 2 )</a:t>
+            </a:r>
+          </a:p>
+          <a:p>
+            <a:pPr lvl="1"/>
+            <a:r>
+              <a:rPr lang="en-US" dirty="0"/>
+              <a:t>Ternary trees</a:t>
+            </a:r>
+          </a:p>
+          <a:p>
+            <a:pPr lvl="2"/>
+            <a:r>
+              <a:rPr lang="en-US" dirty="0"/>
+              <a:t>Max 3 children</a:t>
+            </a:r>
+          </a:p>
+          <a:p>
+            <a:pPr lvl="1"/>
+            <a:r>
+              <a:rPr lang="en-US" dirty="0"/>
+              <a:t>N-</a:t>
+            </a:r>
+            <a:r>
+              <a:rPr lang="en-US" dirty="0" err="1"/>
+              <a:t>ary</a:t>
+            </a:r>
+            <a:r>
+              <a:rPr lang="en-US" dirty="0"/>
+              <a:t> </a:t>
+            </a:r>
+          </a:p>
+          <a:p>
+            <a:pPr lvl="2"/>
+            <a:r>
+              <a:rPr lang="en-US" dirty="0"/>
+              <a:t>Max N children</a:t>
+            </a:r>
+          </a:p>
+          <a:p>
+            <a:pPr marL="0" indent="0">
+              <a:buNone/>
+            </a:pPr>
+            <a:endParaRPr lang="en-US" dirty="0"/>
+          </a:p>
+          <a:p>
+            <a:pPr lvl="1"/>
+            <a:endParaRPr lang="en-US" dirty="0"/>
+          </a:p>
+        </p:txBody>
+      </p:sp>
+    </p:spTree>
+    <p:extLst>
+      <p:ext uri="{BB962C8B-B14F-4D97-AF65-F5344CB8AC3E}">
+        <p14:creationId xmlns:p14="http://schemas.microsoft.com/office/powerpoint/2010/main" val="566626073"/>
+      </p:ext>
+    </p:extLst>
+  </p:cSld>
+  <p:clrMapOvr>
+    <a:masterClrMapping/>
+  </p:clrMapOvr>
+</p:sld>
+</file>
+
+<file path=ppt/slides/slide104.xml><?xml version="1.0" encoding="utf-8"?>
+<p:sld xmlns:a="http://schemas.openxmlformats.org/drawingml/2006/main" xmlns:r="http://schemas.openxmlformats.org/officeDocument/2006/relationships" xmlns:p="http://schemas.openxmlformats.org/presentationml/2006/main">
+  <p:cSld>
+    <p:spTree>
+      <p:nvGrpSpPr>
+        <p:cNvPr id="1" name=""/>
+        <p:cNvGrpSpPr/>
+        <p:nvPr/>
+      </p:nvGrpSpPr>
+      <p:grpSpPr>
+        <a:xfrm>
+          <a:off x="0" y="0"/>
+          <a:ext cx="0" cy="0"/>
+          <a:chOff x="0" y="0"/>
+          <a:chExt cx="0" cy="0"/>
+        </a:xfrm>
+      </p:grpSpPr>
+      <p:sp>
+        <p:nvSpPr>
+          <p:cNvPr id="2" name="Title 1">
+            <a:extLst>
+              <a:ext uri="{FF2B5EF4-FFF2-40B4-BE49-F238E27FC236}">
+                <a16:creationId xmlns:a16="http://schemas.microsoft.com/office/drawing/2014/main" id="{9CC42CB8-C999-0471-92B1-89909ABF727E}"/>
+              </a:ext>
+            </a:extLst>
+          </p:cNvPr>
+          <p:cNvSpPr>
+            <a:spLocks noGrp="1"/>
+          </p:cNvSpPr>
+          <p:nvPr>
+            <p:ph type="title"/>
+          </p:nvPr>
+        </p:nvSpPr>
+        <p:spPr/>
+        <p:txBody>
+          <a:bodyPr/>
+          <a:lstStyle/>
+          <a:p>
+            <a:r>
+              <a:rPr lang="en-US" dirty="0"/>
+              <a:t>Trees: Types</a:t>
+            </a:r>
+          </a:p>
+        </p:txBody>
+      </p:sp>
+      <p:sp>
+        <p:nvSpPr>
+          <p:cNvPr id="3" name="Content Placeholder 2">
+            <a:extLst>
+              <a:ext uri="{FF2B5EF4-FFF2-40B4-BE49-F238E27FC236}">
+                <a16:creationId xmlns:a16="http://schemas.microsoft.com/office/drawing/2014/main" id="{A42502A5-1746-0B16-F272-087655FC8B8D}"/>
+              </a:ext>
+            </a:extLst>
+          </p:cNvPr>
+          <p:cNvSpPr>
+            <a:spLocks noGrp="1"/>
+          </p:cNvSpPr>
+          <p:nvPr>
+            <p:ph idx="1"/>
+          </p:nvPr>
+        </p:nvSpPr>
+        <p:spPr/>
+        <p:txBody>
+          <a:bodyPr>
+            <a:normAutofit lnSpcReduction="10000"/>
+          </a:bodyPr>
+          <a:lstStyle/>
+          <a:p>
+            <a:r>
+              <a:rPr lang="en-US" dirty="0"/>
+              <a:t>Based on data organization</a:t>
+            </a:r>
+          </a:p>
+          <a:p>
+            <a:pPr lvl="1"/>
+            <a:r>
+              <a:rPr lang="en-US" dirty="0"/>
+              <a:t>Binary Tree</a:t>
+            </a:r>
+          </a:p>
+          <a:p>
+            <a:pPr lvl="2"/>
+            <a:r>
+              <a:rPr lang="en-US" dirty="0"/>
+              <a:t>No organization requirement</a:t>
+            </a:r>
+          </a:p>
+          <a:p>
+            <a:pPr lvl="1"/>
+            <a:r>
+              <a:rPr lang="en-US" dirty="0"/>
+              <a:t>Binary Search trees , </a:t>
+            </a:r>
+          </a:p>
+          <a:p>
+            <a:pPr lvl="2"/>
+            <a:r>
+              <a:rPr lang="en-US" dirty="0"/>
+              <a:t>Left child is smaller ( or equal to) the root</a:t>
+            </a:r>
+          </a:p>
+          <a:p>
+            <a:pPr lvl="2"/>
+            <a:r>
+              <a:rPr lang="en-US" dirty="0"/>
+              <a:t>Right child is bigger than the root</a:t>
+            </a:r>
+          </a:p>
+          <a:p>
+            <a:pPr lvl="1"/>
+            <a:r>
+              <a:rPr lang="en-US" b="1" dirty="0"/>
+              <a:t>AVL tree </a:t>
+            </a:r>
+            <a:r>
+              <a:rPr lang="en-US" dirty="0"/>
+              <a:t>(Adelson-</a:t>
+            </a:r>
+            <a:r>
+              <a:rPr lang="en-US" dirty="0" err="1"/>
+              <a:t>Velsky</a:t>
+            </a:r>
+            <a:r>
+              <a:rPr lang="en-US" dirty="0"/>
+              <a:t> and Landis)</a:t>
+            </a:r>
+          </a:p>
+          <a:p>
+            <a:pPr lvl="2"/>
+            <a:r>
+              <a:rPr lang="en-US" dirty="0"/>
+              <a:t>Binary search tree with limits on height </a:t>
+            </a:r>
+          </a:p>
+          <a:p>
+            <a:pPr lvl="2"/>
+            <a:r>
+              <a:rPr lang="en-US" dirty="0"/>
+              <a:t>No one leaf can be more than a 1 distance </a:t>
+            </a:r>
+            <a:r>
+              <a:rPr lang="en-US" dirty="0" err="1"/>
+              <a:t>logner</a:t>
+            </a:r>
+            <a:r>
+              <a:rPr lang="en-US" dirty="0"/>
+              <a:t> than any other leaf node</a:t>
+            </a:r>
+          </a:p>
+          <a:p>
+            <a:pPr lvl="1"/>
+            <a:r>
+              <a:rPr lang="en-US" dirty="0"/>
+              <a:t>Red black tree</a:t>
+            </a:r>
+          </a:p>
+          <a:p>
+            <a:pPr lvl="2"/>
+            <a:r>
+              <a:rPr lang="en-US" dirty="0"/>
+              <a:t>A representation of AVL tree that color codes the nodes ( red/black) to organize info.</a:t>
+            </a:r>
+          </a:p>
+          <a:p>
+            <a:pPr lvl="1"/>
+            <a:r>
+              <a:rPr lang="en-US" dirty="0"/>
+              <a:t>…</a:t>
+            </a:r>
+          </a:p>
+          <a:p>
+            <a:pPr lvl="1"/>
+            <a:endParaRPr lang="en-US" dirty="0"/>
+          </a:p>
+        </p:txBody>
+      </p:sp>
+    </p:spTree>
+    <p:extLst>
+      <p:ext uri="{BB962C8B-B14F-4D97-AF65-F5344CB8AC3E}">
+        <p14:creationId xmlns:p14="http://schemas.microsoft.com/office/powerpoint/2010/main" val="181062767"/>
+      </p:ext>
+    </p:extLst>
+  </p:cSld>
+  <p:clrMapOvr>
+    <a:masterClrMapping/>
+  </p:clrMapOvr>
+</p:sld>
+</file>
+
+<file path=ppt/slides/slide105.xml><?xml version="1.0" encoding="utf-8"?>
+<p:sld xmlns:a="http://schemas.openxmlformats.org/drawingml/2006/main" xmlns:r="http://schemas.openxmlformats.org/officeDocument/2006/relationships" xmlns:p="http://schemas.openxmlformats.org/presentationml/2006/main">
+  <p:cSld>
+    <p:spTree>
+      <p:nvGrpSpPr>
+        <p:cNvPr id="1" name=""/>
+        <p:cNvGrpSpPr/>
+        <p:nvPr/>
+      </p:nvGrpSpPr>
+      <p:grpSpPr>
+        <a:xfrm>
+          <a:off x="0" y="0"/>
+          <a:ext cx="0" cy="0"/>
+          <a:chOff x="0" y="0"/>
+          <a:chExt cx="0" cy="0"/>
+        </a:xfrm>
+      </p:grpSpPr>
+      <p:sp>
+        <p:nvSpPr>
+          <p:cNvPr id="2" name="Title 1">
+            <a:extLst>
+              <a:ext uri="{FF2B5EF4-FFF2-40B4-BE49-F238E27FC236}">
+                <a16:creationId xmlns:a16="http://schemas.microsoft.com/office/drawing/2014/main" id="{E42DF003-F9A9-1475-DB83-84CB2D601624}"/>
+              </a:ext>
+            </a:extLst>
+          </p:cNvPr>
+          <p:cNvSpPr>
+            <a:spLocks noGrp="1"/>
+          </p:cNvSpPr>
+          <p:nvPr>
+            <p:ph type="title"/>
+          </p:nvPr>
+        </p:nvSpPr>
+        <p:spPr/>
+        <p:txBody>
+          <a:bodyPr/>
+          <a:lstStyle/>
+          <a:p>
+            <a:r>
+              <a:rPr lang="en-US" dirty="0"/>
+              <a:t>Binary Tree : Key terms</a:t>
+            </a:r>
+          </a:p>
+        </p:txBody>
+      </p:sp>
+      <p:sp>
+        <p:nvSpPr>
+          <p:cNvPr id="3" name="Content Placeholder 2">
+            <a:extLst>
+              <a:ext uri="{FF2B5EF4-FFF2-40B4-BE49-F238E27FC236}">
+                <a16:creationId xmlns:a16="http://schemas.microsoft.com/office/drawing/2014/main" id="{B36C6801-7726-EB38-A181-96B8F89CCB8F}"/>
+              </a:ext>
+            </a:extLst>
+          </p:cNvPr>
+          <p:cNvSpPr>
+            <a:spLocks noGrp="1"/>
+          </p:cNvSpPr>
+          <p:nvPr>
+            <p:ph idx="1"/>
+          </p:nvPr>
+        </p:nvSpPr>
+        <p:spPr/>
+        <p:txBody>
+          <a:bodyPr/>
+          <a:lstStyle/>
+          <a:p>
+            <a:r>
+              <a:rPr lang="en-US" dirty="0"/>
+              <a:t>Root : there is only 1 root( 0 for empty tree)</a:t>
+            </a:r>
+          </a:p>
+          <a:p>
+            <a:r>
+              <a:rPr lang="en-US" dirty="0"/>
+              <a:t>Parent </a:t>
+            </a:r>
+          </a:p>
+          <a:p>
+            <a:pPr lvl="1"/>
+            <a:r>
+              <a:rPr lang="en-US" dirty="0"/>
+              <a:t>All other nodes have one parent (except the root node)</a:t>
+            </a:r>
+          </a:p>
+          <a:p>
+            <a:r>
+              <a:rPr lang="en-US" dirty="0"/>
+              <a:t>Children </a:t>
+            </a:r>
+          </a:p>
+          <a:p>
+            <a:pPr lvl="1"/>
+            <a:r>
+              <a:rPr lang="en-US" dirty="0"/>
+              <a:t>In Binary Tree : there can be at most 2 children</a:t>
+            </a:r>
+          </a:p>
+          <a:p>
+            <a:pPr lvl="1"/>
+            <a:r>
+              <a:rPr lang="en-US" dirty="0"/>
+              <a:t>The 2 children are also referred as siblings</a:t>
+            </a:r>
+          </a:p>
+          <a:p>
+            <a:r>
+              <a:rPr lang="en-US" dirty="0"/>
+              <a:t>Leaf nodes : nodes with no children are leaf nodes</a:t>
+            </a:r>
+          </a:p>
+          <a:p>
+            <a:r>
+              <a:rPr lang="en-US" dirty="0"/>
+              <a:t>Height : the distance from the root to furthest leaf node is height of the tree</a:t>
+            </a:r>
+          </a:p>
+          <a:p>
+            <a:endParaRPr lang="en-US" dirty="0"/>
+          </a:p>
+          <a:p>
+            <a:endParaRPr lang="en-US" dirty="0"/>
+          </a:p>
+        </p:txBody>
+      </p:sp>
+    </p:spTree>
+    <p:extLst>
+      <p:ext uri="{BB962C8B-B14F-4D97-AF65-F5344CB8AC3E}">
+        <p14:creationId xmlns:p14="http://schemas.microsoft.com/office/powerpoint/2010/main" val="3260613917"/>
+      </p:ext>
+    </p:extLst>
+  </p:cSld>
+  <p:clrMapOvr>
+    <a:masterClrMapping/>
+  </p:clrMapOvr>
+</p:sld>
+</file>
+
+<file path=ppt/slides/slide106.xml><?xml version="1.0" encoding="utf-8"?>
+<p:sld xmlns:a="http://schemas.openxmlformats.org/drawingml/2006/main" xmlns:r="http://schemas.openxmlformats.org/officeDocument/2006/relationships" xmlns:p="http://schemas.openxmlformats.org/presentationml/2006/main">
+  <p:cSld>
+    <p:spTree>
+      <p:nvGrpSpPr>
+        <p:cNvPr id="1" name=""/>
+        <p:cNvGrpSpPr/>
+        <p:nvPr/>
+      </p:nvGrpSpPr>
+      <p:grpSpPr>
+        <a:xfrm>
+          <a:off x="0" y="0"/>
+          <a:ext cx="0" cy="0"/>
+          <a:chOff x="0" y="0"/>
+          <a:chExt cx="0" cy="0"/>
+        </a:xfrm>
+      </p:grpSpPr>
+      <p:sp>
+        <p:nvSpPr>
+          <p:cNvPr id="2" name="Title 1">
+            <a:extLst>
+              <a:ext uri="{FF2B5EF4-FFF2-40B4-BE49-F238E27FC236}">
+                <a16:creationId xmlns:a16="http://schemas.microsoft.com/office/drawing/2014/main" id="{B9696E64-3C52-4650-4748-F1D6527BB642}"/>
+              </a:ext>
+            </a:extLst>
+          </p:cNvPr>
+          <p:cNvSpPr>
+            <a:spLocks noGrp="1"/>
+          </p:cNvSpPr>
+          <p:nvPr>
+            <p:ph type="title"/>
+          </p:nvPr>
+        </p:nvSpPr>
+        <p:spPr/>
+        <p:txBody>
+          <a:bodyPr/>
+          <a:lstStyle/>
+          <a:p>
+            <a:r>
+              <a:rPr lang="en-US" dirty="0"/>
+              <a:t>Binary Search tree : Examples</a:t>
+            </a:r>
+          </a:p>
+        </p:txBody>
+      </p:sp>
+      <p:sp>
+        <p:nvSpPr>
+          <p:cNvPr id="3" name="Content Placeholder 2">
+            <a:extLst>
+              <a:ext uri="{FF2B5EF4-FFF2-40B4-BE49-F238E27FC236}">
+                <a16:creationId xmlns:a16="http://schemas.microsoft.com/office/drawing/2014/main" id="{1DFF3575-C8F7-080A-D3E0-6D7604D245E8}"/>
+              </a:ext>
+            </a:extLst>
+          </p:cNvPr>
+          <p:cNvSpPr>
+            <a:spLocks noGrp="1"/>
+          </p:cNvSpPr>
+          <p:nvPr>
+            <p:ph idx="1"/>
+          </p:nvPr>
+        </p:nvSpPr>
+        <p:spPr/>
+        <p:txBody>
+          <a:bodyPr/>
+          <a:lstStyle/>
+          <a:p>
+            <a:r>
+              <a:rPr lang="en-US" dirty="0"/>
+              <a:t>Left child must be smaller than or equal to the  parent</a:t>
+            </a:r>
+          </a:p>
+          <a:p>
+            <a:r>
+              <a:rPr lang="en-US" dirty="0"/>
+              <a:t>Right child must be larger than the parent</a:t>
+            </a:r>
+          </a:p>
+          <a:p>
+            <a:endParaRPr lang="en-US" dirty="0"/>
+          </a:p>
+        </p:txBody>
+      </p:sp>
+      <p:pic>
+        <p:nvPicPr>
+          <p:cNvPr id="7" name="Picture 6">
+            <a:extLst>
+              <a:ext uri="{FF2B5EF4-FFF2-40B4-BE49-F238E27FC236}">
+                <a16:creationId xmlns:a16="http://schemas.microsoft.com/office/drawing/2014/main" id="{BBC87756-9D75-31B8-6253-ECE1FBD69E09}"/>
+              </a:ext>
+            </a:extLst>
+          </p:cNvPr>
+          <p:cNvPicPr>
+            <a:picLocks noChangeAspect="1"/>
+          </p:cNvPicPr>
+          <p:nvPr/>
+        </p:nvPicPr>
+        <p:blipFill>
+          <a:blip r:embed="rId2"/>
+          <a:stretch>
+            <a:fillRect/>
+          </a:stretch>
+        </p:blipFill>
+        <p:spPr>
+          <a:xfrm>
+            <a:off x="2730617" y="2768028"/>
+            <a:ext cx="5164154" cy="3040533"/>
+          </a:xfrm>
+          <a:prstGeom prst="rect">
+            <a:avLst/>
+          </a:prstGeom>
+        </p:spPr>
+      </p:pic>
+    </p:spTree>
+    <p:extLst>
+      <p:ext uri="{BB962C8B-B14F-4D97-AF65-F5344CB8AC3E}">
+        <p14:creationId xmlns:p14="http://schemas.microsoft.com/office/powerpoint/2010/main" val="3742210751"/>
+      </p:ext>
+    </p:extLst>
+  </p:cSld>
+  <p:clrMapOvr>
+    <a:masterClrMapping/>
+  </p:clrMapOvr>
+</p:sld>
+</file>
+
+<file path=ppt/slides/slide107.xml><?xml version="1.0" encoding="utf-8"?>
+<p:sld xmlns:a="http://schemas.openxmlformats.org/drawingml/2006/main" xmlns:r="http://schemas.openxmlformats.org/officeDocument/2006/relationships" xmlns:p="http://schemas.openxmlformats.org/presentationml/2006/main">
+  <p:cSld>
+    <p:spTree>
+      <p:nvGrpSpPr>
+        <p:cNvPr id="1" name=""/>
+        <p:cNvGrpSpPr/>
+        <p:nvPr/>
+      </p:nvGrpSpPr>
+      <p:grpSpPr>
+        <a:xfrm>
+          <a:off x="0" y="0"/>
+          <a:ext cx="0" cy="0"/>
+          <a:chOff x="0" y="0"/>
+          <a:chExt cx="0" cy="0"/>
+        </a:xfrm>
+      </p:grpSpPr>
+      <p:sp>
+        <p:nvSpPr>
+          <p:cNvPr id="2" name="Title 1">
+            <a:extLst>
+              <a:ext uri="{FF2B5EF4-FFF2-40B4-BE49-F238E27FC236}">
+                <a16:creationId xmlns:a16="http://schemas.microsoft.com/office/drawing/2014/main" id="{F3E1B119-127E-62DE-A543-B9405E529DC9}"/>
+              </a:ext>
+            </a:extLst>
+          </p:cNvPr>
+          <p:cNvSpPr>
+            <a:spLocks noGrp="1"/>
+          </p:cNvSpPr>
+          <p:nvPr>
+            <p:ph type="title"/>
+          </p:nvPr>
+        </p:nvSpPr>
+        <p:spPr/>
+        <p:txBody>
+          <a:bodyPr/>
+          <a:lstStyle/>
+          <a:p>
+            <a:r>
+              <a:rPr lang="en-US" dirty="0"/>
+              <a:t>Creation of a BST</a:t>
+            </a:r>
+          </a:p>
+        </p:txBody>
+      </p:sp>
+      <p:sp>
+        <p:nvSpPr>
+          <p:cNvPr id="3" name="Content Placeholder 2">
+            <a:extLst>
+              <a:ext uri="{FF2B5EF4-FFF2-40B4-BE49-F238E27FC236}">
+                <a16:creationId xmlns:a16="http://schemas.microsoft.com/office/drawing/2014/main" id="{A7AF40EE-91EE-F334-EACC-374919DC785C}"/>
+              </a:ext>
+            </a:extLst>
+          </p:cNvPr>
+          <p:cNvSpPr>
+            <a:spLocks noGrp="1"/>
+          </p:cNvSpPr>
+          <p:nvPr>
+            <p:ph idx="1"/>
+          </p:nvPr>
+        </p:nvSpPr>
+        <p:spPr/>
+        <p:txBody>
+          <a:bodyPr/>
+          <a:lstStyle/>
+          <a:p>
+            <a:r>
+              <a:rPr lang="en-US" b="1" dirty="0"/>
+              <a:t>52, 18, 74, 5, 33, 61, 89, 25, 42, 67</a:t>
+            </a:r>
+          </a:p>
+          <a:p>
+            <a:pPr marL="0" indent="0">
+              <a:buNone/>
+            </a:pPr>
+            <a:r>
+              <a:rPr lang="en-US" dirty="0"/>
+              <a:t>  </a:t>
+            </a:r>
+          </a:p>
+        </p:txBody>
+      </p:sp>
+      <p:pic>
+        <p:nvPicPr>
+          <p:cNvPr id="6" name="Picture 5">
+            <a:extLst>
+              <a:ext uri="{FF2B5EF4-FFF2-40B4-BE49-F238E27FC236}">
+                <a16:creationId xmlns:a16="http://schemas.microsoft.com/office/drawing/2014/main" id="{6B579547-A6B0-EB11-4B61-2AEB9D57A951}"/>
+              </a:ext>
+            </a:extLst>
+          </p:cNvPr>
+          <p:cNvPicPr>
+            <a:picLocks noChangeAspect="1"/>
+          </p:cNvPicPr>
+          <p:nvPr/>
+        </p:nvPicPr>
+        <p:blipFill>
+          <a:blip r:embed="rId2">
+            <a:extLst>
+              <a:ext uri="{28A0092B-C50C-407E-A947-70E740481C1C}">
+                <a14:useLocalDpi xmlns:a14="http://schemas.microsoft.com/office/drawing/2010/main" val="0"/>
+              </a:ext>
+            </a:extLst>
+          </a:blip>
+          <a:stretch>
+            <a:fillRect/>
+          </a:stretch>
+        </p:blipFill>
+        <p:spPr>
+          <a:xfrm>
+            <a:off x="1208015" y="2348917"/>
+            <a:ext cx="6417578" cy="3589905"/>
+          </a:xfrm>
+          <a:prstGeom prst="rect">
+            <a:avLst/>
+          </a:prstGeom>
+        </p:spPr>
+      </p:pic>
+    </p:spTree>
+    <p:extLst>
+      <p:ext uri="{BB962C8B-B14F-4D97-AF65-F5344CB8AC3E}">
+        <p14:creationId xmlns:p14="http://schemas.microsoft.com/office/powerpoint/2010/main" val="3294556675"/>
+      </p:ext>
+    </p:extLst>
+  </p:cSld>
+  <p:clrMapOvr>
+    <a:masterClrMapping/>
+  </p:clrMapOvr>
+</p:sld>
+</file>
+
+<file path=ppt/slides/slide108.xml><?xml version="1.0" encoding="utf-8"?>
+<p:sld xmlns:a="http://schemas.openxmlformats.org/drawingml/2006/main" xmlns:r="http://schemas.openxmlformats.org/officeDocument/2006/relationships" xmlns:p="http://schemas.openxmlformats.org/presentationml/2006/main">
+  <p:cSld>
+    <p:spTree>
+      <p:nvGrpSpPr>
+        <p:cNvPr id="1" name=""/>
+        <p:cNvGrpSpPr/>
+        <p:nvPr/>
+      </p:nvGrpSpPr>
+      <p:grpSpPr>
+        <a:xfrm>
+          <a:off x="0" y="0"/>
+          <a:ext cx="0" cy="0"/>
+          <a:chOff x="0" y="0"/>
+          <a:chExt cx="0" cy="0"/>
+        </a:xfrm>
+      </p:grpSpPr>
+      <p:sp>
+        <p:nvSpPr>
+          <p:cNvPr id="2" name="Title 1">
+            <a:extLst>
+              <a:ext uri="{FF2B5EF4-FFF2-40B4-BE49-F238E27FC236}">
+                <a16:creationId xmlns:a16="http://schemas.microsoft.com/office/drawing/2014/main" id="{5679B443-40AD-BC01-446B-D41711F9C136}"/>
+              </a:ext>
+            </a:extLst>
+          </p:cNvPr>
+          <p:cNvSpPr>
+            <a:spLocks noGrp="1"/>
+          </p:cNvSpPr>
+          <p:nvPr>
+            <p:ph type="title"/>
+          </p:nvPr>
+        </p:nvSpPr>
+        <p:spPr/>
+        <p:txBody>
+          <a:bodyPr/>
+          <a:lstStyle/>
+          <a:p>
+            <a:r>
+              <a:rPr lang="en-US" dirty="0"/>
+              <a:t>Binary Search Tree : exercise</a:t>
+            </a:r>
+          </a:p>
+        </p:txBody>
+      </p:sp>
+      <p:sp>
+        <p:nvSpPr>
+          <p:cNvPr id="3" name="Content Placeholder 2">
+            <a:extLst>
+              <a:ext uri="{FF2B5EF4-FFF2-40B4-BE49-F238E27FC236}">
+                <a16:creationId xmlns:a16="http://schemas.microsoft.com/office/drawing/2014/main" id="{A3AEE65A-AAAA-2D72-CFD9-35F9EE48EF92}"/>
+              </a:ext>
+            </a:extLst>
+          </p:cNvPr>
+          <p:cNvSpPr>
+            <a:spLocks noGrp="1"/>
+          </p:cNvSpPr>
+          <p:nvPr>
+            <p:ph idx="1"/>
+          </p:nvPr>
+        </p:nvSpPr>
+        <p:spPr/>
+        <p:txBody>
+          <a:bodyPr/>
+          <a:lstStyle/>
+          <a:p>
+            <a:r>
+              <a:rPr lang="en-US" dirty="0"/>
+              <a:t>Create a tree for </a:t>
+            </a:r>
+          </a:p>
+          <a:p>
+            <a:pPr lvl="1"/>
+            <a:r>
+              <a:rPr lang="en-US" dirty="0"/>
+              <a:t>S U P E R N A T U R A L </a:t>
+            </a:r>
+          </a:p>
+          <a:p>
+            <a:pPr lvl="1"/>
+            <a:r>
+              <a:rPr lang="en-US" dirty="0"/>
+              <a:t>16  93  81  37  98  84 </a:t>
+            </a:r>
+          </a:p>
+          <a:p>
+            <a:pPr lvl="1"/>
+            <a:r>
+              <a:rPr lang="en-US" dirty="0"/>
+              <a:t>0  9  2  6  2  3  5  1  4  2  9  7  6  8   9   2   7</a:t>
+            </a:r>
+          </a:p>
+          <a:p>
+            <a:pPr lvl="1"/>
+            <a:r>
+              <a:rPr lang="en-US" dirty="0"/>
+              <a:t>C O N I O S I S</a:t>
+            </a:r>
+          </a:p>
+          <a:p>
+            <a:pPr lvl="1"/>
+            <a:r>
+              <a:rPr lang="en-US" dirty="0"/>
+              <a:t>A L P H A B E T I C A L</a:t>
+            </a:r>
+          </a:p>
+          <a:p>
+            <a:pPr lvl="1"/>
+            <a:r>
+              <a:rPr lang="en-US" dirty="0"/>
+              <a:t>M A T H E M A T I C S</a:t>
+            </a:r>
+          </a:p>
+        </p:txBody>
+      </p:sp>
+    </p:spTree>
+    <p:extLst>
+      <p:ext uri="{BB962C8B-B14F-4D97-AF65-F5344CB8AC3E}">
+        <p14:creationId xmlns:p14="http://schemas.microsoft.com/office/powerpoint/2010/main" val="2784839578"/>
       </p:ext>
     </p:extLst>
   </p:cSld>

--- a/all/ExploringCSConceptsViaACSLCompetitions_all.pptx
+++ b/all/ExploringCSConceptsViaACSLCompetitions_all.pptx
@@ -5,7 +5,7 @@
     <p:sldMasterId id="2147483648" r:id="rId1"/>
   </p:sldMasterIdLst>
   <p:notesMasterIdLst>
-    <p:notesMasterId r:id="rId110"/>
+    <p:notesMasterId r:id="rId116"/>
   </p:notesMasterIdLst>
   <p:sldIdLst>
     <p:sldId id="256" r:id="rId2"/>
@@ -116,6 +116,12 @@
     <p:sldId id="378" r:id="rId107"/>
     <p:sldId id="379" r:id="rId108"/>
     <p:sldId id="380" r:id="rId109"/>
+    <p:sldId id="381" r:id="rId110"/>
+    <p:sldId id="382" r:id="rId111"/>
+    <p:sldId id="383" r:id="rId112"/>
+    <p:sldId id="384" r:id="rId113"/>
+    <p:sldId id="385" r:id="rId114"/>
+    <p:sldId id="386" r:id="rId115"/>
   </p:sldIdLst>
   <p:sldSz cx="12192000" cy="6858000"/>
   <p:notesSz cx="6858000" cy="9144000"/>
@@ -493,7 +499,7 @@
           <a:p>
             <a:fld id="{15653688-98A8-4F3B-A740-8E6568AE1BCB}" type="datetimeFigureOut">
               <a:rPr lang="en-US" smtClean="0"/>
-              <a:t>3/26/2026</a:t>
+              <a:t>4/2/2026</a:t>
             </a:fld>
             <a:endParaRPr lang="en-US"/>
           </a:p>
@@ -2247,7 +2253,7 @@
           <a:p>
             <a:fld id="{20CB266D-A331-4A79-AB46-FEF40B16CF9B}" type="datetimeFigureOut">
               <a:rPr lang="en-US" smtClean="0"/>
-              <a:t>3/26/2026</a:t>
+              <a:t>4/2/2026</a:t>
             </a:fld>
             <a:endParaRPr lang="en-US"/>
           </a:p>
@@ -2445,7 +2451,7 @@
           <a:p>
             <a:fld id="{20CB266D-A331-4A79-AB46-FEF40B16CF9B}" type="datetimeFigureOut">
               <a:rPr lang="en-US" smtClean="0"/>
-              <a:t>3/26/2026</a:t>
+              <a:t>4/2/2026</a:t>
             </a:fld>
             <a:endParaRPr lang="en-US"/>
           </a:p>
@@ -2653,7 +2659,7 @@
           <a:p>
             <a:fld id="{20CB266D-A331-4A79-AB46-FEF40B16CF9B}" type="datetimeFigureOut">
               <a:rPr lang="en-US" smtClean="0"/>
-              <a:t>3/26/2026</a:t>
+              <a:t>4/2/2026</a:t>
             </a:fld>
             <a:endParaRPr lang="en-US"/>
           </a:p>
@@ -2851,7 +2857,7 @@
           <a:p>
             <a:fld id="{20CB266D-A331-4A79-AB46-FEF40B16CF9B}" type="datetimeFigureOut">
               <a:rPr lang="en-US" smtClean="0"/>
-              <a:t>3/26/2026</a:t>
+              <a:t>4/2/2026</a:t>
             </a:fld>
             <a:endParaRPr lang="en-US"/>
           </a:p>
@@ -3126,7 +3132,7 @@
           <a:p>
             <a:fld id="{20CB266D-A331-4A79-AB46-FEF40B16CF9B}" type="datetimeFigureOut">
               <a:rPr lang="en-US" smtClean="0"/>
-              <a:t>3/26/2026</a:t>
+              <a:t>4/2/2026</a:t>
             </a:fld>
             <a:endParaRPr lang="en-US"/>
           </a:p>
@@ -3391,7 +3397,7 @@
           <a:p>
             <a:fld id="{20CB266D-A331-4A79-AB46-FEF40B16CF9B}" type="datetimeFigureOut">
               <a:rPr lang="en-US" smtClean="0"/>
-              <a:t>3/26/2026</a:t>
+              <a:t>4/2/2026</a:t>
             </a:fld>
             <a:endParaRPr lang="en-US"/>
           </a:p>
@@ -3803,7 +3809,7 @@
           <a:p>
             <a:fld id="{20CB266D-A331-4A79-AB46-FEF40B16CF9B}" type="datetimeFigureOut">
               <a:rPr lang="en-US" smtClean="0"/>
-              <a:t>3/26/2026</a:t>
+              <a:t>4/2/2026</a:t>
             </a:fld>
             <a:endParaRPr lang="en-US"/>
           </a:p>
@@ -3944,7 +3950,7 @@
           <a:p>
             <a:fld id="{20CB266D-A331-4A79-AB46-FEF40B16CF9B}" type="datetimeFigureOut">
               <a:rPr lang="en-US" smtClean="0"/>
-              <a:t>3/26/2026</a:t>
+              <a:t>4/2/2026</a:t>
             </a:fld>
             <a:endParaRPr lang="en-US"/>
           </a:p>
@@ -4057,7 +4063,7 @@
           <a:p>
             <a:fld id="{20CB266D-A331-4A79-AB46-FEF40B16CF9B}" type="datetimeFigureOut">
               <a:rPr lang="en-US" smtClean="0"/>
-              <a:t>3/26/2026</a:t>
+              <a:t>4/2/2026</a:t>
             </a:fld>
             <a:endParaRPr lang="en-US"/>
           </a:p>
@@ -4368,7 +4374,7 @@
           <a:p>
             <a:fld id="{20CB266D-A331-4A79-AB46-FEF40B16CF9B}" type="datetimeFigureOut">
               <a:rPr lang="en-US" smtClean="0"/>
-              <a:t>3/26/2026</a:t>
+              <a:t>4/2/2026</a:t>
             </a:fld>
             <a:endParaRPr lang="en-US"/>
           </a:p>
@@ -4656,7 +4662,7 @@
           <a:p>
             <a:fld id="{20CB266D-A331-4A79-AB46-FEF40B16CF9B}" type="datetimeFigureOut">
               <a:rPr lang="en-US" smtClean="0"/>
-              <a:t>3/26/2026</a:t>
+              <a:t>4/2/2026</a:t>
             </a:fld>
             <a:endParaRPr lang="en-US"/>
           </a:p>
@@ -4897,7 +4903,7 @@
           <a:p>
             <a:fld id="{20CB266D-A331-4A79-AB46-FEF40B16CF9B}" type="datetimeFigureOut">
               <a:rPr lang="en-US" smtClean="0"/>
-              <a:t>3/26/2026</a:t>
+              <a:t>4/2/2026</a:t>
             </a:fld>
             <a:endParaRPr lang="en-US"/>
           </a:p>
@@ -6902,6 +6908,156 @@
 </p:sld>
 </file>
 
+<file path=ppt/slides/slide109.xml><?xml version="1.0" encoding="utf-8"?>
+<p:sld xmlns:a="http://schemas.openxmlformats.org/drawingml/2006/main" xmlns:r="http://schemas.openxmlformats.org/officeDocument/2006/relationships" xmlns:p="http://schemas.openxmlformats.org/presentationml/2006/main">
+  <p:cSld>
+    <p:spTree>
+      <p:nvGrpSpPr>
+        <p:cNvPr id="1" name=""/>
+        <p:cNvGrpSpPr/>
+        <p:nvPr/>
+      </p:nvGrpSpPr>
+      <p:grpSpPr>
+        <a:xfrm>
+          <a:off x="0" y="0"/>
+          <a:ext cx="0" cy="0"/>
+          <a:chOff x="0" y="0"/>
+          <a:chExt cx="0" cy="0"/>
+        </a:xfrm>
+      </p:grpSpPr>
+      <p:sp>
+        <p:nvSpPr>
+          <p:cNvPr id="2" name="Title 1">
+            <a:extLst>
+              <a:ext uri="{FF2B5EF4-FFF2-40B4-BE49-F238E27FC236}">
+                <a16:creationId xmlns:a16="http://schemas.microsoft.com/office/drawing/2014/main" id="{AE2FBD44-EBD1-07DC-DF8E-F30552C6546F}"/>
+              </a:ext>
+            </a:extLst>
+          </p:cNvPr>
+          <p:cNvSpPr>
+            <a:spLocks noGrp="1"/>
+          </p:cNvSpPr>
+          <p:nvPr>
+            <p:ph type="title"/>
+          </p:nvPr>
+        </p:nvSpPr>
+        <p:spPr/>
+        <p:txBody>
+          <a:bodyPr/>
+          <a:lstStyle/>
+          <a:p>
+            <a:r>
+              <a:rPr lang="en-US" dirty="0"/>
+              <a:t>Data Structure : Graphs</a:t>
+            </a:r>
+          </a:p>
+        </p:txBody>
+      </p:sp>
+      <p:sp>
+        <p:nvSpPr>
+          <p:cNvPr id="3" name="Content Placeholder 2">
+            <a:extLst>
+              <a:ext uri="{FF2B5EF4-FFF2-40B4-BE49-F238E27FC236}">
+                <a16:creationId xmlns:a16="http://schemas.microsoft.com/office/drawing/2014/main" id="{AB79665F-B850-FB04-2549-9B4B1250FFB0}"/>
+              </a:ext>
+            </a:extLst>
+          </p:cNvPr>
+          <p:cNvSpPr>
+            <a:spLocks noGrp="1"/>
+          </p:cNvSpPr>
+          <p:nvPr>
+            <p:ph idx="1"/>
+          </p:nvPr>
+        </p:nvSpPr>
+        <p:spPr/>
+        <p:txBody>
+          <a:bodyPr/>
+          <a:lstStyle/>
+          <a:p>
+            <a:r>
+              <a:rPr lang="en-US" dirty="0"/>
+              <a:t>Graphs are data structure that can represent complex relationships between items. They are made of </a:t>
+            </a:r>
+          </a:p>
+          <a:p>
+            <a:pPr lvl="1"/>
+            <a:r>
+              <a:rPr lang="en-US" dirty="0"/>
+              <a:t>Vertices( also called nodes)</a:t>
+            </a:r>
+          </a:p>
+          <a:p>
+            <a:pPr lvl="1"/>
+            <a:r>
+              <a:rPr lang="en-US" dirty="0"/>
+              <a:t>Edges</a:t>
+            </a:r>
+          </a:p>
+          <a:p>
+            <a:pPr marL="0" indent="0">
+              <a:buNone/>
+            </a:pPr>
+            <a:endParaRPr lang="en-US" dirty="0"/>
+          </a:p>
+          <a:p>
+            <a:pPr lvl="1"/>
+            <a:endParaRPr lang="en-US" dirty="0"/>
+          </a:p>
+          <a:p>
+            <a:pPr lvl="1"/>
+            <a:endParaRPr lang="en-US" dirty="0"/>
+          </a:p>
+        </p:txBody>
+      </p:sp>
+      <p:pic>
+        <p:nvPicPr>
+          <p:cNvPr id="5" name="Picture 4">
+            <a:extLst>
+              <a:ext uri="{FF2B5EF4-FFF2-40B4-BE49-F238E27FC236}">
+                <a16:creationId xmlns:a16="http://schemas.microsoft.com/office/drawing/2014/main" id="{BF8DAD95-1C7C-BBBF-5940-31D7F0581005}"/>
+              </a:ext>
+            </a:extLst>
+          </p:cNvPr>
+          <p:cNvPicPr>
+            <a:picLocks noChangeAspect="1"/>
+          </p:cNvPicPr>
+          <p:nvPr/>
+        </p:nvPicPr>
+        <p:blipFill>
+          <a:blip r:embed="rId2">
+            <a:extLst>
+              <a:ext uri="{28A0092B-C50C-407E-A947-70E740481C1C}">
+                <a14:useLocalDpi xmlns:a14="http://schemas.microsoft.com/office/drawing/2010/main" val="0"/>
+              </a:ext>
+            </a:extLst>
+          </a:blip>
+          <a:stretch>
+            <a:fillRect/>
+          </a:stretch>
+        </p:blipFill>
+        <p:spPr>
+          <a:xfrm>
+            <a:off x="5645790" y="2842243"/>
+            <a:ext cx="4107401" cy="3167245"/>
+          </a:xfrm>
+          <a:prstGeom prst="rect">
+            <a:avLst/>
+          </a:prstGeom>
+        </p:spPr>
+      </p:pic>
+    </p:spTree>
+    <p:extLst>
+      <p:ext uri="{BB962C8B-B14F-4D97-AF65-F5344CB8AC3E}">
+        <p14:creationId xmlns:p14="http://schemas.microsoft.com/office/powerpoint/2010/main" val="2072381865"/>
+      </p:ext>
+    </p:extLst>
+  </p:cSld>
+  <p:clrMapOvr>
+    <a:masterClrMapping/>
+  </p:clrMapOvr>
+</p:sld>
+</file>
+
 <file path=ppt/slides/slide11.xml><?xml version="1.0" encoding="utf-8"?>
 <p:sld xmlns:a="http://schemas.openxmlformats.org/drawingml/2006/main" xmlns:r="http://schemas.openxmlformats.org/officeDocument/2006/relationships" xmlns:p="http://schemas.openxmlformats.org/presentationml/2006/main">
   <p:cSld>
@@ -6979,6 +7135,823 @@
     <p:extLst>
       <p:ext uri="{BB962C8B-B14F-4D97-AF65-F5344CB8AC3E}">
         <p14:creationId xmlns:p14="http://schemas.microsoft.com/office/powerpoint/2010/main" val="2017700721"/>
+      </p:ext>
+    </p:extLst>
+  </p:cSld>
+  <p:clrMapOvr>
+    <a:masterClrMapping/>
+  </p:clrMapOvr>
+</p:sld>
+</file>
+
+<file path=ppt/slides/slide110.xml><?xml version="1.0" encoding="utf-8"?>
+<p:sld xmlns:a="http://schemas.openxmlformats.org/drawingml/2006/main" xmlns:r="http://schemas.openxmlformats.org/officeDocument/2006/relationships" xmlns:p="http://schemas.openxmlformats.org/presentationml/2006/main">
+  <p:cSld>
+    <p:spTree>
+      <p:nvGrpSpPr>
+        <p:cNvPr id="1" name=""/>
+        <p:cNvGrpSpPr/>
+        <p:nvPr/>
+      </p:nvGrpSpPr>
+      <p:grpSpPr>
+        <a:xfrm>
+          <a:off x="0" y="0"/>
+          <a:ext cx="0" cy="0"/>
+          <a:chOff x="0" y="0"/>
+          <a:chExt cx="0" cy="0"/>
+        </a:xfrm>
+      </p:grpSpPr>
+      <p:sp>
+        <p:nvSpPr>
+          <p:cNvPr id="2" name="Title 1">
+            <a:extLst>
+              <a:ext uri="{FF2B5EF4-FFF2-40B4-BE49-F238E27FC236}">
+                <a16:creationId xmlns:a16="http://schemas.microsoft.com/office/drawing/2014/main" id="{73D799F5-A503-C753-D924-BDEF6972DA34}"/>
+              </a:ext>
+            </a:extLst>
+          </p:cNvPr>
+          <p:cNvSpPr>
+            <a:spLocks noGrp="1"/>
+          </p:cNvSpPr>
+          <p:nvPr>
+            <p:ph type="title"/>
+          </p:nvPr>
+        </p:nvSpPr>
+        <p:spPr/>
+        <p:txBody>
+          <a:bodyPr/>
+          <a:lstStyle/>
+          <a:p>
+            <a:r>
+              <a:rPr lang="en-US" dirty="0"/>
+              <a:t>Graphs : uses</a:t>
+            </a:r>
+          </a:p>
+        </p:txBody>
+      </p:sp>
+      <p:sp>
+        <p:nvSpPr>
+          <p:cNvPr id="3" name="Content Placeholder 2">
+            <a:extLst>
+              <a:ext uri="{FF2B5EF4-FFF2-40B4-BE49-F238E27FC236}">
+                <a16:creationId xmlns:a16="http://schemas.microsoft.com/office/drawing/2014/main" id="{D54BA19D-0D87-CD7F-2436-A90504790B85}"/>
+              </a:ext>
+            </a:extLst>
+          </p:cNvPr>
+          <p:cNvSpPr>
+            <a:spLocks noGrp="1"/>
+          </p:cNvSpPr>
+          <p:nvPr>
+            <p:ph idx="1"/>
+          </p:nvPr>
+        </p:nvSpPr>
+        <p:spPr/>
+        <p:txBody>
+          <a:bodyPr>
+            <a:normAutofit fontScale="92500" lnSpcReduction="20000"/>
+          </a:bodyPr>
+          <a:lstStyle/>
+          <a:p>
+            <a:r>
+              <a:rPr lang="en-US" dirty="0"/>
+              <a:t>Major part of day to day life </a:t>
+            </a:r>
+          </a:p>
+          <a:p>
+            <a:pPr lvl="1"/>
+            <a:r>
+              <a:rPr lang="en-US" dirty="0"/>
+              <a:t>Maps</a:t>
+            </a:r>
+          </a:p>
+          <a:p>
+            <a:pPr lvl="2"/>
+            <a:r>
+              <a:rPr lang="en-US" dirty="0"/>
+              <a:t>Shortest/fastest routes</a:t>
+            </a:r>
+          </a:p>
+          <a:p>
+            <a:pPr lvl="1"/>
+            <a:r>
+              <a:rPr lang="en-US" dirty="0"/>
+              <a:t>Internet/Computer networks</a:t>
+            </a:r>
+          </a:p>
+          <a:p>
+            <a:pPr lvl="2"/>
+            <a:r>
+              <a:rPr lang="en-US" dirty="0"/>
+              <a:t>Communication over internet</a:t>
+            </a:r>
+          </a:p>
+          <a:p>
+            <a:pPr lvl="1"/>
+            <a:r>
+              <a:rPr lang="en-US" dirty="0"/>
+              <a:t>Commerce</a:t>
+            </a:r>
+          </a:p>
+          <a:p>
+            <a:pPr lvl="2"/>
+            <a:r>
+              <a:rPr lang="en-US" dirty="0"/>
+              <a:t>Stocks</a:t>
+            </a:r>
+          </a:p>
+          <a:p>
+            <a:pPr lvl="2"/>
+            <a:r>
+              <a:rPr lang="en-US" dirty="0"/>
+              <a:t>goods</a:t>
+            </a:r>
+          </a:p>
+          <a:p>
+            <a:pPr lvl="1"/>
+            <a:r>
+              <a:rPr lang="en-US" dirty="0"/>
+              <a:t>Social Networks </a:t>
+            </a:r>
+          </a:p>
+          <a:p>
+            <a:pPr lvl="2"/>
+            <a:r>
+              <a:rPr lang="en-US" dirty="0"/>
+              <a:t>Friends</a:t>
+            </a:r>
+          </a:p>
+          <a:p>
+            <a:pPr lvl="2"/>
+            <a:r>
+              <a:rPr lang="en-US" dirty="0"/>
+              <a:t>Ads</a:t>
+            </a:r>
+          </a:p>
+          <a:p>
+            <a:pPr lvl="1"/>
+            <a:r>
+              <a:rPr lang="en-US" dirty="0"/>
+              <a:t>Circuits</a:t>
+            </a:r>
+          </a:p>
+          <a:p>
+            <a:pPr lvl="2"/>
+            <a:r>
+              <a:rPr lang="en-US" dirty="0"/>
+              <a:t>Computer</a:t>
+            </a:r>
+          </a:p>
+          <a:p>
+            <a:pPr lvl="1"/>
+            <a:r>
+              <a:rPr lang="en-US" dirty="0"/>
+              <a:t>Schedules</a:t>
+            </a:r>
+          </a:p>
+          <a:p>
+            <a:pPr lvl="2"/>
+            <a:r>
+              <a:rPr lang="en-US" dirty="0"/>
+              <a:t>dependency</a:t>
+            </a:r>
+          </a:p>
+          <a:p>
+            <a:pPr lvl="1"/>
+            <a:endParaRPr lang="en-US" dirty="0"/>
+          </a:p>
+          <a:p>
+            <a:pPr lvl="1"/>
+            <a:endParaRPr lang="en-US" dirty="0"/>
+          </a:p>
+        </p:txBody>
+      </p:sp>
+    </p:spTree>
+    <p:extLst>
+      <p:ext uri="{BB962C8B-B14F-4D97-AF65-F5344CB8AC3E}">
+        <p14:creationId xmlns:p14="http://schemas.microsoft.com/office/powerpoint/2010/main" val="4106691351"/>
+      </p:ext>
+    </p:extLst>
+  </p:cSld>
+  <p:clrMapOvr>
+    <a:masterClrMapping/>
+  </p:clrMapOvr>
+</p:sld>
+</file>
+
+<file path=ppt/slides/slide111.xml><?xml version="1.0" encoding="utf-8"?>
+<p:sld xmlns:a="http://schemas.openxmlformats.org/drawingml/2006/main" xmlns:r="http://schemas.openxmlformats.org/officeDocument/2006/relationships" xmlns:p="http://schemas.openxmlformats.org/presentationml/2006/main">
+  <p:cSld>
+    <p:spTree>
+      <p:nvGrpSpPr>
+        <p:cNvPr id="1" name=""/>
+        <p:cNvGrpSpPr/>
+        <p:nvPr/>
+      </p:nvGrpSpPr>
+      <p:grpSpPr>
+        <a:xfrm>
+          <a:off x="0" y="0"/>
+          <a:ext cx="0" cy="0"/>
+          <a:chOff x="0" y="0"/>
+          <a:chExt cx="0" cy="0"/>
+        </a:xfrm>
+      </p:grpSpPr>
+      <p:sp>
+        <p:nvSpPr>
+          <p:cNvPr id="2" name="Title 1">
+            <a:extLst>
+              <a:ext uri="{FF2B5EF4-FFF2-40B4-BE49-F238E27FC236}">
+                <a16:creationId xmlns:a16="http://schemas.microsoft.com/office/drawing/2014/main" id="{5E8594CF-E56D-9A6C-E3FF-4352F59F7EF3}"/>
+              </a:ext>
+            </a:extLst>
+          </p:cNvPr>
+          <p:cNvSpPr>
+            <a:spLocks noGrp="1"/>
+          </p:cNvSpPr>
+          <p:nvPr>
+            <p:ph type="title"/>
+          </p:nvPr>
+        </p:nvSpPr>
+        <p:spPr/>
+        <p:txBody>
+          <a:bodyPr/>
+          <a:lstStyle/>
+          <a:p>
+            <a:r>
+              <a:rPr lang="en-US" dirty="0"/>
+              <a:t>Graphs : by Edge types</a:t>
+            </a:r>
+          </a:p>
+        </p:txBody>
+      </p:sp>
+      <p:sp>
+        <p:nvSpPr>
+          <p:cNvPr id="3" name="Content Placeholder 2">
+            <a:extLst>
+              <a:ext uri="{FF2B5EF4-FFF2-40B4-BE49-F238E27FC236}">
+                <a16:creationId xmlns:a16="http://schemas.microsoft.com/office/drawing/2014/main" id="{E8D29D19-9EC9-463D-5938-7DFED8B7F419}"/>
+              </a:ext>
+            </a:extLst>
+          </p:cNvPr>
+          <p:cNvSpPr>
+            <a:spLocks noGrp="1"/>
+          </p:cNvSpPr>
+          <p:nvPr>
+            <p:ph idx="1"/>
+          </p:nvPr>
+        </p:nvSpPr>
+        <p:spPr/>
+        <p:txBody>
+          <a:bodyPr/>
+          <a:lstStyle/>
+          <a:p>
+            <a:r>
+              <a:rPr lang="en-US" b="1" dirty="0"/>
+              <a:t>Directed </a:t>
+            </a:r>
+            <a:r>
+              <a:rPr lang="en-US" dirty="0"/>
+              <a:t>: think one way</a:t>
+            </a:r>
+          </a:p>
+          <a:p>
+            <a:pPr lvl="1"/>
+            <a:r>
+              <a:rPr lang="en-US" dirty="0"/>
+              <a:t>The edges have a </a:t>
+            </a:r>
+            <a:r>
+              <a:rPr lang="en-US" b="1" dirty="0"/>
+              <a:t>source</a:t>
+            </a:r>
+            <a:r>
+              <a:rPr lang="en-US" dirty="0"/>
+              <a:t> where they begin from </a:t>
+            </a:r>
+          </a:p>
+          <a:p>
+            <a:pPr lvl="1"/>
+            <a:r>
+              <a:rPr lang="en-US" dirty="0"/>
+              <a:t>And a </a:t>
+            </a:r>
+            <a:r>
+              <a:rPr lang="en-US" b="1" dirty="0"/>
+              <a:t>destination</a:t>
+            </a:r>
+            <a:r>
+              <a:rPr lang="en-US" dirty="0"/>
+              <a:t> where they end.</a:t>
+            </a:r>
+          </a:p>
+          <a:p>
+            <a:pPr lvl="1"/>
+            <a:r>
+              <a:rPr lang="en-US" b="1" i="1" dirty="0"/>
+              <a:t>Think of this as one way connection</a:t>
+            </a:r>
+          </a:p>
+          <a:p>
+            <a:r>
+              <a:rPr lang="en-US" i="1" dirty="0"/>
+              <a:t>Undirected</a:t>
+            </a:r>
+          </a:p>
+        </p:txBody>
+      </p:sp>
+      <p:pic>
+        <p:nvPicPr>
+          <p:cNvPr id="5" name="Picture 4">
+            <a:extLst>
+              <a:ext uri="{FF2B5EF4-FFF2-40B4-BE49-F238E27FC236}">
+                <a16:creationId xmlns:a16="http://schemas.microsoft.com/office/drawing/2014/main" id="{DEE376AB-227B-DBD3-7622-5859089D7835}"/>
+              </a:ext>
+            </a:extLst>
+          </p:cNvPr>
+          <p:cNvPicPr>
+            <a:picLocks noChangeAspect="1"/>
+          </p:cNvPicPr>
+          <p:nvPr/>
+        </p:nvPicPr>
+        <p:blipFill>
+          <a:blip r:embed="rId2">
+            <a:extLst>
+              <a:ext uri="{28A0092B-C50C-407E-A947-70E740481C1C}">
+                <a14:useLocalDpi xmlns:a14="http://schemas.microsoft.com/office/drawing/2010/main" val="0"/>
+              </a:ext>
+            </a:extLst>
+          </a:blip>
+          <a:stretch>
+            <a:fillRect/>
+          </a:stretch>
+        </p:blipFill>
+        <p:spPr>
+          <a:xfrm>
+            <a:off x="2856453" y="3773614"/>
+            <a:ext cx="4578989" cy="1873223"/>
+          </a:xfrm>
+          <a:prstGeom prst="rect">
+            <a:avLst/>
+          </a:prstGeom>
+        </p:spPr>
+      </p:pic>
+    </p:spTree>
+    <p:extLst>
+      <p:ext uri="{BB962C8B-B14F-4D97-AF65-F5344CB8AC3E}">
+        <p14:creationId xmlns:p14="http://schemas.microsoft.com/office/powerpoint/2010/main" val="1470364458"/>
+      </p:ext>
+    </p:extLst>
+  </p:cSld>
+  <p:clrMapOvr>
+    <a:masterClrMapping/>
+  </p:clrMapOvr>
+</p:sld>
+</file>
+
+<file path=ppt/slides/slide112.xml><?xml version="1.0" encoding="utf-8"?>
+<p:sld xmlns:a="http://schemas.openxmlformats.org/drawingml/2006/main" xmlns:r="http://schemas.openxmlformats.org/officeDocument/2006/relationships" xmlns:p="http://schemas.openxmlformats.org/presentationml/2006/main">
+  <p:cSld>
+    <p:spTree>
+      <p:nvGrpSpPr>
+        <p:cNvPr id="1" name="">
+          <a:extLst>
+            <a:ext uri="{FF2B5EF4-FFF2-40B4-BE49-F238E27FC236}">
+              <a16:creationId xmlns:a16="http://schemas.microsoft.com/office/drawing/2014/main" id="{04EEFF23-6F34-7ED0-BAD1-7D662ED24F1C}"/>
+            </a:ext>
+          </a:extLst>
+        </p:cNvPr>
+        <p:cNvGrpSpPr/>
+        <p:nvPr/>
+      </p:nvGrpSpPr>
+      <p:grpSpPr>
+        <a:xfrm>
+          <a:off x="0" y="0"/>
+          <a:ext cx="0" cy="0"/>
+          <a:chOff x="0" y="0"/>
+          <a:chExt cx="0" cy="0"/>
+        </a:xfrm>
+      </p:grpSpPr>
+      <p:sp>
+        <p:nvSpPr>
+          <p:cNvPr id="2" name="Title 1">
+            <a:extLst>
+              <a:ext uri="{FF2B5EF4-FFF2-40B4-BE49-F238E27FC236}">
+                <a16:creationId xmlns:a16="http://schemas.microsoft.com/office/drawing/2014/main" id="{9A88A1DF-487F-705B-EEB9-D66C72F2A61F}"/>
+              </a:ext>
+            </a:extLst>
+          </p:cNvPr>
+          <p:cNvSpPr>
+            <a:spLocks noGrp="1"/>
+          </p:cNvSpPr>
+          <p:nvPr>
+            <p:ph type="title"/>
+          </p:nvPr>
+        </p:nvSpPr>
+        <p:spPr/>
+        <p:txBody>
+          <a:bodyPr/>
+          <a:lstStyle/>
+          <a:p>
+            <a:r>
+              <a:rPr lang="en-US" dirty="0"/>
+              <a:t>Graphs : by Edge types</a:t>
+            </a:r>
+          </a:p>
+        </p:txBody>
+      </p:sp>
+      <p:sp>
+        <p:nvSpPr>
+          <p:cNvPr id="3" name="Content Placeholder 2">
+            <a:extLst>
+              <a:ext uri="{FF2B5EF4-FFF2-40B4-BE49-F238E27FC236}">
+                <a16:creationId xmlns:a16="http://schemas.microsoft.com/office/drawing/2014/main" id="{FCD8D58B-0329-19D7-2F29-84ACB5C9D3E9}"/>
+              </a:ext>
+            </a:extLst>
+          </p:cNvPr>
+          <p:cNvSpPr>
+            <a:spLocks noGrp="1"/>
+          </p:cNvSpPr>
+          <p:nvPr>
+            <p:ph idx="1"/>
+          </p:nvPr>
+        </p:nvSpPr>
+        <p:spPr/>
+        <p:txBody>
+          <a:bodyPr/>
+          <a:lstStyle/>
+          <a:p>
+            <a:r>
+              <a:rPr lang="en-US" dirty="0"/>
+              <a:t>Directed</a:t>
+            </a:r>
+          </a:p>
+          <a:p>
+            <a:r>
+              <a:rPr lang="en-US" b="1" dirty="0"/>
+              <a:t>Undirected</a:t>
+            </a:r>
+          </a:p>
+          <a:p>
+            <a:pPr lvl="1"/>
+            <a:r>
+              <a:rPr lang="en-US" dirty="0"/>
+              <a:t>The edges do not have direction</a:t>
+            </a:r>
+          </a:p>
+          <a:p>
+            <a:pPr lvl="1"/>
+            <a:r>
+              <a:rPr lang="en-US" dirty="0"/>
+              <a:t>The edge connects vertices in both direction</a:t>
+            </a:r>
+          </a:p>
+          <a:p>
+            <a:pPr lvl="1"/>
+            <a:r>
+              <a:rPr lang="en-US" b="1" i="1" dirty="0"/>
+              <a:t>Think of this as two way connection</a:t>
+            </a:r>
+          </a:p>
+        </p:txBody>
+      </p:sp>
+      <p:pic>
+        <p:nvPicPr>
+          <p:cNvPr id="5" name="Picture 4">
+            <a:extLst>
+              <a:ext uri="{FF2B5EF4-FFF2-40B4-BE49-F238E27FC236}">
+                <a16:creationId xmlns:a16="http://schemas.microsoft.com/office/drawing/2014/main" id="{A9555328-ED29-B541-3570-7CDE3FDBC8F6}"/>
+              </a:ext>
+            </a:extLst>
+          </p:cNvPr>
+          <p:cNvPicPr>
+            <a:picLocks noChangeAspect="1"/>
+          </p:cNvPicPr>
+          <p:nvPr/>
+        </p:nvPicPr>
+        <p:blipFill>
+          <a:blip r:embed="rId2">
+            <a:extLst>
+              <a:ext uri="{28A0092B-C50C-407E-A947-70E740481C1C}">
+                <a14:useLocalDpi xmlns:a14="http://schemas.microsoft.com/office/drawing/2010/main" val="0"/>
+              </a:ext>
+            </a:extLst>
+          </a:blip>
+          <a:stretch>
+            <a:fillRect/>
+          </a:stretch>
+        </p:blipFill>
+        <p:spPr>
+          <a:xfrm>
+            <a:off x="2680284" y="4001294"/>
+            <a:ext cx="4578989" cy="1873223"/>
+          </a:xfrm>
+          <a:prstGeom prst="rect">
+            <a:avLst/>
+          </a:prstGeom>
+        </p:spPr>
+      </p:pic>
+    </p:spTree>
+    <p:extLst>
+      <p:ext uri="{BB962C8B-B14F-4D97-AF65-F5344CB8AC3E}">
+        <p14:creationId xmlns:p14="http://schemas.microsoft.com/office/powerpoint/2010/main" val="6815551"/>
+      </p:ext>
+    </p:extLst>
+  </p:cSld>
+  <p:clrMapOvr>
+    <a:masterClrMapping/>
+  </p:clrMapOvr>
+</p:sld>
+</file>
+
+<file path=ppt/slides/slide113.xml><?xml version="1.0" encoding="utf-8"?>
+<p:sld xmlns:a="http://schemas.openxmlformats.org/drawingml/2006/main" xmlns:r="http://schemas.openxmlformats.org/officeDocument/2006/relationships" xmlns:p="http://schemas.openxmlformats.org/presentationml/2006/main">
+  <p:cSld>
+    <p:spTree>
+      <p:nvGrpSpPr>
+        <p:cNvPr id="1" name=""/>
+        <p:cNvGrpSpPr/>
+        <p:nvPr/>
+      </p:nvGrpSpPr>
+      <p:grpSpPr>
+        <a:xfrm>
+          <a:off x="0" y="0"/>
+          <a:ext cx="0" cy="0"/>
+          <a:chOff x="0" y="0"/>
+          <a:chExt cx="0" cy="0"/>
+        </a:xfrm>
+      </p:grpSpPr>
+      <p:sp>
+        <p:nvSpPr>
+          <p:cNvPr id="2" name="Title 1">
+            <a:extLst>
+              <a:ext uri="{FF2B5EF4-FFF2-40B4-BE49-F238E27FC236}">
+                <a16:creationId xmlns:a16="http://schemas.microsoft.com/office/drawing/2014/main" id="{0C3377F6-CB3C-29C3-E593-4C149CA50A8F}"/>
+              </a:ext>
+            </a:extLst>
+          </p:cNvPr>
+          <p:cNvSpPr>
+            <a:spLocks noGrp="1"/>
+          </p:cNvSpPr>
+          <p:nvPr>
+            <p:ph type="title"/>
+          </p:nvPr>
+        </p:nvSpPr>
+        <p:spPr/>
+        <p:txBody>
+          <a:bodyPr/>
+          <a:lstStyle/>
+          <a:p>
+            <a:r>
+              <a:rPr lang="en-US" dirty="0"/>
+              <a:t>Graph representation(s)</a:t>
+            </a:r>
+          </a:p>
+        </p:txBody>
+      </p:sp>
+      <p:sp>
+        <p:nvSpPr>
+          <p:cNvPr id="3" name="Content Placeholder 2">
+            <a:extLst>
+              <a:ext uri="{FF2B5EF4-FFF2-40B4-BE49-F238E27FC236}">
+                <a16:creationId xmlns:a16="http://schemas.microsoft.com/office/drawing/2014/main" id="{51DAFD61-5580-96EB-7E35-D315B16E5490}"/>
+              </a:ext>
+            </a:extLst>
+          </p:cNvPr>
+          <p:cNvSpPr>
+            <a:spLocks noGrp="1"/>
+          </p:cNvSpPr>
+          <p:nvPr>
+            <p:ph idx="1"/>
+          </p:nvPr>
+        </p:nvSpPr>
+        <p:spPr>
+          <a:xfrm>
+            <a:off x="838200" y="1829820"/>
+            <a:ext cx="10515600" cy="4351338"/>
+          </a:xfrm>
+        </p:spPr>
+        <p:txBody>
+          <a:bodyPr>
+            <a:normAutofit fontScale="92500" lnSpcReduction="10000"/>
+          </a:bodyPr>
+          <a:lstStyle/>
+          <a:p>
+            <a:pPr marL="0" indent="0">
+              <a:buNone/>
+            </a:pPr>
+            <a:r>
+              <a:rPr lang="en-US" dirty="0"/>
+              <a:t>Assuming </a:t>
+            </a:r>
+            <a:r>
+              <a:rPr lang="en-US" b="1" dirty="0"/>
+              <a:t>graph with ‘V’ vertices and ‘E’ edges</a:t>
+            </a:r>
+          </a:p>
+          <a:p>
+            <a:r>
+              <a:rPr lang="en-US" dirty="0"/>
+              <a:t>Adjacency matrix </a:t>
+            </a:r>
+            <a:r>
+              <a:rPr lang="en-US" i="1" dirty="0"/>
+              <a:t>(double dimension array)</a:t>
+            </a:r>
+          </a:p>
+          <a:p>
+            <a:pPr lvl="1"/>
+            <a:r>
+              <a:rPr lang="en-US" dirty="0" err="1"/>
+              <a:t>VxV</a:t>
+            </a:r>
+            <a:r>
+              <a:rPr lang="en-US" dirty="0"/>
+              <a:t> array, entry in row ‘</a:t>
+            </a:r>
+            <a:r>
+              <a:rPr lang="en-US" dirty="0" err="1"/>
+              <a:t>i</a:t>
+            </a:r>
+            <a:r>
+              <a:rPr lang="en-US" dirty="0"/>
+              <a:t>’ column ‘j’ denotes connectivity between node </a:t>
+            </a:r>
+            <a:r>
+              <a:rPr lang="en-US" dirty="0" err="1"/>
+              <a:t>i</a:t>
+            </a:r>
+            <a:r>
+              <a:rPr lang="en-US" dirty="0"/>
+              <a:t> </a:t>
+            </a:r>
+            <a:r>
+              <a:rPr lang="en-US" dirty="0">
+                <a:sym typeface="Wingdings" panose="05000000000000000000" pitchFamily="2" charset="2"/>
+              </a:rPr>
+              <a:t>: j</a:t>
+            </a:r>
+          </a:p>
+          <a:p>
+            <a:pPr lvl="1"/>
+            <a:r>
+              <a:rPr lang="en-US" i="1" dirty="0">
+                <a:sym typeface="Wingdings" panose="05000000000000000000" pitchFamily="2" charset="2"/>
+              </a:rPr>
+              <a:t>Very useful and efficient representation</a:t>
+            </a:r>
+            <a:endParaRPr lang="en-US" i="1" dirty="0"/>
+          </a:p>
+          <a:p>
+            <a:r>
+              <a:rPr lang="en-US" dirty="0"/>
+              <a:t>array of edges</a:t>
+            </a:r>
+          </a:p>
+          <a:p>
+            <a:pPr lvl="1"/>
+            <a:r>
+              <a:rPr lang="en-US" dirty="0"/>
+              <a:t>Array of size ‘E’ containing source and destination of edges</a:t>
+            </a:r>
+          </a:p>
+          <a:p>
+            <a:pPr lvl="1"/>
+            <a:r>
+              <a:rPr lang="en-US" i="1" dirty="0"/>
+              <a:t>Simple but slower representation</a:t>
+            </a:r>
+          </a:p>
+          <a:p>
+            <a:r>
+              <a:rPr lang="en-US" dirty="0"/>
+              <a:t>Array of adjacency lists </a:t>
+            </a:r>
+          </a:p>
+          <a:p>
+            <a:pPr lvl="1"/>
+            <a:r>
+              <a:rPr lang="en-US" dirty="0"/>
+              <a:t>Vertex indexed array of edges. </a:t>
+            </a:r>
+          </a:p>
+          <a:p>
+            <a:pPr lvl="1"/>
+            <a:r>
+              <a:rPr lang="en-US" i="1" dirty="0"/>
+              <a:t>Flexible and quite efficient </a:t>
+            </a:r>
+            <a:r>
+              <a:rPr lang="en-US" dirty="0"/>
+              <a:t>(the goat)</a:t>
+            </a:r>
+          </a:p>
+          <a:p>
+            <a:r>
+              <a:rPr lang="en-US" dirty="0"/>
+              <a:t>…(and there are more representations)</a:t>
+            </a:r>
+          </a:p>
+          <a:p>
+            <a:pPr lvl="1"/>
+            <a:endParaRPr lang="en-US" dirty="0"/>
+          </a:p>
+          <a:p>
+            <a:endParaRPr lang="en-US" dirty="0"/>
+          </a:p>
+          <a:p>
+            <a:endParaRPr lang="en-US" dirty="0"/>
+          </a:p>
+        </p:txBody>
+      </p:sp>
+    </p:spTree>
+    <p:extLst>
+      <p:ext uri="{BB962C8B-B14F-4D97-AF65-F5344CB8AC3E}">
+        <p14:creationId xmlns:p14="http://schemas.microsoft.com/office/powerpoint/2010/main" val="130748017"/>
+      </p:ext>
+    </p:extLst>
+  </p:cSld>
+  <p:clrMapOvr>
+    <a:masterClrMapping/>
+  </p:clrMapOvr>
+</p:sld>
+</file>
+
+<file path=ppt/slides/slide114.xml><?xml version="1.0" encoding="utf-8"?>
+<p:sld xmlns:a="http://schemas.openxmlformats.org/drawingml/2006/main" xmlns:r="http://schemas.openxmlformats.org/officeDocument/2006/relationships" xmlns:p="http://schemas.openxmlformats.org/presentationml/2006/main">
+  <p:cSld>
+    <p:spTree>
+      <p:nvGrpSpPr>
+        <p:cNvPr id="1" name=""/>
+        <p:cNvGrpSpPr/>
+        <p:nvPr/>
+      </p:nvGrpSpPr>
+      <p:grpSpPr>
+        <a:xfrm>
+          <a:off x="0" y="0"/>
+          <a:ext cx="0" cy="0"/>
+          <a:chOff x="0" y="0"/>
+          <a:chExt cx="0" cy="0"/>
+        </a:xfrm>
+      </p:grpSpPr>
+      <p:sp>
+        <p:nvSpPr>
+          <p:cNvPr id="2" name="Title 1">
+            <a:extLst>
+              <a:ext uri="{FF2B5EF4-FFF2-40B4-BE49-F238E27FC236}">
+                <a16:creationId xmlns:a16="http://schemas.microsoft.com/office/drawing/2014/main" id="{C5BE521D-C6E0-32CE-A5F4-A5A5C1BA7C86}"/>
+              </a:ext>
+            </a:extLst>
+          </p:cNvPr>
+          <p:cNvSpPr>
+            <a:spLocks noGrp="1"/>
+          </p:cNvSpPr>
+          <p:nvPr>
+            <p:ph type="title"/>
+          </p:nvPr>
+        </p:nvSpPr>
+        <p:spPr/>
+        <p:txBody>
+          <a:bodyPr/>
+          <a:lstStyle/>
+          <a:p>
+            <a:r>
+              <a:rPr lang="en-US" dirty="0"/>
+              <a:t>In class exercises</a:t>
+            </a:r>
+          </a:p>
+        </p:txBody>
+      </p:sp>
+      <p:sp>
+        <p:nvSpPr>
+          <p:cNvPr id="3" name="Content Placeholder 2">
+            <a:extLst>
+              <a:ext uri="{FF2B5EF4-FFF2-40B4-BE49-F238E27FC236}">
+                <a16:creationId xmlns:a16="http://schemas.microsoft.com/office/drawing/2014/main" id="{6BF1CB59-8274-EDDE-2358-516BE319A834}"/>
+              </a:ext>
+            </a:extLst>
+          </p:cNvPr>
+          <p:cNvSpPr>
+            <a:spLocks noGrp="1"/>
+          </p:cNvSpPr>
+          <p:nvPr>
+            <p:ph idx="1"/>
+          </p:nvPr>
+        </p:nvSpPr>
+        <p:spPr/>
+        <p:txBody>
+          <a:bodyPr/>
+          <a:lstStyle/>
+          <a:p>
+            <a:r>
+              <a:rPr lang="en-US"/>
+              <a:t>…</a:t>
+            </a:r>
+          </a:p>
+        </p:txBody>
+      </p:sp>
+    </p:spTree>
+    <p:extLst>
+      <p:ext uri="{BB962C8B-B14F-4D97-AF65-F5344CB8AC3E}">
+        <p14:creationId xmlns:p14="http://schemas.microsoft.com/office/powerpoint/2010/main" val="828088541"/>
       </p:ext>
     </p:extLst>
   </p:cSld>

--- a/all/ExploringCSConceptsViaACSLCompetitions_all.pptx
+++ b/all/ExploringCSConceptsViaACSLCompetitions_all.pptx
@@ -5,7 +5,7 @@
     <p:sldMasterId id="2147483648" r:id="rId1"/>
   </p:sldMasterIdLst>
   <p:notesMasterIdLst>
-    <p:notesMasterId r:id="rId116"/>
+    <p:notesMasterId r:id="rId119"/>
   </p:notesMasterIdLst>
   <p:sldIdLst>
     <p:sldId id="256" r:id="rId2"/>
@@ -122,9 +122,12 @@
     <p:sldId id="384" r:id="rId113"/>
     <p:sldId id="385" r:id="rId114"/>
     <p:sldId id="386" r:id="rId115"/>
+    <p:sldId id="387" r:id="rId116"/>
+    <p:sldId id="388" r:id="rId117"/>
+    <p:sldId id="389" r:id="rId118"/>
   </p:sldIdLst>
   <p:sldSz cx="12192000" cy="6858000"/>
-  <p:notesSz cx="6858000" cy="9144000"/>
+  <p:notesSz cx="7010400" cy="9296400"/>
   <p:defaultTextStyle>
     <a:defPPr>
       <a:defRPr lang="en-US"/>
@@ -452,14 +455,14 @@
         <p:spPr>
           <a:xfrm>
             <a:off x="0" y="0"/>
-            <a:ext cx="2971800" cy="458788"/>
+            <a:ext cx="3037840" cy="466434"/>
           </a:xfrm>
           <a:prstGeom prst="rect">
             <a:avLst/>
           </a:prstGeom>
         </p:spPr>
         <p:txBody>
-          <a:bodyPr vert="horz" lIns="91440" tIns="45720" rIns="91440" bIns="45720" rtlCol="0"/>
+          <a:bodyPr vert="horz" lIns="93177" tIns="46589" rIns="93177" bIns="46589" rtlCol="0"/>
           <a:lstStyle>
             <a:lvl1pPr algn="l">
               <a:defRPr sz="1200"/>
@@ -482,15 +485,15 @@
         </p:nvSpPr>
         <p:spPr>
           <a:xfrm>
-            <a:off x="3884613" y="0"/>
-            <a:ext cx="2971800" cy="458788"/>
+            <a:off x="3970938" y="0"/>
+            <a:ext cx="3037840" cy="466434"/>
           </a:xfrm>
           <a:prstGeom prst="rect">
             <a:avLst/>
           </a:prstGeom>
         </p:spPr>
         <p:txBody>
-          <a:bodyPr vert="horz" lIns="91440" tIns="45720" rIns="91440" bIns="45720" rtlCol="0"/>
+          <a:bodyPr vert="horz" lIns="93177" tIns="46589" rIns="93177" bIns="46589" rtlCol="0"/>
           <a:lstStyle>
             <a:lvl1pPr algn="r">
               <a:defRPr sz="1200"/>
@@ -499,7 +502,7 @@
           <a:p>
             <a:fld id="{15653688-98A8-4F3B-A740-8E6568AE1BCB}" type="datetimeFigureOut">
               <a:rPr lang="en-US" smtClean="0"/>
-              <a:t>4/2/2026</a:t>
+              <a:t>4/9/2026</a:t>
             </a:fld>
             <a:endParaRPr lang="en-US"/>
           </a:p>
@@ -517,8 +520,8 @@
         </p:nvSpPr>
         <p:spPr>
           <a:xfrm>
-            <a:off x="685800" y="1143000"/>
-            <a:ext cx="5486400" cy="3086100"/>
+            <a:off x="717550" y="1162050"/>
+            <a:ext cx="5575300" cy="3136900"/>
           </a:xfrm>
           <a:prstGeom prst="rect">
             <a:avLst/>
@@ -531,7 +534,7 @@
           </a:ln>
         </p:spPr>
         <p:txBody>
-          <a:bodyPr vert="horz" lIns="91440" tIns="45720" rIns="91440" bIns="45720" rtlCol="0" anchor="ctr"/>
+          <a:bodyPr vert="horz" lIns="93177" tIns="46589" rIns="93177" bIns="46589" rtlCol="0" anchor="ctr"/>
           <a:lstStyle/>
           <a:p>
             <a:endParaRPr lang="en-US"/>
@@ -550,15 +553,15 @@
         </p:nvSpPr>
         <p:spPr>
           <a:xfrm>
-            <a:off x="685800" y="4400550"/>
-            <a:ext cx="5486400" cy="3600450"/>
+            <a:off x="701040" y="4473892"/>
+            <a:ext cx="5608320" cy="3660458"/>
           </a:xfrm>
           <a:prstGeom prst="rect">
             <a:avLst/>
           </a:prstGeom>
         </p:spPr>
         <p:txBody>
-          <a:bodyPr vert="horz" lIns="91440" tIns="45720" rIns="91440" bIns="45720" rtlCol="0"/>
+          <a:bodyPr vert="horz" lIns="93177" tIns="46589" rIns="93177" bIns="46589" rtlCol="0"/>
           <a:lstStyle/>
           <a:p>
             <a:pPr lvl="0"/>
@@ -609,15 +612,15 @@
         </p:nvSpPr>
         <p:spPr>
           <a:xfrm>
-            <a:off x="0" y="8685213"/>
-            <a:ext cx="2971800" cy="458787"/>
+            <a:off x="0" y="8829967"/>
+            <a:ext cx="3037840" cy="466433"/>
           </a:xfrm>
           <a:prstGeom prst="rect">
             <a:avLst/>
           </a:prstGeom>
         </p:spPr>
         <p:txBody>
-          <a:bodyPr vert="horz" lIns="91440" tIns="45720" rIns="91440" bIns="45720" rtlCol="0" anchor="b"/>
+          <a:bodyPr vert="horz" lIns="93177" tIns="46589" rIns="93177" bIns="46589" rtlCol="0" anchor="b"/>
           <a:lstStyle>
             <a:lvl1pPr algn="l">
               <a:defRPr sz="1200"/>
@@ -640,15 +643,15 @@
         </p:nvSpPr>
         <p:spPr>
           <a:xfrm>
-            <a:off x="3884613" y="8685213"/>
-            <a:ext cx="2971800" cy="458787"/>
+            <a:off x="3970938" y="8829967"/>
+            <a:ext cx="3037840" cy="466433"/>
           </a:xfrm>
           <a:prstGeom prst="rect">
             <a:avLst/>
           </a:prstGeom>
         </p:spPr>
         <p:txBody>
-          <a:bodyPr vert="horz" lIns="91440" tIns="45720" rIns="91440" bIns="45720" rtlCol="0" anchor="b"/>
+          <a:bodyPr vert="horz" lIns="93177" tIns="46589" rIns="93177" bIns="46589" rtlCol="0" anchor="b"/>
           <a:lstStyle>
             <a:lvl1pPr algn="r">
               <a:defRPr sz="1200"/>
@@ -1098,21 +1101,7 @@
               <a:bodyPr/>
               <a:lstStyle/>
               <a:p>
-                <a:pPr marL="457200" marR="0" lvl="1" indent="0" algn="l" defTabSz="914400" rtl="0" eaLnBrk="1" fontAlgn="auto" latinLnBrk="0" hangingPunct="1">
-                  <a:lnSpc>
-                    <a:spcPct val="100000"/>
-                  </a:lnSpc>
-                  <a:spcBef>
-                    <a:spcPts val="0"/>
-                  </a:spcBef>
-                  <a:spcAft>
-                    <a:spcPts val="0"/>
-                  </a:spcAft>
-                  <a:buClrTx/>
-                  <a:buSzTx/>
-                  <a:buFontTx/>
-                  <a:buNone/>
-                  <a:tabLst/>
+                <a:pPr marL="465887" lvl="1" defTabSz="931774">
                   <a:defRPr/>
                 </a:pPr>
                 <a14:m>
@@ -1586,21 +1575,7 @@
               <a:bodyPr/>
               <a:lstStyle/>
               <a:p>
-                <a:pPr marL="457200" marR="0" lvl="1" indent="0" algn="l" defTabSz="914400" rtl="0" eaLnBrk="1" fontAlgn="auto" latinLnBrk="0" hangingPunct="1">
-                  <a:lnSpc>
-                    <a:spcPct val="100000"/>
-                  </a:lnSpc>
-                  <a:spcBef>
-                    <a:spcPts val="0"/>
-                  </a:spcBef>
-                  <a:spcAft>
-                    <a:spcPts val="0"/>
-                  </a:spcAft>
-                  <a:buClrTx/>
-                  <a:buSzTx/>
-                  <a:buFontTx/>
-                  <a:buNone/>
-                  <a:tabLst/>
+                <a:pPr marL="465887" lvl="1" defTabSz="931774">
                   <a:defRPr/>
                 </a:pPr>
                 <a14:m>
@@ -2253,7 +2228,7 @@
           <a:p>
             <a:fld id="{20CB266D-A331-4A79-AB46-FEF40B16CF9B}" type="datetimeFigureOut">
               <a:rPr lang="en-US" smtClean="0"/>
-              <a:t>4/2/2026</a:t>
+              <a:t>4/9/2026</a:t>
             </a:fld>
             <a:endParaRPr lang="en-US"/>
           </a:p>
@@ -2451,7 +2426,7 @@
           <a:p>
             <a:fld id="{20CB266D-A331-4A79-AB46-FEF40B16CF9B}" type="datetimeFigureOut">
               <a:rPr lang="en-US" smtClean="0"/>
-              <a:t>4/2/2026</a:t>
+              <a:t>4/9/2026</a:t>
             </a:fld>
             <a:endParaRPr lang="en-US"/>
           </a:p>
@@ -2659,7 +2634,7 @@
           <a:p>
             <a:fld id="{20CB266D-A331-4A79-AB46-FEF40B16CF9B}" type="datetimeFigureOut">
               <a:rPr lang="en-US" smtClean="0"/>
-              <a:t>4/2/2026</a:t>
+              <a:t>4/9/2026</a:t>
             </a:fld>
             <a:endParaRPr lang="en-US"/>
           </a:p>
@@ -2857,7 +2832,7 @@
           <a:p>
             <a:fld id="{20CB266D-A331-4A79-AB46-FEF40B16CF9B}" type="datetimeFigureOut">
               <a:rPr lang="en-US" smtClean="0"/>
-              <a:t>4/2/2026</a:t>
+              <a:t>4/9/2026</a:t>
             </a:fld>
             <a:endParaRPr lang="en-US"/>
           </a:p>
@@ -3132,7 +3107,7 @@
           <a:p>
             <a:fld id="{20CB266D-A331-4A79-AB46-FEF40B16CF9B}" type="datetimeFigureOut">
               <a:rPr lang="en-US" smtClean="0"/>
-              <a:t>4/2/2026</a:t>
+              <a:t>4/9/2026</a:t>
             </a:fld>
             <a:endParaRPr lang="en-US"/>
           </a:p>
@@ -3397,7 +3372,7 @@
           <a:p>
             <a:fld id="{20CB266D-A331-4A79-AB46-FEF40B16CF9B}" type="datetimeFigureOut">
               <a:rPr lang="en-US" smtClean="0"/>
-              <a:t>4/2/2026</a:t>
+              <a:t>4/9/2026</a:t>
             </a:fld>
             <a:endParaRPr lang="en-US"/>
           </a:p>
@@ -3809,7 +3784,7 @@
           <a:p>
             <a:fld id="{20CB266D-A331-4A79-AB46-FEF40B16CF9B}" type="datetimeFigureOut">
               <a:rPr lang="en-US" smtClean="0"/>
-              <a:t>4/2/2026</a:t>
+              <a:t>4/9/2026</a:t>
             </a:fld>
             <a:endParaRPr lang="en-US"/>
           </a:p>
@@ -3950,7 +3925,7 @@
           <a:p>
             <a:fld id="{20CB266D-A331-4A79-AB46-FEF40B16CF9B}" type="datetimeFigureOut">
               <a:rPr lang="en-US" smtClean="0"/>
-              <a:t>4/2/2026</a:t>
+              <a:t>4/9/2026</a:t>
             </a:fld>
             <a:endParaRPr lang="en-US"/>
           </a:p>
@@ -4063,7 +4038,7 @@
           <a:p>
             <a:fld id="{20CB266D-A331-4A79-AB46-FEF40B16CF9B}" type="datetimeFigureOut">
               <a:rPr lang="en-US" smtClean="0"/>
-              <a:t>4/2/2026</a:t>
+              <a:t>4/9/2026</a:t>
             </a:fld>
             <a:endParaRPr lang="en-US"/>
           </a:p>
@@ -4374,7 +4349,7 @@
           <a:p>
             <a:fld id="{20CB266D-A331-4A79-AB46-FEF40B16CF9B}" type="datetimeFigureOut">
               <a:rPr lang="en-US" smtClean="0"/>
-              <a:t>4/2/2026</a:t>
+              <a:t>4/9/2026</a:t>
             </a:fld>
             <a:endParaRPr lang="en-US"/>
           </a:p>
@@ -4662,7 +4637,7 @@
           <a:p>
             <a:fld id="{20CB266D-A331-4A79-AB46-FEF40B16CF9B}" type="datetimeFigureOut">
               <a:rPr lang="en-US" smtClean="0"/>
-              <a:t>4/2/2026</a:t>
+              <a:t>4/9/2026</a:t>
             </a:fld>
             <a:endParaRPr lang="en-US"/>
           </a:p>
@@ -4903,7 +4878,7 @@
           <a:p>
             <a:fld id="{20CB266D-A331-4A79-AB46-FEF40B16CF9B}" type="datetimeFigureOut">
               <a:rPr lang="en-US" smtClean="0"/>
-              <a:t>4/2/2026</a:t>
+              <a:t>4/9/2026</a:t>
             </a:fld>
             <a:endParaRPr lang="en-US"/>
           </a:p>
@@ -7942,7 +7917,7 @@
           <a:lstStyle/>
           <a:p>
             <a:r>
-              <a:rPr lang="en-US"/>
+              <a:rPr lang="en-US" dirty="0"/>
               <a:t>…</a:t>
             </a:r>
           </a:p>
@@ -7952,6 +7927,1161 @@
     <p:extLst>
       <p:ext uri="{BB962C8B-B14F-4D97-AF65-F5344CB8AC3E}">
         <p14:creationId xmlns:p14="http://schemas.microsoft.com/office/powerpoint/2010/main" val="828088541"/>
+      </p:ext>
+    </p:extLst>
+  </p:cSld>
+  <p:clrMapOvr>
+    <a:masterClrMapping/>
+  </p:clrMapOvr>
+</p:sld>
+</file>
+
+<file path=ppt/slides/slide115.xml><?xml version="1.0" encoding="utf-8"?>
+<p:sld xmlns:a="http://schemas.openxmlformats.org/drawingml/2006/main" xmlns:r="http://schemas.openxmlformats.org/officeDocument/2006/relationships" xmlns:p="http://schemas.openxmlformats.org/presentationml/2006/main">
+  <p:cSld>
+    <p:spTree>
+      <p:nvGrpSpPr>
+        <p:cNvPr id="1" name=""/>
+        <p:cNvGrpSpPr/>
+        <p:nvPr/>
+      </p:nvGrpSpPr>
+      <p:grpSpPr>
+        <a:xfrm>
+          <a:off x="0" y="0"/>
+          <a:ext cx="0" cy="0"/>
+          <a:chOff x="0" y="0"/>
+          <a:chExt cx="0" cy="0"/>
+        </a:xfrm>
+      </p:grpSpPr>
+      <p:sp>
+        <p:nvSpPr>
+          <p:cNvPr id="2" name="Title 1">
+            <a:extLst>
+              <a:ext uri="{FF2B5EF4-FFF2-40B4-BE49-F238E27FC236}">
+                <a16:creationId xmlns:a16="http://schemas.microsoft.com/office/drawing/2014/main" id="{ABB11076-F3E4-1031-12A9-F4565731A092}"/>
+              </a:ext>
+            </a:extLst>
+          </p:cNvPr>
+          <p:cNvSpPr>
+            <a:spLocks noGrp="1"/>
+          </p:cNvSpPr>
+          <p:nvPr>
+            <p:ph type="title"/>
+          </p:nvPr>
+        </p:nvSpPr>
+        <p:spPr/>
+        <p:txBody>
+          <a:bodyPr/>
+          <a:lstStyle/>
+          <a:p>
+            <a:r>
+              <a:rPr lang="en-US" dirty="0"/>
+              <a:t>Logic gates</a:t>
+            </a:r>
+          </a:p>
+        </p:txBody>
+      </p:sp>
+      <p:sp>
+        <p:nvSpPr>
+          <p:cNvPr id="3" name="Content Placeholder 2">
+            <a:extLst>
+              <a:ext uri="{FF2B5EF4-FFF2-40B4-BE49-F238E27FC236}">
+                <a16:creationId xmlns:a16="http://schemas.microsoft.com/office/drawing/2014/main" id="{BF30DD9E-4067-269B-1E64-829DFCC45ABC}"/>
+              </a:ext>
+            </a:extLst>
+          </p:cNvPr>
+          <p:cNvSpPr>
+            <a:spLocks noGrp="1"/>
+          </p:cNvSpPr>
+          <p:nvPr>
+            <p:ph idx="1"/>
+          </p:nvPr>
+        </p:nvSpPr>
+        <p:spPr/>
+        <p:txBody>
+          <a:bodyPr/>
+          <a:lstStyle/>
+          <a:p>
+            <a:r>
+              <a:rPr lang="en-US" dirty="0"/>
+              <a:t>The </a:t>
+            </a:r>
+            <a:r>
+              <a:rPr lang="en-US" dirty="0" err="1"/>
+              <a:t>Cictuits</a:t>
+            </a:r>
+            <a:r>
+              <a:rPr lang="en-US" dirty="0"/>
+              <a:t> in electronics ( Pcs, gaming consoles, phones) are made of basic logic units, called </a:t>
+            </a:r>
+            <a:r>
+              <a:rPr lang="en-US" b="1" dirty="0"/>
+              <a:t>logic gates</a:t>
+            </a:r>
+          </a:p>
+          <a:p>
+            <a:pPr lvl="1"/>
+            <a:r>
+              <a:rPr lang="en-US" dirty="0"/>
+              <a:t>Basic :</a:t>
+            </a:r>
+            <a:r>
+              <a:rPr lang="en-US" b="1" dirty="0"/>
+              <a:t> AND, OR, NOT , XOR</a:t>
+            </a:r>
+          </a:p>
+          <a:p>
+            <a:pPr lvl="1"/>
+            <a:r>
+              <a:rPr lang="en-US" dirty="0"/>
+              <a:t>Negated : </a:t>
+            </a:r>
+            <a:r>
+              <a:rPr lang="en-US" b="1" dirty="0"/>
+              <a:t>NAND, NOR , XNOR</a:t>
+            </a:r>
+          </a:p>
+          <a:p>
+            <a:pPr lvl="2"/>
+            <a:r>
+              <a:rPr lang="en-US" dirty="0"/>
+              <a:t>Similar to AND , OR, XOR respectively but with extra NOT at the end</a:t>
+            </a:r>
+          </a:p>
+          <a:p>
+            <a:pPr lvl="1"/>
+            <a:r>
+              <a:rPr lang="en-US" i="1" dirty="0"/>
+              <a:t>There are more custom gates but these are basic ones</a:t>
+            </a:r>
+          </a:p>
+          <a:p>
+            <a:r>
+              <a:rPr lang="en-US" dirty="0"/>
+              <a:t>These are visual representation of the Boolean algebra</a:t>
+            </a:r>
+          </a:p>
+          <a:p>
+            <a:r>
+              <a:rPr lang="en-US" dirty="0"/>
+              <a:t>All the complex calculations you can think of are fundamentally run by these gates</a:t>
+            </a:r>
+          </a:p>
+          <a:p>
+            <a:pPr marL="0" indent="0">
+              <a:buNone/>
+            </a:pPr>
+            <a:endParaRPr lang="en-US" dirty="0"/>
+          </a:p>
+          <a:p>
+            <a:pPr marL="457200" lvl="1" indent="0">
+              <a:buNone/>
+            </a:pPr>
+            <a:endParaRPr lang="en-US" dirty="0"/>
+          </a:p>
+          <a:p>
+            <a:pPr marL="0" indent="0">
+              <a:buNone/>
+            </a:pPr>
+            <a:endParaRPr lang="en-US" dirty="0"/>
+          </a:p>
+        </p:txBody>
+      </p:sp>
+    </p:spTree>
+    <p:extLst>
+      <p:ext uri="{BB962C8B-B14F-4D97-AF65-F5344CB8AC3E}">
+        <p14:creationId xmlns:p14="http://schemas.microsoft.com/office/powerpoint/2010/main" val="1376933006"/>
+      </p:ext>
+    </p:extLst>
+  </p:cSld>
+  <p:clrMapOvr>
+    <a:masterClrMapping/>
+  </p:clrMapOvr>
+</p:sld>
+</file>
+
+<file path=ppt/slides/slide116.xml><?xml version="1.0" encoding="utf-8"?>
+<p:sld xmlns:a="http://schemas.openxmlformats.org/drawingml/2006/main" xmlns:r="http://schemas.openxmlformats.org/officeDocument/2006/relationships" xmlns:p="http://schemas.openxmlformats.org/presentationml/2006/main">
+  <p:cSld>
+    <p:spTree>
+      <p:nvGrpSpPr>
+        <p:cNvPr id="1" name=""/>
+        <p:cNvGrpSpPr/>
+        <p:nvPr/>
+      </p:nvGrpSpPr>
+      <p:grpSpPr>
+        <a:xfrm>
+          <a:off x="0" y="0"/>
+          <a:ext cx="0" cy="0"/>
+          <a:chOff x="0" y="0"/>
+          <a:chExt cx="0" cy="0"/>
+        </a:xfrm>
+      </p:grpSpPr>
+      <p:sp>
+        <p:nvSpPr>
+          <p:cNvPr id="2" name="Title 1">
+            <a:extLst>
+              <a:ext uri="{FF2B5EF4-FFF2-40B4-BE49-F238E27FC236}">
+                <a16:creationId xmlns:a16="http://schemas.microsoft.com/office/drawing/2014/main" id="{0B9E9EFF-479C-4084-0898-6CD2DF5A302B}"/>
+              </a:ext>
+            </a:extLst>
+          </p:cNvPr>
+          <p:cNvSpPr>
+            <a:spLocks noGrp="1"/>
+          </p:cNvSpPr>
+          <p:nvPr>
+            <p:ph type="title"/>
+          </p:nvPr>
+        </p:nvSpPr>
+        <p:spPr/>
+        <p:txBody>
+          <a:bodyPr/>
+          <a:lstStyle/>
+          <a:p>
+            <a:r>
+              <a:rPr lang="en-US" dirty="0"/>
+              <a:t>Logic gates </a:t>
+            </a:r>
+          </a:p>
+        </p:txBody>
+      </p:sp>
+      <p:pic>
+        <p:nvPicPr>
+          <p:cNvPr id="5" name="Content Placeholder 4">
+            <a:extLst>
+              <a:ext uri="{FF2B5EF4-FFF2-40B4-BE49-F238E27FC236}">
+                <a16:creationId xmlns:a16="http://schemas.microsoft.com/office/drawing/2014/main" id="{E54731AC-5492-99CF-3E60-19F9DA06294E}"/>
+              </a:ext>
+            </a:extLst>
+          </p:cNvPr>
+          <p:cNvPicPr>
+            <a:picLocks noGrp="1" noChangeAspect="1"/>
+          </p:cNvPicPr>
+          <p:nvPr>
+            <p:ph idx="1"/>
+          </p:nvPr>
+        </p:nvPicPr>
+        <p:blipFill>
+          <a:blip r:embed="rId2">
+            <a:extLst>
+              <a:ext uri="{28A0092B-C50C-407E-A947-70E740481C1C}">
+                <a14:useLocalDpi xmlns:a14="http://schemas.microsoft.com/office/drawing/2010/main" val="0"/>
+              </a:ext>
+            </a:extLst>
+          </a:blip>
+          <a:stretch>
+            <a:fillRect/>
+          </a:stretch>
+        </p:blipFill>
+        <p:spPr>
+          <a:xfrm>
+            <a:off x="1288001" y="1728206"/>
+            <a:ext cx="3257143" cy="3866667"/>
+          </a:xfrm>
+        </p:spPr>
+      </p:pic>
+      <mc:AlternateContent xmlns:mc="http://schemas.openxmlformats.org/markup-compatibility/2006">
+        <mc:Choice xmlns:a14="http://schemas.microsoft.com/office/drawing/2010/main" Requires="a14">
+          <p:sp>
+            <p:nvSpPr>
+              <p:cNvPr id="6" name="TextBox 5">
+                <a:extLst>
+                  <a:ext uri="{FF2B5EF4-FFF2-40B4-BE49-F238E27FC236}">
+                    <a16:creationId xmlns:a16="http://schemas.microsoft.com/office/drawing/2014/main" id="{A65C96D6-89CC-83D8-DB78-AE34A991351F}"/>
+                  </a:ext>
+                </a:extLst>
+              </p:cNvPr>
+              <p:cNvSpPr txBox="1"/>
+              <p:nvPr/>
+            </p:nvSpPr>
+            <p:spPr>
+              <a:xfrm>
+                <a:off x="2386667" y="2269222"/>
+                <a:ext cx="650147" cy="646331"/>
+              </a:xfrm>
+              <a:prstGeom prst="rect">
+                <a:avLst/>
+              </a:prstGeom>
+              <a:noFill/>
+            </p:spPr>
+            <p:txBody>
+              <a:bodyPr wrap="square" rtlCol="0">
+                <a:spAutoFit/>
+              </a:bodyPr>
+              <a:lstStyle/>
+              <a:p>
+                <a14:m>
+                  <m:oMathPara xmlns:m="http://schemas.openxmlformats.org/officeDocument/2006/math">
+                    <m:oMathParaPr>
+                      <m:jc m:val="centerGroup"/>
+                    </m:oMathParaPr>
+                    <m:oMath xmlns:m="http://schemas.openxmlformats.org/officeDocument/2006/math">
+                      <m:r>
+                        <a:rPr lang="en-US" b="0" i="1" smtClean="0">
+                          <a:latin typeface="Cambria Math" panose="02040503050406030204" pitchFamily="18" charset="0"/>
+                          <a:sym typeface="Wingdings" panose="05000000000000000000" pitchFamily="2" charset="2"/>
+                        </a:rPr>
+                        <m:t>𝐴</m:t>
+                      </m:r>
+                      <m:r>
+                        <a:rPr lang="en-US" b="0" i="1" smtClean="0">
+                          <a:latin typeface="Cambria Math" panose="02040503050406030204" pitchFamily="18" charset="0"/>
+                          <a:sym typeface="Wingdings" panose="05000000000000000000" pitchFamily="2" charset="2"/>
+                        </a:rPr>
+                        <m:t> .</m:t>
+                      </m:r>
+                      <m:r>
+                        <a:rPr lang="en-US" b="0" i="1" smtClean="0">
+                          <a:latin typeface="Cambria Math" panose="02040503050406030204" pitchFamily="18" charset="0"/>
+                          <a:sym typeface="Wingdings" panose="05000000000000000000" pitchFamily="2" charset="2"/>
+                        </a:rPr>
+                        <m:t>𝐵</m:t>
+                      </m:r>
+                    </m:oMath>
+                  </m:oMathPara>
+                </a14:m>
+                <a:endParaRPr lang="en-US" dirty="0">
+                  <a:sym typeface="Wingdings" panose="05000000000000000000" pitchFamily="2" charset="2"/>
+                </a:endParaRPr>
+              </a:p>
+              <a:p>
+                <a:endParaRPr lang="en-US" dirty="0"/>
+              </a:p>
+            </p:txBody>
+          </p:sp>
+        </mc:Choice>
+        <mc:Fallback>
+          <p:sp>
+            <p:nvSpPr>
+              <p:cNvPr id="6" name="TextBox 5">
+                <a:extLst>
+                  <a:ext uri="{FF2B5EF4-FFF2-40B4-BE49-F238E27FC236}">
+                    <a16:creationId xmlns:a16="http://schemas.microsoft.com/office/drawing/2014/main" id="{A65C96D6-89CC-83D8-DB78-AE34A991351F}"/>
+                  </a:ext>
+                </a:extLst>
+              </p:cNvPr>
+              <p:cNvSpPr txBox="1">
+                <a:spLocks noRot="1" noChangeAspect="1" noMove="1" noResize="1" noEditPoints="1" noAdjustHandles="1" noChangeArrowheads="1" noChangeShapeType="1" noTextEdit="1"/>
+              </p:cNvSpPr>
+              <p:nvPr/>
+            </p:nvSpPr>
+            <p:spPr>
+              <a:xfrm>
+                <a:off x="2386667" y="2269222"/>
+                <a:ext cx="650147" cy="646331"/>
+              </a:xfrm>
+              <a:prstGeom prst="rect">
+                <a:avLst/>
+              </a:prstGeom>
+              <a:blipFill>
+                <a:blip r:embed="rId3"/>
+                <a:stretch>
+                  <a:fillRect/>
+                </a:stretch>
+              </a:blipFill>
+            </p:spPr>
+            <p:txBody>
+              <a:bodyPr/>
+              <a:lstStyle/>
+              <a:p>
+                <a:r>
+                  <a:rPr lang="en-US">
+                    <a:noFill/>
+                  </a:rPr>
+                  <a:t> </a:t>
+                </a:r>
+              </a:p>
+            </p:txBody>
+          </p:sp>
+        </mc:Fallback>
+      </mc:AlternateContent>
+      <mc:AlternateContent xmlns:mc="http://schemas.openxmlformats.org/markup-compatibility/2006">
+        <mc:Choice xmlns:a14="http://schemas.microsoft.com/office/drawing/2010/main" Requires="a14">
+          <p:sp>
+            <p:nvSpPr>
+              <p:cNvPr id="8" name="TextBox 7">
+                <a:extLst>
+                  <a:ext uri="{FF2B5EF4-FFF2-40B4-BE49-F238E27FC236}">
+                    <a16:creationId xmlns:a16="http://schemas.microsoft.com/office/drawing/2014/main" id="{A4D27392-E3E8-AE04-9B73-B0E569D7E67A}"/>
+                  </a:ext>
+                </a:extLst>
+              </p:cNvPr>
+              <p:cNvSpPr txBox="1"/>
+              <p:nvPr/>
+            </p:nvSpPr>
+            <p:spPr>
+              <a:xfrm>
+                <a:off x="2398203" y="3214973"/>
+                <a:ext cx="579889" cy="369332"/>
+              </a:xfrm>
+              <a:prstGeom prst="rect">
+                <a:avLst/>
+              </a:prstGeom>
+              <a:noFill/>
+            </p:spPr>
+            <p:txBody>
+              <a:bodyPr wrap="square">
+                <a:spAutoFit/>
+              </a:bodyPr>
+              <a:lstStyle/>
+              <a:p>
+                <a14:m>
+                  <m:oMathPara xmlns:m="http://schemas.openxmlformats.org/officeDocument/2006/math">
+                    <m:oMathParaPr>
+                      <m:jc m:val="centerGroup"/>
+                    </m:oMathParaPr>
+                    <m:oMath xmlns:m="http://schemas.openxmlformats.org/officeDocument/2006/math">
+                      <m:acc>
+                        <m:accPr>
+                          <m:chr m:val="̅"/>
+                          <m:ctrlPr>
+                            <a:rPr lang="en-US" i="1" smtClean="0">
+                              <a:latin typeface="Cambria Math" panose="02040503050406030204" pitchFamily="18" charset="0"/>
+                            </a:rPr>
+                          </m:ctrlPr>
+                        </m:accPr>
+                        <m:e>
+                          <m:r>
+                            <a:rPr lang="en-US" b="0" i="1" smtClean="0">
+                              <a:latin typeface="Cambria Math" panose="02040503050406030204" pitchFamily="18" charset="0"/>
+                            </a:rPr>
+                            <m:t>𝐴</m:t>
+                          </m:r>
+                          <m:r>
+                            <a:rPr lang="en-US" b="0" i="1" smtClean="0">
+                              <a:latin typeface="Cambria Math" panose="02040503050406030204" pitchFamily="18" charset="0"/>
+                            </a:rPr>
+                            <m:t>.</m:t>
+                          </m:r>
+                          <m:r>
+                            <a:rPr lang="en-US" b="0" i="1" smtClean="0">
+                              <a:latin typeface="Cambria Math" panose="02040503050406030204" pitchFamily="18" charset="0"/>
+                            </a:rPr>
+                            <m:t>𝐵</m:t>
+                          </m:r>
+                        </m:e>
+                      </m:acc>
+                    </m:oMath>
+                  </m:oMathPara>
+                </a14:m>
+                <a:endParaRPr lang="en-US" dirty="0"/>
+              </a:p>
+            </p:txBody>
+          </p:sp>
+        </mc:Choice>
+        <mc:Fallback>
+          <p:sp>
+            <p:nvSpPr>
+              <p:cNvPr id="8" name="TextBox 7">
+                <a:extLst>
+                  <a:ext uri="{FF2B5EF4-FFF2-40B4-BE49-F238E27FC236}">
+                    <a16:creationId xmlns:a16="http://schemas.microsoft.com/office/drawing/2014/main" id="{A4D27392-E3E8-AE04-9B73-B0E569D7E67A}"/>
+                  </a:ext>
+                </a:extLst>
+              </p:cNvPr>
+              <p:cNvSpPr txBox="1">
+                <a:spLocks noRot="1" noChangeAspect="1" noMove="1" noResize="1" noEditPoints="1" noAdjustHandles="1" noChangeArrowheads="1" noChangeShapeType="1" noTextEdit="1"/>
+              </p:cNvSpPr>
+              <p:nvPr/>
+            </p:nvSpPr>
+            <p:spPr>
+              <a:xfrm>
+                <a:off x="2398203" y="3214973"/>
+                <a:ext cx="579889" cy="369332"/>
+              </a:xfrm>
+              <a:prstGeom prst="rect">
+                <a:avLst/>
+              </a:prstGeom>
+              <a:blipFill>
+                <a:blip r:embed="rId4"/>
+                <a:stretch>
+                  <a:fillRect/>
+                </a:stretch>
+              </a:blipFill>
+            </p:spPr>
+            <p:txBody>
+              <a:bodyPr/>
+              <a:lstStyle/>
+              <a:p>
+                <a:r>
+                  <a:rPr lang="en-US">
+                    <a:noFill/>
+                  </a:rPr>
+                  <a:t> </a:t>
+                </a:r>
+              </a:p>
+            </p:txBody>
+          </p:sp>
+        </mc:Fallback>
+      </mc:AlternateContent>
+      <mc:AlternateContent xmlns:mc="http://schemas.openxmlformats.org/markup-compatibility/2006">
+        <mc:Choice xmlns:a14="http://schemas.microsoft.com/office/drawing/2010/main" Requires="a14">
+          <p:sp>
+            <p:nvSpPr>
+              <p:cNvPr id="10" name="TextBox 9">
+                <a:extLst>
+                  <a:ext uri="{FF2B5EF4-FFF2-40B4-BE49-F238E27FC236}">
+                    <a16:creationId xmlns:a16="http://schemas.microsoft.com/office/drawing/2014/main" id="{2453047D-6311-1B2A-9E7D-13D6101BF77B}"/>
+                  </a:ext>
+                </a:extLst>
+              </p:cNvPr>
+              <p:cNvSpPr txBox="1"/>
+              <p:nvPr/>
+            </p:nvSpPr>
+            <p:spPr>
+              <a:xfrm>
+                <a:off x="2336683" y="4160724"/>
+                <a:ext cx="579889" cy="369332"/>
+              </a:xfrm>
+              <a:prstGeom prst="rect">
+                <a:avLst/>
+              </a:prstGeom>
+              <a:noFill/>
+            </p:spPr>
+            <p:txBody>
+              <a:bodyPr wrap="square">
+                <a:spAutoFit/>
+              </a:bodyPr>
+              <a:lstStyle/>
+              <a:p>
+                <a14:m>
+                  <m:oMathPara xmlns:m="http://schemas.openxmlformats.org/officeDocument/2006/math">
+                    <m:oMathParaPr>
+                      <m:jc m:val="centerGroup"/>
+                    </m:oMathParaPr>
+                    <m:oMath xmlns:m="http://schemas.openxmlformats.org/officeDocument/2006/math">
+                      <m:acc>
+                        <m:accPr>
+                          <m:chr m:val="̅"/>
+                          <m:ctrlPr>
+                            <a:rPr lang="en-US" i="1" smtClean="0">
+                              <a:latin typeface="Cambria Math" panose="02040503050406030204" pitchFamily="18" charset="0"/>
+                            </a:rPr>
+                          </m:ctrlPr>
+                        </m:accPr>
+                        <m:e>
+                          <m:r>
+                            <a:rPr lang="en-US" b="0" i="1" smtClean="0">
+                              <a:latin typeface="Cambria Math" panose="02040503050406030204" pitchFamily="18" charset="0"/>
+                            </a:rPr>
+                            <m:t>𝐴</m:t>
+                          </m:r>
+                        </m:e>
+                      </m:acc>
+                    </m:oMath>
+                  </m:oMathPara>
+                </a14:m>
+                <a:endParaRPr lang="en-US" dirty="0"/>
+              </a:p>
+            </p:txBody>
+          </p:sp>
+        </mc:Choice>
+        <mc:Fallback>
+          <p:sp>
+            <p:nvSpPr>
+              <p:cNvPr id="10" name="TextBox 9">
+                <a:extLst>
+                  <a:ext uri="{FF2B5EF4-FFF2-40B4-BE49-F238E27FC236}">
+                    <a16:creationId xmlns:a16="http://schemas.microsoft.com/office/drawing/2014/main" id="{2453047D-6311-1B2A-9E7D-13D6101BF77B}"/>
+                  </a:ext>
+                </a:extLst>
+              </p:cNvPr>
+              <p:cNvSpPr txBox="1">
+                <a:spLocks noRot="1" noChangeAspect="1" noMove="1" noResize="1" noEditPoints="1" noAdjustHandles="1" noChangeArrowheads="1" noChangeShapeType="1" noTextEdit="1"/>
+              </p:cNvSpPr>
+              <p:nvPr/>
+            </p:nvSpPr>
+            <p:spPr>
+              <a:xfrm>
+                <a:off x="2336683" y="4160724"/>
+                <a:ext cx="579889" cy="369332"/>
+              </a:xfrm>
+              <a:prstGeom prst="rect">
+                <a:avLst/>
+              </a:prstGeom>
+              <a:blipFill>
+                <a:blip r:embed="rId5"/>
+                <a:stretch>
+                  <a:fillRect r="-27368"/>
+                </a:stretch>
+              </a:blipFill>
+            </p:spPr>
+            <p:txBody>
+              <a:bodyPr/>
+              <a:lstStyle/>
+              <a:p>
+                <a:r>
+                  <a:rPr lang="en-US">
+                    <a:noFill/>
+                  </a:rPr>
+                  <a:t> </a:t>
+                </a:r>
+              </a:p>
+            </p:txBody>
+          </p:sp>
+        </mc:Fallback>
+      </mc:AlternateContent>
+      <mc:AlternateContent xmlns:mc="http://schemas.openxmlformats.org/markup-compatibility/2006">
+        <mc:Choice xmlns:a14="http://schemas.microsoft.com/office/drawing/2010/main" Requires="a14">
+          <p:sp>
+            <p:nvSpPr>
+              <p:cNvPr id="12" name="TextBox 11">
+                <a:extLst>
+                  <a:ext uri="{FF2B5EF4-FFF2-40B4-BE49-F238E27FC236}">
+                    <a16:creationId xmlns:a16="http://schemas.microsoft.com/office/drawing/2014/main" id="{319C1AD9-B7E1-E94E-F295-2063EFA912DC}"/>
+                  </a:ext>
+                </a:extLst>
+              </p:cNvPr>
+              <p:cNvSpPr txBox="1"/>
+              <p:nvPr/>
+            </p:nvSpPr>
+            <p:spPr>
+              <a:xfrm>
+                <a:off x="5113090" y="2269222"/>
+                <a:ext cx="918594" cy="646331"/>
+              </a:xfrm>
+              <a:prstGeom prst="rect">
+                <a:avLst/>
+              </a:prstGeom>
+              <a:noFill/>
+            </p:spPr>
+            <p:txBody>
+              <a:bodyPr wrap="square">
+                <a:spAutoFit/>
+              </a:bodyPr>
+              <a:lstStyle/>
+              <a:p>
+                <a14:m>
+                  <m:oMathPara xmlns:m="http://schemas.openxmlformats.org/officeDocument/2006/math">
+                    <m:oMathParaPr>
+                      <m:jc m:val="centerGroup"/>
+                    </m:oMathParaPr>
+                    <m:oMath xmlns:m="http://schemas.openxmlformats.org/officeDocument/2006/math">
+                      <m:r>
+                        <a:rPr lang="en-US" b="0" i="1" smtClean="0">
+                          <a:latin typeface="Cambria Math" panose="02040503050406030204" pitchFamily="18" charset="0"/>
+                          <a:sym typeface="Wingdings" panose="05000000000000000000" pitchFamily="2" charset="2"/>
+                        </a:rPr>
+                        <m:t>𝐴</m:t>
+                      </m:r>
+                      <m:r>
+                        <a:rPr lang="en-US" b="0" i="1" smtClean="0">
+                          <a:latin typeface="Cambria Math" panose="02040503050406030204" pitchFamily="18" charset="0"/>
+                          <a:sym typeface="Wingdings" panose="05000000000000000000" pitchFamily="2" charset="2"/>
+                        </a:rPr>
+                        <m:t>+</m:t>
+                      </m:r>
+                      <m:r>
+                        <a:rPr lang="en-US" b="0" i="1" smtClean="0">
+                          <a:latin typeface="Cambria Math" panose="02040503050406030204" pitchFamily="18" charset="0"/>
+                          <a:sym typeface="Wingdings" panose="05000000000000000000" pitchFamily="2" charset="2"/>
+                        </a:rPr>
+                        <m:t>𝐵</m:t>
+                      </m:r>
+                    </m:oMath>
+                  </m:oMathPara>
+                </a14:m>
+                <a:endParaRPr lang="en-US" dirty="0">
+                  <a:sym typeface="Wingdings" panose="05000000000000000000" pitchFamily="2" charset="2"/>
+                </a:endParaRPr>
+              </a:p>
+              <a:p>
+                <a:endParaRPr lang="en-US" dirty="0"/>
+              </a:p>
+            </p:txBody>
+          </p:sp>
+        </mc:Choice>
+        <mc:Fallback>
+          <p:sp>
+            <p:nvSpPr>
+              <p:cNvPr id="12" name="TextBox 11">
+                <a:extLst>
+                  <a:ext uri="{FF2B5EF4-FFF2-40B4-BE49-F238E27FC236}">
+                    <a16:creationId xmlns:a16="http://schemas.microsoft.com/office/drawing/2014/main" id="{319C1AD9-B7E1-E94E-F295-2063EFA912DC}"/>
+                  </a:ext>
+                </a:extLst>
+              </p:cNvPr>
+              <p:cNvSpPr txBox="1">
+                <a:spLocks noRot="1" noChangeAspect="1" noMove="1" noResize="1" noEditPoints="1" noAdjustHandles="1" noChangeArrowheads="1" noChangeShapeType="1" noTextEdit="1"/>
+              </p:cNvSpPr>
+              <p:nvPr/>
+            </p:nvSpPr>
+            <p:spPr>
+              <a:xfrm>
+                <a:off x="5113090" y="2269222"/>
+                <a:ext cx="918594" cy="646331"/>
+              </a:xfrm>
+              <a:prstGeom prst="rect">
+                <a:avLst/>
+              </a:prstGeom>
+              <a:blipFill>
+                <a:blip r:embed="rId6"/>
+                <a:stretch>
+                  <a:fillRect/>
+                </a:stretch>
+              </a:blipFill>
+            </p:spPr>
+            <p:txBody>
+              <a:bodyPr/>
+              <a:lstStyle/>
+              <a:p>
+                <a:r>
+                  <a:rPr lang="en-US">
+                    <a:noFill/>
+                  </a:rPr>
+                  <a:t> </a:t>
+                </a:r>
+              </a:p>
+            </p:txBody>
+          </p:sp>
+        </mc:Fallback>
+      </mc:AlternateContent>
+      <mc:AlternateContent xmlns:mc="http://schemas.openxmlformats.org/markup-compatibility/2006">
+        <mc:Choice xmlns:a14="http://schemas.microsoft.com/office/drawing/2010/main" Requires="a14">
+          <p:sp>
+            <p:nvSpPr>
+              <p:cNvPr id="14" name="TextBox 13">
+                <a:extLst>
+                  <a:ext uri="{FF2B5EF4-FFF2-40B4-BE49-F238E27FC236}">
+                    <a16:creationId xmlns:a16="http://schemas.microsoft.com/office/drawing/2014/main" id="{ADA6EF8D-55B5-EED8-761B-57BA076D458B}"/>
+                  </a:ext>
+                </a:extLst>
+              </p:cNvPr>
+              <p:cNvSpPr txBox="1"/>
+              <p:nvPr/>
+            </p:nvSpPr>
+            <p:spPr>
+              <a:xfrm>
+                <a:off x="5113090" y="3214973"/>
+                <a:ext cx="798002" cy="369332"/>
+              </a:xfrm>
+              <a:prstGeom prst="rect">
+                <a:avLst/>
+              </a:prstGeom>
+              <a:noFill/>
+            </p:spPr>
+            <p:txBody>
+              <a:bodyPr wrap="square">
+                <a:spAutoFit/>
+              </a:bodyPr>
+              <a:lstStyle/>
+              <a:p>
+                <a14:m>
+                  <m:oMathPara xmlns:m="http://schemas.openxmlformats.org/officeDocument/2006/math">
+                    <m:oMathParaPr>
+                      <m:jc m:val="centerGroup"/>
+                    </m:oMathParaPr>
+                    <m:oMath xmlns:m="http://schemas.openxmlformats.org/officeDocument/2006/math">
+                      <m:acc>
+                        <m:accPr>
+                          <m:chr m:val="̅"/>
+                          <m:ctrlPr>
+                            <a:rPr lang="en-US" i="1" smtClean="0">
+                              <a:latin typeface="Cambria Math" panose="02040503050406030204" pitchFamily="18" charset="0"/>
+                            </a:rPr>
+                          </m:ctrlPr>
+                        </m:accPr>
+                        <m:e>
+                          <m:r>
+                            <a:rPr lang="en-US" b="0" i="1" smtClean="0">
+                              <a:latin typeface="Cambria Math" panose="02040503050406030204" pitchFamily="18" charset="0"/>
+                            </a:rPr>
+                            <m:t>𝐴</m:t>
+                          </m:r>
+                          <m:r>
+                            <a:rPr lang="en-US" b="0" i="1" smtClean="0">
+                              <a:latin typeface="Cambria Math" panose="02040503050406030204" pitchFamily="18" charset="0"/>
+                            </a:rPr>
+                            <m:t>+</m:t>
+                          </m:r>
+                          <m:r>
+                            <a:rPr lang="en-US" b="0" i="1" smtClean="0">
+                              <a:latin typeface="Cambria Math" panose="02040503050406030204" pitchFamily="18" charset="0"/>
+                            </a:rPr>
+                            <m:t>𝐵</m:t>
+                          </m:r>
+                        </m:e>
+                      </m:acc>
+                    </m:oMath>
+                  </m:oMathPara>
+                </a14:m>
+                <a:endParaRPr lang="en-US" dirty="0"/>
+              </a:p>
+            </p:txBody>
+          </p:sp>
+        </mc:Choice>
+        <mc:Fallback>
+          <p:sp>
+            <p:nvSpPr>
+              <p:cNvPr id="14" name="TextBox 13">
+                <a:extLst>
+                  <a:ext uri="{FF2B5EF4-FFF2-40B4-BE49-F238E27FC236}">
+                    <a16:creationId xmlns:a16="http://schemas.microsoft.com/office/drawing/2014/main" id="{ADA6EF8D-55B5-EED8-761B-57BA076D458B}"/>
+                  </a:ext>
+                </a:extLst>
+              </p:cNvPr>
+              <p:cNvSpPr txBox="1">
+                <a:spLocks noRot="1" noChangeAspect="1" noMove="1" noResize="1" noEditPoints="1" noAdjustHandles="1" noChangeArrowheads="1" noChangeShapeType="1" noTextEdit="1"/>
+              </p:cNvSpPr>
+              <p:nvPr/>
+            </p:nvSpPr>
+            <p:spPr>
+              <a:xfrm>
+                <a:off x="5113090" y="3214973"/>
+                <a:ext cx="798002" cy="369332"/>
+              </a:xfrm>
+              <a:prstGeom prst="rect">
+                <a:avLst/>
+              </a:prstGeom>
+              <a:blipFill>
+                <a:blip r:embed="rId7"/>
+                <a:stretch>
+                  <a:fillRect/>
+                </a:stretch>
+              </a:blipFill>
+            </p:spPr>
+            <p:txBody>
+              <a:bodyPr/>
+              <a:lstStyle/>
+              <a:p>
+                <a:r>
+                  <a:rPr lang="en-US">
+                    <a:noFill/>
+                  </a:rPr>
+                  <a:t> </a:t>
+                </a:r>
+              </a:p>
+            </p:txBody>
+          </p:sp>
+        </mc:Fallback>
+      </mc:AlternateContent>
+      <mc:AlternateContent xmlns:mc="http://schemas.openxmlformats.org/markup-compatibility/2006">
+        <mc:Choice xmlns:a14="http://schemas.microsoft.com/office/drawing/2010/main" Requires="a14">
+          <p:sp>
+            <p:nvSpPr>
+              <p:cNvPr id="16" name="TextBox 15">
+                <a:extLst>
+                  <a:ext uri="{FF2B5EF4-FFF2-40B4-BE49-F238E27FC236}">
+                    <a16:creationId xmlns:a16="http://schemas.microsoft.com/office/drawing/2014/main" id="{96F20778-59D5-5E67-0CCD-D0473185BA58}"/>
+                  </a:ext>
+                </a:extLst>
+              </p:cNvPr>
+              <p:cNvSpPr txBox="1"/>
+              <p:nvPr/>
+            </p:nvSpPr>
+            <p:spPr>
+              <a:xfrm>
+                <a:off x="5113090" y="4206646"/>
+                <a:ext cx="864065" cy="369332"/>
+              </a:xfrm>
+              <a:prstGeom prst="rect">
+                <a:avLst/>
+              </a:prstGeom>
+              <a:noFill/>
+            </p:spPr>
+            <p:txBody>
+              <a:bodyPr wrap="square">
+                <a:spAutoFit/>
+              </a:bodyPr>
+              <a:lstStyle/>
+              <a:p>
+                <a14:m>
+                  <m:oMathPara xmlns:m="http://schemas.openxmlformats.org/officeDocument/2006/math">
+                    <m:oMathParaPr>
+                      <m:jc m:val="centerGroup"/>
+                    </m:oMathParaPr>
+                    <m:oMath xmlns:m="http://schemas.openxmlformats.org/officeDocument/2006/math">
+                      <m:r>
+                        <a:rPr lang="en-US" b="0" i="1" dirty="0" smtClean="0">
+                          <a:latin typeface="Cambria Math" panose="02040503050406030204" pitchFamily="18" charset="0"/>
+                          <a:sym typeface="Wingdings" panose="05000000000000000000" pitchFamily="2" charset="2"/>
+                        </a:rPr>
+                        <m:t>𝐴</m:t>
+                      </m:r>
+                      <m:r>
+                        <a:rPr lang="en-US" b="0" i="1" dirty="0" smtClean="0">
+                          <a:latin typeface="Cambria Math" panose="02040503050406030204" pitchFamily="18" charset="0"/>
+                          <a:sym typeface="Wingdings" panose="05000000000000000000" pitchFamily="2" charset="2"/>
+                        </a:rPr>
+                        <m:t>⊕</m:t>
+                      </m:r>
+                      <m:r>
+                        <a:rPr lang="en-US" b="0" i="1" dirty="0" smtClean="0">
+                          <a:latin typeface="Cambria Math" panose="02040503050406030204" pitchFamily="18" charset="0"/>
+                          <a:sym typeface="Wingdings" panose="05000000000000000000" pitchFamily="2" charset="2"/>
+                        </a:rPr>
+                        <m:t>𝐵</m:t>
+                      </m:r>
+                    </m:oMath>
+                  </m:oMathPara>
+                </a14:m>
+                <a:endParaRPr lang="en-US" dirty="0"/>
+              </a:p>
+            </p:txBody>
+          </p:sp>
+        </mc:Choice>
+        <mc:Fallback>
+          <p:sp>
+            <p:nvSpPr>
+              <p:cNvPr id="16" name="TextBox 15">
+                <a:extLst>
+                  <a:ext uri="{FF2B5EF4-FFF2-40B4-BE49-F238E27FC236}">
+                    <a16:creationId xmlns:a16="http://schemas.microsoft.com/office/drawing/2014/main" id="{96F20778-59D5-5E67-0CCD-D0473185BA58}"/>
+                  </a:ext>
+                </a:extLst>
+              </p:cNvPr>
+              <p:cNvSpPr txBox="1">
+                <a:spLocks noRot="1" noChangeAspect="1" noMove="1" noResize="1" noEditPoints="1" noAdjustHandles="1" noChangeArrowheads="1" noChangeShapeType="1" noTextEdit="1"/>
+              </p:cNvSpPr>
+              <p:nvPr/>
+            </p:nvSpPr>
+            <p:spPr>
+              <a:xfrm>
+                <a:off x="5113090" y="4206646"/>
+                <a:ext cx="864065" cy="369332"/>
+              </a:xfrm>
+              <a:prstGeom prst="rect">
+                <a:avLst/>
+              </a:prstGeom>
+              <a:blipFill>
+                <a:blip r:embed="rId8"/>
+                <a:stretch>
+                  <a:fillRect b="-4918"/>
+                </a:stretch>
+              </a:blipFill>
+            </p:spPr>
+            <p:txBody>
+              <a:bodyPr/>
+              <a:lstStyle/>
+              <a:p>
+                <a:r>
+                  <a:rPr lang="en-US">
+                    <a:noFill/>
+                  </a:rPr>
+                  <a:t> </a:t>
+                </a:r>
+              </a:p>
+            </p:txBody>
+          </p:sp>
+        </mc:Fallback>
+      </mc:AlternateContent>
+      <mc:AlternateContent xmlns:mc="http://schemas.openxmlformats.org/markup-compatibility/2006">
+        <mc:Choice xmlns:a14="http://schemas.microsoft.com/office/drawing/2010/main" Requires="a14">
+          <p:sp>
+            <p:nvSpPr>
+              <p:cNvPr id="18" name="TextBox 17">
+                <a:extLst>
+                  <a:ext uri="{FF2B5EF4-FFF2-40B4-BE49-F238E27FC236}">
+                    <a16:creationId xmlns:a16="http://schemas.microsoft.com/office/drawing/2014/main" id="{FE7254A3-0FB9-8C25-720A-63AC970A119F}"/>
+                  </a:ext>
+                </a:extLst>
+              </p:cNvPr>
+              <p:cNvSpPr txBox="1"/>
+              <p:nvPr/>
+            </p:nvSpPr>
+            <p:spPr>
+              <a:xfrm>
+                <a:off x="5113090" y="5013653"/>
+                <a:ext cx="592472" cy="377091"/>
+              </a:xfrm>
+              <a:prstGeom prst="rect">
+                <a:avLst/>
+              </a:prstGeom>
+              <a:noFill/>
+            </p:spPr>
+            <p:txBody>
+              <a:bodyPr wrap="square">
+                <a:spAutoFit/>
+              </a:bodyPr>
+              <a:lstStyle/>
+              <a:p>
+                <a14:m>
+                  <m:oMathPara xmlns:m="http://schemas.openxmlformats.org/officeDocument/2006/math">
+                    <m:oMathParaPr>
+                      <m:jc m:val="centerGroup"/>
+                    </m:oMathParaPr>
+                    <m:oMath xmlns:m="http://schemas.openxmlformats.org/officeDocument/2006/math">
+                      <m:acc>
+                        <m:accPr>
+                          <m:chr m:val="̅"/>
+                          <m:ctrlPr>
+                            <a:rPr lang="en-US" b="0" i="1" dirty="0" smtClean="0">
+                              <a:latin typeface="Cambria Math" panose="02040503050406030204" pitchFamily="18" charset="0"/>
+                              <a:sym typeface="Wingdings" panose="05000000000000000000" pitchFamily="2" charset="2"/>
+                            </a:rPr>
+                          </m:ctrlPr>
+                        </m:accPr>
+                        <m:e>
+                          <m:r>
+                            <a:rPr lang="en-US" i="1" dirty="0">
+                              <a:latin typeface="Cambria Math" panose="02040503050406030204" pitchFamily="18" charset="0"/>
+                              <a:sym typeface="Wingdings" panose="05000000000000000000" pitchFamily="2" charset="2"/>
+                            </a:rPr>
+                            <m:t>𝐴</m:t>
+                          </m:r>
+                          <m:r>
+                            <a:rPr lang="en-US" i="1" dirty="0">
+                              <a:latin typeface="Cambria Math" panose="02040503050406030204" pitchFamily="18" charset="0"/>
+                              <a:sym typeface="Wingdings" panose="05000000000000000000" pitchFamily="2" charset="2"/>
+                            </a:rPr>
+                            <m:t>⊕</m:t>
+                          </m:r>
+                          <m:r>
+                            <a:rPr lang="en-US" i="1" dirty="0">
+                              <a:latin typeface="Cambria Math" panose="02040503050406030204" pitchFamily="18" charset="0"/>
+                              <a:sym typeface="Wingdings" panose="05000000000000000000" pitchFamily="2" charset="2"/>
+                            </a:rPr>
+                            <m:t>𝐵</m:t>
+                          </m:r>
+                        </m:e>
+                      </m:acc>
+                    </m:oMath>
+                  </m:oMathPara>
+                </a14:m>
+                <a:endParaRPr lang="en-US" dirty="0"/>
+              </a:p>
+            </p:txBody>
+          </p:sp>
+        </mc:Choice>
+        <mc:Fallback>
+          <p:sp>
+            <p:nvSpPr>
+              <p:cNvPr id="18" name="TextBox 17">
+                <a:extLst>
+                  <a:ext uri="{FF2B5EF4-FFF2-40B4-BE49-F238E27FC236}">
+                    <a16:creationId xmlns:a16="http://schemas.microsoft.com/office/drawing/2014/main" id="{FE7254A3-0FB9-8C25-720A-63AC970A119F}"/>
+                  </a:ext>
+                </a:extLst>
+              </p:cNvPr>
+              <p:cNvSpPr txBox="1">
+                <a:spLocks noRot="1" noChangeAspect="1" noMove="1" noResize="1" noEditPoints="1" noAdjustHandles="1" noChangeArrowheads="1" noChangeShapeType="1" noTextEdit="1"/>
+              </p:cNvSpPr>
+              <p:nvPr/>
+            </p:nvSpPr>
+            <p:spPr>
+              <a:xfrm>
+                <a:off x="5113090" y="5013653"/>
+                <a:ext cx="592472" cy="377091"/>
+              </a:xfrm>
+              <a:prstGeom prst="rect">
+                <a:avLst/>
+              </a:prstGeom>
+              <a:blipFill>
+                <a:blip r:embed="rId9"/>
+                <a:stretch>
+                  <a:fillRect r="-35052" b="-4839"/>
+                </a:stretch>
+              </a:blipFill>
+            </p:spPr>
+            <p:txBody>
+              <a:bodyPr/>
+              <a:lstStyle/>
+              <a:p>
+                <a:r>
+                  <a:rPr lang="en-US">
+                    <a:noFill/>
+                  </a:rPr>
+                  <a:t> </a:t>
+                </a:r>
+              </a:p>
+            </p:txBody>
+          </p:sp>
+        </mc:Fallback>
+      </mc:AlternateContent>
+    </p:spTree>
+    <p:extLst>
+      <p:ext uri="{BB962C8B-B14F-4D97-AF65-F5344CB8AC3E}">
+        <p14:creationId xmlns:p14="http://schemas.microsoft.com/office/powerpoint/2010/main" val="2369491975"/>
+      </p:ext>
+    </p:extLst>
+  </p:cSld>
+  <p:clrMapOvr>
+    <a:masterClrMapping/>
+  </p:clrMapOvr>
+</p:sld>
+</file>
+
+<file path=ppt/slides/slide117.xml><?xml version="1.0" encoding="utf-8"?>
+<p:sld xmlns:a="http://schemas.openxmlformats.org/drawingml/2006/main" xmlns:r="http://schemas.openxmlformats.org/officeDocument/2006/relationships" xmlns:p="http://schemas.openxmlformats.org/presentationml/2006/main">
+  <p:cSld>
+    <p:spTree>
+      <p:nvGrpSpPr>
+        <p:cNvPr id="1" name=""/>
+        <p:cNvGrpSpPr/>
+        <p:nvPr/>
+      </p:nvGrpSpPr>
+      <p:grpSpPr>
+        <a:xfrm>
+          <a:off x="0" y="0"/>
+          <a:ext cx="0" cy="0"/>
+          <a:chOff x="0" y="0"/>
+          <a:chExt cx="0" cy="0"/>
+        </a:xfrm>
+      </p:grpSpPr>
+      <p:sp>
+        <p:nvSpPr>
+          <p:cNvPr id="2" name="Title 1">
+            <a:extLst>
+              <a:ext uri="{FF2B5EF4-FFF2-40B4-BE49-F238E27FC236}">
+                <a16:creationId xmlns:a16="http://schemas.microsoft.com/office/drawing/2014/main" id="{6A85419E-9061-2D41-0402-D7E929B4929A}"/>
+              </a:ext>
+            </a:extLst>
+          </p:cNvPr>
+          <p:cNvSpPr>
+            <a:spLocks noGrp="1"/>
+          </p:cNvSpPr>
+          <p:nvPr>
+            <p:ph type="title"/>
+          </p:nvPr>
+        </p:nvSpPr>
+        <p:spPr/>
+        <p:txBody>
+          <a:bodyPr/>
+          <a:lstStyle/>
+          <a:p>
+            <a:r>
+              <a:rPr lang="en-US" dirty="0"/>
+              <a:t>In class exercises</a:t>
+            </a:r>
+          </a:p>
+        </p:txBody>
+      </p:sp>
+      <p:sp>
+        <p:nvSpPr>
+          <p:cNvPr id="3" name="Content Placeholder 2">
+            <a:extLst>
+              <a:ext uri="{FF2B5EF4-FFF2-40B4-BE49-F238E27FC236}">
+                <a16:creationId xmlns:a16="http://schemas.microsoft.com/office/drawing/2014/main" id="{8BF6F0FA-37D1-9644-1AA0-6C234F992DB8}"/>
+              </a:ext>
+            </a:extLst>
+          </p:cNvPr>
+          <p:cNvSpPr>
+            <a:spLocks noGrp="1"/>
+          </p:cNvSpPr>
+          <p:nvPr>
+            <p:ph idx="1"/>
+          </p:nvPr>
+        </p:nvSpPr>
+        <p:spPr/>
+        <p:txBody>
+          <a:bodyPr/>
+          <a:lstStyle/>
+          <a:p>
+            <a:r>
+              <a:rPr lang="en-US"/>
+              <a:t>Boolean Expression</a:t>
+            </a:r>
+            <a:r>
+              <a:rPr lang="en-US" dirty="0"/>
+              <a:t>… </a:t>
+            </a:r>
+          </a:p>
+        </p:txBody>
+      </p:sp>
+    </p:spTree>
+    <p:extLst>
+      <p:ext uri="{BB962C8B-B14F-4D97-AF65-F5344CB8AC3E}">
+        <p14:creationId xmlns:p14="http://schemas.microsoft.com/office/powerpoint/2010/main" val="380603004"/>
       </p:ext>
     </p:extLst>
   </p:cSld>

--- a/all/ExploringCSConceptsViaACSLCompetitions_all.pptx
+++ b/all/ExploringCSConceptsViaACSLCompetitions_all.pptx
@@ -5,7 +5,7 @@
     <p:sldMasterId id="2147483648" r:id="rId1"/>
   </p:sldMasterIdLst>
   <p:notesMasterIdLst>
-    <p:notesMasterId r:id="rId119"/>
+    <p:notesMasterId r:id="rId124"/>
   </p:notesMasterIdLst>
   <p:sldIdLst>
     <p:sldId id="256" r:id="rId2"/>
@@ -125,6 +125,11 @@
     <p:sldId id="387" r:id="rId116"/>
     <p:sldId id="388" r:id="rId117"/>
     <p:sldId id="389" r:id="rId118"/>
+    <p:sldId id="390" r:id="rId119"/>
+    <p:sldId id="392" r:id="rId120"/>
+    <p:sldId id="393" r:id="rId121"/>
+    <p:sldId id="395" r:id="rId122"/>
+    <p:sldId id="391" r:id="rId123"/>
   </p:sldIdLst>
   <p:sldSz cx="12192000" cy="6858000"/>
   <p:notesSz cx="7010400" cy="9296400"/>
@@ -420,6 +425,33 @@
 </inkml:ink>
 </file>
 
+<file path=ppt/ink/ink8.xml><?xml version="1.0" encoding="utf-8"?>
+<inkml:ink xmlns:inkml="http://www.w3.org/2003/InkML">
+  <inkml:definitions>
+    <inkml:context xml:id="ctx0">
+      <inkml:inkSource xml:id="inkSrc0">
+        <inkml:traceFormat>
+          <inkml:channel name="X" type="integer" min="-2.14748E9" max="2.14748E9" units="cm"/>
+          <inkml:channel name="Y" type="integer" min="-2.14748E9" max="2.14748E9" units="cm"/>
+          <inkml:channel name="F" type="integer" max="32767" units="dev"/>
+        </inkml:traceFormat>
+        <inkml:channelProperties>
+          <inkml:channelProperty channel="X" name="resolution" value="1000" units="1/cm"/>
+          <inkml:channelProperty channel="Y" name="resolution" value="1000" units="1/cm"/>
+          <inkml:channelProperty channel="F" name="resolution" value="0" units="1/dev"/>
+        </inkml:channelProperties>
+      </inkml:inkSource>
+      <inkml:timestamp xml:id="ts0" timeString="2026-04-23T21:10:15.379"/>
+    </inkml:context>
+    <inkml:brush xml:id="br0">
+      <inkml:brushProperty name="width" value="0.05" units="cm"/>
+      <inkml:brushProperty name="height" value="0.05" units="cm"/>
+    </inkml:brush>
+  </inkml:definitions>
+  <inkml:trace contextRef="#ctx0" brushRef="#br0">17 14 3618,'0'0'8502,"-1"-13"-6722,1 13-1863,-1 0 0,1 0 0,0 0 0,0 0 0,-1 0 0,1 0 1,0 0-1,0 0 0,-1 0 0,1 0 0,0 0 0,-1 0 0,1 0 1,0 0-1,0 0 0,-1 1 0,1-1 0,0 0 0,0 0 0,0 0 0,-1 0 1,1 1-1,0-1 0,0 0 0,0 0 0,0 1 0,-1-1 0,1 0 1,0 0-1,0 0 0,0 1 0,0-1 0,0 0 0,0 1 0,0-1 0,0 0 1,0 0-1,0 1 0,0-1 0,0 0 0,0 0 0,0 1 0,0-1 1,0 0-1,0 0 0,0 1 0,0-1 0,0 1 0,-8 1-5354</inkml:trace>
+</inkml:ink>
+</file>
+
 <file path=ppt/notesMasters/notesMaster1.xml><?xml version="1.0" encoding="utf-8"?>
 <p:notesMaster xmlns:a="http://schemas.openxmlformats.org/drawingml/2006/main" xmlns:r="http://schemas.openxmlformats.org/officeDocument/2006/relationships" xmlns:p="http://schemas.openxmlformats.org/presentationml/2006/main">
   <p:cSld>
@@ -502,7 +534,7 @@
           <a:p>
             <a:fld id="{15653688-98A8-4F3B-A740-8E6568AE1BCB}" type="datetimeFigureOut">
               <a:rPr lang="en-US" smtClean="0"/>
-              <a:t>4/9/2026</a:t>
+              <a:t>4/23/2026</a:t>
             </a:fld>
             <a:endParaRPr lang="en-US"/>
           </a:p>
@@ -2228,7 +2260,7 @@
           <a:p>
             <a:fld id="{20CB266D-A331-4A79-AB46-FEF40B16CF9B}" type="datetimeFigureOut">
               <a:rPr lang="en-US" smtClean="0"/>
-              <a:t>4/9/2026</a:t>
+              <a:t>4/23/2026</a:t>
             </a:fld>
             <a:endParaRPr lang="en-US"/>
           </a:p>
@@ -2426,7 +2458,7 @@
           <a:p>
             <a:fld id="{20CB266D-A331-4A79-AB46-FEF40B16CF9B}" type="datetimeFigureOut">
               <a:rPr lang="en-US" smtClean="0"/>
-              <a:t>4/9/2026</a:t>
+              <a:t>4/23/2026</a:t>
             </a:fld>
             <a:endParaRPr lang="en-US"/>
           </a:p>
@@ -2634,7 +2666,7 @@
           <a:p>
             <a:fld id="{20CB266D-A331-4A79-AB46-FEF40B16CF9B}" type="datetimeFigureOut">
               <a:rPr lang="en-US" smtClean="0"/>
-              <a:t>4/9/2026</a:t>
+              <a:t>4/23/2026</a:t>
             </a:fld>
             <a:endParaRPr lang="en-US"/>
           </a:p>
@@ -2832,7 +2864,7 @@
           <a:p>
             <a:fld id="{20CB266D-A331-4A79-AB46-FEF40B16CF9B}" type="datetimeFigureOut">
               <a:rPr lang="en-US" smtClean="0"/>
-              <a:t>4/9/2026</a:t>
+              <a:t>4/23/2026</a:t>
             </a:fld>
             <a:endParaRPr lang="en-US"/>
           </a:p>
@@ -3107,7 +3139,7 @@
           <a:p>
             <a:fld id="{20CB266D-A331-4A79-AB46-FEF40B16CF9B}" type="datetimeFigureOut">
               <a:rPr lang="en-US" smtClean="0"/>
-              <a:t>4/9/2026</a:t>
+              <a:t>4/23/2026</a:t>
             </a:fld>
             <a:endParaRPr lang="en-US"/>
           </a:p>
@@ -3372,7 +3404,7 @@
           <a:p>
             <a:fld id="{20CB266D-A331-4A79-AB46-FEF40B16CF9B}" type="datetimeFigureOut">
               <a:rPr lang="en-US" smtClean="0"/>
-              <a:t>4/9/2026</a:t>
+              <a:t>4/23/2026</a:t>
             </a:fld>
             <a:endParaRPr lang="en-US"/>
           </a:p>
@@ -3784,7 +3816,7 @@
           <a:p>
             <a:fld id="{20CB266D-A331-4A79-AB46-FEF40B16CF9B}" type="datetimeFigureOut">
               <a:rPr lang="en-US" smtClean="0"/>
-              <a:t>4/9/2026</a:t>
+              <a:t>4/23/2026</a:t>
             </a:fld>
             <a:endParaRPr lang="en-US"/>
           </a:p>
@@ -3925,7 +3957,7 @@
           <a:p>
             <a:fld id="{20CB266D-A331-4A79-AB46-FEF40B16CF9B}" type="datetimeFigureOut">
               <a:rPr lang="en-US" smtClean="0"/>
-              <a:t>4/9/2026</a:t>
+              <a:t>4/23/2026</a:t>
             </a:fld>
             <a:endParaRPr lang="en-US"/>
           </a:p>
@@ -4038,7 +4070,7 @@
           <a:p>
             <a:fld id="{20CB266D-A331-4A79-AB46-FEF40B16CF9B}" type="datetimeFigureOut">
               <a:rPr lang="en-US" smtClean="0"/>
-              <a:t>4/9/2026</a:t>
+              <a:t>4/23/2026</a:t>
             </a:fld>
             <a:endParaRPr lang="en-US"/>
           </a:p>
@@ -4349,7 +4381,7 @@
           <a:p>
             <a:fld id="{20CB266D-A331-4A79-AB46-FEF40B16CF9B}" type="datetimeFigureOut">
               <a:rPr lang="en-US" smtClean="0"/>
-              <a:t>4/9/2026</a:t>
+              <a:t>4/23/2026</a:t>
             </a:fld>
             <a:endParaRPr lang="en-US"/>
           </a:p>
@@ -4637,7 +4669,7 @@
           <a:p>
             <a:fld id="{20CB266D-A331-4A79-AB46-FEF40B16CF9B}" type="datetimeFigureOut">
               <a:rPr lang="en-US" smtClean="0"/>
-              <a:t>4/9/2026</a:t>
+              <a:t>4/23/2026</a:t>
             </a:fld>
             <a:endParaRPr lang="en-US"/>
           </a:p>
@@ -4878,7 +4910,7 @@
           <a:p>
             <a:fld id="{20CB266D-A331-4A79-AB46-FEF40B16CF9B}" type="datetimeFigureOut">
               <a:rPr lang="en-US" smtClean="0"/>
-              <a:t>4/9/2026</a:t>
+              <a:t>4/23/2026</a:t>
             </a:fld>
             <a:endParaRPr lang="en-US"/>
           </a:p>
@@ -8180,8 +8212,8 @@
           </a:xfrm>
         </p:spPr>
       </p:pic>
-      <mc:AlternateContent xmlns:mc="http://schemas.openxmlformats.org/markup-compatibility/2006">
-        <mc:Choice xmlns:a14="http://schemas.microsoft.com/office/drawing/2010/main" Requires="a14">
+      <mc:AlternateContent xmlns:mc="http://schemas.openxmlformats.org/markup-compatibility/2006" xmlns:a14="http://schemas.microsoft.com/office/drawing/2010/main">
+        <mc:Choice Requires="a14">
           <p:sp>
             <p:nvSpPr>
               <p:cNvPr id="6" name="TextBox 5">
@@ -8210,6 +8242,7 @@
               </a:bodyPr>
               <a:lstStyle/>
               <a:p>
+                <a:pPr/>
                 <a14:m>
                   <m:oMathPara xmlns:m="http://schemas.openxmlformats.org/officeDocument/2006/math">
                     <m:oMathParaPr>
@@ -8250,7 +8283,7 @@
             </p:txBody>
           </p:sp>
         </mc:Choice>
-        <mc:Fallback>
+        <mc:Fallback xmlns="">
           <p:sp>
             <p:nvSpPr>
               <p:cNvPr id="6" name="TextBox 5">
@@ -8295,8 +8328,8 @@
           </p:sp>
         </mc:Fallback>
       </mc:AlternateContent>
-      <mc:AlternateContent xmlns:mc="http://schemas.openxmlformats.org/markup-compatibility/2006">
-        <mc:Choice xmlns:a14="http://schemas.microsoft.com/office/drawing/2010/main" Requires="a14">
+      <mc:AlternateContent xmlns:mc="http://schemas.openxmlformats.org/markup-compatibility/2006" xmlns:a14="http://schemas.microsoft.com/office/drawing/2010/main">
+        <mc:Choice Requires="a14">
           <p:sp>
             <p:nvSpPr>
               <p:cNvPr id="8" name="TextBox 7">
@@ -8325,6 +8358,7 @@
               </a:bodyPr>
               <a:lstStyle/>
               <a:p>
+                <a:pPr/>
                 <a14:m>
                   <m:oMathPara xmlns:m="http://schemas.openxmlformats.org/officeDocument/2006/math">
                     <m:oMathParaPr>
@@ -8369,7 +8403,7 @@
             </p:txBody>
           </p:sp>
         </mc:Choice>
-        <mc:Fallback>
+        <mc:Fallback xmlns="">
           <p:sp>
             <p:nvSpPr>
               <p:cNvPr id="8" name="TextBox 7">
@@ -8414,8 +8448,8 @@
           </p:sp>
         </mc:Fallback>
       </mc:AlternateContent>
-      <mc:AlternateContent xmlns:mc="http://schemas.openxmlformats.org/markup-compatibility/2006">
-        <mc:Choice xmlns:a14="http://schemas.microsoft.com/office/drawing/2010/main" Requires="a14">
+      <mc:AlternateContent xmlns:mc="http://schemas.openxmlformats.org/markup-compatibility/2006" xmlns:a14="http://schemas.microsoft.com/office/drawing/2010/main">
+        <mc:Choice Requires="a14">
           <p:sp>
             <p:nvSpPr>
               <p:cNvPr id="10" name="TextBox 9">
@@ -8444,6 +8478,7 @@
               </a:bodyPr>
               <a:lstStyle/>
               <a:p>
+                <a:pPr/>
                 <a14:m>
                   <m:oMathPara xmlns:m="http://schemas.openxmlformats.org/officeDocument/2006/math">
                     <m:oMathParaPr>
@@ -8476,7 +8511,7 @@
             </p:txBody>
           </p:sp>
         </mc:Choice>
-        <mc:Fallback>
+        <mc:Fallback xmlns="">
           <p:sp>
             <p:nvSpPr>
               <p:cNvPr id="10" name="TextBox 9">
@@ -8521,8 +8556,8 @@
           </p:sp>
         </mc:Fallback>
       </mc:AlternateContent>
-      <mc:AlternateContent xmlns:mc="http://schemas.openxmlformats.org/markup-compatibility/2006">
-        <mc:Choice xmlns:a14="http://schemas.microsoft.com/office/drawing/2010/main" Requires="a14">
+      <mc:AlternateContent xmlns:mc="http://schemas.openxmlformats.org/markup-compatibility/2006" xmlns:a14="http://schemas.microsoft.com/office/drawing/2010/main">
+        <mc:Choice Requires="a14">
           <p:sp>
             <p:nvSpPr>
               <p:cNvPr id="12" name="TextBox 11">
@@ -8551,6 +8586,7 @@
               </a:bodyPr>
               <a:lstStyle/>
               <a:p>
+                <a:pPr/>
                 <a14:m>
                   <m:oMathPara xmlns:m="http://schemas.openxmlformats.org/officeDocument/2006/math">
                     <m:oMathParaPr>
@@ -8591,7 +8627,7 @@
             </p:txBody>
           </p:sp>
         </mc:Choice>
-        <mc:Fallback>
+        <mc:Fallback xmlns="">
           <p:sp>
             <p:nvSpPr>
               <p:cNvPr id="12" name="TextBox 11">
@@ -8636,8 +8672,8 @@
           </p:sp>
         </mc:Fallback>
       </mc:AlternateContent>
-      <mc:AlternateContent xmlns:mc="http://schemas.openxmlformats.org/markup-compatibility/2006">
-        <mc:Choice xmlns:a14="http://schemas.microsoft.com/office/drawing/2010/main" Requires="a14">
+      <mc:AlternateContent xmlns:mc="http://schemas.openxmlformats.org/markup-compatibility/2006" xmlns:a14="http://schemas.microsoft.com/office/drawing/2010/main">
+        <mc:Choice Requires="a14">
           <p:sp>
             <p:nvSpPr>
               <p:cNvPr id="14" name="TextBox 13">
@@ -8666,6 +8702,7 @@
               </a:bodyPr>
               <a:lstStyle/>
               <a:p>
+                <a:pPr/>
                 <a14:m>
                   <m:oMathPara xmlns:m="http://schemas.openxmlformats.org/officeDocument/2006/math">
                     <m:oMathParaPr>
@@ -8710,7 +8747,7 @@
             </p:txBody>
           </p:sp>
         </mc:Choice>
-        <mc:Fallback>
+        <mc:Fallback xmlns="">
           <p:sp>
             <p:nvSpPr>
               <p:cNvPr id="14" name="TextBox 13">
@@ -8755,8 +8792,8 @@
           </p:sp>
         </mc:Fallback>
       </mc:AlternateContent>
-      <mc:AlternateContent xmlns:mc="http://schemas.openxmlformats.org/markup-compatibility/2006">
-        <mc:Choice xmlns:a14="http://schemas.microsoft.com/office/drawing/2010/main" Requires="a14">
+      <mc:AlternateContent xmlns:mc="http://schemas.openxmlformats.org/markup-compatibility/2006" xmlns:a14="http://schemas.microsoft.com/office/drawing/2010/main">
+        <mc:Choice Requires="a14">
           <p:sp>
             <p:nvSpPr>
               <p:cNvPr id="16" name="TextBox 15">
@@ -8785,6 +8822,7 @@
               </a:bodyPr>
               <a:lstStyle/>
               <a:p>
+                <a:pPr/>
                 <a14:m>
                   <m:oMathPara xmlns:m="http://schemas.openxmlformats.org/officeDocument/2006/math">
                     <m:oMathParaPr>
@@ -8820,7 +8858,7 @@
             </p:txBody>
           </p:sp>
         </mc:Choice>
-        <mc:Fallback>
+        <mc:Fallback xmlns="">
           <p:sp>
             <p:nvSpPr>
               <p:cNvPr id="16" name="TextBox 15">
@@ -8865,8 +8903,8 @@
           </p:sp>
         </mc:Fallback>
       </mc:AlternateContent>
-      <mc:AlternateContent xmlns:mc="http://schemas.openxmlformats.org/markup-compatibility/2006">
-        <mc:Choice xmlns:a14="http://schemas.microsoft.com/office/drawing/2010/main" Requires="a14">
+      <mc:AlternateContent xmlns:mc="http://schemas.openxmlformats.org/markup-compatibility/2006" xmlns:a14="http://schemas.microsoft.com/office/drawing/2010/main">
+        <mc:Choice Requires="a14">
           <p:sp>
             <p:nvSpPr>
               <p:cNvPr id="18" name="TextBox 17">
@@ -8895,6 +8933,7 @@
               </a:bodyPr>
               <a:lstStyle/>
               <a:p>
+                <a:pPr/>
                 <a14:m>
                   <m:oMathPara xmlns:m="http://schemas.openxmlformats.org/officeDocument/2006/math">
                     <m:oMathParaPr>
@@ -8943,7 +8982,7 @@
             </p:txBody>
           </p:sp>
         </mc:Choice>
-        <mc:Fallback>
+        <mc:Fallback xmlns="">
           <p:sp>
             <p:nvSpPr>
               <p:cNvPr id="18" name="TextBox 17">
@@ -9041,17 +9080,457 @@
           <a:p>
             <a:r>
               <a:rPr lang="en-US" dirty="0"/>
-              <a:t>In class exercises</a:t>
+              <a:t>Create a logic diagram …</a:t>
             </a:r>
           </a:p>
         </p:txBody>
       </p:sp>
+      <mc:AlternateContent xmlns:mc="http://schemas.openxmlformats.org/markup-compatibility/2006">
+        <mc:Choice xmlns:a14="http://schemas.microsoft.com/office/drawing/2010/main" Requires="a14">
+          <p:sp>
+            <p:nvSpPr>
+              <p:cNvPr id="3" name="Content Placeholder 2">
+                <a:extLst>
+                  <a:ext uri="{FF2B5EF4-FFF2-40B4-BE49-F238E27FC236}">
+                    <a16:creationId xmlns:a16="http://schemas.microsoft.com/office/drawing/2014/main" id="{8BF6F0FA-37D1-9644-1AA0-6C234F992DB8}"/>
+                  </a:ext>
+                </a:extLst>
+              </p:cNvPr>
+              <p:cNvSpPr>
+                <a:spLocks noGrp="1"/>
+              </p:cNvSpPr>
+              <p:nvPr>
+                <p:ph idx="1"/>
+              </p:nvPr>
+            </p:nvSpPr>
+            <p:spPr/>
+            <p:txBody>
+              <a:bodyPr/>
+              <a:lstStyle/>
+              <a:p>
+                <a14:m>
+                  <m:oMath xmlns:m="http://schemas.openxmlformats.org/officeDocument/2006/math">
+                    <m:d>
+                      <m:dPr>
+                        <m:ctrlPr>
+                          <a:rPr lang="en-US" i="1" smtClean="0">
+                            <a:latin typeface="Cambria Math" panose="02040503050406030204" pitchFamily="18" charset="0"/>
+                          </a:rPr>
+                        </m:ctrlPr>
+                      </m:dPr>
+                      <m:e>
+                        <m:r>
+                          <a:rPr lang="en-US" i="1">
+                            <a:latin typeface="Cambria Math" panose="02040503050406030204" pitchFamily="18" charset="0"/>
+                          </a:rPr>
+                          <m:t>𝐴</m:t>
+                        </m:r>
+                        <m:r>
+                          <a:rPr lang="en-US" i="1">
+                            <a:latin typeface="Cambria Math" panose="02040503050406030204" pitchFamily="18" charset="0"/>
+                          </a:rPr>
+                          <m:t>.</m:t>
+                        </m:r>
+                        <m:r>
+                          <a:rPr lang="en-US" i="1">
+                            <a:latin typeface="Cambria Math" panose="02040503050406030204" pitchFamily="18" charset="0"/>
+                          </a:rPr>
+                          <m:t>𝐵</m:t>
+                        </m:r>
+                      </m:e>
+                    </m:d>
+                    <m:r>
+                      <a:rPr lang="en-US" i="1">
+                        <a:latin typeface="Cambria Math" panose="02040503050406030204" pitchFamily="18" charset="0"/>
+                      </a:rPr>
+                      <m:t>+</m:t>
+                    </m:r>
+                    <m:d>
+                      <m:dPr>
+                        <m:ctrlPr>
+                          <a:rPr lang="en-US" b="0" i="1" smtClean="0">
+                            <a:latin typeface="Cambria Math" panose="02040503050406030204" pitchFamily="18" charset="0"/>
+                          </a:rPr>
+                        </m:ctrlPr>
+                      </m:dPr>
+                      <m:e>
+                        <m:r>
+                          <a:rPr lang="en-US" i="1">
+                            <a:latin typeface="Cambria Math" panose="02040503050406030204" pitchFamily="18" charset="0"/>
+                          </a:rPr>
+                          <m:t>𝐴</m:t>
+                        </m:r>
+                        <m:r>
+                          <a:rPr lang="en-US" i="1">
+                            <a:latin typeface="Cambria Math" panose="02040503050406030204" pitchFamily="18" charset="0"/>
+                          </a:rPr>
+                          <m:t>.</m:t>
+                        </m:r>
+                        <m:acc>
+                          <m:accPr>
+                            <m:chr m:val="̅"/>
+                            <m:ctrlPr>
+                              <a:rPr lang="en-US" i="1">
+                                <a:latin typeface="Cambria Math" panose="02040503050406030204" pitchFamily="18" charset="0"/>
+                              </a:rPr>
+                            </m:ctrlPr>
+                          </m:accPr>
+                          <m:e>
+                            <m:r>
+                              <a:rPr lang="en-US" i="1">
+                                <a:latin typeface="Cambria Math" panose="02040503050406030204" pitchFamily="18" charset="0"/>
+                              </a:rPr>
+                              <m:t>𝐵</m:t>
+                            </m:r>
+                          </m:e>
+                        </m:acc>
+                      </m:e>
+                    </m:d>
+                    <m:r>
+                      <a:rPr lang="en-US" i="1">
+                        <a:latin typeface="Cambria Math" panose="02040503050406030204" pitchFamily="18" charset="0"/>
+                      </a:rPr>
+                      <m:t>+</m:t>
+                    </m:r>
+                    <m:d>
+                      <m:dPr>
+                        <m:ctrlPr>
+                          <a:rPr lang="en-US" i="1">
+                            <a:latin typeface="Cambria Math" panose="02040503050406030204" pitchFamily="18" charset="0"/>
+                          </a:rPr>
+                        </m:ctrlPr>
+                      </m:dPr>
+                      <m:e>
+                        <m:acc>
+                          <m:accPr>
+                            <m:chr m:val="̅"/>
+                            <m:ctrlPr>
+                              <a:rPr lang="en-US" i="1">
+                                <a:latin typeface="Cambria Math" panose="02040503050406030204" pitchFamily="18" charset="0"/>
+                              </a:rPr>
+                            </m:ctrlPr>
+                          </m:accPr>
+                          <m:e>
+                            <m:r>
+                              <a:rPr lang="en-US" i="1">
+                                <a:latin typeface="Cambria Math" panose="02040503050406030204" pitchFamily="18" charset="0"/>
+                              </a:rPr>
+                              <m:t>𝐴</m:t>
+                            </m:r>
+                          </m:e>
+                        </m:acc>
+                        <m:r>
+                          <a:rPr lang="en-US" i="1">
+                            <a:latin typeface="Cambria Math" panose="02040503050406030204" pitchFamily="18" charset="0"/>
+                          </a:rPr>
+                          <m:t>.</m:t>
+                        </m:r>
+                        <m:r>
+                          <a:rPr lang="en-US" i="1">
+                            <a:latin typeface="Cambria Math" panose="02040503050406030204" pitchFamily="18" charset="0"/>
+                          </a:rPr>
+                          <m:t>𝐶</m:t>
+                        </m:r>
+                      </m:e>
+                    </m:d>
+                  </m:oMath>
+                </a14:m>
+                <a:endParaRPr lang="en-US" i="1" dirty="0">
+                  <a:latin typeface="Cambria Math" panose="02040503050406030204" pitchFamily="18" charset="0"/>
+                </a:endParaRPr>
+              </a:p>
+              <a:p>
+                <a14:m>
+                  <m:oMath xmlns:m="http://schemas.openxmlformats.org/officeDocument/2006/math">
+                    <m:d>
+                      <m:dPr>
+                        <m:ctrlPr>
+                          <a:rPr lang="en-US" i="1" smtClean="0">
+                            <a:latin typeface="Cambria Math" panose="02040503050406030204" pitchFamily="18" charset="0"/>
+                          </a:rPr>
+                        </m:ctrlPr>
+                      </m:dPr>
+                      <m:e>
+                        <m:r>
+                          <a:rPr lang="en-US" i="1">
+                            <a:latin typeface="Cambria Math" panose="02040503050406030204" pitchFamily="18" charset="0"/>
+                          </a:rPr>
+                          <m:t>𝐴</m:t>
+                        </m:r>
+                        <m:r>
+                          <a:rPr lang="en-US" b="0" i="1" smtClean="0">
+                            <a:latin typeface="Cambria Math" panose="02040503050406030204" pitchFamily="18" charset="0"/>
+                          </a:rPr>
+                          <m:t>+</m:t>
+                        </m:r>
+                        <m:r>
+                          <a:rPr lang="en-US" i="1">
+                            <a:latin typeface="Cambria Math" panose="02040503050406030204" pitchFamily="18" charset="0"/>
+                          </a:rPr>
+                          <m:t>𝐵</m:t>
+                        </m:r>
+                      </m:e>
+                    </m:d>
+                    <m:r>
+                      <a:rPr lang="en-US" b="0" i="1" smtClean="0">
+                        <a:latin typeface="Cambria Math" panose="02040503050406030204" pitchFamily="18" charset="0"/>
+                      </a:rPr>
+                      <m:t>.</m:t>
+                    </m:r>
+                    <m:d>
+                      <m:dPr>
+                        <m:ctrlPr>
+                          <a:rPr lang="en-US" b="0" i="1" smtClean="0">
+                            <a:latin typeface="Cambria Math" panose="02040503050406030204" pitchFamily="18" charset="0"/>
+                          </a:rPr>
+                        </m:ctrlPr>
+                      </m:dPr>
+                      <m:e>
+                        <m:r>
+                          <a:rPr lang="en-US" i="1">
+                            <a:latin typeface="Cambria Math" panose="02040503050406030204" pitchFamily="18" charset="0"/>
+                          </a:rPr>
+                          <m:t>𝐴</m:t>
+                        </m:r>
+                        <m:r>
+                          <a:rPr lang="en-US" b="0" i="1" smtClean="0">
+                            <a:latin typeface="Cambria Math" panose="02040503050406030204" pitchFamily="18" charset="0"/>
+                          </a:rPr>
+                          <m:t>+</m:t>
+                        </m:r>
+                        <m:acc>
+                          <m:accPr>
+                            <m:chr m:val="̅"/>
+                            <m:ctrlPr>
+                              <a:rPr lang="en-US" i="1">
+                                <a:latin typeface="Cambria Math" panose="02040503050406030204" pitchFamily="18" charset="0"/>
+                              </a:rPr>
+                            </m:ctrlPr>
+                          </m:accPr>
+                          <m:e>
+                            <m:r>
+                              <a:rPr lang="en-US" i="1">
+                                <a:latin typeface="Cambria Math" panose="02040503050406030204" pitchFamily="18" charset="0"/>
+                              </a:rPr>
+                              <m:t>𝐵</m:t>
+                            </m:r>
+                          </m:e>
+                        </m:acc>
+                      </m:e>
+                    </m:d>
+                    <m:r>
+                      <a:rPr lang="en-US" b="0" i="1" smtClean="0">
+                        <a:latin typeface="Cambria Math" panose="02040503050406030204" pitchFamily="18" charset="0"/>
+                      </a:rPr>
+                      <m:t>.</m:t>
+                    </m:r>
+                    <m:d>
+                      <m:dPr>
+                        <m:ctrlPr>
+                          <a:rPr lang="en-US" i="1">
+                            <a:latin typeface="Cambria Math" panose="02040503050406030204" pitchFamily="18" charset="0"/>
+                          </a:rPr>
+                        </m:ctrlPr>
+                      </m:dPr>
+                      <m:e>
+                        <m:acc>
+                          <m:accPr>
+                            <m:chr m:val="̅"/>
+                            <m:ctrlPr>
+                              <a:rPr lang="en-US" i="1">
+                                <a:latin typeface="Cambria Math" panose="02040503050406030204" pitchFamily="18" charset="0"/>
+                              </a:rPr>
+                            </m:ctrlPr>
+                          </m:accPr>
+                          <m:e>
+                            <m:r>
+                              <a:rPr lang="en-US" i="1">
+                                <a:latin typeface="Cambria Math" panose="02040503050406030204" pitchFamily="18" charset="0"/>
+                              </a:rPr>
+                              <m:t>𝐴</m:t>
+                            </m:r>
+                          </m:e>
+                        </m:acc>
+                        <m:r>
+                          <a:rPr lang="en-US" b="0" i="1" smtClean="0">
+                            <a:latin typeface="Cambria Math" panose="02040503050406030204" pitchFamily="18" charset="0"/>
+                          </a:rPr>
+                          <m:t>+</m:t>
+                        </m:r>
+                        <m:r>
+                          <a:rPr lang="en-US" b="0" i="1" smtClean="0">
+                            <a:latin typeface="Cambria Math" panose="02040503050406030204" pitchFamily="18" charset="0"/>
+                          </a:rPr>
+                          <m:t>𝐵</m:t>
+                        </m:r>
+                      </m:e>
+                    </m:d>
+                  </m:oMath>
+                </a14:m>
+                <a:endParaRPr lang="en-US" i="1" dirty="0">
+                  <a:latin typeface="Cambria Math" panose="02040503050406030204" pitchFamily="18" charset="0"/>
+                </a:endParaRPr>
+              </a:p>
+              <a:p>
+                <a14:m>
+                  <m:oMath xmlns:m="http://schemas.openxmlformats.org/officeDocument/2006/math">
+                    <m:acc>
+                      <m:accPr>
+                        <m:chr m:val="̅"/>
+                        <m:ctrlPr>
+                          <a:rPr lang="en-US" i="1" smtClean="0">
+                            <a:latin typeface="Cambria Math" panose="02040503050406030204" pitchFamily="18" charset="0"/>
+                          </a:rPr>
+                        </m:ctrlPr>
+                      </m:accPr>
+                      <m:e>
+                        <m:r>
+                          <a:rPr lang="en-US" b="0" i="1" smtClean="0">
+                            <a:latin typeface="Cambria Math" panose="02040503050406030204" pitchFamily="18" charset="0"/>
+                          </a:rPr>
+                          <m:t>𝐴</m:t>
+                        </m:r>
+                        <m:r>
+                          <a:rPr lang="en-US" b="0" i="1" smtClean="0">
+                            <a:latin typeface="Cambria Math" panose="02040503050406030204" pitchFamily="18" charset="0"/>
+                          </a:rPr>
+                          <m:t>+</m:t>
+                        </m:r>
+                        <m:r>
+                          <a:rPr lang="en-US" b="0" i="1" smtClean="0">
+                            <a:latin typeface="Cambria Math" panose="02040503050406030204" pitchFamily="18" charset="0"/>
+                          </a:rPr>
+                          <m:t>𝐵</m:t>
+                        </m:r>
+                      </m:e>
+                    </m:acc>
+                    <m:r>
+                      <a:rPr lang="en-US" b="0" i="1" smtClean="0">
+                        <a:latin typeface="Cambria Math" panose="02040503050406030204" pitchFamily="18" charset="0"/>
+                      </a:rPr>
+                      <m:t>+</m:t>
+                    </m:r>
+                    <m:r>
+                      <a:rPr lang="en-US" b="0" i="1" smtClean="0">
+                        <a:latin typeface="Cambria Math" panose="02040503050406030204" pitchFamily="18" charset="0"/>
+                      </a:rPr>
+                      <m:t>𝐴</m:t>
+                    </m:r>
+                    <m:r>
+                      <a:rPr lang="en-US" b="0" i="1" smtClean="0">
+                        <a:latin typeface="Cambria Math" panose="02040503050406030204" pitchFamily="18" charset="0"/>
+                      </a:rPr>
+                      <m:t>. </m:t>
+                    </m:r>
+                    <m:acc>
+                      <m:accPr>
+                        <m:chr m:val="̅"/>
+                        <m:ctrlPr>
+                          <a:rPr lang="en-US" i="1">
+                            <a:latin typeface="Cambria Math" panose="02040503050406030204" pitchFamily="18" charset="0"/>
+                          </a:rPr>
+                        </m:ctrlPr>
+                      </m:accPr>
+                      <m:e>
+                        <m:r>
+                          <a:rPr lang="en-US" i="1">
+                            <a:latin typeface="Cambria Math" panose="02040503050406030204" pitchFamily="18" charset="0"/>
+                          </a:rPr>
+                          <m:t>𝐵</m:t>
+                        </m:r>
+                      </m:e>
+                    </m:acc>
+                  </m:oMath>
+                </a14:m>
+                <a:endParaRPr lang="en-US" i="1" dirty="0">
+                  <a:latin typeface="Cambria Math" panose="02040503050406030204" pitchFamily="18" charset="0"/>
+                </a:endParaRPr>
+              </a:p>
+              <a:p>
+                <a:pPr marL="0" indent="0">
+                  <a:buNone/>
+                </a:pPr>
+                <a:endParaRPr lang="en-US" dirty="0"/>
+              </a:p>
+            </p:txBody>
+          </p:sp>
+        </mc:Choice>
+        <mc:Fallback>
+          <p:sp>
+            <p:nvSpPr>
+              <p:cNvPr id="3" name="Content Placeholder 2">
+                <a:extLst>
+                  <a:ext uri="{FF2B5EF4-FFF2-40B4-BE49-F238E27FC236}">
+                    <a16:creationId xmlns:a16="http://schemas.microsoft.com/office/drawing/2014/main" id="{8BF6F0FA-37D1-9644-1AA0-6C234F992DB8}"/>
+                  </a:ext>
+                </a:extLst>
+              </p:cNvPr>
+              <p:cNvSpPr>
+                <a:spLocks noGrp="1" noRot="1" noChangeAspect="1" noMove="1" noResize="1" noEditPoints="1" noAdjustHandles="1" noChangeArrowheads="1" noChangeShapeType="1" noTextEdit="1"/>
+              </p:cNvSpPr>
+              <p:nvPr>
+                <p:ph idx="1"/>
+              </p:nvPr>
+            </p:nvSpPr>
+            <p:spPr>
+              <a:blipFill>
+                <a:blip r:embed="rId2"/>
+                <a:stretch>
+                  <a:fillRect/>
+                </a:stretch>
+              </a:blipFill>
+            </p:spPr>
+            <p:txBody>
+              <a:bodyPr/>
+              <a:lstStyle/>
+              <a:p>
+                <a:r>
+                  <a:rPr lang="en-US">
+                    <a:noFill/>
+                  </a:rPr>
+                  <a:t> </a:t>
+                </a:r>
+              </a:p>
+            </p:txBody>
+          </p:sp>
+        </mc:Fallback>
+      </mc:AlternateContent>
+    </p:spTree>
+    <p:extLst>
+      <p:ext uri="{BB962C8B-B14F-4D97-AF65-F5344CB8AC3E}">
+        <p14:creationId xmlns:p14="http://schemas.microsoft.com/office/powerpoint/2010/main" val="380603004"/>
+      </p:ext>
+    </p:extLst>
+  </p:cSld>
+  <p:clrMapOvr>
+    <a:masterClrMapping/>
+  </p:clrMapOvr>
+</p:sld>
+</file>
+
+<file path=ppt/slides/slide118.xml><?xml version="1.0" encoding="utf-8"?>
+<p:sld xmlns:a="http://schemas.openxmlformats.org/drawingml/2006/main" xmlns:r="http://schemas.openxmlformats.org/officeDocument/2006/relationships" xmlns:p="http://schemas.openxmlformats.org/presentationml/2006/main">
+  <p:cSld>
+    <p:spTree>
+      <p:nvGrpSpPr>
+        <p:cNvPr id="1" name=""/>
+        <p:cNvGrpSpPr/>
+        <p:nvPr/>
+      </p:nvGrpSpPr>
+      <p:grpSpPr>
+        <a:xfrm>
+          <a:off x="0" y="0"/>
+          <a:ext cx="0" cy="0"/>
+          <a:chOff x="0" y="0"/>
+          <a:chExt cx="0" cy="0"/>
+        </a:xfrm>
+      </p:grpSpPr>
       <p:sp>
         <p:nvSpPr>
-          <p:cNvPr id="3" name="Content Placeholder 2">
+          <p:cNvPr id="2" name="Title 1">
             <a:extLst>
               <a:ext uri="{FF2B5EF4-FFF2-40B4-BE49-F238E27FC236}">
-                <a16:creationId xmlns:a16="http://schemas.microsoft.com/office/drawing/2014/main" id="{8BF6F0FA-37D1-9644-1AA0-6C234F992DB8}"/>
+                <a16:creationId xmlns:a16="http://schemas.microsoft.com/office/drawing/2014/main" id="{47698180-4559-0A9F-B063-70F529A1128C}"/>
               </a:ext>
             </a:extLst>
           </p:cNvPr>
@@ -9059,7 +9538,7 @@
             <a:spLocks noGrp="1"/>
           </p:cNvSpPr>
           <p:nvPr>
-            <p:ph idx="1"/>
+            <p:ph type="title"/>
           </p:nvPr>
         </p:nvSpPr>
         <p:spPr/>
@@ -9068,20 +9547,1146 @@
           <a:lstStyle/>
           <a:p>
             <a:r>
-              <a:rPr lang="en-US"/>
-              <a:t>Boolean Expression</a:t>
-            </a:r>
-            <a:r>
-              <a:rPr lang="en-US" dirty="0"/>
-              <a:t>… </a:t>
+              <a:rPr lang="en-US" dirty="0"/>
+              <a:t>Create a Boolean Expression and Simplify</a:t>
             </a:r>
           </a:p>
         </p:txBody>
       </p:sp>
+      <p:pic>
+        <p:nvPicPr>
+          <p:cNvPr id="75" name="Content Placeholder 74">
+            <a:extLst>
+              <a:ext uri="{FF2B5EF4-FFF2-40B4-BE49-F238E27FC236}">
+                <a16:creationId xmlns:a16="http://schemas.microsoft.com/office/drawing/2014/main" id="{B7A44507-2493-B494-D86F-2481D976DC2C}"/>
+              </a:ext>
+            </a:extLst>
+          </p:cNvPr>
+          <p:cNvPicPr>
+            <a:picLocks noGrp="1" noChangeAspect="1"/>
+          </p:cNvPicPr>
+          <p:nvPr>
+            <p:ph idx="1"/>
+          </p:nvPr>
+        </p:nvPicPr>
+        <p:blipFill>
+          <a:blip r:embed="rId2"/>
+          <a:stretch>
+            <a:fillRect/>
+          </a:stretch>
+        </p:blipFill>
+        <p:spPr>
+          <a:xfrm>
+            <a:off x="1626355" y="1917622"/>
+            <a:ext cx="3960301" cy="1291167"/>
+          </a:xfrm>
+        </p:spPr>
+      </p:pic>
+      <mc:AlternateContent xmlns:mc="http://schemas.openxmlformats.org/markup-compatibility/2006">
+        <mc:Choice xmlns:p14="http://schemas.microsoft.com/office/powerpoint/2010/main" Requires="p14">
+          <p:contentPart p14:bwMode="auto" r:id="rId3">
+            <p14:nvContentPartPr>
+              <p14:cNvPr id="14" name="Ink 13">
+                <a:extLst>
+                  <a:ext uri="{FF2B5EF4-FFF2-40B4-BE49-F238E27FC236}">
+                    <a16:creationId xmlns:a16="http://schemas.microsoft.com/office/drawing/2014/main" id="{6F49D9E4-A8FE-C475-E660-CD22BB1520E6}"/>
+                  </a:ext>
+                </a:extLst>
+              </p14:cNvPr>
+              <p14:cNvContentPartPr/>
+              <p14:nvPr/>
+            </p14:nvContentPartPr>
+            <p14:xfrm>
+              <a:off x="19694" y="9509"/>
+              <a:ext cx="6480" cy="5040"/>
+            </p14:xfrm>
+          </p:contentPart>
+        </mc:Choice>
+        <mc:Fallback>
+          <p:pic>
+            <p:nvPicPr>
+              <p:cNvPr id="14" name="Ink 13">
+                <a:extLst>
+                  <a:ext uri="{FF2B5EF4-FFF2-40B4-BE49-F238E27FC236}">
+                    <a16:creationId xmlns:a16="http://schemas.microsoft.com/office/drawing/2014/main" id="{6F49D9E4-A8FE-C475-E660-CD22BB1520E6}"/>
+                  </a:ext>
+                </a:extLst>
+              </p:cNvPr>
+              <p:cNvPicPr/>
+              <p:nvPr/>
+            </p:nvPicPr>
+            <p:blipFill>
+              <a:blip r:embed="rId4"/>
+              <a:stretch>
+                <a:fillRect/>
+              </a:stretch>
+            </p:blipFill>
+            <p:spPr>
+              <a:xfrm>
+                <a:off x="11054" y="869"/>
+                <a:ext cx="24120" cy="22680"/>
+              </a:xfrm>
+              <a:prstGeom prst="rect">
+                <a:avLst/>
+              </a:prstGeom>
+            </p:spPr>
+          </p:pic>
+        </mc:Fallback>
+      </mc:AlternateContent>
+      <p:pic>
+        <p:nvPicPr>
+          <p:cNvPr id="81" name="Picture 80">
+            <a:extLst>
+              <a:ext uri="{FF2B5EF4-FFF2-40B4-BE49-F238E27FC236}">
+                <a16:creationId xmlns:a16="http://schemas.microsoft.com/office/drawing/2014/main" id="{A5C5742F-D204-9E73-4C2A-9A4D6A0AE501}"/>
+              </a:ext>
+            </a:extLst>
+          </p:cNvPr>
+          <p:cNvPicPr>
+            <a:picLocks noChangeAspect="1"/>
+          </p:cNvPicPr>
+          <p:nvPr/>
+        </p:nvPicPr>
+        <p:blipFill>
+          <a:blip r:embed="rId5"/>
+          <a:stretch>
+            <a:fillRect/>
+          </a:stretch>
+        </p:blipFill>
+        <p:spPr>
+          <a:xfrm>
+            <a:off x="1626355" y="3727465"/>
+            <a:ext cx="3994269" cy="1346726"/>
+          </a:xfrm>
+          <a:prstGeom prst="rect">
+            <a:avLst/>
+          </a:prstGeom>
+        </p:spPr>
+      </p:pic>
+      <p:pic>
+        <p:nvPicPr>
+          <p:cNvPr id="83" name="Picture 82">
+            <a:extLst>
+              <a:ext uri="{FF2B5EF4-FFF2-40B4-BE49-F238E27FC236}">
+                <a16:creationId xmlns:a16="http://schemas.microsoft.com/office/drawing/2014/main" id="{C11DDAA1-BC9A-8191-CDB4-F3CAC90D930D}"/>
+              </a:ext>
+            </a:extLst>
+          </p:cNvPr>
+          <p:cNvPicPr>
+            <a:picLocks noChangeAspect="1"/>
+          </p:cNvPicPr>
+          <p:nvPr/>
+        </p:nvPicPr>
+        <p:blipFill>
+          <a:blip r:embed="rId6"/>
+          <a:stretch>
+            <a:fillRect/>
+          </a:stretch>
+        </p:blipFill>
+        <p:spPr>
+          <a:xfrm>
+            <a:off x="6065242" y="1917622"/>
+            <a:ext cx="3767442" cy="1291167"/>
+          </a:xfrm>
+          <a:prstGeom prst="rect">
+            <a:avLst/>
+          </a:prstGeom>
+        </p:spPr>
+      </p:pic>
+      <p:pic>
+        <p:nvPicPr>
+          <p:cNvPr id="85" name="Picture 84">
+            <a:extLst>
+              <a:ext uri="{FF2B5EF4-FFF2-40B4-BE49-F238E27FC236}">
+                <a16:creationId xmlns:a16="http://schemas.microsoft.com/office/drawing/2014/main" id="{103C0698-F6C1-92DA-64AE-E654D09A27EE}"/>
+              </a:ext>
+            </a:extLst>
+          </p:cNvPr>
+          <p:cNvPicPr>
+            <a:picLocks noChangeAspect="1"/>
+          </p:cNvPicPr>
+          <p:nvPr/>
+        </p:nvPicPr>
+        <p:blipFill>
+          <a:blip r:embed="rId7"/>
+          <a:stretch>
+            <a:fillRect/>
+          </a:stretch>
+        </p:blipFill>
+        <p:spPr>
+          <a:xfrm>
+            <a:off x="6065242" y="3570652"/>
+            <a:ext cx="3691154" cy="1592772"/>
+          </a:xfrm>
+          <a:prstGeom prst="rect">
+            <a:avLst/>
+          </a:prstGeom>
+        </p:spPr>
+      </p:pic>
     </p:spTree>
     <p:extLst>
       <p:ext uri="{BB962C8B-B14F-4D97-AF65-F5344CB8AC3E}">
-        <p14:creationId xmlns:p14="http://schemas.microsoft.com/office/powerpoint/2010/main" val="380603004"/>
+        <p14:creationId xmlns:p14="http://schemas.microsoft.com/office/powerpoint/2010/main" val="2402874604"/>
+      </p:ext>
+    </p:extLst>
+  </p:cSld>
+  <p:clrMapOvr>
+    <a:masterClrMapping/>
+  </p:clrMapOvr>
+</p:sld>
+</file>
+
+<file path=ppt/slides/slide119.xml><?xml version="1.0" encoding="utf-8"?>
+<p:sld xmlns:a="http://schemas.openxmlformats.org/drawingml/2006/main" xmlns:r="http://schemas.openxmlformats.org/officeDocument/2006/relationships" xmlns:p="http://schemas.openxmlformats.org/presentationml/2006/main">
+  <p:cSld>
+    <p:spTree>
+      <p:nvGrpSpPr>
+        <p:cNvPr id="1" name="">
+          <a:extLst>
+            <a:ext uri="{FF2B5EF4-FFF2-40B4-BE49-F238E27FC236}">
+              <a16:creationId xmlns:a16="http://schemas.microsoft.com/office/drawing/2014/main" id="{4EDCDD0B-A632-7D56-A60C-B5777D1D5FE5}"/>
+            </a:ext>
+          </a:extLst>
+        </p:cNvPr>
+        <p:cNvGrpSpPr/>
+        <p:nvPr/>
+      </p:nvGrpSpPr>
+      <p:grpSpPr>
+        <a:xfrm>
+          <a:off x="0" y="0"/>
+          <a:ext cx="0" cy="0"/>
+          <a:chOff x="0" y="0"/>
+          <a:chExt cx="0" cy="0"/>
+        </a:xfrm>
+      </p:grpSpPr>
+      <p:sp>
+        <p:nvSpPr>
+          <p:cNvPr id="2" name="Title 1">
+            <a:extLst>
+              <a:ext uri="{FF2B5EF4-FFF2-40B4-BE49-F238E27FC236}">
+                <a16:creationId xmlns:a16="http://schemas.microsoft.com/office/drawing/2014/main" id="{16AD4C39-2DAB-261A-6A73-F53F2E4DABF1}"/>
+              </a:ext>
+            </a:extLst>
+          </p:cNvPr>
+          <p:cNvSpPr>
+            <a:spLocks noGrp="1"/>
+          </p:cNvSpPr>
+          <p:nvPr>
+            <p:ph type="title"/>
+          </p:nvPr>
+        </p:nvSpPr>
+        <p:spPr/>
+        <p:txBody>
+          <a:bodyPr/>
+          <a:lstStyle/>
+          <a:p>
+            <a:r>
+              <a:rPr lang="en-US" dirty="0"/>
+              <a:t>Answers</a:t>
+            </a:r>
+          </a:p>
+        </p:txBody>
+      </p:sp>
+      <mc:AlternateContent xmlns:mc="http://schemas.openxmlformats.org/markup-compatibility/2006" xmlns:a14="http://schemas.microsoft.com/office/drawing/2010/main">
+        <mc:Choice Requires="a14">
+          <p:sp>
+            <p:nvSpPr>
+              <p:cNvPr id="3" name="Content Placeholder 2">
+                <a:extLst>
+                  <a:ext uri="{FF2B5EF4-FFF2-40B4-BE49-F238E27FC236}">
+                    <a16:creationId xmlns:a16="http://schemas.microsoft.com/office/drawing/2014/main" id="{DA3155E3-9477-D29E-712E-25C51BD058B8}"/>
+                  </a:ext>
+                </a:extLst>
+              </p:cNvPr>
+              <p:cNvSpPr>
+                <a:spLocks noGrp="1"/>
+              </p:cNvSpPr>
+              <p:nvPr>
+                <p:ph idx="1"/>
+              </p:nvPr>
+            </p:nvSpPr>
+            <p:spPr/>
+            <p:txBody>
+              <a:bodyPr>
+                <a:normAutofit fontScale="70000" lnSpcReduction="20000"/>
+              </a:bodyPr>
+              <a:lstStyle/>
+              <a:p>
+                <a14:m>
+                  <m:oMath xmlns:m="http://schemas.openxmlformats.org/officeDocument/2006/math">
+                    <m:r>
+                      <a:rPr lang="en-US" b="0" i="1" smtClean="0">
+                        <a:latin typeface="Cambria Math" panose="02040503050406030204" pitchFamily="18" charset="0"/>
+                      </a:rPr>
+                      <m:t>𝐴</m:t>
+                    </m:r>
+                    <m:r>
+                      <a:rPr lang="en-US" b="0" i="1" smtClean="0">
+                        <a:latin typeface="Cambria Math" panose="02040503050406030204" pitchFamily="18" charset="0"/>
+                      </a:rPr>
+                      <m:t>.</m:t>
+                    </m:r>
+                    <m:d>
+                      <m:dPr>
+                        <m:ctrlPr>
+                          <a:rPr lang="en-US" b="0" i="1" smtClean="0">
+                            <a:latin typeface="Cambria Math" panose="02040503050406030204" pitchFamily="18" charset="0"/>
+                          </a:rPr>
+                        </m:ctrlPr>
+                      </m:dPr>
+                      <m:e>
+                        <m:r>
+                          <a:rPr lang="en-US" b="0" i="1" smtClean="0">
+                            <a:latin typeface="Cambria Math" panose="02040503050406030204" pitchFamily="18" charset="0"/>
+                          </a:rPr>
+                          <m:t>𝐴</m:t>
+                        </m:r>
+                        <m:r>
+                          <a:rPr lang="en-US" b="0" i="1" smtClean="0">
+                            <a:latin typeface="Cambria Math" panose="02040503050406030204" pitchFamily="18" charset="0"/>
+                          </a:rPr>
+                          <m:t>+</m:t>
+                        </m:r>
+                        <m:r>
+                          <a:rPr lang="en-US" b="0" i="1" smtClean="0">
+                            <a:latin typeface="Cambria Math" panose="02040503050406030204" pitchFamily="18" charset="0"/>
+                          </a:rPr>
+                          <m:t>𝐵</m:t>
+                        </m:r>
+                      </m:e>
+                    </m:d>
+                  </m:oMath>
+                </a14:m>
+                <a:endParaRPr lang="en-US" dirty="0"/>
+              </a:p>
+              <a:p>
+                <a:pPr lvl="1"/>
+                <a:r>
+                  <a:rPr lang="en-US" dirty="0"/>
+                  <a:t>By Absorption law = A, OR</a:t>
+                </a:r>
+              </a:p>
+              <a:p>
+                <a:pPr lvl="2"/>
+                <a:r>
+                  <a:rPr lang="en-US" dirty="0"/>
+                  <a:t>A.A + A.B</a:t>
+                </a:r>
+              </a:p>
+              <a:p>
+                <a:pPr lvl="2"/>
+                <a:r>
+                  <a:rPr lang="en-US" dirty="0"/>
+                  <a:t>A + AB  </a:t>
+                </a:r>
+                <a:r>
+                  <a:rPr lang="en-US" dirty="0">
+                    <a:solidFill>
+                      <a:srgbClr val="00B050"/>
+                    </a:solidFill>
+                  </a:rPr>
+                  <a:t>//(A.A = A), Idempotent Law</a:t>
+                </a:r>
+              </a:p>
+              <a:p>
+                <a:pPr lvl="2"/>
+                <a:r>
+                  <a:rPr lang="en-US" dirty="0"/>
+                  <a:t>A (1+ B) </a:t>
+                </a:r>
+                <a:r>
+                  <a:rPr lang="en-US" dirty="0">
+                    <a:solidFill>
+                      <a:srgbClr val="00B050"/>
+                    </a:solidFill>
+                  </a:rPr>
+                  <a:t>// factor A out</a:t>
+                </a:r>
+              </a:p>
+              <a:p>
+                <a:pPr lvl="2"/>
+                <a:r>
+                  <a:rPr lang="en-US" dirty="0"/>
+                  <a:t>A </a:t>
+                </a:r>
+                <a:r>
+                  <a:rPr lang="en-US" dirty="0">
+                    <a:solidFill>
+                      <a:srgbClr val="00B050"/>
+                    </a:solidFill>
+                  </a:rPr>
+                  <a:t>// By null law 1+B = 1 and A.1 = A</a:t>
+                </a:r>
+                <a:endParaRPr lang="en-US" dirty="0"/>
+              </a:p>
+              <a:p>
+                <a14:m>
+                  <m:oMath xmlns:m="http://schemas.openxmlformats.org/officeDocument/2006/math">
+                    <m:r>
+                      <a:rPr lang="en-US" b="0" i="1" smtClean="0">
+                        <a:latin typeface="Cambria Math" panose="02040503050406030204" pitchFamily="18" charset="0"/>
+                      </a:rPr>
+                      <m:t>𝐴</m:t>
+                    </m:r>
+                    <m:r>
+                      <a:rPr lang="en-US" b="0" i="1" smtClean="0">
+                        <a:latin typeface="Cambria Math" panose="02040503050406030204" pitchFamily="18" charset="0"/>
+                      </a:rPr>
+                      <m:t>+</m:t>
+                    </m:r>
+                    <m:d>
+                      <m:dPr>
+                        <m:ctrlPr>
+                          <a:rPr lang="en-US" b="0" i="1" smtClean="0">
+                            <a:latin typeface="Cambria Math" panose="02040503050406030204" pitchFamily="18" charset="0"/>
+                          </a:rPr>
+                        </m:ctrlPr>
+                      </m:dPr>
+                      <m:e>
+                        <m:r>
+                          <a:rPr lang="en-US" b="0" i="1" smtClean="0">
+                            <a:latin typeface="Cambria Math" panose="02040503050406030204" pitchFamily="18" charset="0"/>
+                          </a:rPr>
+                          <m:t>𝐴</m:t>
+                        </m:r>
+                        <m:r>
+                          <a:rPr lang="en-US" b="0" i="1" smtClean="0">
+                            <a:latin typeface="Cambria Math" panose="02040503050406030204" pitchFamily="18" charset="0"/>
+                          </a:rPr>
+                          <m:t>.</m:t>
+                        </m:r>
+                        <m:r>
+                          <a:rPr lang="en-US" b="0" i="1" smtClean="0">
+                            <a:latin typeface="Cambria Math" panose="02040503050406030204" pitchFamily="18" charset="0"/>
+                          </a:rPr>
+                          <m:t>𝐵</m:t>
+                        </m:r>
+                      </m:e>
+                    </m:d>
+                  </m:oMath>
+                </a14:m>
+                <a:endParaRPr lang="en-US" dirty="0"/>
+              </a:p>
+              <a:p>
+                <a:pPr lvl="1"/>
+                <a:r>
+                  <a:rPr lang="en-US" dirty="0"/>
+                  <a:t>A</a:t>
+                </a:r>
+              </a:p>
+              <a:p>
+                <a14:m>
+                  <m:oMath xmlns:m="http://schemas.openxmlformats.org/officeDocument/2006/math">
+                    <m:acc>
+                      <m:accPr>
+                        <m:chr m:val="̅"/>
+                        <m:ctrlPr>
+                          <a:rPr lang="en-US" b="0" i="1" smtClean="0">
+                            <a:latin typeface="Cambria Math" panose="02040503050406030204" pitchFamily="18" charset="0"/>
+                          </a:rPr>
+                        </m:ctrlPr>
+                      </m:accPr>
+                      <m:e>
+                        <m:r>
+                          <a:rPr lang="en-US" b="0" i="1" smtClean="0">
+                            <a:latin typeface="Cambria Math" panose="02040503050406030204" pitchFamily="18" charset="0"/>
+                          </a:rPr>
+                          <m:t>𝐴</m:t>
+                        </m:r>
+                      </m:e>
+                    </m:acc>
+                    <m:r>
+                      <a:rPr lang="en-US" b="0" i="1" smtClean="0">
+                        <a:latin typeface="Cambria Math" panose="02040503050406030204" pitchFamily="18" charset="0"/>
+                      </a:rPr>
+                      <m:t>+</m:t>
+                    </m:r>
+                    <m:d>
+                      <m:dPr>
+                        <m:ctrlPr>
+                          <a:rPr lang="en-US" b="0" i="1" smtClean="0">
+                            <a:latin typeface="Cambria Math" panose="02040503050406030204" pitchFamily="18" charset="0"/>
+                          </a:rPr>
+                        </m:ctrlPr>
+                      </m:dPr>
+                      <m:e>
+                        <m:r>
+                          <a:rPr lang="en-US" b="0" i="1" smtClean="0">
+                            <a:latin typeface="Cambria Math" panose="02040503050406030204" pitchFamily="18" charset="0"/>
+                          </a:rPr>
+                          <m:t>𝐴</m:t>
+                        </m:r>
+                        <m:r>
+                          <a:rPr lang="en-US" b="0" i="1" smtClean="0">
+                            <a:latin typeface="Cambria Math" panose="02040503050406030204" pitchFamily="18" charset="0"/>
+                          </a:rPr>
+                          <m:t>.</m:t>
+                        </m:r>
+                        <m:r>
+                          <a:rPr lang="en-US" b="0" i="1" smtClean="0">
+                            <a:latin typeface="Cambria Math" panose="02040503050406030204" pitchFamily="18" charset="0"/>
+                          </a:rPr>
+                          <m:t>𝐵</m:t>
+                        </m:r>
+                      </m:e>
+                    </m:d>
+                  </m:oMath>
+                </a14:m>
+                <a:endParaRPr lang="en-US" b="0" dirty="0"/>
+              </a:p>
+              <a:p>
+                <a:pPr lvl="1"/>
+                <a14:m>
+                  <m:oMath xmlns:m="http://schemas.openxmlformats.org/officeDocument/2006/math">
+                    <m:d>
+                      <m:dPr>
+                        <m:ctrlPr>
+                          <a:rPr lang="en-US" b="0" i="1" smtClean="0">
+                            <a:latin typeface="Cambria Math" panose="02040503050406030204" pitchFamily="18" charset="0"/>
+                          </a:rPr>
+                        </m:ctrlPr>
+                      </m:dPr>
+                      <m:e>
+                        <m:acc>
+                          <m:accPr>
+                            <m:chr m:val="̅"/>
+                            <m:ctrlPr>
+                              <a:rPr lang="en-US" b="0" i="1" smtClean="0">
+                                <a:latin typeface="Cambria Math" panose="02040503050406030204" pitchFamily="18" charset="0"/>
+                              </a:rPr>
+                            </m:ctrlPr>
+                          </m:accPr>
+                          <m:e>
+                            <m:r>
+                              <a:rPr lang="en-US" b="0" i="1" smtClean="0">
+                                <a:latin typeface="Cambria Math" panose="02040503050406030204" pitchFamily="18" charset="0"/>
+                              </a:rPr>
+                              <m:t>𝐴</m:t>
+                            </m:r>
+                          </m:e>
+                        </m:acc>
+                        <m:r>
+                          <a:rPr lang="en-US" b="0" i="1" smtClean="0">
+                            <a:latin typeface="Cambria Math" panose="02040503050406030204" pitchFamily="18" charset="0"/>
+                          </a:rPr>
+                          <m:t>+</m:t>
+                        </m:r>
+                        <m:r>
+                          <a:rPr lang="en-US" b="0" i="1" smtClean="0">
+                            <a:latin typeface="Cambria Math" panose="02040503050406030204" pitchFamily="18" charset="0"/>
+                          </a:rPr>
+                          <m:t>𝐴</m:t>
+                        </m:r>
+                      </m:e>
+                    </m:d>
+                    <m:r>
+                      <a:rPr lang="en-US" b="0" i="1" smtClean="0">
+                        <a:latin typeface="Cambria Math" panose="02040503050406030204" pitchFamily="18" charset="0"/>
+                      </a:rPr>
+                      <m:t>.(</m:t>
+                    </m:r>
+                    <m:acc>
+                      <m:accPr>
+                        <m:chr m:val="̅"/>
+                        <m:ctrlPr>
+                          <a:rPr lang="en-US" i="1">
+                            <a:latin typeface="Cambria Math" panose="02040503050406030204" pitchFamily="18" charset="0"/>
+                          </a:rPr>
+                        </m:ctrlPr>
+                      </m:accPr>
+                      <m:e>
+                        <m:r>
+                          <a:rPr lang="en-US" i="1">
+                            <a:latin typeface="Cambria Math" panose="02040503050406030204" pitchFamily="18" charset="0"/>
+                          </a:rPr>
+                          <m:t>𝐴</m:t>
+                        </m:r>
+                      </m:e>
+                    </m:acc>
+                    <m:r>
+                      <a:rPr lang="en-US" i="1">
+                        <a:latin typeface="Cambria Math" panose="02040503050406030204" pitchFamily="18" charset="0"/>
+                      </a:rPr>
+                      <m:t>+</m:t>
+                    </m:r>
+                  </m:oMath>
+                </a14:m>
+                <a:r>
+                  <a:rPr lang="en-US" b="0" i="1" dirty="0">
+                    <a:latin typeface="Cambria Math" panose="02040503050406030204" pitchFamily="18" charset="0"/>
+                  </a:rPr>
+                  <a:t> B) </a:t>
+                </a:r>
+                <a:r>
+                  <a:rPr lang="en-US" dirty="0">
+                    <a:solidFill>
+                      <a:srgbClr val="00B050"/>
+                    </a:solidFill>
+                  </a:rPr>
+                  <a:t>//Distribution law</a:t>
+                </a:r>
+                <a:endParaRPr lang="en-US" b="0" i="1" dirty="0">
+                  <a:latin typeface="Cambria Math" panose="02040503050406030204" pitchFamily="18" charset="0"/>
+                </a:endParaRPr>
+              </a:p>
+              <a:p>
+                <a:pPr lvl="1"/>
+                <a:r>
+                  <a:rPr lang="en-US" i="1" dirty="0">
+                    <a:latin typeface="Cambria Math" panose="02040503050406030204" pitchFamily="18" charset="0"/>
+                  </a:rPr>
+                  <a:t>1.</a:t>
+                </a:r>
+                <a:r>
+                  <a:rPr lang="en-US" b="0" dirty="0"/>
+                  <a:t> </a:t>
+                </a:r>
+                <a14:m>
+                  <m:oMath xmlns:m="http://schemas.openxmlformats.org/officeDocument/2006/math">
+                    <m:r>
+                      <a:rPr lang="en-US" b="0" i="0" smtClean="0">
+                        <a:latin typeface="Cambria Math" panose="02040503050406030204" pitchFamily="18" charset="0"/>
+                      </a:rPr>
+                      <m:t>(</m:t>
+                    </m:r>
+                    <m:acc>
+                      <m:accPr>
+                        <m:chr m:val="̅"/>
+                        <m:ctrlPr>
+                          <a:rPr lang="en-US" i="1" smtClean="0">
+                            <a:latin typeface="Cambria Math" panose="02040503050406030204" pitchFamily="18" charset="0"/>
+                          </a:rPr>
+                        </m:ctrlPr>
+                      </m:accPr>
+                      <m:e>
+                        <m:r>
+                          <a:rPr lang="en-US" i="1">
+                            <a:latin typeface="Cambria Math" panose="02040503050406030204" pitchFamily="18" charset="0"/>
+                          </a:rPr>
+                          <m:t>𝐴</m:t>
+                        </m:r>
+                      </m:e>
+                    </m:acc>
+                    <m:r>
+                      <a:rPr lang="en-US" i="1">
+                        <a:latin typeface="Cambria Math" panose="02040503050406030204" pitchFamily="18" charset="0"/>
+                      </a:rPr>
+                      <m:t>+</m:t>
+                    </m:r>
+                  </m:oMath>
+                </a14:m>
+                <a:r>
+                  <a:rPr lang="en-US" b="0" i="1" dirty="0">
+                    <a:latin typeface="Cambria Math" panose="02040503050406030204" pitchFamily="18" charset="0"/>
+                  </a:rPr>
+                  <a:t> B) </a:t>
+                </a:r>
+                <a:r>
+                  <a:rPr lang="en-US" dirty="0">
+                    <a:solidFill>
+                      <a:srgbClr val="00B050"/>
+                    </a:solidFill>
+                  </a:rPr>
+                  <a:t>// By Complement law </a:t>
+                </a:r>
+                <a14:m>
+                  <m:oMath xmlns:m="http://schemas.openxmlformats.org/officeDocument/2006/math">
+                    <m:d>
+                      <m:dPr>
+                        <m:ctrlPr>
+                          <a:rPr lang="en-US" i="1">
+                            <a:solidFill>
+                              <a:srgbClr val="00B050"/>
+                            </a:solidFill>
+                            <a:latin typeface="Cambria Math" panose="02040503050406030204" pitchFamily="18" charset="0"/>
+                          </a:rPr>
+                        </m:ctrlPr>
+                      </m:dPr>
+                      <m:e>
+                        <m:acc>
+                          <m:accPr>
+                            <m:chr m:val="̅"/>
+                            <m:ctrlPr>
+                              <a:rPr lang="en-US" i="1">
+                                <a:solidFill>
+                                  <a:srgbClr val="00B050"/>
+                                </a:solidFill>
+                                <a:latin typeface="Cambria Math" panose="02040503050406030204" pitchFamily="18" charset="0"/>
+                              </a:rPr>
+                            </m:ctrlPr>
+                          </m:accPr>
+                          <m:e>
+                            <m:r>
+                              <a:rPr lang="en-US">
+                                <a:solidFill>
+                                  <a:srgbClr val="00B050"/>
+                                </a:solidFill>
+                                <a:latin typeface="Cambria Math" panose="02040503050406030204" pitchFamily="18" charset="0"/>
+                              </a:rPr>
+                              <m:t>𝐴</m:t>
+                            </m:r>
+                          </m:e>
+                        </m:acc>
+                        <m:r>
+                          <a:rPr lang="en-US">
+                            <a:solidFill>
+                              <a:srgbClr val="00B050"/>
+                            </a:solidFill>
+                            <a:latin typeface="Cambria Math" panose="02040503050406030204" pitchFamily="18" charset="0"/>
+                          </a:rPr>
+                          <m:t>+</m:t>
+                        </m:r>
+                        <m:r>
+                          <a:rPr lang="en-US">
+                            <a:solidFill>
+                              <a:srgbClr val="00B050"/>
+                            </a:solidFill>
+                            <a:latin typeface="Cambria Math" panose="02040503050406030204" pitchFamily="18" charset="0"/>
+                          </a:rPr>
+                          <m:t>𝐴</m:t>
+                        </m:r>
+                      </m:e>
+                    </m:d>
+                    <m:r>
+                      <a:rPr lang="en-US">
+                        <a:solidFill>
+                          <a:srgbClr val="00B050"/>
+                        </a:solidFill>
+                        <a:latin typeface="Cambria Math" panose="02040503050406030204" pitchFamily="18" charset="0"/>
+                      </a:rPr>
+                      <m:t>=1</m:t>
+                    </m:r>
+                  </m:oMath>
+                </a14:m>
+                <a:endParaRPr lang="en-US" dirty="0">
+                  <a:solidFill>
+                    <a:srgbClr val="00B050"/>
+                  </a:solidFill>
+                </a:endParaRPr>
+              </a:p>
+              <a:p>
+                <a:pPr lvl="1"/>
+                <a14:m>
+                  <m:oMath xmlns:m="http://schemas.openxmlformats.org/officeDocument/2006/math">
+                    <m:acc>
+                      <m:accPr>
+                        <m:chr m:val="̅"/>
+                        <m:ctrlPr>
+                          <a:rPr lang="en-US" b="0" i="1" smtClean="0">
+                            <a:latin typeface="Cambria Math" panose="02040503050406030204" pitchFamily="18" charset="0"/>
+                          </a:rPr>
+                        </m:ctrlPr>
+                      </m:accPr>
+                      <m:e>
+                        <m:r>
+                          <a:rPr lang="en-US" b="0" i="1" smtClean="0">
+                            <a:latin typeface="Cambria Math" panose="02040503050406030204" pitchFamily="18" charset="0"/>
+                          </a:rPr>
+                          <m:t>𝐴</m:t>
+                        </m:r>
+                      </m:e>
+                    </m:acc>
+                    <m:r>
+                      <a:rPr lang="en-US" b="0" i="1" smtClean="0">
+                        <a:latin typeface="Cambria Math" panose="02040503050406030204" pitchFamily="18" charset="0"/>
+                      </a:rPr>
+                      <m:t>+</m:t>
+                    </m:r>
+                  </m:oMath>
+                </a14:m>
+                <a:r>
+                  <a:rPr lang="en-US" b="0" dirty="0"/>
+                  <a:t> B </a:t>
+                </a:r>
+              </a:p>
+              <a:p>
+                <a:r>
+                  <a:rPr lang="en-US" b="0" dirty="0"/>
+                  <a:t>(</a:t>
+                </a:r>
+                <a14:m>
+                  <m:oMath xmlns:m="http://schemas.openxmlformats.org/officeDocument/2006/math">
+                    <m:r>
+                      <a:rPr lang="en-US" b="0" i="1" smtClean="0">
+                        <a:latin typeface="Cambria Math" panose="02040503050406030204" pitchFamily="18" charset="0"/>
+                      </a:rPr>
+                      <m:t>𝐴</m:t>
+                    </m:r>
+                    <m:r>
+                      <a:rPr lang="en-US" b="0" i="1" smtClean="0">
+                        <a:latin typeface="Cambria Math" panose="02040503050406030204" pitchFamily="18" charset="0"/>
+                      </a:rPr>
+                      <m:t>+</m:t>
+                    </m:r>
+                    <m:r>
+                      <a:rPr lang="en-US" b="0" i="1" smtClean="0">
+                        <a:latin typeface="Cambria Math" panose="02040503050406030204" pitchFamily="18" charset="0"/>
+                      </a:rPr>
+                      <m:t>𝐵</m:t>
+                    </m:r>
+                    <m:r>
+                      <a:rPr lang="en-US" b="0" i="1" smtClean="0">
+                        <a:latin typeface="Cambria Math" panose="02040503050406030204" pitchFamily="18" charset="0"/>
+                      </a:rPr>
+                      <m:t>).</m:t>
+                    </m:r>
+                    <m:d>
+                      <m:dPr>
+                        <m:ctrlPr>
+                          <a:rPr lang="en-US" b="0" i="1" smtClean="0">
+                            <a:latin typeface="Cambria Math" panose="02040503050406030204" pitchFamily="18" charset="0"/>
+                          </a:rPr>
+                        </m:ctrlPr>
+                      </m:dPr>
+                      <m:e>
+                        <m:r>
+                          <a:rPr lang="en-US" b="0" i="1" smtClean="0">
+                            <a:latin typeface="Cambria Math" panose="02040503050406030204" pitchFamily="18" charset="0"/>
+                          </a:rPr>
+                          <m:t>𝐴</m:t>
+                        </m:r>
+                        <m:r>
+                          <a:rPr lang="en-US" b="0" i="1" smtClean="0">
+                            <a:latin typeface="Cambria Math" panose="02040503050406030204" pitchFamily="18" charset="0"/>
+                          </a:rPr>
+                          <m:t>+</m:t>
+                        </m:r>
+                        <m:acc>
+                          <m:accPr>
+                            <m:chr m:val="̅"/>
+                            <m:ctrlPr>
+                              <a:rPr lang="en-US" b="0" i="1" smtClean="0">
+                                <a:latin typeface="Cambria Math" panose="02040503050406030204" pitchFamily="18" charset="0"/>
+                              </a:rPr>
+                            </m:ctrlPr>
+                          </m:accPr>
+                          <m:e>
+                            <m:r>
+                              <a:rPr lang="en-US" b="0" i="1" smtClean="0">
+                                <a:latin typeface="Cambria Math" panose="02040503050406030204" pitchFamily="18" charset="0"/>
+                              </a:rPr>
+                              <m:t>𝐵</m:t>
+                            </m:r>
+                          </m:e>
+                        </m:acc>
+                      </m:e>
+                    </m:d>
+                  </m:oMath>
+                </a14:m>
+                <a:endParaRPr lang="en-US" b="0" dirty="0"/>
+              </a:p>
+              <a:p>
+                <a:pPr lvl="1"/>
+                <a:r>
+                  <a:rPr lang="en-US" b="0" dirty="0"/>
+                  <a:t>(</a:t>
+                </a:r>
+                <a14:m>
+                  <m:oMath xmlns:m="http://schemas.openxmlformats.org/officeDocument/2006/math">
+                    <m:r>
+                      <a:rPr lang="en-US" b="0" i="1" smtClean="0">
+                        <a:latin typeface="Cambria Math" panose="02040503050406030204" pitchFamily="18" charset="0"/>
+                      </a:rPr>
+                      <m:t>𝐴</m:t>
+                    </m:r>
+                    <m:r>
+                      <a:rPr lang="en-US" b="0" i="1" smtClean="0">
+                        <a:latin typeface="Cambria Math" panose="02040503050406030204" pitchFamily="18" charset="0"/>
+                      </a:rPr>
+                      <m:t>.</m:t>
+                    </m:r>
+                    <m:r>
+                      <a:rPr lang="en-US" b="0" i="1" smtClean="0">
+                        <a:latin typeface="Cambria Math" panose="02040503050406030204" pitchFamily="18" charset="0"/>
+                      </a:rPr>
+                      <m:t>𝐴</m:t>
+                    </m:r>
+                    <m:r>
+                      <a:rPr lang="en-US" b="0" i="1" smtClean="0">
+                        <a:latin typeface="Cambria Math" panose="02040503050406030204" pitchFamily="18" charset="0"/>
+                      </a:rPr>
+                      <m:t>)+(</m:t>
+                    </m:r>
+                    <m:r>
+                      <a:rPr lang="en-US" b="0" i="1" smtClean="0">
+                        <a:latin typeface="Cambria Math" panose="02040503050406030204" pitchFamily="18" charset="0"/>
+                      </a:rPr>
+                      <m:t>𝐵</m:t>
+                    </m:r>
+                    <m:r>
+                      <a:rPr lang="en-US" b="0" i="1" smtClean="0">
+                        <a:latin typeface="Cambria Math" panose="02040503050406030204" pitchFamily="18" charset="0"/>
+                      </a:rPr>
+                      <m:t>.</m:t>
+                    </m:r>
+                    <m:acc>
+                      <m:accPr>
+                        <m:chr m:val="̅"/>
+                        <m:ctrlPr>
+                          <a:rPr lang="en-US" b="0" i="1" smtClean="0">
+                            <a:latin typeface="Cambria Math" panose="02040503050406030204" pitchFamily="18" charset="0"/>
+                          </a:rPr>
+                        </m:ctrlPr>
+                      </m:accPr>
+                      <m:e>
+                        <m:r>
+                          <a:rPr lang="en-US" b="0" i="1" smtClean="0">
+                            <a:latin typeface="Cambria Math" panose="02040503050406030204" pitchFamily="18" charset="0"/>
+                          </a:rPr>
+                          <m:t>𝐵</m:t>
+                        </m:r>
+                      </m:e>
+                    </m:acc>
+                    <m:r>
+                      <a:rPr lang="en-US" b="0" i="1" smtClean="0">
+                        <a:latin typeface="Cambria Math" panose="02040503050406030204" pitchFamily="18" charset="0"/>
+                      </a:rPr>
+                      <m:t>)</m:t>
+                    </m:r>
+                  </m:oMath>
+                </a14:m>
+                <a:r>
+                  <a:rPr lang="en-US" dirty="0"/>
+                  <a:t> </a:t>
+                </a:r>
+                <a:r>
+                  <a:rPr lang="en-US" dirty="0">
+                    <a:solidFill>
+                      <a:srgbClr val="00B050"/>
+                    </a:solidFill>
+                  </a:rPr>
+                  <a:t>//Distribution law</a:t>
+                </a:r>
+              </a:p>
+              <a:p>
+                <a:pPr lvl="1"/>
+                <a:r>
+                  <a:rPr lang="en-US" b="0" dirty="0"/>
+                  <a:t>A</a:t>
+                </a:r>
+                <a14:m>
+                  <m:oMath xmlns:m="http://schemas.openxmlformats.org/officeDocument/2006/math">
+                    <m:r>
+                      <a:rPr lang="en-US" b="0" i="1" smtClean="0">
+                        <a:latin typeface="Cambria Math" panose="02040503050406030204" pitchFamily="18" charset="0"/>
+                      </a:rPr>
+                      <m:t>+0</m:t>
+                    </m:r>
+                  </m:oMath>
+                </a14:m>
+                <a:r>
+                  <a:rPr lang="en-US" dirty="0"/>
+                  <a:t> </a:t>
+                </a:r>
+                <a:r>
+                  <a:rPr lang="en-US" dirty="0">
+                    <a:solidFill>
+                      <a:srgbClr val="00B050"/>
+                    </a:solidFill>
+                  </a:rPr>
+                  <a:t>//Idempotent law + Complement law</a:t>
+                </a:r>
+              </a:p>
+              <a:p>
+                <a:pPr lvl="1"/>
+                <a:r>
+                  <a:rPr lang="en-US" b="0" dirty="0"/>
+                  <a:t>A</a:t>
+                </a:r>
+                <a:endParaRPr lang="en-US" dirty="0">
+                  <a:solidFill>
+                    <a:srgbClr val="00B050"/>
+                  </a:solidFill>
+                </a:endParaRPr>
+              </a:p>
+              <a:p>
+                <a:pPr lvl="1"/>
+                <a:endParaRPr lang="en-US" dirty="0"/>
+              </a:p>
+              <a:p>
+                <a:pPr lvl="1"/>
+                <a:endParaRPr lang="en-US" dirty="0"/>
+              </a:p>
+              <a:p>
+                <a:pPr lvl="1"/>
+                <a:endParaRPr lang="en-US" dirty="0"/>
+              </a:p>
+              <a:p>
+                <a:endParaRPr lang="en-US" dirty="0"/>
+              </a:p>
+              <a:p>
+                <a:endParaRPr lang="en-US" dirty="0"/>
+              </a:p>
+              <a:p>
+                <a:endParaRPr lang="en-US" dirty="0"/>
+              </a:p>
+            </p:txBody>
+          </p:sp>
+        </mc:Choice>
+        <mc:Fallback xmlns="">
+          <p:sp>
+            <p:nvSpPr>
+              <p:cNvPr id="3" name="Content Placeholder 2">
+                <a:extLst>
+                  <a:ext uri="{FF2B5EF4-FFF2-40B4-BE49-F238E27FC236}">
+                    <a16:creationId xmlns:a16="http://schemas.microsoft.com/office/drawing/2014/main" id="{4A0895C6-0364-139E-297D-2D74CFF1C09A}"/>
+                  </a:ext>
+                </a:extLst>
+              </p:cNvPr>
+              <p:cNvSpPr>
+                <a:spLocks noGrp="1" noRot="1" noChangeAspect="1" noMove="1" noResize="1" noEditPoints="1" noAdjustHandles="1" noChangeArrowheads="1" noChangeShapeType="1" noTextEdit="1"/>
+              </p:cNvSpPr>
+              <p:nvPr>
+                <p:ph idx="1"/>
+              </p:nvPr>
+            </p:nvSpPr>
+            <p:spPr>
+              <a:blipFill>
+                <a:blip r:embed="rId2"/>
+                <a:stretch>
+                  <a:fillRect l="-522" t="-1120" b="-1541"/>
+                </a:stretch>
+              </a:blipFill>
+            </p:spPr>
+            <p:txBody>
+              <a:bodyPr/>
+              <a:lstStyle/>
+              <a:p>
+                <a:r>
+                  <a:rPr lang="en-US">
+                    <a:noFill/>
+                  </a:rPr>
+                  <a:t> </a:t>
+                </a:r>
+              </a:p>
+            </p:txBody>
+          </p:sp>
+        </mc:Fallback>
+      </mc:AlternateContent>
+      <p:pic>
+        <p:nvPicPr>
+          <p:cNvPr id="4" name="Content Placeholder 74">
+            <a:extLst>
+              <a:ext uri="{FF2B5EF4-FFF2-40B4-BE49-F238E27FC236}">
+                <a16:creationId xmlns:a16="http://schemas.microsoft.com/office/drawing/2014/main" id="{C18C1A76-4DC7-B781-ADF9-3BAF09AD49C1}"/>
+              </a:ext>
+            </a:extLst>
+          </p:cNvPr>
+          <p:cNvPicPr>
+            <a:picLocks noChangeAspect="1"/>
+          </p:cNvPicPr>
+          <p:nvPr/>
+        </p:nvPicPr>
+        <p:blipFill>
+          <a:blip r:embed="rId3"/>
+          <a:stretch>
+            <a:fillRect/>
+          </a:stretch>
+        </p:blipFill>
+        <p:spPr>
+          <a:xfrm>
+            <a:off x="5770517" y="1509326"/>
+            <a:ext cx="2905335" cy="947219"/>
+          </a:xfrm>
+          <a:prstGeom prst="rect">
+            <a:avLst/>
+          </a:prstGeom>
+        </p:spPr>
+      </p:pic>
+      <p:pic>
+        <p:nvPicPr>
+          <p:cNvPr id="5" name="Picture 4">
+            <a:extLst>
+              <a:ext uri="{FF2B5EF4-FFF2-40B4-BE49-F238E27FC236}">
+                <a16:creationId xmlns:a16="http://schemas.microsoft.com/office/drawing/2014/main" id="{568DF5B6-3288-B9FF-9B57-870D602D4D18}"/>
+              </a:ext>
+            </a:extLst>
+          </p:cNvPr>
+          <p:cNvPicPr>
+            <a:picLocks noChangeAspect="1"/>
+          </p:cNvPicPr>
+          <p:nvPr/>
+        </p:nvPicPr>
+        <p:blipFill>
+          <a:blip r:embed="rId4"/>
+          <a:stretch>
+            <a:fillRect/>
+          </a:stretch>
+        </p:blipFill>
+        <p:spPr>
+          <a:xfrm>
+            <a:off x="5785198" y="2907789"/>
+            <a:ext cx="2840782" cy="957811"/>
+          </a:xfrm>
+          <a:prstGeom prst="rect">
+            <a:avLst/>
+          </a:prstGeom>
+        </p:spPr>
+      </p:pic>
+      <p:pic>
+        <p:nvPicPr>
+          <p:cNvPr id="6" name="Picture 5">
+            <a:extLst>
+              <a:ext uri="{FF2B5EF4-FFF2-40B4-BE49-F238E27FC236}">
+                <a16:creationId xmlns:a16="http://schemas.microsoft.com/office/drawing/2014/main" id="{26A30D28-2D86-1503-9003-3C3EEE6AAFB0}"/>
+              </a:ext>
+            </a:extLst>
+          </p:cNvPr>
+          <p:cNvPicPr>
+            <a:picLocks noChangeAspect="1"/>
+          </p:cNvPicPr>
+          <p:nvPr/>
+        </p:nvPicPr>
+        <p:blipFill>
+          <a:blip r:embed="rId5"/>
+          <a:stretch>
+            <a:fillRect/>
+          </a:stretch>
+        </p:blipFill>
+        <p:spPr>
+          <a:xfrm>
+            <a:off x="5788112" y="4075637"/>
+            <a:ext cx="2870144" cy="983648"/>
+          </a:xfrm>
+          <a:prstGeom prst="rect">
+            <a:avLst/>
+          </a:prstGeom>
+        </p:spPr>
+      </p:pic>
+      <p:pic>
+        <p:nvPicPr>
+          <p:cNvPr id="7" name="Picture 6">
+            <a:extLst>
+              <a:ext uri="{FF2B5EF4-FFF2-40B4-BE49-F238E27FC236}">
+                <a16:creationId xmlns:a16="http://schemas.microsoft.com/office/drawing/2014/main" id="{5C9DC05C-2483-F8D0-8638-BB2121DA96CA}"/>
+              </a:ext>
+            </a:extLst>
+          </p:cNvPr>
+          <p:cNvPicPr>
+            <a:picLocks noChangeAspect="1"/>
+          </p:cNvPicPr>
+          <p:nvPr/>
+        </p:nvPicPr>
+        <p:blipFill>
+          <a:blip r:embed="rId6"/>
+          <a:stretch>
+            <a:fillRect/>
+          </a:stretch>
+        </p:blipFill>
+        <p:spPr>
+          <a:xfrm>
+            <a:off x="5835069" y="5086072"/>
+            <a:ext cx="2840783" cy="1225828"/>
+          </a:xfrm>
+          <a:prstGeom prst="rect">
+            <a:avLst/>
+          </a:prstGeom>
+        </p:spPr>
+      </p:pic>
+    </p:spTree>
+    <p:extLst>
+      <p:ext uri="{BB962C8B-B14F-4D97-AF65-F5344CB8AC3E}">
+        <p14:creationId xmlns:p14="http://schemas.microsoft.com/office/powerpoint/2010/main" val="4260939728"/>
       </p:ext>
     </p:extLst>
   </p:cSld>
@@ -9533,6 +11138,3908 @@
     <p:extLst>
       <p:ext uri="{BB962C8B-B14F-4D97-AF65-F5344CB8AC3E}">
         <p14:creationId xmlns:p14="http://schemas.microsoft.com/office/powerpoint/2010/main" val="704112244"/>
+      </p:ext>
+    </p:extLst>
+  </p:cSld>
+  <p:clrMapOvr>
+    <a:masterClrMapping/>
+  </p:clrMapOvr>
+</p:sld>
+</file>
+
+<file path=ppt/slides/slide120.xml><?xml version="1.0" encoding="utf-8"?>
+<p:sld xmlns:a="http://schemas.openxmlformats.org/drawingml/2006/main" xmlns:r="http://schemas.openxmlformats.org/officeDocument/2006/relationships" xmlns:p="http://schemas.openxmlformats.org/presentationml/2006/main">
+  <p:cSld>
+    <p:spTree>
+      <p:nvGrpSpPr>
+        <p:cNvPr id="1" name=""/>
+        <p:cNvGrpSpPr/>
+        <p:nvPr/>
+      </p:nvGrpSpPr>
+      <p:grpSpPr>
+        <a:xfrm>
+          <a:off x="0" y="0"/>
+          <a:ext cx="0" cy="0"/>
+          <a:chOff x="0" y="0"/>
+          <a:chExt cx="0" cy="0"/>
+        </a:xfrm>
+      </p:grpSpPr>
+      <p:sp>
+        <p:nvSpPr>
+          <p:cNvPr id="2" name="Title 1">
+            <a:extLst>
+              <a:ext uri="{FF2B5EF4-FFF2-40B4-BE49-F238E27FC236}">
+                <a16:creationId xmlns:a16="http://schemas.microsoft.com/office/drawing/2014/main" id="{7FE5B326-5B7C-CA16-D253-A6331E9E4A66}"/>
+              </a:ext>
+            </a:extLst>
+          </p:cNvPr>
+          <p:cNvSpPr>
+            <a:spLocks noGrp="1"/>
+          </p:cNvSpPr>
+          <p:nvPr>
+            <p:ph type="title"/>
+          </p:nvPr>
+        </p:nvSpPr>
+        <p:spPr/>
+        <p:txBody>
+          <a:bodyPr/>
+          <a:lstStyle/>
+          <a:p>
+            <a:r>
+              <a:rPr lang="en-US" dirty="0"/>
+              <a:t>Graphs</a:t>
+            </a:r>
+          </a:p>
+        </p:txBody>
+      </p:sp>
+      <p:sp>
+        <p:nvSpPr>
+          <p:cNvPr id="3" name="Content Placeholder 2">
+            <a:extLst>
+              <a:ext uri="{FF2B5EF4-FFF2-40B4-BE49-F238E27FC236}">
+                <a16:creationId xmlns:a16="http://schemas.microsoft.com/office/drawing/2014/main" id="{5DF34B4B-2F13-75F7-2068-BBD32542454A}"/>
+              </a:ext>
+            </a:extLst>
+          </p:cNvPr>
+          <p:cNvSpPr>
+            <a:spLocks noGrp="1"/>
+          </p:cNvSpPr>
+          <p:nvPr>
+            <p:ph idx="1"/>
+          </p:nvPr>
+        </p:nvSpPr>
+        <p:spPr/>
+        <p:txBody>
+          <a:bodyPr/>
+          <a:lstStyle/>
+          <a:p>
+            <a:r>
+              <a:rPr lang="en-US" dirty="0"/>
+              <a:t>Identify number of cycles in this graph </a:t>
+            </a:r>
+          </a:p>
+          <a:p>
+            <a:pPr lvl="1"/>
+            <a:r>
+              <a:rPr lang="en-US" dirty="0"/>
+              <a:t>Represented as adjacency matrix </a:t>
+            </a:r>
+          </a:p>
+          <a:p>
+            <a:pPr lvl="1"/>
+            <a:r>
+              <a:rPr lang="en-US" dirty="0"/>
+              <a:t>Hint : Convert to a graph  first  </a:t>
+            </a:r>
+            <a:r>
+              <a:rPr lang="en-US" i="1" dirty="0"/>
+              <a:t>(one that you can see)</a:t>
+            </a:r>
+          </a:p>
+        </p:txBody>
+      </p:sp>
+      <p:graphicFrame>
+        <p:nvGraphicFramePr>
+          <p:cNvPr id="4" name="Table 3">
+            <a:extLst>
+              <a:ext uri="{FF2B5EF4-FFF2-40B4-BE49-F238E27FC236}">
+                <a16:creationId xmlns:a16="http://schemas.microsoft.com/office/drawing/2014/main" id="{CBC7F9B8-D717-4E95-531D-3BFEF32DD4A7}"/>
+              </a:ext>
+            </a:extLst>
+          </p:cNvPr>
+          <p:cNvGraphicFramePr>
+            <a:graphicFrameLocks noGrp="1"/>
+          </p:cNvGraphicFramePr>
+          <p:nvPr>
+            <p:extLst>
+              <p:ext uri="{D42A27DB-BD31-4B8C-83A1-F6EECF244321}">
+                <p14:modId xmlns:p14="http://schemas.microsoft.com/office/powerpoint/2010/main" val="510880544"/>
+              </p:ext>
+            </p:extLst>
+          </p:nvPr>
+        </p:nvGraphicFramePr>
+        <p:xfrm>
+          <a:off x="1432187" y="3014054"/>
+          <a:ext cx="4347832" cy="2979880"/>
+        </p:xfrm>
+        <a:graphic>
+          <a:graphicData uri="http://schemas.openxmlformats.org/drawingml/2006/table">
+            <a:tbl>
+              <a:tblPr firstRow="1" bandRow="1">
+                <a:tableStyleId>{B301B821-A1FF-4177-AEE7-76D212191A09}</a:tableStyleId>
+              </a:tblPr>
+              <a:tblGrid>
+                <a:gridCol w="543479">
+                  <a:extLst>
+                    <a:ext uri="{9D8B030D-6E8A-4147-A177-3AD203B41FA5}">
+                      <a16:colId xmlns:a16="http://schemas.microsoft.com/office/drawing/2014/main" val="2690793717"/>
+                    </a:ext>
+                  </a:extLst>
+                </a:gridCol>
+                <a:gridCol w="543479">
+                  <a:extLst>
+                    <a:ext uri="{9D8B030D-6E8A-4147-A177-3AD203B41FA5}">
+                      <a16:colId xmlns:a16="http://schemas.microsoft.com/office/drawing/2014/main" val="2670579438"/>
+                    </a:ext>
+                  </a:extLst>
+                </a:gridCol>
+                <a:gridCol w="543479">
+                  <a:extLst>
+                    <a:ext uri="{9D8B030D-6E8A-4147-A177-3AD203B41FA5}">
+                      <a16:colId xmlns:a16="http://schemas.microsoft.com/office/drawing/2014/main" val="3624113693"/>
+                    </a:ext>
+                  </a:extLst>
+                </a:gridCol>
+                <a:gridCol w="543479">
+                  <a:extLst>
+                    <a:ext uri="{9D8B030D-6E8A-4147-A177-3AD203B41FA5}">
+                      <a16:colId xmlns:a16="http://schemas.microsoft.com/office/drawing/2014/main" val="2944418674"/>
+                    </a:ext>
+                  </a:extLst>
+                </a:gridCol>
+                <a:gridCol w="543479">
+                  <a:extLst>
+                    <a:ext uri="{9D8B030D-6E8A-4147-A177-3AD203B41FA5}">
+                      <a16:colId xmlns:a16="http://schemas.microsoft.com/office/drawing/2014/main" val="2504296768"/>
+                    </a:ext>
+                  </a:extLst>
+                </a:gridCol>
+                <a:gridCol w="543479">
+                  <a:extLst>
+                    <a:ext uri="{9D8B030D-6E8A-4147-A177-3AD203B41FA5}">
+                      <a16:colId xmlns:a16="http://schemas.microsoft.com/office/drawing/2014/main" val="1002408205"/>
+                    </a:ext>
+                  </a:extLst>
+                </a:gridCol>
+                <a:gridCol w="543479">
+                  <a:extLst>
+                    <a:ext uri="{9D8B030D-6E8A-4147-A177-3AD203B41FA5}">
+                      <a16:colId xmlns:a16="http://schemas.microsoft.com/office/drawing/2014/main" val="1395760455"/>
+                    </a:ext>
+                  </a:extLst>
+                </a:gridCol>
+                <a:gridCol w="543479">
+                  <a:extLst>
+                    <a:ext uri="{9D8B030D-6E8A-4147-A177-3AD203B41FA5}">
+                      <a16:colId xmlns:a16="http://schemas.microsoft.com/office/drawing/2014/main" val="3774186086"/>
+                    </a:ext>
+                  </a:extLst>
+                </a:gridCol>
+              </a:tblGrid>
+              <a:tr h="372485">
+                <a:tc>
+                  <a:txBody>
+                    <a:bodyPr/>
+                    <a:lstStyle/>
+                    <a:p>
+                      <a:pPr algn="ctr"/>
+                      <a:endParaRPr lang="en-US" dirty="0"/>
+                    </a:p>
+                  </a:txBody>
+                  <a:tcPr>
+                    <a:solidFill>
+                      <a:schemeClr val="accent1">
+                        <a:lumMod val="75000"/>
+                      </a:schemeClr>
+                    </a:solidFill>
+                  </a:tcPr>
+                </a:tc>
+                <a:tc>
+                  <a:txBody>
+                    <a:bodyPr/>
+                    <a:lstStyle/>
+                    <a:p>
+                      <a:pPr algn="ctr"/>
+                      <a:r>
+                        <a:rPr lang="en-US" dirty="0"/>
+                        <a:t>1</a:t>
+                      </a:r>
+                    </a:p>
+                  </a:txBody>
+                  <a:tcPr>
+                    <a:solidFill>
+                      <a:schemeClr val="accent1">
+                        <a:lumMod val="75000"/>
+                      </a:schemeClr>
+                    </a:solidFill>
+                  </a:tcPr>
+                </a:tc>
+                <a:tc>
+                  <a:txBody>
+                    <a:bodyPr/>
+                    <a:lstStyle/>
+                    <a:p>
+                      <a:pPr algn="ctr"/>
+                      <a:r>
+                        <a:rPr lang="en-US" dirty="0"/>
+                        <a:t>2</a:t>
+                      </a:r>
+                    </a:p>
+                  </a:txBody>
+                  <a:tcPr>
+                    <a:solidFill>
+                      <a:schemeClr val="accent1">
+                        <a:lumMod val="75000"/>
+                      </a:schemeClr>
+                    </a:solidFill>
+                  </a:tcPr>
+                </a:tc>
+                <a:tc>
+                  <a:txBody>
+                    <a:bodyPr/>
+                    <a:lstStyle/>
+                    <a:p>
+                      <a:pPr algn="ctr"/>
+                      <a:r>
+                        <a:rPr lang="en-US" dirty="0"/>
+                        <a:t>3</a:t>
+                      </a:r>
+                    </a:p>
+                  </a:txBody>
+                  <a:tcPr>
+                    <a:solidFill>
+                      <a:schemeClr val="accent1">
+                        <a:lumMod val="75000"/>
+                      </a:schemeClr>
+                    </a:solidFill>
+                  </a:tcPr>
+                </a:tc>
+                <a:tc>
+                  <a:txBody>
+                    <a:bodyPr/>
+                    <a:lstStyle/>
+                    <a:p>
+                      <a:pPr algn="ctr"/>
+                      <a:r>
+                        <a:rPr lang="en-US" dirty="0"/>
+                        <a:t>4</a:t>
+                      </a:r>
+                    </a:p>
+                  </a:txBody>
+                  <a:tcPr>
+                    <a:solidFill>
+                      <a:schemeClr val="accent1">
+                        <a:lumMod val="75000"/>
+                      </a:schemeClr>
+                    </a:solidFill>
+                  </a:tcPr>
+                </a:tc>
+                <a:tc>
+                  <a:txBody>
+                    <a:bodyPr/>
+                    <a:lstStyle/>
+                    <a:p>
+                      <a:pPr algn="ctr"/>
+                      <a:r>
+                        <a:rPr lang="en-US" dirty="0"/>
+                        <a:t>5</a:t>
+                      </a:r>
+                    </a:p>
+                  </a:txBody>
+                  <a:tcPr>
+                    <a:solidFill>
+                      <a:schemeClr val="accent1">
+                        <a:lumMod val="75000"/>
+                      </a:schemeClr>
+                    </a:solidFill>
+                  </a:tcPr>
+                </a:tc>
+                <a:tc>
+                  <a:txBody>
+                    <a:bodyPr/>
+                    <a:lstStyle/>
+                    <a:p>
+                      <a:pPr algn="ctr"/>
+                      <a:r>
+                        <a:rPr lang="en-US" dirty="0"/>
+                        <a:t>6</a:t>
+                      </a:r>
+                    </a:p>
+                  </a:txBody>
+                  <a:tcPr>
+                    <a:solidFill>
+                      <a:schemeClr val="accent1">
+                        <a:lumMod val="75000"/>
+                      </a:schemeClr>
+                    </a:solidFill>
+                  </a:tcPr>
+                </a:tc>
+                <a:tc>
+                  <a:txBody>
+                    <a:bodyPr/>
+                    <a:lstStyle/>
+                    <a:p>
+                      <a:pPr algn="ctr"/>
+                      <a:r>
+                        <a:rPr lang="en-US" dirty="0"/>
+                        <a:t>7</a:t>
+                      </a:r>
+                    </a:p>
+                  </a:txBody>
+                  <a:tcPr>
+                    <a:solidFill>
+                      <a:schemeClr val="accent1">
+                        <a:lumMod val="75000"/>
+                      </a:schemeClr>
+                    </a:solidFill>
+                  </a:tcPr>
+                </a:tc>
+                <a:extLst>
+                  <a:ext uri="{0D108BD9-81ED-4DB2-BD59-A6C34878D82A}">
+                    <a16:rowId xmlns:a16="http://schemas.microsoft.com/office/drawing/2014/main" val="1507797456"/>
+                  </a:ext>
+                </a:extLst>
+              </a:tr>
+              <a:tr h="372485">
+                <a:tc>
+                  <a:txBody>
+                    <a:bodyPr/>
+                    <a:lstStyle/>
+                    <a:p>
+                      <a:pPr marL="0" algn="ctr" defTabSz="914400" rtl="0" eaLnBrk="1" latinLnBrk="0" hangingPunct="1"/>
+                      <a:r>
+                        <a:rPr lang="en-US" sz="1800" b="1" kern="1200" dirty="0">
+                          <a:solidFill>
+                            <a:schemeClr val="lt1"/>
+                          </a:solidFill>
+                          <a:latin typeface="+mn-lt"/>
+                          <a:ea typeface="+mn-ea"/>
+                          <a:cs typeface="+mn-cs"/>
+                        </a:rPr>
+                        <a:t>1</a:t>
+                      </a:r>
+                    </a:p>
+                  </a:txBody>
+                  <a:tcPr>
+                    <a:solidFill>
+                      <a:schemeClr val="accent1">
+                        <a:lumMod val="75000"/>
+                      </a:schemeClr>
+                    </a:solidFill>
+                  </a:tcPr>
+                </a:tc>
+                <a:tc>
+                  <a:txBody>
+                    <a:bodyPr/>
+                    <a:lstStyle/>
+                    <a:p>
+                      <a:pPr algn="ctr"/>
+                      <a:r>
+                        <a:rPr lang="en-US" dirty="0"/>
+                        <a:t>0</a:t>
+                      </a:r>
+                    </a:p>
+                  </a:txBody>
+                  <a:tcPr/>
+                </a:tc>
+                <a:tc>
+                  <a:txBody>
+                    <a:bodyPr/>
+                    <a:lstStyle/>
+                    <a:p>
+                      <a:pPr algn="ctr"/>
+                      <a:r>
+                        <a:rPr lang="en-US" b="1" dirty="0"/>
+                        <a:t>1</a:t>
+                      </a:r>
+                    </a:p>
+                  </a:txBody>
+                  <a:tcPr/>
+                </a:tc>
+                <a:tc>
+                  <a:txBody>
+                    <a:bodyPr/>
+                    <a:lstStyle/>
+                    <a:p>
+                      <a:pPr algn="ctr"/>
+                      <a:r>
+                        <a:rPr lang="en-US" dirty="0"/>
+                        <a:t>0</a:t>
+                      </a:r>
+                    </a:p>
+                  </a:txBody>
+                  <a:tcPr/>
+                </a:tc>
+                <a:tc>
+                  <a:txBody>
+                    <a:bodyPr/>
+                    <a:lstStyle/>
+                    <a:p>
+                      <a:pPr algn="ctr"/>
+                      <a:r>
+                        <a:rPr lang="en-US" dirty="0"/>
+                        <a:t>0</a:t>
+                      </a:r>
+                    </a:p>
+                  </a:txBody>
+                  <a:tcPr/>
+                </a:tc>
+                <a:tc>
+                  <a:txBody>
+                    <a:bodyPr/>
+                    <a:lstStyle/>
+                    <a:p>
+                      <a:pPr algn="ctr"/>
+                      <a:r>
+                        <a:rPr lang="en-US" dirty="0"/>
+                        <a:t>0</a:t>
+                      </a:r>
+                    </a:p>
+                  </a:txBody>
+                  <a:tcPr/>
+                </a:tc>
+                <a:tc>
+                  <a:txBody>
+                    <a:bodyPr/>
+                    <a:lstStyle/>
+                    <a:p>
+                      <a:pPr algn="ctr"/>
+                      <a:r>
+                        <a:rPr lang="en-US" dirty="0"/>
+                        <a:t>0</a:t>
+                      </a:r>
+                    </a:p>
+                  </a:txBody>
+                  <a:tcPr/>
+                </a:tc>
+                <a:tc>
+                  <a:txBody>
+                    <a:bodyPr/>
+                    <a:lstStyle/>
+                    <a:p>
+                      <a:pPr algn="ctr"/>
+                      <a:r>
+                        <a:rPr lang="en-US" dirty="0"/>
+                        <a:t>0</a:t>
+                      </a:r>
+                    </a:p>
+                  </a:txBody>
+                  <a:tcPr/>
+                </a:tc>
+                <a:extLst>
+                  <a:ext uri="{0D108BD9-81ED-4DB2-BD59-A6C34878D82A}">
+                    <a16:rowId xmlns:a16="http://schemas.microsoft.com/office/drawing/2014/main" val="1612217198"/>
+                  </a:ext>
+                </a:extLst>
+              </a:tr>
+              <a:tr h="372485">
+                <a:tc>
+                  <a:txBody>
+                    <a:bodyPr/>
+                    <a:lstStyle/>
+                    <a:p>
+                      <a:pPr marL="0" algn="ctr" defTabSz="914400" rtl="0" eaLnBrk="1" latinLnBrk="0" hangingPunct="1"/>
+                      <a:r>
+                        <a:rPr lang="en-US" sz="1800" b="1" kern="1200" dirty="0">
+                          <a:solidFill>
+                            <a:schemeClr val="lt1"/>
+                          </a:solidFill>
+                          <a:latin typeface="+mn-lt"/>
+                          <a:ea typeface="+mn-ea"/>
+                          <a:cs typeface="+mn-cs"/>
+                        </a:rPr>
+                        <a:t>2</a:t>
+                      </a:r>
+                    </a:p>
+                  </a:txBody>
+                  <a:tcPr>
+                    <a:solidFill>
+                      <a:schemeClr val="accent1">
+                        <a:lumMod val="75000"/>
+                      </a:schemeClr>
+                    </a:solidFill>
+                  </a:tcPr>
+                </a:tc>
+                <a:tc>
+                  <a:txBody>
+                    <a:bodyPr/>
+                    <a:lstStyle/>
+                    <a:p>
+                      <a:pPr algn="ctr"/>
+                      <a:r>
+                        <a:rPr lang="en-US" b="1" dirty="0"/>
+                        <a:t>1</a:t>
+                      </a:r>
+                    </a:p>
+                  </a:txBody>
+                  <a:tcPr/>
+                </a:tc>
+                <a:tc>
+                  <a:txBody>
+                    <a:bodyPr/>
+                    <a:lstStyle/>
+                    <a:p>
+                      <a:pPr algn="ctr"/>
+                      <a:r>
+                        <a:rPr lang="en-US" dirty="0"/>
+                        <a:t>0</a:t>
+                      </a:r>
+                    </a:p>
+                  </a:txBody>
+                  <a:tcPr/>
+                </a:tc>
+                <a:tc>
+                  <a:txBody>
+                    <a:bodyPr/>
+                    <a:lstStyle/>
+                    <a:p>
+                      <a:pPr algn="ctr"/>
+                      <a:r>
+                        <a:rPr lang="en-US" b="1" dirty="0"/>
+                        <a:t>1</a:t>
+                      </a:r>
+                    </a:p>
+                  </a:txBody>
+                  <a:tcPr/>
+                </a:tc>
+                <a:tc>
+                  <a:txBody>
+                    <a:bodyPr/>
+                    <a:lstStyle/>
+                    <a:p>
+                      <a:pPr algn="ctr"/>
+                      <a:r>
+                        <a:rPr lang="en-US" dirty="0"/>
+                        <a:t>0</a:t>
+                      </a:r>
+                    </a:p>
+                  </a:txBody>
+                  <a:tcPr/>
+                </a:tc>
+                <a:tc>
+                  <a:txBody>
+                    <a:bodyPr/>
+                    <a:lstStyle/>
+                    <a:p>
+                      <a:pPr algn="ctr"/>
+                      <a:r>
+                        <a:rPr lang="en-US" b="1" dirty="0"/>
+                        <a:t>1</a:t>
+                      </a:r>
+                    </a:p>
+                  </a:txBody>
+                  <a:tcPr/>
+                </a:tc>
+                <a:tc>
+                  <a:txBody>
+                    <a:bodyPr/>
+                    <a:lstStyle/>
+                    <a:p>
+                      <a:pPr algn="ctr"/>
+                      <a:r>
+                        <a:rPr lang="en-US" dirty="0"/>
+                        <a:t>0</a:t>
+                      </a:r>
+                    </a:p>
+                  </a:txBody>
+                  <a:tcPr/>
+                </a:tc>
+                <a:tc>
+                  <a:txBody>
+                    <a:bodyPr/>
+                    <a:lstStyle/>
+                    <a:p>
+                      <a:pPr algn="ctr"/>
+                      <a:r>
+                        <a:rPr lang="en-US" dirty="0"/>
+                        <a:t>0</a:t>
+                      </a:r>
+                    </a:p>
+                  </a:txBody>
+                  <a:tcPr/>
+                </a:tc>
+                <a:extLst>
+                  <a:ext uri="{0D108BD9-81ED-4DB2-BD59-A6C34878D82A}">
+                    <a16:rowId xmlns:a16="http://schemas.microsoft.com/office/drawing/2014/main" val="3754412084"/>
+                  </a:ext>
+                </a:extLst>
+              </a:tr>
+              <a:tr h="372485">
+                <a:tc>
+                  <a:txBody>
+                    <a:bodyPr/>
+                    <a:lstStyle/>
+                    <a:p>
+                      <a:pPr marL="0" algn="ctr" defTabSz="914400" rtl="0" eaLnBrk="1" latinLnBrk="0" hangingPunct="1"/>
+                      <a:r>
+                        <a:rPr lang="en-US" sz="1800" b="1" kern="1200" dirty="0">
+                          <a:solidFill>
+                            <a:schemeClr val="lt1"/>
+                          </a:solidFill>
+                          <a:latin typeface="+mn-lt"/>
+                          <a:ea typeface="+mn-ea"/>
+                          <a:cs typeface="+mn-cs"/>
+                        </a:rPr>
+                        <a:t>3</a:t>
+                      </a:r>
+                    </a:p>
+                  </a:txBody>
+                  <a:tcPr>
+                    <a:solidFill>
+                      <a:schemeClr val="accent1">
+                        <a:lumMod val="75000"/>
+                      </a:schemeClr>
+                    </a:solidFill>
+                  </a:tcPr>
+                </a:tc>
+                <a:tc>
+                  <a:txBody>
+                    <a:bodyPr/>
+                    <a:lstStyle/>
+                    <a:p>
+                      <a:pPr algn="ctr"/>
+                      <a:r>
+                        <a:rPr lang="en-US" dirty="0"/>
+                        <a:t>0</a:t>
+                      </a:r>
+                    </a:p>
+                  </a:txBody>
+                  <a:tcPr/>
+                </a:tc>
+                <a:tc>
+                  <a:txBody>
+                    <a:bodyPr/>
+                    <a:lstStyle/>
+                    <a:p>
+                      <a:pPr algn="ctr"/>
+                      <a:r>
+                        <a:rPr lang="en-US" b="1" dirty="0"/>
+                        <a:t>1</a:t>
+                      </a:r>
+                    </a:p>
+                  </a:txBody>
+                  <a:tcPr/>
+                </a:tc>
+                <a:tc>
+                  <a:txBody>
+                    <a:bodyPr/>
+                    <a:lstStyle/>
+                    <a:p>
+                      <a:pPr algn="ctr"/>
+                      <a:r>
+                        <a:rPr lang="en-US" dirty="0"/>
+                        <a:t>0</a:t>
+                      </a:r>
+                    </a:p>
+                  </a:txBody>
+                  <a:tcPr/>
+                </a:tc>
+                <a:tc>
+                  <a:txBody>
+                    <a:bodyPr/>
+                    <a:lstStyle/>
+                    <a:p>
+                      <a:pPr algn="ctr"/>
+                      <a:r>
+                        <a:rPr lang="en-US" b="1" dirty="0"/>
+                        <a:t>1</a:t>
+                      </a:r>
+                    </a:p>
+                  </a:txBody>
+                  <a:tcPr/>
+                </a:tc>
+                <a:tc>
+                  <a:txBody>
+                    <a:bodyPr/>
+                    <a:lstStyle/>
+                    <a:p>
+                      <a:pPr algn="ctr"/>
+                      <a:r>
+                        <a:rPr lang="en-US" dirty="0"/>
+                        <a:t>0</a:t>
+                      </a:r>
+                    </a:p>
+                  </a:txBody>
+                  <a:tcPr/>
+                </a:tc>
+                <a:tc>
+                  <a:txBody>
+                    <a:bodyPr/>
+                    <a:lstStyle/>
+                    <a:p>
+                      <a:pPr algn="ctr"/>
+                      <a:r>
+                        <a:rPr lang="en-US" dirty="0"/>
+                        <a:t>0</a:t>
+                      </a:r>
+                    </a:p>
+                  </a:txBody>
+                  <a:tcPr/>
+                </a:tc>
+                <a:tc>
+                  <a:txBody>
+                    <a:bodyPr/>
+                    <a:lstStyle/>
+                    <a:p>
+                      <a:pPr algn="ctr"/>
+                      <a:r>
+                        <a:rPr lang="en-US" dirty="0"/>
+                        <a:t>0</a:t>
+                      </a:r>
+                    </a:p>
+                  </a:txBody>
+                  <a:tcPr/>
+                </a:tc>
+                <a:extLst>
+                  <a:ext uri="{0D108BD9-81ED-4DB2-BD59-A6C34878D82A}">
+                    <a16:rowId xmlns:a16="http://schemas.microsoft.com/office/drawing/2014/main" val="30928094"/>
+                  </a:ext>
+                </a:extLst>
+              </a:tr>
+              <a:tr h="372485">
+                <a:tc>
+                  <a:txBody>
+                    <a:bodyPr/>
+                    <a:lstStyle/>
+                    <a:p>
+                      <a:pPr marL="0" algn="ctr" defTabSz="914400" rtl="0" eaLnBrk="1" latinLnBrk="0" hangingPunct="1"/>
+                      <a:r>
+                        <a:rPr lang="en-US" sz="1800" b="1" kern="1200" dirty="0">
+                          <a:solidFill>
+                            <a:schemeClr val="lt1"/>
+                          </a:solidFill>
+                          <a:latin typeface="+mn-lt"/>
+                          <a:ea typeface="+mn-ea"/>
+                          <a:cs typeface="+mn-cs"/>
+                        </a:rPr>
+                        <a:t>4</a:t>
+                      </a:r>
+                    </a:p>
+                  </a:txBody>
+                  <a:tcPr>
+                    <a:solidFill>
+                      <a:schemeClr val="accent1">
+                        <a:lumMod val="75000"/>
+                      </a:schemeClr>
+                    </a:solidFill>
+                  </a:tcPr>
+                </a:tc>
+                <a:tc>
+                  <a:txBody>
+                    <a:bodyPr/>
+                    <a:lstStyle/>
+                    <a:p>
+                      <a:pPr algn="ctr"/>
+                      <a:r>
+                        <a:rPr lang="en-US" dirty="0"/>
+                        <a:t>0</a:t>
+                      </a:r>
+                    </a:p>
+                  </a:txBody>
+                  <a:tcPr/>
+                </a:tc>
+                <a:tc>
+                  <a:txBody>
+                    <a:bodyPr/>
+                    <a:lstStyle/>
+                    <a:p>
+                      <a:pPr algn="ctr"/>
+                      <a:r>
+                        <a:rPr lang="en-US" dirty="0"/>
+                        <a:t>0</a:t>
+                      </a:r>
+                    </a:p>
+                  </a:txBody>
+                  <a:tcPr/>
+                </a:tc>
+                <a:tc>
+                  <a:txBody>
+                    <a:bodyPr/>
+                    <a:lstStyle/>
+                    <a:p>
+                      <a:pPr algn="ctr"/>
+                      <a:r>
+                        <a:rPr lang="en-US" b="1" dirty="0"/>
+                        <a:t>1</a:t>
+                      </a:r>
+                    </a:p>
+                  </a:txBody>
+                  <a:tcPr/>
+                </a:tc>
+                <a:tc>
+                  <a:txBody>
+                    <a:bodyPr/>
+                    <a:lstStyle/>
+                    <a:p>
+                      <a:pPr algn="ctr"/>
+                      <a:r>
+                        <a:rPr lang="en-US" dirty="0"/>
+                        <a:t>0</a:t>
+                      </a:r>
+                    </a:p>
+                  </a:txBody>
+                  <a:tcPr/>
+                </a:tc>
+                <a:tc>
+                  <a:txBody>
+                    <a:bodyPr/>
+                    <a:lstStyle/>
+                    <a:p>
+                      <a:pPr algn="ctr"/>
+                      <a:r>
+                        <a:rPr lang="en-US" b="1" dirty="0"/>
+                        <a:t>1</a:t>
+                      </a:r>
+                    </a:p>
+                  </a:txBody>
+                  <a:tcPr/>
+                </a:tc>
+                <a:tc>
+                  <a:txBody>
+                    <a:bodyPr/>
+                    <a:lstStyle/>
+                    <a:p>
+                      <a:pPr algn="ctr"/>
+                      <a:r>
+                        <a:rPr lang="en-US" dirty="0"/>
+                        <a:t>0</a:t>
+                      </a:r>
+                    </a:p>
+                  </a:txBody>
+                  <a:tcPr/>
+                </a:tc>
+                <a:tc>
+                  <a:txBody>
+                    <a:bodyPr/>
+                    <a:lstStyle/>
+                    <a:p>
+                      <a:pPr algn="ctr"/>
+                      <a:r>
+                        <a:rPr lang="en-US" dirty="0"/>
+                        <a:t>0</a:t>
+                      </a:r>
+                    </a:p>
+                  </a:txBody>
+                  <a:tcPr/>
+                </a:tc>
+                <a:extLst>
+                  <a:ext uri="{0D108BD9-81ED-4DB2-BD59-A6C34878D82A}">
+                    <a16:rowId xmlns:a16="http://schemas.microsoft.com/office/drawing/2014/main" val="1194133716"/>
+                  </a:ext>
+                </a:extLst>
+              </a:tr>
+              <a:tr h="372485">
+                <a:tc>
+                  <a:txBody>
+                    <a:bodyPr/>
+                    <a:lstStyle/>
+                    <a:p>
+                      <a:pPr marL="0" algn="ctr" defTabSz="914400" rtl="0" eaLnBrk="1" latinLnBrk="0" hangingPunct="1"/>
+                      <a:r>
+                        <a:rPr lang="en-US" sz="1800" b="1" kern="1200" dirty="0">
+                          <a:solidFill>
+                            <a:schemeClr val="lt1"/>
+                          </a:solidFill>
+                          <a:latin typeface="+mn-lt"/>
+                          <a:ea typeface="+mn-ea"/>
+                          <a:cs typeface="+mn-cs"/>
+                        </a:rPr>
+                        <a:t>5</a:t>
+                      </a:r>
+                    </a:p>
+                  </a:txBody>
+                  <a:tcPr>
+                    <a:solidFill>
+                      <a:schemeClr val="accent1">
+                        <a:lumMod val="75000"/>
+                      </a:schemeClr>
+                    </a:solidFill>
+                  </a:tcPr>
+                </a:tc>
+                <a:tc>
+                  <a:txBody>
+                    <a:bodyPr/>
+                    <a:lstStyle/>
+                    <a:p>
+                      <a:pPr algn="ctr"/>
+                      <a:r>
+                        <a:rPr lang="en-US" dirty="0"/>
+                        <a:t>0</a:t>
+                      </a:r>
+                    </a:p>
+                  </a:txBody>
+                  <a:tcPr/>
+                </a:tc>
+                <a:tc>
+                  <a:txBody>
+                    <a:bodyPr/>
+                    <a:lstStyle/>
+                    <a:p>
+                      <a:pPr algn="ctr"/>
+                      <a:r>
+                        <a:rPr lang="en-US" b="1" dirty="0"/>
+                        <a:t>1</a:t>
+                      </a:r>
+                    </a:p>
+                  </a:txBody>
+                  <a:tcPr/>
+                </a:tc>
+                <a:tc>
+                  <a:txBody>
+                    <a:bodyPr/>
+                    <a:lstStyle/>
+                    <a:p>
+                      <a:pPr algn="ctr"/>
+                      <a:r>
+                        <a:rPr lang="en-US" dirty="0"/>
+                        <a:t>0</a:t>
+                      </a:r>
+                    </a:p>
+                  </a:txBody>
+                  <a:tcPr/>
+                </a:tc>
+                <a:tc>
+                  <a:txBody>
+                    <a:bodyPr/>
+                    <a:lstStyle/>
+                    <a:p>
+                      <a:pPr algn="ctr"/>
+                      <a:r>
+                        <a:rPr lang="en-US" b="1" dirty="0"/>
+                        <a:t>1</a:t>
+                      </a:r>
+                    </a:p>
+                  </a:txBody>
+                  <a:tcPr/>
+                </a:tc>
+                <a:tc>
+                  <a:txBody>
+                    <a:bodyPr/>
+                    <a:lstStyle/>
+                    <a:p>
+                      <a:pPr algn="ctr"/>
+                      <a:r>
+                        <a:rPr lang="en-US" dirty="0"/>
+                        <a:t>0</a:t>
+                      </a:r>
+                    </a:p>
+                  </a:txBody>
+                  <a:tcPr/>
+                </a:tc>
+                <a:tc>
+                  <a:txBody>
+                    <a:bodyPr/>
+                    <a:lstStyle/>
+                    <a:p>
+                      <a:pPr algn="ctr"/>
+                      <a:r>
+                        <a:rPr lang="en-US" b="1" dirty="0"/>
+                        <a:t>1</a:t>
+                      </a:r>
+                    </a:p>
+                  </a:txBody>
+                  <a:tcPr/>
+                </a:tc>
+                <a:tc>
+                  <a:txBody>
+                    <a:bodyPr/>
+                    <a:lstStyle/>
+                    <a:p>
+                      <a:pPr algn="ctr"/>
+                      <a:r>
+                        <a:rPr lang="en-US" b="1" dirty="0"/>
+                        <a:t>1</a:t>
+                      </a:r>
+                    </a:p>
+                  </a:txBody>
+                  <a:tcPr/>
+                </a:tc>
+                <a:extLst>
+                  <a:ext uri="{0D108BD9-81ED-4DB2-BD59-A6C34878D82A}">
+                    <a16:rowId xmlns:a16="http://schemas.microsoft.com/office/drawing/2014/main" val="1938922504"/>
+                  </a:ext>
+                </a:extLst>
+              </a:tr>
+              <a:tr h="372485">
+                <a:tc>
+                  <a:txBody>
+                    <a:bodyPr/>
+                    <a:lstStyle/>
+                    <a:p>
+                      <a:pPr marL="0" algn="ctr" defTabSz="914400" rtl="0" eaLnBrk="1" latinLnBrk="0" hangingPunct="1"/>
+                      <a:r>
+                        <a:rPr lang="en-US" sz="1800" b="1" kern="1200" dirty="0">
+                          <a:solidFill>
+                            <a:schemeClr val="lt1"/>
+                          </a:solidFill>
+                          <a:latin typeface="+mn-lt"/>
+                          <a:ea typeface="+mn-ea"/>
+                          <a:cs typeface="+mn-cs"/>
+                        </a:rPr>
+                        <a:t>6</a:t>
+                      </a:r>
+                    </a:p>
+                  </a:txBody>
+                  <a:tcPr>
+                    <a:solidFill>
+                      <a:schemeClr val="accent1">
+                        <a:lumMod val="75000"/>
+                      </a:schemeClr>
+                    </a:solidFill>
+                  </a:tcPr>
+                </a:tc>
+                <a:tc>
+                  <a:txBody>
+                    <a:bodyPr/>
+                    <a:lstStyle/>
+                    <a:p>
+                      <a:pPr algn="ctr"/>
+                      <a:r>
+                        <a:rPr lang="en-US" dirty="0"/>
+                        <a:t>0</a:t>
+                      </a:r>
+                    </a:p>
+                  </a:txBody>
+                  <a:tcPr/>
+                </a:tc>
+                <a:tc>
+                  <a:txBody>
+                    <a:bodyPr/>
+                    <a:lstStyle/>
+                    <a:p>
+                      <a:pPr algn="ctr"/>
+                      <a:r>
+                        <a:rPr lang="en-US" dirty="0"/>
+                        <a:t>0</a:t>
+                      </a:r>
+                    </a:p>
+                  </a:txBody>
+                  <a:tcPr/>
+                </a:tc>
+                <a:tc>
+                  <a:txBody>
+                    <a:bodyPr/>
+                    <a:lstStyle/>
+                    <a:p>
+                      <a:pPr algn="ctr"/>
+                      <a:r>
+                        <a:rPr lang="en-US" dirty="0"/>
+                        <a:t>0</a:t>
+                      </a:r>
+                    </a:p>
+                  </a:txBody>
+                  <a:tcPr/>
+                </a:tc>
+                <a:tc>
+                  <a:txBody>
+                    <a:bodyPr/>
+                    <a:lstStyle/>
+                    <a:p>
+                      <a:pPr algn="ctr"/>
+                      <a:r>
+                        <a:rPr lang="en-US" dirty="0"/>
+                        <a:t>0</a:t>
+                      </a:r>
+                    </a:p>
+                  </a:txBody>
+                  <a:tcPr/>
+                </a:tc>
+                <a:tc>
+                  <a:txBody>
+                    <a:bodyPr/>
+                    <a:lstStyle/>
+                    <a:p>
+                      <a:pPr algn="ctr"/>
+                      <a:r>
+                        <a:rPr lang="en-US" b="1" dirty="0"/>
+                        <a:t>1</a:t>
+                      </a:r>
+                    </a:p>
+                  </a:txBody>
+                  <a:tcPr/>
+                </a:tc>
+                <a:tc>
+                  <a:txBody>
+                    <a:bodyPr/>
+                    <a:lstStyle/>
+                    <a:p>
+                      <a:pPr algn="ctr"/>
+                      <a:r>
+                        <a:rPr lang="en-US" dirty="0"/>
+                        <a:t>0</a:t>
+                      </a:r>
+                    </a:p>
+                  </a:txBody>
+                  <a:tcPr/>
+                </a:tc>
+                <a:tc>
+                  <a:txBody>
+                    <a:bodyPr/>
+                    <a:lstStyle/>
+                    <a:p>
+                      <a:pPr algn="ctr"/>
+                      <a:r>
+                        <a:rPr lang="en-US" b="1" dirty="0"/>
+                        <a:t>1</a:t>
+                      </a:r>
+                    </a:p>
+                  </a:txBody>
+                  <a:tcPr/>
+                </a:tc>
+                <a:extLst>
+                  <a:ext uri="{0D108BD9-81ED-4DB2-BD59-A6C34878D82A}">
+                    <a16:rowId xmlns:a16="http://schemas.microsoft.com/office/drawing/2014/main" val="1064427859"/>
+                  </a:ext>
+                </a:extLst>
+              </a:tr>
+              <a:tr h="372485">
+                <a:tc>
+                  <a:txBody>
+                    <a:bodyPr/>
+                    <a:lstStyle/>
+                    <a:p>
+                      <a:pPr marL="0" algn="ctr" defTabSz="914400" rtl="0" eaLnBrk="1" latinLnBrk="0" hangingPunct="1"/>
+                      <a:r>
+                        <a:rPr lang="en-US" sz="1800" b="1" kern="1200" dirty="0">
+                          <a:solidFill>
+                            <a:schemeClr val="lt1"/>
+                          </a:solidFill>
+                          <a:latin typeface="+mn-lt"/>
+                          <a:ea typeface="+mn-ea"/>
+                          <a:cs typeface="+mn-cs"/>
+                        </a:rPr>
+                        <a:t>7</a:t>
+                      </a:r>
+                    </a:p>
+                  </a:txBody>
+                  <a:tcPr>
+                    <a:solidFill>
+                      <a:schemeClr val="accent1">
+                        <a:lumMod val="75000"/>
+                      </a:schemeClr>
+                    </a:solidFill>
+                  </a:tcPr>
+                </a:tc>
+                <a:tc>
+                  <a:txBody>
+                    <a:bodyPr/>
+                    <a:lstStyle/>
+                    <a:p>
+                      <a:pPr algn="ctr"/>
+                      <a:r>
+                        <a:rPr lang="en-US" dirty="0"/>
+                        <a:t>0</a:t>
+                      </a:r>
+                    </a:p>
+                  </a:txBody>
+                  <a:tcPr/>
+                </a:tc>
+                <a:tc>
+                  <a:txBody>
+                    <a:bodyPr/>
+                    <a:lstStyle/>
+                    <a:p>
+                      <a:pPr algn="ctr"/>
+                      <a:r>
+                        <a:rPr lang="en-US" dirty="0"/>
+                        <a:t>0</a:t>
+                      </a:r>
+                    </a:p>
+                  </a:txBody>
+                  <a:tcPr/>
+                </a:tc>
+                <a:tc>
+                  <a:txBody>
+                    <a:bodyPr/>
+                    <a:lstStyle/>
+                    <a:p>
+                      <a:pPr algn="ctr"/>
+                      <a:r>
+                        <a:rPr lang="en-US" dirty="0"/>
+                        <a:t>0</a:t>
+                      </a:r>
+                    </a:p>
+                  </a:txBody>
+                  <a:tcPr/>
+                </a:tc>
+                <a:tc>
+                  <a:txBody>
+                    <a:bodyPr/>
+                    <a:lstStyle/>
+                    <a:p>
+                      <a:pPr algn="ctr"/>
+                      <a:r>
+                        <a:rPr lang="en-US" dirty="0"/>
+                        <a:t>0</a:t>
+                      </a:r>
+                    </a:p>
+                  </a:txBody>
+                  <a:tcPr/>
+                </a:tc>
+                <a:tc>
+                  <a:txBody>
+                    <a:bodyPr/>
+                    <a:lstStyle/>
+                    <a:p>
+                      <a:pPr algn="ctr"/>
+                      <a:r>
+                        <a:rPr lang="en-US" b="1" dirty="0"/>
+                        <a:t>1</a:t>
+                      </a:r>
+                    </a:p>
+                  </a:txBody>
+                  <a:tcPr/>
+                </a:tc>
+                <a:tc>
+                  <a:txBody>
+                    <a:bodyPr/>
+                    <a:lstStyle/>
+                    <a:p>
+                      <a:pPr algn="ctr"/>
+                      <a:r>
+                        <a:rPr lang="en-US" b="1" dirty="0"/>
+                        <a:t>1</a:t>
+                      </a:r>
+                    </a:p>
+                  </a:txBody>
+                  <a:tcPr/>
+                </a:tc>
+                <a:tc>
+                  <a:txBody>
+                    <a:bodyPr/>
+                    <a:lstStyle/>
+                    <a:p>
+                      <a:pPr algn="ctr"/>
+                      <a:r>
+                        <a:rPr lang="en-US" dirty="0"/>
+                        <a:t>0</a:t>
+                      </a:r>
+                    </a:p>
+                  </a:txBody>
+                  <a:tcPr/>
+                </a:tc>
+                <a:extLst>
+                  <a:ext uri="{0D108BD9-81ED-4DB2-BD59-A6C34878D82A}">
+                    <a16:rowId xmlns:a16="http://schemas.microsoft.com/office/drawing/2014/main" val="1162644250"/>
+                  </a:ext>
+                </a:extLst>
+              </a:tr>
+            </a:tbl>
+          </a:graphicData>
+        </a:graphic>
+      </p:graphicFrame>
+    </p:spTree>
+    <p:extLst>
+      <p:ext uri="{BB962C8B-B14F-4D97-AF65-F5344CB8AC3E}">
+        <p14:creationId xmlns:p14="http://schemas.microsoft.com/office/powerpoint/2010/main" val="2148280778"/>
+      </p:ext>
+    </p:extLst>
+  </p:cSld>
+  <p:clrMapOvr>
+    <a:masterClrMapping/>
+  </p:clrMapOvr>
+</p:sld>
+</file>
+
+<file path=ppt/slides/slide121.xml><?xml version="1.0" encoding="utf-8"?>
+<p:sld xmlns:a="http://schemas.openxmlformats.org/drawingml/2006/main" xmlns:r="http://schemas.openxmlformats.org/officeDocument/2006/relationships" xmlns:p="http://schemas.openxmlformats.org/presentationml/2006/main">
+  <p:cSld>
+    <p:spTree>
+      <p:nvGrpSpPr>
+        <p:cNvPr id="1" name="">
+          <a:extLst>
+            <a:ext uri="{FF2B5EF4-FFF2-40B4-BE49-F238E27FC236}">
+              <a16:creationId xmlns:a16="http://schemas.microsoft.com/office/drawing/2014/main" id="{2AD20B8C-4FA4-8707-9062-99D1E18D3860}"/>
+            </a:ext>
+          </a:extLst>
+        </p:cNvPr>
+        <p:cNvGrpSpPr/>
+        <p:nvPr/>
+      </p:nvGrpSpPr>
+      <p:grpSpPr>
+        <a:xfrm>
+          <a:off x="0" y="0"/>
+          <a:ext cx="0" cy="0"/>
+          <a:chOff x="0" y="0"/>
+          <a:chExt cx="0" cy="0"/>
+        </a:xfrm>
+      </p:grpSpPr>
+      <p:sp>
+        <p:nvSpPr>
+          <p:cNvPr id="2" name="Title 1">
+            <a:extLst>
+              <a:ext uri="{FF2B5EF4-FFF2-40B4-BE49-F238E27FC236}">
+                <a16:creationId xmlns:a16="http://schemas.microsoft.com/office/drawing/2014/main" id="{52CE501F-C764-46E6-28BC-123771CBE69A}"/>
+              </a:ext>
+            </a:extLst>
+          </p:cNvPr>
+          <p:cNvSpPr>
+            <a:spLocks noGrp="1"/>
+          </p:cNvSpPr>
+          <p:nvPr>
+            <p:ph type="title"/>
+          </p:nvPr>
+        </p:nvSpPr>
+        <p:spPr/>
+        <p:txBody>
+          <a:bodyPr/>
+          <a:lstStyle/>
+          <a:p>
+            <a:r>
+              <a:rPr lang="en-US" dirty="0"/>
+              <a:t>Graphs</a:t>
+            </a:r>
+          </a:p>
+        </p:txBody>
+      </p:sp>
+      <p:sp>
+        <p:nvSpPr>
+          <p:cNvPr id="3" name="Content Placeholder 2">
+            <a:extLst>
+              <a:ext uri="{FF2B5EF4-FFF2-40B4-BE49-F238E27FC236}">
+                <a16:creationId xmlns:a16="http://schemas.microsoft.com/office/drawing/2014/main" id="{4A71BD0E-3A2B-0969-821C-9F75D8679689}"/>
+              </a:ext>
+            </a:extLst>
+          </p:cNvPr>
+          <p:cNvSpPr>
+            <a:spLocks noGrp="1"/>
+          </p:cNvSpPr>
+          <p:nvPr>
+            <p:ph idx="1"/>
+          </p:nvPr>
+        </p:nvSpPr>
+        <p:spPr/>
+        <p:txBody>
+          <a:bodyPr/>
+          <a:lstStyle/>
+          <a:p>
+            <a:r>
+              <a:rPr lang="en-US" dirty="0"/>
+              <a:t>There are </a:t>
+            </a:r>
+            <a:r>
+              <a:rPr lang="en-US" b="1" dirty="0"/>
+              <a:t>2</a:t>
+            </a:r>
+            <a:r>
+              <a:rPr lang="en-US" dirty="0"/>
+              <a:t> cycles in this graph </a:t>
+            </a:r>
+            <a:endParaRPr lang="en-US" i="1" dirty="0"/>
+          </a:p>
+        </p:txBody>
+      </p:sp>
+      <p:graphicFrame>
+        <p:nvGraphicFramePr>
+          <p:cNvPr id="4" name="Table 3">
+            <a:extLst>
+              <a:ext uri="{FF2B5EF4-FFF2-40B4-BE49-F238E27FC236}">
+                <a16:creationId xmlns:a16="http://schemas.microsoft.com/office/drawing/2014/main" id="{E0C47EAF-5449-5F11-5684-2C1B8CFA6533}"/>
+              </a:ext>
+            </a:extLst>
+          </p:cNvPr>
+          <p:cNvGraphicFramePr>
+            <a:graphicFrameLocks noGrp="1"/>
+          </p:cNvGraphicFramePr>
+          <p:nvPr/>
+        </p:nvGraphicFramePr>
+        <p:xfrm>
+          <a:off x="1432187" y="3014054"/>
+          <a:ext cx="4347832" cy="2979880"/>
+        </p:xfrm>
+        <a:graphic>
+          <a:graphicData uri="http://schemas.openxmlformats.org/drawingml/2006/table">
+            <a:tbl>
+              <a:tblPr firstRow="1" bandRow="1">
+                <a:tableStyleId>{B301B821-A1FF-4177-AEE7-76D212191A09}</a:tableStyleId>
+              </a:tblPr>
+              <a:tblGrid>
+                <a:gridCol w="543479">
+                  <a:extLst>
+                    <a:ext uri="{9D8B030D-6E8A-4147-A177-3AD203B41FA5}">
+                      <a16:colId xmlns:a16="http://schemas.microsoft.com/office/drawing/2014/main" val="2690793717"/>
+                    </a:ext>
+                  </a:extLst>
+                </a:gridCol>
+                <a:gridCol w="543479">
+                  <a:extLst>
+                    <a:ext uri="{9D8B030D-6E8A-4147-A177-3AD203B41FA5}">
+                      <a16:colId xmlns:a16="http://schemas.microsoft.com/office/drawing/2014/main" val="2670579438"/>
+                    </a:ext>
+                  </a:extLst>
+                </a:gridCol>
+                <a:gridCol w="543479">
+                  <a:extLst>
+                    <a:ext uri="{9D8B030D-6E8A-4147-A177-3AD203B41FA5}">
+                      <a16:colId xmlns:a16="http://schemas.microsoft.com/office/drawing/2014/main" val="3624113693"/>
+                    </a:ext>
+                  </a:extLst>
+                </a:gridCol>
+                <a:gridCol w="543479">
+                  <a:extLst>
+                    <a:ext uri="{9D8B030D-6E8A-4147-A177-3AD203B41FA5}">
+                      <a16:colId xmlns:a16="http://schemas.microsoft.com/office/drawing/2014/main" val="2944418674"/>
+                    </a:ext>
+                  </a:extLst>
+                </a:gridCol>
+                <a:gridCol w="543479">
+                  <a:extLst>
+                    <a:ext uri="{9D8B030D-6E8A-4147-A177-3AD203B41FA5}">
+                      <a16:colId xmlns:a16="http://schemas.microsoft.com/office/drawing/2014/main" val="2504296768"/>
+                    </a:ext>
+                  </a:extLst>
+                </a:gridCol>
+                <a:gridCol w="543479">
+                  <a:extLst>
+                    <a:ext uri="{9D8B030D-6E8A-4147-A177-3AD203B41FA5}">
+                      <a16:colId xmlns:a16="http://schemas.microsoft.com/office/drawing/2014/main" val="1002408205"/>
+                    </a:ext>
+                  </a:extLst>
+                </a:gridCol>
+                <a:gridCol w="543479">
+                  <a:extLst>
+                    <a:ext uri="{9D8B030D-6E8A-4147-A177-3AD203B41FA5}">
+                      <a16:colId xmlns:a16="http://schemas.microsoft.com/office/drawing/2014/main" val="1395760455"/>
+                    </a:ext>
+                  </a:extLst>
+                </a:gridCol>
+                <a:gridCol w="543479">
+                  <a:extLst>
+                    <a:ext uri="{9D8B030D-6E8A-4147-A177-3AD203B41FA5}">
+                      <a16:colId xmlns:a16="http://schemas.microsoft.com/office/drawing/2014/main" val="3774186086"/>
+                    </a:ext>
+                  </a:extLst>
+                </a:gridCol>
+              </a:tblGrid>
+              <a:tr h="372485">
+                <a:tc>
+                  <a:txBody>
+                    <a:bodyPr/>
+                    <a:lstStyle/>
+                    <a:p>
+                      <a:pPr algn="ctr"/>
+                      <a:endParaRPr lang="en-US" dirty="0"/>
+                    </a:p>
+                  </a:txBody>
+                  <a:tcPr>
+                    <a:solidFill>
+                      <a:schemeClr val="accent1">
+                        <a:lumMod val="75000"/>
+                      </a:schemeClr>
+                    </a:solidFill>
+                  </a:tcPr>
+                </a:tc>
+                <a:tc>
+                  <a:txBody>
+                    <a:bodyPr/>
+                    <a:lstStyle/>
+                    <a:p>
+                      <a:pPr algn="ctr"/>
+                      <a:r>
+                        <a:rPr lang="en-US" dirty="0"/>
+                        <a:t>1</a:t>
+                      </a:r>
+                    </a:p>
+                  </a:txBody>
+                  <a:tcPr>
+                    <a:solidFill>
+                      <a:schemeClr val="accent1">
+                        <a:lumMod val="75000"/>
+                      </a:schemeClr>
+                    </a:solidFill>
+                  </a:tcPr>
+                </a:tc>
+                <a:tc>
+                  <a:txBody>
+                    <a:bodyPr/>
+                    <a:lstStyle/>
+                    <a:p>
+                      <a:pPr algn="ctr"/>
+                      <a:r>
+                        <a:rPr lang="en-US" dirty="0"/>
+                        <a:t>2</a:t>
+                      </a:r>
+                    </a:p>
+                  </a:txBody>
+                  <a:tcPr>
+                    <a:solidFill>
+                      <a:schemeClr val="accent1">
+                        <a:lumMod val="75000"/>
+                      </a:schemeClr>
+                    </a:solidFill>
+                  </a:tcPr>
+                </a:tc>
+                <a:tc>
+                  <a:txBody>
+                    <a:bodyPr/>
+                    <a:lstStyle/>
+                    <a:p>
+                      <a:pPr algn="ctr"/>
+                      <a:r>
+                        <a:rPr lang="en-US" dirty="0"/>
+                        <a:t>3</a:t>
+                      </a:r>
+                    </a:p>
+                  </a:txBody>
+                  <a:tcPr>
+                    <a:solidFill>
+                      <a:schemeClr val="accent1">
+                        <a:lumMod val="75000"/>
+                      </a:schemeClr>
+                    </a:solidFill>
+                  </a:tcPr>
+                </a:tc>
+                <a:tc>
+                  <a:txBody>
+                    <a:bodyPr/>
+                    <a:lstStyle/>
+                    <a:p>
+                      <a:pPr algn="ctr"/>
+                      <a:r>
+                        <a:rPr lang="en-US" dirty="0"/>
+                        <a:t>4</a:t>
+                      </a:r>
+                    </a:p>
+                  </a:txBody>
+                  <a:tcPr>
+                    <a:solidFill>
+                      <a:schemeClr val="accent1">
+                        <a:lumMod val="75000"/>
+                      </a:schemeClr>
+                    </a:solidFill>
+                  </a:tcPr>
+                </a:tc>
+                <a:tc>
+                  <a:txBody>
+                    <a:bodyPr/>
+                    <a:lstStyle/>
+                    <a:p>
+                      <a:pPr algn="ctr"/>
+                      <a:r>
+                        <a:rPr lang="en-US" dirty="0"/>
+                        <a:t>5</a:t>
+                      </a:r>
+                    </a:p>
+                  </a:txBody>
+                  <a:tcPr>
+                    <a:solidFill>
+                      <a:schemeClr val="accent1">
+                        <a:lumMod val="75000"/>
+                      </a:schemeClr>
+                    </a:solidFill>
+                  </a:tcPr>
+                </a:tc>
+                <a:tc>
+                  <a:txBody>
+                    <a:bodyPr/>
+                    <a:lstStyle/>
+                    <a:p>
+                      <a:pPr algn="ctr"/>
+                      <a:r>
+                        <a:rPr lang="en-US" dirty="0"/>
+                        <a:t>6</a:t>
+                      </a:r>
+                    </a:p>
+                  </a:txBody>
+                  <a:tcPr>
+                    <a:solidFill>
+                      <a:schemeClr val="accent1">
+                        <a:lumMod val="75000"/>
+                      </a:schemeClr>
+                    </a:solidFill>
+                  </a:tcPr>
+                </a:tc>
+                <a:tc>
+                  <a:txBody>
+                    <a:bodyPr/>
+                    <a:lstStyle/>
+                    <a:p>
+                      <a:pPr algn="ctr"/>
+                      <a:r>
+                        <a:rPr lang="en-US" dirty="0"/>
+                        <a:t>7</a:t>
+                      </a:r>
+                    </a:p>
+                  </a:txBody>
+                  <a:tcPr>
+                    <a:solidFill>
+                      <a:schemeClr val="accent1">
+                        <a:lumMod val="75000"/>
+                      </a:schemeClr>
+                    </a:solidFill>
+                  </a:tcPr>
+                </a:tc>
+                <a:extLst>
+                  <a:ext uri="{0D108BD9-81ED-4DB2-BD59-A6C34878D82A}">
+                    <a16:rowId xmlns:a16="http://schemas.microsoft.com/office/drawing/2014/main" val="1507797456"/>
+                  </a:ext>
+                </a:extLst>
+              </a:tr>
+              <a:tr h="372485">
+                <a:tc>
+                  <a:txBody>
+                    <a:bodyPr/>
+                    <a:lstStyle/>
+                    <a:p>
+                      <a:pPr marL="0" algn="ctr" defTabSz="914400" rtl="0" eaLnBrk="1" latinLnBrk="0" hangingPunct="1"/>
+                      <a:r>
+                        <a:rPr lang="en-US" sz="1800" b="1" kern="1200" dirty="0">
+                          <a:solidFill>
+                            <a:schemeClr val="lt1"/>
+                          </a:solidFill>
+                          <a:latin typeface="+mn-lt"/>
+                          <a:ea typeface="+mn-ea"/>
+                          <a:cs typeface="+mn-cs"/>
+                        </a:rPr>
+                        <a:t>1</a:t>
+                      </a:r>
+                    </a:p>
+                  </a:txBody>
+                  <a:tcPr>
+                    <a:solidFill>
+                      <a:schemeClr val="accent1">
+                        <a:lumMod val="75000"/>
+                      </a:schemeClr>
+                    </a:solidFill>
+                  </a:tcPr>
+                </a:tc>
+                <a:tc>
+                  <a:txBody>
+                    <a:bodyPr/>
+                    <a:lstStyle/>
+                    <a:p>
+                      <a:pPr algn="ctr"/>
+                      <a:r>
+                        <a:rPr lang="en-US" dirty="0"/>
+                        <a:t>0</a:t>
+                      </a:r>
+                    </a:p>
+                  </a:txBody>
+                  <a:tcPr/>
+                </a:tc>
+                <a:tc>
+                  <a:txBody>
+                    <a:bodyPr/>
+                    <a:lstStyle/>
+                    <a:p>
+                      <a:pPr algn="ctr"/>
+                      <a:r>
+                        <a:rPr lang="en-US" b="1" dirty="0"/>
+                        <a:t>1</a:t>
+                      </a:r>
+                    </a:p>
+                  </a:txBody>
+                  <a:tcPr/>
+                </a:tc>
+                <a:tc>
+                  <a:txBody>
+                    <a:bodyPr/>
+                    <a:lstStyle/>
+                    <a:p>
+                      <a:pPr algn="ctr"/>
+                      <a:r>
+                        <a:rPr lang="en-US" dirty="0"/>
+                        <a:t>0</a:t>
+                      </a:r>
+                    </a:p>
+                  </a:txBody>
+                  <a:tcPr/>
+                </a:tc>
+                <a:tc>
+                  <a:txBody>
+                    <a:bodyPr/>
+                    <a:lstStyle/>
+                    <a:p>
+                      <a:pPr algn="ctr"/>
+                      <a:r>
+                        <a:rPr lang="en-US" dirty="0"/>
+                        <a:t>0</a:t>
+                      </a:r>
+                    </a:p>
+                  </a:txBody>
+                  <a:tcPr/>
+                </a:tc>
+                <a:tc>
+                  <a:txBody>
+                    <a:bodyPr/>
+                    <a:lstStyle/>
+                    <a:p>
+                      <a:pPr algn="ctr"/>
+                      <a:r>
+                        <a:rPr lang="en-US" dirty="0"/>
+                        <a:t>0</a:t>
+                      </a:r>
+                    </a:p>
+                  </a:txBody>
+                  <a:tcPr/>
+                </a:tc>
+                <a:tc>
+                  <a:txBody>
+                    <a:bodyPr/>
+                    <a:lstStyle/>
+                    <a:p>
+                      <a:pPr algn="ctr"/>
+                      <a:r>
+                        <a:rPr lang="en-US" dirty="0"/>
+                        <a:t>0</a:t>
+                      </a:r>
+                    </a:p>
+                  </a:txBody>
+                  <a:tcPr/>
+                </a:tc>
+                <a:tc>
+                  <a:txBody>
+                    <a:bodyPr/>
+                    <a:lstStyle/>
+                    <a:p>
+                      <a:pPr algn="ctr"/>
+                      <a:r>
+                        <a:rPr lang="en-US" dirty="0"/>
+                        <a:t>0</a:t>
+                      </a:r>
+                    </a:p>
+                  </a:txBody>
+                  <a:tcPr/>
+                </a:tc>
+                <a:extLst>
+                  <a:ext uri="{0D108BD9-81ED-4DB2-BD59-A6C34878D82A}">
+                    <a16:rowId xmlns:a16="http://schemas.microsoft.com/office/drawing/2014/main" val="1612217198"/>
+                  </a:ext>
+                </a:extLst>
+              </a:tr>
+              <a:tr h="372485">
+                <a:tc>
+                  <a:txBody>
+                    <a:bodyPr/>
+                    <a:lstStyle/>
+                    <a:p>
+                      <a:pPr marL="0" algn="ctr" defTabSz="914400" rtl="0" eaLnBrk="1" latinLnBrk="0" hangingPunct="1"/>
+                      <a:r>
+                        <a:rPr lang="en-US" sz="1800" b="1" kern="1200" dirty="0">
+                          <a:solidFill>
+                            <a:schemeClr val="lt1"/>
+                          </a:solidFill>
+                          <a:latin typeface="+mn-lt"/>
+                          <a:ea typeface="+mn-ea"/>
+                          <a:cs typeface="+mn-cs"/>
+                        </a:rPr>
+                        <a:t>2</a:t>
+                      </a:r>
+                    </a:p>
+                  </a:txBody>
+                  <a:tcPr>
+                    <a:solidFill>
+                      <a:schemeClr val="accent1">
+                        <a:lumMod val="75000"/>
+                      </a:schemeClr>
+                    </a:solidFill>
+                  </a:tcPr>
+                </a:tc>
+                <a:tc>
+                  <a:txBody>
+                    <a:bodyPr/>
+                    <a:lstStyle/>
+                    <a:p>
+                      <a:pPr algn="ctr"/>
+                      <a:r>
+                        <a:rPr lang="en-US" b="1" dirty="0"/>
+                        <a:t>1</a:t>
+                      </a:r>
+                    </a:p>
+                  </a:txBody>
+                  <a:tcPr/>
+                </a:tc>
+                <a:tc>
+                  <a:txBody>
+                    <a:bodyPr/>
+                    <a:lstStyle/>
+                    <a:p>
+                      <a:pPr algn="ctr"/>
+                      <a:r>
+                        <a:rPr lang="en-US" dirty="0"/>
+                        <a:t>0</a:t>
+                      </a:r>
+                    </a:p>
+                  </a:txBody>
+                  <a:tcPr/>
+                </a:tc>
+                <a:tc>
+                  <a:txBody>
+                    <a:bodyPr/>
+                    <a:lstStyle/>
+                    <a:p>
+                      <a:pPr algn="ctr"/>
+                      <a:r>
+                        <a:rPr lang="en-US" b="1" dirty="0"/>
+                        <a:t>1</a:t>
+                      </a:r>
+                    </a:p>
+                  </a:txBody>
+                  <a:tcPr/>
+                </a:tc>
+                <a:tc>
+                  <a:txBody>
+                    <a:bodyPr/>
+                    <a:lstStyle/>
+                    <a:p>
+                      <a:pPr algn="ctr"/>
+                      <a:r>
+                        <a:rPr lang="en-US" dirty="0"/>
+                        <a:t>0</a:t>
+                      </a:r>
+                    </a:p>
+                  </a:txBody>
+                  <a:tcPr/>
+                </a:tc>
+                <a:tc>
+                  <a:txBody>
+                    <a:bodyPr/>
+                    <a:lstStyle/>
+                    <a:p>
+                      <a:pPr algn="ctr"/>
+                      <a:r>
+                        <a:rPr lang="en-US" b="1" dirty="0"/>
+                        <a:t>1</a:t>
+                      </a:r>
+                    </a:p>
+                  </a:txBody>
+                  <a:tcPr/>
+                </a:tc>
+                <a:tc>
+                  <a:txBody>
+                    <a:bodyPr/>
+                    <a:lstStyle/>
+                    <a:p>
+                      <a:pPr algn="ctr"/>
+                      <a:r>
+                        <a:rPr lang="en-US" dirty="0"/>
+                        <a:t>0</a:t>
+                      </a:r>
+                    </a:p>
+                  </a:txBody>
+                  <a:tcPr/>
+                </a:tc>
+                <a:tc>
+                  <a:txBody>
+                    <a:bodyPr/>
+                    <a:lstStyle/>
+                    <a:p>
+                      <a:pPr algn="ctr"/>
+                      <a:r>
+                        <a:rPr lang="en-US" dirty="0"/>
+                        <a:t>0</a:t>
+                      </a:r>
+                    </a:p>
+                  </a:txBody>
+                  <a:tcPr/>
+                </a:tc>
+                <a:extLst>
+                  <a:ext uri="{0D108BD9-81ED-4DB2-BD59-A6C34878D82A}">
+                    <a16:rowId xmlns:a16="http://schemas.microsoft.com/office/drawing/2014/main" val="3754412084"/>
+                  </a:ext>
+                </a:extLst>
+              </a:tr>
+              <a:tr h="372485">
+                <a:tc>
+                  <a:txBody>
+                    <a:bodyPr/>
+                    <a:lstStyle/>
+                    <a:p>
+                      <a:pPr marL="0" algn="ctr" defTabSz="914400" rtl="0" eaLnBrk="1" latinLnBrk="0" hangingPunct="1"/>
+                      <a:r>
+                        <a:rPr lang="en-US" sz="1800" b="1" kern="1200" dirty="0">
+                          <a:solidFill>
+                            <a:schemeClr val="lt1"/>
+                          </a:solidFill>
+                          <a:latin typeface="+mn-lt"/>
+                          <a:ea typeface="+mn-ea"/>
+                          <a:cs typeface="+mn-cs"/>
+                        </a:rPr>
+                        <a:t>3</a:t>
+                      </a:r>
+                    </a:p>
+                  </a:txBody>
+                  <a:tcPr>
+                    <a:solidFill>
+                      <a:schemeClr val="accent1">
+                        <a:lumMod val="75000"/>
+                      </a:schemeClr>
+                    </a:solidFill>
+                  </a:tcPr>
+                </a:tc>
+                <a:tc>
+                  <a:txBody>
+                    <a:bodyPr/>
+                    <a:lstStyle/>
+                    <a:p>
+                      <a:pPr algn="ctr"/>
+                      <a:r>
+                        <a:rPr lang="en-US" dirty="0"/>
+                        <a:t>0</a:t>
+                      </a:r>
+                    </a:p>
+                  </a:txBody>
+                  <a:tcPr/>
+                </a:tc>
+                <a:tc>
+                  <a:txBody>
+                    <a:bodyPr/>
+                    <a:lstStyle/>
+                    <a:p>
+                      <a:pPr algn="ctr"/>
+                      <a:r>
+                        <a:rPr lang="en-US" b="1" dirty="0"/>
+                        <a:t>1</a:t>
+                      </a:r>
+                    </a:p>
+                  </a:txBody>
+                  <a:tcPr/>
+                </a:tc>
+                <a:tc>
+                  <a:txBody>
+                    <a:bodyPr/>
+                    <a:lstStyle/>
+                    <a:p>
+                      <a:pPr algn="ctr"/>
+                      <a:r>
+                        <a:rPr lang="en-US" dirty="0"/>
+                        <a:t>0</a:t>
+                      </a:r>
+                    </a:p>
+                  </a:txBody>
+                  <a:tcPr/>
+                </a:tc>
+                <a:tc>
+                  <a:txBody>
+                    <a:bodyPr/>
+                    <a:lstStyle/>
+                    <a:p>
+                      <a:pPr algn="ctr"/>
+                      <a:r>
+                        <a:rPr lang="en-US" b="1" dirty="0"/>
+                        <a:t>1</a:t>
+                      </a:r>
+                    </a:p>
+                  </a:txBody>
+                  <a:tcPr/>
+                </a:tc>
+                <a:tc>
+                  <a:txBody>
+                    <a:bodyPr/>
+                    <a:lstStyle/>
+                    <a:p>
+                      <a:pPr algn="ctr"/>
+                      <a:r>
+                        <a:rPr lang="en-US" dirty="0"/>
+                        <a:t>0</a:t>
+                      </a:r>
+                    </a:p>
+                  </a:txBody>
+                  <a:tcPr/>
+                </a:tc>
+                <a:tc>
+                  <a:txBody>
+                    <a:bodyPr/>
+                    <a:lstStyle/>
+                    <a:p>
+                      <a:pPr algn="ctr"/>
+                      <a:r>
+                        <a:rPr lang="en-US" dirty="0"/>
+                        <a:t>0</a:t>
+                      </a:r>
+                    </a:p>
+                  </a:txBody>
+                  <a:tcPr/>
+                </a:tc>
+                <a:tc>
+                  <a:txBody>
+                    <a:bodyPr/>
+                    <a:lstStyle/>
+                    <a:p>
+                      <a:pPr algn="ctr"/>
+                      <a:r>
+                        <a:rPr lang="en-US" dirty="0"/>
+                        <a:t>0</a:t>
+                      </a:r>
+                    </a:p>
+                  </a:txBody>
+                  <a:tcPr/>
+                </a:tc>
+                <a:extLst>
+                  <a:ext uri="{0D108BD9-81ED-4DB2-BD59-A6C34878D82A}">
+                    <a16:rowId xmlns:a16="http://schemas.microsoft.com/office/drawing/2014/main" val="30928094"/>
+                  </a:ext>
+                </a:extLst>
+              </a:tr>
+              <a:tr h="372485">
+                <a:tc>
+                  <a:txBody>
+                    <a:bodyPr/>
+                    <a:lstStyle/>
+                    <a:p>
+                      <a:pPr marL="0" algn="ctr" defTabSz="914400" rtl="0" eaLnBrk="1" latinLnBrk="0" hangingPunct="1"/>
+                      <a:r>
+                        <a:rPr lang="en-US" sz="1800" b="1" kern="1200" dirty="0">
+                          <a:solidFill>
+                            <a:schemeClr val="lt1"/>
+                          </a:solidFill>
+                          <a:latin typeface="+mn-lt"/>
+                          <a:ea typeface="+mn-ea"/>
+                          <a:cs typeface="+mn-cs"/>
+                        </a:rPr>
+                        <a:t>4</a:t>
+                      </a:r>
+                    </a:p>
+                  </a:txBody>
+                  <a:tcPr>
+                    <a:solidFill>
+                      <a:schemeClr val="accent1">
+                        <a:lumMod val="75000"/>
+                      </a:schemeClr>
+                    </a:solidFill>
+                  </a:tcPr>
+                </a:tc>
+                <a:tc>
+                  <a:txBody>
+                    <a:bodyPr/>
+                    <a:lstStyle/>
+                    <a:p>
+                      <a:pPr algn="ctr"/>
+                      <a:r>
+                        <a:rPr lang="en-US" dirty="0"/>
+                        <a:t>0</a:t>
+                      </a:r>
+                    </a:p>
+                  </a:txBody>
+                  <a:tcPr/>
+                </a:tc>
+                <a:tc>
+                  <a:txBody>
+                    <a:bodyPr/>
+                    <a:lstStyle/>
+                    <a:p>
+                      <a:pPr algn="ctr"/>
+                      <a:r>
+                        <a:rPr lang="en-US" dirty="0"/>
+                        <a:t>0</a:t>
+                      </a:r>
+                    </a:p>
+                  </a:txBody>
+                  <a:tcPr/>
+                </a:tc>
+                <a:tc>
+                  <a:txBody>
+                    <a:bodyPr/>
+                    <a:lstStyle/>
+                    <a:p>
+                      <a:pPr algn="ctr"/>
+                      <a:r>
+                        <a:rPr lang="en-US" b="1" dirty="0"/>
+                        <a:t>1</a:t>
+                      </a:r>
+                    </a:p>
+                  </a:txBody>
+                  <a:tcPr/>
+                </a:tc>
+                <a:tc>
+                  <a:txBody>
+                    <a:bodyPr/>
+                    <a:lstStyle/>
+                    <a:p>
+                      <a:pPr algn="ctr"/>
+                      <a:r>
+                        <a:rPr lang="en-US" dirty="0"/>
+                        <a:t>0</a:t>
+                      </a:r>
+                    </a:p>
+                  </a:txBody>
+                  <a:tcPr/>
+                </a:tc>
+                <a:tc>
+                  <a:txBody>
+                    <a:bodyPr/>
+                    <a:lstStyle/>
+                    <a:p>
+                      <a:pPr algn="ctr"/>
+                      <a:r>
+                        <a:rPr lang="en-US" b="1" dirty="0"/>
+                        <a:t>1</a:t>
+                      </a:r>
+                    </a:p>
+                  </a:txBody>
+                  <a:tcPr/>
+                </a:tc>
+                <a:tc>
+                  <a:txBody>
+                    <a:bodyPr/>
+                    <a:lstStyle/>
+                    <a:p>
+                      <a:pPr algn="ctr"/>
+                      <a:r>
+                        <a:rPr lang="en-US" dirty="0"/>
+                        <a:t>0</a:t>
+                      </a:r>
+                    </a:p>
+                  </a:txBody>
+                  <a:tcPr/>
+                </a:tc>
+                <a:tc>
+                  <a:txBody>
+                    <a:bodyPr/>
+                    <a:lstStyle/>
+                    <a:p>
+                      <a:pPr algn="ctr"/>
+                      <a:r>
+                        <a:rPr lang="en-US" dirty="0"/>
+                        <a:t>0</a:t>
+                      </a:r>
+                    </a:p>
+                  </a:txBody>
+                  <a:tcPr/>
+                </a:tc>
+                <a:extLst>
+                  <a:ext uri="{0D108BD9-81ED-4DB2-BD59-A6C34878D82A}">
+                    <a16:rowId xmlns:a16="http://schemas.microsoft.com/office/drawing/2014/main" val="1194133716"/>
+                  </a:ext>
+                </a:extLst>
+              </a:tr>
+              <a:tr h="372485">
+                <a:tc>
+                  <a:txBody>
+                    <a:bodyPr/>
+                    <a:lstStyle/>
+                    <a:p>
+                      <a:pPr marL="0" algn="ctr" defTabSz="914400" rtl="0" eaLnBrk="1" latinLnBrk="0" hangingPunct="1"/>
+                      <a:r>
+                        <a:rPr lang="en-US" sz="1800" b="1" kern="1200" dirty="0">
+                          <a:solidFill>
+                            <a:schemeClr val="lt1"/>
+                          </a:solidFill>
+                          <a:latin typeface="+mn-lt"/>
+                          <a:ea typeface="+mn-ea"/>
+                          <a:cs typeface="+mn-cs"/>
+                        </a:rPr>
+                        <a:t>5</a:t>
+                      </a:r>
+                    </a:p>
+                  </a:txBody>
+                  <a:tcPr>
+                    <a:solidFill>
+                      <a:schemeClr val="accent1">
+                        <a:lumMod val="75000"/>
+                      </a:schemeClr>
+                    </a:solidFill>
+                  </a:tcPr>
+                </a:tc>
+                <a:tc>
+                  <a:txBody>
+                    <a:bodyPr/>
+                    <a:lstStyle/>
+                    <a:p>
+                      <a:pPr algn="ctr"/>
+                      <a:r>
+                        <a:rPr lang="en-US" dirty="0"/>
+                        <a:t>0</a:t>
+                      </a:r>
+                    </a:p>
+                  </a:txBody>
+                  <a:tcPr/>
+                </a:tc>
+                <a:tc>
+                  <a:txBody>
+                    <a:bodyPr/>
+                    <a:lstStyle/>
+                    <a:p>
+                      <a:pPr algn="ctr"/>
+                      <a:r>
+                        <a:rPr lang="en-US" b="1" dirty="0"/>
+                        <a:t>1</a:t>
+                      </a:r>
+                    </a:p>
+                  </a:txBody>
+                  <a:tcPr/>
+                </a:tc>
+                <a:tc>
+                  <a:txBody>
+                    <a:bodyPr/>
+                    <a:lstStyle/>
+                    <a:p>
+                      <a:pPr algn="ctr"/>
+                      <a:r>
+                        <a:rPr lang="en-US" dirty="0"/>
+                        <a:t>0</a:t>
+                      </a:r>
+                    </a:p>
+                  </a:txBody>
+                  <a:tcPr/>
+                </a:tc>
+                <a:tc>
+                  <a:txBody>
+                    <a:bodyPr/>
+                    <a:lstStyle/>
+                    <a:p>
+                      <a:pPr algn="ctr"/>
+                      <a:r>
+                        <a:rPr lang="en-US" b="1" dirty="0"/>
+                        <a:t>1</a:t>
+                      </a:r>
+                    </a:p>
+                  </a:txBody>
+                  <a:tcPr/>
+                </a:tc>
+                <a:tc>
+                  <a:txBody>
+                    <a:bodyPr/>
+                    <a:lstStyle/>
+                    <a:p>
+                      <a:pPr algn="ctr"/>
+                      <a:r>
+                        <a:rPr lang="en-US" dirty="0"/>
+                        <a:t>0</a:t>
+                      </a:r>
+                    </a:p>
+                  </a:txBody>
+                  <a:tcPr/>
+                </a:tc>
+                <a:tc>
+                  <a:txBody>
+                    <a:bodyPr/>
+                    <a:lstStyle/>
+                    <a:p>
+                      <a:pPr algn="ctr"/>
+                      <a:r>
+                        <a:rPr lang="en-US" b="1" dirty="0"/>
+                        <a:t>1</a:t>
+                      </a:r>
+                    </a:p>
+                  </a:txBody>
+                  <a:tcPr/>
+                </a:tc>
+                <a:tc>
+                  <a:txBody>
+                    <a:bodyPr/>
+                    <a:lstStyle/>
+                    <a:p>
+                      <a:pPr algn="ctr"/>
+                      <a:r>
+                        <a:rPr lang="en-US" b="1" dirty="0"/>
+                        <a:t>1</a:t>
+                      </a:r>
+                    </a:p>
+                  </a:txBody>
+                  <a:tcPr/>
+                </a:tc>
+                <a:extLst>
+                  <a:ext uri="{0D108BD9-81ED-4DB2-BD59-A6C34878D82A}">
+                    <a16:rowId xmlns:a16="http://schemas.microsoft.com/office/drawing/2014/main" val="1938922504"/>
+                  </a:ext>
+                </a:extLst>
+              </a:tr>
+              <a:tr h="372485">
+                <a:tc>
+                  <a:txBody>
+                    <a:bodyPr/>
+                    <a:lstStyle/>
+                    <a:p>
+                      <a:pPr marL="0" algn="ctr" defTabSz="914400" rtl="0" eaLnBrk="1" latinLnBrk="0" hangingPunct="1"/>
+                      <a:r>
+                        <a:rPr lang="en-US" sz="1800" b="1" kern="1200" dirty="0">
+                          <a:solidFill>
+                            <a:schemeClr val="lt1"/>
+                          </a:solidFill>
+                          <a:latin typeface="+mn-lt"/>
+                          <a:ea typeface="+mn-ea"/>
+                          <a:cs typeface="+mn-cs"/>
+                        </a:rPr>
+                        <a:t>6</a:t>
+                      </a:r>
+                    </a:p>
+                  </a:txBody>
+                  <a:tcPr>
+                    <a:solidFill>
+                      <a:schemeClr val="accent1">
+                        <a:lumMod val="75000"/>
+                      </a:schemeClr>
+                    </a:solidFill>
+                  </a:tcPr>
+                </a:tc>
+                <a:tc>
+                  <a:txBody>
+                    <a:bodyPr/>
+                    <a:lstStyle/>
+                    <a:p>
+                      <a:pPr algn="ctr"/>
+                      <a:r>
+                        <a:rPr lang="en-US" dirty="0"/>
+                        <a:t>0</a:t>
+                      </a:r>
+                    </a:p>
+                  </a:txBody>
+                  <a:tcPr/>
+                </a:tc>
+                <a:tc>
+                  <a:txBody>
+                    <a:bodyPr/>
+                    <a:lstStyle/>
+                    <a:p>
+                      <a:pPr algn="ctr"/>
+                      <a:r>
+                        <a:rPr lang="en-US" dirty="0"/>
+                        <a:t>0</a:t>
+                      </a:r>
+                    </a:p>
+                  </a:txBody>
+                  <a:tcPr/>
+                </a:tc>
+                <a:tc>
+                  <a:txBody>
+                    <a:bodyPr/>
+                    <a:lstStyle/>
+                    <a:p>
+                      <a:pPr algn="ctr"/>
+                      <a:r>
+                        <a:rPr lang="en-US" dirty="0"/>
+                        <a:t>0</a:t>
+                      </a:r>
+                    </a:p>
+                  </a:txBody>
+                  <a:tcPr/>
+                </a:tc>
+                <a:tc>
+                  <a:txBody>
+                    <a:bodyPr/>
+                    <a:lstStyle/>
+                    <a:p>
+                      <a:pPr algn="ctr"/>
+                      <a:r>
+                        <a:rPr lang="en-US" dirty="0"/>
+                        <a:t>0</a:t>
+                      </a:r>
+                    </a:p>
+                  </a:txBody>
+                  <a:tcPr/>
+                </a:tc>
+                <a:tc>
+                  <a:txBody>
+                    <a:bodyPr/>
+                    <a:lstStyle/>
+                    <a:p>
+                      <a:pPr algn="ctr"/>
+                      <a:r>
+                        <a:rPr lang="en-US" b="1" dirty="0"/>
+                        <a:t>1</a:t>
+                      </a:r>
+                    </a:p>
+                  </a:txBody>
+                  <a:tcPr/>
+                </a:tc>
+                <a:tc>
+                  <a:txBody>
+                    <a:bodyPr/>
+                    <a:lstStyle/>
+                    <a:p>
+                      <a:pPr algn="ctr"/>
+                      <a:r>
+                        <a:rPr lang="en-US" dirty="0"/>
+                        <a:t>0</a:t>
+                      </a:r>
+                    </a:p>
+                  </a:txBody>
+                  <a:tcPr/>
+                </a:tc>
+                <a:tc>
+                  <a:txBody>
+                    <a:bodyPr/>
+                    <a:lstStyle/>
+                    <a:p>
+                      <a:pPr algn="ctr"/>
+                      <a:r>
+                        <a:rPr lang="en-US" b="1" dirty="0"/>
+                        <a:t>1</a:t>
+                      </a:r>
+                    </a:p>
+                  </a:txBody>
+                  <a:tcPr/>
+                </a:tc>
+                <a:extLst>
+                  <a:ext uri="{0D108BD9-81ED-4DB2-BD59-A6C34878D82A}">
+                    <a16:rowId xmlns:a16="http://schemas.microsoft.com/office/drawing/2014/main" val="1064427859"/>
+                  </a:ext>
+                </a:extLst>
+              </a:tr>
+              <a:tr h="372485">
+                <a:tc>
+                  <a:txBody>
+                    <a:bodyPr/>
+                    <a:lstStyle/>
+                    <a:p>
+                      <a:pPr marL="0" algn="ctr" defTabSz="914400" rtl="0" eaLnBrk="1" latinLnBrk="0" hangingPunct="1"/>
+                      <a:r>
+                        <a:rPr lang="en-US" sz="1800" b="1" kern="1200" dirty="0">
+                          <a:solidFill>
+                            <a:schemeClr val="lt1"/>
+                          </a:solidFill>
+                          <a:latin typeface="+mn-lt"/>
+                          <a:ea typeface="+mn-ea"/>
+                          <a:cs typeface="+mn-cs"/>
+                        </a:rPr>
+                        <a:t>7</a:t>
+                      </a:r>
+                    </a:p>
+                  </a:txBody>
+                  <a:tcPr>
+                    <a:solidFill>
+                      <a:schemeClr val="accent1">
+                        <a:lumMod val="75000"/>
+                      </a:schemeClr>
+                    </a:solidFill>
+                  </a:tcPr>
+                </a:tc>
+                <a:tc>
+                  <a:txBody>
+                    <a:bodyPr/>
+                    <a:lstStyle/>
+                    <a:p>
+                      <a:pPr algn="ctr"/>
+                      <a:r>
+                        <a:rPr lang="en-US" dirty="0"/>
+                        <a:t>0</a:t>
+                      </a:r>
+                    </a:p>
+                  </a:txBody>
+                  <a:tcPr/>
+                </a:tc>
+                <a:tc>
+                  <a:txBody>
+                    <a:bodyPr/>
+                    <a:lstStyle/>
+                    <a:p>
+                      <a:pPr algn="ctr"/>
+                      <a:r>
+                        <a:rPr lang="en-US" dirty="0"/>
+                        <a:t>0</a:t>
+                      </a:r>
+                    </a:p>
+                  </a:txBody>
+                  <a:tcPr/>
+                </a:tc>
+                <a:tc>
+                  <a:txBody>
+                    <a:bodyPr/>
+                    <a:lstStyle/>
+                    <a:p>
+                      <a:pPr algn="ctr"/>
+                      <a:r>
+                        <a:rPr lang="en-US" dirty="0"/>
+                        <a:t>0</a:t>
+                      </a:r>
+                    </a:p>
+                  </a:txBody>
+                  <a:tcPr/>
+                </a:tc>
+                <a:tc>
+                  <a:txBody>
+                    <a:bodyPr/>
+                    <a:lstStyle/>
+                    <a:p>
+                      <a:pPr algn="ctr"/>
+                      <a:r>
+                        <a:rPr lang="en-US" dirty="0"/>
+                        <a:t>0</a:t>
+                      </a:r>
+                    </a:p>
+                  </a:txBody>
+                  <a:tcPr/>
+                </a:tc>
+                <a:tc>
+                  <a:txBody>
+                    <a:bodyPr/>
+                    <a:lstStyle/>
+                    <a:p>
+                      <a:pPr algn="ctr"/>
+                      <a:r>
+                        <a:rPr lang="en-US" b="1" dirty="0"/>
+                        <a:t>1</a:t>
+                      </a:r>
+                    </a:p>
+                  </a:txBody>
+                  <a:tcPr/>
+                </a:tc>
+                <a:tc>
+                  <a:txBody>
+                    <a:bodyPr/>
+                    <a:lstStyle/>
+                    <a:p>
+                      <a:pPr algn="ctr"/>
+                      <a:r>
+                        <a:rPr lang="en-US" b="1" dirty="0"/>
+                        <a:t>1</a:t>
+                      </a:r>
+                    </a:p>
+                  </a:txBody>
+                  <a:tcPr/>
+                </a:tc>
+                <a:tc>
+                  <a:txBody>
+                    <a:bodyPr/>
+                    <a:lstStyle/>
+                    <a:p>
+                      <a:pPr algn="ctr"/>
+                      <a:r>
+                        <a:rPr lang="en-US" dirty="0"/>
+                        <a:t>0</a:t>
+                      </a:r>
+                    </a:p>
+                  </a:txBody>
+                  <a:tcPr/>
+                </a:tc>
+                <a:extLst>
+                  <a:ext uri="{0D108BD9-81ED-4DB2-BD59-A6C34878D82A}">
+                    <a16:rowId xmlns:a16="http://schemas.microsoft.com/office/drawing/2014/main" val="1162644250"/>
+                  </a:ext>
+                </a:extLst>
+              </a:tr>
+            </a:tbl>
+          </a:graphicData>
+        </a:graphic>
+      </p:graphicFrame>
+      <p:pic>
+        <p:nvPicPr>
+          <p:cNvPr id="8" name="Picture 7">
+            <a:extLst>
+              <a:ext uri="{FF2B5EF4-FFF2-40B4-BE49-F238E27FC236}">
+                <a16:creationId xmlns:a16="http://schemas.microsoft.com/office/drawing/2014/main" id="{BB75F401-EEDD-DF47-E2DE-A6BF31DE236A}"/>
+              </a:ext>
+            </a:extLst>
+          </p:cNvPr>
+          <p:cNvPicPr>
+            <a:picLocks noChangeAspect="1"/>
+          </p:cNvPicPr>
+          <p:nvPr/>
+        </p:nvPicPr>
+        <p:blipFill>
+          <a:blip r:embed="rId2"/>
+          <a:stretch>
+            <a:fillRect/>
+          </a:stretch>
+        </p:blipFill>
+        <p:spPr>
+          <a:xfrm>
+            <a:off x="6096001" y="3176275"/>
+            <a:ext cx="4490416" cy="2477905"/>
+          </a:xfrm>
+          <a:prstGeom prst="rect">
+            <a:avLst/>
+          </a:prstGeom>
+        </p:spPr>
+      </p:pic>
+    </p:spTree>
+    <p:extLst>
+      <p:ext uri="{BB962C8B-B14F-4D97-AF65-F5344CB8AC3E}">
+        <p14:creationId xmlns:p14="http://schemas.microsoft.com/office/powerpoint/2010/main" val="432498496"/>
+      </p:ext>
+    </p:extLst>
+  </p:cSld>
+  <p:clrMapOvr>
+    <a:masterClrMapping/>
+  </p:clrMapOvr>
+</p:sld>
+</file>
+
+<file path=ppt/slides/slide122.xml><?xml version="1.0" encoding="utf-8"?>
+<p:sld xmlns:a="http://schemas.openxmlformats.org/drawingml/2006/main" xmlns:r="http://schemas.openxmlformats.org/officeDocument/2006/relationships" xmlns:p="http://schemas.openxmlformats.org/presentationml/2006/main">
+  <p:cSld>
+    <p:spTree>
+      <p:nvGrpSpPr>
+        <p:cNvPr id="1" name=""/>
+        <p:cNvGrpSpPr/>
+        <p:nvPr/>
+      </p:nvGrpSpPr>
+      <p:grpSpPr>
+        <a:xfrm>
+          <a:off x="0" y="0"/>
+          <a:ext cx="0" cy="0"/>
+          <a:chOff x="0" y="0"/>
+          <a:chExt cx="0" cy="0"/>
+        </a:xfrm>
+      </p:grpSpPr>
+      <p:sp>
+        <p:nvSpPr>
+          <p:cNvPr id="2" name="Title 1">
+            <a:extLst>
+              <a:ext uri="{FF2B5EF4-FFF2-40B4-BE49-F238E27FC236}">
+                <a16:creationId xmlns:a16="http://schemas.microsoft.com/office/drawing/2014/main" id="{D6B8AF5A-A614-D5E4-8489-1A221132D3AD}"/>
+              </a:ext>
+            </a:extLst>
+          </p:cNvPr>
+          <p:cNvSpPr>
+            <a:spLocks noGrp="1"/>
+          </p:cNvSpPr>
+          <p:nvPr>
+            <p:ph type="title"/>
+          </p:nvPr>
+        </p:nvSpPr>
+        <p:spPr/>
+        <p:txBody>
+          <a:bodyPr/>
+          <a:lstStyle/>
+          <a:p>
+            <a:r>
+              <a:rPr lang="en-US" dirty="0"/>
+              <a:t>Programs (matrix practice)</a:t>
+            </a:r>
+          </a:p>
+        </p:txBody>
+      </p:sp>
+      <p:sp>
+        <p:nvSpPr>
+          <p:cNvPr id="3" name="Content Placeholder 2">
+            <a:extLst>
+              <a:ext uri="{FF2B5EF4-FFF2-40B4-BE49-F238E27FC236}">
+                <a16:creationId xmlns:a16="http://schemas.microsoft.com/office/drawing/2014/main" id="{4ABCF001-2C3B-CA70-2D24-965BBEEA5385}"/>
+              </a:ext>
+            </a:extLst>
+          </p:cNvPr>
+          <p:cNvSpPr>
+            <a:spLocks noGrp="1"/>
+          </p:cNvSpPr>
+          <p:nvPr>
+            <p:ph idx="1"/>
+          </p:nvPr>
+        </p:nvSpPr>
+        <p:spPr>
+          <a:xfrm>
+            <a:off x="620086" y="1697605"/>
+            <a:ext cx="10515600" cy="4351338"/>
+          </a:xfrm>
+        </p:spPr>
+        <p:txBody>
+          <a:bodyPr/>
+          <a:lstStyle/>
+          <a:p>
+            <a:r>
+              <a:rPr lang="en-US" dirty="0"/>
+              <a:t>Create a 2d array(matrix) and fill it with values</a:t>
+            </a:r>
+          </a:p>
+          <a:p>
+            <a:pPr lvl="1"/>
+            <a:r>
+              <a:rPr lang="en-US" dirty="0"/>
+              <a:t>Input N ( size of the matrix would </a:t>
+            </a:r>
+            <a:r>
+              <a:rPr lang="en-US"/>
+              <a:t>be N x N</a:t>
+            </a:r>
+            <a:r>
+              <a:rPr lang="en-US" dirty="0"/>
+              <a:t>)</a:t>
+            </a:r>
+          </a:p>
+          <a:p>
+            <a:pPr lvl="1"/>
+            <a:r>
+              <a:rPr lang="en-US" dirty="0"/>
+              <a:t>Fill 4 different ways (these are 4 different problems)</a:t>
+            </a:r>
+          </a:p>
+        </p:txBody>
+      </p:sp>
+      <p:graphicFrame>
+        <p:nvGraphicFramePr>
+          <p:cNvPr id="4" name="Table 3">
+            <a:extLst>
+              <a:ext uri="{FF2B5EF4-FFF2-40B4-BE49-F238E27FC236}">
+                <a16:creationId xmlns:a16="http://schemas.microsoft.com/office/drawing/2014/main" id="{F6E1A682-CC45-4041-C59E-6281E56AEBF1}"/>
+              </a:ext>
+            </a:extLst>
+          </p:cNvPr>
+          <p:cNvGraphicFramePr>
+            <a:graphicFrameLocks noGrp="1"/>
+          </p:cNvGraphicFramePr>
+          <p:nvPr>
+            <p:extLst>
+              <p:ext uri="{D42A27DB-BD31-4B8C-83A1-F6EECF244321}">
+                <p14:modId xmlns:p14="http://schemas.microsoft.com/office/powerpoint/2010/main" val="2747743551"/>
+              </p:ext>
+            </p:extLst>
+          </p:nvPr>
+        </p:nvGraphicFramePr>
+        <p:xfrm>
+          <a:off x="1321267" y="2992430"/>
+          <a:ext cx="1963024" cy="1463040"/>
+        </p:xfrm>
+        <a:graphic>
+          <a:graphicData uri="http://schemas.openxmlformats.org/drawingml/2006/table">
+            <a:tbl>
+              <a:tblPr firstRow="1" bandRow="1">
+                <a:tableStyleId>{5940675A-B579-460E-94D1-54222C63F5DA}</a:tableStyleId>
+              </a:tblPr>
+              <a:tblGrid>
+                <a:gridCol w="490756">
+                  <a:extLst>
+                    <a:ext uri="{9D8B030D-6E8A-4147-A177-3AD203B41FA5}">
+                      <a16:colId xmlns:a16="http://schemas.microsoft.com/office/drawing/2014/main" val="3637275985"/>
+                    </a:ext>
+                  </a:extLst>
+                </a:gridCol>
+                <a:gridCol w="490756">
+                  <a:extLst>
+                    <a:ext uri="{9D8B030D-6E8A-4147-A177-3AD203B41FA5}">
+                      <a16:colId xmlns:a16="http://schemas.microsoft.com/office/drawing/2014/main" val="3707909197"/>
+                    </a:ext>
+                  </a:extLst>
+                </a:gridCol>
+                <a:gridCol w="490756">
+                  <a:extLst>
+                    <a:ext uri="{9D8B030D-6E8A-4147-A177-3AD203B41FA5}">
+                      <a16:colId xmlns:a16="http://schemas.microsoft.com/office/drawing/2014/main" val="356601508"/>
+                    </a:ext>
+                  </a:extLst>
+                </a:gridCol>
+                <a:gridCol w="490756">
+                  <a:extLst>
+                    <a:ext uri="{9D8B030D-6E8A-4147-A177-3AD203B41FA5}">
+                      <a16:colId xmlns:a16="http://schemas.microsoft.com/office/drawing/2014/main" val="1255770336"/>
+                    </a:ext>
+                  </a:extLst>
+                </a:gridCol>
+              </a:tblGrid>
+              <a:tr h="344178">
+                <a:tc>
+                  <a:txBody>
+                    <a:bodyPr/>
+                    <a:lstStyle/>
+                    <a:p>
+                      <a:r>
+                        <a:rPr lang="en-US" dirty="0"/>
+                        <a:t>1</a:t>
+                      </a:r>
+                    </a:p>
+                  </a:txBody>
+                  <a:tcPr/>
+                </a:tc>
+                <a:tc>
+                  <a:txBody>
+                    <a:bodyPr/>
+                    <a:lstStyle/>
+                    <a:p>
+                      <a:r>
+                        <a:rPr lang="en-US" dirty="0"/>
+                        <a:t>2</a:t>
+                      </a:r>
+                    </a:p>
+                  </a:txBody>
+                  <a:tcPr/>
+                </a:tc>
+                <a:tc>
+                  <a:txBody>
+                    <a:bodyPr/>
+                    <a:lstStyle/>
+                    <a:p>
+                      <a:r>
+                        <a:rPr lang="en-US" dirty="0"/>
+                        <a:t>3</a:t>
+                      </a:r>
+                    </a:p>
+                  </a:txBody>
+                  <a:tcPr/>
+                </a:tc>
+                <a:tc>
+                  <a:txBody>
+                    <a:bodyPr/>
+                    <a:lstStyle/>
+                    <a:p>
+                      <a:r>
+                        <a:rPr lang="en-US" dirty="0"/>
+                        <a:t>4</a:t>
+                      </a:r>
+                    </a:p>
+                  </a:txBody>
+                  <a:tcPr/>
+                </a:tc>
+                <a:extLst>
+                  <a:ext uri="{0D108BD9-81ED-4DB2-BD59-A6C34878D82A}">
+                    <a16:rowId xmlns:a16="http://schemas.microsoft.com/office/drawing/2014/main" val="1660418042"/>
+                  </a:ext>
+                </a:extLst>
+              </a:tr>
+              <a:tr h="344178">
+                <a:tc>
+                  <a:txBody>
+                    <a:bodyPr/>
+                    <a:lstStyle/>
+                    <a:p>
+                      <a:r>
+                        <a:rPr lang="en-US" dirty="0"/>
+                        <a:t>5</a:t>
+                      </a:r>
+                    </a:p>
+                  </a:txBody>
+                  <a:tcPr/>
+                </a:tc>
+                <a:tc>
+                  <a:txBody>
+                    <a:bodyPr/>
+                    <a:lstStyle/>
+                    <a:p>
+                      <a:r>
+                        <a:rPr lang="en-US" dirty="0"/>
+                        <a:t>6</a:t>
+                      </a:r>
+                    </a:p>
+                  </a:txBody>
+                  <a:tcPr/>
+                </a:tc>
+                <a:tc>
+                  <a:txBody>
+                    <a:bodyPr/>
+                    <a:lstStyle/>
+                    <a:p>
+                      <a:r>
+                        <a:rPr lang="en-US" dirty="0"/>
+                        <a:t>7</a:t>
+                      </a:r>
+                    </a:p>
+                  </a:txBody>
+                  <a:tcPr/>
+                </a:tc>
+                <a:tc>
+                  <a:txBody>
+                    <a:bodyPr/>
+                    <a:lstStyle/>
+                    <a:p>
+                      <a:r>
+                        <a:rPr lang="en-US" dirty="0"/>
+                        <a:t>8</a:t>
+                      </a:r>
+                    </a:p>
+                  </a:txBody>
+                  <a:tcPr/>
+                </a:tc>
+                <a:extLst>
+                  <a:ext uri="{0D108BD9-81ED-4DB2-BD59-A6C34878D82A}">
+                    <a16:rowId xmlns:a16="http://schemas.microsoft.com/office/drawing/2014/main" val="1749589920"/>
+                  </a:ext>
+                </a:extLst>
+              </a:tr>
+              <a:tr h="344178">
+                <a:tc>
+                  <a:txBody>
+                    <a:bodyPr/>
+                    <a:lstStyle/>
+                    <a:p>
+                      <a:r>
+                        <a:rPr lang="en-US" dirty="0"/>
+                        <a:t>9</a:t>
+                      </a:r>
+                    </a:p>
+                  </a:txBody>
+                  <a:tcPr/>
+                </a:tc>
+                <a:tc>
+                  <a:txBody>
+                    <a:bodyPr/>
+                    <a:lstStyle/>
+                    <a:p>
+                      <a:r>
+                        <a:rPr lang="en-US" dirty="0"/>
+                        <a:t>10</a:t>
+                      </a:r>
+                    </a:p>
+                  </a:txBody>
+                  <a:tcPr/>
+                </a:tc>
+                <a:tc>
+                  <a:txBody>
+                    <a:bodyPr/>
+                    <a:lstStyle/>
+                    <a:p>
+                      <a:r>
+                        <a:rPr lang="en-US" dirty="0"/>
+                        <a:t>11</a:t>
+                      </a:r>
+                    </a:p>
+                  </a:txBody>
+                  <a:tcPr/>
+                </a:tc>
+                <a:tc>
+                  <a:txBody>
+                    <a:bodyPr/>
+                    <a:lstStyle/>
+                    <a:p>
+                      <a:r>
+                        <a:rPr lang="en-US" dirty="0"/>
+                        <a:t>12</a:t>
+                      </a:r>
+                    </a:p>
+                  </a:txBody>
+                  <a:tcPr/>
+                </a:tc>
+                <a:extLst>
+                  <a:ext uri="{0D108BD9-81ED-4DB2-BD59-A6C34878D82A}">
+                    <a16:rowId xmlns:a16="http://schemas.microsoft.com/office/drawing/2014/main" val="1077954733"/>
+                  </a:ext>
+                </a:extLst>
+              </a:tr>
+              <a:tr h="344178">
+                <a:tc>
+                  <a:txBody>
+                    <a:bodyPr/>
+                    <a:lstStyle/>
+                    <a:p>
+                      <a:r>
+                        <a:rPr lang="en-US" dirty="0"/>
+                        <a:t>13</a:t>
+                      </a:r>
+                    </a:p>
+                  </a:txBody>
+                  <a:tcPr/>
+                </a:tc>
+                <a:tc>
+                  <a:txBody>
+                    <a:bodyPr/>
+                    <a:lstStyle/>
+                    <a:p>
+                      <a:r>
+                        <a:rPr lang="en-US" dirty="0"/>
+                        <a:t>14</a:t>
+                      </a:r>
+                    </a:p>
+                  </a:txBody>
+                  <a:tcPr/>
+                </a:tc>
+                <a:tc>
+                  <a:txBody>
+                    <a:bodyPr/>
+                    <a:lstStyle/>
+                    <a:p>
+                      <a:r>
+                        <a:rPr lang="en-US" dirty="0"/>
+                        <a:t>15</a:t>
+                      </a:r>
+                    </a:p>
+                  </a:txBody>
+                  <a:tcPr/>
+                </a:tc>
+                <a:tc>
+                  <a:txBody>
+                    <a:bodyPr/>
+                    <a:lstStyle/>
+                    <a:p>
+                      <a:r>
+                        <a:rPr lang="en-US" dirty="0"/>
+                        <a:t>16</a:t>
+                      </a:r>
+                    </a:p>
+                  </a:txBody>
+                  <a:tcPr/>
+                </a:tc>
+                <a:extLst>
+                  <a:ext uri="{0D108BD9-81ED-4DB2-BD59-A6C34878D82A}">
+                    <a16:rowId xmlns:a16="http://schemas.microsoft.com/office/drawing/2014/main" val="4270926061"/>
+                  </a:ext>
+                </a:extLst>
+              </a:tr>
+            </a:tbl>
+          </a:graphicData>
+        </a:graphic>
+      </p:graphicFrame>
+      <p:graphicFrame>
+        <p:nvGraphicFramePr>
+          <p:cNvPr id="7" name="Table 6">
+            <a:extLst>
+              <a:ext uri="{FF2B5EF4-FFF2-40B4-BE49-F238E27FC236}">
+                <a16:creationId xmlns:a16="http://schemas.microsoft.com/office/drawing/2014/main" id="{BD0CC52B-A625-4AE1-EFA0-0C8CFDD0D90A}"/>
+              </a:ext>
+            </a:extLst>
+          </p:cNvPr>
+          <p:cNvGraphicFramePr>
+            <a:graphicFrameLocks noGrp="1"/>
+          </p:cNvGraphicFramePr>
+          <p:nvPr>
+            <p:extLst>
+              <p:ext uri="{D42A27DB-BD31-4B8C-83A1-F6EECF244321}">
+                <p14:modId xmlns:p14="http://schemas.microsoft.com/office/powerpoint/2010/main" val="658664988"/>
+              </p:ext>
+            </p:extLst>
+          </p:nvPr>
+        </p:nvGraphicFramePr>
+        <p:xfrm>
+          <a:off x="4200089" y="2992430"/>
+          <a:ext cx="1963024" cy="1463040"/>
+        </p:xfrm>
+        <a:graphic>
+          <a:graphicData uri="http://schemas.openxmlformats.org/drawingml/2006/table">
+            <a:tbl>
+              <a:tblPr firstRow="1" bandRow="1">
+                <a:tableStyleId>{5940675A-B579-460E-94D1-54222C63F5DA}</a:tableStyleId>
+              </a:tblPr>
+              <a:tblGrid>
+                <a:gridCol w="490756">
+                  <a:extLst>
+                    <a:ext uri="{9D8B030D-6E8A-4147-A177-3AD203B41FA5}">
+                      <a16:colId xmlns:a16="http://schemas.microsoft.com/office/drawing/2014/main" val="3637275985"/>
+                    </a:ext>
+                  </a:extLst>
+                </a:gridCol>
+                <a:gridCol w="490756">
+                  <a:extLst>
+                    <a:ext uri="{9D8B030D-6E8A-4147-A177-3AD203B41FA5}">
+                      <a16:colId xmlns:a16="http://schemas.microsoft.com/office/drawing/2014/main" val="3707909197"/>
+                    </a:ext>
+                  </a:extLst>
+                </a:gridCol>
+                <a:gridCol w="490756">
+                  <a:extLst>
+                    <a:ext uri="{9D8B030D-6E8A-4147-A177-3AD203B41FA5}">
+                      <a16:colId xmlns:a16="http://schemas.microsoft.com/office/drawing/2014/main" val="356601508"/>
+                    </a:ext>
+                  </a:extLst>
+                </a:gridCol>
+                <a:gridCol w="490756">
+                  <a:extLst>
+                    <a:ext uri="{9D8B030D-6E8A-4147-A177-3AD203B41FA5}">
+                      <a16:colId xmlns:a16="http://schemas.microsoft.com/office/drawing/2014/main" val="1255770336"/>
+                    </a:ext>
+                  </a:extLst>
+                </a:gridCol>
+              </a:tblGrid>
+              <a:tr h="344178">
+                <a:tc>
+                  <a:txBody>
+                    <a:bodyPr/>
+                    <a:lstStyle/>
+                    <a:p>
+                      <a:r>
+                        <a:rPr lang="en-US" dirty="0"/>
+                        <a:t>1</a:t>
+                      </a:r>
+                    </a:p>
+                  </a:txBody>
+                  <a:tcPr/>
+                </a:tc>
+                <a:tc>
+                  <a:txBody>
+                    <a:bodyPr/>
+                    <a:lstStyle/>
+                    <a:p>
+                      <a:r>
+                        <a:rPr lang="en-US" dirty="0"/>
+                        <a:t>5</a:t>
+                      </a:r>
+                    </a:p>
+                  </a:txBody>
+                  <a:tcPr/>
+                </a:tc>
+                <a:tc>
+                  <a:txBody>
+                    <a:bodyPr/>
+                    <a:lstStyle/>
+                    <a:p>
+                      <a:r>
+                        <a:rPr lang="en-US" dirty="0"/>
+                        <a:t>9</a:t>
+                      </a:r>
+                    </a:p>
+                  </a:txBody>
+                  <a:tcPr/>
+                </a:tc>
+                <a:tc>
+                  <a:txBody>
+                    <a:bodyPr/>
+                    <a:lstStyle/>
+                    <a:p>
+                      <a:r>
+                        <a:rPr lang="en-US" dirty="0"/>
+                        <a:t>13</a:t>
+                      </a:r>
+                    </a:p>
+                  </a:txBody>
+                  <a:tcPr/>
+                </a:tc>
+                <a:extLst>
+                  <a:ext uri="{0D108BD9-81ED-4DB2-BD59-A6C34878D82A}">
+                    <a16:rowId xmlns:a16="http://schemas.microsoft.com/office/drawing/2014/main" val="1660418042"/>
+                  </a:ext>
+                </a:extLst>
+              </a:tr>
+              <a:tr h="344178">
+                <a:tc>
+                  <a:txBody>
+                    <a:bodyPr/>
+                    <a:lstStyle/>
+                    <a:p>
+                      <a:r>
+                        <a:rPr lang="en-US" dirty="0"/>
+                        <a:t>2</a:t>
+                      </a:r>
+                    </a:p>
+                  </a:txBody>
+                  <a:tcPr/>
+                </a:tc>
+                <a:tc>
+                  <a:txBody>
+                    <a:bodyPr/>
+                    <a:lstStyle/>
+                    <a:p>
+                      <a:r>
+                        <a:rPr lang="en-US" dirty="0"/>
+                        <a:t>6</a:t>
+                      </a:r>
+                    </a:p>
+                  </a:txBody>
+                  <a:tcPr/>
+                </a:tc>
+                <a:tc>
+                  <a:txBody>
+                    <a:bodyPr/>
+                    <a:lstStyle/>
+                    <a:p>
+                      <a:r>
+                        <a:rPr lang="en-US" dirty="0"/>
+                        <a:t>10</a:t>
+                      </a:r>
+                    </a:p>
+                  </a:txBody>
+                  <a:tcPr/>
+                </a:tc>
+                <a:tc>
+                  <a:txBody>
+                    <a:bodyPr/>
+                    <a:lstStyle/>
+                    <a:p>
+                      <a:r>
+                        <a:rPr lang="en-US" dirty="0"/>
+                        <a:t>14</a:t>
+                      </a:r>
+                    </a:p>
+                  </a:txBody>
+                  <a:tcPr/>
+                </a:tc>
+                <a:extLst>
+                  <a:ext uri="{0D108BD9-81ED-4DB2-BD59-A6C34878D82A}">
+                    <a16:rowId xmlns:a16="http://schemas.microsoft.com/office/drawing/2014/main" val="1749589920"/>
+                  </a:ext>
+                </a:extLst>
+              </a:tr>
+              <a:tr h="344178">
+                <a:tc>
+                  <a:txBody>
+                    <a:bodyPr/>
+                    <a:lstStyle/>
+                    <a:p>
+                      <a:r>
+                        <a:rPr lang="en-US" dirty="0"/>
+                        <a:t>3</a:t>
+                      </a:r>
+                    </a:p>
+                  </a:txBody>
+                  <a:tcPr/>
+                </a:tc>
+                <a:tc>
+                  <a:txBody>
+                    <a:bodyPr/>
+                    <a:lstStyle/>
+                    <a:p>
+                      <a:r>
+                        <a:rPr lang="en-US" dirty="0"/>
+                        <a:t>7</a:t>
+                      </a:r>
+                    </a:p>
+                  </a:txBody>
+                  <a:tcPr/>
+                </a:tc>
+                <a:tc>
+                  <a:txBody>
+                    <a:bodyPr/>
+                    <a:lstStyle/>
+                    <a:p>
+                      <a:r>
+                        <a:rPr lang="en-US" dirty="0"/>
+                        <a:t>11</a:t>
+                      </a:r>
+                    </a:p>
+                  </a:txBody>
+                  <a:tcPr/>
+                </a:tc>
+                <a:tc>
+                  <a:txBody>
+                    <a:bodyPr/>
+                    <a:lstStyle/>
+                    <a:p>
+                      <a:r>
+                        <a:rPr lang="en-US" dirty="0"/>
+                        <a:t>15</a:t>
+                      </a:r>
+                    </a:p>
+                  </a:txBody>
+                  <a:tcPr/>
+                </a:tc>
+                <a:extLst>
+                  <a:ext uri="{0D108BD9-81ED-4DB2-BD59-A6C34878D82A}">
+                    <a16:rowId xmlns:a16="http://schemas.microsoft.com/office/drawing/2014/main" val="1077954733"/>
+                  </a:ext>
+                </a:extLst>
+              </a:tr>
+              <a:tr h="344178">
+                <a:tc>
+                  <a:txBody>
+                    <a:bodyPr/>
+                    <a:lstStyle/>
+                    <a:p>
+                      <a:r>
+                        <a:rPr lang="en-US" dirty="0"/>
+                        <a:t>4</a:t>
+                      </a:r>
+                    </a:p>
+                  </a:txBody>
+                  <a:tcPr/>
+                </a:tc>
+                <a:tc>
+                  <a:txBody>
+                    <a:bodyPr/>
+                    <a:lstStyle/>
+                    <a:p>
+                      <a:r>
+                        <a:rPr lang="en-US" dirty="0"/>
+                        <a:t>8</a:t>
+                      </a:r>
+                    </a:p>
+                  </a:txBody>
+                  <a:tcPr/>
+                </a:tc>
+                <a:tc>
+                  <a:txBody>
+                    <a:bodyPr/>
+                    <a:lstStyle/>
+                    <a:p>
+                      <a:r>
+                        <a:rPr lang="en-US" dirty="0"/>
+                        <a:t>12</a:t>
+                      </a:r>
+                    </a:p>
+                  </a:txBody>
+                  <a:tcPr/>
+                </a:tc>
+                <a:tc>
+                  <a:txBody>
+                    <a:bodyPr/>
+                    <a:lstStyle/>
+                    <a:p>
+                      <a:r>
+                        <a:rPr lang="en-US" dirty="0"/>
+                        <a:t>16</a:t>
+                      </a:r>
+                    </a:p>
+                  </a:txBody>
+                  <a:tcPr/>
+                </a:tc>
+                <a:extLst>
+                  <a:ext uri="{0D108BD9-81ED-4DB2-BD59-A6C34878D82A}">
+                    <a16:rowId xmlns:a16="http://schemas.microsoft.com/office/drawing/2014/main" val="4270926061"/>
+                  </a:ext>
+                </a:extLst>
+              </a:tr>
+            </a:tbl>
+          </a:graphicData>
+        </a:graphic>
+      </p:graphicFrame>
+      <p:graphicFrame>
+        <p:nvGraphicFramePr>
+          <p:cNvPr id="8" name="Table 7">
+            <a:extLst>
+              <a:ext uri="{FF2B5EF4-FFF2-40B4-BE49-F238E27FC236}">
+                <a16:creationId xmlns:a16="http://schemas.microsoft.com/office/drawing/2014/main" id="{872B1716-8FC1-D95B-270D-08E5BBE145CF}"/>
+              </a:ext>
+            </a:extLst>
+          </p:cNvPr>
+          <p:cNvGraphicFramePr>
+            <a:graphicFrameLocks noGrp="1"/>
+          </p:cNvGraphicFramePr>
+          <p:nvPr>
+            <p:extLst>
+              <p:ext uri="{D42A27DB-BD31-4B8C-83A1-F6EECF244321}">
+                <p14:modId xmlns:p14="http://schemas.microsoft.com/office/powerpoint/2010/main" val="3152355711"/>
+              </p:ext>
+            </p:extLst>
+          </p:nvPr>
+        </p:nvGraphicFramePr>
+        <p:xfrm>
+          <a:off x="1321267" y="4651119"/>
+          <a:ext cx="1963024" cy="1463040"/>
+        </p:xfrm>
+        <a:graphic>
+          <a:graphicData uri="http://schemas.openxmlformats.org/drawingml/2006/table">
+            <a:tbl>
+              <a:tblPr firstRow="1" bandRow="1">
+                <a:tableStyleId>{5940675A-B579-460E-94D1-54222C63F5DA}</a:tableStyleId>
+              </a:tblPr>
+              <a:tblGrid>
+                <a:gridCol w="490756">
+                  <a:extLst>
+                    <a:ext uri="{9D8B030D-6E8A-4147-A177-3AD203B41FA5}">
+                      <a16:colId xmlns:a16="http://schemas.microsoft.com/office/drawing/2014/main" val="3637275985"/>
+                    </a:ext>
+                  </a:extLst>
+                </a:gridCol>
+                <a:gridCol w="490756">
+                  <a:extLst>
+                    <a:ext uri="{9D8B030D-6E8A-4147-A177-3AD203B41FA5}">
+                      <a16:colId xmlns:a16="http://schemas.microsoft.com/office/drawing/2014/main" val="3707909197"/>
+                    </a:ext>
+                  </a:extLst>
+                </a:gridCol>
+                <a:gridCol w="490756">
+                  <a:extLst>
+                    <a:ext uri="{9D8B030D-6E8A-4147-A177-3AD203B41FA5}">
+                      <a16:colId xmlns:a16="http://schemas.microsoft.com/office/drawing/2014/main" val="356601508"/>
+                    </a:ext>
+                  </a:extLst>
+                </a:gridCol>
+                <a:gridCol w="490756">
+                  <a:extLst>
+                    <a:ext uri="{9D8B030D-6E8A-4147-A177-3AD203B41FA5}">
+                      <a16:colId xmlns:a16="http://schemas.microsoft.com/office/drawing/2014/main" val="1255770336"/>
+                    </a:ext>
+                  </a:extLst>
+                </a:gridCol>
+              </a:tblGrid>
+              <a:tr h="344178">
+                <a:tc>
+                  <a:txBody>
+                    <a:bodyPr/>
+                    <a:lstStyle/>
+                    <a:p>
+                      <a:r>
+                        <a:rPr lang="en-US" dirty="0"/>
+                        <a:t>1</a:t>
+                      </a:r>
+                    </a:p>
+                  </a:txBody>
+                  <a:tcPr/>
+                </a:tc>
+                <a:tc>
+                  <a:txBody>
+                    <a:bodyPr/>
+                    <a:lstStyle/>
+                    <a:p>
+                      <a:r>
+                        <a:rPr lang="en-US" dirty="0"/>
+                        <a:t>2</a:t>
+                      </a:r>
+                    </a:p>
+                  </a:txBody>
+                  <a:tcPr/>
+                </a:tc>
+                <a:tc>
+                  <a:txBody>
+                    <a:bodyPr/>
+                    <a:lstStyle/>
+                    <a:p>
+                      <a:r>
+                        <a:rPr lang="en-US" dirty="0"/>
+                        <a:t>3</a:t>
+                      </a:r>
+                    </a:p>
+                  </a:txBody>
+                  <a:tcPr/>
+                </a:tc>
+                <a:tc>
+                  <a:txBody>
+                    <a:bodyPr/>
+                    <a:lstStyle/>
+                    <a:p>
+                      <a:r>
+                        <a:rPr lang="en-US" dirty="0"/>
+                        <a:t>4</a:t>
+                      </a:r>
+                    </a:p>
+                  </a:txBody>
+                  <a:tcPr/>
+                </a:tc>
+                <a:extLst>
+                  <a:ext uri="{0D108BD9-81ED-4DB2-BD59-A6C34878D82A}">
+                    <a16:rowId xmlns:a16="http://schemas.microsoft.com/office/drawing/2014/main" val="1660418042"/>
+                  </a:ext>
+                </a:extLst>
+              </a:tr>
+              <a:tr h="344178">
+                <a:tc>
+                  <a:txBody>
+                    <a:bodyPr/>
+                    <a:lstStyle/>
+                    <a:p>
+                      <a:r>
+                        <a:rPr lang="en-US" dirty="0"/>
+                        <a:t>8</a:t>
+                      </a:r>
+                    </a:p>
+                  </a:txBody>
+                  <a:tcPr/>
+                </a:tc>
+                <a:tc>
+                  <a:txBody>
+                    <a:bodyPr/>
+                    <a:lstStyle/>
+                    <a:p>
+                      <a:r>
+                        <a:rPr lang="en-US" dirty="0"/>
+                        <a:t>7</a:t>
+                      </a:r>
+                    </a:p>
+                  </a:txBody>
+                  <a:tcPr/>
+                </a:tc>
+                <a:tc>
+                  <a:txBody>
+                    <a:bodyPr/>
+                    <a:lstStyle/>
+                    <a:p>
+                      <a:r>
+                        <a:rPr lang="en-US" dirty="0"/>
+                        <a:t>6</a:t>
+                      </a:r>
+                    </a:p>
+                  </a:txBody>
+                  <a:tcPr/>
+                </a:tc>
+                <a:tc>
+                  <a:txBody>
+                    <a:bodyPr/>
+                    <a:lstStyle/>
+                    <a:p>
+                      <a:r>
+                        <a:rPr lang="en-US" dirty="0"/>
+                        <a:t>5</a:t>
+                      </a:r>
+                    </a:p>
+                  </a:txBody>
+                  <a:tcPr/>
+                </a:tc>
+                <a:extLst>
+                  <a:ext uri="{0D108BD9-81ED-4DB2-BD59-A6C34878D82A}">
+                    <a16:rowId xmlns:a16="http://schemas.microsoft.com/office/drawing/2014/main" val="1749589920"/>
+                  </a:ext>
+                </a:extLst>
+              </a:tr>
+              <a:tr h="344178">
+                <a:tc>
+                  <a:txBody>
+                    <a:bodyPr/>
+                    <a:lstStyle/>
+                    <a:p>
+                      <a:r>
+                        <a:rPr lang="en-US" dirty="0"/>
+                        <a:t>9</a:t>
+                      </a:r>
+                    </a:p>
+                  </a:txBody>
+                  <a:tcPr/>
+                </a:tc>
+                <a:tc>
+                  <a:txBody>
+                    <a:bodyPr/>
+                    <a:lstStyle/>
+                    <a:p>
+                      <a:r>
+                        <a:rPr lang="en-US" dirty="0"/>
+                        <a:t>10</a:t>
+                      </a:r>
+                    </a:p>
+                  </a:txBody>
+                  <a:tcPr/>
+                </a:tc>
+                <a:tc>
+                  <a:txBody>
+                    <a:bodyPr/>
+                    <a:lstStyle/>
+                    <a:p>
+                      <a:r>
+                        <a:rPr lang="en-US" dirty="0"/>
+                        <a:t>11</a:t>
+                      </a:r>
+                    </a:p>
+                  </a:txBody>
+                  <a:tcPr/>
+                </a:tc>
+                <a:tc>
+                  <a:txBody>
+                    <a:bodyPr/>
+                    <a:lstStyle/>
+                    <a:p>
+                      <a:r>
+                        <a:rPr lang="en-US" dirty="0"/>
+                        <a:t>12</a:t>
+                      </a:r>
+                    </a:p>
+                  </a:txBody>
+                  <a:tcPr/>
+                </a:tc>
+                <a:extLst>
+                  <a:ext uri="{0D108BD9-81ED-4DB2-BD59-A6C34878D82A}">
+                    <a16:rowId xmlns:a16="http://schemas.microsoft.com/office/drawing/2014/main" val="1077954733"/>
+                  </a:ext>
+                </a:extLst>
+              </a:tr>
+              <a:tr h="344178">
+                <a:tc>
+                  <a:txBody>
+                    <a:bodyPr/>
+                    <a:lstStyle/>
+                    <a:p>
+                      <a:r>
+                        <a:rPr lang="en-US" dirty="0"/>
+                        <a:t>16</a:t>
+                      </a:r>
+                    </a:p>
+                  </a:txBody>
+                  <a:tcPr/>
+                </a:tc>
+                <a:tc>
+                  <a:txBody>
+                    <a:bodyPr/>
+                    <a:lstStyle/>
+                    <a:p>
+                      <a:r>
+                        <a:rPr lang="en-US" dirty="0"/>
+                        <a:t>15</a:t>
+                      </a:r>
+                    </a:p>
+                  </a:txBody>
+                  <a:tcPr/>
+                </a:tc>
+                <a:tc>
+                  <a:txBody>
+                    <a:bodyPr/>
+                    <a:lstStyle/>
+                    <a:p>
+                      <a:r>
+                        <a:rPr lang="en-US" dirty="0"/>
+                        <a:t>15</a:t>
+                      </a:r>
+                    </a:p>
+                  </a:txBody>
+                  <a:tcPr/>
+                </a:tc>
+                <a:tc>
+                  <a:txBody>
+                    <a:bodyPr/>
+                    <a:lstStyle/>
+                    <a:p>
+                      <a:r>
+                        <a:rPr lang="en-US" dirty="0"/>
+                        <a:t>13</a:t>
+                      </a:r>
+                    </a:p>
+                  </a:txBody>
+                  <a:tcPr/>
+                </a:tc>
+                <a:extLst>
+                  <a:ext uri="{0D108BD9-81ED-4DB2-BD59-A6C34878D82A}">
+                    <a16:rowId xmlns:a16="http://schemas.microsoft.com/office/drawing/2014/main" val="4270926061"/>
+                  </a:ext>
+                </a:extLst>
+              </a:tr>
+            </a:tbl>
+          </a:graphicData>
+        </a:graphic>
+      </p:graphicFrame>
+      <p:graphicFrame>
+        <p:nvGraphicFramePr>
+          <p:cNvPr id="9" name="Table 8">
+            <a:extLst>
+              <a:ext uri="{FF2B5EF4-FFF2-40B4-BE49-F238E27FC236}">
+                <a16:creationId xmlns:a16="http://schemas.microsoft.com/office/drawing/2014/main" id="{63820BFF-D0A1-B2DF-A909-777DAC76B9BA}"/>
+              </a:ext>
+            </a:extLst>
+          </p:cNvPr>
+          <p:cNvGraphicFramePr>
+            <a:graphicFrameLocks noGrp="1"/>
+          </p:cNvGraphicFramePr>
+          <p:nvPr>
+            <p:extLst>
+              <p:ext uri="{D42A27DB-BD31-4B8C-83A1-F6EECF244321}">
+                <p14:modId xmlns:p14="http://schemas.microsoft.com/office/powerpoint/2010/main" val="1897050131"/>
+              </p:ext>
+            </p:extLst>
+          </p:nvPr>
+        </p:nvGraphicFramePr>
+        <p:xfrm>
+          <a:off x="4200089" y="4690268"/>
+          <a:ext cx="1963024" cy="1463040"/>
+        </p:xfrm>
+        <a:graphic>
+          <a:graphicData uri="http://schemas.openxmlformats.org/drawingml/2006/table">
+            <a:tbl>
+              <a:tblPr firstRow="1" bandRow="1">
+                <a:tableStyleId>{5940675A-B579-460E-94D1-54222C63F5DA}</a:tableStyleId>
+              </a:tblPr>
+              <a:tblGrid>
+                <a:gridCol w="490756">
+                  <a:extLst>
+                    <a:ext uri="{9D8B030D-6E8A-4147-A177-3AD203B41FA5}">
+                      <a16:colId xmlns:a16="http://schemas.microsoft.com/office/drawing/2014/main" val="3637275985"/>
+                    </a:ext>
+                  </a:extLst>
+                </a:gridCol>
+                <a:gridCol w="490756">
+                  <a:extLst>
+                    <a:ext uri="{9D8B030D-6E8A-4147-A177-3AD203B41FA5}">
+                      <a16:colId xmlns:a16="http://schemas.microsoft.com/office/drawing/2014/main" val="3707909197"/>
+                    </a:ext>
+                  </a:extLst>
+                </a:gridCol>
+                <a:gridCol w="490756">
+                  <a:extLst>
+                    <a:ext uri="{9D8B030D-6E8A-4147-A177-3AD203B41FA5}">
+                      <a16:colId xmlns:a16="http://schemas.microsoft.com/office/drawing/2014/main" val="356601508"/>
+                    </a:ext>
+                  </a:extLst>
+                </a:gridCol>
+                <a:gridCol w="490756">
+                  <a:extLst>
+                    <a:ext uri="{9D8B030D-6E8A-4147-A177-3AD203B41FA5}">
+                      <a16:colId xmlns:a16="http://schemas.microsoft.com/office/drawing/2014/main" val="1255770336"/>
+                    </a:ext>
+                  </a:extLst>
+                </a:gridCol>
+              </a:tblGrid>
+              <a:tr h="344178">
+                <a:tc>
+                  <a:txBody>
+                    <a:bodyPr/>
+                    <a:lstStyle/>
+                    <a:p>
+                      <a:r>
+                        <a:rPr lang="en-US" dirty="0"/>
+                        <a:t>1</a:t>
+                      </a:r>
+                    </a:p>
+                  </a:txBody>
+                  <a:tcPr/>
+                </a:tc>
+                <a:tc>
+                  <a:txBody>
+                    <a:bodyPr/>
+                    <a:lstStyle/>
+                    <a:p>
+                      <a:r>
+                        <a:rPr lang="en-US" dirty="0"/>
+                        <a:t>2</a:t>
+                      </a:r>
+                    </a:p>
+                  </a:txBody>
+                  <a:tcPr/>
+                </a:tc>
+                <a:tc>
+                  <a:txBody>
+                    <a:bodyPr/>
+                    <a:lstStyle/>
+                    <a:p>
+                      <a:r>
+                        <a:rPr lang="en-US" dirty="0"/>
+                        <a:t>3</a:t>
+                      </a:r>
+                    </a:p>
+                  </a:txBody>
+                  <a:tcPr/>
+                </a:tc>
+                <a:tc>
+                  <a:txBody>
+                    <a:bodyPr/>
+                    <a:lstStyle/>
+                    <a:p>
+                      <a:r>
+                        <a:rPr lang="en-US" dirty="0"/>
+                        <a:t>4</a:t>
+                      </a:r>
+                    </a:p>
+                  </a:txBody>
+                  <a:tcPr/>
+                </a:tc>
+                <a:extLst>
+                  <a:ext uri="{0D108BD9-81ED-4DB2-BD59-A6C34878D82A}">
+                    <a16:rowId xmlns:a16="http://schemas.microsoft.com/office/drawing/2014/main" val="1660418042"/>
+                  </a:ext>
+                </a:extLst>
+              </a:tr>
+              <a:tr h="344178">
+                <a:tc>
+                  <a:txBody>
+                    <a:bodyPr/>
+                    <a:lstStyle/>
+                    <a:p>
+                      <a:r>
+                        <a:rPr lang="en-US" dirty="0"/>
+                        <a:t>12</a:t>
+                      </a:r>
+                    </a:p>
+                  </a:txBody>
+                  <a:tcPr/>
+                </a:tc>
+                <a:tc>
+                  <a:txBody>
+                    <a:bodyPr/>
+                    <a:lstStyle/>
+                    <a:p>
+                      <a:r>
+                        <a:rPr lang="en-US" dirty="0"/>
+                        <a:t>13</a:t>
+                      </a:r>
+                    </a:p>
+                  </a:txBody>
+                  <a:tcPr/>
+                </a:tc>
+                <a:tc>
+                  <a:txBody>
+                    <a:bodyPr/>
+                    <a:lstStyle/>
+                    <a:p>
+                      <a:r>
+                        <a:rPr lang="en-US" dirty="0"/>
+                        <a:t>14</a:t>
+                      </a:r>
+                    </a:p>
+                  </a:txBody>
+                  <a:tcPr/>
+                </a:tc>
+                <a:tc>
+                  <a:txBody>
+                    <a:bodyPr/>
+                    <a:lstStyle/>
+                    <a:p>
+                      <a:r>
+                        <a:rPr lang="en-US" dirty="0"/>
+                        <a:t>5</a:t>
+                      </a:r>
+                    </a:p>
+                  </a:txBody>
+                  <a:tcPr/>
+                </a:tc>
+                <a:extLst>
+                  <a:ext uri="{0D108BD9-81ED-4DB2-BD59-A6C34878D82A}">
+                    <a16:rowId xmlns:a16="http://schemas.microsoft.com/office/drawing/2014/main" val="1749589920"/>
+                  </a:ext>
+                </a:extLst>
+              </a:tr>
+              <a:tr h="344178">
+                <a:tc>
+                  <a:txBody>
+                    <a:bodyPr/>
+                    <a:lstStyle/>
+                    <a:p>
+                      <a:r>
+                        <a:rPr lang="en-US" dirty="0"/>
+                        <a:t>11</a:t>
+                      </a:r>
+                    </a:p>
+                  </a:txBody>
+                  <a:tcPr/>
+                </a:tc>
+                <a:tc>
+                  <a:txBody>
+                    <a:bodyPr/>
+                    <a:lstStyle/>
+                    <a:p>
+                      <a:r>
+                        <a:rPr lang="en-US" dirty="0"/>
+                        <a:t>16</a:t>
+                      </a:r>
+                    </a:p>
+                  </a:txBody>
+                  <a:tcPr/>
+                </a:tc>
+                <a:tc>
+                  <a:txBody>
+                    <a:bodyPr/>
+                    <a:lstStyle/>
+                    <a:p>
+                      <a:r>
+                        <a:rPr lang="en-US" dirty="0"/>
+                        <a:t>15</a:t>
+                      </a:r>
+                    </a:p>
+                  </a:txBody>
+                  <a:tcPr/>
+                </a:tc>
+                <a:tc>
+                  <a:txBody>
+                    <a:bodyPr/>
+                    <a:lstStyle/>
+                    <a:p>
+                      <a:r>
+                        <a:rPr lang="en-US" dirty="0"/>
+                        <a:t>6</a:t>
+                      </a:r>
+                    </a:p>
+                  </a:txBody>
+                  <a:tcPr/>
+                </a:tc>
+                <a:extLst>
+                  <a:ext uri="{0D108BD9-81ED-4DB2-BD59-A6C34878D82A}">
+                    <a16:rowId xmlns:a16="http://schemas.microsoft.com/office/drawing/2014/main" val="1077954733"/>
+                  </a:ext>
+                </a:extLst>
+              </a:tr>
+              <a:tr h="344178">
+                <a:tc>
+                  <a:txBody>
+                    <a:bodyPr/>
+                    <a:lstStyle/>
+                    <a:p>
+                      <a:r>
+                        <a:rPr lang="en-US" dirty="0"/>
+                        <a:t>10</a:t>
+                      </a:r>
+                    </a:p>
+                  </a:txBody>
+                  <a:tcPr/>
+                </a:tc>
+                <a:tc>
+                  <a:txBody>
+                    <a:bodyPr/>
+                    <a:lstStyle/>
+                    <a:p>
+                      <a:r>
+                        <a:rPr lang="en-US" dirty="0"/>
+                        <a:t>9</a:t>
+                      </a:r>
+                    </a:p>
+                  </a:txBody>
+                  <a:tcPr/>
+                </a:tc>
+                <a:tc>
+                  <a:txBody>
+                    <a:bodyPr/>
+                    <a:lstStyle/>
+                    <a:p>
+                      <a:r>
+                        <a:rPr lang="en-US" dirty="0"/>
+                        <a:t>8</a:t>
+                      </a:r>
+                    </a:p>
+                  </a:txBody>
+                  <a:tcPr/>
+                </a:tc>
+                <a:tc>
+                  <a:txBody>
+                    <a:bodyPr/>
+                    <a:lstStyle/>
+                    <a:p>
+                      <a:r>
+                        <a:rPr lang="en-US" dirty="0"/>
+                        <a:t>7</a:t>
+                      </a:r>
+                    </a:p>
+                  </a:txBody>
+                  <a:tcPr/>
+                </a:tc>
+                <a:extLst>
+                  <a:ext uri="{0D108BD9-81ED-4DB2-BD59-A6C34878D82A}">
+                    <a16:rowId xmlns:a16="http://schemas.microsoft.com/office/drawing/2014/main" val="4270926061"/>
+                  </a:ext>
+                </a:extLst>
+              </a:tr>
+            </a:tbl>
+          </a:graphicData>
+        </a:graphic>
+      </p:graphicFrame>
+    </p:spTree>
+    <p:extLst>
+      <p:ext uri="{BB962C8B-B14F-4D97-AF65-F5344CB8AC3E}">
+        <p14:creationId xmlns:p14="http://schemas.microsoft.com/office/powerpoint/2010/main" val="687486807"/>
       </p:ext>
     </p:extLst>
   </p:cSld>
@@ -33433,7 +38940,7 @@
                       <a:rPr lang="en-US" b="0" i="1" smtClean="0">
                         <a:latin typeface="Cambria Math" panose="02040503050406030204" pitchFamily="18" charset="0"/>
                       </a:rPr>
-                      <m:t>𝐵</m:t>
+                      <m:t>𝐴</m:t>
                     </m:r>
                     <m:r>
                       <a:rPr lang="en-US" b="0" i="1" smtClean="0">
@@ -37618,12 +43125,6 @@
                     </m:d>
                   </m:oMath>
                 </a14:m>
-                <a:endParaRPr lang="en-US" i="1" dirty="0">
-                  <a:latin typeface="Cambria Math" panose="02040503050406030204" pitchFamily="18" charset="0"/>
-                </a:endParaRPr>
-              </a:p>
-              <a:p>
-                <a:pPr lvl="2"/>
                 <a:endParaRPr lang="en-US" i="1" dirty="0">
                   <a:latin typeface="Cambria Math" panose="02040503050406030204" pitchFamily="18" charset="0"/>
                 </a:endParaRPr>
